--- a/cross_encoder/thesis/Thesis_presentation.pptx
+++ b/cross_encoder/thesis/Thesis_presentation.pptx
@@ -5,10 +5,10 @@
     <p:sldMasterId id="2147483672" r:id="rId4"/>
   </p:sldMasterIdLst>
   <p:notesMasterIdLst>
-    <p:notesMasterId r:id="rId17"/>
+    <p:notesMasterId r:id="rId22"/>
   </p:notesMasterIdLst>
   <p:handoutMasterIdLst>
-    <p:handoutMasterId r:id="rId18"/>
+    <p:handoutMasterId r:id="rId23"/>
   </p:handoutMasterIdLst>
   <p:sldIdLst>
     <p:sldId id="256" r:id="rId5"/>
@@ -19,10 +19,15 @@
     <p:sldId id="267" r:id="rId10"/>
     <p:sldId id="270" r:id="rId11"/>
     <p:sldId id="271" r:id="rId12"/>
-    <p:sldId id="272" r:id="rId13"/>
-    <p:sldId id="259" r:id="rId14"/>
-    <p:sldId id="268" r:id="rId15"/>
-    <p:sldId id="269" r:id="rId16"/>
+    <p:sldId id="273" r:id="rId13"/>
+    <p:sldId id="272" r:id="rId14"/>
+    <p:sldId id="275" r:id="rId15"/>
+    <p:sldId id="276" r:id="rId16"/>
+    <p:sldId id="277" r:id="rId17"/>
+    <p:sldId id="278" r:id="rId18"/>
+    <p:sldId id="269" r:id="rId19"/>
+    <p:sldId id="259" r:id="rId20"/>
+    <p:sldId id="268" r:id="rId21"/>
   </p:sldIdLst>
   <p:sldSz cx="12192000" cy="6858000"/>
   <p:notesSz cx="6858000" cy="9144000"/>
@@ -1621,7 +1626,7 @@
           <a:p>
             <a:fld id="{E6AEB063-7F11-4E3B-BA52-07405B1C2D95}" type="slidenum">
               <a:rPr lang="en-US" smtClean="0"/>
-              <a:t>10</a:t>
+              <a:t>16</a:t>
             </a:fld>
             <a:endParaRPr lang="en-US" dirty="0"/>
           </a:p>
@@ -1712,7 +1717,7 @@
           <a:p>
             <a:fld id="{E6AEB063-7F11-4E3B-BA52-07405B1C2D95}" type="slidenum">
               <a:rPr lang="en-US" smtClean="0"/>
-              <a:t>11</a:t>
+              <a:t>17</a:t>
             </a:fld>
             <a:endParaRPr lang="en-US" dirty="0"/>
           </a:p>
@@ -9009,6 +9014,7165 @@
       </p:grpSpPr>
       <p:sp>
         <p:nvSpPr>
+          <p:cNvPr id="3" name="Title 2">
+            <a:extLst>
+              <a:ext uri="{FF2B5EF4-FFF2-40B4-BE49-F238E27FC236}">
+                <a16:creationId xmlns:a16="http://schemas.microsoft.com/office/drawing/2014/main" id="{DE089F23-6A5A-9A27-D727-B577A104164E}"/>
+              </a:ext>
+            </a:extLst>
+          </p:cNvPr>
+          <p:cNvSpPr>
+            <a:spLocks noGrp="1"/>
+          </p:cNvSpPr>
+          <p:nvPr>
+            <p:ph type="title"/>
+          </p:nvPr>
+        </p:nvSpPr>
+        <p:spPr>
+          <a:xfrm>
+            <a:off x="582006" y="479592"/>
+            <a:ext cx="5399343" cy="720033"/>
+          </a:xfrm>
+          <a:solidFill>
+            <a:schemeClr val="bg2"/>
+          </a:solidFill>
+          <a:ln>
+            <a:noFill/>
+          </a:ln>
+          <a:effectLst>
+            <a:outerShdw blurRad="50800" dist="38100" dir="16200000" rotWithShape="0">
+              <a:prstClr val="black">
+                <a:alpha val="40000"/>
+              </a:prstClr>
+            </a:outerShdw>
+          </a:effectLst>
+        </p:spPr>
+        <p:txBody>
+          <a:bodyPr/>
+          <a:lstStyle/>
+          <a:p>
+            <a:r>
+              <a:rPr lang="en-GB" dirty="0">
+                <a:latin typeface="Barlow SemiBold" panose="00000700000000000000" pitchFamily="2" charset="0"/>
+              </a:rPr>
+              <a:t>Experimental Setup</a:t>
+            </a:r>
+            <a:endParaRPr lang="en-IN" dirty="0">
+              <a:latin typeface="Barlow SemiBold" panose="00000700000000000000" pitchFamily="2" charset="0"/>
+            </a:endParaRPr>
+          </a:p>
+        </p:txBody>
+      </p:sp>
+      <p:sp>
+        <p:nvSpPr>
+          <p:cNvPr id="4" name="Text Placeholder 3">
+            <a:extLst>
+              <a:ext uri="{FF2B5EF4-FFF2-40B4-BE49-F238E27FC236}">
+                <a16:creationId xmlns:a16="http://schemas.microsoft.com/office/drawing/2014/main" id="{D3135813-3D43-E29E-81C9-5FD7F79E6710}"/>
+              </a:ext>
+            </a:extLst>
+          </p:cNvPr>
+          <p:cNvSpPr>
+            <a:spLocks noGrp="1"/>
+          </p:cNvSpPr>
+          <p:nvPr>
+            <p:ph type="body" sz="half" idx="2"/>
+          </p:nvPr>
+        </p:nvSpPr>
+        <p:spPr>
+          <a:xfrm>
+            <a:off x="741512" y="1635853"/>
+            <a:ext cx="10708975" cy="5044557"/>
+          </a:xfrm>
+        </p:spPr>
+        <p:txBody>
+          <a:bodyPr>
+            <a:normAutofit fontScale="92500" lnSpcReduction="20000"/>
+          </a:bodyPr>
+          <a:lstStyle/>
+          <a:p>
+            <a:r>
+              <a:rPr lang="en-IN" sz="3000" b="1" dirty="0">
+                <a:latin typeface="Barlow Medium" panose="00000600000000000000" pitchFamily="2" charset="0"/>
+              </a:rPr>
+              <a:t>Dataset Configuration</a:t>
+            </a:r>
+          </a:p>
+          <a:p>
+            <a:pPr lvl="1"/>
+            <a:r>
+              <a:rPr lang="en-IN" sz="1800" b="1" dirty="0">
+                <a:latin typeface="Barlow Medium" panose="00000600000000000000" pitchFamily="2" charset="0"/>
+              </a:rPr>
+              <a:t>T</a:t>
+            </a:r>
+            <a:r>
+              <a:rPr lang="en-IN" sz="1800" b="1" dirty="0">
+                <a:latin typeface="Barlow" panose="00000500000000000000" pitchFamily="2" charset="0"/>
+              </a:rPr>
+              <a:t>raining:</a:t>
+            </a:r>
+            <a:r>
+              <a:rPr lang="en-IN" sz="1800" dirty="0">
+                <a:latin typeface="Barlow" panose="00000500000000000000" pitchFamily="2" charset="0"/>
+              </a:rPr>
+              <a:t> MS MARCO Passage Ranking (~500K query-passage pairs)</a:t>
+            </a:r>
+          </a:p>
+          <a:p>
+            <a:pPr lvl="1"/>
+            <a:r>
+              <a:rPr lang="en-IN" sz="1800" b="1" dirty="0">
+                <a:latin typeface="Barlow" panose="00000500000000000000" pitchFamily="2" charset="0"/>
+              </a:rPr>
+              <a:t>Evaluation:</a:t>
+            </a:r>
+            <a:r>
+              <a:rPr lang="en-IN" sz="1800" dirty="0">
+                <a:latin typeface="Barlow" panose="00000500000000000000" pitchFamily="2" charset="0"/>
+              </a:rPr>
+              <a:t> TREC DL 2019 (43 queries with comprehensive relevance judgments)</a:t>
+            </a:r>
+          </a:p>
+          <a:p>
+            <a:pPr lvl="1"/>
+            <a:r>
+              <a:rPr lang="en-IN" sz="1800" b="1" dirty="0">
+                <a:latin typeface="Barlow" panose="00000500000000000000" pitchFamily="2" charset="0"/>
+              </a:rPr>
+              <a:t>Metrics:</a:t>
+            </a:r>
+            <a:r>
+              <a:rPr lang="en-IN" sz="1800" dirty="0">
+                <a:latin typeface="Barlow" panose="00000500000000000000" pitchFamily="2" charset="0"/>
+              </a:rPr>
+              <a:t> NDCG@10, MAP, MRR@10, Recall@10, R-Precision, P@10</a:t>
+            </a:r>
+          </a:p>
+          <a:p>
+            <a:r>
+              <a:rPr lang="en-IN" sz="3000" b="1" dirty="0">
+                <a:latin typeface="Barlow Medium" panose="00000600000000000000" pitchFamily="2" charset="0"/>
+              </a:rPr>
+              <a:t>Infrastructure</a:t>
+            </a:r>
+          </a:p>
+          <a:p>
+            <a:pPr lvl="1"/>
+            <a:r>
+              <a:rPr lang="en-IN" sz="1800" b="1" dirty="0">
+                <a:latin typeface="Barlow" panose="00000500000000000000" pitchFamily="2" charset="0"/>
+              </a:rPr>
+              <a:t>Platform:</a:t>
+            </a:r>
+            <a:r>
+              <a:rPr lang="en-IN" sz="1800" dirty="0">
+                <a:latin typeface="Barlow" panose="00000500000000000000" pitchFamily="2" charset="0"/>
+              </a:rPr>
+              <a:t> Modal cloud computing</a:t>
+            </a:r>
+          </a:p>
+          <a:p>
+            <a:pPr lvl="1"/>
+            <a:r>
+              <a:rPr lang="en-IN" sz="1800" b="1" dirty="0">
+                <a:latin typeface="Barlow" panose="00000500000000000000" pitchFamily="2" charset="0"/>
+              </a:rPr>
+              <a:t>Hardware:</a:t>
+            </a:r>
+            <a:r>
+              <a:rPr lang="en-IN" sz="1800" dirty="0">
+                <a:latin typeface="Barlow" panose="00000500000000000000" pitchFamily="2" charset="0"/>
+              </a:rPr>
+              <a:t> 3 × NVIDIA L40S GPUs</a:t>
+            </a:r>
+          </a:p>
+          <a:p>
+            <a:pPr lvl="1"/>
+            <a:r>
+              <a:rPr lang="en-IN" sz="1800" b="1" dirty="0">
+                <a:latin typeface="Barlow" panose="00000500000000000000" pitchFamily="2" charset="0"/>
+              </a:rPr>
+              <a:t>Monitoring:</a:t>
+            </a:r>
+            <a:r>
+              <a:rPr lang="en-IN" sz="1800" dirty="0">
+                <a:latin typeface="Barlow" panose="00000500000000000000" pitchFamily="2" charset="0"/>
+              </a:rPr>
+              <a:t> Weights &amp; Biases</a:t>
+            </a:r>
+          </a:p>
+          <a:p>
+            <a:pPr lvl="1"/>
+            <a:r>
+              <a:rPr lang="en-IN" sz="1800" b="1" dirty="0">
+                <a:latin typeface="Barlow" panose="00000500000000000000" pitchFamily="2" charset="0"/>
+              </a:rPr>
+              <a:t>Training:</a:t>
+            </a:r>
+            <a:r>
+              <a:rPr lang="en-IN" sz="1800" dirty="0">
+                <a:latin typeface="Barlow" panose="00000500000000000000" pitchFamily="2" charset="0"/>
+              </a:rPr>
+              <a:t> 3 epochs per configuration</a:t>
+            </a:r>
+          </a:p>
+          <a:p>
+            <a:r>
+              <a:rPr lang="en-IN" sz="3000" b="1" dirty="0">
+                <a:latin typeface="Barlow Medium" panose="00000600000000000000" pitchFamily="2" charset="0"/>
+              </a:rPr>
+              <a:t>Experimental Design</a:t>
+            </a:r>
+          </a:p>
+          <a:p>
+            <a:pPr lvl="1"/>
+            <a:r>
+              <a:rPr lang="en-IN" sz="1800" b="1" dirty="0">
+                <a:latin typeface="Barlow" panose="00000500000000000000" pitchFamily="2" charset="0"/>
+              </a:rPr>
+              <a:t>Total Configurations:</a:t>
+            </a:r>
+            <a:r>
+              <a:rPr lang="en-IN" sz="1800" dirty="0">
+                <a:latin typeface="Barlow" panose="00000500000000000000" pitchFamily="2" charset="0"/>
+              </a:rPr>
+              <a:t> 6 (3 models × 2 optimizers)</a:t>
+            </a:r>
+          </a:p>
+          <a:p>
+            <a:pPr lvl="1"/>
+            <a:r>
+              <a:rPr lang="en-IN" sz="1800" b="1" dirty="0">
+                <a:latin typeface="Barlow" panose="00000500000000000000" pitchFamily="2" charset="0"/>
+              </a:rPr>
+              <a:t>Controlled Variables:</a:t>
+            </a:r>
+            <a:r>
+              <a:rPr lang="en-IN" sz="1800" dirty="0">
+                <a:latin typeface="Barlow" panose="00000500000000000000" pitchFamily="2" charset="0"/>
+              </a:rPr>
+              <a:t> Batch size, training steps, evaluation frequency</a:t>
+            </a:r>
+          </a:p>
+          <a:p>
+            <a:pPr lvl="1"/>
+            <a:r>
+              <a:rPr lang="en-IN" sz="1800" b="1" dirty="0">
+                <a:latin typeface="Barlow" panose="00000500000000000000" pitchFamily="2" charset="0"/>
+              </a:rPr>
+              <a:t>Variable Parameters:</a:t>
+            </a:r>
+            <a:r>
+              <a:rPr lang="en-IN" sz="1800" dirty="0">
+                <a:latin typeface="Barlow" panose="00000500000000000000" pitchFamily="2" charset="0"/>
+              </a:rPr>
+              <a:t> Learning rates (2e-5 standard, 2e-6 for ModernBERT+Lion)</a:t>
+            </a:r>
+          </a:p>
+        </p:txBody>
+      </p:sp>
+    </p:spTree>
+    <p:extLst>
+      <p:ext uri="{BB962C8B-B14F-4D97-AF65-F5344CB8AC3E}">
+        <p14:creationId xmlns:p14="http://schemas.microsoft.com/office/powerpoint/2010/main" val="503350313"/>
+      </p:ext>
+    </p:extLst>
+  </p:cSld>
+  <p:clrMapOvr>
+    <a:masterClrMapping/>
+  </p:clrMapOvr>
+</p:sld>
+</file>
+
+<file path=ppt/slides/slide11.xml><?xml version="1.0" encoding="utf-8"?>
+<p:sld xmlns:a="http://schemas.openxmlformats.org/drawingml/2006/main" xmlns:r="http://schemas.openxmlformats.org/officeDocument/2006/relationships" xmlns:p="http://schemas.openxmlformats.org/presentationml/2006/main">
+  <p:cSld>
+    <p:spTree>
+      <p:nvGrpSpPr>
+        <p:cNvPr id="1" name=""/>
+        <p:cNvGrpSpPr/>
+        <p:nvPr/>
+      </p:nvGrpSpPr>
+      <p:grpSpPr>
+        <a:xfrm>
+          <a:off x="0" y="0"/>
+          <a:ext cx="0" cy="0"/>
+          <a:chOff x="0" y="0"/>
+          <a:chExt cx="0" cy="0"/>
+        </a:xfrm>
+      </p:grpSpPr>
+      <p:sp>
+        <p:nvSpPr>
+          <p:cNvPr id="5" name="TextBox 4">
+            <a:extLst>
+              <a:ext uri="{FF2B5EF4-FFF2-40B4-BE49-F238E27FC236}">
+                <a16:creationId xmlns:a16="http://schemas.microsoft.com/office/drawing/2014/main" id="{E4E59D8A-8F44-F913-BF57-5EAD1721DC70}"/>
+              </a:ext>
+            </a:extLst>
+          </p:cNvPr>
+          <p:cNvSpPr txBox="1"/>
+          <p:nvPr/>
+        </p:nvSpPr>
+        <p:spPr>
+          <a:xfrm>
+            <a:off x="669471" y="734786"/>
+            <a:ext cx="3002745" cy="707886"/>
+          </a:xfrm>
+          <a:prstGeom prst="rect">
+            <a:avLst/>
+          </a:prstGeom>
+          <a:noFill/>
+        </p:spPr>
+        <p:txBody>
+          <a:bodyPr wrap="none" rtlCol="0">
+            <a:spAutoFit/>
+          </a:bodyPr>
+          <a:lstStyle/>
+          <a:p>
+            <a:r>
+              <a:rPr lang="en-GB" sz="4000" dirty="0">
+                <a:solidFill>
+                  <a:schemeClr val="bg1"/>
+                </a:solidFill>
+                <a:latin typeface="Barlow Medium" panose="00000600000000000000" pitchFamily="2" charset="0"/>
+              </a:rPr>
+              <a:t>Main Results</a:t>
+            </a:r>
+            <a:endParaRPr lang="en-IN" sz="4000" dirty="0">
+              <a:solidFill>
+                <a:schemeClr val="bg1"/>
+              </a:solidFill>
+              <a:latin typeface="Barlow Medium" panose="00000600000000000000" pitchFamily="2" charset="0"/>
+            </a:endParaRPr>
+          </a:p>
+        </p:txBody>
+      </p:sp>
+      <p:graphicFrame>
+        <p:nvGraphicFramePr>
+          <p:cNvPr id="6" name="Table 5">
+            <a:extLst>
+              <a:ext uri="{FF2B5EF4-FFF2-40B4-BE49-F238E27FC236}">
+                <a16:creationId xmlns:a16="http://schemas.microsoft.com/office/drawing/2014/main" id="{441E21B4-50AA-0113-AF6D-B8F5CA9CE0B4}"/>
+              </a:ext>
+            </a:extLst>
+          </p:cNvPr>
+          <p:cNvGraphicFramePr>
+            <a:graphicFrameLocks noGrp="1"/>
+          </p:cNvGraphicFramePr>
+          <p:nvPr>
+            <p:extLst>
+              <p:ext uri="{D42A27DB-BD31-4B8C-83A1-F6EECF244321}">
+                <p14:modId xmlns:p14="http://schemas.microsoft.com/office/powerpoint/2010/main" val="2709341113"/>
+              </p:ext>
+            </p:extLst>
+          </p:nvPr>
+        </p:nvGraphicFramePr>
+        <p:xfrm>
+          <a:off x="930000" y="2405853"/>
+          <a:ext cx="10332000" cy="3059998"/>
+        </p:xfrm>
+        <a:graphic>
+          <a:graphicData uri="http://schemas.openxmlformats.org/drawingml/2006/table">
+            <a:tbl>
+              <a:tblPr firstRow="1" bandRow="1">
+                <a:tableStyleId>{69C7853C-536D-4A76-A0AE-DD22124D55A5}</a:tableStyleId>
+              </a:tblPr>
+              <a:tblGrid>
+                <a:gridCol w="1476000">
+                  <a:extLst>
+                    <a:ext uri="{9D8B030D-6E8A-4147-A177-3AD203B41FA5}">
+                      <a16:colId xmlns:a16="http://schemas.microsoft.com/office/drawing/2014/main" val="1585879530"/>
+                    </a:ext>
+                  </a:extLst>
+                </a:gridCol>
+                <a:gridCol w="1476000">
+                  <a:extLst>
+                    <a:ext uri="{9D8B030D-6E8A-4147-A177-3AD203B41FA5}">
+                      <a16:colId xmlns:a16="http://schemas.microsoft.com/office/drawing/2014/main" val="1389322177"/>
+                    </a:ext>
+                  </a:extLst>
+                </a:gridCol>
+                <a:gridCol w="1476000">
+                  <a:extLst>
+                    <a:ext uri="{9D8B030D-6E8A-4147-A177-3AD203B41FA5}">
+                      <a16:colId xmlns:a16="http://schemas.microsoft.com/office/drawing/2014/main" val="1757895171"/>
+                    </a:ext>
+                  </a:extLst>
+                </a:gridCol>
+                <a:gridCol w="1476000">
+                  <a:extLst>
+                    <a:ext uri="{9D8B030D-6E8A-4147-A177-3AD203B41FA5}">
+                      <a16:colId xmlns:a16="http://schemas.microsoft.com/office/drawing/2014/main" val="1926697050"/>
+                    </a:ext>
+                  </a:extLst>
+                </a:gridCol>
+                <a:gridCol w="1476000">
+                  <a:extLst>
+                    <a:ext uri="{9D8B030D-6E8A-4147-A177-3AD203B41FA5}">
+                      <a16:colId xmlns:a16="http://schemas.microsoft.com/office/drawing/2014/main" val="1594094915"/>
+                    </a:ext>
+                  </a:extLst>
+                </a:gridCol>
+                <a:gridCol w="1476000">
+                  <a:extLst>
+                    <a:ext uri="{9D8B030D-6E8A-4147-A177-3AD203B41FA5}">
+                      <a16:colId xmlns:a16="http://schemas.microsoft.com/office/drawing/2014/main" val="2607518578"/>
+                    </a:ext>
+                  </a:extLst>
+                </a:gridCol>
+                <a:gridCol w="1476000">
+                  <a:extLst>
+                    <a:ext uri="{9D8B030D-6E8A-4147-A177-3AD203B41FA5}">
+                      <a16:colId xmlns:a16="http://schemas.microsoft.com/office/drawing/2014/main" val="1666691909"/>
+                    </a:ext>
+                  </a:extLst>
+                </a:gridCol>
+              </a:tblGrid>
+              <a:tr h="465892">
+                <a:tc>
+                  <a:txBody>
+                    <a:bodyPr/>
+                    <a:lstStyle/>
+                    <a:p>
+                      <a:pPr algn="ctr"/>
+                      <a:r>
+                        <a:rPr lang="en-IN" sz="2200" b="1" dirty="0">
+                          <a:solidFill>
+                            <a:srgbClr val="FFFFFF"/>
+                          </a:solidFill>
+                          <a:effectLst/>
+                          <a:latin typeface="Barlow SemiBold" panose="00000700000000000000" pitchFamily="2" charset="0"/>
+                        </a:rPr>
+                        <a:t>Model</a:t>
+                      </a:r>
+                    </a:p>
+                  </a:txBody>
+                  <a:tcPr anchor="ctr">
+                    <a:lnL w="12700" cap="flat" cmpd="sng" algn="ctr">
+                      <a:solidFill>
+                        <a:schemeClr val="tx1"/>
+                      </a:solidFill>
+                      <a:prstDash val="solid"/>
+                      <a:round/>
+                      <a:headEnd type="none" w="med" len="med"/>
+                      <a:tailEnd type="none" w="med" len="med"/>
+                    </a:lnL>
+                    <a:lnB w="12700" cap="flat" cmpd="sng" algn="ctr">
+                      <a:solidFill>
+                        <a:schemeClr val="tx1"/>
+                      </a:solidFill>
+                      <a:prstDash val="solid"/>
+                      <a:round/>
+                      <a:headEnd type="none" w="med" len="med"/>
+                      <a:tailEnd type="none" w="med" len="med"/>
+                    </a:lnB>
+                    <a:solidFill>
+                      <a:srgbClr val="0070C0"/>
+                    </a:solidFill>
+                  </a:tcPr>
+                </a:tc>
+                <a:tc>
+                  <a:txBody>
+                    <a:bodyPr/>
+                    <a:lstStyle/>
+                    <a:p>
+                      <a:pPr algn="ctr"/>
+                      <a:r>
+                        <a:rPr lang="en-IN" sz="2200" b="1" dirty="0">
+                          <a:solidFill>
+                            <a:srgbClr val="FFFFFF"/>
+                          </a:solidFill>
+                          <a:effectLst/>
+                          <a:latin typeface="Barlow SemiBold" panose="00000700000000000000" pitchFamily="2" charset="0"/>
+                        </a:rPr>
+                        <a:t>Optimizer</a:t>
+                      </a:r>
+                    </a:p>
+                  </a:txBody>
+                  <a:tcPr anchor="ctr">
+                    <a:lnB w="12700" cap="flat" cmpd="sng" algn="ctr">
+                      <a:solidFill>
+                        <a:schemeClr val="tx1"/>
+                      </a:solidFill>
+                      <a:prstDash val="solid"/>
+                      <a:round/>
+                      <a:headEnd type="none" w="med" len="med"/>
+                      <a:tailEnd type="none" w="med" len="med"/>
+                    </a:lnB>
+                    <a:solidFill>
+                      <a:srgbClr val="0070C0"/>
+                    </a:solidFill>
+                  </a:tcPr>
+                </a:tc>
+                <a:tc>
+                  <a:txBody>
+                    <a:bodyPr/>
+                    <a:lstStyle/>
+                    <a:p>
+                      <a:pPr algn="ctr"/>
+                      <a:r>
+                        <a:rPr lang="en-IN" sz="2200" b="1" dirty="0">
+                          <a:solidFill>
+                            <a:srgbClr val="FFFFFF"/>
+                          </a:solidFill>
+                          <a:effectLst/>
+                          <a:latin typeface="Barlow SemiBold" panose="00000700000000000000" pitchFamily="2" charset="0"/>
+                        </a:rPr>
+                        <a:t>NDCG@10</a:t>
+                      </a:r>
+                    </a:p>
+                  </a:txBody>
+                  <a:tcPr anchor="ctr">
+                    <a:lnB w="12700" cap="flat" cmpd="sng" algn="ctr">
+                      <a:solidFill>
+                        <a:schemeClr val="tx1"/>
+                      </a:solidFill>
+                      <a:prstDash val="solid"/>
+                      <a:round/>
+                      <a:headEnd type="none" w="med" len="med"/>
+                      <a:tailEnd type="none" w="med" len="med"/>
+                    </a:lnB>
+                    <a:solidFill>
+                      <a:srgbClr val="0070C0"/>
+                    </a:solidFill>
+                  </a:tcPr>
+                </a:tc>
+                <a:tc>
+                  <a:txBody>
+                    <a:bodyPr/>
+                    <a:lstStyle/>
+                    <a:p>
+                      <a:pPr algn="ctr"/>
+                      <a:r>
+                        <a:rPr lang="en-IN" sz="2200" b="1" dirty="0">
+                          <a:solidFill>
+                            <a:srgbClr val="FFFFFF"/>
+                          </a:solidFill>
+                          <a:effectLst/>
+                          <a:latin typeface="Barlow SemiBold" panose="00000700000000000000" pitchFamily="2" charset="0"/>
+                        </a:rPr>
+                        <a:t>MAP</a:t>
+                      </a:r>
+                    </a:p>
+                  </a:txBody>
+                  <a:tcPr anchor="ctr">
+                    <a:lnB w="12700" cap="flat" cmpd="sng" algn="ctr">
+                      <a:solidFill>
+                        <a:schemeClr val="tx1"/>
+                      </a:solidFill>
+                      <a:prstDash val="solid"/>
+                      <a:round/>
+                      <a:headEnd type="none" w="med" len="med"/>
+                      <a:tailEnd type="none" w="med" len="med"/>
+                    </a:lnB>
+                    <a:solidFill>
+                      <a:srgbClr val="0070C0"/>
+                    </a:solidFill>
+                  </a:tcPr>
+                </a:tc>
+                <a:tc>
+                  <a:txBody>
+                    <a:bodyPr/>
+                    <a:lstStyle/>
+                    <a:p>
+                      <a:pPr algn="ctr"/>
+                      <a:r>
+                        <a:rPr lang="en-IN" sz="2200" b="1" dirty="0">
+                          <a:solidFill>
+                            <a:srgbClr val="FFFFFF"/>
+                          </a:solidFill>
+                          <a:effectLst/>
+                          <a:latin typeface="Barlow SemiBold" panose="00000700000000000000" pitchFamily="2" charset="0"/>
+                        </a:rPr>
+                        <a:t>MRR@10</a:t>
+                      </a:r>
+                    </a:p>
+                  </a:txBody>
+                  <a:tcPr anchor="ctr">
+                    <a:lnB w="12700" cap="flat" cmpd="sng" algn="ctr">
+                      <a:solidFill>
+                        <a:schemeClr val="tx1"/>
+                      </a:solidFill>
+                      <a:prstDash val="solid"/>
+                      <a:round/>
+                      <a:headEnd type="none" w="med" len="med"/>
+                      <a:tailEnd type="none" w="med" len="med"/>
+                    </a:lnB>
+                    <a:solidFill>
+                      <a:srgbClr val="0070C0"/>
+                    </a:solidFill>
+                  </a:tcPr>
+                </a:tc>
+                <a:tc>
+                  <a:txBody>
+                    <a:bodyPr/>
+                    <a:lstStyle/>
+                    <a:p>
+                      <a:pPr algn="ctr"/>
+                      <a:r>
+                        <a:rPr lang="en-IN" sz="2200" b="1" dirty="0">
+                          <a:solidFill>
+                            <a:srgbClr val="FFFFFF"/>
+                          </a:solidFill>
+                          <a:effectLst/>
+                          <a:latin typeface="Barlow SemiBold" panose="00000700000000000000" pitchFamily="2" charset="0"/>
+                        </a:rPr>
+                        <a:t>Recall@10</a:t>
+                      </a:r>
+                    </a:p>
+                  </a:txBody>
+                  <a:tcPr anchor="ctr">
+                    <a:lnB w="12700" cap="flat" cmpd="sng" algn="ctr">
+                      <a:solidFill>
+                        <a:schemeClr val="tx1"/>
+                      </a:solidFill>
+                      <a:prstDash val="solid"/>
+                      <a:round/>
+                      <a:headEnd type="none" w="med" len="med"/>
+                      <a:tailEnd type="none" w="med" len="med"/>
+                    </a:lnB>
+                    <a:solidFill>
+                      <a:srgbClr val="0070C0"/>
+                    </a:solidFill>
+                  </a:tcPr>
+                </a:tc>
+                <a:tc>
+                  <a:txBody>
+                    <a:bodyPr/>
+                    <a:lstStyle/>
+                    <a:p>
+                      <a:pPr algn="ctr"/>
+                      <a:r>
+                        <a:rPr lang="en-IN" sz="2200" b="1" dirty="0">
+                          <a:solidFill>
+                            <a:srgbClr val="FFFFFF"/>
+                          </a:solidFill>
+                          <a:effectLst/>
+                          <a:latin typeface="Barlow SemiBold" panose="00000700000000000000" pitchFamily="2" charset="0"/>
+                        </a:rPr>
+                        <a:t>P@10</a:t>
+                      </a:r>
+                    </a:p>
+                  </a:txBody>
+                  <a:tcPr anchor="ctr">
+                    <a:lnB w="12700" cap="flat" cmpd="sng" algn="ctr">
+                      <a:solidFill>
+                        <a:schemeClr val="tx1"/>
+                      </a:solidFill>
+                      <a:prstDash val="solid"/>
+                      <a:round/>
+                      <a:headEnd type="none" w="med" len="med"/>
+                      <a:tailEnd type="none" w="med" len="med"/>
+                    </a:lnB>
+                    <a:solidFill>
+                      <a:srgbClr val="0070C0"/>
+                    </a:solidFill>
+                  </a:tcPr>
+                </a:tc>
+                <a:extLst>
+                  <a:ext uri="{0D108BD9-81ED-4DB2-BD59-A6C34878D82A}">
+                    <a16:rowId xmlns:a16="http://schemas.microsoft.com/office/drawing/2014/main" val="1133248602"/>
+                  </a:ext>
+                </a:extLst>
+              </a:tr>
+              <a:tr h="432351">
+                <a:tc rowSpan="2">
+                  <a:txBody>
+                    <a:bodyPr/>
+                    <a:lstStyle/>
+                    <a:p>
+                      <a:pPr algn="ctr"/>
+                      <a:r>
+                        <a:rPr lang="en-IN" b="1" dirty="0">
+                          <a:solidFill>
+                            <a:srgbClr val="334155"/>
+                          </a:solidFill>
+                          <a:effectLst/>
+                          <a:latin typeface="Barlow Medium" panose="00000600000000000000" pitchFamily="2" charset="0"/>
+                        </a:rPr>
+                        <a:t>MiniLM</a:t>
+                      </a:r>
+                    </a:p>
+                  </a:txBody>
+                  <a:tcPr anchor="ctr">
+                    <a:lnL w="12700" cap="flat" cmpd="sng" algn="ctr">
+                      <a:solidFill>
+                        <a:schemeClr val="tx1"/>
+                      </a:solidFill>
+                      <a:prstDash val="solid"/>
+                      <a:round/>
+                      <a:headEnd type="none" w="med" len="med"/>
+                      <a:tailEnd type="none" w="med" len="med"/>
+                    </a:lnL>
+                    <a:lnR w="3175" cap="flat" cmpd="sng" algn="ctr">
+                      <a:noFill/>
+                      <a:prstDash val="solid"/>
+                      <a:round/>
+                      <a:headEnd type="none" w="med" len="med"/>
+                      <a:tailEnd type="none" w="med" len="med"/>
+                    </a:lnR>
+                    <a:lnT w="12700" cap="flat" cmpd="sng" algn="ctr">
+                      <a:solidFill>
+                        <a:schemeClr val="tx1"/>
+                      </a:solidFill>
+                      <a:prstDash val="solid"/>
+                      <a:round/>
+                      <a:headEnd type="none" w="med" len="med"/>
+                      <a:tailEnd type="none" w="med" len="med"/>
+                    </a:lnT>
+                    <a:lnB w="3175" cap="flat" cmpd="sng" algn="ctr">
+                      <a:solidFill>
+                        <a:schemeClr val="tx1"/>
+                      </a:solidFill>
+                      <a:prstDash val="solid"/>
+                      <a:round/>
+                      <a:headEnd type="none" w="med" len="med"/>
+                      <a:tailEnd type="none" w="med" len="med"/>
+                    </a:lnB>
+                    <a:lnTlToBr w="12700" cmpd="sng">
+                      <a:noFill/>
+                      <a:prstDash val="solid"/>
+                    </a:lnTlToBr>
+                    <a:lnBlToTr w="12700" cmpd="sng">
+                      <a:noFill/>
+                      <a:prstDash val="solid"/>
+                    </a:lnBlToTr>
+                    <a:solidFill>
+                      <a:schemeClr val="bg1"/>
+                    </a:solidFill>
+                  </a:tcPr>
+                </a:tc>
+                <a:tc>
+                  <a:txBody>
+                    <a:bodyPr/>
+                    <a:lstStyle/>
+                    <a:p>
+                      <a:pPr algn="ctr"/>
+                      <a:r>
+                        <a:rPr lang="en-IN" dirty="0">
+                          <a:solidFill>
+                            <a:srgbClr val="334155"/>
+                          </a:solidFill>
+                          <a:effectLst/>
+                          <a:latin typeface="Barlow Medium" panose="00000600000000000000" pitchFamily="2" charset="0"/>
+                        </a:rPr>
+                        <a:t>AdamW</a:t>
+                      </a:r>
+                    </a:p>
+                  </a:txBody>
+                  <a:tcPr anchor="ctr">
+                    <a:lnL w="3175" cap="flat" cmpd="sng" algn="ctr">
+                      <a:noFill/>
+                      <a:prstDash val="solid"/>
+                      <a:round/>
+                      <a:headEnd type="none" w="med" len="med"/>
+                      <a:tailEnd type="none" w="med" len="med"/>
+                    </a:lnL>
+                    <a:lnR w="3175" cap="flat" cmpd="sng" algn="ctr">
+                      <a:noFill/>
+                      <a:prstDash val="solid"/>
+                      <a:round/>
+                      <a:headEnd type="none" w="med" len="med"/>
+                      <a:tailEnd type="none" w="med" len="med"/>
+                    </a:lnR>
+                    <a:lnT w="12700" cap="flat" cmpd="sng" algn="ctr">
+                      <a:solidFill>
+                        <a:schemeClr val="tx1"/>
+                      </a:solidFill>
+                      <a:prstDash val="solid"/>
+                      <a:round/>
+                      <a:headEnd type="none" w="med" len="med"/>
+                      <a:tailEnd type="none" w="med" len="med"/>
+                    </a:lnT>
+                    <a:lnB w="3175" cap="flat" cmpd="sng" algn="ctr">
+                      <a:solidFill>
+                        <a:schemeClr val="tx1"/>
+                      </a:solidFill>
+                      <a:prstDash val="solid"/>
+                      <a:round/>
+                      <a:headEnd type="none" w="med" len="med"/>
+                      <a:tailEnd type="none" w="med" len="med"/>
+                    </a:lnB>
+                    <a:lnTlToBr w="12700" cmpd="sng">
+                      <a:noFill/>
+                      <a:prstDash val="solid"/>
+                    </a:lnTlToBr>
+                    <a:lnBlToTr w="12700" cmpd="sng">
+                      <a:noFill/>
+                      <a:prstDash val="solid"/>
+                    </a:lnBlToTr>
+                    <a:solidFill>
+                      <a:schemeClr val="bg1"/>
+                    </a:solidFill>
+                  </a:tcPr>
+                </a:tc>
+                <a:tc>
+                  <a:txBody>
+                    <a:bodyPr/>
+                    <a:lstStyle/>
+                    <a:p>
+                      <a:pPr algn="ctr"/>
+                      <a:r>
+                        <a:rPr lang="en-IN" b="1" dirty="0">
+                          <a:solidFill>
+                            <a:srgbClr val="334155"/>
+                          </a:solidFill>
+                          <a:effectLst/>
+                          <a:latin typeface="Barlow Medium" panose="00000600000000000000" pitchFamily="2" charset="0"/>
+                        </a:rPr>
+                        <a:t>0.7127</a:t>
+                      </a:r>
+                    </a:p>
+                  </a:txBody>
+                  <a:tcPr anchor="ctr">
+                    <a:lnL w="3175" cap="flat" cmpd="sng" algn="ctr">
+                      <a:noFill/>
+                      <a:prstDash val="solid"/>
+                      <a:round/>
+                      <a:headEnd type="none" w="med" len="med"/>
+                      <a:tailEnd type="none" w="med" len="med"/>
+                    </a:lnL>
+                    <a:lnR w="3175" cap="flat" cmpd="sng" algn="ctr">
+                      <a:noFill/>
+                      <a:prstDash val="solid"/>
+                      <a:round/>
+                      <a:headEnd type="none" w="med" len="med"/>
+                      <a:tailEnd type="none" w="med" len="med"/>
+                    </a:lnR>
+                    <a:lnT w="12700" cap="flat" cmpd="sng" algn="ctr">
+                      <a:solidFill>
+                        <a:schemeClr val="tx1"/>
+                      </a:solidFill>
+                      <a:prstDash val="solid"/>
+                      <a:round/>
+                      <a:headEnd type="none" w="med" len="med"/>
+                      <a:tailEnd type="none" w="med" len="med"/>
+                    </a:lnT>
+                    <a:lnB w="3175" cap="flat" cmpd="sng" algn="ctr">
+                      <a:solidFill>
+                        <a:schemeClr val="tx1"/>
+                      </a:solidFill>
+                      <a:prstDash val="solid"/>
+                      <a:round/>
+                      <a:headEnd type="none" w="med" len="med"/>
+                      <a:tailEnd type="none" w="med" len="med"/>
+                    </a:lnB>
+                    <a:lnTlToBr w="12700" cmpd="sng">
+                      <a:noFill/>
+                      <a:prstDash val="solid"/>
+                    </a:lnTlToBr>
+                    <a:lnBlToTr w="12700" cmpd="sng">
+                      <a:noFill/>
+                      <a:prstDash val="solid"/>
+                    </a:lnBlToTr>
+                    <a:solidFill>
+                      <a:srgbClr val="92D050"/>
+                    </a:solidFill>
+                  </a:tcPr>
+                </a:tc>
+                <a:tc>
+                  <a:txBody>
+                    <a:bodyPr/>
+                    <a:lstStyle/>
+                    <a:p>
+                      <a:pPr algn="ctr"/>
+                      <a:r>
+                        <a:rPr lang="en-IN" b="1" dirty="0">
+                          <a:solidFill>
+                            <a:srgbClr val="334155"/>
+                          </a:solidFill>
+                          <a:effectLst/>
+                          <a:latin typeface="Barlow Medium" panose="00000600000000000000" pitchFamily="2" charset="0"/>
+                        </a:rPr>
+                        <a:t>0.4908</a:t>
+                      </a:r>
+                    </a:p>
+                  </a:txBody>
+                  <a:tcPr anchor="ctr">
+                    <a:lnL w="3175" cap="flat" cmpd="sng" algn="ctr">
+                      <a:noFill/>
+                      <a:prstDash val="solid"/>
+                      <a:round/>
+                      <a:headEnd type="none" w="med" len="med"/>
+                      <a:tailEnd type="none" w="med" len="med"/>
+                    </a:lnL>
+                    <a:lnR w="3175" cap="flat" cmpd="sng" algn="ctr">
+                      <a:noFill/>
+                      <a:prstDash val="solid"/>
+                      <a:round/>
+                      <a:headEnd type="none" w="med" len="med"/>
+                      <a:tailEnd type="none" w="med" len="med"/>
+                    </a:lnR>
+                    <a:lnT w="12700" cap="flat" cmpd="sng" algn="ctr">
+                      <a:solidFill>
+                        <a:schemeClr val="tx1"/>
+                      </a:solidFill>
+                      <a:prstDash val="solid"/>
+                      <a:round/>
+                      <a:headEnd type="none" w="med" len="med"/>
+                      <a:tailEnd type="none" w="med" len="med"/>
+                    </a:lnT>
+                    <a:lnB w="3175" cap="flat" cmpd="sng" algn="ctr">
+                      <a:solidFill>
+                        <a:schemeClr val="tx1"/>
+                      </a:solidFill>
+                      <a:prstDash val="solid"/>
+                      <a:round/>
+                      <a:headEnd type="none" w="med" len="med"/>
+                      <a:tailEnd type="none" w="med" len="med"/>
+                    </a:lnB>
+                    <a:lnTlToBr w="12700" cmpd="sng">
+                      <a:noFill/>
+                      <a:prstDash val="solid"/>
+                    </a:lnTlToBr>
+                    <a:lnBlToTr w="12700" cmpd="sng">
+                      <a:noFill/>
+                      <a:prstDash val="solid"/>
+                    </a:lnBlToTr>
+                    <a:solidFill>
+                      <a:srgbClr val="92D050"/>
+                    </a:solidFill>
+                  </a:tcPr>
+                </a:tc>
+                <a:tc>
+                  <a:txBody>
+                    <a:bodyPr/>
+                    <a:lstStyle/>
+                    <a:p>
+                      <a:pPr algn="ctr"/>
+                      <a:r>
+                        <a:rPr lang="en-IN" dirty="0">
+                          <a:solidFill>
+                            <a:srgbClr val="334155"/>
+                          </a:solidFill>
+                          <a:effectLst/>
+                          <a:latin typeface="Barlow Medium" panose="00000600000000000000" pitchFamily="2" charset="0"/>
+                        </a:rPr>
+                        <a:t>0.5826</a:t>
+                      </a:r>
+                    </a:p>
+                  </a:txBody>
+                  <a:tcPr anchor="ctr">
+                    <a:lnL w="3175" cap="flat" cmpd="sng" algn="ctr">
+                      <a:noFill/>
+                      <a:prstDash val="solid"/>
+                      <a:round/>
+                      <a:headEnd type="none" w="med" len="med"/>
+                      <a:tailEnd type="none" w="med" len="med"/>
+                    </a:lnL>
+                    <a:lnR w="3175" cap="flat" cmpd="sng" algn="ctr">
+                      <a:noFill/>
+                      <a:prstDash val="solid"/>
+                      <a:round/>
+                      <a:headEnd type="none" w="med" len="med"/>
+                      <a:tailEnd type="none" w="med" len="med"/>
+                    </a:lnR>
+                    <a:lnT w="12700" cap="flat" cmpd="sng" algn="ctr">
+                      <a:solidFill>
+                        <a:schemeClr val="tx1"/>
+                      </a:solidFill>
+                      <a:prstDash val="solid"/>
+                      <a:round/>
+                      <a:headEnd type="none" w="med" len="med"/>
+                      <a:tailEnd type="none" w="med" len="med"/>
+                    </a:lnT>
+                    <a:lnB w="3175" cap="flat" cmpd="sng" algn="ctr">
+                      <a:solidFill>
+                        <a:schemeClr val="tx1"/>
+                      </a:solidFill>
+                      <a:prstDash val="solid"/>
+                      <a:round/>
+                      <a:headEnd type="none" w="med" len="med"/>
+                      <a:tailEnd type="none" w="med" len="med"/>
+                    </a:lnB>
+                    <a:lnTlToBr w="12700" cmpd="sng">
+                      <a:noFill/>
+                      <a:prstDash val="solid"/>
+                    </a:lnTlToBr>
+                    <a:lnBlToTr w="12700" cmpd="sng">
+                      <a:noFill/>
+                      <a:prstDash val="solid"/>
+                    </a:lnBlToTr>
+                    <a:solidFill>
+                      <a:schemeClr val="bg1"/>
+                    </a:solidFill>
+                  </a:tcPr>
+                </a:tc>
+                <a:tc>
+                  <a:txBody>
+                    <a:bodyPr/>
+                    <a:lstStyle/>
+                    <a:p>
+                      <a:pPr algn="ctr"/>
+                      <a:r>
+                        <a:rPr lang="en-IN" dirty="0">
+                          <a:solidFill>
+                            <a:srgbClr val="334155"/>
+                          </a:solidFill>
+                          <a:effectLst/>
+                          <a:latin typeface="Barlow Medium" panose="00000600000000000000" pitchFamily="2" charset="0"/>
+                        </a:rPr>
+                        <a:t>0.1715</a:t>
+                      </a:r>
+                    </a:p>
+                  </a:txBody>
+                  <a:tcPr anchor="ctr">
+                    <a:lnL w="3175" cap="flat" cmpd="sng" algn="ctr">
+                      <a:noFill/>
+                      <a:prstDash val="solid"/>
+                      <a:round/>
+                      <a:headEnd type="none" w="med" len="med"/>
+                      <a:tailEnd type="none" w="med" len="med"/>
+                    </a:lnL>
+                    <a:lnR w="3175" cap="flat" cmpd="sng" algn="ctr">
+                      <a:noFill/>
+                      <a:prstDash val="solid"/>
+                      <a:round/>
+                      <a:headEnd type="none" w="med" len="med"/>
+                      <a:tailEnd type="none" w="med" len="med"/>
+                    </a:lnR>
+                    <a:lnT w="12700" cap="flat" cmpd="sng" algn="ctr">
+                      <a:solidFill>
+                        <a:schemeClr val="tx1"/>
+                      </a:solidFill>
+                      <a:prstDash val="solid"/>
+                      <a:round/>
+                      <a:headEnd type="none" w="med" len="med"/>
+                      <a:tailEnd type="none" w="med" len="med"/>
+                    </a:lnT>
+                    <a:lnB w="3175" cap="flat" cmpd="sng" algn="ctr">
+                      <a:solidFill>
+                        <a:schemeClr val="tx1"/>
+                      </a:solidFill>
+                      <a:prstDash val="solid"/>
+                      <a:round/>
+                      <a:headEnd type="none" w="med" len="med"/>
+                      <a:tailEnd type="none" w="med" len="med"/>
+                    </a:lnB>
+                    <a:lnTlToBr w="12700" cmpd="sng">
+                      <a:noFill/>
+                      <a:prstDash val="solid"/>
+                    </a:lnTlToBr>
+                    <a:lnBlToTr w="12700" cmpd="sng">
+                      <a:noFill/>
+                      <a:prstDash val="solid"/>
+                    </a:lnBlToTr>
+                    <a:solidFill>
+                      <a:schemeClr val="bg1"/>
+                    </a:solidFill>
+                  </a:tcPr>
+                </a:tc>
+                <a:tc>
+                  <a:txBody>
+                    <a:bodyPr/>
+                    <a:lstStyle/>
+                    <a:p>
+                      <a:pPr algn="ctr"/>
+                      <a:r>
+                        <a:rPr lang="en-IN" dirty="0">
+                          <a:solidFill>
+                            <a:srgbClr val="334155"/>
+                          </a:solidFill>
+                          <a:effectLst/>
+                          <a:latin typeface="Barlow Medium" panose="00000600000000000000" pitchFamily="2" charset="0"/>
+                        </a:rPr>
+                        <a:t>0.8093</a:t>
+                      </a:r>
+                    </a:p>
+                  </a:txBody>
+                  <a:tcPr anchor="ctr">
+                    <a:lnL w="3175" cap="flat" cmpd="sng" algn="ctr">
+                      <a:noFill/>
+                      <a:prstDash val="solid"/>
+                      <a:round/>
+                      <a:headEnd type="none" w="med" len="med"/>
+                      <a:tailEnd type="none" w="med" len="med"/>
+                    </a:lnL>
+                    <a:lnR w="9525" cap="rnd" cmpd="sng" algn="ctr">
+                      <a:noFill/>
+                      <a:prstDash val="solid"/>
+                    </a:lnR>
+                    <a:lnT w="12700" cap="flat" cmpd="sng" algn="ctr">
+                      <a:solidFill>
+                        <a:schemeClr val="tx1"/>
+                      </a:solidFill>
+                      <a:prstDash val="solid"/>
+                      <a:round/>
+                      <a:headEnd type="none" w="med" len="med"/>
+                      <a:tailEnd type="none" w="med" len="med"/>
+                    </a:lnT>
+                    <a:lnB w="3175" cap="flat" cmpd="sng" algn="ctr">
+                      <a:solidFill>
+                        <a:schemeClr val="tx1"/>
+                      </a:solidFill>
+                      <a:prstDash val="solid"/>
+                      <a:round/>
+                      <a:headEnd type="none" w="med" len="med"/>
+                      <a:tailEnd type="none" w="med" len="med"/>
+                    </a:lnB>
+                    <a:lnTlToBr w="12700" cmpd="sng">
+                      <a:noFill/>
+                      <a:prstDash val="solid"/>
+                    </a:lnTlToBr>
+                    <a:lnBlToTr w="12700" cmpd="sng">
+                      <a:noFill/>
+                      <a:prstDash val="solid"/>
+                    </a:lnBlToTr>
+                    <a:solidFill>
+                      <a:schemeClr val="bg1"/>
+                    </a:solidFill>
+                  </a:tcPr>
+                </a:tc>
+                <a:extLst>
+                  <a:ext uri="{0D108BD9-81ED-4DB2-BD59-A6C34878D82A}">
+                    <a16:rowId xmlns:a16="http://schemas.microsoft.com/office/drawing/2014/main" val="2629920045"/>
+                  </a:ext>
+                </a:extLst>
+              </a:tr>
+              <a:tr h="432351">
+                <a:tc vMerge="1">
+                  <a:txBody>
+                    <a:bodyPr/>
+                    <a:lstStyle/>
+                    <a:p>
+                      <a:endParaRPr dirty="0"/>
+                    </a:p>
+                  </a:txBody>
+                  <a:tcPr anchor="ctr">
+                    <a:lnL w="12700" cap="flat" cmpd="sng" algn="ctr">
+                      <a:solidFill>
+                        <a:schemeClr val="tx1"/>
+                      </a:solidFill>
+                      <a:prstDash val="solid"/>
+                      <a:round/>
+                      <a:headEnd type="none" w="med" len="med"/>
+                      <a:tailEnd type="none" w="med" len="med"/>
+                    </a:lnL>
+                    <a:lnR w="3175" cap="flat" cmpd="sng" algn="ctr">
+                      <a:noFill/>
+                      <a:prstDash val="solid"/>
+                      <a:round/>
+                      <a:headEnd type="none" w="med" len="med"/>
+                      <a:tailEnd type="none" w="med" len="med"/>
+                    </a:lnR>
+                    <a:lnT w="3175" cap="flat" cmpd="sng" algn="ctr">
+                      <a:solidFill>
+                        <a:schemeClr val="tx1"/>
+                      </a:solidFill>
+                      <a:prstDash val="solid"/>
+                      <a:round/>
+                      <a:headEnd type="none" w="med" len="med"/>
+                      <a:tailEnd type="none" w="med" len="med"/>
+                    </a:lnT>
+                    <a:lnB w="3175" cap="flat" cmpd="sng" algn="ctr">
+                      <a:solidFill>
+                        <a:schemeClr val="tx1"/>
+                      </a:solidFill>
+                      <a:prstDash val="solid"/>
+                      <a:round/>
+                      <a:headEnd type="none" w="med" len="med"/>
+                      <a:tailEnd type="none" w="med" len="med"/>
+                    </a:lnB>
+                    <a:lnTlToBr w="12700" cmpd="sng">
+                      <a:noFill/>
+                      <a:prstDash val="solid"/>
+                    </a:lnTlToBr>
+                    <a:lnBlToTr w="12700" cmpd="sng">
+                      <a:noFill/>
+                      <a:prstDash val="solid"/>
+                    </a:lnBlToTr>
+                    <a:solidFill>
+                      <a:schemeClr val="bg1"/>
+                    </a:solidFill>
+                  </a:tcPr>
+                </a:tc>
+                <a:tc>
+                  <a:txBody>
+                    <a:bodyPr/>
+                    <a:lstStyle/>
+                    <a:p>
+                      <a:pPr algn="ctr"/>
+                      <a:r>
+                        <a:rPr lang="en-IN">
+                          <a:solidFill>
+                            <a:srgbClr val="334155"/>
+                          </a:solidFill>
+                          <a:effectLst/>
+                          <a:latin typeface="Barlow Medium" panose="00000600000000000000" pitchFamily="2" charset="0"/>
+                        </a:rPr>
+                        <a:t>Lion</a:t>
+                      </a:r>
+                    </a:p>
+                  </a:txBody>
+                  <a:tcPr anchor="ctr">
+                    <a:lnL w="3175" cap="flat" cmpd="sng" algn="ctr">
+                      <a:noFill/>
+                      <a:prstDash val="solid"/>
+                      <a:round/>
+                      <a:headEnd type="none" w="med" len="med"/>
+                      <a:tailEnd type="none" w="med" len="med"/>
+                    </a:lnL>
+                    <a:lnR w="3175" cap="flat" cmpd="sng" algn="ctr">
+                      <a:noFill/>
+                      <a:prstDash val="solid"/>
+                      <a:round/>
+                      <a:headEnd type="none" w="med" len="med"/>
+                      <a:tailEnd type="none" w="med" len="med"/>
+                    </a:lnR>
+                    <a:lnT w="3175" cap="flat" cmpd="sng" algn="ctr">
+                      <a:solidFill>
+                        <a:schemeClr val="tx1"/>
+                      </a:solidFill>
+                      <a:prstDash val="solid"/>
+                      <a:round/>
+                      <a:headEnd type="none" w="med" len="med"/>
+                      <a:tailEnd type="none" w="med" len="med"/>
+                    </a:lnT>
+                    <a:lnB w="3175" cap="flat" cmpd="sng" algn="ctr">
+                      <a:solidFill>
+                        <a:schemeClr val="tx1"/>
+                      </a:solidFill>
+                      <a:prstDash val="solid"/>
+                      <a:round/>
+                      <a:headEnd type="none" w="med" len="med"/>
+                      <a:tailEnd type="none" w="med" len="med"/>
+                    </a:lnB>
+                    <a:lnTlToBr w="12700" cmpd="sng">
+                      <a:noFill/>
+                      <a:prstDash val="solid"/>
+                    </a:lnTlToBr>
+                    <a:lnBlToTr w="12700" cmpd="sng">
+                      <a:noFill/>
+                      <a:prstDash val="solid"/>
+                    </a:lnBlToTr>
+                    <a:solidFill>
+                      <a:schemeClr val="bg1"/>
+                    </a:solidFill>
+                  </a:tcPr>
+                </a:tc>
+                <a:tc>
+                  <a:txBody>
+                    <a:bodyPr/>
+                    <a:lstStyle/>
+                    <a:p>
+                      <a:pPr algn="ctr"/>
+                      <a:r>
+                        <a:rPr lang="en-IN" dirty="0">
+                          <a:solidFill>
+                            <a:srgbClr val="334155"/>
+                          </a:solidFill>
+                          <a:effectLst/>
+                          <a:latin typeface="Barlow Medium" panose="00000600000000000000" pitchFamily="2" charset="0"/>
+                        </a:rPr>
+                        <a:t>0.7031</a:t>
+                      </a:r>
+                    </a:p>
+                  </a:txBody>
+                  <a:tcPr anchor="ctr">
+                    <a:lnL w="3175" cap="flat" cmpd="sng" algn="ctr">
+                      <a:noFill/>
+                      <a:prstDash val="solid"/>
+                      <a:round/>
+                      <a:headEnd type="none" w="med" len="med"/>
+                      <a:tailEnd type="none" w="med" len="med"/>
+                    </a:lnL>
+                    <a:lnR w="3175" cap="flat" cmpd="sng" algn="ctr">
+                      <a:noFill/>
+                      <a:prstDash val="solid"/>
+                      <a:round/>
+                      <a:headEnd type="none" w="med" len="med"/>
+                      <a:tailEnd type="none" w="med" len="med"/>
+                    </a:lnR>
+                    <a:lnT w="3175" cap="flat" cmpd="sng" algn="ctr">
+                      <a:solidFill>
+                        <a:schemeClr val="tx1"/>
+                      </a:solidFill>
+                      <a:prstDash val="solid"/>
+                      <a:round/>
+                      <a:headEnd type="none" w="med" len="med"/>
+                      <a:tailEnd type="none" w="med" len="med"/>
+                    </a:lnT>
+                    <a:lnB w="3175" cap="flat" cmpd="sng" algn="ctr">
+                      <a:solidFill>
+                        <a:schemeClr val="tx1"/>
+                      </a:solidFill>
+                      <a:prstDash val="solid"/>
+                      <a:round/>
+                      <a:headEnd type="none" w="med" len="med"/>
+                      <a:tailEnd type="none" w="med" len="med"/>
+                    </a:lnB>
+                    <a:lnTlToBr w="12700" cmpd="sng">
+                      <a:noFill/>
+                      <a:prstDash val="solid"/>
+                    </a:lnTlToBr>
+                    <a:lnBlToTr w="12700" cmpd="sng">
+                      <a:noFill/>
+                      <a:prstDash val="solid"/>
+                    </a:lnBlToTr>
+                    <a:solidFill>
+                      <a:schemeClr val="bg1"/>
+                    </a:solidFill>
+                  </a:tcPr>
+                </a:tc>
+                <a:tc>
+                  <a:txBody>
+                    <a:bodyPr/>
+                    <a:lstStyle/>
+                    <a:p>
+                      <a:pPr algn="ctr"/>
+                      <a:r>
+                        <a:rPr lang="en-IN" dirty="0">
+                          <a:solidFill>
+                            <a:srgbClr val="334155"/>
+                          </a:solidFill>
+                          <a:effectLst/>
+                          <a:latin typeface="Barlow Medium" panose="00000600000000000000" pitchFamily="2" charset="0"/>
+                        </a:rPr>
+                        <a:t>0.4858</a:t>
+                      </a:r>
+                    </a:p>
+                  </a:txBody>
+                  <a:tcPr anchor="ctr">
+                    <a:lnL w="3175" cap="flat" cmpd="sng" algn="ctr">
+                      <a:noFill/>
+                      <a:prstDash val="solid"/>
+                      <a:round/>
+                      <a:headEnd type="none" w="med" len="med"/>
+                      <a:tailEnd type="none" w="med" len="med"/>
+                    </a:lnL>
+                    <a:lnR w="3175" cap="flat" cmpd="sng" algn="ctr">
+                      <a:noFill/>
+                      <a:prstDash val="solid"/>
+                      <a:round/>
+                      <a:headEnd type="none" w="med" len="med"/>
+                      <a:tailEnd type="none" w="med" len="med"/>
+                    </a:lnR>
+                    <a:lnT w="3175" cap="flat" cmpd="sng" algn="ctr">
+                      <a:solidFill>
+                        <a:schemeClr val="tx1"/>
+                      </a:solidFill>
+                      <a:prstDash val="solid"/>
+                      <a:round/>
+                      <a:headEnd type="none" w="med" len="med"/>
+                      <a:tailEnd type="none" w="med" len="med"/>
+                    </a:lnT>
+                    <a:lnB w="3175" cap="flat" cmpd="sng" algn="ctr">
+                      <a:solidFill>
+                        <a:schemeClr val="tx1"/>
+                      </a:solidFill>
+                      <a:prstDash val="solid"/>
+                      <a:round/>
+                      <a:headEnd type="none" w="med" len="med"/>
+                      <a:tailEnd type="none" w="med" len="med"/>
+                    </a:lnB>
+                    <a:lnTlToBr w="12700" cmpd="sng">
+                      <a:noFill/>
+                      <a:prstDash val="solid"/>
+                    </a:lnTlToBr>
+                    <a:lnBlToTr w="12700" cmpd="sng">
+                      <a:noFill/>
+                      <a:prstDash val="solid"/>
+                    </a:lnBlToTr>
+                    <a:solidFill>
+                      <a:schemeClr val="bg1"/>
+                    </a:solidFill>
+                  </a:tcPr>
+                </a:tc>
+                <a:tc>
+                  <a:txBody>
+                    <a:bodyPr/>
+                    <a:lstStyle/>
+                    <a:p>
+                      <a:pPr algn="ctr"/>
+                      <a:r>
+                        <a:rPr lang="en-IN" b="1" dirty="0">
+                          <a:solidFill>
+                            <a:srgbClr val="334155"/>
+                          </a:solidFill>
+                          <a:effectLst/>
+                          <a:latin typeface="Barlow Medium" panose="00000600000000000000" pitchFamily="2" charset="0"/>
+                        </a:rPr>
+                        <a:t>0.5988</a:t>
+                      </a:r>
+                    </a:p>
+                  </a:txBody>
+                  <a:tcPr anchor="ctr">
+                    <a:lnL w="3175" cap="flat" cmpd="sng" algn="ctr">
+                      <a:noFill/>
+                      <a:prstDash val="solid"/>
+                      <a:round/>
+                      <a:headEnd type="none" w="med" len="med"/>
+                      <a:tailEnd type="none" w="med" len="med"/>
+                    </a:lnL>
+                    <a:lnR w="3175" cap="flat" cmpd="sng" algn="ctr">
+                      <a:noFill/>
+                      <a:prstDash val="solid"/>
+                      <a:round/>
+                      <a:headEnd type="none" w="med" len="med"/>
+                      <a:tailEnd type="none" w="med" len="med"/>
+                    </a:lnR>
+                    <a:lnT w="3175" cap="flat" cmpd="sng" algn="ctr">
+                      <a:solidFill>
+                        <a:schemeClr val="tx1"/>
+                      </a:solidFill>
+                      <a:prstDash val="solid"/>
+                      <a:round/>
+                      <a:headEnd type="none" w="med" len="med"/>
+                      <a:tailEnd type="none" w="med" len="med"/>
+                    </a:lnT>
+                    <a:lnB w="3175" cap="flat" cmpd="sng" algn="ctr">
+                      <a:solidFill>
+                        <a:schemeClr val="tx1"/>
+                      </a:solidFill>
+                      <a:prstDash val="solid"/>
+                      <a:round/>
+                      <a:headEnd type="none" w="med" len="med"/>
+                      <a:tailEnd type="none" w="med" len="med"/>
+                    </a:lnB>
+                    <a:lnTlToBr w="12700" cmpd="sng">
+                      <a:noFill/>
+                      <a:prstDash val="solid"/>
+                    </a:lnTlToBr>
+                    <a:lnBlToTr w="12700" cmpd="sng">
+                      <a:noFill/>
+                      <a:prstDash val="solid"/>
+                    </a:lnBlToTr>
+                    <a:solidFill>
+                      <a:srgbClr val="92D050"/>
+                    </a:solidFill>
+                  </a:tcPr>
+                </a:tc>
+                <a:tc>
+                  <a:txBody>
+                    <a:bodyPr/>
+                    <a:lstStyle/>
+                    <a:p>
+                      <a:pPr algn="ctr"/>
+                      <a:r>
+                        <a:rPr lang="en-IN" dirty="0">
+                          <a:solidFill>
+                            <a:srgbClr val="334155"/>
+                          </a:solidFill>
+                          <a:effectLst/>
+                          <a:latin typeface="Barlow Medium" panose="00000600000000000000" pitchFamily="2" charset="0"/>
+                        </a:rPr>
+                        <a:t>0.1724</a:t>
+                      </a:r>
+                    </a:p>
+                  </a:txBody>
+                  <a:tcPr anchor="ctr">
+                    <a:lnL w="3175" cap="flat" cmpd="sng" algn="ctr">
+                      <a:noFill/>
+                      <a:prstDash val="solid"/>
+                      <a:round/>
+                      <a:headEnd type="none" w="med" len="med"/>
+                      <a:tailEnd type="none" w="med" len="med"/>
+                    </a:lnL>
+                    <a:lnR w="3175" cap="flat" cmpd="sng" algn="ctr">
+                      <a:noFill/>
+                      <a:prstDash val="solid"/>
+                      <a:round/>
+                      <a:headEnd type="none" w="med" len="med"/>
+                      <a:tailEnd type="none" w="med" len="med"/>
+                    </a:lnR>
+                    <a:lnT w="3175" cap="flat" cmpd="sng" algn="ctr">
+                      <a:solidFill>
+                        <a:schemeClr val="tx1"/>
+                      </a:solidFill>
+                      <a:prstDash val="solid"/>
+                      <a:round/>
+                      <a:headEnd type="none" w="med" len="med"/>
+                      <a:tailEnd type="none" w="med" len="med"/>
+                    </a:lnT>
+                    <a:lnB w="3175" cap="flat" cmpd="sng" algn="ctr">
+                      <a:solidFill>
+                        <a:schemeClr val="tx1"/>
+                      </a:solidFill>
+                      <a:prstDash val="solid"/>
+                      <a:round/>
+                      <a:headEnd type="none" w="med" len="med"/>
+                      <a:tailEnd type="none" w="med" len="med"/>
+                    </a:lnB>
+                    <a:lnTlToBr w="12700" cmpd="sng">
+                      <a:noFill/>
+                      <a:prstDash val="solid"/>
+                    </a:lnTlToBr>
+                    <a:lnBlToTr w="12700" cmpd="sng">
+                      <a:noFill/>
+                      <a:prstDash val="solid"/>
+                    </a:lnBlToTr>
+                    <a:solidFill>
+                      <a:schemeClr val="bg1"/>
+                    </a:solidFill>
+                  </a:tcPr>
+                </a:tc>
+                <a:tc>
+                  <a:txBody>
+                    <a:bodyPr/>
+                    <a:lstStyle/>
+                    <a:p>
+                      <a:pPr algn="ctr"/>
+                      <a:r>
+                        <a:rPr lang="en-IN">
+                          <a:solidFill>
+                            <a:srgbClr val="334155"/>
+                          </a:solidFill>
+                          <a:effectLst/>
+                          <a:latin typeface="Barlow Medium" panose="00000600000000000000" pitchFamily="2" charset="0"/>
+                        </a:rPr>
+                        <a:t>0.8116</a:t>
+                      </a:r>
+                    </a:p>
+                  </a:txBody>
+                  <a:tcPr anchor="ctr">
+                    <a:lnL w="3175" cap="flat" cmpd="sng" algn="ctr">
+                      <a:noFill/>
+                      <a:prstDash val="solid"/>
+                      <a:round/>
+                      <a:headEnd type="none" w="med" len="med"/>
+                      <a:tailEnd type="none" w="med" len="med"/>
+                    </a:lnL>
+                    <a:lnR w="9525" cap="rnd" cmpd="sng" algn="ctr">
+                      <a:noFill/>
+                      <a:prstDash val="solid"/>
+                    </a:lnR>
+                    <a:lnT w="3175" cap="flat" cmpd="sng" algn="ctr">
+                      <a:solidFill>
+                        <a:schemeClr val="tx1"/>
+                      </a:solidFill>
+                      <a:prstDash val="solid"/>
+                      <a:round/>
+                      <a:headEnd type="none" w="med" len="med"/>
+                      <a:tailEnd type="none" w="med" len="med"/>
+                    </a:lnT>
+                    <a:lnB w="3175" cap="flat" cmpd="sng" algn="ctr">
+                      <a:solidFill>
+                        <a:schemeClr val="tx1"/>
+                      </a:solidFill>
+                      <a:prstDash val="solid"/>
+                      <a:round/>
+                      <a:headEnd type="none" w="med" len="med"/>
+                      <a:tailEnd type="none" w="med" len="med"/>
+                    </a:lnB>
+                    <a:lnTlToBr w="12700" cmpd="sng">
+                      <a:noFill/>
+                      <a:prstDash val="solid"/>
+                    </a:lnTlToBr>
+                    <a:lnBlToTr w="12700" cmpd="sng">
+                      <a:noFill/>
+                      <a:prstDash val="solid"/>
+                    </a:lnBlToTr>
+                    <a:solidFill>
+                      <a:schemeClr val="bg1"/>
+                    </a:solidFill>
+                  </a:tcPr>
+                </a:tc>
+                <a:extLst>
+                  <a:ext uri="{0D108BD9-81ED-4DB2-BD59-A6C34878D82A}">
+                    <a16:rowId xmlns:a16="http://schemas.microsoft.com/office/drawing/2014/main" val="1277407104"/>
+                  </a:ext>
+                </a:extLst>
+              </a:tr>
+              <a:tr h="432351">
+                <a:tc rowSpan="2">
+                  <a:txBody>
+                    <a:bodyPr/>
+                    <a:lstStyle/>
+                    <a:p>
+                      <a:pPr algn="ctr"/>
+                      <a:r>
+                        <a:rPr lang="en-IN" b="1" dirty="0">
+                          <a:solidFill>
+                            <a:srgbClr val="334155"/>
+                          </a:solidFill>
+                          <a:effectLst/>
+                          <a:latin typeface="Barlow Medium" panose="00000600000000000000" pitchFamily="2" charset="0"/>
+                        </a:rPr>
+                        <a:t>GTE</a:t>
+                      </a:r>
+                    </a:p>
+                  </a:txBody>
+                  <a:tcPr anchor="ctr">
+                    <a:lnL w="12700" cap="flat" cmpd="sng" algn="ctr">
+                      <a:solidFill>
+                        <a:schemeClr val="tx1"/>
+                      </a:solidFill>
+                      <a:prstDash val="solid"/>
+                      <a:round/>
+                      <a:headEnd type="none" w="med" len="med"/>
+                      <a:tailEnd type="none" w="med" len="med"/>
+                    </a:lnL>
+                    <a:lnR w="3175" cap="flat" cmpd="sng" algn="ctr">
+                      <a:noFill/>
+                      <a:prstDash val="solid"/>
+                      <a:round/>
+                      <a:headEnd type="none" w="med" len="med"/>
+                      <a:tailEnd type="none" w="med" len="med"/>
+                    </a:lnR>
+                    <a:lnT w="3175" cap="flat" cmpd="sng" algn="ctr">
+                      <a:solidFill>
+                        <a:schemeClr val="tx1"/>
+                      </a:solidFill>
+                      <a:prstDash val="solid"/>
+                      <a:round/>
+                      <a:headEnd type="none" w="med" len="med"/>
+                      <a:tailEnd type="none" w="med" len="med"/>
+                    </a:lnT>
+                    <a:lnB w="3175" cap="flat" cmpd="sng" algn="ctr">
+                      <a:solidFill>
+                        <a:schemeClr val="tx1"/>
+                      </a:solidFill>
+                      <a:prstDash val="solid"/>
+                      <a:round/>
+                      <a:headEnd type="none" w="med" len="med"/>
+                      <a:tailEnd type="none" w="med" len="med"/>
+                    </a:lnB>
+                    <a:lnTlToBr w="12700" cmpd="sng">
+                      <a:noFill/>
+                      <a:prstDash val="solid"/>
+                    </a:lnTlToBr>
+                    <a:lnBlToTr w="12700" cmpd="sng">
+                      <a:noFill/>
+                      <a:prstDash val="solid"/>
+                    </a:lnBlToTr>
+                    <a:solidFill>
+                      <a:schemeClr val="bg1"/>
+                    </a:solidFill>
+                  </a:tcPr>
+                </a:tc>
+                <a:tc>
+                  <a:txBody>
+                    <a:bodyPr/>
+                    <a:lstStyle/>
+                    <a:p>
+                      <a:pPr algn="ctr"/>
+                      <a:r>
+                        <a:rPr lang="en-IN" dirty="0">
+                          <a:solidFill>
+                            <a:srgbClr val="334155"/>
+                          </a:solidFill>
+                          <a:effectLst/>
+                          <a:latin typeface="Barlow Medium" panose="00000600000000000000" pitchFamily="2" charset="0"/>
+                        </a:rPr>
+                        <a:t>AdamW</a:t>
+                      </a:r>
+                    </a:p>
+                  </a:txBody>
+                  <a:tcPr anchor="ctr">
+                    <a:lnL w="3175" cap="flat" cmpd="sng" algn="ctr">
+                      <a:noFill/>
+                      <a:prstDash val="solid"/>
+                      <a:round/>
+                      <a:headEnd type="none" w="med" len="med"/>
+                      <a:tailEnd type="none" w="med" len="med"/>
+                    </a:lnL>
+                    <a:lnR w="3175" cap="flat" cmpd="sng" algn="ctr">
+                      <a:noFill/>
+                      <a:prstDash val="solid"/>
+                      <a:round/>
+                      <a:headEnd type="none" w="med" len="med"/>
+                      <a:tailEnd type="none" w="med" len="med"/>
+                    </a:lnR>
+                    <a:lnT w="3175" cap="flat" cmpd="sng" algn="ctr">
+                      <a:solidFill>
+                        <a:schemeClr val="tx1"/>
+                      </a:solidFill>
+                      <a:prstDash val="solid"/>
+                      <a:round/>
+                      <a:headEnd type="none" w="med" len="med"/>
+                      <a:tailEnd type="none" w="med" len="med"/>
+                    </a:lnT>
+                    <a:lnB w="3175" cap="flat" cmpd="sng" algn="ctr">
+                      <a:solidFill>
+                        <a:schemeClr val="tx1"/>
+                      </a:solidFill>
+                      <a:prstDash val="solid"/>
+                      <a:round/>
+                      <a:headEnd type="none" w="med" len="med"/>
+                      <a:tailEnd type="none" w="med" len="med"/>
+                    </a:lnB>
+                    <a:lnTlToBr w="12700" cmpd="sng">
+                      <a:noFill/>
+                      <a:prstDash val="solid"/>
+                    </a:lnTlToBr>
+                    <a:lnBlToTr w="12700" cmpd="sng">
+                      <a:noFill/>
+                      <a:prstDash val="solid"/>
+                    </a:lnBlToTr>
+                    <a:solidFill>
+                      <a:schemeClr val="bg1"/>
+                    </a:solidFill>
+                  </a:tcPr>
+                </a:tc>
+                <a:tc>
+                  <a:txBody>
+                    <a:bodyPr/>
+                    <a:lstStyle/>
+                    <a:p>
+                      <a:pPr algn="ctr"/>
+                      <a:r>
+                        <a:rPr lang="en-IN" b="1" dirty="0">
+                          <a:solidFill>
+                            <a:srgbClr val="334155"/>
+                          </a:solidFill>
+                          <a:effectLst/>
+                          <a:latin typeface="Barlow Medium" panose="00000600000000000000" pitchFamily="2" charset="0"/>
+                        </a:rPr>
+                        <a:t>0.7224</a:t>
+                      </a:r>
+                    </a:p>
+                  </a:txBody>
+                  <a:tcPr anchor="ctr">
+                    <a:lnL w="3175" cap="flat" cmpd="sng" algn="ctr">
+                      <a:noFill/>
+                      <a:prstDash val="solid"/>
+                      <a:round/>
+                      <a:headEnd type="none" w="med" len="med"/>
+                      <a:tailEnd type="none" w="med" len="med"/>
+                    </a:lnL>
+                    <a:lnR w="3175" cap="flat" cmpd="sng" algn="ctr">
+                      <a:noFill/>
+                      <a:prstDash val="solid"/>
+                      <a:round/>
+                      <a:headEnd type="none" w="med" len="med"/>
+                      <a:tailEnd type="none" w="med" len="med"/>
+                    </a:lnR>
+                    <a:lnT w="3175" cap="flat" cmpd="sng" algn="ctr">
+                      <a:solidFill>
+                        <a:schemeClr val="tx1"/>
+                      </a:solidFill>
+                      <a:prstDash val="solid"/>
+                      <a:round/>
+                      <a:headEnd type="none" w="med" len="med"/>
+                      <a:tailEnd type="none" w="med" len="med"/>
+                    </a:lnT>
+                    <a:lnB w="3175" cap="flat" cmpd="sng" algn="ctr">
+                      <a:solidFill>
+                        <a:schemeClr val="tx1"/>
+                      </a:solidFill>
+                      <a:prstDash val="solid"/>
+                      <a:round/>
+                      <a:headEnd type="none" w="med" len="med"/>
+                      <a:tailEnd type="none" w="med" len="med"/>
+                    </a:lnB>
+                    <a:lnTlToBr w="12700" cmpd="sng">
+                      <a:noFill/>
+                      <a:prstDash val="solid"/>
+                    </a:lnTlToBr>
+                    <a:lnBlToTr w="12700" cmpd="sng">
+                      <a:noFill/>
+                      <a:prstDash val="solid"/>
+                    </a:lnBlToTr>
+                    <a:solidFill>
+                      <a:srgbClr val="92D050"/>
+                    </a:solidFill>
+                  </a:tcPr>
+                </a:tc>
+                <a:tc>
+                  <a:txBody>
+                    <a:bodyPr/>
+                    <a:lstStyle/>
+                    <a:p>
+                      <a:pPr algn="ctr"/>
+                      <a:r>
+                        <a:rPr lang="en-IN" b="1" dirty="0">
+                          <a:solidFill>
+                            <a:srgbClr val="334155"/>
+                          </a:solidFill>
+                          <a:effectLst/>
+                          <a:latin typeface="Barlow Medium" panose="00000600000000000000" pitchFamily="2" charset="0"/>
+                        </a:rPr>
+                        <a:t>0.5005</a:t>
+                      </a:r>
+                    </a:p>
+                  </a:txBody>
+                  <a:tcPr anchor="ctr">
+                    <a:lnL w="3175" cap="flat" cmpd="sng" algn="ctr">
+                      <a:noFill/>
+                      <a:prstDash val="solid"/>
+                      <a:round/>
+                      <a:headEnd type="none" w="med" len="med"/>
+                      <a:tailEnd type="none" w="med" len="med"/>
+                    </a:lnL>
+                    <a:lnR w="3175" cap="flat" cmpd="sng" algn="ctr">
+                      <a:noFill/>
+                      <a:prstDash val="solid"/>
+                      <a:round/>
+                      <a:headEnd type="none" w="med" len="med"/>
+                      <a:tailEnd type="none" w="med" len="med"/>
+                    </a:lnR>
+                    <a:lnT w="3175" cap="flat" cmpd="sng" algn="ctr">
+                      <a:solidFill>
+                        <a:schemeClr val="tx1"/>
+                      </a:solidFill>
+                      <a:prstDash val="solid"/>
+                      <a:round/>
+                      <a:headEnd type="none" w="med" len="med"/>
+                      <a:tailEnd type="none" w="med" len="med"/>
+                    </a:lnT>
+                    <a:lnB w="3175" cap="flat" cmpd="sng" algn="ctr">
+                      <a:solidFill>
+                        <a:schemeClr val="tx1"/>
+                      </a:solidFill>
+                      <a:prstDash val="solid"/>
+                      <a:round/>
+                      <a:headEnd type="none" w="med" len="med"/>
+                      <a:tailEnd type="none" w="med" len="med"/>
+                    </a:lnB>
+                    <a:lnTlToBr w="12700" cmpd="sng">
+                      <a:noFill/>
+                      <a:prstDash val="solid"/>
+                    </a:lnTlToBr>
+                    <a:lnBlToTr w="12700" cmpd="sng">
+                      <a:noFill/>
+                      <a:prstDash val="solid"/>
+                    </a:lnBlToTr>
+                    <a:solidFill>
+                      <a:srgbClr val="92D050"/>
+                    </a:solidFill>
+                  </a:tcPr>
+                </a:tc>
+                <a:tc>
+                  <a:txBody>
+                    <a:bodyPr/>
+                    <a:lstStyle/>
+                    <a:p>
+                      <a:pPr algn="ctr"/>
+                      <a:r>
+                        <a:rPr lang="en-IN" dirty="0">
+                          <a:solidFill>
+                            <a:srgbClr val="334155"/>
+                          </a:solidFill>
+                          <a:effectLst/>
+                          <a:latin typeface="Barlow Medium" panose="00000600000000000000" pitchFamily="2" charset="0"/>
+                        </a:rPr>
+                        <a:t>0.5942</a:t>
+                      </a:r>
+                    </a:p>
+                  </a:txBody>
+                  <a:tcPr anchor="ctr">
+                    <a:lnL w="3175" cap="flat" cmpd="sng" algn="ctr">
+                      <a:noFill/>
+                      <a:prstDash val="solid"/>
+                      <a:round/>
+                      <a:headEnd type="none" w="med" len="med"/>
+                      <a:tailEnd type="none" w="med" len="med"/>
+                    </a:lnL>
+                    <a:lnR w="3175" cap="flat" cmpd="sng" algn="ctr">
+                      <a:noFill/>
+                      <a:prstDash val="solid"/>
+                      <a:round/>
+                      <a:headEnd type="none" w="med" len="med"/>
+                      <a:tailEnd type="none" w="med" len="med"/>
+                    </a:lnR>
+                    <a:lnT w="3175" cap="flat" cmpd="sng" algn="ctr">
+                      <a:solidFill>
+                        <a:schemeClr val="tx1"/>
+                      </a:solidFill>
+                      <a:prstDash val="solid"/>
+                      <a:round/>
+                      <a:headEnd type="none" w="med" len="med"/>
+                      <a:tailEnd type="none" w="med" len="med"/>
+                    </a:lnT>
+                    <a:lnB w="3175" cap="flat" cmpd="sng" algn="ctr">
+                      <a:solidFill>
+                        <a:schemeClr val="tx1"/>
+                      </a:solidFill>
+                      <a:prstDash val="solid"/>
+                      <a:round/>
+                      <a:headEnd type="none" w="med" len="med"/>
+                      <a:tailEnd type="none" w="med" len="med"/>
+                    </a:lnB>
+                    <a:lnTlToBr w="12700" cmpd="sng">
+                      <a:noFill/>
+                      <a:prstDash val="solid"/>
+                    </a:lnTlToBr>
+                    <a:lnBlToTr w="12700" cmpd="sng">
+                      <a:noFill/>
+                      <a:prstDash val="solid"/>
+                    </a:lnBlToTr>
+                    <a:solidFill>
+                      <a:schemeClr val="bg1"/>
+                    </a:solidFill>
+                  </a:tcPr>
+                </a:tc>
+                <a:tc>
+                  <a:txBody>
+                    <a:bodyPr/>
+                    <a:lstStyle/>
+                    <a:p>
+                      <a:pPr algn="ctr"/>
+                      <a:r>
+                        <a:rPr lang="en-IN" b="1" dirty="0">
+                          <a:solidFill>
+                            <a:srgbClr val="334155"/>
+                          </a:solidFill>
+                          <a:effectLst/>
+                          <a:latin typeface="Barlow Medium" panose="00000600000000000000" pitchFamily="2" charset="0"/>
+                        </a:rPr>
+                        <a:t>0.1733</a:t>
+                      </a:r>
+                    </a:p>
+                  </a:txBody>
+                  <a:tcPr anchor="ctr">
+                    <a:lnL w="3175" cap="flat" cmpd="sng" algn="ctr">
+                      <a:noFill/>
+                      <a:prstDash val="solid"/>
+                      <a:round/>
+                      <a:headEnd type="none" w="med" len="med"/>
+                      <a:tailEnd type="none" w="med" len="med"/>
+                    </a:lnL>
+                    <a:lnR w="3175" cap="flat" cmpd="sng" algn="ctr">
+                      <a:noFill/>
+                      <a:prstDash val="solid"/>
+                      <a:round/>
+                      <a:headEnd type="none" w="med" len="med"/>
+                      <a:tailEnd type="none" w="med" len="med"/>
+                    </a:lnR>
+                    <a:lnT w="3175" cap="flat" cmpd="sng" algn="ctr">
+                      <a:solidFill>
+                        <a:schemeClr val="tx1"/>
+                      </a:solidFill>
+                      <a:prstDash val="solid"/>
+                      <a:round/>
+                      <a:headEnd type="none" w="med" len="med"/>
+                      <a:tailEnd type="none" w="med" len="med"/>
+                    </a:lnT>
+                    <a:lnB w="3175" cap="flat" cmpd="sng" algn="ctr">
+                      <a:solidFill>
+                        <a:schemeClr val="tx1"/>
+                      </a:solidFill>
+                      <a:prstDash val="solid"/>
+                      <a:round/>
+                      <a:headEnd type="none" w="med" len="med"/>
+                      <a:tailEnd type="none" w="med" len="med"/>
+                    </a:lnB>
+                    <a:lnTlToBr w="12700" cmpd="sng">
+                      <a:noFill/>
+                      <a:prstDash val="solid"/>
+                    </a:lnTlToBr>
+                    <a:lnBlToTr w="12700" cmpd="sng">
+                      <a:noFill/>
+                      <a:prstDash val="solid"/>
+                    </a:lnBlToTr>
+                    <a:solidFill>
+                      <a:srgbClr val="92D050"/>
+                    </a:solidFill>
+                  </a:tcPr>
+                </a:tc>
+                <a:tc>
+                  <a:txBody>
+                    <a:bodyPr/>
+                    <a:lstStyle/>
+                    <a:p>
+                      <a:pPr algn="ctr"/>
+                      <a:r>
+                        <a:rPr lang="en-IN" dirty="0">
+                          <a:solidFill>
+                            <a:srgbClr val="334155"/>
+                          </a:solidFill>
+                          <a:effectLst/>
+                          <a:latin typeface="Barlow Medium" panose="00000600000000000000" pitchFamily="2" charset="0"/>
+                        </a:rPr>
+                        <a:t>0.8163</a:t>
+                      </a:r>
+                    </a:p>
+                  </a:txBody>
+                  <a:tcPr anchor="ctr">
+                    <a:lnL w="3175" cap="flat" cmpd="sng" algn="ctr">
+                      <a:noFill/>
+                      <a:prstDash val="solid"/>
+                      <a:round/>
+                      <a:headEnd type="none" w="med" len="med"/>
+                      <a:tailEnd type="none" w="med" len="med"/>
+                    </a:lnL>
+                    <a:lnR w="9525" cap="rnd" cmpd="sng" algn="ctr">
+                      <a:noFill/>
+                      <a:prstDash val="solid"/>
+                    </a:lnR>
+                    <a:lnT w="3175" cap="flat" cmpd="sng" algn="ctr">
+                      <a:solidFill>
+                        <a:schemeClr val="tx1"/>
+                      </a:solidFill>
+                      <a:prstDash val="solid"/>
+                      <a:round/>
+                      <a:headEnd type="none" w="med" len="med"/>
+                      <a:tailEnd type="none" w="med" len="med"/>
+                    </a:lnT>
+                    <a:lnB w="3175" cap="flat" cmpd="sng" algn="ctr">
+                      <a:solidFill>
+                        <a:schemeClr val="tx1"/>
+                      </a:solidFill>
+                      <a:prstDash val="solid"/>
+                      <a:round/>
+                      <a:headEnd type="none" w="med" len="med"/>
+                      <a:tailEnd type="none" w="med" len="med"/>
+                    </a:lnB>
+                    <a:lnTlToBr w="12700" cmpd="sng">
+                      <a:noFill/>
+                      <a:prstDash val="solid"/>
+                    </a:lnTlToBr>
+                    <a:lnBlToTr w="12700" cmpd="sng">
+                      <a:noFill/>
+                      <a:prstDash val="solid"/>
+                    </a:lnBlToTr>
+                    <a:solidFill>
+                      <a:schemeClr val="bg1"/>
+                    </a:solidFill>
+                  </a:tcPr>
+                </a:tc>
+                <a:extLst>
+                  <a:ext uri="{0D108BD9-81ED-4DB2-BD59-A6C34878D82A}">
+                    <a16:rowId xmlns:a16="http://schemas.microsoft.com/office/drawing/2014/main" val="2563015135"/>
+                  </a:ext>
+                </a:extLst>
+              </a:tr>
+              <a:tr h="432351">
+                <a:tc vMerge="1">
+                  <a:txBody>
+                    <a:bodyPr/>
+                    <a:lstStyle/>
+                    <a:p>
+                      <a:endParaRPr dirty="0"/>
+                    </a:p>
+                  </a:txBody>
+                  <a:tcPr anchor="ctr">
+                    <a:lnL w="12700" cap="flat" cmpd="sng" algn="ctr">
+                      <a:solidFill>
+                        <a:schemeClr val="tx1"/>
+                      </a:solidFill>
+                      <a:prstDash val="solid"/>
+                      <a:round/>
+                      <a:headEnd type="none" w="med" len="med"/>
+                      <a:tailEnd type="none" w="med" len="med"/>
+                    </a:lnL>
+                    <a:lnR w="3175" cap="flat" cmpd="sng" algn="ctr">
+                      <a:noFill/>
+                      <a:prstDash val="solid"/>
+                      <a:round/>
+                      <a:headEnd type="none" w="med" len="med"/>
+                      <a:tailEnd type="none" w="med" len="med"/>
+                    </a:lnR>
+                    <a:lnT w="3175" cap="flat" cmpd="sng" algn="ctr">
+                      <a:solidFill>
+                        <a:schemeClr val="tx1"/>
+                      </a:solidFill>
+                      <a:prstDash val="solid"/>
+                      <a:round/>
+                      <a:headEnd type="none" w="med" len="med"/>
+                      <a:tailEnd type="none" w="med" len="med"/>
+                    </a:lnT>
+                    <a:lnB w="3175" cap="flat" cmpd="sng" algn="ctr">
+                      <a:solidFill>
+                        <a:schemeClr val="tx1"/>
+                      </a:solidFill>
+                      <a:prstDash val="solid"/>
+                      <a:round/>
+                      <a:headEnd type="none" w="med" len="med"/>
+                      <a:tailEnd type="none" w="med" len="med"/>
+                    </a:lnB>
+                    <a:lnTlToBr w="12700" cmpd="sng">
+                      <a:noFill/>
+                      <a:prstDash val="solid"/>
+                    </a:lnTlToBr>
+                    <a:lnBlToTr w="12700" cmpd="sng">
+                      <a:noFill/>
+                      <a:prstDash val="solid"/>
+                    </a:lnBlToTr>
+                    <a:solidFill>
+                      <a:schemeClr val="bg1"/>
+                    </a:solidFill>
+                  </a:tcPr>
+                </a:tc>
+                <a:tc>
+                  <a:txBody>
+                    <a:bodyPr/>
+                    <a:lstStyle/>
+                    <a:p>
+                      <a:pPr algn="ctr"/>
+                      <a:r>
+                        <a:rPr lang="en-IN" dirty="0">
+                          <a:solidFill>
+                            <a:srgbClr val="334155"/>
+                          </a:solidFill>
+                          <a:effectLst/>
+                          <a:latin typeface="Barlow Medium" panose="00000600000000000000" pitchFamily="2" charset="0"/>
+                        </a:rPr>
+                        <a:t>Lion</a:t>
+                      </a:r>
+                    </a:p>
+                  </a:txBody>
+                  <a:tcPr anchor="ctr">
+                    <a:lnL w="3175" cap="flat" cmpd="sng" algn="ctr">
+                      <a:noFill/>
+                      <a:prstDash val="solid"/>
+                      <a:round/>
+                      <a:headEnd type="none" w="med" len="med"/>
+                      <a:tailEnd type="none" w="med" len="med"/>
+                    </a:lnL>
+                    <a:lnR w="3175" cap="flat" cmpd="sng" algn="ctr">
+                      <a:noFill/>
+                      <a:prstDash val="solid"/>
+                      <a:round/>
+                      <a:headEnd type="none" w="med" len="med"/>
+                      <a:tailEnd type="none" w="med" len="med"/>
+                    </a:lnR>
+                    <a:lnT w="3175" cap="flat" cmpd="sng" algn="ctr">
+                      <a:solidFill>
+                        <a:schemeClr val="tx1"/>
+                      </a:solidFill>
+                      <a:prstDash val="solid"/>
+                      <a:round/>
+                      <a:headEnd type="none" w="med" len="med"/>
+                      <a:tailEnd type="none" w="med" len="med"/>
+                    </a:lnT>
+                    <a:lnB w="3175" cap="flat" cmpd="sng" algn="ctr">
+                      <a:solidFill>
+                        <a:schemeClr val="tx1"/>
+                      </a:solidFill>
+                      <a:prstDash val="solid"/>
+                      <a:round/>
+                      <a:headEnd type="none" w="med" len="med"/>
+                      <a:tailEnd type="none" w="med" len="med"/>
+                    </a:lnB>
+                    <a:lnTlToBr w="12700" cmpd="sng">
+                      <a:noFill/>
+                      <a:prstDash val="solid"/>
+                    </a:lnTlToBr>
+                    <a:lnBlToTr w="12700" cmpd="sng">
+                      <a:noFill/>
+                      <a:prstDash val="solid"/>
+                    </a:lnBlToTr>
+                    <a:solidFill>
+                      <a:schemeClr val="bg1"/>
+                    </a:solidFill>
+                  </a:tcPr>
+                </a:tc>
+                <a:tc>
+                  <a:txBody>
+                    <a:bodyPr/>
+                    <a:lstStyle/>
+                    <a:p>
+                      <a:pPr algn="ctr"/>
+                      <a:r>
+                        <a:rPr lang="en-IN" dirty="0">
+                          <a:solidFill>
+                            <a:srgbClr val="334155"/>
+                          </a:solidFill>
+                          <a:effectLst/>
+                          <a:latin typeface="Barlow Medium" panose="00000600000000000000" pitchFamily="2" charset="0"/>
+                        </a:rPr>
+                        <a:t>0.6909</a:t>
+                      </a:r>
+                    </a:p>
+                  </a:txBody>
+                  <a:tcPr anchor="ctr">
+                    <a:lnL w="3175" cap="flat" cmpd="sng" algn="ctr">
+                      <a:noFill/>
+                      <a:prstDash val="solid"/>
+                      <a:round/>
+                      <a:headEnd type="none" w="med" len="med"/>
+                      <a:tailEnd type="none" w="med" len="med"/>
+                    </a:lnL>
+                    <a:lnR w="3175" cap="flat" cmpd="sng" algn="ctr">
+                      <a:noFill/>
+                      <a:prstDash val="solid"/>
+                      <a:round/>
+                      <a:headEnd type="none" w="med" len="med"/>
+                      <a:tailEnd type="none" w="med" len="med"/>
+                    </a:lnR>
+                    <a:lnT w="3175" cap="flat" cmpd="sng" algn="ctr">
+                      <a:solidFill>
+                        <a:schemeClr val="tx1"/>
+                      </a:solidFill>
+                      <a:prstDash val="solid"/>
+                      <a:round/>
+                      <a:headEnd type="none" w="med" len="med"/>
+                      <a:tailEnd type="none" w="med" len="med"/>
+                    </a:lnT>
+                    <a:lnB w="3175" cap="flat" cmpd="sng" algn="ctr">
+                      <a:solidFill>
+                        <a:schemeClr val="tx1"/>
+                      </a:solidFill>
+                      <a:prstDash val="solid"/>
+                      <a:round/>
+                      <a:headEnd type="none" w="med" len="med"/>
+                      <a:tailEnd type="none" w="med" len="med"/>
+                    </a:lnB>
+                    <a:lnTlToBr w="12700" cmpd="sng">
+                      <a:noFill/>
+                      <a:prstDash val="solid"/>
+                    </a:lnTlToBr>
+                    <a:lnBlToTr w="12700" cmpd="sng">
+                      <a:noFill/>
+                      <a:prstDash val="solid"/>
+                    </a:lnBlToTr>
+                    <a:solidFill>
+                      <a:schemeClr val="bg1"/>
+                    </a:solidFill>
+                  </a:tcPr>
+                </a:tc>
+                <a:tc>
+                  <a:txBody>
+                    <a:bodyPr/>
+                    <a:lstStyle/>
+                    <a:p>
+                      <a:pPr algn="ctr"/>
+                      <a:r>
+                        <a:rPr lang="en-IN" dirty="0">
+                          <a:solidFill>
+                            <a:srgbClr val="334155"/>
+                          </a:solidFill>
+                          <a:effectLst/>
+                          <a:latin typeface="Barlow Medium" panose="00000600000000000000" pitchFamily="2" charset="0"/>
+                        </a:rPr>
+                        <a:t>0.4921</a:t>
+                      </a:r>
+                    </a:p>
+                  </a:txBody>
+                  <a:tcPr anchor="ctr">
+                    <a:lnL w="3175" cap="flat" cmpd="sng" algn="ctr">
+                      <a:noFill/>
+                      <a:prstDash val="solid"/>
+                      <a:round/>
+                      <a:headEnd type="none" w="med" len="med"/>
+                      <a:tailEnd type="none" w="med" len="med"/>
+                    </a:lnL>
+                    <a:lnR w="3175" cap="flat" cmpd="sng" algn="ctr">
+                      <a:noFill/>
+                      <a:prstDash val="solid"/>
+                      <a:round/>
+                      <a:headEnd type="none" w="med" len="med"/>
+                      <a:tailEnd type="none" w="med" len="med"/>
+                    </a:lnR>
+                    <a:lnT w="3175" cap="flat" cmpd="sng" algn="ctr">
+                      <a:solidFill>
+                        <a:schemeClr val="tx1"/>
+                      </a:solidFill>
+                      <a:prstDash val="solid"/>
+                      <a:round/>
+                      <a:headEnd type="none" w="med" len="med"/>
+                      <a:tailEnd type="none" w="med" len="med"/>
+                    </a:lnT>
+                    <a:lnB w="3175" cap="flat" cmpd="sng" algn="ctr">
+                      <a:solidFill>
+                        <a:schemeClr val="tx1"/>
+                      </a:solidFill>
+                      <a:prstDash val="solid"/>
+                      <a:round/>
+                      <a:headEnd type="none" w="med" len="med"/>
+                      <a:tailEnd type="none" w="med" len="med"/>
+                    </a:lnB>
+                    <a:lnTlToBr w="12700" cmpd="sng">
+                      <a:noFill/>
+                      <a:prstDash val="solid"/>
+                    </a:lnTlToBr>
+                    <a:lnBlToTr w="12700" cmpd="sng">
+                      <a:noFill/>
+                      <a:prstDash val="solid"/>
+                    </a:lnBlToTr>
+                    <a:solidFill>
+                      <a:schemeClr val="bg1"/>
+                    </a:solidFill>
+                  </a:tcPr>
+                </a:tc>
+                <a:tc>
+                  <a:txBody>
+                    <a:bodyPr/>
+                    <a:lstStyle/>
+                    <a:p>
+                      <a:pPr algn="ctr"/>
+                      <a:r>
+                        <a:rPr lang="en-IN" dirty="0">
+                          <a:solidFill>
+                            <a:srgbClr val="334155"/>
+                          </a:solidFill>
+                          <a:effectLst/>
+                          <a:latin typeface="Barlow Medium" panose="00000600000000000000" pitchFamily="2" charset="0"/>
+                        </a:rPr>
+                        <a:t>0.5957</a:t>
+                      </a:r>
+                    </a:p>
+                  </a:txBody>
+                  <a:tcPr anchor="ctr">
+                    <a:lnL w="3175" cap="flat" cmpd="sng" algn="ctr">
+                      <a:noFill/>
+                      <a:prstDash val="solid"/>
+                      <a:round/>
+                      <a:headEnd type="none" w="med" len="med"/>
+                      <a:tailEnd type="none" w="med" len="med"/>
+                    </a:lnL>
+                    <a:lnR w="3175" cap="flat" cmpd="sng" algn="ctr">
+                      <a:noFill/>
+                      <a:prstDash val="solid"/>
+                      <a:round/>
+                      <a:headEnd type="none" w="med" len="med"/>
+                      <a:tailEnd type="none" w="med" len="med"/>
+                    </a:lnR>
+                    <a:lnT w="3175" cap="flat" cmpd="sng" algn="ctr">
+                      <a:solidFill>
+                        <a:schemeClr val="tx1"/>
+                      </a:solidFill>
+                      <a:prstDash val="solid"/>
+                      <a:round/>
+                      <a:headEnd type="none" w="med" len="med"/>
+                      <a:tailEnd type="none" w="med" len="med"/>
+                    </a:lnT>
+                    <a:lnB w="3175" cap="flat" cmpd="sng" algn="ctr">
+                      <a:solidFill>
+                        <a:schemeClr val="tx1"/>
+                      </a:solidFill>
+                      <a:prstDash val="solid"/>
+                      <a:round/>
+                      <a:headEnd type="none" w="med" len="med"/>
+                      <a:tailEnd type="none" w="med" len="med"/>
+                    </a:lnB>
+                    <a:lnTlToBr w="12700" cmpd="sng">
+                      <a:noFill/>
+                      <a:prstDash val="solid"/>
+                    </a:lnTlToBr>
+                    <a:lnBlToTr w="12700" cmpd="sng">
+                      <a:noFill/>
+                      <a:prstDash val="solid"/>
+                    </a:lnBlToTr>
+                    <a:solidFill>
+                      <a:schemeClr val="bg1"/>
+                    </a:solidFill>
+                  </a:tcPr>
+                </a:tc>
+                <a:tc>
+                  <a:txBody>
+                    <a:bodyPr/>
+                    <a:lstStyle/>
+                    <a:p>
+                      <a:pPr algn="ctr"/>
+                      <a:r>
+                        <a:rPr lang="en-IN" dirty="0">
+                          <a:solidFill>
+                            <a:srgbClr val="334155"/>
+                          </a:solidFill>
+                          <a:effectLst/>
+                          <a:latin typeface="Barlow Medium" panose="00000600000000000000" pitchFamily="2" charset="0"/>
+                        </a:rPr>
+                        <a:t>0.1721</a:t>
+                      </a:r>
+                    </a:p>
+                  </a:txBody>
+                  <a:tcPr anchor="ctr">
+                    <a:lnL w="3175" cap="flat" cmpd="sng" algn="ctr">
+                      <a:noFill/>
+                      <a:prstDash val="solid"/>
+                      <a:round/>
+                      <a:headEnd type="none" w="med" len="med"/>
+                      <a:tailEnd type="none" w="med" len="med"/>
+                    </a:lnL>
+                    <a:lnR w="3175" cap="flat" cmpd="sng" algn="ctr">
+                      <a:noFill/>
+                      <a:prstDash val="solid"/>
+                      <a:round/>
+                      <a:headEnd type="none" w="med" len="med"/>
+                      <a:tailEnd type="none" w="med" len="med"/>
+                    </a:lnR>
+                    <a:lnT w="3175" cap="flat" cmpd="sng" algn="ctr">
+                      <a:solidFill>
+                        <a:schemeClr val="tx1"/>
+                      </a:solidFill>
+                      <a:prstDash val="solid"/>
+                      <a:round/>
+                      <a:headEnd type="none" w="med" len="med"/>
+                      <a:tailEnd type="none" w="med" len="med"/>
+                    </a:lnT>
+                    <a:lnB w="3175" cap="flat" cmpd="sng" algn="ctr">
+                      <a:solidFill>
+                        <a:schemeClr val="tx1"/>
+                      </a:solidFill>
+                      <a:prstDash val="solid"/>
+                      <a:round/>
+                      <a:headEnd type="none" w="med" len="med"/>
+                      <a:tailEnd type="none" w="med" len="med"/>
+                    </a:lnB>
+                    <a:lnTlToBr w="12700" cmpd="sng">
+                      <a:noFill/>
+                      <a:prstDash val="solid"/>
+                    </a:lnTlToBr>
+                    <a:lnBlToTr w="12700" cmpd="sng">
+                      <a:noFill/>
+                      <a:prstDash val="solid"/>
+                    </a:lnBlToTr>
+                    <a:solidFill>
+                      <a:schemeClr val="bg1"/>
+                    </a:solidFill>
+                  </a:tcPr>
+                </a:tc>
+                <a:tc>
+                  <a:txBody>
+                    <a:bodyPr/>
+                    <a:lstStyle/>
+                    <a:p>
+                      <a:pPr algn="ctr"/>
+                      <a:r>
+                        <a:rPr lang="en-IN" dirty="0">
+                          <a:solidFill>
+                            <a:srgbClr val="334155"/>
+                          </a:solidFill>
+                          <a:effectLst/>
+                          <a:latin typeface="Barlow Medium" panose="00000600000000000000" pitchFamily="2" charset="0"/>
+                        </a:rPr>
+                        <a:t>0.8140</a:t>
+                      </a:r>
+                    </a:p>
+                  </a:txBody>
+                  <a:tcPr anchor="ctr">
+                    <a:lnL w="3175" cap="flat" cmpd="sng" algn="ctr">
+                      <a:noFill/>
+                      <a:prstDash val="solid"/>
+                      <a:round/>
+                      <a:headEnd type="none" w="med" len="med"/>
+                      <a:tailEnd type="none" w="med" len="med"/>
+                    </a:lnL>
+                    <a:lnR w="9525" cap="rnd" cmpd="sng" algn="ctr">
+                      <a:noFill/>
+                      <a:prstDash val="solid"/>
+                    </a:lnR>
+                    <a:lnT w="3175" cap="flat" cmpd="sng" algn="ctr">
+                      <a:solidFill>
+                        <a:schemeClr val="tx1"/>
+                      </a:solidFill>
+                      <a:prstDash val="solid"/>
+                      <a:round/>
+                      <a:headEnd type="none" w="med" len="med"/>
+                      <a:tailEnd type="none" w="med" len="med"/>
+                    </a:lnT>
+                    <a:lnB w="3175" cap="flat" cmpd="sng" algn="ctr">
+                      <a:solidFill>
+                        <a:schemeClr val="tx1"/>
+                      </a:solidFill>
+                      <a:prstDash val="solid"/>
+                      <a:round/>
+                      <a:headEnd type="none" w="med" len="med"/>
+                      <a:tailEnd type="none" w="med" len="med"/>
+                    </a:lnB>
+                    <a:lnTlToBr w="12700" cmpd="sng">
+                      <a:noFill/>
+                      <a:prstDash val="solid"/>
+                    </a:lnTlToBr>
+                    <a:lnBlToTr w="12700" cmpd="sng">
+                      <a:noFill/>
+                      <a:prstDash val="solid"/>
+                    </a:lnBlToTr>
+                    <a:solidFill>
+                      <a:schemeClr val="bg1"/>
+                    </a:solidFill>
+                  </a:tcPr>
+                </a:tc>
+                <a:extLst>
+                  <a:ext uri="{0D108BD9-81ED-4DB2-BD59-A6C34878D82A}">
+                    <a16:rowId xmlns:a16="http://schemas.microsoft.com/office/drawing/2014/main" val="1269825113"/>
+                  </a:ext>
+                </a:extLst>
+              </a:tr>
+              <a:tr h="432351">
+                <a:tc rowSpan="2">
+                  <a:txBody>
+                    <a:bodyPr/>
+                    <a:lstStyle/>
+                    <a:p>
+                      <a:pPr algn="ctr"/>
+                      <a:r>
+                        <a:rPr lang="en-IN" b="1" dirty="0">
+                          <a:solidFill>
+                            <a:srgbClr val="334155"/>
+                          </a:solidFill>
+                          <a:effectLst/>
+                          <a:latin typeface="Barlow Medium" panose="00000600000000000000" pitchFamily="2" charset="0"/>
+                        </a:rPr>
+                        <a:t>ModernBERT</a:t>
+                      </a:r>
+                    </a:p>
+                  </a:txBody>
+                  <a:tcPr anchor="ctr">
+                    <a:lnL w="12700" cap="flat" cmpd="sng" algn="ctr">
+                      <a:solidFill>
+                        <a:schemeClr val="tx1"/>
+                      </a:solidFill>
+                      <a:prstDash val="solid"/>
+                      <a:round/>
+                      <a:headEnd type="none" w="med" len="med"/>
+                      <a:tailEnd type="none" w="med" len="med"/>
+                    </a:lnL>
+                    <a:lnR w="3175" cap="flat" cmpd="sng" algn="ctr">
+                      <a:noFill/>
+                      <a:prstDash val="solid"/>
+                      <a:round/>
+                      <a:headEnd type="none" w="med" len="med"/>
+                      <a:tailEnd type="none" w="med" len="med"/>
+                    </a:lnR>
+                    <a:lnT w="3175" cap="flat" cmpd="sng" algn="ctr">
+                      <a:solidFill>
+                        <a:schemeClr val="tx1"/>
+                      </a:solidFill>
+                      <a:prstDash val="solid"/>
+                      <a:round/>
+                      <a:headEnd type="none" w="med" len="med"/>
+                      <a:tailEnd type="none" w="med" len="med"/>
+                    </a:lnT>
+                    <a:lnB w="9525" cap="rnd" cmpd="sng" algn="ctr">
+                      <a:noFill/>
+                      <a:prstDash val="solid"/>
+                    </a:lnB>
+                    <a:lnTlToBr w="12700" cmpd="sng">
+                      <a:noFill/>
+                      <a:prstDash val="solid"/>
+                    </a:lnTlToBr>
+                    <a:lnBlToTr w="12700" cmpd="sng">
+                      <a:noFill/>
+                      <a:prstDash val="solid"/>
+                    </a:lnBlToTr>
+                    <a:solidFill>
+                      <a:schemeClr val="bg1"/>
+                    </a:solidFill>
+                  </a:tcPr>
+                </a:tc>
+                <a:tc>
+                  <a:txBody>
+                    <a:bodyPr/>
+                    <a:lstStyle/>
+                    <a:p>
+                      <a:pPr algn="ctr"/>
+                      <a:r>
+                        <a:rPr lang="en-IN">
+                          <a:solidFill>
+                            <a:srgbClr val="334155"/>
+                          </a:solidFill>
+                          <a:effectLst/>
+                          <a:latin typeface="Barlow Medium" panose="00000600000000000000" pitchFamily="2" charset="0"/>
+                        </a:rPr>
+                        <a:t>AdamW</a:t>
+                      </a:r>
+                    </a:p>
+                  </a:txBody>
+                  <a:tcPr anchor="ctr">
+                    <a:lnL w="3175" cap="flat" cmpd="sng" algn="ctr">
+                      <a:noFill/>
+                      <a:prstDash val="solid"/>
+                      <a:round/>
+                      <a:headEnd type="none" w="med" len="med"/>
+                      <a:tailEnd type="none" w="med" len="med"/>
+                    </a:lnL>
+                    <a:lnR w="3175" cap="flat" cmpd="sng" algn="ctr">
+                      <a:noFill/>
+                      <a:prstDash val="solid"/>
+                      <a:round/>
+                      <a:headEnd type="none" w="med" len="med"/>
+                      <a:tailEnd type="none" w="med" len="med"/>
+                    </a:lnR>
+                    <a:lnT w="3175" cap="flat" cmpd="sng" algn="ctr">
+                      <a:solidFill>
+                        <a:schemeClr val="tx1"/>
+                      </a:solidFill>
+                      <a:prstDash val="solid"/>
+                      <a:round/>
+                      <a:headEnd type="none" w="med" len="med"/>
+                      <a:tailEnd type="none" w="med" len="med"/>
+                    </a:lnT>
+                    <a:lnB w="3175" cap="flat" cmpd="sng" algn="ctr">
+                      <a:solidFill>
+                        <a:schemeClr val="tx1"/>
+                      </a:solidFill>
+                      <a:prstDash val="solid"/>
+                      <a:round/>
+                      <a:headEnd type="none" w="med" len="med"/>
+                      <a:tailEnd type="none" w="med" len="med"/>
+                    </a:lnB>
+                    <a:lnTlToBr w="12700" cmpd="sng">
+                      <a:noFill/>
+                      <a:prstDash val="solid"/>
+                    </a:lnTlToBr>
+                    <a:lnBlToTr w="12700" cmpd="sng">
+                      <a:noFill/>
+                      <a:prstDash val="solid"/>
+                    </a:lnBlToTr>
+                    <a:solidFill>
+                      <a:schemeClr val="bg1"/>
+                    </a:solidFill>
+                  </a:tcPr>
+                </a:tc>
+                <a:tc>
+                  <a:txBody>
+                    <a:bodyPr/>
+                    <a:lstStyle/>
+                    <a:p>
+                      <a:pPr algn="ctr"/>
+                      <a:r>
+                        <a:rPr lang="en-IN">
+                          <a:solidFill>
+                            <a:srgbClr val="334155"/>
+                          </a:solidFill>
+                          <a:effectLst/>
+                          <a:latin typeface="Barlow Medium" panose="00000600000000000000" pitchFamily="2" charset="0"/>
+                        </a:rPr>
+                        <a:t>0.7105</a:t>
+                      </a:r>
+                    </a:p>
+                  </a:txBody>
+                  <a:tcPr anchor="ctr">
+                    <a:lnL w="3175" cap="flat" cmpd="sng" algn="ctr">
+                      <a:noFill/>
+                      <a:prstDash val="solid"/>
+                      <a:round/>
+                      <a:headEnd type="none" w="med" len="med"/>
+                      <a:tailEnd type="none" w="med" len="med"/>
+                    </a:lnL>
+                    <a:lnR w="3175" cap="flat" cmpd="sng" algn="ctr">
+                      <a:noFill/>
+                      <a:prstDash val="solid"/>
+                      <a:round/>
+                      <a:headEnd type="none" w="med" len="med"/>
+                      <a:tailEnd type="none" w="med" len="med"/>
+                    </a:lnR>
+                    <a:lnT w="3175" cap="flat" cmpd="sng" algn="ctr">
+                      <a:solidFill>
+                        <a:schemeClr val="tx1"/>
+                      </a:solidFill>
+                      <a:prstDash val="solid"/>
+                      <a:round/>
+                      <a:headEnd type="none" w="med" len="med"/>
+                      <a:tailEnd type="none" w="med" len="med"/>
+                    </a:lnT>
+                    <a:lnB w="3175" cap="flat" cmpd="sng" algn="ctr">
+                      <a:solidFill>
+                        <a:schemeClr val="tx1"/>
+                      </a:solidFill>
+                      <a:prstDash val="solid"/>
+                      <a:round/>
+                      <a:headEnd type="none" w="med" len="med"/>
+                      <a:tailEnd type="none" w="med" len="med"/>
+                    </a:lnB>
+                    <a:lnTlToBr w="12700" cmpd="sng">
+                      <a:noFill/>
+                      <a:prstDash val="solid"/>
+                    </a:lnTlToBr>
+                    <a:lnBlToTr w="12700" cmpd="sng">
+                      <a:noFill/>
+                      <a:prstDash val="solid"/>
+                    </a:lnBlToTr>
+                    <a:solidFill>
+                      <a:schemeClr val="bg1"/>
+                    </a:solidFill>
+                  </a:tcPr>
+                </a:tc>
+                <a:tc>
+                  <a:txBody>
+                    <a:bodyPr/>
+                    <a:lstStyle/>
+                    <a:p>
+                      <a:pPr algn="ctr"/>
+                      <a:r>
+                        <a:rPr lang="en-IN">
+                          <a:solidFill>
+                            <a:srgbClr val="334155"/>
+                          </a:solidFill>
+                          <a:effectLst/>
+                          <a:latin typeface="Barlow Medium" panose="00000600000000000000" pitchFamily="2" charset="0"/>
+                        </a:rPr>
+                        <a:t>0.5066</a:t>
+                      </a:r>
+                    </a:p>
+                  </a:txBody>
+                  <a:tcPr anchor="ctr">
+                    <a:lnL w="3175" cap="flat" cmpd="sng" algn="ctr">
+                      <a:noFill/>
+                      <a:prstDash val="solid"/>
+                      <a:round/>
+                      <a:headEnd type="none" w="med" len="med"/>
+                      <a:tailEnd type="none" w="med" len="med"/>
+                    </a:lnL>
+                    <a:lnR w="3175" cap="flat" cmpd="sng" algn="ctr">
+                      <a:noFill/>
+                      <a:prstDash val="solid"/>
+                      <a:round/>
+                      <a:headEnd type="none" w="med" len="med"/>
+                      <a:tailEnd type="none" w="med" len="med"/>
+                    </a:lnR>
+                    <a:lnT w="3175" cap="flat" cmpd="sng" algn="ctr">
+                      <a:solidFill>
+                        <a:schemeClr val="tx1"/>
+                      </a:solidFill>
+                      <a:prstDash val="solid"/>
+                      <a:round/>
+                      <a:headEnd type="none" w="med" len="med"/>
+                      <a:tailEnd type="none" w="med" len="med"/>
+                    </a:lnT>
+                    <a:lnB w="3175" cap="flat" cmpd="sng" algn="ctr">
+                      <a:solidFill>
+                        <a:schemeClr val="tx1"/>
+                      </a:solidFill>
+                      <a:prstDash val="solid"/>
+                      <a:round/>
+                      <a:headEnd type="none" w="med" len="med"/>
+                      <a:tailEnd type="none" w="med" len="med"/>
+                    </a:lnB>
+                    <a:lnTlToBr w="12700" cmpd="sng">
+                      <a:noFill/>
+                      <a:prstDash val="solid"/>
+                    </a:lnTlToBr>
+                    <a:lnBlToTr w="12700" cmpd="sng">
+                      <a:noFill/>
+                      <a:prstDash val="solid"/>
+                    </a:lnBlToTr>
+                    <a:solidFill>
+                      <a:schemeClr val="bg1"/>
+                    </a:solidFill>
+                  </a:tcPr>
+                </a:tc>
+                <a:tc>
+                  <a:txBody>
+                    <a:bodyPr/>
+                    <a:lstStyle/>
+                    <a:p>
+                      <a:pPr algn="ctr"/>
+                      <a:r>
+                        <a:rPr lang="en-IN" dirty="0">
+                          <a:solidFill>
+                            <a:srgbClr val="334155"/>
+                          </a:solidFill>
+                          <a:effectLst/>
+                          <a:latin typeface="Barlow Medium" panose="00000600000000000000" pitchFamily="2" charset="0"/>
+                        </a:rPr>
+                        <a:t>0.5916</a:t>
+                      </a:r>
+                    </a:p>
+                  </a:txBody>
+                  <a:tcPr anchor="ctr">
+                    <a:lnL w="3175" cap="flat" cmpd="sng" algn="ctr">
+                      <a:noFill/>
+                      <a:prstDash val="solid"/>
+                      <a:round/>
+                      <a:headEnd type="none" w="med" len="med"/>
+                      <a:tailEnd type="none" w="med" len="med"/>
+                    </a:lnL>
+                    <a:lnR w="3175" cap="flat" cmpd="sng" algn="ctr">
+                      <a:noFill/>
+                      <a:prstDash val="solid"/>
+                      <a:round/>
+                      <a:headEnd type="none" w="med" len="med"/>
+                      <a:tailEnd type="none" w="med" len="med"/>
+                    </a:lnR>
+                    <a:lnT w="3175" cap="flat" cmpd="sng" algn="ctr">
+                      <a:solidFill>
+                        <a:schemeClr val="tx1"/>
+                      </a:solidFill>
+                      <a:prstDash val="solid"/>
+                      <a:round/>
+                      <a:headEnd type="none" w="med" len="med"/>
+                      <a:tailEnd type="none" w="med" len="med"/>
+                    </a:lnT>
+                    <a:lnB w="3175" cap="flat" cmpd="sng" algn="ctr">
+                      <a:solidFill>
+                        <a:schemeClr val="tx1"/>
+                      </a:solidFill>
+                      <a:prstDash val="solid"/>
+                      <a:round/>
+                      <a:headEnd type="none" w="med" len="med"/>
+                      <a:tailEnd type="none" w="med" len="med"/>
+                    </a:lnB>
+                    <a:lnTlToBr w="12700" cmpd="sng">
+                      <a:noFill/>
+                      <a:prstDash val="solid"/>
+                    </a:lnTlToBr>
+                    <a:lnBlToTr w="12700" cmpd="sng">
+                      <a:noFill/>
+                      <a:prstDash val="solid"/>
+                    </a:lnBlToTr>
+                    <a:solidFill>
+                      <a:schemeClr val="bg1"/>
+                    </a:solidFill>
+                  </a:tcPr>
+                </a:tc>
+                <a:tc>
+                  <a:txBody>
+                    <a:bodyPr/>
+                    <a:lstStyle/>
+                    <a:p>
+                      <a:pPr algn="ctr"/>
+                      <a:r>
+                        <a:rPr lang="en-IN" dirty="0">
+                          <a:solidFill>
+                            <a:srgbClr val="334155"/>
+                          </a:solidFill>
+                          <a:effectLst/>
+                          <a:latin typeface="Barlow Medium" panose="00000600000000000000" pitchFamily="2" charset="0"/>
+                        </a:rPr>
+                        <a:t>0.1678</a:t>
+                      </a:r>
+                    </a:p>
+                  </a:txBody>
+                  <a:tcPr anchor="ctr">
+                    <a:lnL w="3175" cap="flat" cmpd="sng" algn="ctr">
+                      <a:noFill/>
+                      <a:prstDash val="solid"/>
+                      <a:round/>
+                      <a:headEnd type="none" w="med" len="med"/>
+                      <a:tailEnd type="none" w="med" len="med"/>
+                    </a:lnL>
+                    <a:lnR w="3175" cap="flat" cmpd="sng" algn="ctr">
+                      <a:noFill/>
+                      <a:prstDash val="solid"/>
+                      <a:round/>
+                      <a:headEnd type="none" w="med" len="med"/>
+                      <a:tailEnd type="none" w="med" len="med"/>
+                    </a:lnR>
+                    <a:lnT w="3175" cap="flat" cmpd="sng" algn="ctr">
+                      <a:solidFill>
+                        <a:schemeClr val="tx1"/>
+                      </a:solidFill>
+                      <a:prstDash val="solid"/>
+                      <a:round/>
+                      <a:headEnd type="none" w="med" len="med"/>
+                      <a:tailEnd type="none" w="med" len="med"/>
+                    </a:lnT>
+                    <a:lnB w="3175" cap="flat" cmpd="sng" algn="ctr">
+                      <a:solidFill>
+                        <a:schemeClr val="tx1"/>
+                      </a:solidFill>
+                      <a:prstDash val="solid"/>
+                      <a:round/>
+                      <a:headEnd type="none" w="med" len="med"/>
+                      <a:tailEnd type="none" w="med" len="med"/>
+                    </a:lnB>
+                    <a:lnTlToBr w="12700" cmpd="sng">
+                      <a:noFill/>
+                      <a:prstDash val="solid"/>
+                    </a:lnTlToBr>
+                    <a:lnBlToTr w="12700" cmpd="sng">
+                      <a:noFill/>
+                      <a:prstDash val="solid"/>
+                    </a:lnBlToTr>
+                    <a:solidFill>
+                      <a:schemeClr val="bg1"/>
+                    </a:solidFill>
+                  </a:tcPr>
+                </a:tc>
+                <a:tc>
+                  <a:txBody>
+                    <a:bodyPr/>
+                    <a:lstStyle/>
+                    <a:p>
+                      <a:pPr algn="ctr"/>
+                      <a:r>
+                        <a:rPr lang="en-IN" dirty="0">
+                          <a:solidFill>
+                            <a:srgbClr val="334155"/>
+                          </a:solidFill>
+                          <a:effectLst/>
+                          <a:latin typeface="Barlow Medium" panose="00000600000000000000" pitchFamily="2" charset="0"/>
+                        </a:rPr>
+                        <a:t>0.8163</a:t>
+                      </a:r>
+                    </a:p>
+                  </a:txBody>
+                  <a:tcPr anchor="ctr">
+                    <a:lnL w="3175" cap="flat" cmpd="sng" algn="ctr">
+                      <a:noFill/>
+                      <a:prstDash val="solid"/>
+                      <a:round/>
+                      <a:headEnd type="none" w="med" len="med"/>
+                      <a:tailEnd type="none" w="med" len="med"/>
+                    </a:lnL>
+                    <a:lnR w="9525" cap="rnd" cmpd="sng" algn="ctr">
+                      <a:noFill/>
+                      <a:prstDash val="solid"/>
+                    </a:lnR>
+                    <a:lnT w="3175" cap="flat" cmpd="sng" algn="ctr">
+                      <a:solidFill>
+                        <a:schemeClr val="tx1"/>
+                      </a:solidFill>
+                      <a:prstDash val="solid"/>
+                      <a:round/>
+                      <a:headEnd type="none" w="med" len="med"/>
+                      <a:tailEnd type="none" w="med" len="med"/>
+                    </a:lnT>
+                    <a:lnB w="3175" cap="flat" cmpd="sng" algn="ctr">
+                      <a:solidFill>
+                        <a:schemeClr val="tx1"/>
+                      </a:solidFill>
+                      <a:prstDash val="solid"/>
+                      <a:round/>
+                      <a:headEnd type="none" w="med" len="med"/>
+                      <a:tailEnd type="none" w="med" len="med"/>
+                    </a:lnB>
+                    <a:lnTlToBr w="12700" cmpd="sng">
+                      <a:noFill/>
+                      <a:prstDash val="solid"/>
+                    </a:lnTlToBr>
+                    <a:lnBlToTr w="12700" cmpd="sng">
+                      <a:noFill/>
+                      <a:prstDash val="solid"/>
+                    </a:lnBlToTr>
+                    <a:solidFill>
+                      <a:schemeClr val="bg1"/>
+                    </a:solidFill>
+                  </a:tcPr>
+                </a:tc>
+                <a:extLst>
+                  <a:ext uri="{0D108BD9-81ED-4DB2-BD59-A6C34878D82A}">
+                    <a16:rowId xmlns:a16="http://schemas.microsoft.com/office/drawing/2014/main" val="10467925"/>
+                  </a:ext>
+                </a:extLst>
+              </a:tr>
+              <a:tr h="432351">
+                <a:tc vMerge="1">
+                  <a:txBody>
+                    <a:bodyPr/>
+                    <a:lstStyle/>
+                    <a:p>
+                      <a:endParaRPr dirty="0"/>
+                    </a:p>
+                  </a:txBody>
+                  <a:tcPr anchor="ctr">
+                    <a:lnL w="12700" cap="flat" cmpd="sng" algn="ctr">
+                      <a:solidFill>
+                        <a:schemeClr val="tx1"/>
+                      </a:solidFill>
+                      <a:prstDash val="solid"/>
+                      <a:round/>
+                      <a:headEnd type="none" w="med" len="med"/>
+                      <a:tailEnd type="none" w="med" len="med"/>
+                    </a:lnL>
+                    <a:lnR w="3175" cap="flat" cmpd="sng" algn="ctr">
+                      <a:noFill/>
+                      <a:prstDash val="solid"/>
+                      <a:round/>
+                      <a:headEnd type="none" w="med" len="med"/>
+                      <a:tailEnd type="none" w="med" len="med"/>
+                    </a:lnR>
+                    <a:lnT w="3175" cap="flat" cmpd="sng" algn="ctr">
+                      <a:solidFill>
+                        <a:schemeClr val="tx1"/>
+                      </a:solidFill>
+                      <a:prstDash val="solid"/>
+                      <a:round/>
+                      <a:headEnd type="none" w="med" len="med"/>
+                      <a:tailEnd type="none" w="med" len="med"/>
+                    </a:lnT>
+                    <a:lnB w="9525" cap="rnd" cmpd="sng" algn="ctr">
+                      <a:noFill/>
+                      <a:prstDash val="solid"/>
+                    </a:lnB>
+                    <a:lnTlToBr w="12700" cmpd="sng">
+                      <a:noFill/>
+                      <a:prstDash val="solid"/>
+                    </a:lnTlToBr>
+                    <a:lnBlToTr w="12700" cmpd="sng">
+                      <a:noFill/>
+                      <a:prstDash val="solid"/>
+                    </a:lnBlToTr>
+                    <a:solidFill>
+                      <a:srgbClr val="92D050"/>
+                    </a:solidFill>
+                  </a:tcPr>
+                </a:tc>
+                <a:tc>
+                  <a:txBody>
+                    <a:bodyPr/>
+                    <a:lstStyle/>
+                    <a:p>
+                      <a:pPr algn="ctr"/>
+                      <a:r>
+                        <a:rPr lang="en-IN" b="1" dirty="0">
+                          <a:solidFill>
+                            <a:srgbClr val="334155"/>
+                          </a:solidFill>
+                          <a:effectLst/>
+                          <a:latin typeface="Barlow Medium" panose="00000600000000000000" pitchFamily="2" charset="0"/>
+                        </a:rPr>
+                        <a:t>Lion</a:t>
+                      </a:r>
+                      <a:endParaRPr lang="en-IN" dirty="0">
+                        <a:solidFill>
+                          <a:srgbClr val="334155"/>
+                        </a:solidFill>
+                        <a:effectLst/>
+                        <a:latin typeface="Barlow Medium" panose="00000600000000000000" pitchFamily="2" charset="0"/>
+                      </a:endParaRPr>
+                    </a:p>
+                  </a:txBody>
+                  <a:tcPr anchor="ctr">
+                    <a:lnL w="3175" cap="flat" cmpd="sng" algn="ctr">
+                      <a:noFill/>
+                      <a:prstDash val="solid"/>
+                      <a:round/>
+                      <a:headEnd type="none" w="med" len="med"/>
+                      <a:tailEnd type="none" w="med" len="med"/>
+                    </a:lnL>
+                    <a:lnR w="3175" cap="flat" cmpd="sng" algn="ctr">
+                      <a:noFill/>
+                      <a:prstDash val="solid"/>
+                      <a:round/>
+                      <a:headEnd type="none" w="med" len="med"/>
+                      <a:tailEnd type="none" w="med" len="med"/>
+                    </a:lnR>
+                    <a:lnT w="3175" cap="flat" cmpd="sng" algn="ctr">
+                      <a:solidFill>
+                        <a:schemeClr val="tx1"/>
+                      </a:solidFill>
+                      <a:prstDash val="solid"/>
+                      <a:round/>
+                      <a:headEnd type="none" w="med" len="med"/>
+                      <a:tailEnd type="none" w="med" len="med"/>
+                    </a:lnT>
+                    <a:lnB w="9525" cap="rnd" cmpd="sng" algn="ctr">
+                      <a:noFill/>
+                      <a:prstDash val="solid"/>
+                    </a:lnB>
+                    <a:lnTlToBr w="12700" cmpd="sng">
+                      <a:noFill/>
+                      <a:prstDash val="solid"/>
+                    </a:lnTlToBr>
+                    <a:lnBlToTr w="12700" cmpd="sng">
+                      <a:noFill/>
+                      <a:prstDash val="solid"/>
+                    </a:lnBlToTr>
+                    <a:solidFill>
+                      <a:srgbClr val="92D050"/>
+                    </a:solidFill>
+                  </a:tcPr>
+                </a:tc>
+                <a:tc>
+                  <a:txBody>
+                    <a:bodyPr/>
+                    <a:lstStyle/>
+                    <a:p>
+                      <a:pPr algn="ctr"/>
+                      <a:r>
+                        <a:rPr lang="en-IN" dirty="0">
+                          <a:solidFill>
+                            <a:srgbClr val="334155"/>
+                          </a:solidFill>
+                          <a:effectLst/>
+                          <a:latin typeface="Barlow Medium" panose="00000600000000000000" pitchFamily="2" charset="0"/>
+                        </a:rPr>
+                        <a:t>🏆</a:t>
+                      </a:r>
+                      <a:r>
+                        <a:rPr lang="en-IN" b="1" dirty="0">
+                          <a:solidFill>
+                            <a:srgbClr val="334155"/>
+                          </a:solidFill>
+                          <a:effectLst/>
+                          <a:latin typeface="Barlow Medium" panose="00000600000000000000" pitchFamily="2" charset="0"/>
+                        </a:rPr>
+                        <a:t>0.7225</a:t>
+                      </a:r>
+                      <a:endParaRPr lang="en-IN" dirty="0">
+                        <a:solidFill>
+                          <a:srgbClr val="334155"/>
+                        </a:solidFill>
+                        <a:effectLst/>
+                        <a:latin typeface="Barlow Medium" panose="00000600000000000000" pitchFamily="2" charset="0"/>
+                      </a:endParaRPr>
+                    </a:p>
+                  </a:txBody>
+                  <a:tcPr anchor="ctr">
+                    <a:lnL w="3175" cap="flat" cmpd="sng" algn="ctr">
+                      <a:noFill/>
+                      <a:prstDash val="solid"/>
+                      <a:round/>
+                      <a:headEnd type="none" w="med" len="med"/>
+                      <a:tailEnd type="none" w="med" len="med"/>
+                    </a:lnL>
+                    <a:lnR w="3175" cap="flat" cmpd="sng" algn="ctr">
+                      <a:noFill/>
+                      <a:prstDash val="solid"/>
+                      <a:round/>
+                      <a:headEnd type="none" w="med" len="med"/>
+                      <a:tailEnd type="none" w="med" len="med"/>
+                    </a:lnR>
+                    <a:lnT w="3175" cap="flat" cmpd="sng" algn="ctr">
+                      <a:solidFill>
+                        <a:schemeClr val="tx1"/>
+                      </a:solidFill>
+                      <a:prstDash val="solid"/>
+                      <a:round/>
+                      <a:headEnd type="none" w="med" len="med"/>
+                      <a:tailEnd type="none" w="med" len="med"/>
+                    </a:lnT>
+                    <a:lnB w="9525" cap="rnd" cmpd="sng" algn="ctr">
+                      <a:noFill/>
+                      <a:prstDash val="solid"/>
+                    </a:lnB>
+                    <a:lnTlToBr w="12700" cmpd="sng">
+                      <a:noFill/>
+                      <a:prstDash val="solid"/>
+                    </a:lnTlToBr>
+                    <a:lnBlToTr w="12700" cmpd="sng">
+                      <a:noFill/>
+                      <a:prstDash val="solid"/>
+                    </a:lnBlToTr>
+                    <a:solidFill>
+                      <a:srgbClr val="92D050"/>
+                    </a:solidFill>
+                  </a:tcPr>
+                </a:tc>
+                <a:tc>
+                  <a:txBody>
+                    <a:bodyPr/>
+                    <a:lstStyle/>
+                    <a:p>
+                      <a:pPr algn="ctr"/>
+                      <a:r>
+                        <a:rPr lang="en-IN" dirty="0">
+                          <a:solidFill>
+                            <a:srgbClr val="334155"/>
+                          </a:solidFill>
+                          <a:effectLst/>
+                          <a:latin typeface="Barlow Medium" panose="00000600000000000000" pitchFamily="2" charset="0"/>
+                        </a:rPr>
+                        <a:t>🏆</a:t>
+                      </a:r>
+                      <a:r>
+                        <a:rPr lang="en-IN" b="1" dirty="0">
+                          <a:solidFill>
+                            <a:srgbClr val="334155"/>
+                          </a:solidFill>
+                          <a:effectLst/>
+                          <a:latin typeface="Barlow Medium" panose="00000600000000000000" pitchFamily="2" charset="0"/>
+                        </a:rPr>
+                        <a:t>0.5121</a:t>
+                      </a:r>
+                      <a:endParaRPr lang="en-IN" dirty="0">
+                        <a:solidFill>
+                          <a:srgbClr val="334155"/>
+                        </a:solidFill>
+                        <a:effectLst/>
+                        <a:latin typeface="Barlow Medium" panose="00000600000000000000" pitchFamily="2" charset="0"/>
+                      </a:endParaRPr>
+                    </a:p>
+                  </a:txBody>
+                  <a:tcPr anchor="ctr">
+                    <a:lnL w="3175" cap="flat" cmpd="sng" algn="ctr">
+                      <a:noFill/>
+                      <a:prstDash val="solid"/>
+                      <a:round/>
+                      <a:headEnd type="none" w="med" len="med"/>
+                      <a:tailEnd type="none" w="med" len="med"/>
+                    </a:lnL>
+                    <a:lnR w="3175" cap="flat" cmpd="sng" algn="ctr">
+                      <a:noFill/>
+                      <a:prstDash val="solid"/>
+                      <a:round/>
+                      <a:headEnd type="none" w="med" len="med"/>
+                      <a:tailEnd type="none" w="med" len="med"/>
+                    </a:lnR>
+                    <a:lnT w="3175" cap="flat" cmpd="sng" algn="ctr">
+                      <a:solidFill>
+                        <a:schemeClr val="tx1"/>
+                      </a:solidFill>
+                      <a:prstDash val="solid"/>
+                      <a:round/>
+                      <a:headEnd type="none" w="med" len="med"/>
+                      <a:tailEnd type="none" w="med" len="med"/>
+                    </a:lnT>
+                    <a:lnB w="9525" cap="rnd" cmpd="sng" algn="ctr">
+                      <a:noFill/>
+                      <a:prstDash val="solid"/>
+                    </a:lnB>
+                    <a:lnTlToBr w="12700" cmpd="sng">
+                      <a:noFill/>
+                      <a:prstDash val="solid"/>
+                    </a:lnTlToBr>
+                    <a:lnBlToTr w="12700" cmpd="sng">
+                      <a:noFill/>
+                      <a:prstDash val="solid"/>
+                    </a:lnBlToTr>
+                    <a:solidFill>
+                      <a:srgbClr val="92D050"/>
+                    </a:solidFill>
+                  </a:tcPr>
+                </a:tc>
+                <a:tc>
+                  <a:txBody>
+                    <a:bodyPr/>
+                    <a:lstStyle/>
+                    <a:p>
+                      <a:pPr algn="ctr"/>
+                      <a:r>
+                        <a:rPr lang="en-IN" dirty="0">
+                          <a:solidFill>
+                            <a:srgbClr val="334155"/>
+                          </a:solidFill>
+                          <a:effectLst/>
+                          <a:latin typeface="Barlow Medium" panose="00000600000000000000" pitchFamily="2" charset="0"/>
+                        </a:rPr>
+                        <a:t>🏆</a:t>
+                      </a:r>
+                      <a:r>
+                        <a:rPr lang="en-IN" b="1" dirty="0">
+                          <a:solidFill>
+                            <a:srgbClr val="334155"/>
+                          </a:solidFill>
+                          <a:effectLst/>
+                          <a:latin typeface="Barlow Medium" panose="00000600000000000000" pitchFamily="2" charset="0"/>
+                        </a:rPr>
+                        <a:t>0.5988</a:t>
+                      </a:r>
+                      <a:endParaRPr lang="en-IN" dirty="0">
+                        <a:solidFill>
+                          <a:srgbClr val="334155"/>
+                        </a:solidFill>
+                        <a:effectLst/>
+                        <a:latin typeface="Barlow Medium" panose="00000600000000000000" pitchFamily="2" charset="0"/>
+                      </a:endParaRPr>
+                    </a:p>
+                  </a:txBody>
+                  <a:tcPr anchor="ctr">
+                    <a:lnL w="3175" cap="flat" cmpd="sng" algn="ctr">
+                      <a:noFill/>
+                      <a:prstDash val="solid"/>
+                      <a:round/>
+                      <a:headEnd type="none" w="med" len="med"/>
+                      <a:tailEnd type="none" w="med" len="med"/>
+                    </a:lnL>
+                    <a:lnR w="3175" cap="flat" cmpd="sng" algn="ctr">
+                      <a:noFill/>
+                      <a:prstDash val="solid"/>
+                      <a:round/>
+                      <a:headEnd type="none" w="med" len="med"/>
+                      <a:tailEnd type="none" w="med" len="med"/>
+                    </a:lnR>
+                    <a:lnT w="3175" cap="flat" cmpd="sng" algn="ctr">
+                      <a:solidFill>
+                        <a:schemeClr val="tx1"/>
+                      </a:solidFill>
+                      <a:prstDash val="solid"/>
+                      <a:round/>
+                      <a:headEnd type="none" w="med" len="med"/>
+                      <a:tailEnd type="none" w="med" len="med"/>
+                    </a:lnT>
+                    <a:lnB w="9525" cap="rnd" cmpd="sng" algn="ctr">
+                      <a:noFill/>
+                      <a:prstDash val="solid"/>
+                    </a:lnB>
+                    <a:lnTlToBr w="12700" cmpd="sng">
+                      <a:noFill/>
+                      <a:prstDash val="solid"/>
+                    </a:lnTlToBr>
+                    <a:lnBlToTr w="12700" cmpd="sng">
+                      <a:noFill/>
+                      <a:prstDash val="solid"/>
+                    </a:lnBlToTr>
+                    <a:solidFill>
+                      <a:srgbClr val="92D050"/>
+                    </a:solidFill>
+                  </a:tcPr>
+                </a:tc>
+                <a:tc>
+                  <a:txBody>
+                    <a:bodyPr/>
+                    <a:lstStyle/>
+                    <a:p>
+                      <a:pPr algn="ctr"/>
+                      <a:r>
+                        <a:rPr lang="en-IN" dirty="0">
+                          <a:solidFill>
+                            <a:srgbClr val="334155"/>
+                          </a:solidFill>
+                          <a:effectLst/>
+                          <a:latin typeface="Barlow Medium" panose="00000600000000000000" pitchFamily="2" charset="0"/>
+                        </a:rPr>
+                        <a:t>0.1732</a:t>
+                      </a:r>
+                    </a:p>
+                  </a:txBody>
+                  <a:tcPr anchor="ctr">
+                    <a:lnL w="3175" cap="flat" cmpd="sng" algn="ctr">
+                      <a:noFill/>
+                      <a:prstDash val="solid"/>
+                      <a:round/>
+                      <a:headEnd type="none" w="med" len="med"/>
+                      <a:tailEnd type="none" w="med" len="med"/>
+                    </a:lnL>
+                    <a:lnR w="3175" cap="flat" cmpd="sng" algn="ctr">
+                      <a:noFill/>
+                      <a:prstDash val="solid"/>
+                      <a:round/>
+                      <a:headEnd type="none" w="med" len="med"/>
+                      <a:tailEnd type="none" w="med" len="med"/>
+                    </a:lnR>
+                    <a:lnT w="3175" cap="flat" cmpd="sng" algn="ctr">
+                      <a:solidFill>
+                        <a:schemeClr val="tx1"/>
+                      </a:solidFill>
+                      <a:prstDash val="solid"/>
+                      <a:round/>
+                      <a:headEnd type="none" w="med" len="med"/>
+                      <a:tailEnd type="none" w="med" len="med"/>
+                    </a:lnT>
+                    <a:lnB w="9525" cap="rnd" cmpd="sng" algn="ctr">
+                      <a:noFill/>
+                      <a:prstDash val="solid"/>
+                    </a:lnB>
+                    <a:lnTlToBr w="12700" cmpd="sng">
+                      <a:noFill/>
+                      <a:prstDash val="solid"/>
+                    </a:lnTlToBr>
+                    <a:lnBlToTr w="12700" cmpd="sng">
+                      <a:noFill/>
+                      <a:prstDash val="solid"/>
+                    </a:lnBlToTr>
+                    <a:solidFill>
+                      <a:srgbClr val="92D050"/>
+                    </a:solidFill>
+                  </a:tcPr>
+                </a:tc>
+                <a:tc>
+                  <a:txBody>
+                    <a:bodyPr/>
+                    <a:lstStyle/>
+                    <a:p>
+                      <a:pPr algn="ctr"/>
+                      <a:r>
+                        <a:rPr lang="en-IN" dirty="0">
+                          <a:solidFill>
+                            <a:srgbClr val="334155"/>
+                          </a:solidFill>
+                          <a:effectLst/>
+                          <a:latin typeface="Barlow Medium" panose="00000600000000000000" pitchFamily="2" charset="0"/>
+                        </a:rPr>
+                        <a:t>🏆</a:t>
+                      </a:r>
+                      <a:r>
+                        <a:rPr lang="en-IN" b="1" dirty="0">
+                          <a:solidFill>
+                            <a:srgbClr val="334155"/>
+                          </a:solidFill>
+                          <a:effectLst/>
+                          <a:latin typeface="Barlow Medium" panose="00000600000000000000" pitchFamily="2" charset="0"/>
+                        </a:rPr>
+                        <a:t>0.8256</a:t>
+                      </a:r>
+                      <a:endParaRPr lang="en-IN" dirty="0">
+                        <a:solidFill>
+                          <a:srgbClr val="334155"/>
+                        </a:solidFill>
+                        <a:effectLst/>
+                        <a:latin typeface="Barlow Medium" panose="00000600000000000000" pitchFamily="2" charset="0"/>
+                      </a:endParaRPr>
+                    </a:p>
+                  </a:txBody>
+                  <a:tcPr anchor="ctr">
+                    <a:lnL w="3175" cap="flat" cmpd="sng" algn="ctr">
+                      <a:noFill/>
+                      <a:prstDash val="solid"/>
+                      <a:round/>
+                      <a:headEnd type="none" w="med" len="med"/>
+                      <a:tailEnd type="none" w="med" len="med"/>
+                    </a:lnL>
+                    <a:lnR w="9525" cap="rnd" cmpd="sng" algn="ctr">
+                      <a:noFill/>
+                      <a:prstDash val="solid"/>
+                    </a:lnR>
+                    <a:lnT w="3175" cap="flat" cmpd="sng" algn="ctr">
+                      <a:solidFill>
+                        <a:schemeClr val="tx1"/>
+                      </a:solidFill>
+                      <a:prstDash val="solid"/>
+                      <a:round/>
+                      <a:headEnd type="none" w="med" len="med"/>
+                      <a:tailEnd type="none" w="med" len="med"/>
+                    </a:lnT>
+                    <a:lnB w="9525" cap="rnd" cmpd="sng" algn="ctr">
+                      <a:noFill/>
+                      <a:prstDash val="solid"/>
+                    </a:lnB>
+                    <a:lnTlToBr w="12700" cmpd="sng">
+                      <a:noFill/>
+                      <a:prstDash val="solid"/>
+                    </a:lnTlToBr>
+                    <a:lnBlToTr w="12700" cmpd="sng">
+                      <a:noFill/>
+                      <a:prstDash val="solid"/>
+                    </a:lnBlToTr>
+                    <a:solidFill>
+                      <a:srgbClr val="92D050"/>
+                    </a:solidFill>
+                  </a:tcPr>
+                </a:tc>
+                <a:extLst>
+                  <a:ext uri="{0D108BD9-81ED-4DB2-BD59-A6C34878D82A}">
+                    <a16:rowId xmlns:a16="http://schemas.microsoft.com/office/drawing/2014/main" val="402260452"/>
+                  </a:ext>
+                </a:extLst>
+              </a:tr>
+            </a:tbl>
+          </a:graphicData>
+        </a:graphic>
+      </p:graphicFrame>
+      <p:sp>
+        <p:nvSpPr>
+          <p:cNvPr id="7" name="TextBox 6">
+            <a:extLst>
+              <a:ext uri="{FF2B5EF4-FFF2-40B4-BE49-F238E27FC236}">
+                <a16:creationId xmlns:a16="http://schemas.microsoft.com/office/drawing/2014/main" id="{EE49342E-E7D6-BF0B-BD1F-7CDBF78E67A8}"/>
+              </a:ext>
+            </a:extLst>
+          </p:cNvPr>
+          <p:cNvSpPr txBox="1"/>
+          <p:nvPr/>
+        </p:nvSpPr>
+        <p:spPr>
+          <a:xfrm>
+            <a:off x="2558643" y="5839722"/>
+            <a:ext cx="6274964" cy="707886"/>
+          </a:xfrm>
+          <a:prstGeom prst="rect">
+            <a:avLst/>
+          </a:prstGeom>
+        </p:spPr>
+        <p:style>
+          <a:lnRef idx="2">
+            <a:schemeClr val="accent1">
+              <a:shade val="15000"/>
+            </a:schemeClr>
+          </a:lnRef>
+          <a:fillRef idx="1">
+            <a:schemeClr val="accent1"/>
+          </a:fillRef>
+          <a:effectRef idx="0">
+            <a:schemeClr val="accent1"/>
+          </a:effectRef>
+          <a:fontRef idx="minor">
+            <a:schemeClr val="lt1"/>
+          </a:fontRef>
+        </p:style>
+        <p:txBody>
+          <a:bodyPr wrap="square" rtlCol="0">
+            <a:spAutoFit/>
+          </a:bodyPr>
+          <a:lstStyle/>
+          <a:p>
+            <a:pPr algn="ctr"/>
+            <a:r>
+              <a:rPr lang="en-GB" sz="2000" b="1" dirty="0">
+                <a:latin typeface="Barlow SemiBold" panose="00000700000000000000" pitchFamily="2" charset="0"/>
+              </a:rPr>
+              <a:t>🏆 Overall Winner: ModernBERT + Lion achieved highest performance in 4/5 metrics</a:t>
+            </a:r>
+            <a:endParaRPr lang="en-IN" sz="2000" dirty="0">
+              <a:latin typeface="Barlow SemiBold" panose="00000700000000000000" pitchFamily="2" charset="0"/>
+            </a:endParaRPr>
+          </a:p>
+        </p:txBody>
+      </p:sp>
+    </p:spTree>
+    <p:extLst>
+      <p:ext uri="{BB962C8B-B14F-4D97-AF65-F5344CB8AC3E}">
+        <p14:creationId xmlns:p14="http://schemas.microsoft.com/office/powerpoint/2010/main" val="1499254684"/>
+      </p:ext>
+    </p:extLst>
+  </p:cSld>
+  <p:clrMapOvr>
+    <a:masterClrMapping/>
+  </p:clrMapOvr>
+</p:sld>
+</file>
+
+<file path=ppt/slides/slide12.xml><?xml version="1.0" encoding="utf-8"?>
+<p:sld xmlns:a="http://schemas.openxmlformats.org/drawingml/2006/main" xmlns:r="http://schemas.openxmlformats.org/officeDocument/2006/relationships" xmlns:p="http://schemas.openxmlformats.org/presentationml/2006/main">
+  <p:cSld>
+    <p:spTree>
+      <p:nvGrpSpPr>
+        <p:cNvPr id="1" name="">
+          <a:extLst>
+            <a:ext uri="{FF2B5EF4-FFF2-40B4-BE49-F238E27FC236}">
+              <a16:creationId xmlns:a16="http://schemas.microsoft.com/office/drawing/2014/main" id="{8AF62B87-E556-AD36-6DD4-0DBC71C52B69}"/>
+            </a:ext>
+          </a:extLst>
+        </p:cNvPr>
+        <p:cNvGrpSpPr/>
+        <p:nvPr/>
+      </p:nvGrpSpPr>
+      <p:grpSpPr>
+        <a:xfrm>
+          <a:off x="0" y="0"/>
+          <a:ext cx="0" cy="0"/>
+          <a:chOff x="0" y="0"/>
+          <a:chExt cx="0" cy="0"/>
+        </a:xfrm>
+      </p:grpSpPr>
+      <p:sp>
+        <p:nvSpPr>
+          <p:cNvPr id="5" name="TextBox 4">
+            <a:extLst>
+              <a:ext uri="{FF2B5EF4-FFF2-40B4-BE49-F238E27FC236}">
+                <a16:creationId xmlns:a16="http://schemas.microsoft.com/office/drawing/2014/main" id="{16C5A068-E5AA-E22A-8741-305F801A9A55}"/>
+              </a:ext>
+            </a:extLst>
+          </p:cNvPr>
+          <p:cNvSpPr txBox="1"/>
+          <p:nvPr/>
+        </p:nvSpPr>
+        <p:spPr>
+          <a:xfrm>
+            <a:off x="669471" y="734786"/>
+            <a:ext cx="4900701" cy="707886"/>
+          </a:xfrm>
+          <a:prstGeom prst="rect">
+            <a:avLst/>
+          </a:prstGeom>
+          <a:noFill/>
+        </p:spPr>
+        <p:txBody>
+          <a:bodyPr wrap="none" rtlCol="0">
+            <a:spAutoFit/>
+          </a:bodyPr>
+          <a:lstStyle/>
+          <a:p>
+            <a:r>
+              <a:rPr lang="en-GB" sz="4000" dirty="0">
+                <a:solidFill>
+                  <a:schemeClr val="bg1"/>
+                </a:solidFill>
+                <a:latin typeface="Barlow Medium" panose="00000600000000000000" pitchFamily="2" charset="0"/>
+              </a:rPr>
+              <a:t>GPU Usage Statistics</a:t>
+            </a:r>
+            <a:endParaRPr lang="en-IN" sz="4000" dirty="0">
+              <a:solidFill>
+                <a:schemeClr val="bg1"/>
+              </a:solidFill>
+              <a:latin typeface="Barlow Medium" panose="00000600000000000000" pitchFamily="2" charset="0"/>
+            </a:endParaRPr>
+          </a:p>
+        </p:txBody>
+      </p:sp>
+      <p:graphicFrame>
+        <p:nvGraphicFramePr>
+          <p:cNvPr id="6" name="Table 5">
+            <a:extLst>
+              <a:ext uri="{FF2B5EF4-FFF2-40B4-BE49-F238E27FC236}">
+                <a16:creationId xmlns:a16="http://schemas.microsoft.com/office/drawing/2014/main" id="{39537761-ECB2-5E55-4466-ED01094611BA}"/>
+              </a:ext>
+            </a:extLst>
+          </p:cNvPr>
+          <p:cNvGraphicFramePr>
+            <a:graphicFrameLocks noGrp="1"/>
+          </p:cNvGraphicFramePr>
+          <p:nvPr>
+            <p:extLst>
+              <p:ext uri="{D42A27DB-BD31-4B8C-83A1-F6EECF244321}">
+                <p14:modId xmlns:p14="http://schemas.microsoft.com/office/powerpoint/2010/main" val="530166516"/>
+              </p:ext>
+            </p:extLst>
+          </p:nvPr>
+        </p:nvGraphicFramePr>
+        <p:xfrm>
+          <a:off x="930001" y="2197509"/>
+          <a:ext cx="10309020" cy="3356106"/>
+        </p:xfrm>
+        <a:graphic>
+          <a:graphicData uri="http://schemas.openxmlformats.org/drawingml/2006/table">
+            <a:tbl>
+              <a:tblPr firstRow="1" bandRow="1">
+                <a:tableStyleId>{69C7853C-536D-4A76-A0AE-DD22124D55A5}</a:tableStyleId>
+              </a:tblPr>
+              <a:tblGrid>
+                <a:gridCol w="2061804">
+                  <a:extLst>
+                    <a:ext uri="{9D8B030D-6E8A-4147-A177-3AD203B41FA5}">
+                      <a16:colId xmlns:a16="http://schemas.microsoft.com/office/drawing/2014/main" val="1585879530"/>
+                    </a:ext>
+                  </a:extLst>
+                </a:gridCol>
+                <a:gridCol w="2061804">
+                  <a:extLst>
+                    <a:ext uri="{9D8B030D-6E8A-4147-A177-3AD203B41FA5}">
+                      <a16:colId xmlns:a16="http://schemas.microsoft.com/office/drawing/2014/main" val="1389322177"/>
+                    </a:ext>
+                  </a:extLst>
+                </a:gridCol>
+                <a:gridCol w="2061804">
+                  <a:extLst>
+                    <a:ext uri="{9D8B030D-6E8A-4147-A177-3AD203B41FA5}">
+                      <a16:colId xmlns:a16="http://schemas.microsoft.com/office/drawing/2014/main" val="1757895171"/>
+                    </a:ext>
+                  </a:extLst>
+                </a:gridCol>
+                <a:gridCol w="2061804">
+                  <a:extLst>
+                    <a:ext uri="{9D8B030D-6E8A-4147-A177-3AD203B41FA5}">
+                      <a16:colId xmlns:a16="http://schemas.microsoft.com/office/drawing/2014/main" val="1926697050"/>
+                    </a:ext>
+                  </a:extLst>
+                </a:gridCol>
+                <a:gridCol w="2061804">
+                  <a:extLst>
+                    <a:ext uri="{9D8B030D-6E8A-4147-A177-3AD203B41FA5}">
+                      <a16:colId xmlns:a16="http://schemas.microsoft.com/office/drawing/2014/main" val="1594094915"/>
+                    </a:ext>
+                  </a:extLst>
+                </a:gridCol>
+              </a:tblGrid>
+              <a:tr h="465892">
+                <a:tc>
+                  <a:txBody>
+                    <a:bodyPr/>
+                    <a:lstStyle/>
+                    <a:p>
+                      <a:pPr algn="ctr"/>
+                      <a:r>
+                        <a:rPr lang="en-IN" sz="2200" b="1" dirty="0">
+                          <a:solidFill>
+                            <a:srgbClr val="FFFFFF"/>
+                          </a:solidFill>
+                          <a:effectLst/>
+                          <a:latin typeface="Barlow SemiBold" panose="00000700000000000000" pitchFamily="2" charset="0"/>
+                        </a:rPr>
+                        <a:t>Model</a:t>
+                      </a:r>
+                    </a:p>
+                  </a:txBody>
+                  <a:tcPr anchor="ctr">
+                    <a:lnL w="12700" cap="flat" cmpd="sng" algn="ctr">
+                      <a:solidFill>
+                        <a:schemeClr val="tx1"/>
+                      </a:solidFill>
+                      <a:prstDash val="solid"/>
+                      <a:round/>
+                      <a:headEnd type="none" w="med" len="med"/>
+                      <a:tailEnd type="none" w="med" len="med"/>
+                    </a:lnL>
+                    <a:lnB w="12700" cap="flat" cmpd="sng" algn="ctr">
+                      <a:solidFill>
+                        <a:schemeClr val="tx1"/>
+                      </a:solidFill>
+                      <a:prstDash val="solid"/>
+                      <a:round/>
+                      <a:headEnd type="none" w="med" len="med"/>
+                      <a:tailEnd type="none" w="med" len="med"/>
+                    </a:lnB>
+                    <a:solidFill>
+                      <a:srgbClr val="0070C0"/>
+                    </a:solidFill>
+                  </a:tcPr>
+                </a:tc>
+                <a:tc>
+                  <a:txBody>
+                    <a:bodyPr/>
+                    <a:lstStyle/>
+                    <a:p>
+                      <a:pPr algn="ctr"/>
+                      <a:r>
+                        <a:rPr lang="en-IN" sz="2200" b="1" dirty="0">
+                          <a:solidFill>
+                            <a:srgbClr val="FFFFFF"/>
+                          </a:solidFill>
+                          <a:effectLst/>
+                          <a:latin typeface="Barlow SemiBold" panose="00000700000000000000" pitchFamily="2" charset="0"/>
+                        </a:rPr>
+                        <a:t>Optimizer</a:t>
+                      </a:r>
+                    </a:p>
+                  </a:txBody>
+                  <a:tcPr anchor="ctr">
+                    <a:lnB w="12700" cap="flat" cmpd="sng" algn="ctr">
+                      <a:solidFill>
+                        <a:schemeClr val="tx1"/>
+                      </a:solidFill>
+                      <a:prstDash val="solid"/>
+                      <a:round/>
+                      <a:headEnd type="none" w="med" len="med"/>
+                      <a:tailEnd type="none" w="med" len="med"/>
+                    </a:lnB>
+                    <a:solidFill>
+                      <a:srgbClr val="0070C0"/>
+                    </a:solidFill>
+                  </a:tcPr>
+                </a:tc>
+                <a:tc>
+                  <a:txBody>
+                    <a:bodyPr/>
+                    <a:lstStyle/>
+                    <a:p>
+                      <a:pPr algn="ctr"/>
+                      <a:r>
+                        <a:rPr lang="en-IN" sz="2200" b="1" dirty="0">
+                          <a:solidFill>
+                            <a:srgbClr val="FFFFFF"/>
+                          </a:solidFill>
+                          <a:effectLst/>
+                          <a:latin typeface="Barlow SemiBold" panose="00000700000000000000" pitchFamily="2" charset="0"/>
+                        </a:rPr>
+                        <a:t>Mean Usage (%)</a:t>
+                      </a:r>
+                    </a:p>
+                  </a:txBody>
+                  <a:tcPr anchor="ctr">
+                    <a:lnB w="12700" cap="flat" cmpd="sng" algn="ctr">
+                      <a:solidFill>
+                        <a:schemeClr val="tx1"/>
+                      </a:solidFill>
+                      <a:prstDash val="solid"/>
+                      <a:round/>
+                      <a:headEnd type="none" w="med" len="med"/>
+                      <a:tailEnd type="none" w="med" len="med"/>
+                    </a:lnB>
+                    <a:solidFill>
+                      <a:srgbClr val="0070C0"/>
+                    </a:solidFill>
+                  </a:tcPr>
+                </a:tc>
+                <a:tc>
+                  <a:txBody>
+                    <a:bodyPr/>
+                    <a:lstStyle/>
+                    <a:p>
+                      <a:pPr algn="ctr"/>
+                      <a:r>
+                        <a:rPr lang="en-IN" sz="2200" b="1" dirty="0">
+                          <a:solidFill>
+                            <a:srgbClr val="FFFFFF"/>
+                          </a:solidFill>
+                          <a:effectLst/>
+                          <a:latin typeface="Barlow SemiBold" panose="00000700000000000000" pitchFamily="2" charset="0"/>
+                        </a:rPr>
+                        <a:t>Peak Usage (%)</a:t>
+                      </a:r>
+                    </a:p>
+                  </a:txBody>
+                  <a:tcPr anchor="ctr">
+                    <a:lnB w="12700" cap="flat" cmpd="sng" algn="ctr">
+                      <a:solidFill>
+                        <a:schemeClr val="tx1"/>
+                      </a:solidFill>
+                      <a:prstDash val="solid"/>
+                      <a:round/>
+                      <a:headEnd type="none" w="med" len="med"/>
+                      <a:tailEnd type="none" w="med" len="med"/>
+                    </a:lnB>
+                    <a:solidFill>
+                      <a:srgbClr val="0070C0"/>
+                    </a:solidFill>
+                  </a:tcPr>
+                </a:tc>
+                <a:tc>
+                  <a:txBody>
+                    <a:bodyPr/>
+                    <a:lstStyle/>
+                    <a:p>
+                      <a:pPr algn="ctr"/>
+                      <a:r>
+                        <a:rPr lang="en-IN" sz="2200" b="1" dirty="0">
+                          <a:solidFill>
+                            <a:srgbClr val="FFFFFF"/>
+                          </a:solidFill>
+                          <a:effectLst/>
+                          <a:latin typeface="Barlow SemiBold" panose="00000700000000000000" pitchFamily="2" charset="0"/>
+                        </a:rPr>
+                        <a:t>Efficiency gain (%)</a:t>
+                      </a:r>
+                    </a:p>
+                  </a:txBody>
+                  <a:tcPr anchor="ctr">
+                    <a:lnB w="12700" cap="flat" cmpd="sng" algn="ctr">
+                      <a:solidFill>
+                        <a:schemeClr val="tx1"/>
+                      </a:solidFill>
+                      <a:prstDash val="solid"/>
+                      <a:round/>
+                      <a:headEnd type="none" w="med" len="med"/>
+                      <a:tailEnd type="none" w="med" len="med"/>
+                    </a:lnB>
+                    <a:solidFill>
+                      <a:srgbClr val="0070C0"/>
+                    </a:solidFill>
+                  </a:tcPr>
+                </a:tc>
+                <a:extLst>
+                  <a:ext uri="{0D108BD9-81ED-4DB2-BD59-A6C34878D82A}">
+                    <a16:rowId xmlns:a16="http://schemas.microsoft.com/office/drawing/2014/main" val="1133248602"/>
+                  </a:ext>
+                </a:extLst>
+              </a:tr>
+              <a:tr h="432351">
+                <a:tc rowSpan="2">
+                  <a:txBody>
+                    <a:bodyPr/>
+                    <a:lstStyle/>
+                    <a:p>
+                      <a:pPr algn="ctr"/>
+                      <a:r>
+                        <a:rPr lang="en-IN" b="1" dirty="0">
+                          <a:solidFill>
+                            <a:srgbClr val="334155"/>
+                          </a:solidFill>
+                          <a:effectLst/>
+                          <a:latin typeface="Barlow Medium" panose="00000600000000000000" pitchFamily="2" charset="0"/>
+                        </a:rPr>
+                        <a:t>MiniLM</a:t>
+                      </a:r>
+                    </a:p>
+                  </a:txBody>
+                  <a:tcPr anchor="ctr">
+                    <a:lnL w="12700" cap="flat" cmpd="sng" algn="ctr">
+                      <a:solidFill>
+                        <a:schemeClr val="tx1"/>
+                      </a:solidFill>
+                      <a:prstDash val="solid"/>
+                      <a:round/>
+                      <a:headEnd type="none" w="med" len="med"/>
+                      <a:tailEnd type="none" w="med" len="med"/>
+                    </a:lnL>
+                    <a:lnR w="3175" cap="flat" cmpd="sng" algn="ctr">
+                      <a:noFill/>
+                      <a:prstDash val="solid"/>
+                      <a:round/>
+                      <a:headEnd type="none" w="med" len="med"/>
+                      <a:tailEnd type="none" w="med" len="med"/>
+                    </a:lnR>
+                    <a:lnT w="12700" cap="flat" cmpd="sng" algn="ctr">
+                      <a:solidFill>
+                        <a:schemeClr val="tx1"/>
+                      </a:solidFill>
+                      <a:prstDash val="solid"/>
+                      <a:round/>
+                      <a:headEnd type="none" w="med" len="med"/>
+                      <a:tailEnd type="none" w="med" len="med"/>
+                    </a:lnT>
+                    <a:lnB w="3175" cap="flat" cmpd="sng" algn="ctr">
+                      <a:solidFill>
+                        <a:schemeClr val="tx1"/>
+                      </a:solidFill>
+                      <a:prstDash val="solid"/>
+                      <a:round/>
+                      <a:headEnd type="none" w="med" len="med"/>
+                      <a:tailEnd type="none" w="med" len="med"/>
+                    </a:lnB>
+                    <a:lnTlToBr w="12700" cmpd="sng">
+                      <a:noFill/>
+                      <a:prstDash val="solid"/>
+                    </a:lnTlToBr>
+                    <a:lnBlToTr w="12700" cmpd="sng">
+                      <a:noFill/>
+                      <a:prstDash val="solid"/>
+                    </a:lnBlToTr>
+                    <a:solidFill>
+                      <a:schemeClr val="bg1"/>
+                    </a:solidFill>
+                  </a:tcPr>
+                </a:tc>
+                <a:tc>
+                  <a:txBody>
+                    <a:bodyPr/>
+                    <a:lstStyle/>
+                    <a:p>
+                      <a:pPr algn="ctr"/>
+                      <a:r>
+                        <a:rPr lang="en-IN" dirty="0">
+                          <a:solidFill>
+                            <a:srgbClr val="334155"/>
+                          </a:solidFill>
+                          <a:effectLst/>
+                          <a:latin typeface="Barlow Medium" panose="00000600000000000000" pitchFamily="2" charset="0"/>
+                        </a:rPr>
+                        <a:t>AdamW</a:t>
+                      </a:r>
+                    </a:p>
+                  </a:txBody>
+                  <a:tcPr anchor="ctr">
+                    <a:lnL w="3175" cap="flat" cmpd="sng" algn="ctr">
+                      <a:noFill/>
+                      <a:prstDash val="solid"/>
+                      <a:round/>
+                      <a:headEnd type="none" w="med" len="med"/>
+                      <a:tailEnd type="none" w="med" len="med"/>
+                    </a:lnL>
+                    <a:lnR w="3175" cap="flat" cmpd="sng" algn="ctr">
+                      <a:noFill/>
+                      <a:prstDash val="solid"/>
+                      <a:round/>
+                      <a:headEnd type="none" w="med" len="med"/>
+                      <a:tailEnd type="none" w="med" len="med"/>
+                    </a:lnR>
+                    <a:lnT w="12700" cap="flat" cmpd="sng" algn="ctr">
+                      <a:solidFill>
+                        <a:schemeClr val="tx1"/>
+                      </a:solidFill>
+                      <a:prstDash val="solid"/>
+                      <a:round/>
+                      <a:headEnd type="none" w="med" len="med"/>
+                      <a:tailEnd type="none" w="med" len="med"/>
+                    </a:lnT>
+                    <a:lnB w="3175" cap="flat" cmpd="sng" algn="ctr">
+                      <a:solidFill>
+                        <a:schemeClr val="tx1"/>
+                      </a:solidFill>
+                      <a:prstDash val="solid"/>
+                      <a:round/>
+                      <a:headEnd type="none" w="med" len="med"/>
+                      <a:tailEnd type="none" w="med" len="med"/>
+                    </a:lnB>
+                    <a:lnTlToBr w="12700" cmpd="sng">
+                      <a:noFill/>
+                      <a:prstDash val="solid"/>
+                    </a:lnTlToBr>
+                    <a:lnBlToTr w="12700" cmpd="sng">
+                      <a:noFill/>
+                      <a:prstDash val="solid"/>
+                    </a:lnBlToTr>
+                    <a:solidFill>
+                      <a:schemeClr val="bg1"/>
+                    </a:solidFill>
+                  </a:tcPr>
+                </a:tc>
+                <a:tc>
+                  <a:txBody>
+                    <a:bodyPr/>
+                    <a:lstStyle/>
+                    <a:p>
+                      <a:pPr algn="ctr"/>
+                      <a:r>
+                        <a:rPr lang="en-IN" b="0" dirty="0">
+                          <a:solidFill>
+                            <a:srgbClr val="334155"/>
+                          </a:solidFill>
+                          <a:effectLst/>
+                          <a:latin typeface="Barlow Medium" panose="00000600000000000000" pitchFamily="2" charset="0"/>
+                        </a:rPr>
+                        <a:t>33.09</a:t>
+                      </a:r>
+                    </a:p>
+                  </a:txBody>
+                  <a:tcPr anchor="ctr">
+                    <a:lnL w="3175" cap="flat" cmpd="sng" algn="ctr">
+                      <a:noFill/>
+                      <a:prstDash val="solid"/>
+                      <a:round/>
+                      <a:headEnd type="none" w="med" len="med"/>
+                      <a:tailEnd type="none" w="med" len="med"/>
+                    </a:lnL>
+                    <a:lnR w="3175" cap="flat" cmpd="sng" algn="ctr">
+                      <a:noFill/>
+                      <a:prstDash val="solid"/>
+                      <a:round/>
+                      <a:headEnd type="none" w="med" len="med"/>
+                      <a:tailEnd type="none" w="med" len="med"/>
+                    </a:lnR>
+                    <a:lnT w="12700" cap="flat" cmpd="sng" algn="ctr">
+                      <a:solidFill>
+                        <a:schemeClr val="tx1"/>
+                      </a:solidFill>
+                      <a:prstDash val="solid"/>
+                      <a:round/>
+                      <a:headEnd type="none" w="med" len="med"/>
+                      <a:tailEnd type="none" w="med" len="med"/>
+                    </a:lnT>
+                    <a:lnB w="3175" cap="flat" cmpd="sng" algn="ctr">
+                      <a:solidFill>
+                        <a:schemeClr val="tx1"/>
+                      </a:solidFill>
+                      <a:prstDash val="solid"/>
+                      <a:round/>
+                      <a:headEnd type="none" w="med" len="med"/>
+                      <a:tailEnd type="none" w="med" len="med"/>
+                    </a:lnB>
+                    <a:lnTlToBr w="12700" cmpd="sng">
+                      <a:noFill/>
+                      <a:prstDash val="solid"/>
+                    </a:lnTlToBr>
+                    <a:lnBlToTr w="12700" cmpd="sng">
+                      <a:noFill/>
+                      <a:prstDash val="solid"/>
+                    </a:lnBlToTr>
+                    <a:solidFill>
+                      <a:schemeClr val="bg1"/>
+                    </a:solidFill>
+                  </a:tcPr>
+                </a:tc>
+                <a:tc>
+                  <a:txBody>
+                    <a:bodyPr/>
+                    <a:lstStyle/>
+                    <a:p>
+                      <a:pPr algn="ctr"/>
+                      <a:r>
+                        <a:rPr lang="en-IN" b="0" dirty="0">
+                          <a:solidFill>
+                            <a:srgbClr val="334155"/>
+                          </a:solidFill>
+                          <a:effectLst/>
+                          <a:latin typeface="Barlow Medium" panose="00000600000000000000" pitchFamily="2" charset="0"/>
+                        </a:rPr>
+                        <a:t>35.25</a:t>
+                      </a:r>
+                    </a:p>
+                  </a:txBody>
+                  <a:tcPr anchor="ctr">
+                    <a:lnL w="3175" cap="flat" cmpd="sng" algn="ctr">
+                      <a:noFill/>
+                      <a:prstDash val="solid"/>
+                      <a:round/>
+                      <a:headEnd type="none" w="med" len="med"/>
+                      <a:tailEnd type="none" w="med" len="med"/>
+                    </a:lnL>
+                    <a:lnR w="3175" cap="flat" cmpd="sng" algn="ctr">
+                      <a:noFill/>
+                      <a:prstDash val="solid"/>
+                      <a:round/>
+                      <a:headEnd type="none" w="med" len="med"/>
+                      <a:tailEnd type="none" w="med" len="med"/>
+                    </a:lnR>
+                    <a:lnT w="12700" cap="flat" cmpd="sng" algn="ctr">
+                      <a:solidFill>
+                        <a:schemeClr val="tx1"/>
+                      </a:solidFill>
+                      <a:prstDash val="solid"/>
+                      <a:round/>
+                      <a:headEnd type="none" w="med" len="med"/>
+                      <a:tailEnd type="none" w="med" len="med"/>
+                    </a:lnT>
+                    <a:lnB w="3175" cap="flat" cmpd="sng" algn="ctr">
+                      <a:solidFill>
+                        <a:schemeClr val="tx1"/>
+                      </a:solidFill>
+                      <a:prstDash val="solid"/>
+                      <a:round/>
+                      <a:headEnd type="none" w="med" len="med"/>
+                      <a:tailEnd type="none" w="med" len="med"/>
+                    </a:lnB>
+                    <a:lnTlToBr w="12700" cmpd="sng">
+                      <a:noFill/>
+                      <a:prstDash val="solid"/>
+                    </a:lnTlToBr>
+                    <a:lnBlToTr w="12700" cmpd="sng">
+                      <a:noFill/>
+                      <a:prstDash val="solid"/>
+                    </a:lnBlToTr>
+                    <a:solidFill>
+                      <a:schemeClr val="bg1"/>
+                    </a:solidFill>
+                  </a:tcPr>
+                </a:tc>
+                <a:tc rowSpan="2">
+                  <a:txBody>
+                    <a:bodyPr/>
+                    <a:lstStyle/>
+                    <a:p>
+                      <a:pPr algn="ctr"/>
+                      <a:r>
+                        <a:rPr lang="en-GB" b="1" dirty="0">
+                          <a:solidFill>
+                            <a:srgbClr val="334155"/>
+                          </a:solidFill>
+                          <a:effectLst/>
+                          <a:latin typeface="Barlow Medium" panose="00000600000000000000" pitchFamily="2" charset="0"/>
+                        </a:rPr>
+                        <a:t>+</a:t>
+                      </a:r>
+                      <a:r>
+                        <a:rPr lang="en-IN" b="1" dirty="0">
+                          <a:solidFill>
+                            <a:srgbClr val="334155"/>
+                          </a:solidFill>
+                          <a:effectLst/>
+                          <a:latin typeface="Barlow Medium" panose="00000600000000000000" pitchFamily="2" charset="0"/>
+                        </a:rPr>
+                        <a:t>2.67 %</a:t>
+                      </a:r>
+                    </a:p>
+                  </a:txBody>
+                  <a:tcPr anchor="ctr">
+                    <a:lnL w="3175" cap="flat" cmpd="sng" algn="ctr">
+                      <a:noFill/>
+                      <a:prstDash val="solid"/>
+                      <a:round/>
+                      <a:headEnd type="none" w="med" len="med"/>
+                      <a:tailEnd type="none" w="med" len="med"/>
+                    </a:lnL>
+                    <a:lnR w="3175" cap="flat" cmpd="sng" algn="ctr">
+                      <a:noFill/>
+                      <a:prstDash val="solid"/>
+                      <a:round/>
+                      <a:headEnd type="none" w="med" len="med"/>
+                      <a:tailEnd type="none" w="med" len="med"/>
+                    </a:lnR>
+                    <a:lnT w="12700" cap="flat" cmpd="sng" algn="ctr">
+                      <a:solidFill>
+                        <a:schemeClr val="tx1"/>
+                      </a:solidFill>
+                      <a:prstDash val="solid"/>
+                      <a:round/>
+                      <a:headEnd type="none" w="med" len="med"/>
+                      <a:tailEnd type="none" w="med" len="med"/>
+                    </a:lnT>
+                    <a:lnB w="3175" cap="flat" cmpd="sng" algn="ctr">
+                      <a:solidFill>
+                        <a:schemeClr val="tx1"/>
+                      </a:solidFill>
+                      <a:prstDash val="solid"/>
+                      <a:round/>
+                      <a:headEnd type="none" w="med" len="med"/>
+                      <a:tailEnd type="none" w="med" len="med"/>
+                    </a:lnB>
+                    <a:lnTlToBr w="12700" cmpd="sng">
+                      <a:noFill/>
+                      <a:prstDash val="solid"/>
+                    </a:lnTlToBr>
+                    <a:lnBlToTr w="12700" cmpd="sng">
+                      <a:noFill/>
+                      <a:prstDash val="solid"/>
+                    </a:lnBlToTr>
+                    <a:solidFill>
+                      <a:srgbClr val="92D050"/>
+                    </a:solidFill>
+                  </a:tcPr>
+                </a:tc>
+                <a:extLst>
+                  <a:ext uri="{0D108BD9-81ED-4DB2-BD59-A6C34878D82A}">
+                    <a16:rowId xmlns:a16="http://schemas.microsoft.com/office/drawing/2014/main" val="2629920045"/>
+                  </a:ext>
+                </a:extLst>
+              </a:tr>
+              <a:tr h="432351">
+                <a:tc vMerge="1">
+                  <a:txBody>
+                    <a:bodyPr/>
+                    <a:lstStyle/>
+                    <a:p>
+                      <a:endParaRPr dirty="0"/>
+                    </a:p>
+                  </a:txBody>
+                  <a:tcPr anchor="ctr">
+                    <a:lnL w="12700" cap="flat" cmpd="sng" algn="ctr">
+                      <a:solidFill>
+                        <a:schemeClr val="tx1"/>
+                      </a:solidFill>
+                      <a:prstDash val="solid"/>
+                      <a:round/>
+                      <a:headEnd type="none" w="med" len="med"/>
+                      <a:tailEnd type="none" w="med" len="med"/>
+                    </a:lnL>
+                    <a:lnR w="3175" cap="flat" cmpd="sng" algn="ctr">
+                      <a:noFill/>
+                      <a:prstDash val="solid"/>
+                      <a:round/>
+                      <a:headEnd type="none" w="med" len="med"/>
+                      <a:tailEnd type="none" w="med" len="med"/>
+                    </a:lnR>
+                    <a:lnT w="3175" cap="flat" cmpd="sng" algn="ctr">
+                      <a:solidFill>
+                        <a:schemeClr val="tx1"/>
+                      </a:solidFill>
+                      <a:prstDash val="solid"/>
+                      <a:round/>
+                      <a:headEnd type="none" w="med" len="med"/>
+                      <a:tailEnd type="none" w="med" len="med"/>
+                    </a:lnT>
+                    <a:lnB w="3175" cap="flat" cmpd="sng" algn="ctr">
+                      <a:solidFill>
+                        <a:schemeClr val="tx1"/>
+                      </a:solidFill>
+                      <a:prstDash val="solid"/>
+                      <a:round/>
+                      <a:headEnd type="none" w="med" len="med"/>
+                      <a:tailEnd type="none" w="med" len="med"/>
+                    </a:lnB>
+                    <a:lnTlToBr w="12700" cmpd="sng">
+                      <a:noFill/>
+                      <a:prstDash val="solid"/>
+                    </a:lnTlToBr>
+                    <a:lnBlToTr w="12700" cmpd="sng">
+                      <a:noFill/>
+                      <a:prstDash val="solid"/>
+                    </a:lnBlToTr>
+                    <a:solidFill>
+                      <a:schemeClr val="bg1"/>
+                    </a:solidFill>
+                  </a:tcPr>
+                </a:tc>
+                <a:tc>
+                  <a:txBody>
+                    <a:bodyPr/>
+                    <a:lstStyle/>
+                    <a:p>
+                      <a:pPr algn="ctr"/>
+                      <a:r>
+                        <a:rPr lang="en-IN" b="1" dirty="0">
+                          <a:solidFill>
+                            <a:srgbClr val="334155"/>
+                          </a:solidFill>
+                          <a:effectLst/>
+                          <a:latin typeface="Barlow Medium" panose="00000600000000000000" pitchFamily="2" charset="0"/>
+                        </a:rPr>
+                        <a:t>Lion</a:t>
+                      </a:r>
+                    </a:p>
+                  </a:txBody>
+                  <a:tcPr anchor="ctr">
+                    <a:lnL w="3175" cap="flat" cmpd="sng" algn="ctr">
+                      <a:noFill/>
+                      <a:prstDash val="solid"/>
+                      <a:round/>
+                      <a:headEnd type="none" w="med" len="med"/>
+                      <a:tailEnd type="none" w="med" len="med"/>
+                    </a:lnL>
+                    <a:lnR w="3175" cap="flat" cmpd="sng" algn="ctr">
+                      <a:noFill/>
+                      <a:prstDash val="solid"/>
+                      <a:round/>
+                      <a:headEnd type="none" w="med" len="med"/>
+                      <a:tailEnd type="none" w="med" len="med"/>
+                    </a:lnR>
+                    <a:lnT w="3175" cap="flat" cmpd="sng" algn="ctr">
+                      <a:solidFill>
+                        <a:schemeClr val="tx1"/>
+                      </a:solidFill>
+                      <a:prstDash val="solid"/>
+                      <a:round/>
+                      <a:headEnd type="none" w="med" len="med"/>
+                      <a:tailEnd type="none" w="med" len="med"/>
+                    </a:lnT>
+                    <a:lnB w="3175" cap="flat" cmpd="sng" algn="ctr">
+                      <a:solidFill>
+                        <a:schemeClr val="tx1"/>
+                      </a:solidFill>
+                      <a:prstDash val="solid"/>
+                      <a:round/>
+                      <a:headEnd type="none" w="med" len="med"/>
+                      <a:tailEnd type="none" w="med" len="med"/>
+                    </a:lnB>
+                    <a:lnTlToBr w="12700" cmpd="sng">
+                      <a:noFill/>
+                      <a:prstDash val="solid"/>
+                    </a:lnTlToBr>
+                    <a:lnBlToTr w="12700" cmpd="sng">
+                      <a:noFill/>
+                      <a:prstDash val="solid"/>
+                    </a:lnBlToTr>
+                    <a:solidFill>
+                      <a:srgbClr val="92D050"/>
+                    </a:solidFill>
+                  </a:tcPr>
+                </a:tc>
+                <a:tc>
+                  <a:txBody>
+                    <a:bodyPr/>
+                    <a:lstStyle/>
+                    <a:p>
+                      <a:pPr algn="ctr"/>
+                      <a:r>
+                        <a:rPr lang="en-GB" b="1" dirty="0">
+                          <a:solidFill>
+                            <a:srgbClr val="334155"/>
+                          </a:solidFill>
+                          <a:effectLst/>
+                          <a:latin typeface="Barlow Medium" panose="00000600000000000000" pitchFamily="2" charset="0"/>
+                        </a:rPr>
+                        <a:t>32.21</a:t>
+                      </a:r>
+                      <a:endParaRPr lang="en-IN" b="1" dirty="0">
+                        <a:solidFill>
+                          <a:srgbClr val="334155"/>
+                        </a:solidFill>
+                        <a:effectLst/>
+                        <a:latin typeface="Barlow Medium" panose="00000600000000000000" pitchFamily="2" charset="0"/>
+                      </a:endParaRPr>
+                    </a:p>
+                  </a:txBody>
+                  <a:tcPr anchor="ctr">
+                    <a:lnL w="3175" cap="flat" cmpd="sng" algn="ctr">
+                      <a:noFill/>
+                      <a:prstDash val="solid"/>
+                      <a:round/>
+                      <a:headEnd type="none" w="med" len="med"/>
+                      <a:tailEnd type="none" w="med" len="med"/>
+                    </a:lnL>
+                    <a:lnR w="3175" cap="flat" cmpd="sng" algn="ctr">
+                      <a:noFill/>
+                      <a:prstDash val="solid"/>
+                      <a:round/>
+                      <a:headEnd type="none" w="med" len="med"/>
+                      <a:tailEnd type="none" w="med" len="med"/>
+                    </a:lnR>
+                    <a:lnT w="3175" cap="flat" cmpd="sng" algn="ctr">
+                      <a:solidFill>
+                        <a:schemeClr val="tx1"/>
+                      </a:solidFill>
+                      <a:prstDash val="solid"/>
+                      <a:round/>
+                      <a:headEnd type="none" w="med" len="med"/>
+                      <a:tailEnd type="none" w="med" len="med"/>
+                    </a:lnT>
+                    <a:lnB w="3175" cap="flat" cmpd="sng" algn="ctr">
+                      <a:solidFill>
+                        <a:schemeClr val="tx1"/>
+                      </a:solidFill>
+                      <a:prstDash val="solid"/>
+                      <a:round/>
+                      <a:headEnd type="none" w="med" len="med"/>
+                      <a:tailEnd type="none" w="med" len="med"/>
+                    </a:lnB>
+                    <a:lnTlToBr w="12700" cmpd="sng">
+                      <a:noFill/>
+                      <a:prstDash val="solid"/>
+                    </a:lnTlToBr>
+                    <a:lnBlToTr w="12700" cmpd="sng">
+                      <a:noFill/>
+                      <a:prstDash val="solid"/>
+                    </a:lnBlToTr>
+                    <a:solidFill>
+                      <a:srgbClr val="92D050"/>
+                    </a:solidFill>
+                  </a:tcPr>
+                </a:tc>
+                <a:tc>
+                  <a:txBody>
+                    <a:bodyPr/>
+                    <a:lstStyle/>
+                    <a:p>
+                      <a:pPr algn="ctr"/>
+                      <a:r>
+                        <a:rPr lang="en-IN" b="1" dirty="0">
+                          <a:solidFill>
+                            <a:srgbClr val="334155"/>
+                          </a:solidFill>
+                          <a:effectLst/>
+                          <a:latin typeface="Barlow Medium" panose="00000600000000000000" pitchFamily="2" charset="0"/>
+                        </a:rPr>
+                        <a:t>34.64</a:t>
+                      </a:r>
+                    </a:p>
+                  </a:txBody>
+                  <a:tcPr anchor="ctr">
+                    <a:lnL w="3175" cap="flat" cmpd="sng" algn="ctr">
+                      <a:noFill/>
+                      <a:prstDash val="solid"/>
+                      <a:round/>
+                      <a:headEnd type="none" w="med" len="med"/>
+                      <a:tailEnd type="none" w="med" len="med"/>
+                    </a:lnL>
+                    <a:lnR w="3175" cap="flat" cmpd="sng" algn="ctr">
+                      <a:noFill/>
+                      <a:prstDash val="solid"/>
+                      <a:round/>
+                      <a:headEnd type="none" w="med" len="med"/>
+                      <a:tailEnd type="none" w="med" len="med"/>
+                    </a:lnR>
+                    <a:lnT w="3175" cap="flat" cmpd="sng" algn="ctr">
+                      <a:solidFill>
+                        <a:schemeClr val="tx1"/>
+                      </a:solidFill>
+                      <a:prstDash val="solid"/>
+                      <a:round/>
+                      <a:headEnd type="none" w="med" len="med"/>
+                      <a:tailEnd type="none" w="med" len="med"/>
+                    </a:lnT>
+                    <a:lnB w="3175" cap="flat" cmpd="sng" algn="ctr">
+                      <a:solidFill>
+                        <a:schemeClr val="tx1"/>
+                      </a:solidFill>
+                      <a:prstDash val="solid"/>
+                      <a:round/>
+                      <a:headEnd type="none" w="med" len="med"/>
+                      <a:tailEnd type="none" w="med" len="med"/>
+                    </a:lnB>
+                    <a:lnTlToBr w="12700" cmpd="sng">
+                      <a:noFill/>
+                      <a:prstDash val="solid"/>
+                    </a:lnTlToBr>
+                    <a:lnBlToTr w="12700" cmpd="sng">
+                      <a:noFill/>
+                      <a:prstDash val="solid"/>
+                    </a:lnBlToTr>
+                    <a:solidFill>
+                      <a:srgbClr val="92D050"/>
+                    </a:solidFill>
+                  </a:tcPr>
+                </a:tc>
+                <a:tc vMerge="1">
+                  <a:txBody>
+                    <a:bodyPr/>
+                    <a:lstStyle/>
+                    <a:p>
+                      <a:endParaRPr dirty="0"/>
+                    </a:p>
+                  </a:txBody>
+                  <a:tcPr anchor="ctr">
+                    <a:lnL w="3175" cap="flat" cmpd="sng" algn="ctr">
+                      <a:noFill/>
+                      <a:prstDash val="solid"/>
+                      <a:round/>
+                      <a:headEnd type="none" w="med" len="med"/>
+                      <a:tailEnd type="none" w="med" len="med"/>
+                    </a:lnL>
+                    <a:lnR w="3175" cap="flat" cmpd="sng" algn="ctr">
+                      <a:noFill/>
+                      <a:prstDash val="solid"/>
+                      <a:round/>
+                      <a:headEnd type="none" w="med" len="med"/>
+                      <a:tailEnd type="none" w="med" len="med"/>
+                    </a:lnR>
+                    <a:lnT w="3175" cap="flat" cmpd="sng" algn="ctr">
+                      <a:solidFill>
+                        <a:schemeClr val="tx1"/>
+                      </a:solidFill>
+                      <a:prstDash val="solid"/>
+                      <a:round/>
+                      <a:headEnd type="none" w="med" len="med"/>
+                      <a:tailEnd type="none" w="med" len="med"/>
+                    </a:lnT>
+                    <a:lnB w="3175" cap="flat" cmpd="sng" algn="ctr">
+                      <a:solidFill>
+                        <a:schemeClr val="tx1"/>
+                      </a:solidFill>
+                      <a:prstDash val="solid"/>
+                      <a:round/>
+                      <a:headEnd type="none" w="med" len="med"/>
+                      <a:tailEnd type="none" w="med" len="med"/>
+                    </a:lnB>
+                    <a:lnTlToBr w="12700" cmpd="sng">
+                      <a:noFill/>
+                      <a:prstDash val="solid"/>
+                    </a:lnTlToBr>
+                    <a:lnBlToTr w="12700" cmpd="sng">
+                      <a:noFill/>
+                      <a:prstDash val="solid"/>
+                    </a:lnBlToTr>
+                    <a:solidFill>
+                      <a:srgbClr val="92D050"/>
+                    </a:solidFill>
+                  </a:tcPr>
+                </a:tc>
+                <a:extLst>
+                  <a:ext uri="{0D108BD9-81ED-4DB2-BD59-A6C34878D82A}">
+                    <a16:rowId xmlns:a16="http://schemas.microsoft.com/office/drawing/2014/main" val="1277407104"/>
+                  </a:ext>
+                </a:extLst>
+              </a:tr>
+              <a:tr h="432351">
+                <a:tc rowSpan="2">
+                  <a:txBody>
+                    <a:bodyPr/>
+                    <a:lstStyle/>
+                    <a:p>
+                      <a:pPr algn="ctr"/>
+                      <a:r>
+                        <a:rPr lang="en-IN" b="1" dirty="0">
+                          <a:solidFill>
+                            <a:srgbClr val="334155"/>
+                          </a:solidFill>
+                          <a:effectLst/>
+                          <a:latin typeface="Barlow Medium" panose="00000600000000000000" pitchFamily="2" charset="0"/>
+                        </a:rPr>
+                        <a:t>GTE</a:t>
+                      </a:r>
+                    </a:p>
+                  </a:txBody>
+                  <a:tcPr anchor="ctr">
+                    <a:lnL w="12700" cap="flat" cmpd="sng" algn="ctr">
+                      <a:solidFill>
+                        <a:schemeClr val="tx1"/>
+                      </a:solidFill>
+                      <a:prstDash val="solid"/>
+                      <a:round/>
+                      <a:headEnd type="none" w="med" len="med"/>
+                      <a:tailEnd type="none" w="med" len="med"/>
+                    </a:lnL>
+                    <a:lnR w="3175" cap="flat" cmpd="sng" algn="ctr">
+                      <a:noFill/>
+                      <a:prstDash val="solid"/>
+                      <a:round/>
+                      <a:headEnd type="none" w="med" len="med"/>
+                      <a:tailEnd type="none" w="med" len="med"/>
+                    </a:lnR>
+                    <a:lnT w="3175" cap="flat" cmpd="sng" algn="ctr">
+                      <a:solidFill>
+                        <a:schemeClr val="tx1"/>
+                      </a:solidFill>
+                      <a:prstDash val="solid"/>
+                      <a:round/>
+                      <a:headEnd type="none" w="med" len="med"/>
+                      <a:tailEnd type="none" w="med" len="med"/>
+                    </a:lnT>
+                    <a:lnB w="3175" cap="flat" cmpd="sng" algn="ctr">
+                      <a:solidFill>
+                        <a:schemeClr val="tx1"/>
+                      </a:solidFill>
+                      <a:prstDash val="solid"/>
+                      <a:round/>
+                      <a:headEnd type="none" w="med" len="med"/>
+                      <a:tailEnd type="none" w="med" len="med"/>
+                    </a:lnB>
+                    <a:lnTlToBr w="12700" cmpd="sng">
+                      <a:noFill/>
+                      <a:prstDash val="solid"/>
+                    </a:lnTlToBr>
+                    <a:lnBlToTr w="12700" cmpd="sng">
+                      <a:noFill/>
+                      <a:prstDash val="solid"/>
+                    </a:lnBlToTr>
+                    <a:solidFill>
+                      <a:schemeClr val="bg1"/>
+                    </a:solidFill>
+                  </a:tcPr>
+                </a:tc>
+                <a:tc>
+                  <a:txBody>
+                    <a:bodyPr/>
+                    <a:lstStyle/>
+                    <a:p>
+                      <a:pPr algn="ctr"/>
+                      <a:r>
+                        <a:rPr lang="en-IN" dirty="0">
+                          <a:solidFill>
+                            <a:srgbClr val="334155"/>
+                          </a:solidFill>
+                          <a:effectLst/>
+                          <a:latin typeface="Barlow Medium" panose="00000600000000000000" pitchFamily="2" charset="0"/>
+                        </a:rPr>
+                        <a:t>AdamW</a:t>
+                      </a:r>
+                    </a:p>
+                  </a:txBody>
+                  <a:tcPr anchor="ctr">
+                    <a:lnL w="3175" cap="flat" cmpd="sng" algn="ctr">
+                      <a:noFill/>
+                      <a:prstDash val="solid"/>
+                      <a:round/>
+                      <a:headEnd type="none" w="med" len="med"/>
+                      <a:tailEnd type="none" w="med" len="med"/>
+                    </a:lnL>
+                    <a:lnR w="3175" cap="flat" cmpd="sng" algn="ctr">
+                      <a:noFill/>
+                      <a:prstDash val="solid"/>
+                      <a:round/>
+                      <a:headEnd type="none" w="med" len="med"/>
+                      <a:tailEnd type="none" w="med" len="med"/>
+                    </a:lnR>
+                    <a:lnT w="3175" cap="flat" cmpd="sng" algn="ctr">
+                      <a:solidFill>
+                        <a:schemeClr val="tx1"/>
+                      </a:solidFill>
+                      <a:prstDash val="solid"/>
+                      <a:round/>
+                      <a:headEnd type="none" w="med" len="med"/>
+                      <a:tailEnd type="none" w="med" len="med"/>
+                    </a:lnT>
+                    <a:lnB w="3175" cap="flat" cmpd="sng" algn="ctr">
+                      <a:solidFill>
+                        <a:schemeClr val="tx1"/>
+                      </a:solidFill>
+                      <a:prstDash val="solid"/>
+                      <a:round/>
+                      <a:headEnd type="none" w="med" len="med"/>
+                      <a:tailEnd type="none" w="med" len="med"/>
+                    </a:lnB>
+                    <a:lnTlToBr w="12700" cmpd="sng">
+                      <a:noFill/>
+                      <a:prstDash val="solid"/>
+                    </a:lnTlToBr>
+                    <a:lnBlToTr w="12700" cmpd="sng">
+                      <a:noFill/>
+                      <a:prstDash val="solid"/>
+                    </a:lnBlToTr>
+                    <a:solidFill>
+                      <a:schemeClr val="bg1"/>
+                    </a:solidFill>
+                  </a:tcPr>
+                </a:tc>
+                <a:tc>
+                  <a:txBody>
+                    <a:bodyPr/>
+                    <a:lstStyle/>
+                    <a:p>
+                      <a:pPr algn="ctr"/>
+                      <a:r>
+                        <a:rPr lang="en-GB" b="0" dirty="0">
+                          <a:solidFill>
+                            <a:srgbClr val="334155"/>
+                          </a:solidFill>
+                          <a:effectLst/>
+                          <a:latin typeface="Barlow Medium" panose="00000600000000000000" pitchFamily="2" charset="0"/>
+                        </a:rPr>
+                        <a:t>73.04</a:t>
+                      </a:r>
+                      <a:endParaRPr lang="en-IN" b="0" dirty="0">
+                        <a:solidFill>
+                          <a:srgbClr val="334155"/>
+                        </a:solidFill>
+                        <a:effectLst/>
+                        <a:latin typeface="Barlow Medium" panose="00000600000000000000" pitchFamily="2" charset="0"/>
+                      </a:endParaRPr>
+                    </a:p>
+                  </a:txBody>
+                  <a:tcPr anchor="ctr">
+                    <a:lnL w="3175" cap="flat" cmpd="sng" algn="ctr">
+                      <a:noFill/>
+                      <a:prstDash val="solid"/>
+                      <a:round/>
+                      <a:headEnd type="none" w="med" len="med"/>
+                      <a:tailEnd type="none" w="med" len="med"/>
+                    </a:lnL>
+                    <a:lnR w="3175" cap="flat" cmpd="sng" algn="ctr">
+                      <a:noFill/>
+                      <a:prstDash val="solid"/>
+                      <a:round/>
+                      <a:headEnd type="none" w="med" len="med"/>
+                      <a:tailEnd type="none" w="med" len="med"/>
+                    </a:lnR>
+                    <a:lnT w="3175" cap="flat" cmpd="sng" algn="ctr">
+                      <a:solidFill>
+                        <a:schemeClr val="tx1"/>
+                      </a:solidFill>
+                      <a:prstDash val="solid"/>
+                      <a:round/>
+                      <a:headEnd type="none" w="med" len="med"/>
+                      <a:tailEnd type="none" w="med" len="med"/>
+                    </a:lnT>
+                    <a:lnB w="3175" cap="flat" cmpd="sng" algn="ctr">
+                      <a:solidFill>
+                        <a:schemeClr val="tx1"/>
+                      </a:solidFill>
+                      <a:prstDash val="solid"/>
+                      <a:round/>
+                      <a:headEnd type="none" w="med" len="med"/>
+                      <a:tailEnd type="none" w="med" len="med"/>
+                    </a:lnB>
+                    <a:lnTlToBr w="12700" cmpd="sng">
+                      <a:noFill/>
+                      <a:prstDash val="solid"/>
+                    </a:lnTlToBr>
+                    <a:lnBlToTr w="12700" cmpd="sng">
+                      <a:noFill/>
+                      <a:prstDash val="solid"/>
+                    </a:lnBlToTr>
+                    <a:solidFill>
+                      <a:schemeClr val="bg1"/>
+                    </a:solidFill>
+                  </a:tcPr>
+                </a:tc>
+                <a:tc>
+                  <a:txBody>
+                    <a:bodyPr/>
+                    <a:lstStyle/>
+                    <a:p>
+                      <a:pPr algn="ctr"/>
+                      <a:r>
+                        <a:rPr lang="en-IN" b="0" dirty="0">
+                          <a:solidFill>
+                            <a:srgbClr val="334155"/>
+                          </a:solidFill>
+                          <a:effectLst/>
+                          <a:latin typeface="Barlow Medium" panose="00000600000000000000" pitchFamily="2" charset="0"/>
+                        </a:rPr>
+                        <a:t>78.08</a:t>
+                      </a:r>
+                    </a:p>
+                  </a:txBody>
+                  <a:tcPr anchor="ctr">
+                    <a:lnL w="3175" cap="flat" cmpd="sng" algn="ctr">
+                      <a:noFill/>
+                      <a:prstDash val="solid"/>
+                      <a:round/>
+                      <a:headEnd type="none" w="med" len="med"/>
+                      <a:tailEnd type="none" w="med" len="med"/>
+                    </a:lnL>
+                    <a:lnR w="3175" cap="flat" cmpd="sng" algn="ctr">
+                      <a:noFill/>
+                      <a:prstDash val="solid"/>
+                      <a:round/>
+                      <a:headEnd type="none" w="med" len="med"/>
+                      <a:tailEnd type="none" w="med" len="med"/>
+                    </a:lnR>
+                    <a:lnT w="3175" cap="flat" cmpd="sng" algn="ctr">
+                      <a:solidFill>
+                        <a:schemeClr val="tx1"/>
+                      </a:solidFill>
+                      <a:prstDash val="solid"/>
+                      <a:round/>
+                      <a:headEnd type="none" w="med" len="med"/>
+                      <a:tailEnd type="none" w="med" len="med"/>
+                    </a:lnT>
+                    <a:lnB w="3175" cap="flat" cmpd="sng" algn="ctr">
+                      <a:solidFill>
+                        <a:schemeClr val="tx1"/>
+                      </a:solidFill>
+                      <a:prstDash val="solid"/>
+                      <a:round/>
+                      <a:headEnd type="none" w="med" len="med"/>
+                      <a:tailEnd type="none" w="med" len="med"/>
+                    </a:lnB>
+                    <a:lnTlToBr w="12700" cmpd="sng">
+                      <a:noFill/>
+                      <a:prstDash val="solid"/>
+                    </a:lnTlToBr>
+                    <a:lnBlToTr w="12700" cmpd="sng">
+                      <a:noFill/>
+                      <a:prstDash val="solid"/>
+                    </a:lnBlToTr>
+                    <a:solidFill>
+                      <a:schemeClr val="bg1"/>
+                    </a:solidFill>
+                  </a:tcPr>
+                </a:tc>
+                <a:tc rowSpan="2">
+                  <a:txBody>
+                    <a:bodyPr/>
+                    <a:lstStyle/>
+                    <a:p>
+                      <a:pPr algn="ctr"/>
+                      <a:r>
+                        <a:rPr lang="en-GB" b="1" dirty="0">
+                          <a:solidFill>
+                            <a:srgbClr val="334155"/>
+                          </a:solidFill>
+                          <a:effectLst/>
+                          <a:latin typeface="Barlow Medium" panose="00000600000000000000" pitchFamily="2" charset="0"/>
+                        </a:rPr>
+                        <a:t>+</a:t>
+                      </a:r>
+                      <a:r>
+                        <a:rPr lang="en-IN" b="1" dirty="0">
+                          <a:solidFill>
+                            <a:srgbClr val="334155"/>
+                          </a:solidFill>
+                          <a:effectLst/>
+                          <a:latin typeface="Barlow Medium" panose="00000600000000000000" pitchFamily="2" charset="0"/>
+                        </a:rPr>
+                        <a:t>10.33 %</a:t>
+                      </a:r>
+                    </a:p>
+                  </a:txBody>
+                  <a:tcPr anchor="ctr">
+                    <a:lnL w="3175" cap="flat" cmpd="sng" algn="ctr">
+                      <a:noFill/>
+                      <a:prstDash val="solid"/>
+                      <a:round/>
+                      <a:headEnd type="none" w="med" len="med"/>
+                      <a:tailEnd type="none" w="med" len="med"/>
+                    </a:lnL>
+                    <a:lnR w="3175" cap="flat" cmpd="sng" algn="ctr">
+                      <a:noFill/>
+                      <a:prstDash val="solid"/>
+                      <a:round/>
+                      <a:headEnd type="none" w="med" len="med"/>
+                      <a:tailEnd type="none" w="med" len="med"/>
+                    </a:lnR>
+                    <a:lnT w="3175" cap="flat" cmpd="sng" algn="ctr">
+                      <a:solidFill>
+                        <a:schemeClr val="tx1"/>
+                      </a:solidFill>
+                      <a:prstDash val="solid"/>
+                      <a:round/>
+                      <a:headEnd type="none" w="med" len="med"/>
+                      <a:tailEnd type="none" w="med" len="med"/>
+                    </a:lnT>
+                    <a:lnB w="3175" cap="flat" cmpd="sng" algn="ctr">
+                      <a:solidFill>
+                        <a:schemeClr val="tx1"/>
+                      </a:solidFill>
+                      <a:prstDash val="solid"/>
+                      <a:round/>
+                      <a:headEnd type="none" w="med" len="med"/>
+                      <a:tailEnd type="none" w="med" len="med"/>
+                    </a:lnB>
+                    <a:lnTlToBr w="12700" cmpd="sng">
+                      <a:noFill/>
+                      <a:prstDash val="solid"/>
+                    </a:lnTlToBr>
+                    <a:lnBlToTr w="12700" cmpd="sng">
+                      <a:noFill/>
+                      <a:prstDash val="solid"/>
+                    </a:lnBlToTr>
+                    <a:solidFill>
+                      <a:srgbClr val="92D050"/>
+                    </a:solidFill>
+                  </a:tcPr>
+                </a:tc>
+                <a:extLst>
+                  <a:ext uri="{0D108BD9-81ED-4DB2-BD59-A6C34878D82A}">
+                    <a16:rowId xmlns:a16="http://schemas.microsoft.com/office/drawing/2014/main" val="2563015135"/>
+                  </a:ext>
+                </a:extLst>
+              </a:tr>
+              <a:tr h="432351">
+                <a:tc vMerge="1">
+                  <a:txBody>
+                    <a:bodyPr/>
+                    <a:lstStyle/>
+                    <a:p>
+                      <a:endParaRPr dirty="0"/>
+                    </a:p>
+                  </a:txBody>
+                  <a:tcPr anchor="ctr">
+                    <a:lnL w="12700" cap="flat" cmpd="sng" algn="ctr">
+                      <a:solidFill>
+                        <a:schemeClr val="tx1"/>
+                      </a:solidFill>
+                      <a:prstDash val="solid"/>
+                      <a:round/>
+                      <a:headEnd type="none" w="med" len="med"/>
+                      <a:tailEnd type="none" w="med" len="med"/>
+                    </a:lnL>
+                    <a:lnR w="3175" cap="flat" cmpd="sng" algn="ctr">
+                      <a:noFill/>
+                      <a:prstDash val="solid"/>
+                      <a:round/>
+                      <a:headEnd type="none" w="med" len="med"/>
+                      <a:tailEnd type="none" w="med" len="med"/>
+                    </a:lnR>
+                    <a:lnT w="3175" cap="flat" cmpd="sng" algn="ctr">
+                      <a:solidFill>
+                        <a:schemeClr val="tx1"/>
+                      </a:solidFill>
+                      <a:prstDash val="solid"/>
+                      <a:round/>
+                      <a:headEnd type="none" w="med" len="med"/>
+                      <a:tailEnd type="none" w="med" len="med"/>
+                    </a:lnT>
+                    <a:lnB w="3175" cap="flat" cmpd="sng" algn="ctr">
+                      <a:solidFill>
+                        <a:schemeClr val="tx1"/>
+                      </a:solidFill>
+                      <a:prstDash val="solid"/>
+                      <a:round/>
+                      <a:headEnd type="none" w="med" len="med"/>
+                      <a:tailEnd type="none" w="med" len="med"/>
+                    </a:lnB>
+                    <a:lnTlToBr w="12700" cmpd="sng">
+                      <a:noFill/>
+                      <a:prstDash val="solid"/>
+                    </a:lnTlToBr>
+                    <a:lnBlToTr w="12700" cmpd="sng">
+                      <a:noFill/>
+                      <a:prstDash val="solid"/>
+                    </a:lnBlToTr>
+                    <a:solidFill>
+                      <a:schemeClr val="bg1"/>
+                    </a:solidFill>
+                  </a:tcPr>
+                </a:tc>
+                <a:tc>
+                  <a:txBody>
+                    <a:bodyPr/>
+                    <a:lstStyle/>
+                    <a:p>
+                      <a:pPr algn="ctr"/>
+                      <a:r>
+                        <a:rPr lang="en-IN" b="1" dirty="0">
+                          <a:solidFill>
+                            <a:srgbClr val="334155"/>
+                          </a:solidFill>
+                          <a:effectLst/>
+                          <a:latin typeface="Barlow Medium" panose="00000600000000000000" pitchFamily="2" charset="0"/>
+                        </a:rPr>
+                        <a:t>Lion</a:t>
+                      </a:r>
+                    </a:p>
+                  </a:txBody>
+                  <a:tcPr anchor="ctr">
+                    <a:lnL w="3175" cap="flat" cmpd="sng" algn="ctr">
+                      <a:noFill/>
+                      <a:prstDash val="solid"/>
+                      <a:round/>
+                      <a:headEnd type="none" w="med" len="med"/>
+                      <a:tailEnd type="none" w="med" len="med"/>
+                    </a:lnL>
+                    <a:lnR w="3175" cap="flat" cmpd="sng" algn="ctr">
+                      <a:noFill/>
+                      <a:prstDash val="solid"/>
+                      <a:round/>
+                      <a:headEnd type="none" w="med" len="med"/>
+                      <a:tailEnd type="none" w="med" len="med"/>
+                    </a:lnR>
+                    <a:lnT w="3175" cap="flat" cmpd="sng" algn="ctr">
+                      <a:solidFill>
+                        <a:schemeClr val="tx1"/>
+                      </a:solidFill>
+                      <a:prstDash val="solid"/>
+                      <a:round/>
+                      <a:headEnd type="none" w="med" len="med"/>
+                      <a:tailEnd type="none" w="med" len="med"/>
+                    </a:lnT>
+                    <a:lnB w="3175" cap="flat" cmpd="sng" algn="ctr">
+                      <a:solidFill>
+                        <a:schemeClr val="tx1"/>
+                      </a:solidFill>
+                      <a:prstDash val="solid"/>
+                      <a:round/>
+                      <a:headEnd type="none" w="med" len="med"/>
+                      <a:tailEnd type="none" w="med" len="med"/>
+                    </a:lnB>
+                    <a:lnTlToBr w="12700" cmpd="sng">
+                      <a:noFill/>
+                      <a:prstDash val="solid"/>
+                    </a:lnTlToBr>
+                    <a:lnBlToTr w="12700" cmpd="sng">
+                      <a:noFill/>
+                      <a:prstDash val="solid"/>
+                    </a:lnBlToTr>
+                    <a:solidFill>
+                      <a:srgbClr val="92D050"/>
+                    </a:solidFill>
+                  </a:tcPr>
+                </a:tc>
+                <a:tc>
+                  <a:txBody>
+                    <a:bodyPr/>
+                    <a:lstStyle/>
+                    <a:p>
+                      <a:pPr algn="ctr"/>
+                      <a:r>
+                        <a:rPr lang="en-IN" b="1" dirty="0">
+                          <a:solidFill>
+                            <a:srgbClr val="334155"/>
+                          </a:solidFill>
+                          <a:effectLst/>
+                          <a:latin typeface="Barlow Medium" panose="00000600000000000000" pitchFamily="2" charset="0"/>
+                        </a:rPr>
+                        <a:t>65.50</a:t>
+                      </a:r>
+                    </a:p>
+                  </a:txBody>
+                  <a:tcPr anchor="ctr">
+                    <a:lnL w="3175" cap="flat" cmpd="sng" algn="ctr">
+                      <a:noFill/>
+                      <a:prstDash val="solid"/>
+                      <a:round/>
+                      <a:headEnd type="none" w="med" len="med"/>
+                      <a:tailEnd type="none" w="med" len="med"/>
+                    </a:lnL>
+                    <a:lnR w="3175" cap="flat" cmpd="sng" algn="ctr">
+                      <a:noFill/>
+                      <a:prstDash val="solid"/>
+                      <a:round/>
+                      <a:headEnd type="none" w="med" len="med"/>
+                      <a:tailEnd type="none" w="med" len="med"/>
+                    </a:lnR>
+                    <a:lnT w="3175" cap="flat" cmpd="sng" algn="ctr">
+                      <a:solidFill>
+                        <a:schemeClr val="tx1"/>
+                      </a:solidFill>
+                      <a:prstDash val="solid"/>
+                      <a:round/>
+                      <a:headEnd type="none" w="med" len="med"/>
+                      <a:tailEnd type="none" w="med" len="med"/>
+                    </a:lnT>
+                    <a:lnB w="3175" cap="flat" cmpd="sng" algn="ctr">
+                      <a:solidFill>
+                        <a:schemeClr val="tx1"/>
+                      </a:solidFill>
+                      <a:prstDash val="solid"/>
+                      <a:round/>
+                      <a:headEnd type="none" w="med" len="med"/>
+                      <a:tailEnd type="none" w="med" len="med"/>
+                    </a:lnB>
+                    <a:lnTlToBr w="12700" cmpd="sng">
+                      <a:noFill/>
+                      <a:prstDash val="solid"/>
+                    </a:lnTlToBr>
+                    <a:lnBlToTr w="12700" cmpd="sng">
+                      <a:noFill/>
+                      <a:prstDash val="solid"/>
+                    </a:lnBlToTr>
+                    <a:solidFill>
+                      <a:srgbClr val="92D050"/>
+                    </a:solidFill>
+                  </a:tcPr>
+                </a:tc>
+                <a:tc>
+                  <a:txBody>
+                    <a:bodyPr/>
+                    <a:lstStyle/>
+                    <a:p>
+                      <a:pPr algn="ctr"/>
+                      <a:r>
+                        <a:rPr lang="en-IN" b="1" dirty="0">
+                          <a:solidFill>
+                            <a:srgbClr val="334155"/>
+                          </a:solidFill>
+                          <a:effectLst/>
+                          <a:latin typeface="Barlow Medium" panose="00000600000000000000" pitchFamily="2" charset="0"/>
+                        </a:rPr>
+                        <a:t>69.69</a:t>
+                      </a:r>
+                    </a:p>
+                  </a:txBody>
+                  <a:tcPr anchor="ctr">
+                    <a:lnL w="3175" cap="flat" cmpd="sng" algn="ctr">
+                      <a:noFill/>
+                      <a:prstDash val="solid"/>
+                      <a:round/>
+                      <a:headEnd type="none" w="med" len="med"/>
+                      <a:tailEnd type="none" w="med" len="med"/>
+                    </a:lnL>
+                    <a:lnR w="3175" cap="flat" cmpd="sng" algn="ctr">
+                      <a:noFill/>
+                      <a:prstDash val="solid"/>
+                      <a:round/>
+                      <a:headEnd type="none" w="med" len="med"/>
+                      <a:tailEnd type="none" w="med" len="med"/>
+                    </a:lnR>
+                    <a:lnT w="3175" cap="flat" cmpd="sng" algn="ctr">
+                      <a:solidFill>
+                        <a:schemeClr val="tx1"/>
+                      </a:solidFill>
+                      <a:prstDash val="solid"/>
+                      <a:round/>
+                      <a:headEnd type="none" w="med" len="med"/>
+                      <a:tailEnd type="none" w="med" len="med"/>
+                    </a:lnT>
+                    <a:lnB w="3175" cap="flat" cmpd="sng" algn="ctr">
+                      <a:solidFill>
+                        <a:schemeClr val="tx1"/>
+                      </a:solidFill>
+                      <a:prstDash val="solid"/>
+                      <a:round/>
+                      <a:headEnd type="none" w="med" len="med"/>
+                      <a:tailEnd type="none" w="med" len="med"/>
+                    </a:lnB>
+                    <a:lnTlToBr w="12700" cmpd="sng">
+                      <a:noFill/>
+                      <a:prstDash val="solid"/>
+                    </a:lnTlToBr>
+                    <a:lnBlToTr w="12700" cmpd="sng">
+                      <a:noFill/>
+                      <a:prstDash val="solid"/>
+                    </a:lnBlToTr>
+                    <a:solidFill>
+                      <a:srgbClr val="92D050"/>
+                    </a:solidFill>
+                  </a:tcPr>
+                </a:tc>
+                <a:tc vMerge="1">
+                  <a:txBody>
+                    <a:bodyPr/>
+                    <a:lstStyle/>
+                    <a:p>
+                      <a:endParaRPr dirty="0"/>
+                    </a:p>
+                  </a:txBody>
+                  <a:tcPr anchor="ctr">
+                    <a:lnL w="3175" cap="flat" cmpd="sng" algn="ctr">
+                      <a:noFill/>
+                      <a:prstDash val="solid"/>
+                      <a:round/>
+                      <a:headEnd type="none" w="med" len="med"/>
+                      <a:tailEnd type="none" w="med" len="med"/>
+                    </a:lnL>
+                    <a:lnR w="3175" cap="flat" cmpd="sng" algn="ctr">
+                      <a:noFill/>
+                      <a:prstDash val="solid"/>
+                      <a:round/>
+                      <a:headEnd type="none" w="med" len="med"/>
+                      <a:tailEnd type="none" w="med" len="med"/>
+                    </a:lnR>
+                    <a:lnT w="3175" cap="flat" cmpd="sng" algn="ctr">
+                      <a:solidFill>
+                        <a:schemeClr val="tx1"/>
+                      </a:solidFill>
+                      <a:prstDash val="solid"/>
+                      <a:round/>
+                      <a:headEnd type="none" w="med" len="med"/>
+                      <a:tailEnd type="none" w="med" len="med"/>
+                    </a:lnT>
+                    <a:lnB w="3175" cap="flat" cmpd="sng" algn="ctr">
+                      <a:solidFill>
+                        <a:schemeClr val="tx1"/>
+                      </a:solidFill>
+                      <a:prstDash val="solid"/>
+                      <a:round/>
+                      <a:headEnd type="none" w="med" len="med"/>
+                      <a:tailEnd type="none" w="med" len="med"/>
+                    </a:lnB>
+                    <a:lnTlToBr w="12700" cmpd="sng">
+                      <a:noFill/>
+                      <a:prstDash val="solid"/>
+                    </a:lnTlToBr>
+                    <a:lnBlToTr w="12700" cmpd="sng">
+                      <a:noFill/>
+                      <a:prstDash val="solid"/>
+                    </a:lnBlToTr>
+                    <a:solidFill>
+                      <a:schemeClr val="bg1"/>
+                    </a:solidFill>
+                  </a:tcPr>
+                </a:tc>
+                <a:extLst>
+                  <a:ext uri="{0D108BD9-81ED-4DB2-BD59-A6C34878D82A}">
+                    <a16:rowId xmlns:a16="http://schemas.microsoft.com/office/drawing/2014/main" val="1269825113"/>
+                  </a:ext>
+                </a:extLst>
+              </a:tr>
+              <a:tr h="432351">
+                <a:tc rowSpan="2">
+                  <a:txBody>
+                    <a:bodyPr/>
+                    <a:lstStyle/>
+                    <a:p>
+                      <a:pPr algn="ctr"/>
+                      <a:r>
+                        <a:rPr lang="en-IN" b="1" dirty="0">
+                          <a:solidFill>
+                            <a:srgbClr val="334155"/>
+                          </a:solidFill>
+                          <a:effectLst/>
+                          <a:latin typeface="Barlow Medium" panose="00000600000000000000" pitchFamily="2" charset="0"/>
+                        </a:rPr>
+                        <a:t>ModernBERT</a:t>
+                      </a:r>
+                    </a:p>
+                  </a:txBody>
+                  <a:tcPr anchor="ctr">
+                    <a:lnL w="12700" cap="flat" cmpd="sng" algn="ctr">
+                      <a:solidFill>
+                        <a:schemeClr val="tx1"/>
+                      </a:solidFill>
+                      <a:prstDash val="solid"/>
+                      <a:round/>
+                      <a:headEnd type="none" w="med" len="med"/>
+                      <a:tailEnd type="none" w="med" len="med"/>
+                    </a:lnL>
+                    <a:lnR w="3175" cap="flat" cmpd="sng" algn="ctr">
+                      <a:noFill/>
+                      <a:prstDash val="solid"/>
+                      <a:round/>
+                      <a:headEnd type="none" w="med" len="med"/>
+                      <a:tailEnd type="none" w="med" len="med"/>
+                    </a:lnR>
+                    <a:lnT w="3175" cap="flat" cmpd="sng" algn="ctr">
+                      <a:solidFill>
+                        <a:schemeClr val="tx1"/>
+                      </a:solidFill>
+                      <a:prstDash val="solid"/>
+                      <a:round/>
+                      <a:headEnd type="none" w="med" len="med"/>
+                      <a:tailEnd type="none" w="med" len="med"/>
+                    </a:lnT>
+                    <a:lnB w="9525" cap="rnd" cmpd="sng" algn="ctr">
+                      <a:noFill/>
+                      <a:prstDash val="solid"/>
+                    </a:lnB>
+                    <a:lnTlToBr w="12700" cmpd="sng">
+                      <a:noFill/>
+                      <a:prstDash val="solid"/>
+                    </a:lnTlToBr>
+                    <a:lnBlToTr w="12700" cmpd="sng">
+                      <a:noFill/>
+                      <a:prstDash val="solid"/>
+                    </a:lnBlToTr>
+                    <a:solidFill>
+                      <a:schemeClr val="bg1"/>
+                    </a:solidFill>
+                  </a:tcPr>
+                </a:tc>
+                <a:tc>
+                  <a:txBody>
+                    <a:bodyPr/>
+                    <a:lstStyle/>
+                    <a:p>
+                      <a:pPr algn="ctr"/>
+                      <a:r>
+                        <a:rPr lang="en-IN">
+                          <a:solidFill>
+                            <a:srgbClr val="334155"/>
+                          </a:solidFill>
+                          <a:effectLst/>
+                          <a:latin typeface="Barlow Medium" panose="00000600000000000000" pitchFamily="2" charset="0"/>
+                        </a:rPr>
+                        <a:t>AdamW</a:t>
+                      </a:r>
+                    </a:p>
+                  </a:txBody>
+                  <a:tcPr anchor="ctr">
+                    <a:lnL w="3175" cap="flat" cmpd="sng" algn="ctr">
+                      <a:noFill/>
+                      <a:prstDash val="solid"/>
+                      <a:round/>
+                      <a:headEnd type="none" w="med" len="med"/>
+                      <a:tailEnd type="none" w="med" len="med"/>
+                    </a:lnL>
+                    <a:lnR w="3175" cap="flat" cmpd="sng" algn="ctr">
+                      <a:noFill/>
+                      <a:prstDash val="solid"/>
+                      <a:round/>
+                      <a:headEnd type="none" w="med" len="med"/>
+                      <a:tailEnd type="none" w="med" len="med"/>
+                    </a:lnR>
+                    <a:lnT w="3175" cap="flat" cmpd="sng" algn="ctr">
+                      <a:solidFill>
+                        <a:schemeClr val="tx1"/>
+                      </a:solidFill>
+                      <a:prstDash val="solid"/>
+                      <a:round/>
+                      <a:headEnd type="none" w="med" len="med"/>
+                      <a:tailEnd type="none" w="med" len="med"/>
+                    </a:lnT>
+                    <a:lnB w="3175" cap="flat" cmpd="sng" algn="ctr">
+                      <a:solidFill>
+                        <a:schemeClr val="tx1"/>
+                      </a:solidFill>
+                      <a:prstDash val="solid"/>
+                      <a:round/>
+                      <a:headEnd type="none" w="med" len="med"/>
+                      <a:tailEnd type="none" w="med" len="med"/>
+                    </a:lnB>
+                    <a:lnTlToBr w="12700" cmpd="sng">
+                      <a:noFill/>
+                      <a:prstDash val="solid"/>
+                    </a:lnTlToBr>
+                    <a:lnBlToTr w="12700" cmpd="sng">
+                      <a:noFill/>
+                      <a:prstDash val="solid"/>
+                    </a:lnBlToTr>
+                    <a:solidFill>
+                      <a:schemeClr val="bg1"/>
+                    </a:solidFill>
+                  </a:tcPr>
+                </a:tc>
+                <a:tc>
+                  <a:txBody>
+                    <a:bodyPr/>
+                    <a:lstStyle/>
+                    <a:p>
+                      <a:pPr algn="ctr"/>
+                      <a:r>
+                        <a:rPr lang="en-IN" dirty="0">
+                          <a:solidFill>
+                            <a:srgbClr val="334155"/>
+                          </a:solidFill>
+                          <a:effectLst/>
+                          <a:latin typeface="Barlow Medium" panose="00000600000000000000" pitchFamily="2" charset="0"/>
+                        </a:rPr>
+                        <a:t>77.04</a:t>
+                      </a:r>
+                    </a:p>
+                  </a:txBody>
+                  <a:tcPr anchor="ctr">
+                    <a:lnL w="3175" cap="flat" cmpd="sng" algn="ctr">
+                      <a:noFill/>
+                      <a:prstDash val="solid"/>
+                      <a:round/>
+                      <a:headEnd type="none" w="med" len="med"/>
+                      <a:tailEnd type="none" w="med" len="med"/>
+                    </a:lnL>
+                    <a:lnR w="3175" cap="flat" cmpd="sng" algn="ctr">
+                      <a:noFill/>
+                      <a:prstDash val="solid"/>
+                      <a:round/>
+                      <a:headEnd type="none" w="med" len="med"/>
+                      <a:tailEnd type="none" w="med" len="med"/>
+                    </a:lnR>
+                    <a:lnT w="3175" cap="flat" cmpd="sng" algn="ctr">
+                      <a:solidFill>
+                        <a:schemeClr val="tx1"/>
+                      </a:solidFill>
+                      <a:prstDash val="solid"/>
+                      <a:round/>
+                      <a:headEnd type="none" w="med" len="med"/>
+                      <a:tailEnd type="none" w="med" len="med"/>
+                    </a:lnT>
+                    <a:lnB w="3175" cap="flat" cmpd="sng" algn="ctr">
+                      <a:solidFill>
+                        <a:schemeClr val="tx1"/>
+                      </a:solidFill>
+                      <a:prstDash val="solid"/>
+                      <a:round/>
+                      <a:headEnd type="none" w="med" len="med"/>
+                      <a:tailEnd type="none" w="med" len="med"/>
+                    </a:lnB>
+                    <a:lnTlToBr w="12700" cmpd="sng">
+                      <a:noFill/>
+                      <a:prstDash val="solid"/>
+                    </a:lnTlToBr>
+                    <a:lnBlToTr w="12700" cmpd="sng">
+                      <a:noFill/>
+                      <a:prstDash val="solid"/>
+                    </a:lnBlToTr>
+                    <a:solidFill>
+                      <a:schemeClr val="bg1"/>
+                    </a:solidFill>
+                  </a:tcPr>
+                </a:tc>
+                <a:tc>
+                  <a:txBody>
+                    <a:bodyPr/>
+                    <a:lstStyle/>
+                    <a:p>
+                      <a:pPr algn="ctr"/>
+                      <a:r>
+                        <a:rPr lang="en-IN" dirty="0">
+                          <a:solidFill>
+                            <a:srgbClr val="334155"/>
+                          </a:solidFill>
+                          <a:effectLst/>
+                          <a:latin typeface="Barlow Medium" panose="00000600000000000000" pitchFamily="2" charset="0"/>
+                        </a:rPr>
+                        <a:t>81.40</a:t>
+                      </a:r>
+                    </a:p>
+                  </a:txBody>
+                  <a:tcPr anchor="ctr">
+                    <a:lnL w="3175" cap="flat" cmpd="sng" algn="ctr">
+                      <a:noFill/>
+                      <a:prstDash val="solid"/>
+                      <a:round/>
+                      <a:headEnd type="none" w="med" len="med"/>
+                      <a:tailEnd type="none" w="med" len="med"/>
+                    </a:lnL>
+                    <a:lnR w="3175" cap="flat" cmpd="sng" algn="ctr">
+                      <a:noFill/>
+                      <a:prstDash val="solid"/>
+                      <a:round/>
+                      <a:headEnd type="none" w="med" len="med"/>
+                      <a:tailEnd type="none" w="med" len="med"/>
+                    </a:lnR>
+                    <a:lnT w="3175" cap="flat" cmpd="sng" algn="ctr">
+                      <a:solidFill>
+                        <a:schemeClr val="tx1"/>
+                      </a:solidFill>
+                      <a:prstDash val="solid"/>
+                      <a:round/>
+                      <a:headEnd type="none" w="med" len="med"/>
+                      <a:tailEnd type="none" w="med" len="med"/>
+                    </a:lnT>
+                    <a:lnB w="3175" cap="flat" cmpd="sng" algn="ctr">
+                      <a:solidFill>
+                        <a:schemeClr val="tx1"/>
+                      </a:solidFill>
+                      <a:prstDash val="solid"/>
+                      <a:round/>
+                      <a:headEnd type="none" w="med" len="med"/>
+                      <a:tailEnd type="none" w="med" len="med"/>
+                    </a:lnB>
+                    <a:lnTlToBr w="12700" cmpd="sng">
+                      <a:noFill/>
+                      <a:prstDash val="solid"/>
+                    </a:lnTlToBr>
+                    <a:lnBlToTr w="12700" cmpd="sng">
+                      <a:noFill/>
+                      <a:prstDash val="solid"/>
+                    </a:lnBlToTr>
+                    <a:solidFill>
+                      <a:schemeClr val="bg1"/>
+                    </a:solidFill>
+                  </a:tcPr>
+                </a:tc>
+                <a:tc rowSpan="2">
+                  <a:txBody>
+                    <a:bodyPr/>
+                    <a:lstStyle/>
+                    <a:p>
+                      <a:pPr algn="ctr"/>
+                      <a:r>
+                        <a:rPr lang="en-GB" b="1" dirty="0">
+                          <a:solidFill>
+                            <a:srgbClr val="334155"/>
+                          </a:solidFill>
+                          <a:effectLst/>
+                          <a:latin typeface="Barlow Medium" panose="00000600000000000000" pitchFamily="2" charset="0"/>
+                        </a:rPr>
+                        <a:t>+</a:t>
+                      </a:r>
+                      <a:r>
+                        <a:rPr lang="en-IN" b="1" dirty="0">
+                          <a:solidFill>
+                            <a:srgbClr val="334155"/>
+                          </a:solidFill>
+                          <a:effectLst/>
+                          <a:latin typeface="Barlow Medium" panose="00000600000000000000" pitchFamily="2" charset="0"/>
+                        </a:rPr>
+                        <a:t>3.49%</a:t>
+                      </a:r>
+                    </a:p>
+                  </a:txBody>
+                  <a:tcPr anchor="ctr">
+                    <a:lnL w="3175" cap="flat" cmpd="sng" algn="ctr">
+                      <a:noFill/>
+                      <a:prstDash val="solid"/>
+                      <a:round/>
+                      <a:headEnd type="none" w="med" len="med"/>
+                      <a:tailEnd type="none" w="med" len="med"/>
+                    </a:lnL>
+                    <a:lnR w="3175" cap="flat" cmpd="sng" algn="ctr">
+                      <a:noFill/>
+                      <a:prstDash val="solid"/>
+                      <a:round/>
+                      <a:headEnd type="none" w="med" len="med"/>
+                      <a:tailEnd type="none" w="med" len="med"/>
+                    </a:lnR>
+                    <a:lnT w="3175" cap="flat" cmpd="sng" algn="ctr">
+                      <a:solidFill>
+                        <a:schemeClr val="tx1"/>
+                      </a:solidFill>
+                      <a:prstDash val="solid"/>
+                      <a:round/>
+                      <a:headEnd type="none" w="med" len="med"/>
+                      <a:tailEnd type="none" w="med" len="med"/>
+                    </a:lnT>
+                    <a:lnB w="9525" cap="rnd" cmpd="sng" algn="ctr">
+                      <a:noFill/>
+                      <a:prstDash val="solid"/>
+                    </a:lnB>
+                    <a:lnTlToBr w="12700" cmpd="sng">
+                      <a:noFill/>
+                      <a:prstDash val="solid"/>
+                    </a:lnTlToBr>
+                    <a:lnBlToTr w="12700" cmpd="sng">
+                      <a:noFill/>
+                      <a:prstDash val="solid"/>
+                    </a:lnBlToTr>
+                    <a:solidFill>
+                      <a:srgbClr val="92D050"/>
+                    </a:solidFill>
+                  </a:tcPr>
+                </a:tc>
+                <a:extLst>
+                  <a:ext uri="{0D108BD9-81ED-4DB2-BD59-A6C34878D82A}">
+                    <a16:rowId xmlns:a16="http://schemas.microsoft.com/office/drawing/2014/main" val="10467925"/>
+                  </a:ext>
+                </a:extLst>
+              </a:tr>
+              <a:tr h="432351">
+                <a:tc vMerge="1">
+                  <a:txBody>
+                    <a:bodyPr/>
+                    <a:lstStyle/>
+                    <a:p>
+                      <a:endParaRPr dirty="0"/>
+                    </a:p>
+                  </a:txBody>
+                  <a:tcPr anchor="ctr">
+                    <a:lnL w="12700" cap="flat" cmpd="sng" algn="ctr">
+                      <a:solidFill>
+                        <a:schemeClr val="tx1"/>
+                      </a:solidFill>
+                      <a:prstDash val="solid"/>
+                      <a:round/>
+                      <a:headEnd type="none" w="med" len="med"/>
+                      <a:tailEnd type="none" w="med" len="med"/>
+                    </a:lnL>
+                    <a:lnR w="3175" cap="flat" cmpd="sng" algn="ctr">
+                      <a:noFill/>
+                      <a:prstDash val="solid"/>
+                      <a:round/>
+                      <a:headEnd type="none" w="med" len="med"/>
+                      <a:tailEnd type="none" w="med" len="med"/>
+                    </a:lnR>
+                    <a:lnT w="3175" cap="flat" cmpd="sng" algn="ctr">
+                      <a:solidFill>
+                        <a:schemeClr val="tx1"/>
+                      </a:solidFill>
+                      <a:prstDash val="solid"/>
+                      <a:round/>
+                      <a:headEnd type="none" w="med" len="med"/>
+                      <a:tailEnd type="none" w="med" len="med"/>
+                    </a:lnT>
+                    <a:lnB w="9525" cap="rnd" cmpd="sng" algn="ctr">
+                      <a:noFill/>
+                      <a:prstDash val="solid"/>
+                    </a:lnB>
+                    <a:lnTlToBr w="12700" cmpd="sng">
+                      <a:noFill/>
+                      <a:prstDash val="solid"/>
+                    </a:lnTlToBr>
+                    <a:lnBlToTr w="12700" cmpd="sng">
+                      <a:noFill/>
+                      <a:prstDash val="solid"/>
+                    </a:lnBlToTr>
+                    <a:solidFill>
+                      <a:srgbClr val="92D050"/>
+                    </a:solidFill>
+                  </a:tcPr>
+                </a:tc>
+                <a:tc>
+                  <a:txBody>
+                    <a:bodyPr/>
+                    <a:lstStyle/>
+                    <a:p>
+                      <a:pPr algn="ctr"/>
+                      <a:r>
+                        <a:rPr lang="en-IN" b="1" dirty="0">
+                          <a:solidFill>
+                            <a:srgbClr val="334155"/>
+                          </a:solidFill>
+                          <a:effectLst/>
+                          <a:latin typeface="Barlow Medium" panose="00000600000000000000" pitchFamily="2" charset="0"/>
+                        </a:rPr>
+                        <a:t>Lion</a:t>
+                      </a:r>
+                      <a:endParaRPr lang="en-IN" dirty="0">
+                        <a:solidFill>
+                          <a:srgbClr val="334155"/>
+                        </a:solidFill>
+                        <a:effectLst/>
+                        <a:latin typeface="Barlow Medium" panose="00000600000000000000" pitchFamily="2" charset="0"/>
+                      </a:endParaRPr>
+                    </a:p>
+                  </a:txBody>
+                  <a:tcPr anchor="ctr">
+                    <a:lnL w="3175" cap="flat" cmpd="sng" algn="ctr">
+                      <a:noFill/>
+                      <a:prstDash val="solid"/>
+                      <a:round/>
+                      <a:headEnd type="none" w="med" len="med"/>
+                      <a:tailEnd type="none" w="med" len="med"/>
+                    </a:lnL>
+                    <a:lnR w="3175" cap="flat" cmpd="sng" algn="ctr">
+                      <a:noFill/>
+                      <a:prstDash val="solid"/>
+                      <a:round/>
+                      <a:headEnd type="none" w="med" len="med"/>
+                      <a:tailEnd type="none" w="med" len="med"/>
+                    </a:lnR>
+                    <a:lnT w="3175" cap="flat" cmpd="sng" algn="ctr">
+                      <a:solidFill>
+                        <a:schemeClr val="tx1"/>
+                      </a:solidFill>
+                      <a:prstDash val="solid"/>
+                      <a:round/>
+                      <a:headEnd type="none" w="med" len="med"/>
+                      <a:tailEnd type="none" w="med" len="med"/>
+                    </a:lnT>
+                    <a:lnB w="9525" cap="rnd" cmpd="sng" algn="ctr">
+                      <a:noFill/>
+                      <a:prstDash val="solid"/>
+                    </a:lnB>
+                    <a:lnTlToBr w="12700" cmpd="sng">
+                      <a:noFill/>
+                      <a:prstDash val="solid"/>
+                    </a:lnTlToBr>
+                    <a:lnBlToTr w="12700" cmpd="sng">
+                      <a:noFill/>
+                      <a:prstDash val="solid"/>
+                    </a:lnBlToTr>
+                    <a:solidFill>
+                      <a:srgbClr val="92D050"/>
+                    </a:solidFill>
+                  </a:tcPr>
+                </a:tc>
+                <a:tc>
+                  <a:txBody>
+                    <a:bodyPr/>
+                    <a:lstStyle/>
+                    <a:p>
+                      <a:pPr algn="ctr"/>
+                      <a:r>
+                        <a:rPr lang="en-IN" b="1" dirty="0">
+                          <a:solidFill>
+                            <a:srgbClr val="334155"/>
+                          </a:solidFill>
+                          <a:effectLst/>
+                          <a:latin typeface="Barlow Medium" panose="00000600000000000000" pitchFamily="2" charset="0"/>
+                        </a:rPr>
+                        <a:t>74.35</a:t>
+                      </a:r>
+                    </a:p>
+                  </a:txBody>
+                  <a:tcPr anchor="ctr">
+                    <a:lnL w="3175" cap="flat" cmpd="sng" algn="ctr">
+                      <a:noFill/>
+                      <a:prstDash val="solid"/>
+                      <a:round/>
+                      <a:headEnd type="none" w="med" len="med"/>
+                      <a:tailEnd type="none" w="med" len="med"/>
+                    </a:lnL>
+                    <a:lnR w="3175" cap="flat" cmpd="sng" algn="ctr">
+                      <a:noFill/>
+                      <a:prstDash val="solid"/>
+                      <a:round/>
+                      <a:headEnd type="none" w="med" len="med"/>
+                      <a:tailEnd type="none" w="med" len="med"/>
+                    </a:lnR>
+                    <a:lnT w="3175" cap="flat" cmpd="sng" algn="ctr">
+                      <a:solidFill>
+                        <a:schemeClr val="tx1"/>
+                      </a:solidFill>
+                      <a:prstDash val="solid"/>
+                      <a:round/>
+                      <a:headEnd type="none" w="med" len="med"/>
+                      <a:tailEnd type="none" w="med" len="med"/>
+                    </a:lnT>
+                    <a:lnB w="9525" cap="rnd" cmpd="sng" algn="ctr">
+                      <a:noFill/>
+                      <a:prstDash val="solid"/>
+                    </a:lnB>
+                    <a:lnTlToBr w="12700" cmpd="sng">
+                      <a:noFill/>
+                      <a:prstDash val="solid"/>
+                    </a:lnTlToBr>
+                    <a:lnBlToTr w="12700" cmpd="sng">
+                      <a:noFill/>
+                      <a:prstDash val="solid"/>
+                    </a:lnBlToTr>
+                    <a:solidFill>
+                      <a:srgbClr val="92D050"/>
+                    </a:solidFill>
+                  </a:tcPr>
+                </a:tc>
+                <a:tc>
+                  <a:txBody>
+                    <a:bodyPr/>
+                    <a:lstStyle/>
+                    <a:p>
+                      <a:pPr algn="ctr"/>
+                      <a:r>
+                        <a:rPr lang="en-IN" b="1" dirty="0">
+                          <a:solidFill>
+                            <a:srgbClr val="334155"/>
+                          </a:solidFill>
+                          <a:effectLst/>
+                          <a:latin typeface="Barlow Medium" panose="00000600000000000000" pitchFamily="2" charset="0"/>
+                        </a:rPr>
+                        <a:t>79.45</a:t>
+                      </a:r>
+                    </a:p>
+                  </a:txBody>
+                  <a:tcPr anchor="ctr">
+                    <a:lnL w="3175" cap="flat" cmpd="sng" algn="ctr">
+                      <a:noFill/>
+                      <a:prstDash val="solid"/>
+                      <a:round/>
+                      <a:headEnd type="none" w="med" len="med"/>
+                      <a:tailEnd type="none" w="med" len="med"/>
+                    </a:lnL>
+                    <a:lnR w="3175" cap="flat" cmpd="sng" algn="ctr">
+                      <a:noFill/>
+                      <a:prstDash val="solid"/>
+                      <a:round/>
+                      <a:headEnd type="none" w="med" len="med"/>
+                      <a:tailEnd type="none" w="med" len="med"/>
+                    </a:lnR>
+                    <a:lnT w="3175" cap="flat" cmpd="sng" algn="ctr">
+                      <a:solidFill>
+                        <a:schemeClr val="tx1"/>
+                      </a:solidFill>
+                      <a:prstDash val="solid"/>
+                      <a:round/>
+                      <a:headEnd type="none" w="med" len="med"/>
+                      <a:tailEnd type="none" w="med" len="med"/>
+                    </a:lnT>
+                    <a:lnB w="9525" cap="rnd" cmpd="sng" algn="ctr">
+                      <a:noFill/>
+                      <a:prstDash val="solid"/>
+                    </a:lnB>
+                    <a:lnTlToBr w="12700" cmpd="sng">
+                      <a:noFill/>
+                      <a:prstDash val="solid"/>
+                    </a:lnTlToBr>
+                    <a:lnBlToTr w="12700" cmpd="sng">
+                      <a:noFill/>
+                      <a:prstDash val="solid"/>
+                    </a:lnBlToTr>
+                    <a:solidFill>
+                      <a:srgbClr val="92D050"/>
+                    </a:solidFill>
+                  </a:tcPr>
+                </a:tc>
+                <a:tc vMerge="1">
+                  <a:txBody>
+                    <a:bodyPr/>
+                    <a:lstStyle/>
+                    <a:p>
+                      <a:endParaRPr dirty="0"/>
+                    </a:p>
+                  </a:txBody>
+                  <a:tcPr anchor="ctr">
+                    <a:lnL w="3175" cap="flat" cmpd="sng" algn="ctr">
+                      <a:noFill/>
+                      <a:prstDash val="solid"/>
+                      <a:round/>
+                      <a:headEnd type="none" w="med" len="med"/>
+                      <a:tailEnd type="none" w="med" len="med"/>
+                    </a:lnL>
+                    <a:lnR w="3175" cap="flat" cmpd="sng" algn="ctr">
+                      <a:noFill/>
+                      <a:prstDash val="solid"/>
+                      <a:round/>
+                      <a:headEnd type="none" w="med" len="med"/>
+                      <a:tailEnd type="none" w="med" len="med"/>
+                    </a:lnR>
+                    <a:lnT w="3175" cap="flat" cmpd="sng" algn="ctr">
+                      <a:solidFill>
+                        <a:schemeClr val="tx1"/>
+                      </a:solidFill>
+                      <a:prstDash val="solid"/>
+                      <a:round/>
+                      <a:headEnd type="none" w="med" len="med"/>
+                      <a:tailEnd type="none" w="med" len="med"/>
+                    </a:lnT>
+                    <a:lnB w="9525" cap="rnd" cmpd="sng" algn="ctr">
+                      <a:noFill/>
+                      <a:prstDash val="solid"/>
+                    </a:lnB>
+                    <a:lnTlToBr w="12700" cmpd="sng">
+                      <a:noFill/>
+                      <a:prstDash val="solid"/>
+                    </a:lnTlToBr>
+                    <a:lnBlToTr w="12700" cmpd="sng">
+                      <a:noFill/>
+                      <a:prstDash val="solid"/>
+                    </a:lnBlToTr>
+                    <a:solidFill>
+                      <a:srgbClr val="92D050"/>
+                    </a:solidFill>
+                  </a:tcPr>
+                </a:tc>
+                <a:extLst>
+                  <a:ext uri="{0D108BD9-81ED-4DB2-BD59-A6C34878D82A}">
+                    <a16:rowId xmlns:a16="http://schemas.microsoft.com/office/drawing/2014/main" val="402260452"/>
+                  </a:ext>
+                </a:extLst>
+              </a:tr>
+            </a:tbl>
+          </a:graphicData>
+        </a:graphic>
+      </p:graphicFrame>
+      <p:sp>
+        <p:nvSpPr>
+          <p:cNvPr id="7" name="TextBox 6">
+            <a:extLst>
+              <a:ext uri="{FF2B5EF4-FFF2-40B4-BE49-F238E27FC236}">
+                <a16:creationId xmlns:a16="http://schemas.microsoft.com/office/drawing/2014/main" id="{51B1C36E-476B-1187-E408-7D55B97D5C4B}"/>
+              </a:ext>
+            </a:extLst>
+          </p:cNvPr>
+          <p:cNvSpPr txBox="1"/>
+          <p:nvPr/>
+        </p:nvSpPr>
+        <p:spPr>
+          <a:xfrm>
+            <a:off x="2616517" y="5851297"/>
+            <a:ext cx="7152516" cy="707886"/>
+          </a:xfrm>
+          <a:prstGeom prst="rect">
+            <a:avLst/>
+          </a:prstGeom>
+        </p:spPr>
+        <p:style>
+          <a:lnRef idx="2">
+            <a:schemeClr val="accent1">
+              <a:shade val="15000"/>
+            </a:schemeClr>
+          </a:lnRef>
+          <a:fillRef idx="1">
+            <a:schemeClr val="accent1"/>
+          </a:fillRef>
+          <a:effectRef idx="0">
+            <a:schemeClr val="accent1"/>
+          </a:effectRef>
+          <a:fontRef idx="minor">
+            <a:schemeClr val="lt1"/>
+          </a:fontRef>
+        </p:style>
+        <p:txBody>
+          <a:bodyPr wrap="square" rtlCol="0">
+            <a:spAutoFit/>
+          </a:bodyPr>
+          <a:lstStyle/>
+          <a:p>
+            <a:pPr algn="ctr"/>
+            <a:r>
+              <a:rPr lang="en-GB" sz="2000" dirty="0">
+                <a:latin typeface="Barlow SemiBold" panose="00000700000000000000" pitchFamily="2" charset="0"/>
+              </a:rPr>
+              <a:t>Lion optimizer demonstrates superior GPU utilization efficiency across all models</a:t>
+            </a:r>
+            <a:endParaRPr lang="en-IN" sz="2000" dirty="0">
+              <a:latin typeface="Barlow SemiBold" panose="00000700000000000000" pitchFamily="2" charset="0"/>
+            </a:endParaRPr>
+          </a:p>
+        </p:txBody>
+      </p:sp>
+    </p:spTree>
+    <p:extLst>
+      <p:ext uri="{BB962C8B-B14F-4D97-AF65-F5344CB8AC3E}">
+        <p14:creationId xmlns:p14="http://schemas.microsoft.com/office/powerpoint/2010/main" val="2852238036"/>
+      </p:ext>
+    </p:extLst>
+  </p:cSld>
+  <p:clrMapOvr>
+    <a:masterClrMapping/>
+  </p:clrMapOvr>
+</p:sld>
+</file>
+
+<file path=ppt/slides/slide13.xml><?xml version="1.0" encoding="utf-8"?>
+<p:sld xmlns:a="http://schemas.openxmlformats.org/drawingml/2006/main" xmlns:r="http://schemas.openxmlformats.org/officeDocument/2006/relationships" xmlns:p="http://schemas.openxmlformats.org/presentationml/2006/main">
+  <p:cSld>
+    <p:spTree>
+      <p:nvGrpSpPr>
+        <p:cNvPr id="1" name=""/>
+        <p:cNvGrpSpPr/>
+        <p:nvPr/>
+      </p:nvGrpSpPr>
+      <p:grpSpPr>
+        <a:xfrm>
+          <a:off x="0" y="0"/>
+          <a:ext cx="0" cy="0"/>
+          <a:chOff x="0" y="0"/>
+          <a:chExt cx="0" cy="0"/>
+        </a:xfrm>
+      </p:grpSpPr>
+      <p:sp>
+        <p:nvSpPr>
+          <p:cNvPr id="4" name="Text Placeholder 3">
+            <a:extLst>
+              <a:ext uri="{FF2B5EF4-FFF2-40B4-BE49-F238E27FC236}">
+                <a16:creationId xmlns:a16="http://schemas.microsoft.com/office/drawing/2014/main" id="{5AD8E1BB-9F92-23D5-7BB8-D614AC3724B9}"/>
+              </a:ext>
+            </a:extLst>
+          </p:cNvPr>
+          <p:cNvSpPr>
+            <a:spLocks noGrp="1"/>
+          </p:cNvSpPr>
+          <p:nvPr>
+            <p:ph type="body" sz="half" idx="2"/>
+          </p:nvPr>
+        </p:nvSpPr>
+        <p:spPr>
+          <a:xfrm>
+            <a:off x="1126690" y="2523281"/>
+            <a:ext cx="11065310" cy="4085863"/>
+          </a:xfrm>
+        </p:spPr>
+        <p:txBody>
+          <a:bodyPr>
+            <a:normAutofit/>
+          </a:bodyPr>
+          <a:lstStyle/>
+          <a:p>
+            <a:pPr marL="342900" indent="-342900">
+              <a:buFont typeface="Wingdings" panose="05000000000000000000" pitchFamily="2" charset="2"/>
+              <a:buChar char="Ø"/>
+            </a:pPr>
+            <a:r>
+              <a:rPr lang="en-IN" dirty="0">
+                <a:latin typeface="Barlow" panose="00000500000000000000" pitchFamily="2" charset="0"/>
+              </a:rPr>
+              <a:t>🏆 </a:t>
+            </a:r>
+            <a:r>
+              <a:rPr lang="en-IN" b="1" dirty="0">
+                <a:latin typeface="Barlow" panose="00000500000000000000" pitchFamily="2" charset="0"/>
+              </a:rPr>
+              <a:t>Universal Efficiency:</a:t>
+            </a:r>
+            <a:r>
+              <a:rPr lang="en-IN" dirty="0">
+                <a:latin typeface="Barlow" panose="00000500000000000000" pitchFamily="2" charset="0"/>
+              </a:rPr>
+              <a:t> Lion optimizer reduces GPU usage in 100% of configurations</a:t>
+            </a:r>
+          </a:p>
+          <a:p>
+            <a:pPr marL="342900" indent="-342900">
+              <a:buFont typeface="Wingdings" panose="05000000000000000000" pitchFamily="2" charset="2"/>
+              <a:buChar char="Ø"/>
+            </a:pPr>
+            <a:r>
+              <a:rPr lang="en-IN" dirty="0">
+                <a:latin typeface="Barlow" panose="00000500000000000000" pitchFamily="2" charset="0"/>
+              </a:rPr>
+              <a:t>⚖️ </a:t>
+            </a:r>
+            <a:r>
+              <a:rPr lang="en-IN" b="1" dirty="0">
+                <a:latin typeface="Barlow" panose="00000500000000000000" pitchFamily="2" charset="0"/>
+              </a:rPr>
+              <a:t>Performance Trade-offs:</a:t>
+            </a:r>
+            <a:r>
+              <a:rPr lang="en-IN" dirty="0">
+                <a:latin typeface="Barlow" panose="00000500000000000000" pitchFamily="2" charset="0"/>
+              </a:rPr>
+              <a:t> Neither optimizer dominates all metrics</a:t>
+            </a:r>
+          </a:p>
+          <a:p>
+            <a:pPr marL="342900" indent="-342900">
+              <a:buFont typeface="Wingdings" panose="05000000000000000000" pitchFamily="2" charset="2"/>
+              <a:buChar char="Ø"/>
+            </a:pPr>
+            <a:r>
+              <a:rPr lang="en-IN" dirty="0">
+                <a:latin typeface="Barlow" panose="00000500000000000000" pitchFamily="2" charset="0"/>
+              </a:rPr>
+              <a:t>🔧 </a:t>
+            </a:r>
+            <a:r>
+              <a:rPr lang="en-IN" b="1" dirty="0">
+                <a:latin typeface="Barlow" panose="00000500000000000000" pitchFamily="2" charset="0"/>
+              </a:rPr>
+              <a:t>Configuration Critical:</a:t>
+            </a:r>
+            <a:r>
+              <a:rPr lang="en-IN" dirty="0">
+                <a:latin typeface="Barlow" panose="00000500000000000000" pitchFamily="2" charset="0"/>
+              </a:rPr>
+              <a:t> Learning rate and scheduling significantly impact results</a:t>
+            </a:r>
+          </a:p>
+          <a:p>
+            <a:pPr marL="342900" indent="-342900">
+              <a:buFont typeface="Wingdings" panose="05000000000000000000" pitchFamily="2" charset="2"/>
+              <a:buChar char="Ø"/>
+            </a:pPr>
+            <a:r>
+              <a:rPr lang="en-IN" dirty="0">
+                <a:latin typeface="Barlow" panose="00000500000000000000" pitchFamily="2" charset="0"/>
+              </a:rPr>
+              <a:t>🚀 </a:t>
+            </a:r>
+            <a:r>
+              <a:rPr lang="en-IN" b="1" dirty="0">
+                <a:latin typeface="Barlow" panose="00000500000000000000" pitchFamily="2" charset="0"/>
+              </a:rPr>
+              <a:t>ModernBERT Excellence:</a:t>
+            </a:r>
+            <a:r>
+              <a:rPr lang="en-IN" dirty="0">
+                <a:latin typeface="Barlow" panose="00000500000000000000" pitchFamily="2" charset="0"/>
+              </a:rPr>
+              <a:t> Best overall performance with Lion optimizer</a:t>
+            </a:r>
+          </a:p>
+          <a:p>
+            <a:pPr marL="342900" indent="-342900">
+              <a:buFont typeface="Wingdings" panose="05000000000000000000" pitchFamily="2" charset="2"/>
+              <a:buChar char="Ø"/>
+            </a:pPr>
+            <a:r>
+              <a:rPr lang="en-IN" dirty="0">
+                <a:latin typeface="Barlow" panose="00000500000000000000" pitchFamily="2" charset="0"/>
+              </a:rPr>
+              <a:t>💰 </a:t>
+            </a:r>
+            <a:r>
+              <a:rPr lang="en-IN" b="1" dirty="0">
+                <a:latin typeface="Barlow" panose="00000500000000000000" pitchFamily="2" charset="0"/>
+              </a:rPr>
+              <a:t>Cost-Effectiveness:</a:t>
+            </a:r>
+            <a:r>
+              <a:rPr lang="en-IN" dirty="0">
+                <a:latin typeface="Barlow" panose="00000500000000000000" pitchFamily="2" charset="0"/>
+              </a:rPr>
+              <a:t> 5.50% average efficiency improvement across models</a:t>
+            </a:r>
+          </a:p>
+        </p:txBody>
+      </p:sp>
+      <p:sp>
+        <p:nvSpPr>
+          <p:cNvPr id="5" name="TextBox 4">
+            <a:extLst>
+              <a:ext uri="{FF2B5EF4-FFF2-40B4-BE49-F238E27FC236}">
+                <a16:creationId xmlns:a16="http://schemas.microsoft.com/office/drawing/2014/main" id="{F4A67FDF-559B-3DA4-1BAB-783B74FF50BF}"/>
+              </a:ext>
+            </a:extLst>
+          </p:cNvPr>
+          <p:cNvSpPr txBox="1"/>
+          <p:nvPr/>
+        </p:nvSpPr>
+        <p:spPr>
+          <a:xfrm>
+            <a:off x="1458410" y="486137"/>
+            <a:ext cx="7741222" cy="707886"/>
+          </a:xfrm>
+          <a:prstGeom prst="rect">
+            <a:avLst/>
+          </a:prstGeom>
+          <a:noFill/>
+        </p:spPr>
+        <p:txBody>
+          <a:bodyPr wrap="none" rtlCol="0">
+            <a:spAutoFit/>
+            <a:scene3d>
+              <a:camera prst="orthographicFront"/>
+              <a:lightRig rig="harsh" dir="t"/>
+            </a:scene3d>
+            <a:sp3d extrusionH="57150" prstMaterial="matte">
+              <a:bevelT w="63500" h="12700" prst="angle"/>
+              <a:contourClr>
+                <a:schemeClr val="bg1">
+                  <a:lumMod val="65000"/>
+                </a:schemeClr>
+              </a:contourClr>
+            </a:sp3d>
+          </a:bodyPr>
+          <a:lstStyle/>
+          <a:p>
+            <a:r>
+              <a:rPr lang="en-IN" sz="4000" b="1" dirty="0">
+                <a:ln/>
+                <a:solidFill>
+                  <a:schemeClr val="accent3"/>
+                </a:solidFill>
+                <a:latin typeface="Barlow ExtraBold" panose="00000900000000000000" pitchFamily="2" charset="0"/>
+              </a:rPr>
+              <a:t>Key Takeaways &amp; Decision Points</a:t>
+            </a:r>
+          </a:p>
+        </p:txBody>
+      </p:sp>
+      <p:sp>
+        <p:nvSpPr>
+          <p:cNvPr id="6" name="TextBox 5">
+            <a:extLst>
+              <a:ext uri="{FF2B5EF4-FFF2-40B4-BE49-F238E27FC236}">
+                <a16:creationId xmlns:a16="http://schemas.microsoft.com/office/drawing/2014/main" id="{CF350CD9-140C-3A36-38A9-6C5A2ADC1AFB}"/>
+              </a:ext>
+            </a:extLst>
+          </p:cNvPr>
+          <p:cNvSpPr txBox="1"/>
+          <p:nvPr/>
+        </p:nvSpPr>
+        <p:spPr>
+          <a:xfrm>
+            <a:off x="729205" y="1667283"/>
+            <a:ext cx="4607352" cy="523220"/>
+          </a:xfrm>
+          <a:prstGeom prst="rect">
+            <a:avLst/>
+          </a:prstGeom>
+          <a:noFill/>
+        </p:spPr>
+        <p:txBody>
+          <a:bodyPr wrap="none" rtlCol="0">
+            <a:spAutoFit/>
+          </a:bodyPr>
+          <a:lstStyle/>
+          <a:p>
+            <a:r>
+              <a:rPr lang="en-IN" sz="2800" b="1" dirty="0">
+                <a:latin typeface="Barlow SemiBold" panose="00000700000000000000" pitchFamily="2" charset="0"/>
+              </a:rPr>
+              <a:t>🎯 Major Findings Summary</a:t>
+            </a:r>
+          </a:p>
+        </p:txBody>
+      </p:sp>
+    </p:spTree>
+    <p:extLst>
+      <p:ext uri="{BB962C8B-B14F-4D97-AF65-F5344CB8AC3E}">
+        <p14:creationId xmlns:p14="http://schemas.microsoft.com/office/powerpoint/2010/main" val="2298798113"/>
+      </p:ext>
+    </p:extLst>
+  </p:cSld>
+  <p:clrMapOvr>
+    <a:masterClrMapping/>
+  </p:clrMapOvr>
+</p:sld>
+</file>
+
+<file path=ppt/slides/slide14.xml><?xml version="1.0" encoding="utf-8"?>
+<p:sld xmlns:a="http://schemas.openxmlformats.org/drawingml/2006/main" xmlns:r="http://schemas.openxmlformats.org/officeDocument/2006/relationships" xmlns:p="http://schemas.openxmlformats.org/presentationml/2006/main">
+  <p:cSld>
+    <p:spTree>
+      <p:nvGrpSpPr>
+        <p:cNvPr id="1" name=""/>
+        <p:cNvGrpSpPr/>
+        <p:nvPr/>
+      </p:nvGrpSpPr>
+      <p:grpSpPr>
+        <a:xfrm>
+          <a:off x="0" y="0"/>
+          <a:ext cx="0" cy="0"/>
+          <a:chOff x="0" y="0"/>
+          <a:chExt cx="0" cy="0"/>
+        </a:xfrm>
+      </p:grpSpPr>
+      <p:sp>
+        <p:nvSpPr>
+          <p:cNvPr id="3" name="Title 2">
+            <a:extLst>
+              <a:ext uri="{FF2B5EF4-FFF2-40B4-BE49-F238E27FC236}">
+                <a16:creationId xmlns:a16="http://schemas.microsoft.com/office/drawing/2014/main" id="{24323D41-0EF3-86F1-BFC3-9CFC3BE29E33}"/>
+              </a:ext>
+            </a:extLst>
+          </p:cNvPr>
+          <p:cNvSpPr>
+            <a:spLocks noGrp="1"/>
+          </p:cNvSpPr>
+          <p:nvPr>
+            <p:ph type="title"/>
+          </p:nvPr>
+        </p:nvSpPr>
+        <p:spPr>
+          <a:xfrm>
+            <a:off x="729291" y="868100"/>
+            <a:ext cx="6956299" cy="740781"/>
+          </a:xfrm>
+          <a:solidFill>
+            <a:schemeClr val="bg1"/>
+          </a:solidFill>
+        </p:spPr>
+        <p:txBody>
+          <a:bodyPr>
+            <a:normAutofit fontScale="90000"/>
+          </a:bodyPr>
+          <a:lstStyle/>
+          <a:p>
+            <a:pPr algn="ctr"/>
+            <a:r>
+              <a:rPr lang="en-IN" dirty="0"/>
+              <a:t>🧠 </a:t>
+            </a:r>
+            <a:r>
+              <a:rPr lang="en-GB" sz="3600" dirty="0">
+                <a:latin typeface="Barlow ExtraBold" panose="00000900000000000000" pitchFamily="2" charset="0"/>
+              </a:rPr>
+              <a:t>Decision Matrix for Practitioners</a:t>
+            </a:r>
+            <a:endParaRPr lang="en-IN" sz="2800" dirty="0">
+              <a:latin typeface="Barlow ExtraBold" panose="00000900000000000000" pitchFamily="2" charset="0"/>
+            </a:endParaRPr>
+          </a:p>
+        </p:txBody>
+      </p:sp>
+      <p:graphicFrame>
+        <p:nvGraphicFramePr>
+          <p:cNvPr id="5" name="Table 4">
+            <a:extLst>
+              <a:ext uri="{FF2B5EF4-FFF2-40B4-BE49-F238E27FC236}">
+                <a16:creationId xmlns:a16="http://schemas.microsoft.com/office/drawing/2014/main" id="{1A1439E2-33C2-97AA-9107-AAF352165232}"/>
+              </a:ext>
+            </a:extLst>
+          </p:cNvPr>
+          <p:cNvGraphicFramePr>
+            <a:graphicFrameLocks noGrp="1"/>
+          </p:cNvGraphicFramePr>
+          <p:nvPr>
+            <p:extLst>
+              <p:ext uri="{D42A27DB-BD31-4B8C-83A1-F6EECF244321}">
+                <p14:modId xmlns:p14="http://schemas.microsoft.com/office/powerpoint/2010/main" val="3598317748"/>
+              </p:ext>
+            </p:extLst>
+          </p:nvPr>
+        </p:nvGraphicFramePr>
+        <p:xfrm>
+          <a:off x="1030147" y="2501900"/>
+          <a:ext cx="9757458" cy="3285441"/>
+        </p:xfrm>
+        <a:graphic>
+          <a:graphicData uri="http://schemas.openxmlformats.org/drawingml/2006/table">
+            <a:tbl>
+              <a:tblPr firstRow="1" bandRow="1">
+                <a:tableStyleId>{69C7853C-536D-4A76-A0AE-DD22124D55A5}</a:tableStyleId>
+              </a:tblPr>
+              <a:tblGrid>
+                <a:gridCol w="2426520">
+                  <a:extLst>
+                    <a:ext uri="{9D8B030D-6E8A-4147-A177-3AD203B41FA5}">
+                      <a16:colId xmlns:a16="http://schemas.microsoft.com/office/drawing/2014/main" val="2494200330"/>
+                    </a:ext>
+                  </a:extLst>
+                </a:gridCol>
+                <a:gridCol w="2443646">
+                  <a:extLst>
+                    <a:ext uri="{9D8B030D-6E8A-4147-A177-3AD203B41FA5}">
+                      <a16:colId xmlns:a16="http://schemas.microsoft.com/office/drawing/2014/main" val="2981015715"/>
+                    </a:ext>
+                  </a:extLst>
+                </a:gridCol>
+                <a:gridCol w="2443646">
+                  <a:extLst>
+                    <a:ext uri="{9D8B030D-6E8A-4147-A177-3AD203B41FA5}">
+                      <a16:colId xmlns:a16="http://schemas.microsoft.com/office/drawing/2014/main" val="1473517929"/>
+                    </a:ext>
+                  </a:extLst>
+                </a:gridCol>
+                <a:gridCol w="2443646">
+                  <a:extLst>
+                    <a:ext uri="{9D8B030D-6E8A-4147-A177-3AD203B41FA5}">
+                      <a16:colId xmlns:a16="http://schemas.microsoft.com/office/drawing/2014/main" val="1918200521"/>
+                    </a:ext>
+                  </a:extLst>
+                </a:gridCol>
+              </a:tblGrid>
+              <a:tr h="604213">
+                <a:tc>
+                  <a:txBody>
+                    <a:bodyPr/>
+                    <a:lstStyle/>
+                    <a:p>
+                      <a:pPr algn="ctr"/>
+                      <a:r>
+                        <a:rPr lang="en-GB" sz="2000" dirty="0">
+                          <a:latin typeface="Barlow SemiBold" panose="00000700000000000000" pitchFamily="2" charset="0"/>
+                        </a:rPr>
+                        <a:t>Priority</a:t>
+                      </a:r>
+                      <a:endParaRPr lang="en-IN" sz="2000" dirty="0">
+                        <a:latin typeface="Barlow SemiBold" panose="00000700000000000000" pitchFamily="2" charset="0"/>
+                      </a:endParaRPr>
+                    </a:p>
+                  </a:txBody>
+                  <a:tcPr>
+                    <a:solidFill>
+                      <a:srgbClr val="00B0F0"/>
+                    </a:solidFill>
+                  </a:tcPr>
+                </a:tc>
+                <a:tc>
+                  <a:txBody>
+                    <a:bodyPr/>
+                    <a:lstStyle/>
+                    <a:p>
+                      <a:pPr algn="ctr"/>
+                      <a:r>
+                        <a:rPr lang="en-GB" sz="2000" dirty="0">
+                          <a:latin typeface="Barlow SemiBold" panose="00000700000000000000" pitchFamily="2" charset="0"/>
+                        </a:rPr>
+                        <a:t>Model Choice</a:t>
+                      </a:r>
+                      <a:endParaRPr lang="en-IN" sz="2000" dirty="0">
+                        <a:latin typeface="Barlow SemiBold" panose="00000700000000000000" pitchFamily="2" charset="0"/>
+                      </a:endParaRPr>
+                    </a:p>
+                  </a:txBody>
+                  <a:tcPr>
+                    <a:solidFill>
+                      <a:srgbClr val="00B0F0"/>
+                    </a:solidFill>
+                  </a:tcPr>
+                </a:tc>
+                <a:tc>
+                  <a:txBody>
+                    <a:bodyPr/>
+                    <a:lstStyle/>
+                    <a:p>
+                      <a:pPr algn="ctr"/>
+                      <a:r>
+                        <a:rPr lang="en-GB" sz="2000" dirty="0">
+                          <a:latin typeface="Barlow SemiBold" panose="00000700000000000000" pitchFamily="2" charset="0"/>
+                        </a:rPr>
+                        <a:t>Optimizer</a:t>
+                      </a:r>
+                      <a:endParaRPr lang="en-IN" sz="2000" dirty="0">
+                        <a:latin typeface="Barlow SemiBold" panose="00000700000000000000" pitchFamily="2" charset="0"/>
+                      </a:endParaRPr>
+                    </a:p>
+                  </a:txBody>
+                  <a:tcPr>
+                    <a:solidFill>
+                      <a:srgbClr val="00B0F0"/>
+                    </a:solidFill>
+                  </a:tcPr>
+                </a:tc>
+                <a:tc>
+                  <a:txBody>
+                    <a:bodyPr/>
+                    <a:lstStyle/>
+                    <a:p>
+                      <a:pPr algn="ctr"/>
+                      <a:r>
+                        <a:rPr lang="en-GB" sz="2000" dirty="0">
+                          <a:latin typeface="Barlow SemiBold" panose="00000700000000000000" pitchFamily="2" charset="0"/>
+                        </a:rPr>
+                        <a:t>Expected Outcome</a:t>
+                      </a:r>
+                      <a:endParaRPr lang="en-IN" sz="2000" dirty="0">
+                        <a:latin typeface="Barlow SemiBold" panose="00000700000000000000" pitchFamily="2" charset="0"/>
+                      </a:endParaRPr>
+                    </a:p>
+                  </a:txBody>
+                  <a:tcPr>
+                    <a:solidFill>
+                      <a:srgbClr val="00B0F0"/>
+                    </a:solidFill>
+                  </a:tcPr>
+                </a:tc>
+                <a:extLst>
+                  <a:ext uri="{0D108BD9-81ED-4DB2-BD59-A6C34878D82A}">
+                    <a16:rowId xmlns:a16="http://schemas.microsoft.com/office/drawing/2014/main" val="3919526205"/>
+                  </a:ext>
+                </a:extLst>
+              </a:tr>
+              <a:tr h="670307">
+                <a:tc>
+                  <a:txBody>
+                    <a:bodyPr/>
+                    <a:lstStyle/>
+                    <a:p>
+                      <a:pPr algn="ctr"/>
+                      <a:r>
+                        <a:rPr lang="en-IN" b="1" dirty="0">
+                          <a:solidFill>
+                            <a:srgbClr val="334155"/>
+                          </a:solidFill>
+                          <a:effectLst/>
+                          <a:latin typeface="Barlow" panose="00000500000000000000" pitchFamily="2" charset="0"/>
+                        </a:rPr>
+                        <a:t>Maximum Performance</a:t>
+                      </a:r>
+                      <a:endParaRPr lang="en-IN" dirty="0">
+                        <a:solidFill>
+                          <a:srgbClr val="334155"/>
+                        </a:solidFill>
+                        <a:effectLst/>
+                        <a:latin typeface="Barlow" panose="00000500000000000000" pitchFamily="2" charset="0"/>
+                      </a:endParaRPr>
+                    </a:p>
+                  </a:txBody>
+                  <a:tcPr anchor="ctr">
+                    <a:lnB w="3175" cap="flat" cmpd="sng" algn="ctr">
+                      <a:solidFill>
+                        <a:schemeClr val="tx1"/>
+                      </a:solidFill>
+                      <a:prstDash val="solid"/>
+                      <a:round/>
+                      <a:headEnd type="none" w="med" len="med"/>
+                      <a:tailEnd type="none" w="med" len="med"/>
+                    </a:lnB>
+                    <a:solidFill>
+                      <a:schemeClr val="bg1"/>
+                    </a:solidFill>
+                  </a:tcPr>
+                </a:tc>
+                <a:tc>
+                  <a:txBody>
+                    <a:bodyPr/>
+                    <a:lstStyle/>
+                    <a:p>
+                      <a:pPr algn="ctr"/>
+                      <a:r>
+                        <a:rPr lang="en-IN" dirty="0">
+                          <a:solidFill>
+                            <a:srgbClr val="334155"/>
+                          </a:solidFill>
+                          <a:effectLst/>
+                          <a:latin typeface="Barlow" panose="00000500000000000000" pitchFamily="2" charset="0"/>
+                        </a:rPr>
+                        <a:t>ModernBERT</a:t>
+                      </a:r>
+                    </a:p>
+                  </a:txBody>
+                  <a:tcPr anchor="ctr">
+                    <a:lnB w="3175" cap="flat" cmpd="sng" algn="ctr">
+                      <a:solidFill>
+                        <a:schemeClr val="tx1"/>
+                      </a:solidFill>
+                      <a:prstDash val="solid"/>
+                      <a:round/>
+                      <a:headEnd type="none" w="med" len="med"/>
+                      <a:tailEnd type="none" w="med" len="med"/>
+                    </a:lnB>
+                    <a:solidFill>
+                      <a:schemeClr val="bg1"/>
+                    </a:solidFill>
+                  </a:tcPr>
+                </a:tc>
+                <a:tc>
+                  <a:txBody>
+                    <a:bodyPr/>
+                    <a:lstStyle/>
+                    <a:p>
+                      <a:pPr algn="ctr"/>
+                      <a:r>
+                        <a:rPr lang="en-IN" dirty="0">
+                          <a:solidFill>
+                            <a:srgbClr val="334155"/>
+                          </a:solidFill>
+                          <a:effectLst/>
+                          <a:latin typeface="Barlow" panose="00000500000000000000" pitchFamily="2" charset="0"/>
+                        </a:rPr>
+                        <a:t>Lion</a:t>
+                      </a:r>
+                    </a:p>
+                  </a:txBody>
+                  <a:tcPr anchor="ctr">
+                    <a:lnB w="3175" cap="flat" cmpd="sng" algn="ctr">
+                      <a:solidFill>
+                        <a:schemeClr val="tx1"/>
+                      </a:solidFill>
+                      <a:prstDash val="solid"/>
+                      <a:round/>
+                      <a:headEnd type="none" w="med" len="med"/>
+                      <a:tailEnd type="none" w="med" len="med"/>
+                    </a:lnB>
+                    <a:solidFill>
+                      <a:schemeClr val="bg1"/>
+                    </a:solidFill>
+                  </a:tcPr>
+                </a:tc>
+                <a:tc>
+                  <a:txBody>
+                    <a:bodyPr/>
+                    <a:lstStyle/>
+                    <a:p>
+                      <a:pPr algn="ctr"/>
+                      <a:r>
+                        <a:rPr lang="en-IN" dirty="0">
+                          <a:solidFill>
+                            <a:srgbClr val="334155"/>
+                          </a:solidFill>
+                          <a:effectLst/>
+                          <a:latin typeface="Barlow" panose="00000500000000000000" pitchFamily="2" charset="0"/>
+                        </a:rPr>
+                        <a:t>Best metrics + efficiency</a:t>
+                      </a:r>
+                    </a:p>
+                  </a:txBody>
+                  <a:tcPr anchor="ctr">
+                    <a:lnB w="3175" cap="flat" cmpd="sng" algn="ctr">
+                      <a:solidFill>
+                        <a:schemeClr val="tx1"/>
+                      </a:solidFill>
+                      <a:prstDash val="solid"/>
+                      <a:round/>
+                      <a:headEnd type="none" w="med" len="med"/>
+                      <a:tailEnd type="none" w="med" len="med"/>
+                    </a:lnB>
+                    <a:solidFill>
+                      <a:schemeClr val="bg1"/>
+                    </a:solidFill>
+                  </a:tcPr>
+                </a:tc>
+                <a:extLst>
+                  <a:ext uri="{0D108BD9-81ED-4DB2-BD59-A6C34878D82A}">
+                    <a16:rowId xmlns:a16="http://schemas.microsoft.com/office/drawing/2014/main" val="1035999168"/>
+                  </a:ext>
+                </a:extLst>
+              </a:tr>
+              <a:tr h="670307">
+                <a:tc>
+                  <a:txBody>
+                    <a:bodyPr/>
+                    <a:lstStyle/>
+                    <a:p>
+                      <a:pPr algn="ctr"/>
+                      <a:r>
+                        <a:rPr lang="en-IN" b="1">
+                          <a:solidFill>
+                            <a:srgbClr val="334155"/>
+                          </a:solidFill>
+                          <a:effectLst/>
+                          <a:latin typeface="Barlow" panose="00000500000000000000" pitchFamily="2" charset="0"/>
+                        </a:rPr>
+                        <a:t>Cost Optimization</a:t>
+                      </a:r>
+                      <a:endParaRPr lang="en-IN">
+                        <a:solidFill>
+                          <a:srgbClr val="334155"/>
+                        </a:solidFill>
+                        <a:effectLst/>
+                        <a:latin typeface="Barlow" panose="00000500000000000000" pitchFamily="2" charset="0"/>
+                      </a:endParaRPr>
+                    </a:p>
+                  </a:txBody>
+                  <a:tcPr anchor="ctr">
+                    <a:lnT w="3175" cap="flat" cmpd="sng" algn="ctr">
+                      <a:solidFill>
+                        <a:schemeClr val="tx1"/>
+                      </a:solidFill>
+                      <a:prstDash val="solid"/>
+                      <a:round/>
+                      <a:headEnd type="none" w="med" len="med"/>
+                      <a:tailEnd type="none" w="med" len="med"/>
+                    </a:lnT>
+                    <a:lnB w="3175" cap="flat" cmpd="sng" algn="ctr">
+                      <a:solidFill>
+                        <a:schemeClr val="tx1"/>
+                      </a:solidFill>
+                      <a:prstDash val="solid"/>
+                      <a:round/>
+                      <a:headEnd type="none" w="med" len="med"/>
+                      <a:tailEnd type="none" w="med" len="med"/>
+                    </a:lnB>
+                    <a:solidFill>
+                      <a:schemeClr val="bg1"/>
+                    </a:solidFill>
+                  </a:tcPr>
+                </a:tc>
+                <a:tc>
+                  <a:txBody>
+                    <a:bodyPr/>
+                    <a:lstStyle/>
+                    <a:p>
+                      <a:pPr algn="ctr"/>
+                      <a:r>
+                        <a:rPr lang="en-IN">
+                          <a:solidFill>
+                            <a:srgbClr val="334155"/>
+                          </a:solidFill>
+                          <a:effectLst/>
+                          <a:latin typeface="Barlow" panose="00000500000000000000" pitchFamily="2" charset="0"/>
+                        </a:rPr>
+                        <a:t>GTE</a:t>
+                      </a:r>
+                    </a:p>
+                  </a:txBody>
+                  <a:tcPr anchor="ctr">
+                    <a:lnT w="3175" cap="flat" cmpd="sng" algn="ctr">
+                      <a:solidFill>
+                        <a:schemeClr val="tx1"/>
+                      </a:solidFill>
+                      <a:prstDash val="solid"/>
+                      <a:round/>
+                      <a:headEnd type="none" w="med" len="med"/>
+                      <a:tailEnd type="none" w="med" len="med"/>
+                    </a:lnT>
+                    <a:lnB w="3175" cap="flat" cmpd="sng" algn="ctr">
+                      <a:solidFill>
+                        <a:schemeClr val="tx1"/>
+                      </a:solidFill>
+                      <a:prstDash val="solid"/>
+                      <a:round/>
+                      <a:headEnd type="none" w="med" len="med"/>
+                      <a:tailEnd type="none" w="med" len="med"/>
+                    </a:lnB>
+                    <a:solidFill>
+                      <a:schemeClr val="bg1"/>
+                    </a:solidFill>
+                  </a:tcPr>
+                </a:tc>
+                <a:tc>
+                  <a:txBody>
+                    <a:bodyPr/>
+                    <a:lstStyle/>
+                    <a:p>
+                      <a:pPr algn="ctr"/>
+                      <a:r>
+                        <a:rPr lang="en-IN" dirty="0">
+                          <a:solidFill>
+                            <a:srgbClr val="334155"/>
+                          </a:solidFill>
+                          <a:effectLst/>
+                          <a:latin typeface="Barlow" panose="00000500000000000000" pitchFamily="2" charset="0"/>
+                        </a:rPr>
+                        <a:t>Lion</a:t>
+                      </a:r>
+                    </a:p>
+                  </a:txBody>
+                  <a:tcPr anchor="ctr">
+                    <a:lnT w="3175" cap="flat" cmpd="sng" algn="ctr">
+                      <a:solidFill>
+                        <a:schemeClr val="tx1"/>
+                      </a:solidFill>
+                      <a:prstDash val="solid"/>
+                      <a:round/>
+                      <a:headEnd type="none" w="med" len="med"/>
+                      <a:tailEnd type="none" w="med" len="med"/>
+                    </a:lnT>
+                    <a:lnB w="3175" cap="flat" cmpd="sng" algn="ctr">
+                      <a:solidFill>
+                        <a:schemeClr val="tx1"/>
+                      </a:solidFill>
+                      <a:prstDash val="solid"/>
+                      <a:round/>
+                      <a:headEnd type="none" w="med" len="med"/>
+                      <a:tailEnd type="none" w="med" len="med"/>
+                    </a:lnB>
+                    <a:solidFill>
+                      <a:schemeClr val="bg1"/>
+                    </a:solidFill>
+                  </a:tcPr>
+                </a:tc>
+                <a:tc>
+                  <a:txBody>
+                    <a:bodyPr/>
+                    <a:lstStyle/>
+                    <a:p>
+                      <a:pPr algn="ctr"/>
+                      <a:r>
+                        <a:rPr lang="en-IN">
+                          <a:solidFill>
+                            <a:srgbClr val="334155"/>
+                          </a:solidFill>
+                          <a:effectLst/>
+                          <a:latin typeface="Barlow" panose="00000500000000000000" pitchFamily="2" charset="0"/>
+                        </a:rPr>
+                        <a:t>10.33% resource savings</a:t>
+                      </a:r>
+                    </a:p>
+                  </a:txBody>
+                  <a:tcPr anchor="ctr">
+                    <a:lnT w="3175" cap="flat" cmpd="sng" algn="ctr">
+                      <a:solidFill>
+                        <a:schemeClr val="tx1"/>
+                      </a:solidFill>
+                      <a:prstDash val="solid"/>
+                      <a:round/>
+                      <a:headEnd type="none" w="med" len="med"/>
+                      <a:tailEnd type="none" w="med" len="med"/>
+                    </a:lnT>
+                    <a:lnB w="3175" cap="flat" cmpd="sng" algn="ctr">
+                      <a:solidFill>
+                        <a:schemeClr val="tx1"/>
+                      </a:solidFill>
+                      <a:prstDash val="solid"/>
+                      <a:round/>
+                      <a:headEnd type="none" w="med" len="med"/>
+                      <a:tailEnd type="none" w="med" len="med"/>
+                    </a:lnB>
+                    <a:solidFill>
+                      <a:schemeClr val="bg1"/>
+                    </a:solidFill>
+                  </a:tcPr>
+                </a:tc>
+                <a:extLst>
+                  <a:ext uri="{0D108BD9-81ED-4DB2-BD59-A6C34878D82A}">
+                    <a16:rowId xmlns:a16="http://schemas.microsoft.com/office/drawing/2014/main" val="1537149833"/>
+                  </a:ext>
+                </a:extLst>
+              </a:tr>
+              <a:tr h="670307">
+                <a:tc>
+                  <a:txBody>
+                    <a:bodyPr/>
+                    <a:lstStyle/>
+                    <a:p>
+                      <a:pPr algn="ctr"/>
+                      <a:r>
+                        <a:rPr lang="en-IN" b="1">
+                          <a:solidFill>
+                            <a:srgbClr val="334155"/>
+                          </a:solidFill>
+                          <a:effectLst/>
+                          <a:latin typeface="Barlow" panose="00000500000000000000" pitchFamily="2" charset="0"/>
+                        </a:rPr>
+                        <a:t>Balanced Approach</a:t>
+                      </a:r>
+                      <a:endParaRPr lang="en-IN">
+                        <a:solidFill>
+                          <a:srgbClr val="334155"/>
+                        </a:solidFill>
+                        <a:effectLst/>
+                        <a:latin typeface="Barlow" panose="00000500000000000000" pitchFamily="2" charset="0"/>
+                      </a:endParaRPr>
+                    </a:p>
+                  </a:txBody>
+                  <a:tcPr anchor="ctr">
+                    <a:lnT w="3175" cap="flat" cmpd="sng" algn="ctr">
+                      <a:solidFill>
+                        <a:schemeClr val="tx1"/>
+                      </a:solidFill>
+                      <a:prstDash val="solid"/>
+                      <a:round/>
+                      <a:headEnd type="none" w="med" len="med"/>
+                      <a:tailEnd type="none" w="med" len="med"/>
+                    </a:lnT>
+                    <a:lnB w="3175" cap="flat" cmpd="sng" algn="ctr">
+                      <a:solidFill>
+                        <a:schemeClr val="tx1"/>
+                      </a:solidFill>
+                      <a:prstDash val="solid"/>
+                      <a:round/>
+                      <a:headEnd type="none" w="med" len="med"/>
+                      <a:tailEnd type="none" w="med" len="med"/>
+                    </a:lnB>
+                    <a:solidFill>
+                      <a:schemeClr val="bg1"/>
+                    </a:solidFill>
+                  </a:tcPr>
+                </a:tc>
+                <a:tc>
+                  <a:txBody>
+                    <a:bodyPr/>
+                    <a:lstStyle/>
+                    <a:p>
+                      <a:pPr algn="ctr"/>
+                      <a:r>
+                        <a:rPr lang="en-IN">
+                          <a:solidFill>
+                            <a:srgbClr val="334155"/>
+                          </a:solidFill>
+                          <a:effectLst/>
+                          <a:latin typeface="Barlow" panose="00000500000000000000" pitchFamily="2" charset="0"/>
+                        </a:rPr>
+                        <a:t>MiniLM</a:t>
+                      </a:r>
+                    </a:p>
+                  </a:txBody>
+                  <a:tcPr anchor="ctr">
+                    <a:lnT w="3175" cap="flat" cmpd="sng" algn="ctr">
+                      <a:solidFill>
+                        <a:schemeClr val="tx1"/>
+                      </a:solidFill>
+                      <a:prstDash val="solid"/>
+                      <a:round/>
+                      <a:headEnd type="none" w="med" len="med"/>
+                      <a:tailEnd type="none" w="med" len="med"/>
+                    </a:lnT>
+                    <a:lnB w="3175" cap="flat" cmpd="sng" algn="ctr">
+                      <a:solidFill>
+                        <a:schemeClr val="tx1"/>
+                      </a:solidFill>
+                      <a:prstDash val="solid"/>
+                      <a:round/>
+                      <a:headEnd type="none" w="med" len="med"/>
+                      <a:tailEnd type="none" w="med" len="med"/>
+                    </a:lnB>
+                    <a:solidFill>
+                      <a:schemeClr val="bg1"/>
+                    </a:solidFill>
+                  </a:tcPr>
+                </a:tc>
+                <a:tc>
+                  <a:txBody>
+                    <a:bodyPr/>
+                    <a:lstStyle/>
+                    <a:p>
+                      <a:pPr algn="ctr"/>
+                      <a:r>
+                        <a:rPr lang="en-IN" dirty="0">
+                          <a:solidFill>
+                            <a:srgbClr val="334155"/>
+                          </a:solidFill>
+                          <a:effectLst/>
+                          <a:latin typeface="Barlow" panose="00000500000000000000" pitchFamily="2" charset="0"/>
+                        </a:rPr>
+                        <a:t>Lion</a:t>
+                      </a:r>
+                    </a:p>
+                  </a:txBody>
+                  <a:tcPr anchor="ctr">
+                    <a:lnT w="3175" cap="flat" cmpd="sng" algn="ctr">
+                      <a:solidFill>
+                        <a:schemeClr val="tx1"/>
+                      </a:solidFill>
+                      <a:prstDash val="solid"/>
+                      <a:round/>
+                      <a:headEnd type="none" w="med" len="med"/>
+                      <a:tailEnd type="none" w="med" len="med"/>
+                    </a:lnT>
+                    <a:lnB w="3175" cap="flat" cmpd="sng" algn="ctr">
+                      <a:solidFill>
+                        <a:schemeClr val="tx1"/>
+                      </a:solidFill>
+                      <a:prstDash val="solid"/>
+                      <a:round/>
+                      <a:headEnd type="none" w="med" len="med"/>
+                      <a:tailEnd type="none" w="med" len="med"/>
+                    </a:lnB>
+                    <a:solidFill>
+                      <a:schemeClr val="bg1"/>
+                    </a:solidFill>
+                  </a:tcPr>
+                </a:tc>
+                <a:tc>
+                  <a:txBody>
+                    <a:bodyPr/>
+                    <a:lstStyle/>
+                    <a:p>
+                      <a:pPr algn="ctr"/>
+                      <a:r>
+                        <a:rPr lang="en-IN" dirty="0">
+                          <a:solidFill>
+                            <a:srgbClr val="334155"/>
+                          </a:solidFill>
+                          <a:effectLst/>
+                          <a:latin typeface="Barlow" panose="00000500000000000000" pitchFamily="2" charset="0"/>
+                        </a:rPr>
+                        <a:t>Good performance + efficiency</a:t>
+                      </a:r>
+                    </a:p>
+                  </a:txBody>
+                  <a:tcPr anchor="ctr">
+                    <a:lnT w="3175" cap="flat" cmpd="sng" algn="ctr">
+                      <a:solidFill>
+                        <a:schemeClr val="tx1"/>
+                      </a:solidFill>
+                      <a:prstDash val="solid"/>
+                      <a:round/>
+                      <a:headEnd type="none" w="med" len="med"/>
+                      <a:tailEnd type="none" w="med" len="med"/>
+                    </a:lnT>
+                    <a:lnB w="3175" cap="flat" cmpd="sng" algn="ctr">
+                      <a:solidFill>
+                        <a:schemeClr val="tx1"/>
+                      </a:solidFill>
+                      <a:prstDash val="solid"/>
+                      <a:round/>
+                      <a:headEnd type="none" w="med" len="med"/>
+                      <a:tailEnd type="none" w="med" len="med"/>
+                    </a:lnB>
+                    <a:solidFill>
+                      <a:schemeClr val="bg1"/>
+                    </a:solidFill>
+                  </a:tcPr>
+                </a:tc>
+                <a:extLst>
+                  <a:ext uri="{0D108BD9-81ED-4DB2-BD59-A6C34878D82A}">
+                    <a16:rowId xmlns:a16="http://schemas.microsoft.com/office/drawing/2014/main" val="2805157648"/>
+                  </a:ext>
+                </a:extLst>
+              </a:tr>
+              <a:tr h="670307">
+                <a:tc>
+                  <a:txBody>
+                    <a:bodyPr/>
+                    <a:lstStyle/>
+                    <a:p>
+                      <a:pPr algn="ctr"/>
+                      <a:r>
+                        <a:rPr lang="en-IN" b="1">
+                          <a:solidFill>
+                            <a:srgbClr val="334155"/>
+                          </a:solidFill>
+                          <a:effectLst/>
+                          <a:latin typeface="Barlow" panose="00000500000000000000" pitchFamily="2" charset="0"/>
+                        </a:rPr>
+                        <a:t>Risk Minimization</a:t>
+                      </a:r>
+                      <a:endParaRPr lang="en-IN">
+                        <a:solidFill>
+                          <a:srgbClr val="334155"/>
+                        </a:solidFill>
+                        <a:effectLst/>
+                        <a:latin typeface="Barlow" panose="00000500000000000000" pitchFamily="2" charset="0"/>
+                      </a:endParaRPr>
+                    </a:p>
+                  </a:txBody>
+                  <a:tcPr anchor="ctr">
+                    <a:lnT w="3175" cap="flat" cmpd="sng" algn="ctr">
+                      <a:solidFill>
+                        <a:schemeClr val="tx1"/>
+                      </a:solidFill>
+                      <a:prstDash val="solid"/>
+                      <a:round/>
+                      <a:headEnd type="none" w="med" len="med"/>
+                      <a:tailEnd type="none" w="med" len="med"/>
+                    </a:lnT>
+                    <a:solidFill>
+                      <a:schemeClr val="bg1"/>
+                    </a:solidFill>
+                  </a:tcPr>
+                </a:tc>
+                <a:tc>
+                  <a:txBody>
+                    <a:bodyPr/>
+                    <a:lstStyle/>
+                    <a:p>
+                      <a:pPr algn="ctr"/>
+                      <a:r>
+                        <a:rPr lang="en-IN">
+                          <a:solidFill>
+                            <a:srgbClr val="334155"/>
+                          </a:solidFill>
+                          <a:effectLst/>
+                          <a:latin typeface="Barlow" panose="00000500000000000000" pitchFamily="2" charset="0"/>
+                        </a:rPr>
+                        <a:t>Any</a:t>
+                      </a:r>
+                    </a:p>
+                  </a:txBody>
+                  <a:tcPr anchor="ctr">
+                    <a:lnT w="3175" cap="flat" cmpd="sng" algn="ctr">
+                      <a:solidFill>
+                        <a:schemeClr val="tx1"/>
+                      </a:solidFill>
+                      <a:prstDash val="solid"/>
+                      <a:round/>
+                      <a:headEnd type="none" w="med" len="med"/>
+                      <a:tailEnd type="none" w="med" len="med"/>
+                    </a:lnT>
+                    <a:solidFill>
+                      <a:schemeClr val="bg1"/>
+                    </a:solidFill>
+                  </a:tcPr>
+                </a:tc>
+                <a:tc>
+                  <a:txBody>
+                    <a:bodyPr/>
+                    <a:lstStyle/>
+                    <a:p>
+                      <a:pPr algn="ctr"/>
+                      <a:r>
+                        <a:rPr lang="en-IN" dirty="0">
+                          <a:solidFill>
+                            <a:srgbClr val="334155"/>
+                          </a:solidFill>
+                          <a:effectLst/>
+                          <a:latin typeface="Barlow" panose="00000500000000000000" pitchFamily="2" charset="0"/>
+                        </a:rPr>
+                        <a:t>AdamW</a:t>
+                      </a:r>
+                    </a:p>
+                  </a:txBody>
+                  <a:tcPr anchor="ctr">
+                    <a:lnT w="3175" cap="flat" cmpd="sng" algn="ctr">
+                      <a:solidFill>
+                        <a:schemeClr val="tx1"/>
+                      </a:solidFill>
+                      <a:prstDash val="solid"/>
+                      <a:round/>
+                      <a:headEnd type="none" w="med" len="med"/>
+                      <a:tailEnd type="none" w="med" len="med"/>
+                    </a:lnT>
+                    <a:solidFill>
+                      <a:schemeClr val="bg1"/>
+                    </a:solidFill>
+                  </a:tcPr>
+                </a:tc>
+                <a:tc>
+                  <a:txBody>
+                    <a:bodyPr/>
+                    <a:lstStyle/>
+                    <a:p>
+                      <a:pPr algn="ctr"/>
+                      <a:r>
+                        <a:rPr lang="en-IN" dirty="0">
+                          <a:solidFill>
+                            <a:srgbClr val="334155"/>
+                          </a:solidFill>
+                          <a:effectLst/>
+                          <a:latin typeface="Barlow" panose="00000500000000000000" pitchFamily="2" charset="0"/>
+                        </a:rPr>
+                        <a:t>Established, reliable results</a:t>
+                      </a:r>
+                    </a:p>
+                  </a:txBody>
+                  <a:tcPr anchor="ctr">
+                    <a:lnT w="3175" cap="flat" cmpd="sng" algn="ctr">
+                      <a:solidFill>
+                        <a:schemeClr val="tx1"/>
+                      </a:solidFill>
+                      <a:prstDash val="solid"/>
+                      <a:round/>
+                      <a:headEnd type="none" w="med" len="med"/>
+                      <a:tailEnd type="none" w="med" len="med"/>
+                    </a:lnT>
+                    <a:solidFill>
+                      <a:schemeClr val="bg1"/>
+                    </a:solidFill>
+                  </a:tcPr>
+                </a:tc>
+                <a:extLst>
+                  <a:ext uri="{0D108BD9-81ED-4DB2-BD59-A6C34878D82A}">
+                    <a16:rowId xmlns:a16="http://schemas.microsoft.com/office/drawing/2014/main" val="3463148647"/>
+                  </a:ext>
+                </a:extLst>
+              </a:tr>
+            </a:tbl>
+          </a:graphicData>
+        </a:graphic>
+      </p:graphicFrame>
+    </p:spTree>
+    <p:extLst>
+      <p:ext uri="{BB962C8B-B14F-4D97-AF65-F5344CB8AC3E}">
+        <p14:creationId xmlns:p14="http://schemas.microsoft.com/office/powerpoint/2010/main" val="364237852"/>
+      </p:ext>
+    </p:extLst>
+  </p:cSld>
+  <p:clrMapOvr>
+    <a:masterClrMapping/>
+  </p:clrMapOvr>
+</p:sld>
+</file>
+
+<file path=ppt/slides/slide15.xml><?xml version="1.0" encoding="utf-8"?>
+<p:sld xmlns:a="http://schemas.openxmlformats.org/drawingml/2006/main" xmlns:r="http://schemas.openxmlformats.org/officeDocument/2006/relationships" xmlns:p="http://schemas.openxmlformats.org/presentationml/2006/main">
+  <p:cSld>
+    <p:spTree>
+      <p:nvGrpSpPr>
+        <p:cNvPr id="1" name=""/>
+        <p:cNvGrpSpPr/>
+        <p:nvPr/>
+      </p:nvGrpSpPr>
+      <p:grpSpPr>
+        <a:xfrm>
+          <a:off x="0" y="0"/>
+          <a:ext cx="0" cy="0"/>
+          <a:chOff x="0" y="0"/>
+          <a:chExt cx="0" cy="0"/>
+        </a:xfrm>
+      </p:grpSpPr>
+      <p:sp>
+        <p:nvSpPr>
+          <p:cNvPr id="4" name="Title 3">
+            <a:extLst>
+              <a:ext uri="{FF2B5EF4-FFF2-40B4-BE49-F238E27FC236}">
+                <a16:creationId xmlns:a16="http://schemas.microsoft.com/office/drawing/2014/main" id="{E98DCA46-603B-4178-8707-30E192CE6B8D}"/>
+              </a:ext>
+            </a:extLst>
+          </p:cNvPr>
+          <p:cNvSpPr>
+            <a:spLocks noGrp="1"/>
+          </p:cNvSpPr>
+          <p:nvPr>
+            <p:ph type="title"/>
+          </p:nvPr>
+        </p:nvSpPr>
+        <p:spPr/>
+        <p:txBody>
+          <a:bodyPr/>
+          <a:lstStyle/>
+          <a:p>
+            <a:r>
+              <a:rPr lang="en-US" dirty="0">
+                <a:latin typeface="Barlow SemiBold" panose="00000700000000000000" pitchFamily="2" charset="0"/>
+              </a:rPr>
+              <a:t>Future Research Directions</a:t>
+            </a:r>
+          </a:p>
+        </p:txBody>
+      </p:sp>
+      <p:sp>
+        <p:nvSpPr>
+          <p:cNvPr id="2" name="TextBox 1">
+            <a:extLst>
+              <a:ext uri="{FF2B5EF4-FFF2-40B4-BE49-F238E27FC236}">
+                <a16:creationId xmlns:a16="http://schemas.microsoft.com/office/drawing/2014/main" id="{2D373BEE-251F-D5D0-6012-B26689AC8792}"/>
+              </a:ext>
+            </a:extLst>
+          </p:cNvPr>
+          <p:cNvSpPr txBox="1"/>
+          <p:nvPr/>
+        </p:nvSpPr>
+        <p:spPr>
+          <a:xfrm>
+            <a:off x="810000" y="2656935"/>
+            <a:ext cx="7351693" cy="3539430"/>
+          </a:xfrm>
+          <a:prstGeom prst="rect">
+            <a:avLst/>
+          </a:prstGeom>
+          <a:noFill/>
+        </p:spPr>
+        <p:txBody>
+          <a:bodyPr wrap="none" rtlCol="0">
+            <a:spAutoFit/>
+          </a:bodyPr>
+          <a:lstStyle/>
+          <a:p>
+            <a:r>
+              <a:rPr lang="en-GB" sz="3600" dirty="0">
+                <a:latin typeface="Barlow SemiBold" panose="00000700000000000000" pitchFamily="2" charset="0"/>
+              </a:rPr>
+              <a:t>Immediate Extensions</a:t>
+            </a:r>
+          </a:p>
+          <a:p>
+            <a:pPr marL="800100" lvl="1" indent="-342900">
+              <a:lnSpc>
+                <a:spcPct val="150000"/>
+              </a:lnSpc>
+              <a:buFont typeface="Arial" panose="020B0604020202020204" pitchFamily="34" charset="0"/>
+              <a:buChar char="•"/>
+            </a:pPr>
+            <a:r>
+              <a:rPr lang="en-GB" sz="2800" dirty="0">
+                <a:latin typeface="Barlow" panose="00000500000000000000" pitchFamily="2" charset="0"/>
+              </a:rPr>
+              <a:t>	Comprehensive hyperparameter studies</a:t>
+            </a:r>
+          </a:p>
+          <a:p>
+            <a:pPr marL="800100" lvl="1" indent="-342900">
+              <a:lnSpc>
+                <a:spcPct val="150000"/>
+              </a:lnSpc>
+              <a:buFont typeface="Arial" panose="020B0604020202020204" pitchFamily="34" charset="0"/>
+              <a:buChar char="•"/>
+            </a:pPr>
+            <a:r>
+              <a:rPr lang="en-GB" sz="2800" dirty="0">
+                <a:latin typeface="Barlow" panose="00000500000000000000" pitchFamily="2" charset="0"/>
+              </a:rPr>
+              <a:t>	Extended training analysis</a:t>
+            </a:r>
+          </a:p>
+          <a:p>
+            <a:pPr marL="800100" lvl="1" indent="-342900">
+              <a:lnSpc>
+                <a:spcPct val="150000"/>
+              </a:lnSpc>
+              <a:buFont typeface="Arial" panose="020B0604020202020204" pitchFamily="34" charset="0"/>
+              <a:buChar char="•"/>
+            </a:pPr>
+            <a:r>
+              <a:rPr lang="en-GB" sz="2800" dirty="0">
+                <a:latin typeface="Barlow" panose="00000500000000000000" pitchFamily="2" charset="0"/>
+              </a:rPr>
+              <a:t>	Alternative schedulers investigation</a:t>
+            </a:r>
+          </a:p>
+          <a:p>
+            <a:pPr marL="800100" lvl="1" indent="-342900">
+              <a:lnSpc>
+                <a:spcPct val="150000"/>
+              </a:lnSpc>
+              <a:buFont typeface="Arial" panose="020B0604020202020204" pitchFamily="34" charset="0"/>
+              <a:buChar char="•"/>
+            </a:pPr>
+            <a:r>
+              <a:rPr lang="en-GB" sz="2800" dirty="0">
+                <a:latin typeface="Barlow" panose="00000500000000000000" pitchFamily="2" charset="0"/>
+              </a:rPr>
+              <a:t>	Cross-lingual evaluation</a:t>
+            </a:r>
+          </a:p>
+          <a:p>
+            <a:endParaRPr lang="en-IN" sz="2000" dirty="0"/>
+          </a:p>
+        </p:txBody>
+      </p:sp>
+      <p:pic>
+        <p:nvPicPr>
+          <p:cNvPr id="9" name="Picture 8">
+            <a:extLst>
+              <a:ext uri="{FF2B5EF4-FFF2-40B4-BE49-F238E27FC236}">
+                <a16:creationId xmlns:a16="http://schemas.microsoft.com/office/drawing/2014/main" id="{65C88D0E-27A8-0075-CFF1-32B6BDE7A425}"/>
+              </a:ext>
+            </a:extLst>
+          </p:cNvPr>
+          <p:cNvPicPr>
+            <a:picLocks noChangeAspect="1"/>
+          </p:cNvPicPr>
+          <p:nvPr/>
+        </p:nvPicPr>
+        <p:blipFill>
+          <a:blip r:embed="rId2"/>
+          <a:stretch>
+            <a:fillRect/>
+          </a:stretch>
+        </p:blipFill>
+        <p:spPr>
+          <a:xfrm>
+            <a:off x="8161692" y="1908858"/>
+            <a:ext cx="4030307" cy="4949142"/>
+          </a:xfrm>
+          <a:prstGeom prst="rect">
+            <a:avLst/>
+          </a:prstGeom>
+        </p:spPr>
+      </p:pic>
+    </p:spTree>
+    <p:extLst>
+      <p:ext uri="{BB962C8B-B14F-4D97-AF65-F5344CB8AC3E}">
+        <p14:creationId xmlns:p14="http://schemas.microsoft.com/office/powerpoint/2010/main" val="2394598200"/>
+      </p:ext>
+    </p:extLst>
+  </p:cSld>
+  <p:clrMapOvr>
+    <a:masterClrMapping/>
+  </p:clrMapOvr>
+</p:sld>
+</file>
+
+<file path=ppt/slides/slide16.xml><?xml version="1.0" encoding="utf-8"?>
+<p:sld xmlns:a="http://schemas.openxmlformats.org/drawingml/2006/main" xmlns:r="http://schemas.openxmlformats.org/officeDocument/2006/relationships" xmlns:p="http://schemas.openxmlformats.org/presentationml/2006/main">
+  <p:cSld>
+    <p:spTree>
+      <p:nvGrpSpPr>
+        <p:cNvPr id="1" name=""/>
+        <p:cNvGrpSpPr/>
+        <p:nvPr/>
+      </p:nvGrpSpPr>
+      <p:grpSpPr>
+        <a:xfrm>
+          <a:off x="0" y="0"/>
+          <a:ext cx="0" cy="0"/>
+          <a:chOff x="0" y="0"/>
+          <a:chExt cx="0" cy="0"/>
+        </a:xfrm>
+      </p:grpSpPr>
+      <p:sp>
+        <p:nvSpPr>
           <p:cNvPr id="3" name="TextBox 2">
             <a:extLst>
               <a:ext uri="{FF2B5EF4-FFF2-40B4-BE49-F238E27FC236}">
@@ -9110,7 +16274,7 @@
 </p:sld>
 </file>
 
-<file path=ppt/slides/slide11.xml><?xml version="1.0" encoding="utf-8"?>
+<file path=ppt/slides/slide17.xml><?xml version="1.0" encoding="utf-8"?>
 <p:sld xmlns:a="http://schemas.openxmlformats.org/drawingml/2006/main" xmlns:r="http://schemas.openxmlformats.org/officeDocument/2006/relationships" xmlns:p="http://schemas.openxmlformats.org/presentationml/2006/main">
   <p:cSld>
     <p:spTree>
@@ -9270,105 +16434,6 @@
 </p:sld>
 </file>
 
-<file path=ppt/slides/slide12.xml><?xml version="1.0" encoding="utf-8"?>
-<p:sld xmlns:a="http://schemas.openxmlformats.org/drawingml/2006/main" xmlns:r="http://schemas.openxmlformats.org/officeDocument/2006/relationships" xmlns:p="http://schemas.openxmlformats.org/presentationml/2006/main">
-  <p:cSld>
-    <p:spTree>
-      <p:nvGrpSpPr>
-        <p:cNvPr id="1" name=""/>
-        <p:cNvGrpSpPr/>
-        <p:nvPr/>
-      </p:nvGrpSpPr>
-      <p:grpSpPr>
-        <a:xfrm>
-          <a:off x="0" y="0"/>
-          <a:ext cx="0" cy="0"/>
-          <a:chOff x="0" y="0"/>
-          <a:chExt cx="0" cy="0"/>
-        </a:xfrm>
-      </p:grpSpPr>
-      <p:sp>
-        <p:nvSpPr>
-          <p:cNvPr id="4" name="Title 3">
-            <a:extLst>
-              <a:ext uri="{FF2B5EF4-FFF2-40B4-BE49-F238E27FC236}">
-                <a16:creationId xmlns:a16="http://schemas.microsoft.com/office/drawing/2014/main" id="{E98DCA46-603B-4178-8707-30E192CE6B8D}"/>
-              </a:ext>
-            </a:extLst>
-          </p:cNvPr>
-          <p:cNvSpPr>
-            <a:spLocks noGrp="1"/>
-          </p:cNvSpPr>
-          <p:nvPr>
-            <p:ph type="title"/>
-          </p:nvPr>
-        </p:nvSpPr>
-        <p:spPr/>
-        <p:txBody>
-          <a:bodyPr/>
-          <a:lstStyle/>
-          <a:p>
-            <a:r>
-              <a:rPr lang="en-US" dirty="0"/>
-              <a:t>Customize this Template</a:t>
-            </a:r>
-          </a:p>
-        </p:txBody>
-      </p:sp>
-      <p:sp>
-        <p:nvSpPr>
-          <p:cNvPr id="8" name="TextBox 7">
-            <a:hlinkClick r:id="rId2"/>
-            <a:extLst>
-              <a:ext uri="{FF2B5EF4-FFF2-40B4-BE49-F238E27FC236}">
-                <a16:creationId xmlns:a16="http://schemas.microsoft.com/office/drawing/2014/main" id="{5FC6C278-4035-446A-A94B-030E792FDDF5}"/>
-              </a:ext>
-            </a:extLst>
-          </p:cNvPr>
-          <p:cNvSpPr txBox="1"/>
-          <p:nvPr/>
-        </p:nvSpPr>
-        <p:spPr>
-          <a:xfrm>
-            <a:off x="1547813" y="2459504"/>
-            <a:ext cx="9096374" cy="1938992"/>
-          </a:xfrm>
-          <a:prstGeom prst="rect">
-            <a:avLst/>
-          </a:prstGeom>
-          <a:noFill/>
-        </p:spPr>
-        <p:txBody>
-          <a:bodyPr wrap="square" rtlCol="0">
-            <a:noAutofit/>
-          </a:bodyPr>
-          <a:lstStyle/>
-          <a:p>
-            <a:pPr algn="ctr"/>
-            <a:r>
-              <a:rPr lang="en-US" sz="6000" u="sng" dirty="0">
-                <a:solidFill>
-                  <a:srgbClr val="0070C0"/>
-                </a:solidFill>
-              </a:rPr>
-              <a:t>Template Editing Instructions and Feedback</a:t>
-            </a:r>
-          </a:p>
-        </p:txBody>
-      </p:sp>
-    </p:spTree>
-    <p:extLst>
-      <p:ext uri="{BB962C8B-B14F-4D97-AF65-F5344CB8AC3E}">
-        <p14:creationId xmlns:p14="http://schemas.microsoft.com/office/powerpoint/2010/main" val="2394598200"/>
-      </p:ext>
-    </p:extLst>
-  </p:cSld>
-  <p:clrMapOvr>
-    <a:masterClrMapping/>
-  </p:clrMapOvr>
-</p:sld>
-</file>
-
 <file path=ppt/slides/slide2.xml><?xml version="1.0" encoding="utf-8"?>
 <p:sld xmlns:a="http://schemas.openxmlformats.org/drawingml/2006/main" xmlns:r="http://schemas.openxmlformats.org/officeDocument/2006/relationships" xmlns:p="http://schemas.openxmlformats.org/presentationml/2006/main">
   <p:cSld>
@@ -9432,8 +16497,8 @@
         </p:nvSpPr>
         <p:spPr>
           <a:xfrm>
-            <a:off x="810000" y="2131332"/>
-            <a:ext cx="11208204" cy="2595336"/>
+            <a:off x="810000" y="2253374"/>
+            <a:ext cx="10571998" cy="2880506"/>
           </a:xfrm>
         </p:spPr>
         <p:txBody>
@@ -9648,7 +16713,7 @@
           </a:bodyPr>
           <a:lstStyle/>
           <a:p>
-            <a:pPr marL="342900" indent="-342900">
+            <a:pPr marL="342900" indent="-342900" algn="just">
               <a:lnSpc>
                 <a:spcPct val="150000"/>
               </a:lnSpc>
@@ -9665,7 +16730,7 @@
             </a:r>
           </a:p>
           <a:p>
-            <a:pPr marL="342900" indent="-342900">
+            <a:pPr marL="342900" indent="-342900" algn="just">
               <a:lnSpc>
                 <a:spcPct val="150000"/>
               </a:lnSpc>
@@ -9682,7 +16747,7 @@
             </a:r>
           </a:p>
           <a:p>
-            <a:pPr marL="342900" indent="-342900">
+            <a:pPr marL="342900" indent="-342900" algn="just">
               <a:lnSpc>
                 <a:spcPct val="150000"/>
               </a:lnSpc>
@@ -9699,7 +16764,7 @@
             </a:r>
           </a:p>
           <a:p>
-            <a:pPr marL="342900" indent="-342900">
+            <a:pPr marL="342900" indent="-342900" algn="just">
               <a:lnSpc>
                 <a:spcPct val="150000"/>
               </a:lnSpc>
@@ -10987,7 +18052,7 @@
         </p:nvSpPr>
         <p:spPr>
           <a:xfrm>
-            <a:off x="3296873" y="5763237"/>
+            <a:off x="3537861" y="5763237"/>
             <a:ext cx="4704948" cy="707886"/>
           </a:xfrm>
           <a:prstGeom prst="rect">
@@ -11225,7 +18290,7 @@
         <p:spPr>
           <a:xfrm>
             <a:off x="809999" y="3291364"/>
-            <a:ext cx="4366007" cy="2211814"/>
+            <a:ext cx="4599964" cy="2211814"/>
           </a:xfrm>
           <a:prstGeom prst="rect">
             <a:avLst/>
@@ -11317,7 +18382,7 @@
               <a:rPr lang="en-GB" dirty="0">
                 <a:latin typeface="Barlow SemiBold" panose="00000700000000000000" pitchFamily="2" charset="0"/>
               </a:rPr>
-              <a:t>AdamW vs. Lion : Key Difference</a:t>
+              <a:t>Evaluation Metrices</a:t>
             </a:r>
             <a:endParaRPr lang="en-IN" dirty="0">
               <a:latin typeface="Barlow SemiBold" panose="00000700000000000000" pitchFamily="2" charset="0"/>
@@ -11325,875 +18390,110 @@
           </a:p>
         </p:txBody>
       </p:sp>
-      <p:graphicFrame>
-        <p:nvGraphicFramePr>
-          <p:cNvPr id="4" name="Table 3">
+      <p:sp>
+        <p:nvSpPr>
+          <p:cNvPr id="6" name="TextBox 5">
             <a:extLst>
               <a:ext uri="{FF2B5EF4-FFF2-40B4-BE49-F238E27FC236}">
-                <a16:creationId xmlns:a16="http://schemas.microsoft.com/office/drawing/2014/main" id="{9BC2424E-52F9-B085-3991-5B1AC6A5C119}"/>
+                <a16:creationId xmlns:a16="http://schemas.microsoft.com/office/drawing/2014/main" id="{F72B3316-1ADE-DDFF-23B4-6BC8F225AD2A}"/>
               </a:ext>
             </a:extLst>
           </p:cNvPr>
-          <p:cNvGraphicFramePr>
-            <a:graphicFrameLocks noGrp="1"/>
-          </p:cNvGraphicFramePr>
-          <p:nvPr>
-            <p:extLst>
-              <p:ext uri="{D42A27DB-BD31-4B8C-83A1-F6EECF244321}">
-                <p14:modId xmlns:p14="http://schemas.microsoft.com/office/powerpoint/2010/main" val="3792682621"/>
-              </p:ext>
-            </p:extLst>
-          </p:nvPr>
-        </p:nvGraphicFramePr>
-        <p:xfrm>
-          <a:off x="1125989" y="2622616"/>
-          <a:ext cx="8907243" cy="3666720"/>
-        </p:xfrm>
-        <a:graphic>
-          <a:graphicData uri="http://schemas.openxmlformats.org/drawingml/2006/table">
-            <a:tbl>
-              <a:tblPr firstRow="1" bandRow="1">
-                <a:tableStyleId>{69C7853C-536D-4A76-A0AE-DD22124D55A5}</a:tableStyleId>
-              </a:tblPr>
-              <a:tblGrid>
-                <a:gridCol w="2969081">
-                  <a:extLst>
-                    <a:ext uri="{9D8B030D-6E8A-4147-A177-3AD203B41FA5}">
-                      <a16:colId xmlns:a16="http://schemas.microsoft.com/office/drawing/2014/main" val="1060200112"/>
-                    </a:ext>
-                  </a:extLst>
-                </a:gridCol>
-                <a:gridCol w="2969081">
-                  <a:extLst>
-                    <a:ext uri="{9D8B030D-6E8A-4147-A177-3AD203B41FA5}">
-                      <a16:colId xmlns:a16="http://schemas.microsoft.com/office/drawing/2014/main" val="926785508"/>
-                    </a:ext>
-                  </a:extLst>
-                </a:gridCol>
-                <a:gridCol w="2969081">
-                  <a:extLst>
-                    <a:ext uri="{9D8B030D-6E8A-4147-A177-3AD203B41FA5}">
-                      <a16:colId xmlns:a16="http://schemas.microsoft.com/office/drawing/2014/main" val="685443098"/>
-                    </a:ext>
-                  </a:extLst>
-                </a:gridCol>
-              </a:tblGrid>
-              <a:tr h="582160">
-                <a:tc>
-                  <a:txBody>
-                    <a:bodyPr/>
-                    <a:lstStyle/>
-                    <a:p>
-                      <a:pPr algn="l"/>
-                      <a:r>
-                        <a:rPr lang="en-GB" sz="2400" b="1" dirty="0">
-                          <a:solidFill>
-                            <a:schemeClr val="bg1"/>
-                          </a:solidFill>
-                          <a:latin typeface="Barlow SemiBold" panose="00000700000000000000" pitchFamily="2" charset="0"/>
-                        </a:rPr>
-                        <a:t>Aspect</a:t>
-                      </a:r>
-                      <a:endParaRPr lang="en-IN" sz="2400" b="1" dirty="0">
-                        <a:solidFill>
-                          <a:schemeClr val="bg1"/>
-                        </a:solidFill>
-                        <a:latin typeface="Barlow SemiBold" panose="00000700000000000000" pitchFamily="2" charset="0"/>
-                      </a:endParaRPr>
-                    </a:p>
-                  </a:txBody>
-                  <a:tcPr>
-                    <a:lnB w="15875" cap="rnd" cmpd="sng" algn="ctr">
-                      <a:noFill/>
-                      <a:prstDash val="solid"/>
-                    </a:lnB>
-                  </a:tcPr>
-                </a:tc>
-                <a:tc>
-                  <a:txBody>
-                    <a:bodyPr/>
-                    <a:lstStyle/>
-                    <a:p>
-                      <a:pPr algn="l"/>
-                      <a:r>
-                        <a:rPr lang="en-GB" sz="2400" dirty="0">
-                          <a:latin typeface="Barlow SemiBold" panose="00000700000000000000" pitchFamily="2" charset="0"/>
-                        </a:rPr>
-                        <a:t>AdamW</a:t>
-                      </a:r>
-                      <a:endParaRPr lang="en-IN" sz="2400" dirty="0">
-                        <a:latin typeface="Barlow SemiBold" panose="00000700000000000000" pitchFamily="2" charset="0"/>
-                      </a:endParaRPr>
-                    </a:p>
-                  </a:txBody>
-                  <a:tcPr>
-                    <a:lnB w="15875" cap="rnd" cmpd="sng" algn="ctr">
-                      <a:noFill/>
-                      <a:prstDash val="solid"/>
-                    </a:lnB>
-                  </a:tcPr>
-                </a:tc>
-                <a:tc>
-                  <a:txBody>
-                    <a:bodyPr/>
-                    <a:lstStyle/>
-                    <a:p>
-                      <a:pPr algn="l"/>
-                      <a:r>
-                        <a:rPr lang="en-GB" sz="2400" dirty="0">
-                          <a:latin typeface="Barlow SemiBold" panose="00000700000000000000" pitchFamily="2" charset="0"/>
-                        </a:rPr>
-                        <a:t>Lion</a:t>
-                      </a:r>
-                    </a:p>
-                  </a:txBody>
-                  <a:tcPr>
-                    <a:lnB w="15875" cap="rnd" cmpd="sng" algn="ctr">
-                      <a:noFill/>
-                      <a:prstDash val="solid"/>
-                    </a:lnB>
-                  </a:tcPr>
-                </a:tc>
-                <a:extLst>
-                  <a:ext uri="{0D108BD9-81ED-4DB2-BD59-A6C34878D82A}">
-                    <a16:rowId xmlns:a16="http://schemas.microsoft.com/office/drawing/2014/main" val="1563949812"/>
-                  </a:ext>
-                </a:extLst>
-              </a:tr>
-              <a:tr h="582160">
-                <a:tc>
-                  <a:txBody>
-                    <a:bodyPr/>
-                    <a:lstStyle/>
-                    <a:p>
-                      <a:pPr algn="l"/>
-                      <a:r>
-                        <a:rPr lang="en-IN" b="1" dirty="0">
-                          <a:effectLst/>
-                          <a:latin typeface="Barlow Medium" panose="00000600000000000000" pitchFamily="2" charset="0"/>
-                        </a:rPr>
-                        <a:t>Update Rule</a:t>
-                      </a:r>
-                      <a:endParaRPr lang="en-IN" dirty="0">
-                        <a:effectLst/>
-                        <a:latin typeface="Barlow Medium" panose="00000600000000000000" pitchFamily="2" charset="0"/>
-                      </a:endParaRPr>
-                    </a:p>
-                  </a:txBody>
-                  <a:tcPr anchor="ctr">
-                    <a:lnL w="9525" cap="rnd" cmpd="sng" algn="ctr">
-                      <a:noFill/>
-                      <a:prstDash val="solid"/>
-                    </a:lnL>
-                    <a:lnR w="9525" cap="rnd" cmpd="sng" algn="ctr">
-                      <a:noFill/>
-                      <a:prstDash val="solid"/>
-                    </a:lnR>
-                    <a:lnT w="15875" cap="rnd" cmpd="sng" algn="ctr">
-                      <a:noFill/>
-                      <a:prstDash val="solid"/>
-                    </a:lnT>
-                    <a:lnB w="9525" cap="rnd" cmpd="sng" algn="ctr">
-                      <a:noFill/>
-                      <a:prstDash val="solid"/>
-                    </a:lnB>
-                    <a:lnTlToBr w="12700" cmpd="sng">
-                      <a:noFill/>
-                      <a:prstDash val="solid"/>
-                    </a:lnTlToBr>
-                    <a:lnBlToTr w="12700" cmpd="sng">
-                      <a:noFill/>
-                      <a:prstDash val="solid"/>
-                    </a:lnBlToTr>
-                    <a:solidFill>
-                      <a:schemeClr val="bg2"/>
-                    </a:solidFill>
-                  </a:tcPr>
-                </a:tc>
-                <a:tc>
-                  <a:txBody>
-                    <a:bodyPr/>
-                    <a:lstStyle/>
-                    <a:p>
-                      <a:pPr algn="l"/>
-                      <a:r>
-                        <a:rPr lang="en-GB" dirty="0">
-                          <a:effectLst/>
-                          <a:latin typeface="Barlow Medium" panose="00000600000000000000" pitchFamily="2" charset="0"/>
-                        </a:rPr>
-                        <a:t>Adaptive learning rates with momentum</a:t>
-                      </a:r>
-                    </a:p>
-                  </a:txBody>
-                  <a:tcPr anchor="ctr">
-                    <a:lnL w="9525" cap="rnd" cmpd="sng" algn="ctr">
-                      <a:noFill/>
-                      <a:prstDash val="solid"/>
-                    </a:lnL>
-                    <a:lnR w="9525" cap="rnd" cmpd="sng" algn="ctr">
-                      <a:noFill/>
-                      <a:prstDash val="solid"/>
-                    </a:lnR>
-                    <a:lnT w="15875" cap="rnd" cmpd="sng" algn="ctr">
-                      <a:noFill/>
-                      <a:prstDash val="solid"/>
-                    </a:lnT>
-                    <a:lnB w="9525" cap="rnd" cmpd="sng" algn="ctr">
-                      <a:noFill/>
-                      <a:prstDash val="solid"/>
-                    </a:lnB>
-                    <a:lnTlToBr w="12700" cmpd="sng">
-                      <a:noFill/>
-                      <a:prstDash val="solid"/>
-                    </a:lnTlToBr>
-                    <a:lnBlToTr w="12700" cmpd="sng">
-                      <a:noFill/>
-                      <a:prstDash val="solid"/>
-                    </a:lnBlToTr>
-                    <a:solidFill>
-                      <a:schemeClr val="bg2"/>
-                    </a:solidFill>
-                  </a:tcPr>
-                </a:tc>
-                <a:tc>
-                  <a:txBody>
-                    <a:bodyPr/>
-                    <a:lstStyle/>
-                    <a:p>
-                      <a:pPr algn="l"/>
-                      <a:r>
-                        <a:rPr lang="en-IN" dirty="0">
-                          <a:effectLst/>
-                          <a:latin typeface="Barlow Medium" panose="00000600000000000000" pitchFamily="2" charset="0"/>
-                        </a:rPr>
-                        <a:t>Sign-based momentum</a:t>
-                      </a:r>
-                    </a:p>
-                  </a:txBody>
-                  <a:tcPr anchor="ctr">
-                    <a:lnL w="9525" cap="rnd" cmpd="sng" algn="ctr">
-                      <a:noFill/>
-                      <a:prstDash val="solid"/>
-                    </a:lnL>
-                    <a:lnR w="9525" cap="rnd" cmpd="sng" algn="ctr">
-                      <a:noFill/>
-                      <a:prstDash val="solid"/>
-                    </a:lnR>
-                    <a:lnT w="15875" cap="rnd" cmpd="sng" algn="ctr">
-                      <a:noFill/>
-                      <a:prstDash val="solid"/>
-                    </a:lnT>
-                    <a:lnB w="9525" cap="rnd" cmpd="sng" algn="ctr">
-                      <a:noFill/>
-                      <a:prstDash val="solid"/>
-                    </a:lnB>
-                    <a:lnTlToBr w="12700" cmpd="sng">
-                      <a:noFill/>
-                      <a:prstDash val="solid"/>
-                    </a:lnTlToBr>
-                    <a:lnBlToTr w="12700" cmpd="sng">
-                      <a:noFill/>
-                      <a:prstDash val="solid"/>
-                    </a:lnBlToTr>
-                    <a:solidFill>
-                      <a:schemeClr val="bg2"/>
-                    </a:solidFill>
-                  </a:tcPr>
-                </a:tc>
-                <a:extLst>
-                  <a:ext uri="{0D108BD9-81ED-4DB2-BD59-A6C34878D82A}">
-                    <a16:rowId xmlns:a16="http://schemas.microsoft.com/office/drawing/2014/main" val="1295004568"/>
-                  </a:ext>
-                </a:extLst>
-              </a:tr>
-              <a:tr h="582160">
-                <a:tc>
-                  <a:txBody>
-                    <a:bodyPr/>
-                    <a:lstStyle/>
-                    <a:p>
-                      <a:pPr algn="l"/>
-                      <a:r>
-                        <a:rPr lang="en-IN" b="1" dirty="0">
-                          <a:effectLst/>
-                          <a:latin typeface="Barlow Medium" panose="00000600000000000000" pitchFamily="2" charset="0"/>
-                        </a:rPr>
-                        <a:t>Memory Usage</a:t>
-                      </a:r>
-                      <a:endParaRPr lang="en-IN" dirty="0">
-                        <a:effectLst/>
-                        <a:latin typeface="Barlow Medium" panose="00000600000000000000" pitchFamily="2" charset="0"/>
-                      </a:endParaRPr>
-                    </a:p>
-                  </a:txBody>
-                  <a:tcPr anchor="ctr">
-                    <a:lnL w="9525" cap="rnd" cmpd="sng" algn="ctr">
-                      <a:noFill/>
-                      <a:prstDash val="solid"/>
-                    </a:lnL>
-                    <a:lnR w="9525" cap="rnd" cmpd="sng" algn="ctr">
-                      <a:noFill/>
-                      <a:prstDash val="solid"/>
-                    </a:lnR>
-                    <a:lnT w="9525" cap="rnd" cmpd="sng" algn="ctr">
-                      <a:noFill/>
-                      <a:prstDash val="solid"/>
-                    </a:lnT>
-                    <a:lnB w="9525" cap="rnd" cmpd="sng" algn="ctr">
-                      <a:noFill/>
-                      <a:prstDash val="solid"/>
-                    </a:lnB>
-                    <a:lnTlToBr w="12700" cmpd="sng">
-                      <a:noFill/>
-                      <a:prstDash val="solid"/>
-                    </a:lnTlToBr>
-                    <a:lnBlToTr w="12700" cmpd="sng">
-                      <a:noFill/>
-                      <a:prstDash val="solid"/>
-                    </a:lnBlToTr>
-                    <a:solidFill>
-                      <a:schemeClr val="bg2"/>
-                    </a:solidFill>
-                  </a:tcPr>
-                </a:tc>
-                <a:tc>
-                  <a:txBody>
-                    <a:bodyPr/>
-                    <a:lstStyle/>
-                    <a:p>
-                      <a:pPr algn="l"/>
-                      <a:r>
-                        <a:rPr lang="en-IN">
-                          <a:effectLst/>
-                          <a:latin typeface="Barlow Medium" panose="00000600000000000000" pitchFamily="2" charset="0"/>
-                        </a:rPr>
-                        <a:t>Higher (stores gradients + variance)</a:t>
-                      </a:r>
-                    </a:p>
-                  </a:txBody>
-                  <a:tcPr anchor="ctr">
-                    <a:lnL w="9525" cap="rnd" cmpd="sng" algn="ctr">
-                      <a:noFill/>
-                      <a:prstDash val="solid"/>
-                    </a:lnL>
-                    <a:lnR w="9525" cap="rnd" cmpd="sng" algn="ctr">
-                      <a:noFill/>
-                      <a:prstDash val="solid"/>
-                    </a:lnR>
-                    <a:lnT w="9525" cap="rnd" cmpd="sng" algn="ctr">
-                      <a:noFill/>
-                      <a:prstDash val="solid"/>
-                    </a:lnT>
-                    <a:lnB w="9525" cap="rnd" cmpd="sng" algn="ctr">
-                      <a:noFill/>
-                      <a:prstDash val="solid"/>
-                    </a:lnB>
-                    <a:lnTlToBr w="12700" cmpd="sng">
-                      <a:noFill/>
-                      <a:prstDash val="solid"/>
-                    </a:lnTlToBr>
-                    <a:lnBlToTr w="12700" cmpd="sng">
-                      <a:noFill/>
-                      <a:prstDash val="solid"/>
-                    </a:lnBlToTr>
-                    <a:solidFill>
-                      <a:schemeClr val="bg2"/>
-                    </a:solidFill>
-                  </a:tcPr>
-                </a:tc>
-                <a:tc>
-                  <a:txBody>
-                    <a:bodyPr/>
-                    <a:lstStyle/>
-                    <a:p>
-                      <a:pPr algn="l"/>
-                      <a:r>
-                        <a:rPr lang="en-IN">
-                          <a:effectLst/>
-                          <a:latin typeface="Barlow Medium" panose="00000600000000000000" pitchFamily="2" charset="0"/>
-                        </a:rPr>
-                        <a:t>Lower (momentum only)</a:t>
-                      </a:r>
-                    </a:p>
-                  </a:txBody>
-                  <a:tcPr anchor="ctr">
-                    <a:lnL w="9525" cap="rnd" cmpd="sng" algn="ctr">
-                      <a:noFill/>
-                      <a:prstDash val="solid"/>
-                    </a:lnL>
-                    <a:lnR w="9525" cap="rnd" cmpd="sng" algn="ctr">
-                      <a:noFill/>
-                      <a:prstDash val="solid"/>
-                    </a:lnR>
-                    <a:lnT w="9525" cap="rnd" cmpd="sng" algn="ctr">
-                      <a:noFill/>
-                      <a:prstDash val="solid"/>
-                    </a:lnT>
-                    <a:lnB w="9525" cap="rnd" cmpd="sng" algn="ctr">
-                      <a:noFill/>
-                      <a:prstDash val="solid"/>
-                    </a:lnB>
-                    <a:lnTlToBr w="12700" cmpd="sng">
-                      <a:noFill/>
-                      <a:prstDash val="solid"/>
-                    </a:lnTlToBr>
-                    <a:lnBlToTr w="12700" cmpd="sng">
-                      <a:noFill/>
-                      <a:prstDash val="solid"/>
-                    </a:lnBlToTr>
-                    <a:solidFill>
-                      <a:schemeClr val="bg2"/>
-                    </a:solidFill>
-                  </a:tcPr>
-                </a:tc>
-                <a:extLst>
-                  <a:ext uri="{0D108BD9-81ED-4DB2-BD59-A6C34878D82A}">
-                    <a16:rowId xmlns:a16="http://schemas.microsoft.com/office/drawing/2014/main" val="3063590911"/>
-                  </a:ext>
-                </a:extLst>
-              </a:tr>
-              <a:tr h="582160">
-                <a:tc>
-                  <a:txBody>
-                    <a:bodyPr/>
-                    <a:lstStyle/>
-                    <a:p>
-                      <a:pPr algn="l"/>
-                      <a:r>
-                        <a:rPr lang="en-IN" b="1">
-                          <a:effectLst/>
-                          <a:latin typeface="Barlow Medium" panose="00000600000000000000" pitchFamily="2" charset="0"/>
-                        </a:rPr>
-                        <a:t>Computation</a:t>
-                      </a:r>
-                      <a:endParaRPr lang="en-IN">
-                        <a:effectLst/>
-                        <a:latin typeface="Barlow Medium" panose="00000600000000000000" pitchFamily="2" charset="0"/>
-                      </a:endParaRPr>
-                    </a:p>
-                  </a:txBody>
-                  <a:tcPr anchor="ctr">
-                    <a:lnL w="9525" cap="rnd" cmpd="sng" algn="ctr">
-                      <a:noFill/>
-                      <a:prstDash val="solid"/>
-                    </a:lnL>
-                    <a:lnR w="9525" cap="rnd" cmpd="sng" algn="ctr">
-                      <a:noFill/>
-                      <a:prstDash val="solid"/>
-                    </a:lnR>
-                    <a:lnT w="9525" cap="rnd" cmpd="sng" algn="ctr">
-                      <a:noFill/>
-                      <a:prstDash val="solid"/>
-                    </a:lnT>
-                    <a:lnB w="9525" cap="rnd" cmpd="sng" algn="ctr">
-                      <a:noFill/>
-                      <a:prstDash val="solid"/>
-                    </a:lnB>
-                    <a:lnTlToBr w="12700" cmpd="sng">
-                      <a:noFill/>
-                      <a:prstDash val="solid"/>
-                    </a:lnTlToBr>
-                    <a:lnBlToTr w="12700" cmpd="sng">
-                      <a:noFill/>
-                      <a:prstDash val="solid"/>
-                    </a:lnBlToTr>
-                    <a:solidFill>
-                      <a:schemeClr val="bg2"/>
-                    </a:solidFill>
-                  </a:tcPr>
-                </a:tc>
-                <a:tc>
-                  <a:txBody>
-                    <a:bodyPr/>
-                    <a:lstStyle/>
-                    <a:p>
-                      <a:pPr algn="l"/>
-                      <a:r>
-                        <a:rPr lang="en-IN">
-                          <a:effectLst/>
-                          <a:latin typeface="Barlow Medium" panose="00000600000000000000" pitchFamily="2" charset="0"/>
-                        </a:rPr>
-                        <a:t>Complex adaptive scaling</a:t>
-                      </a:r>
-                    </a:p>
-                  </a:txBody>
-                  <a:tcPr anchor="ctr">
-                    <a:lnL w="9525" cap="rnd" cmpd="sng" algn="ctr">
-                      <a:noFill/>
-                      <a:prstDash val="solid"/>
-                    </a:lnL>
-                    <a:lnR w="9525" cap="rnd" cmpd="sng" algn="ctr">
-                      <a:noFill/>
-                      <a:prstDash val="solid"/>
-                    </a:lnR>
-                    <a:lnT w="9525" cap="rnd" cmpd="sng" algn="ctr">
-                      <a:noFill/>
-                      <a:prstDash val="solid"/>
-                    </a:lnT>
-                    <a:lnB w="9525" cap="rnd" cmpd="sng" algn="ctr">
-                      <a:noFill/>
-                      <a:prstDash val="solid"/>
-                    </a:lnB>
-                    <a:lnTlToBr w="12700" cmpd="sng">
-                      <a:noFill/>
-                      <a:prstDash val="solid"/>
-                    </a:lnTlToBr>
-                    <a:lnBlToTr w="12700" cmpd="sng">
-                      <a:noFill/>
-                      <a:prstDash val="solid"/>
-                    </a:lnBlToTr>
-                    <a:solidFill>
-                      <a:schemeClr val="bg2"/>
-                    </a:solidFill>
-                  </a:tcPr>
-                </a:tc>
-                <a:tc>
-                  <a:txBody>
-                    <a:bodyPr/>
-                    <a:lstStyle/>
-                    <a:p>
-                      <a:pPr algn="l"/>
-                      <a:r>
-                        <a:rPr lang="en-IN">
-                          <a:effectLst/>
-                          <a:latin typeface="Barlow Medium" panose="00000600000000000000" pitchFamily="2" charset="0"/>
-                        </a:rPr>
-                        <a:t>Simple sign operation</a:t>
-                      </a:r>
-                    </a:p>
-                  </a:txBody>
-                  <a:tcPr anchor="ctr">
-                    <a:lnL w="9525" cap="rnd" cmpd="sng" algn="ctr">
-                      <a:noFill/>
-                      <a:prstDash val="solid"/>
-                    </a:lnL>
-                    <a:lnR w="9525" cap="rnd" cmpd="sng" algn="ctr">
-                      <a:noFill/>
-                      <a:prstDash val="solid"/>
-                    </a:lnR>
-                    <a:lnT w="9525" cap="rnd" cmpd="sng" algn="ctr">
-                      <a:noFill/>
-                      <a:prstDash val="solid"/>
-                    </a:lnT>
-                    <a:lnB w="9525" cap="rnd" cmpd="sng" algn="ctr">
-                      <a:noFill/>
-                      <a:prstDash val="solid"/>
-                    </a:lnB>
-                    <a:lnTlToBr w="12700" cmpd="sng">
-                      <a:noFill/>
-                      <a:prstDash val="solid"/>
-                    </a:lnTlToBr>
-                    <a:lnBlToTr w="12700" cmpd="sng">
-                      <a:noFill/>
-                      <a:prstDash val="solid"/>
-                    </a:lnBlToTr>
-                    <a:solidFill>
-                      <a:schemeClr val="bg2"/>
-                    </a:solidFill>
-                  </a:tcPr>
-                </a:tc>
-                <a:extLst>
-                  <a:ext uri="{0D108BD9-81ED-4DB2-BD59-A6C34878D82A}">
-                    <a16:rowId xmlns:a16="http://schemas.microsoft.com/office/drawing/2014/main" val="3870938022"/>
-                  </a:ext>
-                </a:extLst>
-              </a:tr>
-              <a:tr h="582160">
-                <a:tc>
-                  <a:txBody>
-                    <a:bodyPr/>
-                    <a:lstStyle/>
-                    <a:p>
-                      <a:pPr algn="l"/>
-                      <a:r>
-                        <a:rPr lang="en-IN" b="1">
-                          <a:effectLst/>
-                          <a:latin typeface="Barlow Medium" panose="00000600000000000000" pitchFamily="2" charset="0"/>
-                        </a:rPr>
-                        <a:t>Tuning</a:t>
-                      </a:r>
-                      <a:endParaRPr lang="en-IN">
-                        <a:effectLst/>
-                        <a:latin typeface="Barlow Medium" panose="00000600000000000000" pitchFamily="2" charset="0"/>
-                      </a:endParaRPr>
-                    </a:p>
-                  </a:txBody>
-                  <a:tcPr anchor="ctr">
-                    <a:lnL w="9525" cap="rnd" cmpd="sng" algn="ctr">
-                      <a:noFill/>
-                      <a:prstDash val="solid"/>
-                    </a:lnL>
-                    <a:lnR w="9525" cap="rnd" cmpd="sng" algn="ctr">
-                      <a:noFill/>
-                      <a:prstDash val="solid"/>
-                    </a:lnR>
-                    <a:lnT w="9525" cap="rnd" cmpd="sng" algn="ctr">
-                      <a:noFill/>
-                      <a:prstDash val="solid"/>
-                    </a:lnT>
-                    <a:lnB w="9525" cap="rnd" cmpd="sng" algn="ctr">
-                      <a:noFill/>
-                      <a:prstDash val="solid"/>
-                    </a:lnB>
-                    <a:lnTlToBr w="12700" cmpd="sng">
-                      <a:noFill/>
-                      <a:prstDash val="solid"/>
-                    </a:lnTlToBr>
-                    <a:lnBlToTr w="12700" cmpd="sng">
-                      <a:noFill/>
-                      <a:prstDash val="solid"/>
-                    </a:lnBlToTr>
-                    <a:solidFill>
-                      <a:schemeClr val="bg2"/>
-                    </a:solidFill>
-                  </a:tcPr>
-                </a:tc>
-                <a:tc>
-                  <a:txBody>
-                    <a:bodyPr/>
-                    <a:lstStyle/>
-                    <a:p>
-                      <a:pPr algn="l"/>
-                      <a:r>
-                        <a:rPr lang="en-IN">
-                          <a:effectLst/>
-                          <a:latin typeface="Barlow Medium" panose="00000600000000000000" pitchFamily="2" charset="0"/>
-                        </a:rPr>
-                        <a:t>Well-established hyperparameters</a:t>
-                      </a:r>
-                    </a:p>
-                  </a:txBody>
-                  <a:tcPr anchor="ctr">
-                    <a:lnL w="9525" cap="rnd" cmpd="sng" algn="ctr">
-                      <a:noFill/>
-                      <a:prstDash val="solid"/>
-                    </a:lnL>
-                    <a:lnR w="9525" cap="rnd" cmpd="sng" algn="ctr">
-                      <a:noFill/>
-                      <a:prstDash val="solid"/>
-                    </a:lnR>
-                    <a:lnT w="9525" cap="rnd" cmpd="sng" algn="ctr">
-                      <a:noFill/>
-                      <a:prstDash val="solid"/>
-                    </a:lnT>
-                    <a:lnB w="9525" cap="rnd" cmpd="sng" algn="ctr">
-                      <a:noFill/>
-                      <a:prstDash val="solid"/>
-                    </a:lnB>
-                    <a:lnTlToBr w="12700" cmpd="sng">
-                      <a:noFill/>
-                      <a:prstDash val="solid"/>
-                    </a:lnTlToBr>
-                    <a:lnBlToTr w="12700" cmpd="sng">
-                      <a:noFill/>
-                      <a:prstDash val="solid"/>
-                    </a:lnBlToTr>
-                    <a:solidFill>
-                      <a:schemeClr val="bg2"/>
-                    </a:solidFill>
-                  </a:tcPr>
-                </a:tc>
-                <a:tc>
-                  <a:txBody>
-                    <a:bodyPr/>
-                    <a:lstStyle/>
-                    <a:p>
-                      <a:pPr algn="l"/>
-                      <a:r>
-                        <a:rPr lang="en-IN">
-                          <a:effectLst/>
-                          <a:latin typeface="Barlow Medium" panose="00000600000000000000" pitchFamily="2" charset="0"/>
-                        </a:rPr>
-                        <a:t>Requires careful tuning</a:t>
-                      </a:r>
-                    </a:p>
-                  </a:txBody>
-                  <a:tcPr anchor="ctr">
-                    <a:lnL w="9525" cap="rnd" cmpd="sng" algn="ctr">
-                      <a:noFill/>
-                      <a:prstDash val="solid"/>
-                    </a:lnL>
-                    <a:lnR w="9525" cap="rnd" cmpd="sng" algn="ctr">
-                      <a:noFill/>
-                      <a:prstDash val="solid"/>
-                    </a:lnR>
-                    <a:lnT w="9525" cap="rnd" cmpd="sng" algn="ctr">
-                      <a:noFill/>
-                      <a:prstDash val="solid"/>
-                    </a:lnT>
-                    <a:lnB w="9525" cap="rnd" cmpd="sng" algn="ctr">
-                      <a:noFill/>
-                      <a:prstDash val="solid"/>
-                    </a:lnB>
-                    <a:lnTlToBr w="12700" cmpd="sng">
-                      <a:noFill/>
-                      <a:prstDash val="solid"/>
-                    </a:lnTlToBr>
-                    <a:lnBlToTr w="12700" cmpd="sng">
-                      <a:noFill/>
-                      <a:prstDash val="solid"/>
-                    </a:lnBlToTr>
-                    <a:solidFill>
-                      <a:schemeClr val="bg2"/>
-                    </a:solidFill>
-                  </a:tcPr>
-                </a:tc>
-                <a:extLst>
-                  <a:ext uri="{0D108BD9-81ED-4DB2-BD59-A6C34878D82A}">
-                    <a16:rowId xmlns:a16="http://schemas.microsoft.com/office/drawing/2014/main" val="2193721353"/>
-                  </a:ext>
-                </a:extLst>
-              </a:tr>
-              <a:tr h="582160">
-                <a:tc>
-                  <a:txBody>
-                    <a:bodyPr/>
-                    <a:lstStyle/>
-                    <a:p>
-                      <a:pPr algn="l"/>
-                      <a:r>
-                        <a:rPr lang="en-IN" b="1" dirty="0">
-                          <a:effectLst/>
-                          <a:latin typeface="Barlow Medium" panose="00000600000000000000" pitchFamily="2" charset="0"/>
-                        </a:rPr>
-                        <a:t>Novelty</a:t>
-                      </a:r>
-                      <a:endParaRPr lang="en-IN" dirty="0">
-                        <a:effectLst/>
-                        <a:latin typeface="Barlow Medium" panose="00000600000000000000" pitchFamily="2" charset="0"/>
-                      </a:endParaRPr>
-                    </a:p>
-                  </a:txBody>
-                  <a:tcPr anchor="ctr">
-                    <a:lnL w="9525" cap="rnd" cmpd="sng" algn="ctr">
-                      <a:noFill/>
-                      <a:prstDash val="solid"/>
-                    </a:lnL>
-                    <a:lnR w="9525" cap="rnd" cmpd="sng" algn="ctr">
-                      <a:noFill/>
-                      <a:prstDash val="solid"/>
-                    </a:lnR>
-                    <a:lnT w="9525" cap="rnd" cmpd="sng" algn="ctr">
-                      <a:noFill/>
-                      <a:prstDash val="solid"/>
-                    </a:lnT>
-                    <a:lnB w="9525" cap="rnd" cmpd="sng" algn="ctr">
-                      <a:noFill/>
-                      <a:prstDash val="solid"/>
-                    </a:lnB>
-                    <a:lnTlToBr w="12700" cmpd="sng">
-                      <a:noFill/>
-                      <a:prstDash val="solid"/>
-                    </a:lnTlToBr>
-                    <a:lnBlToTr w="12700" cmpd="sng">
-                      <a:noFill/>
-                      <a:prstDash val="solid"/>
-                    </a:lnBlToTr>
-                    <a:solidFill>
-                      <a:schemeClr val="bg2"/>
-                    </a:solidFill>
-                  </a:tcPr>
-                </a:tc>
-                <a:tc>
-                  <a:txBody>
-                    <a:bodyPr/>
-                    <a:lstStyle/>
-                    <a:p>
-                      <a:pPr algn="l"/>
-                      <a:r>
-                        <a:rPr lang="en-IN">
-                          <a:effectLst/>
-                          <a:latin typeface="Barlow Medium" panose="00000600000000000000" pitchFamily="2" charset="0"/>
-                        </a:rPr>
-                        <a:t>Standard for transformers</a:t>
-                      </a:r>
-                    </a:p>
-                  </a:txBody>
-                  <a:tcPr anchor="ctr">
-                    <a:lnL w="9525" cap="rnd" cmpd="sng" algn="ctr">
-                      <a:noFill/>
-                      <a:prstDash val="solid"/>
-                    </a:lnL>
-                    <a:lnR w="9525" cap="rnd" cmpd="sng" algn="ctr">
-                      <a:noFill/>
-                      <a:prstDash val="solid"/>
-                    </a:lnR>
-                    <a:lnT w="9525" cap="rnd" cmpd="sng" algn="ctr">
-                      <a:noFill/>
-                      <a:prstDash val="solid"/>
-                    </a:lnT>
-                    <a:lnB w="9525" cap="rnd" cmpd="sng" algn="ctr">
-                      <a:noFill/>
-                      <a:prstDash val="solid"/>
-                    </a:lnB>
-                    <a:lnTlToBr w="12700" cmpd="sng">
-                      <a:noFill/>
-                      <a:prstDash val="solid"/>
-                    </a:lnTlToBr>
-                    <a:lnBlToTr w="12700" cmpd="sng">
-                      <a:noFill/>
-                      <a:prstDash val="solid"/>
-                    </a:lnBlToTr>
-                    <a:solidFill>
-                      <a:schemeClr val="bg2"/>
-                    </a:solidFill>
-                  </a:tcPr>
-                </a:tc>
-                <a:tc>
-                  <a:txBody>
-                    <a:bodyPr/>
-                    <a:lstStyle/>
-                    <a:p>
-                      <a:pPr algn="l"/>
-                      <a:r>
-                        <a:rPr lang="en-IN" dirty="0">
-                          <a:effectLst/>
-                          <a:latin typeface="Barlow Medium" panose="00000600000000000000" pitchFamily="2" charset="0"/>
-                        </a:rPr>
-                        <a:t>Recent innovation</a:t>
-                      </a:r>
-                    </a:p>
-                  </a:txBody>
-                  <a:tcPr anchor="ctr">
-                    <a:lnL w="9525" cap="rnd" cmpd="sng" algn="ctr">
-                      <a:noFill/>
-                      <a:prstDash val="solid"/>
-                    </a:lnL>
-                    <a:lnR w="9525" cap="rnd" cmpd="sng" algn="ctr">
-                      <a:noFill/>
-                      <a:prstDash val="solid"/>
-                    </a:lnR>
-                    <a:lnT w="9525" cap="rnd" cmpd="sng" algn="ctr">
-                      <a:noFill/>
-                      <a:prstDash val="solid"/>
-                    </a:lnT>
-                    <a:lnB w="9525" cap="rnd" cmpd="sng" algn="ctr">
-                      <a:noFill/>
-                      <a:prstDash val="solid"/>
-                    </a:lnB>
-                    <a:lnTlToBr w="12700" cmpd="sng">
-                      <a:noFill/>
-                      <a:prstDash val="solid"/>
-                    </a:lnTlToBr>
-                    <a:lnBlToTr w="12700" cmpd="sng">
-                      <a:noFill/>
-                      <a:prstDash val="solid"/>
-                    </a:lnBlToTr>
-                    <a:solidFill>
-                      <a:schemeClr val="bg2"/>
-                    </a:solidFill>
-                  </a:tcPr>
-                </a:tc>
-                <a:extLst>
-                  <a:ext uri="{0D108BD9-81ED-4DB2-BD59-A6C34878D82A}">
-                    <a16:rowId xmlns:a16="http://schemas.microsoft.com/office/drawing/2014/main" val="3421708171"/>
-                  </a:ext>
-                </a:extLst>
-              </a:tr>
-            </a:tbl>
-          </a:graphicData>
-        </a:graphic>
-      </p:graphicFrame>
+          <p:cNvSpPr txBox="1"/>
+          <p:nvPr/>
+        </p:nvSpPr>
+        <p:spPr>
+          <a:xfrm>
+            <a:off x="527427" y="2346760"/>
+            <a:ext cx="8428911" cy="461665"/>
+          </a:xfrm>
+          <a:prstGeom prst="rect">
+            <a:avLst/>
+          </a:prstGeom>
+          <a:noFill/>
+        </p:spPr>
+        <p:txBody>
+          <a:bodyPr wrap="none" rtlCol="0">
+            <a:spAutoFit/>
+          </a:bodyPr>
+          <a:lstStyle/>
+          <a:p>
+            <a:r>
+              <a:rPr lang="en-GB" sz="2400" dirty="0">
+                <a:latin typeface="Barlow Medium" panose="00000600000000000000" pitchFamily="2" charset="0"/>
+              </a:rPr>
+              <a:t>NDCG@10 - Normalized Discounted Cumulative Gain at rank 10</a:t>
+            </a:r>
+          </a:p>
+        </p:txBody>
+      </p:sp>
+      <p:sp>
+        <p:nvSpPr>
+          <p:cNvPr id="7" name="TextBox 6">
+            <a:extLst>
+              <a:ext uri="{FF2B5EF4-FFF2-40B4-BE49-F238E27FC236}">
+                <a16:creationId xmlns:a16="http://schemas.microsoft.com/office/drawing/2014/main" id="{061EE149-ABB6-78F4-BB33-DDCA828B8076}"/>
+              </a:ext>
+            </a:extLst>
+          </p:cNvPr>
+          <p:cNvSpPr txBox="1"/>
+          <p:nvPr/>
+        </p:nvSpPr>
+        <p:spPr>
+          <a:xfrm>
+            <a:off x="527427" y="2906550"/>
+            <a:ext cx="8908852" cy="923330"/>
+          </a:xfrm>
+          <a:prstGeom prst="rect">
+            <a:avLst/>
+          </a:prstGeom>
+          <a:noFill/>
+        </p:spPr>
+        <p:txBody>
+          <a:bodyPr wrap="square" rtlCol="0">
+            <a:spAutoFit/>
+          </a:bodyPr>
+          <a:lstStyle/>
+          <a:p>
+            <a:r>
+              <a:rPr lang="en-GB" dirty="0">
+                <a:latin typeface="Barlow" panose="00000500000000000000" pitchFamily="2" charset="0"/>
+              </a:rPr>
+              <a:t>NDCG@10 measures the quality of ranking systems by considering both the relevance of retrieved documents and their positions in the ranking. It is normalized by the ideal DCG to ensure values between 0 and 1, where higher values indicate better performance.</a:t>
+            </a:r>
+          </a:p>
+        </p:txBody>
+      </p:sp>
+      <p:pic>
+        <p:nvPicPr>
+          <p:cNvPr id="8" name="@holatex&#10;\begin{document}&#10;\begin{equation}&#10;\text{NDCG@10} = \frac{\text{DCG@10}}{\text{IDCG@10}}&#10;\end{equation}&#10;&#10;where:&#10;\begin{equation}&#10;\text{DCG@10} = \sum_{i=1}^{10} \frac{2^{rel_i} - 1}{\log_2(i + 1)}&#10;\end{equation}&#10;&#10;and $rel_i$ is the relevance score of the document at position $i$, and IDCG@10 is the ideal DCG computed using the best possible ranking.&#10;&#10;\end{document}">
+            <a:extLst>
+              <a:ext uri="{FF2B5EF4-FFF2-40B4-BE49-F238E27FC236}">
+                <a16:creationId xmlns:a16="http://schemas.microsoft.com/office/drawing/2014/main" id="{E2452F6C-0672-68CF-1E6D-B7CB3B53A0CE}"/>
+              </a:ext>
+            </a:extLst>
+          </p:cNvPr>
+          <p:cNvPicPr>
+            <a:picLocks/>
+          </p:cNvPicPr>
+          <p:nvPr/>
+        </p:nvPicPr>
+        <p:blipFill>
+          <a:blip r:embed="rId2"/>
+          <a:stretch>
+            <a:fillRect/>
+          </a:stretch>
+        </p:blipFill>
+        <p:spPr>
+          <a:xfrm>
+            <a:off x="1117600" y="4383878"/>
+            <a:ext cx="6959600" cy="2026933"/>
+          </a:xfrm>
+          <a:prstGeom prst="rect">
+            <a:avLst/>
+          </a:prstGeom>
+        </p:spPr>
+      </p:pic>
     </p:spTree>
     <p:extLst>
       <p:ext uri="{BB962C8B-B14F-4D97-AF65-F5344CB8AC3E}">
@@ -12212,7 +18512,13 @@
   <p:cSld>
     <p:spTree>
       <p:nvGrpSpPr>
-        <p:cNvPr id="1" name=""/>
+        <p:cNvPr id="1" name="">
+          <a:extLst>
+            <a:ext uri="{FF2B5EF4-FFF2-40B4-BE49-F238E27FC236}">
+              <a16:creationId xmlns:a16="http://schemas.microsoft.com/office/drawing/2014/main" id="{4477D75B-E2A9-C4B3-3CD3-A5C406BB3419}"/>
+            </a:ext>
+          </a:extLst>
+        </p:cNvPr>
         <p:cNvGrpSpPr/>
         <p:nvPr/>
       </p:nvGrpSpPr>
@@ -12226,10 +18532,10 @@
       </p:grpSpPr>
       <p:sp>
         <p:nvSpPr>
-          <p:cNvPr id="3" name="Title 2">
+          <p:cNvPr id="2" name="Title 1">
             <a:extLst>
               <a:ext uri="{FF2B5EF4-FFF2-40B4-BE49-F238E27FC236}">
-                <a16:creationId xmlns:a16="http://schemas.microsoft.com/office/drawing/2014/main" id="{DE089F23-6A5A-9A27-D727-B577A104164E}"/>
+                <a16:creationId xmlns:a16="http://schemas.microsoft.com/office/drawing/2014/main" id="{9DEBD66D-F91A-5ADF-6700-018F12C9F2FD}"/>
               </a:ext>
             </a:extLst>
           </p:cNvPr>
@@ -12240,12 +18546,7 @@
             <p:ph type="title"/>
           </p:nvPr>
         </p:nvSpPr>
-        <p:spPr>
-          <a:xfrm>
-            <a:off x="590395" y="311813"/>
-            <a:ext cx="5399343" cy="837479"/>
-          </a:xfrm>
-        </p:spPr>
+        <p:spPr/>
         <p:txBody>
           <a:bodyPr/>
           <a:lstStyle/>
@@ -12254,7 +18555,7 @@
               <a:rPr lang="en-GB" dirty="0">
                 <a:latin typeface="Barlow SemiBold" panose="00000700000000000000" pitchFamily="2" charset="0"/>
               </a:rPr>
-              <a:t>Experimental Setup</a:t>
+              <a:t>Evaluation Metrices</a:t>
             </a:r>
             <a:endParaRPr lang="en-IN" dirty="0">
               <a:latin typeface="Barlow SemiBold" panose="00000700000000000000" pitchFamily="2" charset="0"/>
@@ -12264,217 +18565,112 @@
       </p:sp>
       <p:sp>
         <p:nvSpPr>
-          <p:cNvPr id="4" name="Text Placeholder 3">
+          <p:cNvPr id="6" name="TextBox 5">
             <a:extLst>
               <a:ext uri="{FF2B5EF4-FFF2-40B4-BE49-F238E27FC236}">
-                <a16:creationId xmlns:a16="http://schemas.microsoft.com/office/drawing/2014/main" id="{D3135813-3D43-E29E-81C9-5FD7F79E6710}"/>
+                <a16:creationId xmlns:a16="http://schemas.microsoft.com/office/drawing/2014/main" id="{08A70968-9E81-C503-0B4B-8B6C48D7B9E3}"/>
               </a:ext>
             </a:extLst>
           </p:cNvPr>
-          <p:cNvSpPr>
-            <a:spLocks noGrp="1"/>
-          </p:cNvSpPr>
-          <p:nvPr>
-            <p:ph type="body" sz="half" idx="2"/>
-          </p:nvPr>
+          <p:cNvSpPr txBox="1"/>
+          <p:nvPr/>
         </p:nvSpPr>
         <p:spPr>
           <a:xfrm>
-            <a:off x="741512" y="1501629"/>
-            <a:ext cx="10708975" cy="5044557"/>
+            <a:off x="527427" y="2346760"/>
+            <a:ext cx="5843266" cy="461665"/>
           </a:xfrm>
+          <a:prstGeom prst="rect">
+            <a:avLst/>
+          </a:prstGeom>
+          <a:noFill/>
         </p:spPr>
         <p:txBody>
-          <a:bodyPr>
-            <a:normAutofit fontScale="92500" lnSpcReduction="20000"/>
+          <a:bodyPr wrap="none" rtlCol="0">
+            <a:spAutoFit/>
           </a:bodyPr>
           <a:lstStyle/>
           <a:p>
             <a:r>
-              <a:rPr lang="en-IN" sz="3200" b="1" dirty="0">
+              <a:rPr lang="en-GB" sz="2400" dirty="0">
                 <a:latin typeface="Barlow Medium" panose="00000600000000000000" pitchFamily="2" charset="0"/>
               </a:rPr>
-              <a:t>Dataset Configuration</a:t>
-            </a:r>
-          </a:p>
-          <a:p>
-            <a:pPr lvl="1"/>
-            <a:r>
-              <a:rPr lang="en-IN" sz="1800" b="1" dirty="0">
-                <a:latin typeface="Barlow Medium" panose="00000600000000000000" pitchFamily="2" charset="0"/>
-              </a:rPr>
-              <a:t>T</a:t>
-            </a:r>
-            <a:r>
-              <a:rPr lang="en-IN" sz="1800" b="1" dirty="0">
+              <a:t>MRR@10 (Mean Reciprocal Rank at rank 10)</a:t>
+            </a:r>
+          </a:p>
+        </p:txBody>
+      </p:sp>
+      <p:sp>
+        <p:nvSpPr>
+          <p:cNvPr id="7" name="TextBox 6">
+            <a:extLst>
+              <a:ext uri="{FF2B5EF4-FFF2-40B4-BE49-F238E27FC236}">
+                <a16:creationId xmlns:a16="http://schemas.microsoft.com/office/drawing/2014/main" id="{6DE2AE7A-E951-4E0D-A276-9B350F53C9C0}"/>
+              </a:ext>
+            </a:extLst>
+          </p:cNvPr>
+          <p:cNvSpPr txBox="1"/>
+          <p:nvPr/>
+        </p:nvSpPr>
+        <p:spPr>
+          <a:xfrm>
+            <a:off x="527427" y="2906550"/>
+            <a:ext cx="8908852" cy="923330"/>
+          </a:xfrm>
+          <a:prstGeom prst="rect">
+            <a:avLst/>
+          </a:prstGeom>
+          <a:noFill/>
+        </p:spPr>
+        <p:txBody>
+          <a:bodyPr wrap="square" rtlCol="0">
+            <a:spAutoFit/>
+          </a:bodyPr>
+          <a:lstStyle/>
+          <a:p>
+            <a:r>
+              <a:rPr lang="en-GB" dirty="0">
                 <a:latin typeface="Barlow" panose="00000500000000000000" pitchFamily="2" charset="0"/>
               </a:rPr>
-              <a:t>raining:</a:t>
-            </a:r>
-            <a:r>
-              <a:rPr lang="en-IN" sz="1800" dirty="0">
-                <a:latin typeface="Barlow" panose="00000500000000000000" pitchFamily="2" charset="0"/>
-              </a:rPr>
-              <a:t> MS MARCO Passage Ranking (~500K query-passage pairs)</a:t>
-            </a:r>
-          </a:p>
-          <a:p>
-            <a:pPr lvl="1"/>
-            <a:r>
-              <a:rPr lang="en-IN" sz="1800" b="1" dirty="0">
-                <a:latin typeface="Barlow" panose="00000500000000000000" pitchFamily="2" charset="0"/>
-              </a:rPr>
-              <a:t>Evaluation:</a:t>
-            </a:r>
-            <a:r>
-              <a:rPr lang="en-IN" sz="1800" dirty="0">
-                <a:latin typeface="Barlow" panose="00000500000000000000" pitchFamily="2" charset="0"/>
-              </a:rPr>
-              <a:t> TREC DL 2019 (43 queries with comprehensive relevance judgments)</a:t>
-            </a:r>
-          </a:p>
-          <a:p>
-            <a:pPr lvl="1"/>
-            <a:r>
-              <a:rPr lang="en-IN" sz="1800" b="1" dirty="0">
-                <a:latin typeface="Barlow" panose="00000500000000000000" pitchFamily="2" charset="0"/>
-              </a:rPr>
-              <a:t>Metrics:</a:t>
-            </a:r>
-            <a:r>
-              <a:rPr lang="en-IN" sz="1800" dirty="0">
-                <a:latin typeface="Barlow" panose="00000500000000000000" pitchFamily="2" charset="0"/>
-              </a:rPr>
-              <a:t> NDCG@10, MAP, MRR@10, Recall@10, R-Precision, P@10</a:t>
-            </a:r>
-          </a:p>
-          <a:p>
-            <a:r>
-              <a:rPr lang="en-IN" sz="3200" b="1" dirty="0">
-                <a:latin typeface="Barlow Medium" panose="00000600000000000000" pitchFamily="2" charset="0"/>
-              </a:rPr>
-              <a:t>Infrastructure</a:t>
-            </a:r>
-          </a:p>
-          <a:p>
-            <a:pPr lvl="1"/>
-            <a:r>
-              <a:rPr lang="en-IN" sz="1800" b="1" dirty="0">
-                <a:latin typeface="Barlow" panose="00000500000000000000" pitchFamily="2" charset="0"/>
-              </a:rPr>
-              <a:t>Platform:</a:t>
-            </a:r>
-            <a:r>
-              <a:rPr lang="en-IN" sz="1800" dirty="0">
-                <a:latin typeface="Barlow" panose="00000500000000000000" pitchFamily="2" charset="0"/>
-              </a:rPr>
-              <a:t> Modal cloud computing</a:t>
-            </a:r>
-          </a:p>
-          <a:p>
-            <a:pPr lvl="1"/>
-            <a:r>
-              <a:rPr lang="en-IN" sz="1800" b="1" dirty="0">
-                <a:latin typeface="Barlow" panose="00000500000000000000" pitchFamily="2" charset="0"/>
-              </a:rPr>
-              <a:t>Hardware:</a:t>
-            </a:r>
-            <a:r>
-              <a:rPr lang="en-IN" sz="1800" dirty="0">
-                <a:latin typeface="Barlow" panose="00000500000000000000" pitchFamily="2" charset="0"/>
-              </a:rPr>
-              <a:t> 3 × NVIDIA L40S GPUs</a:t>
-            </a:r>
-          </a:p>
-          <a:p>
-            <a:pPr lvl="1"/>
-            <a:r>
-              <a:rPr lang="en-IN" sz="1800" b="1" dirty="0">
-                <a:latin typeface="Barlow" panose="00000500000000000000" pitchFamily="2" charset="0"/>
-              </a:rPr>
-              <a:t>Monitoring:</a:t>
-            </a:r>
-            <a:r>
-              <a:rPr lang="en-IN" sz="1800" dirty="0">
-                <a:latin typeface="Barlow" panose="00000500000000000000" pitchFamily="2" charset="0"/>
-              </a:rPr>
-              <a:t> Weights &amp; Biases</a:t>
-            </a:r>
-          </a:p>
-          <a:p>
-            <a:pPr lvl="1"/>
-            <a:r>
-              <a:rPr lang="en-IN" sz="1800" b="1" dirty="0">
-                <a:latin typeface="Barlow" panose="00000500000000000000" pitchFamily="2" charset="0"/>
-              </a:rPr>
-              <a:t>Training:</a:t>
-            </a:r>
-            <a:r>
-              <a:rPr lang="en-IN" sz="1800" dirty="0">
-                <a:latin typeface="Barlow" panose="00000500000000000000" pitchFamily="2" charset="0"/>
-              </a:rPr>
-              <a:t> 3 epochs per configuration</a:t>
-            </a:r>
-          </a:p>
-          <a:p>
-            <a:r>
-              <a:rPr lang="en-IN" sz="3200" b="1" dirty="0">
-                <a:latin typeface="Barlow Medium" panose="00000600000000000000" pitchFamily="2" charset="0"/>
-              </a:rPr>
-              <a:t>Experimental Design</a:t>
-            </a:r>
-          </a:p>
-          <a:p>
-            <a:pPr lvl="1"/>
-            <a:r>
-              <a:rPr lang="en-IN" sz="1800" b="1" dirty="0">
-                <a:latin typeface="Barlow" panose="00000500000000000000" pitchFamily="2" charset="0"/>
-              </a:rPr>
-              <a:t>Total Configurations:</a:t>
-            </a:r>
-            <a:r>
-              <a:rPr lang="en-IN" sz="1800" dirty="0">
-                <a:latin typeface="Barlow" panose="00000500000000000000" pitchFamily="2" charset="0"/>
-              </a:rPr>
-              <a:t> 6 (3 models × 2 optimizers)</a:t>
-            </a:r>
-          </a:p>
-          <a:p>
-            <a:pPr lvl="1"/>
-            <a:r>
-              <a:rPr lang="en-IN" sz="1800" b="1" dirty="0">
-                <a:latin typeface="Barlow" panose="00000500000000000000" pitchFamily="2" charset="0"/>
-              </a:rPr>
-              <a:t>Controlled Variables:</a:t>
-            </a:r>
-            <a:r>
-              <a:rPr lang="en-IN" sz="1800" dirty="0">
-                <a:latin typeface="Barlow" panose="00000500000000000000" pitchFamily="2" charset="0"/>
-              </a:rPr>
-              <a:t> Batch size, training steps, evaluation frequency</a:t>
-            </a:r>
-          </a:p>
-          <a:p>
-            <a:pPr lvl="1"/>
-            <a:r>
-              <a:rPr lang="en-IN" sz="1800" b="1" dirty="0">
-                <a:latin typeface="Barlow" panose="00000500000000000000" pitchFamily="2" charset="0"/>
-              </a:rPr>
-              <a:t>Variable Parameters:</a:t>
-            </a:r>
-            <a:r>
-              <a:rPr lang="en-IN" sz="1800" dirty="0">
-                <a:latin typeface="Barlow" panose="00000500000000000000" pitchFamily="2" charset="0"/>
-              </a:rPr>
-              <a:t> Learning rates (2e-5 standard, 2e-6 for ModernBERT+Lion)</a:t>
+              <a:t>MRR@10 measures the average of reciprocal ranks of the first relevant document found within the top 10 results across all queries. It emphasizes finding at least one relevant document early in the ranking.</a:t>
             </a:r>
           </a:p>
         </p:txBody>
       </p:sp>
+      <p:pic>
+        <p:nvPicPr>
+          <p:cNvPr id="3" name="@holatex&#10;\begin{document}&#10;\begin{equation}&#10;\text{MRR@10} = \frac{1}{|Q|} \sum_{q=1}^{|Q|} \frac{1}{\text{rank}_q}&#10;\end{equation}&#10;&#10;where $\text{rank}_q$ is the position of the first relevant document for query $q$ within the top 10 results. If no relevant document is found in the top 10, the reciprocal rank is 0.&#10;&#10;\end{document}">
+            <a:extLst>
+              <a:ext uri="{FF2B5EF4-FFF2-40B4-BE49-F238E27FC236}">
+                <a16:creationId xmlns:a16="http://schemas.microsoft.com/office/drawing/2014/main" id="{16C35BE9-305F-19E8-B78E-0573479DA125}"/>
+              </a:ext>
+            </a:extLst>
+          </p:cNvPr>
+          <p:cNvPicPr>
+            <a:picLocks/>
+          </p:cNvPicPr>
+          <p:nvPr/>
+        </p:nvPicPr>
+        <p:blipFill>
+          <a:blip r:embed="rId2"/>
+          <a:stretch>
+            <a:fillRect/>
+          </a:stretch>
+        </p:blipFill>
+        <p:spPr>
+          <a:xfrm>
+            <a:off x="1925767" y="4488752"/>
+            <a:ext cx="6345777" cy="1660080"/>
+          </a:xfrm>
+          <a:prstGeom prst="rect">
+            <a:avLst/>
+          </a:prstGeom>
+        </p:spPr>
+      </p:pic>
     </p:spTree>
     <p:extLst>
       <p:ext uri="{BB962C8B-B14F-4D97-AF65-F5344CB8AC3E}">
-        <p14:creationId xmlns:p14="http://schemas.microsoft.com/office/powerpoint/2010/main" val="503350313"/>
+        <p14:creationId xmlns:p14="http://schemas.microsoft.com/office/powerpoint/2010/main" val="2752368493"/>
       </p:ext>
     </p:extLst>
   </p:cSld>
@@ -13313,7 +19509,7 @@
 
 <file path=ppt/webextensions/taskpanes.xml><?xml version="1.0" encoding="utf-8"?>
 <wetp:taskpanes xmlns:wetp="http://schemas.microsoft.com/office/webextensions/taskpanes/2010/11">
-  <wetp:taskpane dockstate="right" visibility="0" width="438" row="7">
+  <wetp:taskpane dockstate="right" visibility="0" width="438" row="10">
     <wetp:webextensionref xmlns:r="http://schemas.openxmlformats.org/officeDocument/2006/relationships" r:id="rId1"/>
   </wetp:taskpane>
 </wetp:taskpanes>

--- a/cross_encoder/thesis/Thesis_presentation.pptx
+++ b/cross_encoder/thesis/Thesis_presentation.pptx
@@ -21,13 +21,13 @@
     <p:sldId id="271" r:id="rId12"/>
     <p:sldId id="273" r:id="rId13"/>
     <p:sldId id="272" r:id="rId14"/>
-    <p:sldId id="275" r:id="rId15"/>
-    <p:sldId id="276" r:id="rId16"/>
-    <p:sldId id="277" r:id="rId17"/>
-    <p:sldId id="278" r:id="rId18"/>
-    <p:sldId id="269" r:id="rId19"/>
-    <p:sldId id="259" r:id="rId20"/>
-    <p:sldId id="268" r:id="rId21"/>
+    <p:sldId id="279" r:id="rId15"/>
+    <p:sldId id="275" r:id="rId16"/>
+    <p:sldId id="276" r:id="rId17"/>
+    <p:sldId id="277" r:id="rId18"/>
+    <p:sldId id="278" r:id="rId19"/>
+    <p:sldId id="269" r:id="rId20"/>
+    <p:sldId id="259" r:id="rId21"/>
   </p:sldIdLst>
   <p:sldSz cx="12192000" cy="6858000"/>
   <p:notesSz cx="6858000" cy="9144000"/>
@@ -1626,7 +1626,7 @@
           <a:p>
             <a:fld id="{E6AEB063-7F11-4E3B-BA52-07405B1C2D95}" type="slidenum">
               <a:rPr lang="en-US" smtClean="0"/>
-              <a:t>16</a:t>
+              <a:t>17</a:t>
             </a:fld>
             <a:endParaRPr lang="en-US" dirty="0"/>
           </a:p>
@@ -1636,97 +1636,6 @@
     <p:extLst>
       <p:ext uri="{BB962C8B-B14F-4D97-AF65-F5344CB8AC3E}">
         <p14:creationId xmlns:p14="http://schemas.microsoft.com/office/powerpoint/2010/main" val="3338027317"/>
-      </p:ext>
-    </p:extLst>
-  </p:cSld>
-  <p:clrMapOvr>
-    <a:masterClrMapping/>
-  </p:clrMapOvr>
-</p:notes>
-</file>
-
-<file path=ppt/notesSlides/notesSlide9.xml><?xml version="1.0" encoding="utf-8"?>
-<p:notes xmlns:a="http://schemas.openxmlformats.org/drawingml/2006/main" xmlns:r="http://schemas.openxmlformats.org/officeDocument/2006/relationships" xmlns:p="http://schemas.openxmlformats.org/presentationml/2006/main">
-  <p:cSld>
-    <p:spTree>
-      <p:nvGrpSpPr>
-        <p:cNvPr id="1" name=""/>
-        <p:cNvGrpSpPr/>
-        <p:nvPr/>
-      </p:nvGrpSpPr>
-      <p:grpSpPr>
-        <a:xfrm>
-          <a:off x="0" y="0"/>
-          <a:ext cx="0" cy="0"/>
-          <a:chOff x="0" y="0"/>
-          <a:chExt cx="0" cy="0"/>
-        </a:xfrm>
-      </p:grpSpPr>
-      <p:sp>
-        <p:nvSpPr>
-          <p:cNvPr id="2" name="Slide Image Placeholder 1"/>
-          <p:cNvSpPr>
-            <a:spLocks noGrp="1" noRot="1" noChangeAspect="1"/>
-          </p:cNvSpPr>
-          <p:nvPr>
-            <p:ph type="sldImg"/>
-          </p:nvPr>
-        </p:nvSpPr>
-        <p:spPr/>
-      </p:sp>
-      <p:sp>
-        <p:nvSpPr>
-          <p:cNvPr id="3" name="Notes Placeholder 2"/>
-          <p:cNvSpPr>
-            <a:spLocks noGrp="1"/>
-          </p:cNvSpPr>
-          <p:nvPr>
-            <p:ph type="body" idx="1"/>
-          </p:nvPr>
-        </p:nvSpPr>
-        <p:spPr/>
-        <p:txBody>
-          <a:bodyPr/>
-          <a:lstStyle/>
-          <a:p>
-            <a:r>
-              <a:rPr lang="en-US" dirty="0">
-                <a:latin typeface="Tahoma" panose="020B0604030504040204" pitchFamily="34" charset="0"/>
-                <a:ea typeface="Tahoma" panose="020B0604030504040204" pitchFamily="34" charset="0"/>
-                <a:cs typeface="Tahoma" panose="020B0604030504040204" pitchFamily="34" charset="0"/>
-              </a:rPr>
-              <a:t>The action step is what the audience is supposed to do or think about the topic.  It should be one sentence that is written clearly and with much thought. It may also be the thesis statement restated as an action.  The goal of this slide is to leave the audience with a clear message as to what they are to do or think at the end of the speech.  It may be a good idea to end with a powerful quote or image.  </a:t>
-            </a:r>
-          </a:p>
-        </p:txBody>
-      </p:sp>
-      <p:sp>
-        <p:nvSpPr>
-          <p:cNvPr id="4" name="Slide Number Placeholder 3"/>
-          <p:cNvSpPr>
-            <a:spLocks noGrp="1"/>
-          </p:cNvSpPr>
-          <p:nvPr>
-            <p:ph type="sldNum" sz="quarter" idx="10"/>
-          </p:nvPr>
-        </p:nvSpPr>
-        <p:spPr/>
-        <p:txBody>
-          <a:bodyPr/>
-          <a:lstStyle/>
-          <a:p>
-            <a:fld id="{E6AEB063-7F11-4E3B-BA52-07405B1C2D95}" type="slidenum">
-              <a:rPr lang="en-US" smtClean="0"/>
-              <a:t>17</a:t>
-            </a:fld>
-            <a:endParaRPr lang="en-US" dirty="0"/>
-          </a:p>
-        </p:txBody>
-      </p:sp>
-    </p:spTree>
-    <p:extLst>
-      <p:ext uri="{BB962C8B-B14F-4D97-AF65-F5344CB8AC3E}">
-        <p14:creationId xmlns:p14="http://schemas.microsoft.com/office/powerpoint/2010/main" val="2906257609"/>
       </p:ext>
     </p:extLst>
   </p:cSld>
@@ -9290,6 +9199,874 @@
   <p:cSld>
     <p:spTree>
       <p:nvGrpSpPr>
+        <p:cNvPr id="1" name="">
+          <a:extLst>
+            <a:ext uri="{FF2B5EF4-FFF2-40B4-BE49-F238E27FC236}">
+              <a16:creationId xmlns:a16="http://schemas.microsoft.com/office/drawing/2014/main" id="{1AF13AF9-D74D-C4B9-6FB6-E42134EEC347}"/>
+            </a:ext>
+          </a:extLst>
+        </p:cNvPr>
+        <p:cNvGrpSpPr/>
+        <p:nvPr/>
+      </p:nvGrpSpPr>
+      <p:grpSpPr>
+        <a:xfrm>
+          <a:off x="0" y="0"/>
+          <a:ext cx="0" cy="0"/>
+          <a:chOff x="0" y="0"/>
+          <a:chExt cx="0" cy="0"/>
+        </a:xfrm>
+      </p:grpSpPr>
+      <p:sp>
+        <p:nvSpPr>
+          <p:cNvPr id="4" name="Text Placeholder 3">
+            <a:extLst>
+              <a:ext uri="{FF2B5EF4-FFF2-40B4-BE49-F238E27FC236}">
+                <a16:creationId xmlns:a16="http://schemas.microsoft.com/office/drawing/2014/main" id="{0E827B3D-F915-4993-C941-A3487448D855}"/>
+              </a:ext>
+            </a:extLst>
+          </p:cNvPr>
+          <p:cNvSpPr>
+            <a:spLocks noGrp="1"/>
+          </p:cNvSpPr>
+          <p:nvPr>
+            <p:ph type="body" sz="half" idx="2"/>
+          </p:nvPr>
+        </p:nvSpPr>
+        <p:spPr>
+          <a:xfrm>
+            <a:off x="741512" y="1091843"/>
+            <a:ext cx="10708975" cy="5044557"/>
+          </a:xfrm>
+        </p:spPr>
+        <p:txBody>
+          <a:bodyPr>
+            <a:normAutofit/>
+          </a:bodyPr>
+          <a:lstStyle/>
+          <a:p>
+            <a:r>
+              <a:rPr lang="en-GB" sz="3000" b="1" dirty="0">
+                <a:latin typeface="Barlow Medium" panose="00000600000000000000" pitchFamily="2" charset="0"/>
+              </a:rPr>
+              <a:t> ⚙️ </a:t>
+            </a:r>
+            <a:r>
+              <a:rPr lang="en-IN" sz="3000" b="1" dirty="0">
+                <a:latin typeface="Barlow Medium" panose="00000600000000000000" pitchFamily="2" charset="0"/>
+              </a:rPr>
+              <a:t>Hyperparameter Settings</a:t>
+            </a:r>
+          </a:p>
+          <a:p>
+            <a:endParaRPr lang="en-IN" sz="3000" b="1" dirty="0">
+              <a:latin typeface="Barlow Medium" panose="00000600000000000000" pitchFamily="2" charset="0"/>
+            </a:endParaRPr>
+          </a:p>
+          <a:p>
+            <a:endParaRPr lang="en-IN" sz="3000" b="1" dirty="0">
+              <a:latin typeface="Barlow Medium" panose="00000600000000000000" pitchFamily="2" charset="0"/>
+            </a:endParaRPr>
+          </a:p>
+        </p:txBody>
+      </p:sp>
+      <p:graphicFrame>
+        <p:nvGraphicFramePr>
+          <p:cNvPr id="6" name="Table 5">
+            <a:extLst>
+              <a:ext uri="{FF2B5EF4-FFF2-40B4-BE49-F238E27FC236}">
+                <a16:creationId xmlns:a16="http://schemas.microsoft.com/office/drawing/2014/main" id="{2A877A18-81E0-4688-5F13-8FFB50660AB7}"/>
+              </a:ext>
+            </a:extLst>
+          </p:cNvPr>
+          <p:cNvGraphicFramePr>
+            <a:graphicFrameLocks noGrp="1"/>
+          </p:cNvGraphicFramePr>
+          <p:nvPr>
+            <p:extLst>
+              <p:ext uri="{D42A27DB-BD31-4B8C-83A1-F6EECF244321}">
+                <p14:modId xmlns:p14="http://schemas.microsoft.com/office/powerpoint/2010/main" val="1705017312"/>
+              </p:ext>
+            </p:extLst>
+          </p:nvPr>
+        </p:nvGraphicFramePr>
+        <p:xfrm>
+          <a:off x="851383" y="2131060"/>
+          <a:ext cx="8524113" cy="3048000"/>
+        </p:xfrm>
+        <a:graphic>
+          <a:graphicData uri="http://schemas.openxmlformats.org/drawingml/2006/table">
+            <a:tbl>
+              <a:tblPr firstRow="1" bandRow="1">
+                <a:tableStyleId>{69C7853C-536D-4A76-A0AE-DD22124D55A5}</a:tableStyleId>
+              </a:tblPr>
+              <a:tblGrid>
+                <a:gridCol w="2372456">
+                  <a:extLst>
+                    <a:ext uri="{9D8B030D-6E8A-4147-A177-3AD203B41FA5}">
+                      <a16:colId xmlns:a16="http://schemas.microsoft.com/office/drawing/2014/main" val="289530700"/>
+                    </a:ext>
+                  </a:extLst>
+                </a:gridCol>
+                <a:gridCol w="3310286">
+                  <a:extLst>
+                    <a:ext uri="{9D8B030D-6E8A-4147-A177-3AD203B41FA5}">
+                      <a16:colId xmlns:a16="http://schemas.microsoft.com/office/drawing/2014/main" val="986979421"/>
+                    </a:ext>
+                  </a:extLst>
+                </a:gridCol>
+                <a:gridCol w="2841371">
+                  <a:extLst>
+                    <a:ext uri="{9D8B030D-6E8A-4147-A177-3AD203B41FA5}">
+                      <a16:colId xmlns:a16="http://schemas.microsoft.com/office/drawing/2014/main" val="414445897"/>
+                    </a:ext>
+                  </a:extLst>
+                </a:gridCol>
+              </a:tblGrid>
+              <a:tr h="370840">
+                <a:tc>
+                  <a:txBody>
+                    <a:bodyPr/>
+                    <a:lstStyle/>
+                    <a:p>
+                      <a:pPr algn="ctr"/>
+                      <a:r>
+                        <a:rPr lang="en-GB" sz="2400" dirty="0">
+                          <a:latin typeface="Barlow SemiBold" panose="00000700000000000000" pitchFamily="2" charset="0"/>
+                        </a:rPr>
+                        <a:t>Parameter</a:t>
+                      </a:r>
+                      <a:endParaRPr lang="en-IN" sz="2400" dirty="0">
+                        <a:latin typeface="Barlow SemiBold" panose="00000700000000000000" pitchFamily="2" charset="0"/>
+                      </a:endParaRPr>
+                    </a:p>
+                  </a:txBody>
+                  <a:tcPr>
+                    <a:solidFill>
+                      <a:srgbClr val="00B0F0"/>
+                    </a:solidFill>
+                  </a:tcPr>
+                </a:tc>
+                <a:tc>
+                  <a:txBody>
+                    <a:bodyPr/>
+                    <a:lstStyle/>
+                    <a:p>
+                      <a:pPr algn="ctr"/>
+                      <a:r>
+                        <a:rPr lang="en-GB" sz="2400" dirty="0">
+                          <a:latin typeface="Barlow SemiBold" panose="00000700000000000000" pitchFamily="2" charset="0"/>
+                        </a:rPr>
+                        <a:t>AdamW</a:t>
+                      </a:r>
+                      <a:endParaRPr lang="en-IN" sz="2400" dirty="0">
+                        <a:latin typeface="Barlow SemiBold" panose="00000700000000000000" pitchFamily="2" charset="0"/>
+                      </a:endParaRPr>
+                    </a:p>
+                  </a:txBody>
+                  <a:tcPr>
+                    <a:solidFill>
+                      <a:srgbClr val="00B0F0"/>
+                    </a:solidFill>
+                  </a:tcPr>
+                </a:tc>
+                <a:tc>
+                  <a:txBody>
+                    <a:bodyPr/>
+                    <a:lstStyle/>
+                    <a:p>
+                      <a:pPr algn="ctr"/>
+                      <a:r>
+                        <a:rPr lang="en-GB" sz="2400" dirty="0">
+                          <a:latin typeface="Barlow SemiBold" panose="00000700000000000000" pitchFamily="2" charset="0"/>
+                        </a:rPr>
+                        <a:t>Lion</a:t>
+                      </a:r>
+                      <a:endParaRPr lang="en-IN" sz="2400" dirty="0">
+                        <a:latin typeface="Barlow SemiBold" panose="00000700000000000000" pitchFamily="2" charset="0"/>
+                      </a:endParaRPr>
+                    </a:p>
+                  </a:txBody>
+                  <a:tcPr>
+                    <a:solidFill>
+                      <a:srgbClr val="00B0F0"/>
+                    </a:solidFill>
+                  </a:tcPr>
+                </a:tc>
+                <a:extLst>
+                  <a:ext uri="{0D108BD9-81ED-4DB2-BD59-A6C34878D82A}">
+                    <a16:rowId xmlns:a16="http://schemas.microsoft.com/office/drawing/2014/main" val="324739917"/>
+                  </a:ext>
+                </a:extLst>
+              </a:tr>
+              <a:tr h="370840">
+                <a:tc>
+                  <a:txBody>
+                    <a:bodyPr/>
+                    <a:lstStyle/>
+                    <a:p>
+                      <a:pPr algn="ctr"/>
+                      <a:r>
+                        <a:rPr lang="en-IN" sz="2000" b="1" dirty="0">
+                          <a:solidFill>
+                            <a:schemeClr val="tx1"/>
+                          </a:solidFill>
+                          <a:effectLst/>
+                          <a:latin typeface="Barlow" panose="00000500000000000000" pitchFamily="2" charset="0"/>
+                        </a:rPr>
+                        <a:t>Learning Rate</a:t>
+                      </a:r>
+                      <a:endParaRPr lang="en-IN" sz="2000" dirty="0">
+                        <a:solidFill>
+                          <a:schemeClr val="tx1"/>
+                        </a:solidFill>
+                        <a:effectLst/>
+                        <a:latin typeface="Barlow" panose="00000500000000000000" pitchFamily="2" charset="0"/>
+                      </a:endParaRPr>
+                    </a:p>
+                  </a:txBody>
+                  <a:tcPr anchor="ctr">
+                    <a:lnB w="3175" cap="flat" cmpd="sng" algn="ctr">
+                      <a:solidFill>
+                        <a:schemeClr val="tx1"/>
+                      </a:solidFill>
+                      <a:prstDash val="solid"/>
+                      <a:round/>
+                      <a:headEnd type="none" w="med" len="med"/>
+                      <a:tailEnd type="none" w="med" len="med"/>
+                    </a:lnB>
+                    <a:solidFill>
+                      <a:schemeClr val="bg1"/>
+                    </a:solidFill>
+                  </a:tcPr>
+                </a:tc>
+                <a:tc>
+                  <a:txBody>
+                    <a:bodyPr/>
+                    <a:lstStyle/>
+                    <a:p>
+                      <a:pPr algn="ctr"/>
+                      <a:r>
+                        <a:rPr lang="en-IN" sz="2000">
+                          <a:solidFill>
+                            <a:schemeClr val="tx1"/>
+                          </a:solidFill>
+                          <a:effectLst/>
+                          <a:latin typeface="Barlow" panose="00000500000000000000" pitchFamily="2" charset="0"/>
+                        </a:rPr>
+                        <a:t>2e-5 (standard)</a:t>
+                      </a:r>
+                    </a:p>
+                  </a:txBody>
+                  <a:tcPr anchor="ctr">
+                    <a:lnB w="3175" cap="flat" cmpd="sng" algn="ctr">
+                      <a:solidFill>
+                        <a:schemeClr val="tx1"/>
+                      </a:solidFill>
+                      <a:prstDash val="solid"/>
+                      <a:round/>
+                      <a:headEnd type="none" w="med" len="med"/>
+                      <a:tailEnd type="none" w="med" len="med"/>
+                    </a:lnB>
+                    <a:solidFill>
+                      <a:schemeClr val="bg1"/>
+                    </a:solidFill>
+                  </a:tcPr>
+                </a:tc>
+                <a:tc>
+                  <a:txBody>
+                    <a:bodyPr/>
+                    <a:lstStyle/>
+                    <a:p>
+                      <a:pPr algn="ctr"/>
+                      <a:r>
+                        <a:rPr lang="en-IN" sz="2000" dirty="0">
+                          <a:solidFill>
+                            <a:schemeClr val="tx1"/>
+                          </a:solidFill>
+                          <a:effectLst/>
+                          <a:latin typeface="Barlow" panose="00000500000000000000" pitchFamily="2" charset="0"/>
+                        </a:rPr>
+                        <a:t>2e-5 (2e-6 for ModernBERT)</a:t>
+                      </a:r>
+                    </a:p>
+                  </a:txBody>
+                  <a:tcPr anchor="ctr">
+                    <a:lnB w="3175" cap="flat" cmpd="sng" algn="ctr">
+                      <a:solidFill>
+                        <a:schemeClr val="tx1"/>
+                      </a:solidFill>
+                      <a:prstDash val="solid"/>
+                      <a:round/>
+                      <a:headEnd type="none" w="med" len="med"/>
+                      <a:tailEnd type="none" w="med" len="med"/>
+                    </a:lnB>
+                    <a:solidFill>
+                      <a:schemeClr val="bg1"/>
+                    </a:solidFill>
+                  </a:tcPr>
+                </a:tc>
+                <a:extLst>
+                  <a:ext uri="{0D108BD9-81ED-4DB2-BD59-A6C34878D82A}">
+                    <a16:rowId xmlns:a16="http://schemas.microsoft.com/office/drawing/2014/main" val="27877144"/>
+                  </a:ext>
+                </a:extLst>
+              </a:tr>
+              <a:tr h="370840">
+                <a:tc>
+                  <a:txBody>
+                    <a:bodyPr/>
+                    <a:lstStyle/>
+                    <a:p>
+                      <a:pPr algn="ctr"/>
+                      <a:r>
+                        <a:rPr lang="en-IN" sz="2000" b="1">
+                          <a:solidFill>
+                            <a:schemeClr val="tx1"/>
+                          </a:solidFill>
+                          <a:effectLst/>
+                          <a:latin typeface="Barlow" panose="00000500000000000000" pitchFamily="2" charset="0"/>
+                        </a:rPr>
+                        <a:t>Weight Decay</a:t>
+                      </a:r>
+                      <a:endParaRPr lang="en-IN" sz="2000">
+                        <a:solidFill>
+                          <a:schemeClr val="tx1"/>
+                        </a:solidFill>
+                        <a:effectLst/>
+                        <a:latin typeface="Barlow" panose="00000500000000000000" pitchFamily="2" charset="0"/>
+                      </a:endParaRPr>
+                    </a:p>
+                  </a:txBody>
+                  <a:tcPr anchor="ctr">
+                    <a:lnT w="3175" cap="flat" cmpd="sng" algn="ctr">
+                      <a:solidFill>
+                        <a:schemeClr val="tx1"/>
+                      </a:solidFill>
+                      <a:prstDash val="solid"/>
+                      <a:round/>
+                      <a:headEnd type="none" w="med" len="med"/>
+                      <a:tailEnd type="none" w="med" len="med"/>
+                    </a:lnT>
+                    <a:lnB w="3175" cap="flat" cmpd="sng" algn="ctr">
+                      <a:solidFill>
+                        <a:schemeClr val="tx1"/>
+                      </a:solidFill>
+                      <a:prstDash val="solid"/>
+                      <a:round/>
+                      <a:headEnd type="none" w="med" len="med"/>
+                      <a:tailEnd type="none" w="med" len="med"/>
+                    </a:lnB>
+                    <a:solidFill>
+                      <a:schemeClr val="bg1"/>
+                    </a:solidFill>
+                  </a:tcPr>
+                </a:tc>
+                <a:tc>
+                  <a:txBody>
+                    <a:bodyPr/>
+                    <a:lstStyle/>
+                    <a:p>
+                      <a:pPr algn="ctr"/>
+                      <a:r>
+                        <a:rPr lang="en-IN" sz="2000" dirty="0">
+                          <a:solidFill>
+                            <a:schemeClr val="tx1"/>
+                          </a:solidFill>
+                          <a:effectLst/>
+                          <a:latin typeface="Barlow" panose="00000500000000000000" pitchFamily="2" charset="0"/>
+                        </a:rPr>
+                        <a:t>0.01</a:t>
+                      </a:r>
+                    </a:p>
+                  </a:txBody>
+                  <a:tcPr anchor="ctr">
+                    <a:lnT w="3175" cap="flat" cmpd="sng" algn="ctr">
+                      <a:solidFill>
+                        <a:schemeClr val="tx1"/>
+                      </a:solidFill>
+                      <a:prstDash val="solid"/>
+                      <a:round/>
+                      <a:headEnd type="none" w="med" len="med"/>
+                      <a:tailEnd type="none" w="med" len="med"/>
+                    </a:lnT>
+                    <a:lnB w="3175" cap="flat" cmpd="sng" algn="ctr">
+                      <a:solidFill>
+                        <a:schemeClr val="tx1"/>
+                      </a:solidFill>
+                      <a:prstDash val="solid"/>
+                      <a:round/>
+                      <a:headEnd type="none" w="med" len="med"/>
+                      <a:tailEnd type="none" w="med" len="med"/>
+                    </a:lnB>
+                    <a:solidFill>
+                      <a:schemeClr val="bg1"/>
+                    </a:solidFill>
+                  </a:tcPr>
+                </a:tc>
+                <a:tc>
+                  <a:txBody>
+                    <a:bodyPr/>
+                    <a:lstStyle/>
+                    <a:p>
+                      <a:pPr algn="ctr"/>
+                      <a:r>
+                        <a:rPr lang="en-IN" sz="2000">
+                          <a:solidFill>
+                            <a:schemeClr val="tx1"/>
+                          </a:solidFill>
+                          <a:effectLst/>
+                          <a:latin typeface="Barlow" panose="00000500000000000000" pitchFamily="2" charset="0"/>
+                        </a:rPr>
+                        <a:t>0.01</a:t>
+                      </a:r>
+                    </a:p>
+                  </a:txBody>
+                  <a:tcPr anchor="ctr">
+                    <a:lnT w="3175" cap="flat" cmpd="sng" algn="ctr">
+                      <a:solidFill>
+                        <a:schemeClr val="tx1"/>
+                      </a:solidFill>
+                      <a:prstDash val="solid"/>
+                      <a:round/>
+                      <a:headEnd type="none" w="med" len="med"/>
+                      <a:tailEnd type="none" w="med" len="med"/>
+                    </a:lnT>
+                    <a:lnB w="3175" cap="flat" cmpd="sng" algn="ctr">
+                      <a:solidFill>
+                        <a:schemeClr val="tx1"/>
+                      </a:solidFill>
+                      <a:prstDash val="solid"/>
+                      <a:round/>
+                      <a:headEnd type="none" w="med" len="med"/>
+                      <a:tailEnd type="none" w="med" len="med"/>
+                    </a:lnB>
+                    <a:solidFill>
+                      <a:schemeClr val="bg1"/>
+                    </a:solidFill>
+                  </a:tcPr>
+                </a:tc>
+                <a:extLst>
+                  <a:ext uri="{0D108BD9-81ED-4DB2-BD59-A6C34878D82A}">
+                    <a16:rowId xmlns:a16="http://schemas.microsoft.com/office/drawing/2014/main" val="2728026833"/>
+                  </a:ext>
+                </a:extLst>
+              </a:tr>
+              <a:tr h="370840">
+                <a:tc>
+                  <a:txBody>
+                    <a:bodyPr/>
+                    <a:lstStyle/>
+                    <a:p>
+                      <a:pPr algn="ctr"/>
+                      <a:r>
+                        <a:rPr lang="en-IN" sz="2000" b="1">
+                          <a:solidFill>
+                            <a:schemeClr val="tx1"/>
+                          </a:solidFill>
+                          <a:effectLst/>
+                          <a:latin typeface="Barlow" panose="00000500000000000000" pitchFamily="2" charset="0"/>
+                        </a:rPr>
+                        <a:t>Beta1</a:t>
+                      </a:r>
+                      <a:endParaRPr lang="en-IN" sz="2000">
+                        <a:solidFill>
+                          <a:schemeClr val="tx1"/>
+                        </a:solidFill>
+                        <a:effectLst/>
+                        <a:latin typeface="Barlow" panose="00000500000000000000" pitchFamily="2" charset="0"/>
+                      </a:endParaRPr>
+                    </a:p>
+                  </a:txBody>
+                  <a:tcPr anchor="ctr">
+                    <a:lnT w="3175" cap="flat" cmpd="sng" algn="ctr">
+                      <a:solidFill>
+                        <a:schemeClr val="tx1"/>
+                      </a:solidFill>
+                      <a:prstDash val="solid"/>
+                      <a:round/>
+                      <a:headEnd type="none" w="med" len="med"/>
+                      <a:tailEnd type="none" w="med" len="med"/>
+                    </a:lnT>
+                    <a:lnB w="3175" cap="flat" cmpd="sng" algn="ctr">
+                      <a:solidFill>
+                        <a:schemeClr val="tx1"/>
+                      </a:solidFill>
+                      <a:prstDash val="solid"/>
+                      <a:round/>
+                      <a:headEnd type="none" w="med" len="med"/>
+                      <a:tailEnd type="none" w="med" len="med"/>
+                    </a:lnB>
+                    <a:solidFill>
+                      <a:schemeClr val="bg1"/>
+                    </a:solidFill>
+                  </a:tcPr>
+                </a:tc>
+                <a:tc>
+                  <a:txBody>
+                    <a:bodyPr/>
+                    <a:lstStyle/>
+                    <a:p>
+                      <a:pPr algn="ctr"/>
+                      <a:r>
+                        <a:rPr lang="en-IN" sz="2000" dirty="0">
+                          <a:solidFill>
+                            <a:schemeClr val="tx1"/>
+                          </a:solidFill>
+                          <a:effectLst/>
+                          <a:latin typeface="Barlow" panose="00000500000000000000" pitchFamily="2" charset="0"/>
+                        </a:rPr>
+                        <a:t>0.9</a:t>
+                      </a:r>
+                    </a:p>
+                  </a:txBody>
+                  <a:tcPr anchor="ctr">
+                    <a:lnT w="3175" cap="flat" cmpd="sng" algn="ctr">
+                      <a:solidFill>
+                        <a:schemeClr val="tx1"/>
+                      </a:solidFill>
+                      <a:prstDash val="solid"/>
+                      <a:round/>
+                      <a:headEnd type="none" w="med" len="med"/>
+                      <a:tailEnd type="none" w="med" len="med"/>
+                    </a:lnT>
+                    <a:lnB w="3175" cap="flat" cmpd="sng" algn="ctr">
+                      <a:solidFill>
+                        <a:schemeClr val="tx1"/>
+                      </a:solidFill>
+                      <a:prstDash val="solid"/>
+                      <a:round/>
+                      <a:headEnd type="none" w="med" len="med"/>
+                      <a:tailEnd type="none" w="med" len="med"/>
+                    </a:lnB>
+                    <a:solidFill>
+                      <a:schemeClr val="bg1"/>
+                    </a:solidFill>
+                  </a:tcPr>
+                </a:tc>
+                <a:tc>
+                  <a:txBody>
+                    <a:bodyPr/>
+                    <a:lstStyle/>
+                    <a:p>
+                      <a:pPr algn="ctr"/>
+                      <a:r>
+                        <a:rPr lang="en-IN" sz="2000">
+                          <a:solidFill>
+                            <a:schemeClr val="tx1"/>
+                          </a:solidFill>
+                          <a:effectLst/>
+                          <a:latin typeface="Barlow" panose="00000500000000000000" pitchFamily="2" charset="0"/>
+                        </a:rPr>
+                        <a:t>0.9</a:t>
+                      </a:r>
+                    </a:p>
+                  </a:txBody>
+                  <a:tcPr anchor="ctr">
+                    <a:lnT w="3175" cap="flat" cmpd="sng" algn="ctr">
+                      <a:solidFill>
+                        <a:schemeClr val="tx1"/>
+                      </a:solidFill>
+                      <a:prstDash val="solid"/>
+                      <a:round/>
+                      <a:headEnd type="none" w="med" len="med"/>
+                      <a:tailEnd type="none" w="med" len="med"/>
+                    </a:lnT>
+                    <a:lnB w="3175" cap="flat" cmpd="sng" algn="ctr">
+                      <a:solidFill>
+                        <a:schemeClr val="tx1"/>
+                      </a:solidFill>
+                      <a:prstDash val="solid"/>
+                      <a:round/>
+                      <a:headEnd type="none" w="med" len="med"/>
+                      <a:tailEnd type="none" w="med" len="med"/>
+                    </a:lnB>
+                    <a:solidFill>
+                      <a:schemeClr val="bg1"/>
+                    </a:solidFill>
+                  </a:tcPr>
+                </a:tc>
+                <a:extLst>
+                  <a:ext uri="{0D108BD9-81ED-4DB2-BD59-A6C34878D82A}">
+                    <a16:rowId xmlns:a16="http://schemas.microsoft.com/office/drawing/2014/main" val="3140773565"/>
+                  </a:ext>
+                </a:extLst>
+              </a:tr>
+              <a:tr h="370840">
+                <a:tc>
+                  <a:txBody>
+                    <a:bodyPr/>
+                    <a:lstStyle/>
+                    <a:p>
+                      <a:pPr algn="ctr"/>
+                      <a:r>
+                        <a:rPr lang="en-IN" sz="2000" b="1">
+                          <a:solidFill>
+                            <a:schemeClr val="tx1"/>
+                          </a:solidFill>
+                          <a:effectLst/>
+                          <a:latin typeface="Barlow" panose="00000500000000000000" pitchFamily="2" charset="0"/>
+                        </a:rPr>
+                        <a:t>Beta2</a:t>
+                      </a:r>
+                      <a:endParaRPr lang="en-IN" sz="2000">
+                        <a:solidFill>
+                          <a:schemeClr val="tx1"/>
+                        </a:solidFill>
+                        <a:effectLst/>
+                        <a:latin typeface="Barlow" panose="00000500000000000000" pitchFamily="2" charset="0"/>
+                      </a:endParaRPr>
+                    </a:p>
+                  </a:txBody>
+                  <a:tcPr anchor="ctr">
+                    <a:lnT w="3175" cap="flat" cmpd="sng" algn="ctr">
+                      <a:solidFill>
+                        <a:schemeClr val="tx1"/>
+                      </a:solidFill>
+                      <a:prstDash val="solid"/>
+                      <a:round/>
+                      <a:headEnd type="none" w="med" len="med"/>
+                      <a:tailEnd type="none" w="med" len="med"/>
+                    </a:lnT>
+                    <a:lnB w="3175" cap="flat" cmpd="sng" algn="ctr">
+                      <a:solidFill>
+                        <a:schemeClr val="tx1"/>
+                      </a:solidFill>
+                      <a:prstDash val="solid"/>
+                      <a:round/>
+                      <a:headEnd type="none" w="med" len="med"/>
+                      <a:tailEnd type="none" w="med" len="med"/>
+                    </a:lnB>
+                    <a:solidFill>
+                      <a:schemeClr val="bg1"/>
+                    </a:solidFill>
+                  </a:tcPr>
+                </a:tc>
+                <a:tc>
+                  <a:txBody>
+                    <a:bodyPr/>
+                    <a:lstStyle/>
+                    <a:p>
+                      <a:pPr algn="ctr"/>
+                      <a:r>
+                        <a:rPr lang="en-IN" sz="2000">
+                          <a:solidFill>
+                            <a:schemeClr val="tx1"/>
+                          </a:solidFill>
+                          <a:effectLst/>
+                          <a:latin typeface="Barlow" panose="00000500000000000000" pitchFamily="2" charset="0"/>
+                        </a:rPr>
+                        <a:t>0.999</a:t>
+                      </a:r>
+                    </a:p>
+                  </a:txBody>
+                  <a:tcPr anchor="ctr">
+                    <a:lnT w="3175" cap="flat" cmpd="sng" algn="ctr">
+                      <a:solidFill>
+                        <a:schemeClr val="tx1"/>
+                      </a:solidFill>
+                      <a:prstDash val="solid"/>
+                      <a:round/>
+                      <a:headEnd type="none" w="med" len="med"/>
+                      <a:tailEnd type="none" w="med" len="med"/>
+                    </a:lnT>
+                    <a:lnB w="3175" cap="flat" cmpd="sng" algn="ctr">
+                      <a:solidFill>
+                        <a:schemeClr val="tx1"/>
+                      </a:solidFill>
+                      <a:prstDash val="solid"/>
+                      <a:round/>
+                      <a:headEnd type="none" w="med" len="med"/>
+                      <a:tailEnd type="none" w="med" len="med"/>
+                    </a:lnB>
+                    <a:solidFill>
+                      <a:schemeClr val="bg1"/>
+                    </a:solidFill>
+                  </a:tcPr>
+                </a:tc>
+                <a:tc>
+                  <a:txBody>
+                    <a:bodyPr/>
+                    <a:lstStyle/>
+                    <a:p>
+                      <a:pPr algn="ctr"/>
+                      <a:r>
+                        <a:rPr lang="en-IN" sz="2000" dirty="0">
+                          <a:solidFill>
+                            <a:schemeClr val="tx1"/>
+                          </a:solidFill>
+                          <a:effectLst/>
+                          <a:latin typeface="Barlow" panose="00000500000000000000" pitchFamily="2" charset="0"/>
+                        </a:rPr>
+                        <a:t>0.99</a:t>
+                      </a:r>
+                    </a:p>
+                  </a:txBody>
+                  <a:tcPr anchor="ctr">
+                    <a:lnT w="3175" cap="flat" cmpd="sng" algn="ctr">
+                      <a:solidFill>
+                        <a:schemeClr val="tx1"/>
+                      </a:solidFill>
+                      <a:prstDash val="solid"/>
+                      <a:round/>
+                      <a:headEnd type="none" w="med" len="med"/>
+                      <a:tailEnd type="none" w="med" len="med"/>
+                    </a:lnT>
+                    <a:lnB w="3175" cap="flat" cmpd="sng" algn="ctr">
+                      <a:solidFill>
+                        <a:schemeClr val="tx1"/>
+                      </a:solidFill>
+                      <a:prstDash val="solid"/>
+                      <a:round/>
+                      <a:headEnd type="none" w="med" len="med"/>
+                      <a:tailEnd type="none" w="med" len="med"/>
+                    </a:lnB>
+                    <a:solidFill>
+                      <a:schemeClr val="bg1"/>
+                    </a:solidFill>
+                  </a:tcPr>
+                </a:tc>
+                <a:extLst>
+                  <a:ext uri="{0D108BD9-81ED-4DB2-BD59-A6C34878D82A}">
+                    <a16:rowId xmlns:a16="http://schemas.microsoft.com/office/drawing/2014/main" val="1699272285"/>
+                  </a:ext>
+                </a:extLst>
+              </a:tr>
+              <a:tr h="370840">
+                <a:tc>
+                  <a:txBody>
+                    <a:bodyPr/>
+                    <a:lstStyle/>
+                    <a:p>
+                      <a:pPr algn="ctr"/>
+                      <a:r>
+                        <a:rPr lang="en-IN" sz="2000" b="1">
+                          <a:solidFill>
+                            <a:schemeClr val="tx1"/>
+                          </a:solidFill>
+                          <a:effectLst/>
+                          <a:latin typeface="Barlow" panose="00000500000000000000" pitchFamily="2" charset="0"/>
+                        </a:rPr>
+                        <a:t>Scheduler</a:t>
+                      </a:r>
+                      <a:endParaRPr lang="en-IN" sz="2000">
+                        <a:solidFill>
+                          <a:schemeClr val="tx1"/>
+                        </a:solidFill>
+                        <a:effectLst/>
+                        <a:latin typeface="Barlow" panose="00000500000000000000" pitchFamily="2" charset="0"/>
+                      </a:endParaRPr>
+                    </a:p>
+                  </a:txBody>
+                  <a:tcPr anchor="ctr">
+                    <a:lnT w="3175" cap="flat" cmpd="sng" algn="ctr">
+                      <a:solidFill>
+                        <a:schemeClr val="tx1"/>
+                      </a:solidFill>
+                      <a:prstDash val="solid"/>
+                      <a:round/>
+                      <a:headEnd type="none" w="med" len="med"/>
+                      <a:tailEnd type="none" w="med" len="med"/>
+                    </a:lnT>
+                    <a:solidFill>
+                      <a:schemeClr val="bg1"/>
+                    </a:solidFill>
+                  </a:tcPr>
+                </a:tc>
+                <a:tc>
+                  <a:txBody>
+                    <a:bodyPr/>
+                    <a:lstStyle/>
+                    <a:p>
+                      <a:pPr algn="ctr"/>
+                      <a:r>
+                        <a:rPr lang="en-IN" sz="2000">
+                          <a:solidFill>
+                            <a:schemeClr val="tx1"/>
+                          </a:solidFill>
+                          <a:effectLst/>
+                          <a:latin typeface="Barlow" panose="00000500000000000000" pitchFamily="2" charset="0"/>
+                        </a:rPr>
+                        <a:t>Linear</a:t>
+                      </a:r>
+                    </a:p>
+                  </a:txBody>
+                  <a:tcPr anchor="ctr">
+                    <a:lnT w="3175" cap="flat" cmpd="sng" algn="ctr">
+                      <a:solidFill>
+                        <a:schemeClr val="tx1"/>
+                      </a:solidFill>
+                      <a:prstDash val="solid"/>
+                      <a:round/>
+                      <a:headEnd type="none" w="med" len="med"/>
+                      <a:tailEnd type="none" w="med" len="med"/>
+                    </a:lnT>
+                    <a:solidFill>
+                      <a:schemeClr val="bg1"/>
+                    </a:solidFill>
+                  </a:tcPr>
+                </a:tc>
+                <a:tc>
+                  <a:txBody>
+                    <a:bodyPr/>
+                    <a:lstStyle/>
+                    <a:p>
+                      <a:pPr algn="ctr"/>
+                      <a:r>
+                        <a:rPr lang="en-IN" sz="2000" dirty="0">
+                          <a:solidFill>
+                            <a:schemeClr val="tx1"/>
+                          </a:solidFill>
+                          <a:effectLst/>
+                          <a:latin typeface="Barlow" panose="00000500000000000000" pitchFamily="2" charset="0"/>
+                        </a:rPr>
+                        <a:t>Cosine Annealing (ModernBERT)</a:t>
+                      </a:r>
+                    </a:p>
+                  </a:txBody>
+                  <a:tcPr anchor="ctr">
+                    <a:lnT w="3175" cap="flat" cmpd="sng" algn="ctr">
+                      <a:solidFill>
+                        <a:schemeClr val="tx1"/>
+                      </a:solidFill>
+                      <a:prstDash val="solid"/>
+                      <a:round/>
+                      <a:headEnd type="none" w="med" len="med"/>
+                      <a:tailEnd type="none" w="med" len="med"/>
+                    </a:lnT>
+                    <a:solidFill>
+                      <a:schemeClr val="bg1"/>
+                    </a:solidFill>
+                  </a:tcPr>
+                </a:tc>
+                <a:extLst>
+                  <a:ext uri="{0D108BD9-81ED-4DB2-BD59-A6C34878D82A}">
+                    <a16:rowId xmlns:a16="http://schemas.microsoft.com/office/drawing/2014/main" val="3076199374"/>
+                  </a:ext>
+                </a:extLst>
+              </a:tr>
+            </a:tbl>
+          </a:graphicData>
+        </a:graphic>
+      </p:graphicFrame>
+    </p:spTree>
+    <p:extLst>
+      <p:ext uri="{BB962C8B-B14F-4D97-AF65-F5344CB8AC3E}">
+        <p14:creationId xmlns:p14="http://schemas.microsoft.com/office/powerpoint/2010/main" val="2134400949"/>
+      </p:ext>
+    </p:extLst>
+  </p:cSld>
+  <p:clrMapOvr>
+    <a:masterClrMapping/>
+  </p:clrMapOvr>
+</p:sld>
+</file>
+
+<file path=ppt/slides/slide12.xml><?xml version="1.0" encoding="utf-8"?>
+<p:sld xmlns:a="http://schemas.openxmlformats.org/drawingml/2006/main" xmlns:r="http://schemas.openxmlformats.org/officeDocument/2006/relationships" xmlns:p="http://schemas.openxmlformats.org/presentationml/2006/main">
+  <p:cSld>
+    <p:spTree>
+      <p:nvGrpSpPr>
         <p:cNvPr id="1" name=""/>
         <p:cNvGrpSpPr/>
         <p:nvPr/>
@@ -12478,7 +13255,7 @@
 </p:sld>
 </file>
 
-<file path=ppt/slides/slide12.xml><?xml version="1.0" encoding="utf-8"?>
+<file path=ppt/slides/slide13.xml><?xml version="1.0" encoding="utf-8"?>
 <p:sld xmlns:a="http://schemas.openxmlformats.org/drawingml/2006/main" xmlns:r="http://schemas.openxmlformats.org/officeDocument/2006/relationships" xmlns:p="http://schemas.openxmlformats.org/presentationml/2006/main">
   <p:cSld>
     <p:spTree>
@@ -14798,7 +15575,7 @@
 </p:sld>
 </file>
 
-<file path=ppt/slides/slide13.xml><?xml version="1.0" encoding="utf-8"?>
+<file path=ppt/slides/slide14.xml><?xml version="1.0" encoding="utf-8"?>
 <p:sld xmlns:a="http://schemas.openxmlformats.org/drawingml/2006/main" xmlns:r="http://schemas.openxmlformats.org/officeDocument/2006/relationships" xmlns:p="http://schemas.openxmlformats.org/presentationml/2006/main">
   <p:cSld>
     <p:spTree>
@@ -15067,7 +15844,7 @@
 </p:sld>
 </file>
 
-<file path=ppt/slides/slide14.xml><?xml version="1.0" encoding="utf-8"?>
+<file path=ppt/slides/slide15.xml><?xml version="1.0" encoding="utf-8"?>
 <p:sld xmlns:a="http://schemas.openxmlformats.org/drawingml/2006/main" xmlns:r="http://schemas.openxmlformats.org/officeDocument/2006/relationships" xmlns:p="http://schemas.openxmlformats.org/presentationml/2006/main">
   <p:cSld>
     <p:spTree>
@@ -15964,7 +16741,7 @@
 </p:sld>
 </file>
 
-<file path=ppt/slides/slide15.xml><?xml version="1.0" encoding="utf-8"?>
+<file path=ppt/slides/slide16.xml><?xml version="1.0" encoding="utf-8"?>
 <p:sld xmlns:a="http://schemas.openxmlformats.org/drawingml/2006/main" xmlns:r="http://schemas.openxmlformats.org/officeDocument/2006/relationships" xmlns:p="http://schemas.openxmlformats.org/presentationml/2006/main">
   <p:cSld>
     <p:spTree>
@@ -16154,7 +16931,7 @@
 </p:sld>
 </file>
 
-<file path=ppt/slides/slide16.xml><?xml version="1.0" encoding="utf-8"?>
+<file path=ppt/slides/slide17.xml><?xml version="1.0" encoding="utf-8"?>
 <p:sld xmlns:a="http://schemas.openxmlformats.org/drawingml/2006/main" xmlns:r="http://schemas.openxmlformats.org/officeDocument/2006/relationships" xmlns:p="http://schemas.openxmlformats.org/presentationml/2006/main">
   <p:cSld>
     <p:spTree>
@@ -16171,68 +16948,6 @@
           <a:chExt cx="0" cy="0"/>
         </a:xfrm>
       </p:grpSpPr>
-      <p:sp>
-        <p:nvSpPr>
-          <p:cNvPr id="3" name="TextBox 2">
-            <a:extLst>
-              <a:ext uri="{FF2B5EF4-FFF2-40B4-BE49-F238E27FC236}">
-                <a16:creationId xmlns:a16="http://schemas.microsoft.com/office/drawing/2014/main" id="{527240B3-8BFF-4F4A-AFA2-52E66F2680F1}"/>
-              </a:ext>
-            </a:extLst>
-          </p:cNvPr>
-          <p:cNvSpPr txBox="1"/>
-          <p:nvPr/>
-        </p:nvSpPr>
-        <p:spPr>
-          <a:xfrm>
-            <a:off x="7360032" y="311847"/>
-            <a:ext cx="4537679" cy="830997"/>
-          </a:xfrm>
-          <a:prstGeom prst="rect">
-            <a:avLst/>
-          </a:prstGeom>
-          <a:solidFill>
-            <a:schemeClr val="tx1"/>
-          </a:solidFill>
-          <a:effectLst>
-            <a:outerShdw blurRad="63500" sx="102000" sy="102000" algn="ctr" rotWithShape="0">
-              <a:prstClr val="black">
-                <a:alpha val="40000"/>
-              </a:prstClr>
-            </a:outerShdw>
-          </a:effectLst>
-        </p:spPr>
-        <p:style>
-          <a:lnRef idx="0">
-            <a:schemeClr val="accent2"/>
-          </a:lnRef>
-          <a:fillRef idx="3">
-            <a:schemeClr val="accent2"/>
-          </a:fillRef>
-          <a:effectRef idx="3">
-            <a:schemeClr val="accent2"/>
-          </a:effectRef>
-          <a:fontRef idx="minor">
-            <a:schemeClr val="lt1"/>
-          </a:fontRef>
-        </p:style>
-        <p:txBody>
-          <a:bodyPr wrap="square" rtlCol="0">
-            <a:spAutoFit/>
-          </a:bodyPr>
-          <a:lstStyle/>
-          <a:p>
-            <a:pPr algn="ctr"/>
-            <a:r>
-              <a:rPr lang="en-US" sz="1600" dirty="0">
-                <a:ea typeface="Tahoma" panose="020B0604030504040204" pitchFamily="34" charset="0"/>
-                <a:cs typeface="Tahoma" panose="020B0604030504040204" pitchFamily="34" charset="0"/>
-              </a:rPr>
-              <a:t>Tip: The thesis should be clear and bold.  Use powerful images as a background or an accent to strengthen the thesis statement.</a:t>
-            </a:r>
-          </a:p>
-        </p:txBody>
-      </p:sp>
       <p:sp>
         <p:nvSpPr>
           <p:cNvPr id="2" name="Title 1">
@@ -16255,8 +16970,10 @@
           <a:lstStyle/>
           <a:p>
             <a:r>
-              <a:rPr lang="en-US" sz="4000" dirty="0"/>
-              <a:t>[Type Thesis Statement Here]</a:t>
+              <a:rPr lang="en-US" sz="4000" dirty="0">
+                <a:latin typeface="Barlow ExtraBold" panose="00000900000000000000" pitchFamily="2" charset="0"/>
+              </a:rPr>
+              <a:t>THANK YOU</a:t>
             </a:r>
           </a:p>
         </p:txBody>
@@ -16265,166 +16982,6 @@
     <p:extLst>
       <p:ext uri="{BB962C8B-B14F-4D97-AF65-F5344CB8AC3E}">
         <p14:creationId xmlns:p14="http://schemas.microsoft.com/office/powerpoint/2010/main" val="3869094418"/>
-      </p:ext>
-    </p:extLst>
-  </p:cSld>
-  <p:clrMapOvr>
-    <a:masterClrMapping/>
-  </p:clrMapOvr>
-</p:sld>
-</file>
-
-<file path=ppt/slides/slide17.xml><?xml version="1.0" encoding="utf-8"?>
-<p:sld xmlns:a="http://schemas.openxmlformats.org/drawingml/2006/main" xmlns:r="http://schemas.openxmlformats.org/officeDocument/2006/relationships" xmlns:p="http://schemas.openxmlformats.org/presentationml/2006/main">
-  <p:cSld>
-    <p:spTree>
-      <p:nvGrpSpPr>
-        <p:cNvPr id="1" name=""/>
-        <p:cNvGrpSpPr/>
-        <p:nvPr/>
-      </p:nvGrpSpPr>
-      <p:grpSpPr>
-        <a:xfrm>
-          <a:off x="0" y="0"/>
-          <a:ext cx="0" cy="0"/>
-          <a:chOff x="0" y="0"/>
-          <a:chExt cx="0" cy="0"/>
-        </a:xfrm>
-      </p:grpSpPr>
-      <p:sp>
-        <p:nvSpPr>
-          <p:cNvPr id="5" name="Title 4">
-            <a:extLst>
-              <a:ext uri="{FF2B5EF4-FFF2-40B4-BE49-F238E27FC236}">
-                <a16:creationId xmlns:a16="http://schemas.microsoft.com/office/drawing/2014/main" id="{FDA7EC95-D971-4A86-9927-619CED5AB4B2}"/>
-              </a:ext>
-            </a:extLst>
-          </p:cNvPr>
-          <p:cNvSpPr>
-            <a:spLocks noGrp="1"/>
-          </p:cNvSpPr>
-          <p:nvPr>
-            <p:ph type="title"/>
-          </p:nvPr>
-        </p:nvSpPr>
-        <p:spPr>
-          <a:xfrm>
-            <a:off x="810000" y="4489884"/>
-            <a:ext cx="10561418" cy="1426004"/>
-          </a:xfrm>
-        </p:spPr>
-        <p:txBody>
-          <a:bodyPr/>
-          <a:lstStyle/>
-          <a:p>
-            <a:r>
-              <a:rPr lang="en-US" dirty="0"/>
-              <a:t>[Type The Action Step Here]</a:t>
-            </a:r>
-          </a:p>
-        </p:txBody>
-      </p:sp>
-      <p:sp>
-        <p:nvSpPr>
-          <p:cNvPr id="9" name="Content Placeholder 8">
-            <a:extLst>
-              <a:ext uri="{FF2B5EF4-FFF2-40B4-BE49-F238E27FC236}">
-                <a16:creationId xmlns:a16="http://schemas.microsoft.com/office/drawing/2014/main" id="{D7442235-8F25-4E4C-8750-8CC8C44313AD}"/>
-              </a:ext>
-            </a:extLst>
-          </p:cNvPr>
-          <p:cNvSpPr>
-            <a:spLocks noGrp="1"/>
-          </p:cNvSpPr>
-          <p:nvPr>
-            <p:ph sz="quarter" idx="14"/>
-          </p:nvPr>
-        </p:nvSpPr>
-        <p:spPr/>
-        <p:txBody>
-          <a:bodyPr/>
-          <a:lstStyle/>
-          <a:p>
-            <a:pPr marL="0" indent="0" algn="ctr">
-              <a:buFont typeface="Arial" panose="020B0604020202020204" pitchFamily="34" charset="0"/>
-              <a:buNone/>
-            </a:pPr>
-            <a:r>
-              <a:rPr lang="en-US" dirty="0">
-                <a:ea typeface="Tahoma" panose="020B0604030504040204" pitchFamily="34" charset="0"/>
-                <a:cs typeface="Tahoma" panose="020B0604030504040204" pitchFamily="34" charset="0"/>
-              </a:rPr>
-              <a:t>[Use this space to place an image that best captures the main idea of the action step]</a:t>
-            </a:r>
-          </a:p>
-        </p:txBody>
-      </p:sp>
-      <p:sp>
-        <p:nvSpPr>
-          <p:cNvPr id="7" name="TextBox 6">
-            <a:extLst>
-              <a:ext uri="{FF2B5EF4-FFF2-40B4-BE49-F238E27FC236}">
-                <a16:creationId xmlns:a16="http://schemas.microsoft.com/office/drawing/2014/main" id="{43264A76-ADAD-4DC9-84FD-71DFAFEE7A6F}"/>
-              </a:ext>
-            </a:extLst>
-          </p:cNvPr>
-          <p:cNvSpPr txBox="1"/>
-          <p:nvPr/>
-        </p:nvSpPr>
-        <p:spPr>
-          <a:xfrm>
-            <a:off x="8089900" y="186333"/>
-            <a:ext cx="3886200" cy="1077218"/>
-          </a:xfrm>
-          <a:prstGeom prst="rect">
-            <a:avLst/>
-          </a:prstGeom>
-          <a:solidFill>
-            <a:schemeClr val="tx1"/>
-          </a:solidFill>
-          <a:effectLst>
-            <a:outerShdw blurRad="63500" sx="102000" sy="102000" algn="ctr" rotWithShape="0">
-              <a:prstClr val="black">
-                <a:alpha val="40000"/>
-              </a:prstClr>
-            </a:outerShdw>
-          </a:effectLst>
-        </p:spPr>
-        <p:style>
-          <a:lnRef idx="0">
-            <a:schemeClr val="accent2"/>
-          </a:lnRef>
-          <a:fillRef idx="3">
-            <a:schemeClr val="accent2"/>
-          </a:fillRef>
-          <a:effectRef idx="3">
-            <a:schemeClr val="accent2"/>
-          </a:effectRef>
-          <a:fontRef idx="minor">
-            <a:schemeClr val="lt1"/>
-          </a:fontRef>
-        </p:style>
-        <p:txBody>
-          <a:bodyPr wrap="square" rtlCol="0">
-            <a:spAutoFit/>
-          </a:bodyPr>
-          <a:lstStyle/>
-          <a:p>
-            <a:pPr algn="ctr"/>
-            <a:r>
-              <a:rPr lang="en-US" sz="1600" dirty="0">
-                <a:ea typeface="Tahoma" panose="020B0604030504040204" pitchFamily="34" charset="0"/>
-                <a:cs typeface="Tahoma" panose="020B0604030504040204" pitchFamily="34" charset="0"/>
-              </a:rPr>
-              <a:t>Tip: If time and format permits it may be a good idea to add another slide for questions.  It may be as simple as a title that states “Questions?”</a:t>
-            </a:r>
-          </a:p>
-        </p:txBody>
-      </p:sp>
-    </p:spTree>
-    <p:extLst>
-      <p:ext uri="{BB962C8B-B14F-4D97-AF65-F5344CB8AC3E}">
-        <p14:creationId xmlns:p14="http://schemas.microsoft.com/office/powerpoint/2010/main" val="1980296533"/>
       </p:ext>
     </p:extLst>
   </p:cSld>
@@ -17152,14 +17709,14 @@
           <p:nvPr>
             <p:extLst>
               <p:ext uri="{D42A27DB-BD31-4B8C-83A1-F6EECF244321}">
-                <p14:modId xmlns:p14="http://schemas.microsoft.com/office/powerpoint/2010/main" val="3009779045"/>
+                <p14:modId xmlns:p14="http://schemas.microsoft.com/office/powerpoint/2010/main" val="2952616321"/>
               </p:ext>
             </p:extLst>
           </p:nvPr>
         </p:nvGraphicFramePr>
         <p:xfrm>
           <a:off x="782704" y="1812991"/>
-          <a:ext cx="10215263" cy="2473960"/>
+          <a:ext cx="10629934" cy="2621280"/>
         </p:xfrm>
         <a:graphic>
           <a:graphicData uri="http://schemas.openxmlformats.org/drawingml/2006/table">
@@ -17168,28 +17725,28 @@
                 <a:tableStyleId>{69C7853C-536D-4A76-A0AE-DD22124D55A5}</a:tableStyleId>
               </a:tblPr>
               <a:tblGrid>
-                <a:gridCol w="2196235">
+                <a:gridCol w="2285387">
                   <a:extLst>
                     <a:ext uri="{9D8B030D-6E8A-4147-A177-3AD203B41FA5}">
                       <a16:colId xmlns:a16="http://schemas.microsoft.com/office/drawing/2014/main" val="902513758"/>
                     </a:ext>
                   </a:extLst>
                 </a:gridCol>
-                <a:gridCol w="2196235">
+                <a:gridCol w="2285387">
                   <a:extLst>
                     <a:ext uri="{9D8B030D-6E8A-4147-A177-3AD203B41FA5}">
                       <a16:colId xmlns:a16="http://schemas.microsoft.com/office/drawing/2014/main" val="2836376390"/>
                     </a:ext>
                   </a:extLst>
                 </a:gridCol>
-                <a:gridCol w="2123248">
+                <a:gridCol w="2209438">
                   <a:extLst>
                     <a:ext uri="{9D8B030D-6E8A-4147-A177-3AD203B41FA5}">
                       <a16:colId xmlns:a16="http://schemas.microsoft.com/office/drawing/2014/main" val="4239693166"/>
                     </a:ext>
                   </a:extLst>
                 </a:gridCol>
-                <a:gridCol w="3699545">
+                <a:gridCol w="3849722">
                   <a:extLst>
                     <a:ext uri="{9D8B030D-6E8A-4147-A177-3AD203B41FA5}">
                       <a16:colId xmlns:a16="http://schemas.microsoft.com/office/drawing/2014/main" val="856259958"/>
@@ -17212,6 +17769,7 @@
                               </a:prstClr>
                             </a:outerShdw>
                           </a:effectLst>
+                          <a:latin typeface="Barlow Medium" panose="00000600000000000000" pitchFamily="2" charset="0"/>
                         </a:rPr>
                         <a:t>Model</a:t>
                       </a:r>
@@ -17223,6 +17781,7 @@
                             </a:prstClr>
                           </a:outerShdw>
                         </a:effectLst>
+                        <a:latin typeface="Barlow Medium" panose="00000600000000000000" pitchFamily="2" charset="0"/>
                       </a:endParaRPr>
                     </a:p>
                   </a:txBody>
@@ -17247,6 +17806,7 @@
                               </a:prstClr>
                             </a:outerShdw>
                           </a:effectLst>
+                          <a:latin typeface="Barlow Medium" panose="00000600000000000000" pitchFamily="2" charset="0"/>
                         </a:rPr>
                         <a:t>Parameters</a:t>
                       </a:r>
@@ -17258,6 +17818,7 @@
                             </a:prstClr>
                           </a:outerShdw>
                         </a:effectLst>
+                        <a:latin typeface="Barlow Medium" panose="00000600000000000000" pitchFamily="2" charset="0"/>
                       </a:endParaRPr>
                     </a:p>
                   </a:txBody>
@@ -17282,6 +17843,7 @@
                               </a:prstClr>
                             </a:outerShdw>
                           </a:effectLst>
+                          <a:latin typeface="Barlow Medium" panose="00000600000000000000" pitchFamily="2" charset="0"/>
                         </a:rPr>
                         <a:t>Context Length</a:t>
                       </a:r>
@@ -17293,6 +17855,7 @@
                             </a:prstClr>
                           </a:outerShdw>
                         </a:effectLst>
+                        <a:latin typeface="Barlow Medium" panose="00000600000000000000" pitchFamily="2" charset="0"/>
                       </a:endParaRPr>
                     </a:p>
                   </a:txBody>
@@ -17317,6 +17880,7 @@
                               </a:prstClr>
                             </a:outerShdw>
                           </a:effectLst>
+                          <a:latin typeface="Barlow Medium" panose="00000600000000000000" pitchFamily="2" charset="0"/>
                         </a:rPr>
                         <a:t>Key Features</a:t>
                       </a:r>
@@ -17328,6 +17892,7 @@
                             </a:prstClr>
                           </a:outerShdw>
                         </a:effectLst>
+                        <a:latin typeface="Barlow Medium" panose="00000600000000000000" pitchFamily="2" charset="0"/>
                       </a:endParaRPr>
                     </a:p>
                   </a:txBody>
@@ -17352,13 +17917,15 @@
                     <a:p>
                       <a:pPr algn="l"/>
                       <a:r>
-                        <a:rPr lang="en-IN" b="1" dirty="0">
+                        <a:rPr lang="en-IN" sz="2000" b="1" dirty="0">
                           <a:effectLst/>
+                          <a:latin typeface="Barlow" panose="00000500000000000000" pitchFamily="2" charset="0"/>
                         </a:rPr>
                         <a:t>MiniLM-L12-H384</a:t>
                       </a:r>
-                      <a:endParaRPr lang="en-IN" dirty="0">
+                      <a:endParaRPr lang="en-IN" sz="2000" dirty="0">
                         <a:effectLst/>
+                        <a:latin typeface="Barlow" panose="00000500000000000000" pitchFamily="2" charset="0"/>
                       </a:endParaRPr>
                     </a:p>
                   </a:txBody>
@@ -17399,8 +17966,9 @@
                     <a:p>
                       <a:pPr algn="l"/>
                       <a:r>
-                        <a:rPr lang="en-IN" dirty="0">
+                        <a:rPr lang="en-IN" sz="2000" dirty="0">
                           <a:effectLst/>
+                          <a:latin typeface="Barlow" panose="00000500000000000000" pitchFamily="2" charset="0"/>
                         </a:rPr>
                         <a:t>~33M</a:t>
                       </a:r>
@@ -17443,8 +18011,9 @@
                     <a:p>
                       <a:pPr algn="l"/>
                       <a:r>
-                        <a:rPr lang="en-IN">
+                        <a:rPr lang="en-IN" sz="2000" dirty="0">
                           <a:effectLst/>
+                          <a:latin typeface="Barlow" panose="00000500000000000000" pitchFamily="2" charset="0"/>
                         </a:rPr>
                         <a:t>512 tokens</a:t>
                       </a:r>
@@ -17487,8 +18056,9 @@
                     <a:p>
                       <a:pPr algn="l"/>
                       <a:r>
-                        <a:rPr lang="en-IN" dirty="0">
+                        <a:rPr lang="en-IN" sz="2000" dirty="0">
                           <a:effectLst/>
+                          <a:latin typeface="Barlow" panose="00000500000000000000" pitchFamily="2" charset="0"/>
                         </a:rPr>
                         <a:t>Efficient baseline, knowledge distillation</a:t>
                       </a:r>
@@ -17538,13 +18108,15 @@
                     <a:p>
                       <a:pPr algn="l"/>
                       <a:r>
-                        <a:rPr lang="en-IN" b="1">
+                        <a:rPr lang="en-IN" sz="2000" b="1">
                           <a:effectLst/>
+                          <a:latin typeface="Barlow" panose="00000500000000000000" pitchFamily="2" charset="0"/>
                         </a:rPr>
                         <a:t>GTE-multilingual-base</a:t>
                       </a:r>
-                      <a:endParaRPr lang="en-IN">
+                      <a:endParaRPr lang="en-IN" sz="2000">
                         <a:effectLst/>
+                        <a:latin typeface="Barlow" panose="00000500000000000000" pitchFamily="2" charset="0"/>
                       </a:endParaRPr>
                     </a:p>
                   </a:txBody>
@@ -17585,8 +18157,9 @@
                     <a:p>
                       <a:pPr algn="l"/>
                       <a:r>
-                        <a:rPr lang="en-IN" dirty="0">
+                        <a:rPr lang="en-IN" sz="2000" dirty="0">
                           <a:effectLst/>
+                          <a:latin typeface="Barlow" panose="00000500000000000000" pitchFamily="2" charset="0"/>
                         </a:rPr>
                         <a:t>~305M</a:t>
                       </a:r>
@@ -17629,8 +18202,9 @@
                     <a:p>
                       <a:pPr algn="l"/>
                       <a:r>
-                        <a:rPr lang="en-IN" dirty="0">
+                        <a:rPr lang="en-IN" sz="2000" dirty="0">
                           <a:effectLst/>
+                          <a:latin typeface="Barlow" panose="00000500000000000000" pitchFamily="2" charset="0"/>
                         </a:rPr>
                         <a:t>8192 tokens</a:t>
                       </a:r>
@@ -17673,8 +18247,9 @@
                     <a:p>
                       <a:pPr algn="l"/>
                       <a:r>
-                        <a:rPr lang="en-IN" dirty="0">
+                        <a:rPr lang="en-IN" sz="2000" dirty="0">
                           <a:effectLst/>
+                          <a:latin typeface="Barlow" panose="00000500000000000000" pitchFamily="2" charset="0"/>
                         </a:rPr>
                         <a:t>Extended context, multilingual support</a:t>
                       </a:r>
@@ -17724,13 +18299,15 @@
                     <a:p>
                       <a:pPr algn="l"/>
                       <a:r>
-                        <a:rPr lang="en-IN" b="1">
+                        <a:rPr lang="en-IN" sz="2000" b="1">
                           <a:effectLst/>
+                          <a:latin typeface="Barlow" panose="00000500000000000000" pitchFamily="2" charset="0"/>
                         </a:rPr>
                         <a:t>ModernBERT-base</a:t>
                       </a:r>
-                      <a:endParaRPr lang="en-IN">
+                      <a:endParaRPr lang="en-IN" sz="2000">
                         <a:effectLst/>
+                        <a:latin typeface="Barlow" panose="00000500000000000000" pitchFamily="2" charset="0"/>
                       </a:endParaRPr>
                     </a:p>
                   </a:txBody>
@@ -17771,8 +18348,9 @@
                     <a:p>
                       <a:pPr algn="l"/>
                       <a:r>
-                        <a:rPr lang="en-IN">
+                        <a:rPr lang="en-IN" sz="2000">
                           <a:effectLst/>
+                          <a:latin typeface="Barlow" panose="00000500000000000000" pitchFamily="2" charset="0"/>
                         </a:rPr>
                         <a:t>~149M</a:t>
                       </a:r>
@@ -17815,8 +18393,9 @@
                     <a:p>
                       <a:pPr algn="l"/>
                       <a:r>
-                        <a:rPr lang="en-IN" dirty="0">
+                        <a:rPr lang="en-IN" sz="2000" dirty="0">
                           <a:effectLst/>
+                          <a:latin typeface="Barlow" panose="00000500000000000000" pitchFamily="2" charset="0"/>
                         </a:rPr>
                         <a:t>8192 tokens</a:t>
                       </a:r>
@@ -17859,8 +18438,9 @@
                     <a:p>
                       <a:pPr algn="l"/>
                       <a:r>
-                        <a:rPr lang="en-IN" dirty="0">
+                        <a:rPr lang="en-IN" sz="2000" dirty="0">
                           <a:effectLst/>
+                          <a:latin typeface="Barlow" panose="00000500000000000000" pitchFamily="2" charset="0"/>
                         </a:rPr>
                         <a:t>RoPE, Flash Attention, GeGLU</a:t>
                       </a:r>

--- a/cross_encoder/thesis/Thesis_presentation.pptx
+++ b/cross_encoder/thesis/Thesis_presentation.pptx
@@ -5,29 +5,40 @@
     <p:sldMasterId id="2147483672" r:id="rId4"/>
   </p:sldMasterIdLst>
   <p:notesMasterIdLst>
-    <p:notesMasterId r:id="rId22"/>
+    <p:notesMasterId r:id="rId33"/>
   </p:notesMasterIdLst>
   <p:handoutMasterIdLst>
-    <p:handoutMasterId r:id="rId23"/>
+    <p:handoutMasterId r:id="rId34"/>
   </p:handoutMasterIdLst>
   <p:sldIdLst>
     <p:sldId id="256" r:id="rId5"/>
-    <p:sldId id="257" r:id="rId6"/>
-    <p:sldId id="261" r:id="rId7"/>
-    <p:sldId id="263" r:id="rId8"/>
-    <p:sldId id="264" r:id="rId9"/>
-    <p:sldId id="267" r:id="rId10"/>
-    <p:sldId id="270" r:id="rId11"/>
-    <p:sldId id="271" r:id="rId12"/>
-    <p:sldId id="273" r:id="rId13"/>
-    <p:sldId id="272" r:id="rId14"/>
-    <p:sldId id="279" r:id="rId15"/>
-    <p:sldId id="275" r:id="rId16"/>
-    <p:sldId id="276" r:id="rId17"/>
-    <p:sldId id="277" r:id="rId18"/>
-    <p:sldId id="278" r:id="rId19"/>
-    <p:sldId id="269" r:id="rId20"/>
-    <p:sldId id="259" r:id="rId21"/>
+    <p:sldId id="259" r:id="rId6"/>
+    <p:sldId id="257" r:id="rId7"/>
+    <p:sldId id="261" r:id="rId8"/>
+    <p:sldId id="286" r:id="rId9"/>
+    <p:sldId id="281" r:id="rId10"/>
+    <p:sldId id="263" r:id="rId11"/>
+    <p:sldId id="282" r:id="rId12"/>
+    <p:sldId id="267" r:id="rId13"/>
+    <p:sldId id="283" r:id="rId14"/>
+    <p:sldId id="270" r:id="rId15"/>
+    <p:sldId id="287" r:id="rId16"/>
+    <p:sldId id="272" r:id="rId17"/>
+    <p:sldId id="264" r:id="rId18"/>
+    <p:sldId id="279" r:id="rId19"/>
+    <p:sldId id="271" r:id="rId20"/>
+    <p:sldId id="273" r:id="rId21"/>
+    <p:sldId id="288" r:id="rId22"/>
+    <p:sldId id="275" r:id="rId23"/>
+    <p:sldId id="276" r:id="rId24"/>
+    <p:sldId id="277" r:id="rId25"/>
+    <p:sldId id="278" r:id="rId26"/>
+    <p:sldId id="289" r:id="rId27"/>
+    <p:sldId id="269" r:id="rId28"/>
+    <p:sldId id="290" r:id="rId29"/>
+    <p:sldId id="291" r:id="rId30"/>
+    <p:sldId id="292" r:id="rId31"/>
+    <p:sldId id="284" r:id="rId32"/>
   </p:sldIdLst>
   <p:sldSz cx="12192000" cy="6858000"/>
   <p:notesSz cx="6858000" cy="9144000"/>
@@ -231,7 +242,7 @@
           <a:p>
             <a:fld id="{8E836F02-AF67-416B-AB85-08CFF698F86D}" type="datetimeFigureOut">
               <a:rPr lang="en-US" smtClean="0"/>
-              <a:t>6/19/2025</a:t>
+              <a:t>6/21/2025</a:t>
             </a:fld>
             <a:endParaRPr lang="en-US" dirty="0"/>
           </a:p>
@@ -408,7 +419,7 @@
           <a:p>
             <a:fld id="{45B7E8F0-931C-4E43-98D1-A3CD0E0034DC}" type="datetimeFigureOut">
               <a:rPr lang="en-US" smtClean="0"/>
-              <a:t>6/19/2025</a:t>
+              <a:t>6/21/2025</a:t>
             </a:fld>
             <a:endParaRPr lang="en-US" dirty="0"/>
           </a:p>
@@ -777,6 +788,701 @@
 </p:notes>
 </file>
 
+<file path=ppt/notesSlides/notesSlide10.xml><?xml version="1.0" encoding="utf-8"?>
+<p:notes xmlns:a="http://schemas.openxmlformats.org/drawingml/2006/main" xmlns:r="http://schemas.openxmlformats.org/officeDocument/2006/relationships" xmlns:p="http://schemas.openxmlformats.org/presentationml/2006/main">
+  <p:cSld>
+    <p:spTree>
+      <p:nvGrpSpPr>
+        <p:cNvPr id="1" name=""/>
+        <p:cNvGrpSpPr/>
+        <p:nvPr/>
+      </p:nvGrpSpPr>
+      <p:grpSpPr>
+        <a:xfrm>
+          <a:off x="0" y="0"/>
+          <a:ext cx="0" cy="0"/>
+          <a:chOff x="0" y="0"/>
+          <a:chExt cx="0" cy="0"/>
+        </a:xfrm>
+      </p:grpSpPr>
+      <p:sp>
+        <p:nvSpPr>
+          <p:cNvPr id="2" name="Slide Image Placeholder 1"/>
+          <p:cNvSpPr>
+            <a:spLocks noGrp="1" noRot="1" noChangeAspect="1"/>
+          </p:cNvSpPr>
+          <p:nvPr>
+            <p:ph type="sldImg"/>
+          </p:nvPr>
+        </p:nvSpPr>
+        <p:spPr/>
+      </p:sp>
+      <p:sp>
+        <p:nvSpPr>
+          <p:cNvPr id="3" name="Notes Placeholder 2"/>
+          <p:cNvSpPr>
+            <a:spLocks noGrp="1"/>
+          </p:cNvSpPr>
+          <p:nvPr>
+            <p:ph type="body" idx="1"/>
+          </p:nvPr>
+        </p:nvSpPr>
+        <p:spPr/>
+        <p:txBody>
+          <a:bodyPr/>
+          <a:lstStyle/>
+          <a:p>
+            <a:r>
+              <a:rPr lang="en-US" dirty="0"/>
+              <a:t>The title of main point #3 should be clear and concise.  Each piece of evidence should be summarized for clarity and cited correctly.  Do not simply read the pieces of evidence, but elaborate where needed.  </a:t>
+            </a:r>
+          </a:p>
+          <a:p>
+            <a:pPr marL="0" marR="0" lvl="0" indent="0" algn="l" defTabSz="914400" rtl="0" eaLnBrk="1" fontAlgn="auto" latinLnBrk="0" hangingPunct="1">
+              <a:lnSpc>
+                <a:spcPct val="100000"/>
+              </a:lnSpc>
+              <a:spcBef>
+                <a:spcPts val="0"/>
+              </a:spcBef>
+              <a:spcAft>
+                <a:spcPts val="0"/>
+              </a:spcAft>
+              <a:buClrTx/>
+              <a:buSzTx/>
+              <a:buFontTx/>
+              <a:buNone/>
+              <a:tabLst/>
+              <a:defRPr/>
+            </a:pPr>
+            <a:r>
+              <a:rPr lang="en-US" dirty="0"/>
+              <a:t>[type notes for elaboration here]</a:t>
+            </a:r>
+          </a:p>
+          <a:p>
+            <a:r>
+              <a:rPr lang="en-US" dirty="0"/>
+              <a:t>Be sure to transition to the counterargument and the next slide.</a:t>
+            </a:r>
+          </a:p>
+          <a:p>
+            <a:endParaRPr lang="en-US" dirty="0"/>
+          </a:p>
+        </p:txBody>
+      </p:sp>
+      <p:sp>
+        <p:nvSpPr>
+          <p:cNvPr id="4" name="Slide Number Placeholder 3"/>
+          <p:cNvSpPr>
+            <a:spLocks noGrp="1"/>
+          </p:cNvSpPr>
+          <p:nvPr>
+            <p:ph type="sldNum" sz="quarter" idx="10"/>
+          </p:nvPr>
+        </p:nvSpPr>
+        <p:spPr/>
+        <p:txBody>
+          <a:bodyPr/>
+          <a:lstStyle/>
+          <a:p>
+            <a:fld id="{E6AEB063-7F11-4E3B-BA52-07405B1C2D95}" type="slidenum">
+              <a:rPr lang="en-US" smtClean="0"/>
+              <a:t>14</a:t>
+            </a:fld>
+            <a:endParaRPr lang="en-US" dirty="0"/>
+          </a:p>
+        </p:txBody>
+      </p:sp>
+    </p:spTree>
+    <p:extLst>
+      <p:ext uri="{BB962C8B-B14F-4D97-AF65-F5344CB8AC3E}">
+        <p14:creationId xmlns:p14="http://schemas.microsoft.com/office/powerpoint/2010/main" val="418214217"/>
+      </p:ext>
+    </p:extLst>
+  </p:cSld>
+  <p:clrMapOvr>
+    <a:masterClrMapping/>
+  </p:clrMapOvr>
+</p:notes>
+</file>
+
+<file path=ppt/notesSlides/notesSlide11.xml><?xml version="1.0" encoding="utf-8"?>
+<p:notes xmlns:a="http://schemas.openxmlformats.org/drawingml/2006/main" xmlns:r="http://schemas.openxmlformats.org/officeDocument/2006/relationships" xmlns:p="http://schemas.openxmlformats.org/presentationml/2006/main">
+  <p:cSld>
+    <p:spTree>
+      <p:nvGrpSpPr>
+        <p:cNvPr id="1" name="">
+          <a:extLst>
+            <a:ext uri="{FF2B5EF4-FFF2-40B4-BE49-F238E27FC236}">
+              <a16:creationId xmlns:a16="http://schemas.microsoft.com/office/drawing/2014/main" id="{CC781082-DB30-3988-0A75-589CE729FF6F}"/>
+            </a:ext>
+          </a:extLst>
+        </p:cNvPr>
+        <p:cNvGrpSpPr/>
+        <p:nvPr/>
+      </p:nvGrpSpPr>
+      <p:grpSpPr>
+        <a:xfrm>
+          <a:off x="0" y="0"/>
+          <a:ext cx="0" cy="0"/>
+          <a:chOff x="0" y="0"/>
+          <a:chExt cx="0" cy="0"/>
+        </a:xfrm>
+      </p:grpSpPr>
+      <p:sp>
+        <p:nvSpPr>
+          <p:cNvPr id="2" name="Slide Image Placeholder 1">
+            <a:extLst>
+              <a:ext uri="{FF2B5EF4-FFF2-40B4-BE49-F238E27FC236}">
+                <a16:creationId xmlns:a16="http://schemas.microsoft.com/office/drawing/2014/main" id="{D8650740-EE7A-B904-DF75-68F14BD764BC}"/>
+              </a:ext>
+            </a:extLst>
+          </p:cNvPr>
+          <p:cNvSpPr>
+            <a:spLocks noGrp="1" noRot="1" noChangeAspect="1"/>
+          </p:cNvSpPr>
+          <p:nvPr>
+            <p:ph type="sldImg"/>
+          </p:nvPr>
+        </p:nvSpPr>
+        <p:spPr/>
+      </p:sp>
+      <p:sp>
+        <p:nvSpPr>
+          <p:cNvPr id="3" name="Notes Placeholder 2">
+            <a:extLst>
+              <a:ext uri="{FF2B5EF4-FFF2-40B4-BE49-F238E27FC236}">
+                <a16:creationId xmlns:a16="http://schemas.microsoft.com/office/drawing/2014/main" id="{728A42C5-80E8-6F31-5C5D-AB56F2C1212E}"/>
+              </a:ext>
+            </a:extLst>
+          </p:cNvPr>
+          <p:cNvSpPr>
+            <a:spLocks noGrp="1"/>
+          </p:cNvSpPr>
+          <p:nvPr>
+            <p:ph type="body" idx="1"/>
+          </p:nvPr>
+        </p:nvSpPr>
+        <p:spPr/>
+        <p:txBody>
+          <a:bodyPr/>
+          <a:lstStyle/>
+          <a:p>
+            <a:r>
+              <a:rPr lang="en-US" dirty="0">
+                <a:latin typeface="Century Gothic" panose="020B0502020202020204" pitchFamily="34" charset="0"/>
+                <a:ea typeface="Tahoma" panose="020B0604030504040204" pitchFamily="34" charset="0"/>
+                <a:cs typeface="Tahoma" panose="020B0604030504040204" pitchFamily="34" charset="0"/>
+              </a:rPr>
+              <a:t>Dedicate this entire slide to the thesis statement.  It is the reason the speech is being given.  Use this time to reveal the three main points of the speech (slides 4,5,6) as an overview for the direction of the speech:</a:t>
+            </a:r>
+          </a:p>
+          <a:p>
+            <a:r>
+              <a:rPr lang="en-US" dirty="0">
+                <a:latin typeface="Century Gothic" panose="020B0502020202020204" pitchFamily="34" charset="0"/>
+                <a:ea typeface="Tahoma" panose="020B0604030504040204" pitchFamily="34" charset="0"/>
+                <a:cs typeface="Tahoma" panose="020B0604030504040204" pitchFamily="34" charset="0"/>
+              </a:rPr>
+              <a:t>-[type main point #1 here]</a:t>
+            </a:r>
+          </a:p>
+          <a:p>
+            <a:pPr marL="0" marR="0" lvl="0" indent="0" algn="l" defTabSz="914400" rtl="0" eaLnBrk="1" fontAlgn="auto" latinLnBrk="0" hangingPunct="1">
+              <a:lnSpc>
+                <a:spcPct val="100000"/>
+              </a:lnSpc>
+              <a:spcBef>
+                <a:spcPts val="0"/>
+              </a:spcBef>
+              <a:spcAft>
+                <a:spcPts val="0"/>
+              </a:spcAft>
+              <a:buClrTx/>
+              <a:buSzTx/>
+              <a:buFontTx/>
+              <a:buNone/>
+              <a:tabLst/>
+              <a:defRPr/>
+            </a:pPr>
+            <a:r>
+              <a:rPr lang="en-US" dirty="0">
+                <a:latin typeface="Century Gothic" panose="020B0502020202020204" pitchFamily="34" charset="0"/>
+                <a:ea typeface="Tahoma" panose="020B0604030504040204" pitchFamily="34" charset="0"/>
+                <a:cs typeface="Tahoma" panose="020B0604030504040204" pitchFamily="34" charset="0"/>
+              </a:rPr>
+              <a:t>-[type main point #2 here]</a:t>
+            </a:r>
+          </a:p>
+          <a:p>
+            <a:pPr marL="0" marR="0" lvl="0" indent="0" algn="l" defTabSz="914400" rtl="0" eaLnBrk="1" fontAlgn="auto" latinLnBrk="0" hangingPunct="1">
+              <a:lnSpc>
+                <a:spcPct val="100000"/>
+              </a:lnSpc>
+              <a:spcBef>
+                <a:spcPts val="0"/>
+              </a:spcBef>
+              <a:spcAft>
+                <a:spcPts val="0"/>
+              </a:spcAft>
+              <a:buClrTx/>
+              <a:buSzTx/>
+              <a:buFontTx/>
+              <a:buNone/>
+              <a:tabLst/>
+              <a:defRPr/>
+            </a:pPr>
+            <a:r>
+              <a:rPr lang="en-US" dirty="0">
+                <a:latin typeface="Century Gothic" panose="020B0502020202020204" pitchFamily="34" charset="0"/>
+                <a:ea typeface="Tahoma" panose="020B0604030504040204" pitchFamily="34" charset="0"/>
+                <a:cs typeface="Tahoma" panose="020B0604030504040204" pitchFamily="34" charset="0"/>
+              </a:rPr>
+              <a:t>-[type main point #3 here]</a:t>
+            </a:r>
+          </a:p>
+          <a:p>
+            <a:r>
+              <a:rPr lang="en-US" dirty="0">
+                <a:latin typeface="Century Gothic" panose="020B0502020202020204" pitchFamily="34" charset="0"/>
+                <a:ea typeface="Tahoma" panose="020B0604030504040204" pitchFamily="34" charset="0"/>
+                <a:cs typeface="Tahoma" panose="020B0604030504040204" pitchFamily="34" charset="0"/>
+              </a:rPr>
+              <a:t>Be sure to transition to the first main point and the next slide.</a:t>
+            </a:r>
+          </a:p>
+          <a:p>
+            <a:endParaRPr lang="en-US" dirty="0"/>
+          </a:p>
+        </p:txBody>
+      </p:sp>
+      <p:sp>
+        <p:nvSpPr>
+          <p:cNvPr id="4" name="Slide Number Placeholder 3">
+            <a:extLst>
+              <a:ext uri="{FF2B5EF4-FFF2-40B4-BE49-F238E27FC236}">
+                <a16:creationId xmlns:a16="http://schemas.microsoft.com/office/drawing/2014/main" id="{2D02C9FB-5257-B378-0FAC-6275695347E8}"/>
+              </a:ext>
+            </a:extLst>
+          </p:cNvPr>
+          <p:cNvSpPr>
+            <a:spLocks noGrp="1"/>
+          </p:cNvSpPr>
+          <p:nvPr>
+            <p:ph type="sldNum" sz="quarter" idx="10"/>
+          </p:nvPr>
+        </p:nvSpPr>
+        <p:spPr/>
+        <p:txBody>
+          <a:bodyPr/>
+          <a:lstStyle/>
+          <a:p>
+            <a:fld id="{E6AEB063-7F11-4E3B-BA52-07405B1C2D95}" type="slidenum">
+              <a:rPr lang="en-US" smtClean="0"/>
+              <a:t>18</a:t>
+            </a:fld>
+            <a:endParaRPr lang="en-US" dirty="0"/>
+          </a:p>
+        </p:txBody>
+      </p:sp>
+    </p:spTree>
+    <p:extLst>
+      <p:ext uri="{BB962C8B-B14F-4D97-AF65-F5344CB8AC3E}">
+        <p14:creationId xmlns:p14="http://schemas.microsoft.com/office/powerpoint/2010/main" val="2574524419"/>
+      </p:ext>
+    </p:extLst>
+  </p:cSld>
+  <p:clrMapOvr>
+    <a:masterClrMapping/>
+  </p:clrMapOvr>
+</p:notes>
+</file>
+
+<file path=ppt/notesSlides/notesSlide12.xml><?xml version="1.0" encoding="utf-8"?>
+<p:notes xmlns:a="http://schemas.openxmlformats.org/drawingml/2006/main" xmlns:r="http://schemas.openxmlformats.org/officeDocument/2006/relationships" xmlns:p="http://schemas.openxmlformats.org/presentationml/2006/main">
+  <p:cSld>
+    <p:spTree>
+      <p:nvGrpSpPr>
+        <p:cNvPr id="1" name="">
+          <a:extLst>
+            <a:ext uri="{FF2B5EF4-FFF2-40B4-BE49-F238E27FC236}">
+              <a16:creationId xmlns:a16="http://schemas.microsoft.com/office/drawing/2014/main" id="{0981E342-2DD0-BA83-6201-2C8C815DA8F0}"/>
+            </a:ext>
+          </a:extLst>
+        </p:cNvPr>
+        <p:cNvGrpSpPr/>
+        <p:nvPr/>
+      </p:nvGrpSpPr>
+      <p:grpSpPr>
+        <a:xfrm>
+          <a:off x="0" y="0"/>
+          <a:ext cx="0" cy="0"/>
+          <a:chOff x="0" y="0"/>
+          <a:chExt cx="0" cy="0"/>
+        </a:xfrm>
+      </p:grpSpPr>
+      <p:sp>
+        <p:nvSpPr>
+          <p:cNvPr id="2" name="Slide Image Placeholder 1">
+            <a:extLst>
+              <a:ext uri="{FF2B5EF4-FFF2-40B4-BE49-F238E27FC236}">
+                <a16:creationId xmlns:a16="http://schemas.microsoft.com/office/drawing/2014/main" id="{18D52E9F-E64B-D6F2-2318-61D48CAA60B3}"/>
+              </a:ext>
+            </a:extLst>
+          </p:cNvPr>
+          <p:cNvSpPr>
+            <a:spLocks noGrp="1" noRot="1" noChangeAspect="1"/>
+          </p:cNvSpPr>
+          <p:nvPr>
+            <p:ph type="sldImg"/>
+          </p:nvPr>
+        </p:nvSpPr>
+        <p:spPr/>
+      </p:sp>
+      <p:sp>
+        <p:nvSpPr>
+          <p:cNvPr id="3" name="Notes Placeholder 2">
+            <a:extLst>
+              <a:ext uri="{FF2B5EF4-FFF2-40B4-BE49-F238E27FC236}">
+                <a16:creationId xmlns:a16="http://schemas.microsoft.com/office/drawing/2014/main" id="{C2518968-9130-F0CC-6C97-02CADD3C12D9}"/>
+              </a:ext>
+            </a:extLst>
+          </p:cNvPr>
+          <p:cNvSpPr>
+            <a:spLocks noGrp="1"/>
+          </p:cNvSpPr>
+          <p:nvPr>
+            <p:ph type="body" idx="1"/>
+          </p:nvPr>
+        </p:nvSpPr>
+        <p:spPr/>
+        <p:txBody>
+          <a:bodyPr/>
+          <a:lstStyle/>
+          <a:p>
+            <a:r>
+              <a:rPr lang="en-US" dirty="0">
+                <a:latin typeface="Century Gothic" panose="020B0502020202020204" pitchFamily="34" charset="0"/>
+                <a:ea typeface="Tahoma" panose="020B0604030504040204" pitchFamily="34" charset="0"/>
+                <a:cs typeface="Tahoma" panose="020B0604030504040204" pitchFamily="34" charset="0"/>
+              </a:rPr>
+              <a:t>Dedicate this entire slide to the thesis statement.  It is the reason the speech is being given.  Use this time to reveal the three main points of the speech (slides 4,5,6) as an overview for the direction of the speech:</a:t>
+            </a:r>
+          </a:p>
+          <a:p>
+            <a:r>
+              <a:rPr lang="en-US" dirty="0">
+                <a:latin typeface="Century Gothic" panose="020B0502020202020204" pitchFamily="34" charset="0"/>
+                <a:ea typeface="Tahoma" panose="020B0604030504040204" pitchFamily="34" charset="0"/>
+                <a:cs typeface="Tahoma" panose="020B0604030504040204" pitchFamily="34" charset="0"/>
+              </a:rPr>
+              <a:t>-[type main point #1 here]</a:t>
+            </a:r>
+          </a:p>
+          <a:p>
+            <a:pPr marL="0" marR="0" lvl="0" indent="0" algn="l" defTabSz="914400" rtl="0" eaLnBrk="1" fontAlgn="auto" latinLnBrk="0" hangingPunct="1">
+              <a:lnSpc>
+                <a:spcPct val="100000"/>
+              </a:lnSpc>
+              <a:spcBef>
+                <a:spcPts val="0"/>
+              </a:spcBef>
+              <a:spcAft>
+                <a:spcPts val="0"/>
+              </a:spcAft>
+              <a:buClrTx/>
+              <a:buSzTx/>
+              <a:buFontTx/>
+              <a:buNone/>
+              <a:tabLst/>
+              <a:defRPr/>
+            </a:pPr>
+            <a:r>
+              <a:rPr lang="en-US" dirty="0">
+                <a:latin typeface="Century Gothic" panose="020B0502020202020204" pitchFamily="34" charset="0"/>
+                <a:ea typeface="Tahoma" panose="020B0604030504040204" pitchFamily="34" charset="0"/>
+                <a:cs typeface="Tahoma" panose="020B0604030504040204" pitchFamily="34" charset="0"/>
+              </a:rPr>
+              <a:t>-[type main point #2 here]</a:t>
+            </a:r>
+          </a:p>
+          <a:p>
+            <a:pPr marL="0" marR="0" lvl="0" indent="0" algn="l" defTabSz="914400" rtl="0" eaLnBrk="1" fontAlgn="auto" latinLnBrk="0" hangingPunct="1">
+              <a:lnSpc>
+                <a:spcPct val="100000"/>
+              </a:lnSpc>
+              <a:spcBef>
+                <a:spcPts val="0"/>
+              </a:spcBef>
+              <a:spcAft>
+                <a:spcPts val="0"/>
+              </a:spcAft>
+              <a:buClrTx/>
+              <a:buSzTx/>
+              <a:buFontTx/>
+              <a:buNone/>
+              <a:tabLst/>
+              <a:defRPr/>
+            </a:pPr>
+            <a:r>
+              <a:rPr lang="en-US" dirty="0">
+                <a:latin typeface="Century Gothic" panose="020B0502020202020204" pitchFamily="34" charset="0"/>
+                <a:ea typeface="Tahoma" panose="020B0604030504040204" pitchFamily="34" charset="0"/>
+                <a:cs typeface="Tahoma" panose="020B0604030504040204" pitchFamily="34" charset="0"/>
+              </a:rPr>
+              <a:t>-[type main point #3 here]</a:t>
+            </a:r>
+          </a:p>
+          <a:p>
+            <a:r>
+              <a:rPr lang="en-US" dirty="0">
+                <a:latin typeface="Century Gothic" panose="020B0502020202020204" pitchFamily="34" charset="0"/>
+                <a:ea typeface="Tahoma" panose="020B0604030504040204" pitchFamily="34" charset="0"/>
+                <a:cs typeface="Tahoma" panose="020B0604030504040204" pitchFamily="34" charset="0"/>
+              </a:rPr>
+              <a:t>Be sure to transition to the first main point and the next slide.</a:t>
+            </a:r>
+          </a:p>
+          <a:p>
+            <a:endParaRPr lang="en-US" dirty="0"/>
+          </a:p>
+        </p:txBody>
+      </p:sp>
+      <p:sp>
+        <p:nvSpPr>
+          <p:cNvPr id="4" name="Slide Number Placeholder 3">
+            <a:extLst>
+              <a:ext uri="{FF2B5EF4-FFF2-40B4-BE49-F238E27FC236}">
+                <a16:creationId xmlns:a16="http://schemas.microsoft.com/office/drawing/2014/main" id="{3106AEF4-6A97-B618-C164-69F3BD8FDAE9}"/>
+              </a:ext>
+            </a:extLst>
+          </p:cNvPr>
+          <p:cNvSpPr>
+            <a:spLocks noGrp="1"/>
+          </p:cNvSpPr>
+          <p:nvPr>
+            <p:ph type="sldNum" sz="quarter" idx="10"/>
+          </p:nvPr>
+        </p:nvSpPr>
+        <p:spPr/>
+        <p:txBody>
+          <a:bodyPr/>
+          <a:lstStyle/>
+          <a:p>
+            <a:fld id="{E6AEB063-7F11-4E3B-BA52-07405B1C2D95}" type="slidenum">
+              <a:rPr lang="en-US" smtClean="0"/>
+              <a:t>23</a:t>
+            </a:fld>
+            <a:endParaRPr lang="en-US" dirty="0"/>
+          </a:p>
+        </p:txBody>
+      </p:sp>
+    </p:spTree>
+    <p:extLst>
+      <p:ext uri="{BB962C8B-B14F-4D97-AF65-F5344CB8AC3E}">
+        <p14:creationId xmlns:p14="http://schemas.microsoft.com/office/powerpoint/2010/main" val="3638664270"/>
+      </p:ext>
+    </p:extLst>
+  </p:cSld>
+  <p:clrMapOvr>
+    <a:masterClrMapping/>
+  </p:clrMapOvr>
+</p:notes>
+</file>
+
+<file path=ppt/notesSlides/notesSlide13.xml><?xml version="1.0" encoding="utf-8"?>
+<p:notes xmlns:a="http://schemas.openxmlformats.org/drawingml/2006/main" xmlns:r="http://schemas.openxmlformats.org/officeDocument/2006/relationships" xmlns:p="http://schemas.openxmlformats.org/presentationml/2006/main">
+  <p:cSld>
+    <p:spTree>
+      <p:nvGrpSpPr>
+        <p:cNvPr id="1" name="">
+          <a:extLst>
+            <a:ext uri="{FF2B5EF4-FFF2-40B4-BE49-F238E27FC236}">
+              <a16:creationId xmlns:a16="http://schemas.microsoft.com/office/drawing/2014/main" id="{AFE984FF-2A06-9C0C-D2AF-A8A8C272C1D4}"/>
+            </a:ext>
+          </a:extLst>
+        </p:cNvPr>
+        <p:cNvGrpSpPr/>
+        <p:nvPr/>
+      </p:nvGrpSpPr>
+      <p:grpSpPr>
+        <a:xfrm>
+          <a:off x="0" y="0"/>
+          <a:ext cx="0" cy="0"/>
+          <a:chOff x="0" y="0"/>
+          <a:chExt cx="0" cy="0"/>
+        </a:xfrm>
+      </p:grpSpPr>
+      <p:sp>
+        <p:nvSpPr>
+          <p:cNvPr id="2" name="Slide Image Placeholder 1">
+            <a:extLst>
+              <a:ext uri="{FF2B5EF4-FFF2-40B4-BE49-F238E27FC236}">
+                <a16:creationId xmlns:a16="http://schemas.microsoft.com/office/drawing/2014/main" id="{457A46D3-7668-4938-EA6C-BF254EE0F1AD}"/>
+              </a:ext>
+            </a:extLst>
+          </p:cNvPr>
+          <p:cNvSpPr>
+            <a:spLocks noGrp="1" noRot="1" noChangeAspect="1"/>
+          </p:cNvSpPr>
+          <p:nvPr>
+            <p:ph type="sldImg"/>
+          </p:nvPr>
+        </p:nvSpPr>
+        <p:spPr/>
+      </p:sp>
+      <p:sp>
+        <p:nvSpPr>
+          <p:cNvPr id="3" name="Notes Placeholder 2">
+            <a:extLst>
+              <a:ext uri="{FF2B5EF4-FFF2-40B4-BE49-F238E27FC236}">
+                <a16:creationId xmlns:a16="http://schemas.microsoft.com/office/drawing/2014/main" id="{7D6A9B49-2A18-10EA-5263-9A799D35011C}"/>
+              </a:ext>
+            </a:extLst>
+          </p:cNvPr>
+          <p:cNvSpPr>
+            <a:spLocks noGrp="1"/>
+          </p:cNvSpPr>
+          <p:nvPr>
+            <p:ph type="body" idx="1"/>
+          </p:nvPr>
+        </p:nvSpPr>
+        <p:spPr/>
+        <p:txBody>
+          <a:bodyPr/>
+          <a:lstStyle/>
+          <a:p>
+            <a:r>
+              <a:rPr lang="en-US" dirty="0">
+                <a:latin typeface="Century Gothic" panose="020B0502020202020204" pitchFamily="34" charset="0"/>
+                <a:ea typeface="Tahoma" panose="020B0604030504040204" pitchFamily="34" charset="0"/>
+                <a:cs typeface="Tahoma" panose="020B0604030504040204" pitchFamily="34" charset="0"/>
+              </a:rPr>
+              <a:t>Dedicate this entire slide to the thesis statement.  It is the reason the speech is being given.  Use this time to reveal the three main points of the speech (slides 4,5,6) as an overview for the direction of the speech:</a:t>
+            </a:r>
+          </a:p>
+          <a:p>
+            <a:r>
+              <a:rPr lang="en-US" dirty="0">
+                <a:latin typeface="Century Gothic" panose="020B0502020202020204" pitchFamily="34" charset="0"/>
+                <a:ea typeface="Tahoma" panose="020B0604030504040204" pitchFamily="34" charset="0"/>
+                <a:cs typeface="Tahoma" panose="020B0604030504040204" pitchFamily="34" charset="0"/>
+              </a:rPr>
+              <a:t>-[type main point #1 here]</a:t>
+            </a:r>
+          </a:p>
+          <a:p>
+            <a:pPr marL="0" marR="0" lvl="0" indent="0" algn="l" defTabSz="914400" rtl="0" eaLnBrk="1" fontAlgn="auto" latinLnBrk="0" hangingPunct="1">
+              <a:lnSpc>
+                <a:spcPct val="100000"/>
+              </a:lnSpc>
+              <a:spcBef>
+                <a:spcPts val="0"/>
+              </a:spcBef>
+              <a:spcAft>
+                <a:spcPts val="0"/>
+              </a:spcAft>
+              <a:buClrTx/>
+              <a:buSzTx/>
+              <a:buFontTx/>
+              <a:buNone/>
+              <a:tabLst/>
+              <a:defRPr/>
+            </a:pPr>
+            <a:r>
+              <a:rPr lang="en-US" dirty="0">
+                <a:latin typeface="Century Gothic" panose="020B0502020202020204" pitchFamily="34" charset="0"/>
+                <a:ea typeface="Tahoma" panose="020B0604030504040204" pitchFamily="34" charset="0"/>
+                <a:cs typeface="Tahoma" panose="020B0604030504040204" pitchFamily="34" charset="0"/>
+              </a:rPr>
+              <a:t>-[type main point #2 here]</a:t>
+            </a:r>
+          </a:p>
+          <a:p>
+            <a:pPr marL="0" marR="0" lvl="0" indent="0" algn="l" defTabSz="914400" rtl="0" eaLnBrk="1" fontAlgn="auto" latinLnBrk="0" hangingPunct="1">
+              <a:lnSpc>
+                <a:spcPct val="100000"/>
+              </a:lnSpc>
+              <a:spcBef>
+                <a:spcPts val="0"/>
+              </a:spcBef>
+              <a:spcAft>
+                <a:spcPts val="0"/>
+              </a:spcAft>
+              <a:buClrTx/>
+              <a:buSzTx/>
+              <a:buFontTx/>
+              <a:buNone/>
+              <a:tabLst/>
+              <a:defRPr/>
+            </a:pPr>
+            <a:r>
+              <a:rPr lang="en-US" dirty="0">
+                <a:latin typeface="Century Gothic" panose="020B0502020202020204" pitchFamily="34" charset="0"/>
+                <a:ea typeface="Tahoma" panose="020B0604030504040204" pitchFamily="34" charset="0"/>
+                <a:cs typeface="Tahoma" panose="020B0604030504040204" pitchFamily="34" charset="0"/>
+              </a:rPr>
+              <a:t>-[type main point #3 here]</a:t>
+            </a:r>
+          </a:p>
+          <a:p>
+            <a:r>
+              <a:rPr lang="en-US" dirty="0">
+                <a:latin typeface="Century Gothic" panose="020B0502020202020204" pitchFamily="34" charset="0"/>
+                <a:ea typeface="Tahoma" panose="020B0604030504040204" pitchFamily="34" charset="0"/>
+                <a:cs typeface="Tahoma" panose="020B0604030504040204" pitchFamily="34" charset="0"/>
+              </a:rPr>
+              <a:t>Be sure to transition to the first main point and the next slide.</a:t>
+            </a:r>
+          </a:p>
+          <a:p>
+            <a:endParaRPr lang="en-US" dirty="0"/>
+          </a:p>
+        </p:txBody>
+      </p:sp>
+      <p:sp>
+        <p:nvSpPr>
+          <p:cNvPr id="4" name="Slide Number Placeholder 3">
+            <a:extLst>
+              <a:ext uri="{FF2B5EF4-FFF2-40B4-BE49-F238E27FC236}">
+                <a16:creationId xmlns:a16="http://schemas.microsoft.com/office/drawing/2014/main" id="{99E93F07-F05B-40A6-87EA-D30992FCE840}"/>
+              </a:ext>
+            </a:extLst>
+          </p:cNvPr>
+          <p:cNvSpPr>
+            <a:spLocks noGrp="1"/>
+          </p:cNvSpPr>
+          <p:nvPr>
+            <p:ph type="sldNum" sz="quarter" idx="10"/>
+          </p:nvPr>
+        </p:nvSpPr>
+        <p:spPr/>
+        <p:txBody>
+          <a:bodyPr/>
+          <a:lstStyle/>
+          <a:p>
+            <a:fld id="{E6AEB063-7F11-4E3B-BA52-07405B1C2D95}" type="slidenum">
+              <a:rPr lang="en-US" smtClean="0"/>
+              <a:t>28</a:t>
+            </a:fld>
+            <a:endParaRPr lang="en-US" dirty="0"/>
+          </a:p>
+        </p:txBody>
+      </p:sp>
+    </p:spTree>
+    <p:extLst>
+      <p:ext uri="{BB962C8B-B14F-4D97-AF65-F5344CB8AC3E}">
+        <p14:creationId xmlns:p14="http://schemas.microsoft.com/office/powerpoint/2010/main" val="4191064081"/>
+      </p:ext>
+    </p:extLst>
+  </p:cSld>
+  <p:clrMapOvr>
+    <a:masterClrMapping/>
+  </p:clrMapOvr>
+</p:notes>
+</file>
+
 <file path=ppt/notesSlides/notesSlide2.xml><?xml version="1.0" encoding="utf-8"?>
 <p:notes xmlns:a="http://schemas.openxmlformats.org/drawingml/2006/main" xmlns:r="http://schemas.openxmlformats.org/officeDocument/2006/relationships" xmlns:p="http://schemas.openxmlformats.org/presentationml/2006/main">
   <p:cSld>
@@ -821,6 +1527,26 @@
           <a:bodyPr/>
           <a:lstStyle/>
           <a:p>
+            <a:r>
+              <a:rPr lang="en-US" dirty="0">
+                <a:latin typeface="Century Gothic" panose="020B0502020202020204" pitchFamily="34" charset="0"/>
+                <a:ea typeface="Tahoma" panose="020B0604030504040204" pitchFamily="34" charset="0"/>
+                <a:cs typeface="Tahoma" panose="020B0604030504040204" pitchFamily="34" charset="0"/>
+              </a:rPr>
+              <a:t>Dedicate this entire slide to the thesis statement.  It is the reason the speech is being given.  Use this time to reveal the three main points of the speech (slides 4,5,6) as an overview for the direction of the speech:</a:t>
+            </a:r>
+          </a:p>
+          <a:p>
+            <a:r>
+              <a:rPr lang="en-US" dirty="0">
+                <a:latin typeface="Century Gothic" panose="020B0502020202020204" pitchFamily="34" charset="0"/>
+                <a:ea typeface="Tahoma" panose="020B0604030504040204" pitchFamily="34" charset="0"/>
+                <a:cs typeface="Tahoma" panose="020B0604030504040204" pitchFamily="34" charset="0"/>
+              </a:rPr>
+              <a:t>-[type main point #1 here]</a:t>
+            </a:r>
+          </a:p>
+          <a:p>
             <a:pPr marL="0" marR="0" lvl="0" indent="0" algn="l" defTabSz="914400" rtl="0" eaLnBrk="1" fontAlgn="auto" latinLnBrk="0" hangingPunct="1">
               <a:lnSpc>
                 <a:spcPct val="100000"/>
@@ -839,19 +1565,53 @@
               <a:defRPr/>
             </a:pPr>
             <a:r>
-              <a:rPr lang="en-US" sz="1200" dirty="0">
-                <a:latin typeface="Tahoma" panose="020B0604030504040204" pitchFamily="34" charset="0"/>
+              <a:rPr lang="en-US" dirty="0">
+                <a:latin typeface="Century Gothic" panose="020B0502020202020204" pitchFamily="34" charset="0"/>
                 <a:ea typeface="Tahoma" panose="020B0604030504040204" pitchFamily="34" charset="0"/>
                 <a:cs typeface="Tahoma" panose="020B0604030504040204" pitchFamily="34" charset="0"/>
               </a:rPr>
-              <a:t>Use the background points to post details that are not common knowledge, or that the audience will need to understand the context of the speech.</a:t>
-            </a:r>
-          </a:p>
-          <a:p>
-            <a:r>
-              <a:rPr lang="en-US" dirty="0"/>
-              <a:t>-Do not read these main points from the PowerPoint, instead elaborate on these points during the speech.</a:t>
-            </a:r>
+              <a:t>-[type main point #2 here]</a:t>
+            </a:r>
+          </a:p>
+          <a:p>
+            <a:pPr marL="0" marR="0" lvl="0" indent="0" algn="l" defTabSz="914400" rtl="0" eaLnBrk="1" fontAlgn="auto" latinLnBrk="0" hangingPunct="1">
+              <a:lnSpc>
+                <a:spcPct val="100000"/>
+              </a:lnSpc>
+              <a:spcBef>
+                <a:spcPts val="0"/>
+              </a:spcBef>
+              <a:spcAft>
+                <a:spcPts val="0"/>
+              </a:spcAft>
+              <a:buClrTx/>
+              <a:buSzTx/>
+              <a:buFontTx/>
+              <a:buNone/>
+              <a:tabLst/>
+              <a:defRPr/>
+            </a:pPr>
+            <a:r>
+              <a:rPr lang="en-US" dirty="0">
+                <a:latin typeface="Century Gothic" panose="020B0502020202020204" pitchFamily="34" charset="0"/>
+                <a:ea typeface="Tahoma" panose="020B0604030504040204" pitchFamily="34" charset="0"/>
+                <a:cs typeface="Tahoma" panose="020B0604030504040204" pitchFamily="34" charset="0"/>
+              </a:rPr>
+              <a:t>-[type main point #3 here]</a:t>
+            </a:r>
+          </a:p>
+          <a:p>
+            <a:r>
+              <a:rPr lang="en-US" dirty="0">
+                <a:latin typeface="Century Gothic" panose="020B0502020202020204" pitchFamily="34" charset="0"/>
+                <a:ea typeface="Tahoma" panose="020B0604030504040204" pitchFamily="34" charset="0"/>
+                <a:cs typeface="Tahoma" panose="020B0604030504040204" pitchFamily="34" charset="0"/>
+              </a:rPr>
+              <a:t>Be sure to transition to the first main point and the next slide.</a:t>
+            </a:r>
+          </a:p>
+          <a:p>
+            <a:endParaRPr lang="en-US" dirty="0"/>
           </a:p>
         </p:txBody>
       </p:sp>
@@ -881,7 +1641,7 @@
     </p:spTree>
     <p:extLst>
       <p:ext uri="{BB962C8B-B14F-4D97-AF65-F5344CB8AC3E}">
-        <p14:creationId xmlns:p14="http://schemas.microsoft.com/office/powerpoint/2010/main" val="2752401346"/>
+        <p14:creationId xmlns:p14="http://schemas.microsoft.com/office/powerpoint/2010/main" val="3338027317"/>
       </p:ext>
     </p:extLst>
   </p:cSld>
@@ -935,25 +1695,37 @@
           <a:bodyPr/>
           <a:lstStyle/>
           <a:p>
+            <a:pPr marL="0" marR="0" lvl="0" indent="0" algn="l" defTabSz="914400" rtl="0" eaLnBrk="1" fontAlgn="auto" latinLnBrk="0" hangingPunct="1">
+              <a:lnSpc>
+                <a:spcPct val="100000"/>
+              </a:lnSpc>
+              <a:spcBef>
+                <a:spcPts val="0"/>
+              </a:spcBef>
+              <a:spcAft>
+                <a:spcPts val="0"/>
+              </a:spcAft>
+              <a:buClrTx/>
+              <a:buSzTx/>
+              <a:buFontTx/>
+              <a:buNone/>
+              <a:tabLst/>
+              <a:defRPr/>
+            </a:pPr>
+            <a:r>
+              <a:rPr lang="en-US" sz="1200" dirty="0">
+                <a:latin typeface="Tahoma" panose="020B0604030504040204" pitchFamily="34" charset="0"/>
+                <a:ea typeface="Tahoma" panose="020B0604030504040204" pitchFamily="34" charset="0"/>
+                <a:cs typeface="Tahoma" panose="020B0604030504040204" pitchFamily="34" charset="0"/>
+              </a:rPr>
+              <a:t>Use the background points to post details that are not common knowledge, or that the audience will need to understand the context of the speech.</a:t>
+            </a:r>
+          </a:p>
+          <a:p>
             <a:r>
               <a:rPr lang="en-US" dirty="0"/>
-              <a:t>The title of main point #1 should be clear and concise.  Each piece of evidence should be summarized for clarity and cited correctly.  Do not simply read the pieces of evidence, but elaborate where needed.  </a:t>
-            </a:r>
-          </a:p>
-          <a:p>
-            <a:r>
-              <a:rPr lang="en-US" dirty="0"/>
-              <a:t>[type notes for elaboration here]</a:t>
-            </a:r>
-          </a:p>
-          <a:p>
-            <a:r>
-              <a:rPr lang="en-US" dirty="0"/>
-              <a:t>Be sure to transition to main point #2 and the next slide.</a:t>
-            </a:r>
-          </a:p>
-          <a:p>
-            <a:endParaRPr lang="en-US" dirty="0"/>
+              <a:t>-Do not read these main points from the PowerPoint, instead elaborate on these points during the speech.</a:t>
+            </a:r>
           </a:p>
         </p:txBody>
       </p:sp>
@@ -983,7 +1755,7 @@
     </p:spTree>
     <p:extLst>
       <p:ext uri="{BB962C8B-B14F-4D97-AF65-F5344CB8AC3E}">
-        <p14:creationId xmlns:p14="http://schemas.microsoft.com/office/powerpoint/2010/main" val="2639452038"/>
+        <p14:creationId xmlns:p14="http://schemas.microsoft.com/office/powerpoint/2010/main" val="2752401346"/>
       </p:ext>
     </p:extLst>
   </p:cSld>
@@ -1039,7 +1811,141 @@
           <a:p>
             <a:r>
               <a:rPr lang="en-US" dirty="0"/>
-              <a:t>The title of main point #2 should be clear and concise.  Each piece of evidence should be summarized for clarity and cited correctly.  Do not simply read the pieces of evidence, but elaborate where needed.  </a:t>
+              <a:t>The title of main point #1 should be clear and concise.  Each piece of evidence should be summarized for clarity and cited correctly.  Do not simply read the pieces of evidence, but elaborate where needed.  </a:t>
+            </a:r>
+          </a:p>
+          <a:p>
+            <a:r>
+              <a:rPr lang="en-US" dirty="0"/>
+              <a:t>[type notes for elaboration here]</a:t>
+            </a:r>
+          </a:p>
+          <a:p>
+            <a:r>
+              <a:rPr lang="en-US" dirty="0"/>
+              <a:t>Be sure to transition to main point #2 and the next slide.</a:t>
+            </a:r>
+          </a:p>
+          <a:p>
+            <a:endParaRPr lang="en-US" dirty="0"/>
+          </a:p>
+        </p:txBody>
+      </p:sp>
+      <p:sp>
+        <p:nvSpPr>
+          <p:cNvPr id="4" name="Slide Number Placeholder 3"/>
+          <p:cNvSpPr>
+            <a:spLocks noGrp="1"/>
+          </p:cNvSpPr>
+          <p:nvPr>
+            <p:ph type="sldNum" sz="quarter" idx="10"/>
+          </p:nvPr>
+        </p:nvSpPr>
+        <p:spPr/>
+        <p:txBody>
+          <a:bodyPr/>
+          <a:lstStyle/>
+          <a:p>
+            <a:fld id="{E6AEB063-7F11-4E3B-BA52-07405B1C2D95}" type="slidenum">
+              <a:rPr lang="en-US" smtClean="0"/>
+              <a:t>4</a:t>
+            </a:fld>
+            <a:endParaRPr lang="en-US" dirty="0"/>
+          </a:p>
+        </p:txBody>
+      </p:sp>
+    </p:spTree>
+    <p:extLst>
+      <p:ext uri="{BB962C8B-B14F-4D97-AF65-F5344CB8AC3E}">
+        <p14:creationId xmlns:p14="http://schemas.microsoft.com/office/powerpoint/2010/main" val="2639452038"/>
+      </p:ext>
+    </p:extLst>
+  </p:cSld>
+  <p:clrMapOvr>
+    <a:masterClrMapping/>
+  </p:clrMapOvr>
+</p:notes>
+</file>
+
+<file path=ppt/notesSlides/notesSlide5.xml><?xml version="1.0" encoding="utf-8"?>
+<p:notes xmlns:a="http://schemas.openxmlformats.org/drawingml/2006/main" xmlns:r="http://schemas.openxmlformats.org/officeDocument/2006/relationships" xmlns:p="http://schemas.openxmlformats.org/presentationml/2006/main">
+  <p:cSld>
+    <p:spTree>
+      <p:nvGrpSpPr>
+        <p:cNvPr id="1" name="">
+          <a:extLst>
+            <a:ext uri="{FF2B5EF4-FFF2-40B4-BE49-F238E27FC236}">
+              <a16:creationId xmlns:a16="http://schemas.microsoft.com/office/drawing/2014/main" id="{603EBDA1-2A39-F528-3D62-7F1412666746}"/>
+            </a:ext>
+          </a:extLst>
+        </p:cNvPr>
+        <p:cNvGrpSpPr/>
+        <p:nvPr/>
+      </p:nvGrpSpPr>
+      <p:grpSpPr>
+        <a:xfrm>
+          <a:off x="0" y="0"/>
+          <a:ext cx="0" cy="0"/>
+          <a:chOff x="0" y="0"/>
+          <a:chExt cx="0" cy="0"/>
+        </a:xfrm>
+      </p:grpSpPr>
+      <p:sp>
+        <p:nvSpPr>
+          <p:cNvPr id="2" name="Slide Image Placeholder 1">
+            <a:extLst>
+              <a:ext uri="{FF2B5EF4-FFF2-40B4-BE49-F238E27FC236}">
+                <a16:creationId xmlns:a16="http://schemas.microsoft.com/office/drawing/2014/main" id="{F04EEFF0-8CFF-DCB9-CFA8-82361731512C}"/>
+              </a:ext>
+            </a:extLst>
+          </p:cNvPr>
+          <p:cNvSpPr>
+            <a:spLocks noGrp="1" noRot="1" noChangeAspect="1"/>
+          </p:cNvSpPr>
+          <p:nvPr>
+            <p:ph type="sldImg"/>
+          </p:nvPr>
+        </p:nvSpPr>
+        <p:spPr/>
+      </p:sp>
+      <p:sp>
+        <p:nvSpPr>
+          <p:cNvPr id="3" name="Notes Placeholder 2">
+            <a:extLst>
+              <a:ext uri="{FF2B5EF4-FFF2-40B4-BE49-F238E27FC236}">
+                <a16:creationId xmlns:a16="http://schemas.microsoft.com/office/drawing/2014/main" id="{52D8456D-E3CE-204C-9EA3-429B2F1E06EC}"/>
+              </a:ext>
+            </a:extLst>
+          </p:cNvPr>
+          <p:cNvSpPr>
+            <a:spLocks noGrp="1"/>
+          </p:cNvSpPr>
+          <p:nvPr>
+            <p:ph type="body" idx="1"/>
+          </p:nvPr>
+        </p:nvSpPr>
+        <p:spPr/>
+        <p:txBody>
+          <a:bodyPr/>
+          <a:lstStyle/>
+          <a:p>
+            <a:r>
+              <a:rPr lang="en-US" dirty="0">
+                <a:latin typeface="Century Gothic" panose="020B0502020202020204" pitchFamily="34" charset="0"/>
+                <a:ea typeface="Tahoma" panose="020B0604030504040204" pitchFamily="34" charset="0"/>
+                <a:cs typeface="Tahoma" panose="020B0604030504040204" pitchFamily="34" charset="0"/>
+              </a:rPr>
+              <a:t>Dedicate this entire slide to the thesis statement.  It is the reason the speech is being given.  Use this time to reveal the three main points of the speech (slides 4,5,6) as an overview for the direction of the speech:</a:t>
+            </a:r>
+          </a:p>
+          <a:p>
+            <a:r>
+              <a:rPr lang="en-US" dirty="0">
+                <a:latin typeface="Century Gothic" panose="020B0502020202020204" pitchFamily="34" charset="0"/>
+                <a:ea typeface="Tahoma" panose="020B0604030504040204" pitchFamily="34" charset="0"/>
+                <a:cs typeface="Tahoma" panose="020B0604030504040204" pitchFamily="34" charset="0"/>
+              </a:rPr>
+              <a:t>-[type main point #1 here]</a:t>
             </a:r>
           </a:p>
           <a:p>
@@ -1061,104 +1967,12 @@
               <a:defRPr/>
             </a:pPr>
             <a:r>
-              <a:rPr lang="en-US" dirty="0"/>
-              <a:t>[type notes for elaboration here]</a:t>
-            </a:r>
-          </a:p>
-          <a:p>
-            <a:r>
-              <a:rPr lang="en-US" dirty="0"/>
-              <a:t>Be sure to transition to main point #3 and the next slide.</a:t>
-            </a:r>
-          </a:p>
-          <a:p>
-            <a:endParaRPr lang="en-US" dirty="0"/>
-          </a:p>
-        </p:txBody>
-      </p:sp>
-      <p:sp>
-        <p:nvSpPr>
-          <p:cNvPr id="4" name="Slide Number Placeholder 3"/>
-          <p:cNvSpPr>
-            <a:spLocks noGrp="1"/>
-          </p:cNvSpPr>
-          <p:nvPr>
-            <p:ph type="sldNum" sz="quarter" idx="10"/>
-          </p:nvPr>
-        </p:nvSpPr>
-        <p:spPr/>
-        <p:txBody>
-          <a:bodyPr/>
-          <a:lstStyle/>
-          <a:p>
-            <a:fld id="{E6AEB063-7F11-4E3B-BA52-07405B1C2D95}" type="slidenum">
-              <a:rPr lang="en-US" smtClean="0"/>
-              <a:t>4</a:t>
-            </a:fld>
-            <a:endParaRPr lang="en-US" dirty="0"/>
-          </a:p>
-        </p:txBody>
-      </p:sp>
-    </p:spTree>
-    <p:extLst>
-      <p:ext uri="{BB962C8B-B14F-4D97-AF65-F5344CB8AC3E}">
-        <p14:creationId xmlns:p14="http://schemas.microsoft.com/office/powerpoint/2010/main" val="750561808"/>
-      </p:ext>
-    </p:extLst>
-  </p:cSld>
-  <p:clrMapOvr>
-    <a:masterClrMapping/>
-  </p:clrMapOvr>
-</p:notes>
-</file>
-
-<file path=ppt/notesSlides/notesSlide5.xml><?xml version="1.0" encoding="utf-8"?>
-<p:notes xmlns:a="http://schemas.openxmlformats.org/drawingml/2006/main" xmlns:r="http://schemas.openxmlformats.org/officeDocument/2006/relationships" xmlns:p="http://schemas.openxmlformats.org/presentationml/2006/main">
-  <p:cSld>
-    <p:spTree>
-      <p:nvGrpSpPr>
-        <p:cNvPr id="1" name=""/>
-        <p:cNvGrpSpPr/>
-        <p:nvPr/>
-      </p:nvGrpSpPr>
-      <p:grpSpPr>
-        <a:xfrm>
-          <a:off x="0" y="0"/>
-          <a:ext cx="0" cy="0"/>
-          <a:chOff x="0" y="0"/>
-          <a:chExt cx="0" cy="0"/>
-        </a:xfrm>
-      </p:grpSpPr>
-      <p:sp>
-        <p:nvSpPr>
-          <p:cNvPr id="2" name="Slide Image Placeholder 1"/>
-          <p:cNvSpPr>
-            <a:spLocks noGrp="1" noRot="1" noChangeAspect="1"/>
-          </p:cNvSpPr>
-          <p:nvPr>
-            <p:ph type="sldImg"/>
-          </p:nvPr>
-        </p:nvSpPr>
-        <p:spPr/>
-      </p:sp>
-      <p:sp>
-        <p:nvSpPr>
-          <p:cNvPr id="3" name="Notes Placeholder 2"/>
-          <p:cNvSpPr>
-            <a:spLocks noGrp="1"/>
-          </p:cNvSpPr>
-          <p:nvPr>
-            <p:ph type="body" idx="1"/>
-          </p:nvPr>
-        </p:nvSpPr>
-        <p:spPr/>
-        <p:txBody>
-          <a:bodyPr/>
-          <a:lstStyle/>
-          <a:p>
-            <a:r>
-              <a:rPr lang="en-US" dirty="0"/>
-              <a:t>The title of main point #3 should be clear and concise.  Each piece of evidence should be summarized for clarity and cited correctly.  Do not simply read the pieces of evidence, but elaborate where needed.  </a:t>
+              <a:rPr lang="en-US" dirty="0">
+                <a:latin typeface="Century Gothic" panose="020B0502020202020204" pitchFamily="34" charset="0"/>
+                <a:ea typeface="Tahoma" panose="020B0604030504040204" pitchFamily="34" charset="0"/>
+                <a:cs typeface="Tahoma" panose="020B0604030504040204" pitchFamily="34" charset="0"/>
+              </a:rPr>
+              <a:t>-[type main point #2 here]</a:t>
             </a:r>
           </a:p>
           <a:p>
@@ -1180,14 +1994,22 @@
               <a:defRPr/>
             </a:pPr>
             <a:r>
-              <a:rPr lang="en-US" dirty="0"/>
-              <a:t>[type notes for elaboration here]</a:t>
-            </a:r>
-          </a:p>
-          <a:p>
-            <a:r>
-              <a:rPr lang="en-US" dirty="0"/>
-              <a:t>Be sure to transition to the counterargument and the next slide.</a:t>
+              <a:rPr lang="en-US" dirty="0">
+                <a:latin typeface="Century Gothic" panose="020B0502020202020204" pitchFamily="34" charset="0"/>
+                <a:ea typeface="Tahoma" panose="020B0604030504040204" pitchFamily="34" charset="0"/>
+                <a:cs typeface="Tahoma" panose="020B0604030504040204" pitchFamily="34" charset="0"/>
+              </a:rPr>
+              <a:t>-[type main point #3 here]</a:t>
+            </a:r>
+          </a:p>
+          <a:p>
+            <a:r>
+              <a:rPr lang="en-US" dirty="0">
+                <a:latin typeface="Century Gothic" panose="020B0502020202020204" pitchFamily="34" charset="0"/>
+                <a:ea typeface="Tahoma" panose="020B0604030504040204" pitchFamily="34" charset="0"/>
+                <a:cs typeface="Tahoma" panose="020B0604030504040204" pitchFamily="34" charset="0"/>
+              </a:rPr>
+              <a:t>Be sure to transition to the first main point and the next slide.</a:t>
             </a:r>
           </a:p>
           <a:p>
@@ -1197,7 +2019,13 @@
       </p:sp>
       <p:sp>
         <p:nvSpPr>
-          <p:cNvPr id="4" name="Slide Number Placeholder 3"/>
+          <p:cNvPr id="4" name="Slide Number Placeholder 3">
+            <a:extLst>
+              <a:ext uri="{FF2B5EF4-FFF2-40B4-BE49-F238E27FC236}">
+                <a16:creationId xmlns:a16="http://schemas.microsoft.com/office/drawing/2014/main" id="{ED6EDCE5-6A1E-157D-B918-86350EA59087}"/>
+              </a:ext>
+            </a:extLst>
+          </p:cNvPr>
           <p:cNvSpPr>
             <a:spLocks noGrp="1"/>
           </p:cNvSpPr>
@@ -1221,7 +2049,7 @@
     </p:spTree>
     <p:extLst>
       <p:ext uri="{BB962C8B-B14F-4D97-AF65-F5344CB8AC3E}">
-        <p14:creationId xmlns:p14="http://schemas.microsoft.com/office/powerpoint/2010/main" val="418214217"/>
+        <p14:creationId xmlns:p14="http://schemas.microsoft.com/office/powerpoint/2010/main" val="409902260"/>
       </p:ext>
     </p:extLst>
   </p:cSld>
@@ -1275,6 +2103,12 @@
           <a:bodyPr/>
           <a:lstStyle/>
           <a:p>
+            <a:r>
+              <a:rPr lang="en-US" dirty="0"/>
+              <a:t>The title of main point #2 should be clear and concise.  Each piece of evidence should be summarized for clarity and cited correctly.  Do not simply read the pieces of evidence, but elaborate where needed.  </a:t>
+            </a:r>
+          </a:p>
+          <a:p>
             <a:pPr marL="0" marR="0" lvl="0" indent="0" algn="l" defTabSz="914400" rtl="0" eaLnBrk="1" fontAlgn="auto" latinLnBrk="0" hangingPunct="1">
               <a:lnSpc>
                 <a:spcPct val="100000"/>
@@ -1293,12 +2127,14 @@
               <a:defRPr/>
             </a:pPr>
             <a:r>
-              <a:rPr lang="en-US" dirty="0">
-                <a:latin typeface="Tahoma" panose="020B0604030504040204" pitchFamily="34" charset="0"/>
-                <a:ea typeface="Tahoma" panose="020B0604030504040204" pitchFamily="34" charset="0"/>
-                <a:cs typeface="Tahoma" panose="020B0604030504040204" pitchFamily="34" charset="0"/>
-              </a:rPr>
-              <a:t>The counterargument should be the most common argument against the topic.  The goal for this slide is to address the counterargument in such a way as to actually strengthen the original topic.  Be sure to address each piece of evidence against the topic.  As you address each piece of evidence elaborate on the text found on the slide.  Remember to transition to the final slide, the action step.</a:t>
+              <a:rPr lang="en-US" dirty="0"/>
+              <a:t>[type notes for elaboration here]</a:t>
+            </a:r>
+          </a:p>
+          <a:p>
+            <a:r>
+              <a:rPr lang="en-US" dirty="0"/>
+              <a:t>Be sure to transition to main point #3 and the next slide.</a:t>
             </a:r>
           </a:p>
           <a:p>
@@ -1323,7 +2159,118 @@
           <a:p>
             <a:fld id="{E6AEB063-7F11-4E3B-BA52-07405B1C2D95}" type="slidenum">
               <a:rPr lang="en-US" smtClean="0"/>
-              <a:t>6</a:t>
+              <a:t>7</a:t>
+            </a:fld>
+            <a:endParaRPr lang="en-US" dirty="0"/>
+          </a:p>
+        </p:txBody>
+      </p:sp>
+    </p:spTree>
+    <p:extLst>
+      <p:ext uri="{BB962C8B-B14F-4D97-AF65-F5344CB8AC3E}">
+        <p14:creationId xmlns:p14="http://schemas.microsoft.com/office/powerpoint/2010/main" val="750561808"/>
+      </p:ext>
+    </p:extLst>
+  </p:cSld>
+  <p:clrMapOvr>
+    <a:masterClrMapping/>
+  </p:clrMapOvr>
+</p:notes>
+</file>
+
+<file path=ppt/notesSlides/notesSlide7.xml><?xml version="1.0" encoding="utf-8"?>
+<p:notes xmlns:a="http://schemas.openxmlformats.org/drawingml/2006/main" xmlns:r="http://schemas.openxmlformats.org/officeDocument/2006/relationships" xmlns:p="http://schemas.openxmlformats.org/presentationml/2006/main">
+  <p:cSld>
+    <p:spTree>
+      <p:nvGrpSpPr>
+        <p:cNvPr id="1" name=""/>
+        <p:cNvGrpSpPr/>
+        <p:nvPr/>
+      </p:nvGrpSpPr>
+      <p:grpSpPr>
+        <a:xfrm>
+          <a:off x="0" y="0"/>
+          <a:ext cx="0" cy="0"/>
+          <a:chOff x="0" y="0"/>
+          <a:chExt cx="0" cy="0"/>
+        </a:xfrm>
+      </p:grpSpPr>
+      <p:sp>
+        <p:nvSpPr>
+          <p:cNvPr id="2" name="Slide Image Placeholder 1"/>
+          <p:cNvSpPr>
+            <a:spLocks noGrp="1" noRot="1" noChangeAspect="1"/>
+          </p:cNvSpPr>
+          <p:nvPr>
+            <p:ph type="sldImg"/>
+          </p:nvPr>
+        </p:nvSpPr>
+        <p:spPr/>
+      </p:sp>
+      <p:sp>
+        <p:nvSpPr>
+          <p:cNvPr id="3" name="Notes Placeholder 2"/>
+          <p:cNvSpPr>
+            <a:spLocks noGrp="1"/>
+          </p:cNvSpPr>
+          <p:nvPr>
+            <p:ph type="body" idx="1"/>
+          </p:nvPr>
+        </p:nvSpPr>
+        <p:spPr/>
+        <p:txBody>
+          <a:bodyPr/>
+          <a:lstStyle/>
+          <a:p>
+            <a:pPr marL="0" marR="0" lvl="0" indent="0" algn="l" defTabSz="914400" rtl="0" eaLnBrk="1" fontAlgn="auto" latinLnBrk="0" hangingPunct="1">
+              <a:lnSpc>
+                <a:spcPct val="100000"/>
+              </a:lnSpc>
+              <a:spcBef>
+                <a:spcPts val="0"/>
+              </a:spcBef>
+              <a:spcAft>
+                <a:spcPts val="0"/>
+              </a:spcAft>
+              <a:buClrTx/>
+              <a:buSzTx/>
+              <a:buFontTx/>
+              <a:buNone/>
+              <a:tabLst/>
+              <a:defRPr/>
+            </a:pPr>
+            <a:r>
+              <a:rPr lang="en-US" dirty="0">
+                <a:latin typeface="Tahoma" panose="020B0604030504040204" pitchFamily="34" charset="0"/>
+                <a:ea typeface="Tahoma" panose="020B0604030504040204" pitchFamily="34" charset="0"/>
+                <a:cs typeface="Tahoma" panose="020B0604030504040204" pitchFamily="34" charset="0"/>
+              </a:rPr>
+              <a:t>The counterargument should be the most common argument against the topic.  The goal for this slide is to address the counterargument in such a way as to actually strengthen the original topic.  Be sure to address each piece of evidence against the topic.  As you address each piece of evidence elaborate on the text found on the slide.  Remember to transition to the final slide, the action step.</a:t>
+            </a:r>
+          </a:p>
+          <a:p>
+            <a:endParaRPr lang="en-US" dirty="0"/>
+          </a:p>
+        </p:txBody>
+      </p:sp>
+      <p:sp>
+        <p:nvSpPr>
+          <p:cNvPr id="4" name="Slide Number Placeholder 3"/>
+          <p:cNvSpPr>
+            <a:spLocks noGrp="1"/>
+          </p:cNvSpPr>
+          <p:nvPr>
+            <p:ph type="sldNum" sz="quarter" idx="10"/>
+          </p:nvPr>
+        </p:nvSpPr>
+        <p:spPr/>
+        <p:txBody>
+          <a:bodyPr/>
+          <a:lstStyle/>
+          <a:p>
+            <a:fld id="{E6AEB063-7F11-4E3B-BA52-07405B1C2D95}" type="slidenum">
+              <a:rPr lang="en-US" smtClean="0"/>
+              <a:t>9</a:t>
             </a:fld>
             <a:endParaRPr lang="en-US" dirty="0"/>
           </a:p>
@@ -1342,7 +2289,7 @@
 </p:notes>
 </file>
 
-<file path=ppt/notesSlides/notesSlide7.xml><?xml version="1.0" encoding="utf-8"?>
+<file path=ppt/notesSlides/notesSlide8.xml><?xml version="1.0" encoding="utf-8"?>
 <p:notes xmlns:a="http://schemas.openxmlformats.org/drawingml/2006/main" xmlns:r="http://schemas.openxmlformats.org/officeDocument/2006/relationships" xmlns:p="http://schemas.openxmlformats.org/presentationml/2006/main">
   <p:cSld>
     <p:spTree>
@@ -1458,7 +2405,7 @@
           <a:p>
             <a:fld id="{E6AEB063-7F11-4E3B-BA52-07405B1C2D95}" type="slidenum">
               <a:rPr lang="en-US" smtClean="0"/>
-              <a:t>7</a:t>
+              <a:t>11</a:t>
             </a:fld>
             <a:endParaRPr lang="en-US" dirty="0"/>
           </a:p>
@@ -1477,12 +2424,18 @@
 </p:notes>
 </file>
 
-<file path=ppt/notesSlides/notesSlide8.xml><?xml version="1.0" encoding="utf-8"?>
+<file path=ppt/notesSlides/notesSlide9.xml><?xml version="1.0" encoding="utf-8"?>
 <p:notes xmlns:a="http://schemas.openxmlformats.org/drawingml/2006/main" xmlns:r="http://schemas.openxmlformats.org/officeDocument/2006/relationships" xmlns:p="http://schemas.openxmlformats.org/presentationml/2006/main">
   <p:cSld>
     <p:spTree>
       <p:nvGrpSpPr>
-        <p:cNvPr id="1" name=""/>
+        <p:cNvPr id="1" name="">
+          <a:extLst>
+            <a:ext uri="{FF2B5EF4-FFF2-40B4-BE49-F238E27FC236}">
+              <a16:creationId xmlns:a16="http://schemas.microsoft.com/office/drawing/2014/main" id="{5E11F5F2-9C67-3FF6-B1C2-005DCC7F80F4}"/>
+            </a:ext>
+          </a:extLst>
+        </p:cNvPr>
         <p:cNvGrpSpPr/>
         <p:nvPr/>
       </p:nvGrpSpPr>
@@ -1496,7 +2449,13 @@
       </p:grpSpPr>
       <p:sp>
         <p:nvSpPr>
-          <p:cNvPr id="2" name="Slide Image Placeholder 1"/>
+          <p:cNvPr id="2" name="Slide Image Placeholder 1">
+            <a:extLst>
+              <a:ext uri="{FF2B5EF4-FFF2-40B4-BE49-F238E27FC236}">
+                <a16:creationId xmlns:a16="http://schemas.microsoft.com/office/drawing/2014/main" id="{7B1E3303-605A-A2C4-7474-6EF509195E4D}"/>
+              </a:ext>
+            </a:extLst>
+          </p:cNvPr>
           <p:cNvSpPr>
             <a:spLocks noGrp="1" noRot="1" noChangeAspect="1"/>
           </p:cNvSpPr>
@@ -1508,7 +2467,13 @@
       </p:sp>
       <p:sp>
         <p:nvSpPr>
-          <p:cNvPr id="3" name="Notes Placeholder 2"/>
+          <p:cNvPr id="3" name="Notes Placeholder 2">
+            <a:extLst>
+              <a:ext uri="{FF2B5EF4-FFF2-40B4-BE49-F238E27FC236}">
+                <a16:creationId xmlns:a16="http://schemas.microsoft.com/office/drawing/2014/main" id="{59007AAA-D64D-E4A9-917B-42BDFDAB96FC}"/>
+              </a:ext>
+            </a:extLst>
+          </p:cNvPr>
           <p:cNvSpPr>
             <a:spLocks noGrp="1"/>
           </p:cNvSpPr>
@@ -1611,7 +2576,13 @@
       </p:sp>
       <p:sp>
         <p:nvSpPr>
-          <p:cNvPr id="4" name="Slide Number Placeholder 3"/>
+          <p:cNvPr id="4" name="Slide Number Placeholder 3">
+            <a:extLst>
+              <a:ext uri="{FF2B5EF4-FFF2-40B4-BE49-F238E27FC236}">
+                <a16:creationId xmlns:a16="http://schemas.microsoft.com/office/drawing/2014/main" id="{E38F30E9-476E-A334-F2B4-6D63AA46F2B4}"/>
+              </a:ext>
+            </a:extLst>
+          </p:cNvPr>
           <p:cNvSpPr>
             <a:spLocks noGrp="1"/>
           </p:cNvSpPr>
@@ -1626,7 +2597,7 @@
           <a:p>
             <a:fld id="{E6AEB063-7F11-4E3B-BA52-07405B1C2D95}" type="slidenum">
               <a:rPr lang="en-US" smtClean="0"/>
-              <a:t>17</a:t>
+              <a:t>12</a:t>
             </a:fld>
             <a:endParaRPr lang="en-US" dirty="0"/>
           </a:p>
@@ -1635,7 +2606,7 @@
     </p:spTree>
     <p:extLst>
       <p:ext uri="{BB962C8B-B14F-4D97-AF65-F5344CB8AC3E}">
-        <p14:creationId xmlns:p14="http://schemas.microsoft.com/office/powerpoint/2010/main" val="3338027317"/>
+        <p14:creationId xmlns:p14="http://schemas.microsoft.com/office/powerpoint/2010/main" val="3231253154"/>
       </p:ext>
     </p:extLst>
   </p:cSld>
@@ -1798,7 +2769,7 @@
           </a:effectLst>
           <a:extLst>
             <a:ext uri="{91240B29-F687-4f45-9708-019B960494DF}">
-              <a14:hiddenLine xmlns:a14="http://schemas.microsoft.com/office/drawing/2010/main" xmlns="" w="9525">
+              <a14:hiddenLine xmlns="" xmlns:a14="http://schemas.microsoft.com/office/drawing/2010/main" w="9525">
                 <a:solidFill>
                   <a:srgbClr val="000000"/>
                 </a:solidFill>
@@ -1990,7 +2961,7 @@
           <a:p>
             <a:fld id="{FB7F6C47-B260-4BB6-8230-7D14D5CDE026}" type="datetimeFigureOut">
               <a:rPr lang="en-US" noProof="0" smtClean="0"/>
-              <a:t>6/19/2025</a:t>
+              <a:t>6/21/2025</a:t>
             </a:fld>
             <a:endParaRPr lang="en-US" noProof="0" dirty="0"/>
           </a:p>
@@ -2349,7 +3320,7 @@
           <a:p>
             <a:fld id="{FB7F6C47-B260-4BB6-8230-7D14D5CDE026}" type="datetimeFigureOut">
               <a:rPr lang="en-US" noProof="0" smtClean="0"/>
-              <a:t>6/19/2025</a:t>
+              <a:t>6/21/2025</a:t>
             </a:fld>
             <a:endParaRPr lang="en-US" noProof="0" dirty="0"/>
           </a:p>
@@ -2526,7 +3497,7 @@
           </a:effectLst>
           <a:extLst>
             <a:ext uri="{91240B29-F687-4f45-9708-019B960494DF}">
-              <a14:hiddenLine xmlns:a14="http://schemas.microsoft.com/office/drawing/2010/main" xmlns="" w="9525">
+              <a14:hiddenLine xmlns="" xmlns:a14="http://schemas.microsoft.com/office/drawing/2010/main" w="9525">
                 <a:solidFill>
                   <a:srgbClr val="000000"/>
                 </a:solidFill>
@@ -2854,7 +3825,7 @@
           <a:p>
             <a:fld id="{FB7F6C47-B260-4BB6-8230-7D14D5CDE026}" type="datetimeFigureOut">
               <a:rPr lang="en-US" noProof="0" smtClean="0"/>
-              <a:t>6/19/2025</a:t>
+              <a:t>6/21/2025</a:t>
             </a:fld>
             <a:endParaRPr lang="en-US" noProof="0" dirty="0"/>
           </a:p>
@@ -3031,7 +4002,7 @@
           </a:effectLst>
           <a:extLst>
             <a:ext uri="{91240B29-F687-4f45-9708-019B960494DF}">
-              <a14:hiddenLine xmlns:a14="http://schemas.microsoft.com/office/drawing/2010/main" xmlns="" w="9525">
+              <a14:hiddenLine xmlns="" xmlns:a14="http://schemas.microsoft.com/office/drawing/2010/main" w="9525">
                 <a:solidFill>
                   <a:srgbClr val="000000"/>
                 </a:solidFill>
@@ -3106,7 +4077,7 @@
           <a:p>
             <a:fld id="{FB7F6C47-B260-4BB6-8230-7D14D5CDE026}" type="datetimeFigureOut">
               <a:rPr lang="en-US" noProof="0" smtClean="0"/>
-              <a:t>6/19/2025</a:t>
+              <a:t>6/21/2025</a:t>
             </a:fld>
             <a:endParaRPr lang="en-US" noProof="0" dirty="0"/>
           </a:p>
@@ -3222,7 +4193,7 @@
           <a:p>
             <a:fld id="{FB7F6C47-B260-4BB6-8230-7D14D5CDE026}" type="datetimeFigureOut">
               <a:rPr lang="en-US" noProof="0" smtClean="0"/>
-              <a:t>6/19/2025</a:t>
+              <a:t>6/21/2025</a:t>
             </a:fld>
             <a:endParaRPr lang="en-US" noProof="0" dirty="0"/>
           </a:p>
@@ -3510,7 +4481,7 @@
           </a:effectLst>
           <a:extLst>
             <a:ext uri="{91240B29-F687-4f45-9708-019B960494DF}">
-              <a14:hiddenLine xmlns:a14="http://schemas.microsoft.com/office/drawing/2010/main" xmlns="" w="9525">
+              <a14:hiddenLine xmlns="" xmlns:a14="http://schemas.microsoft.com/office/drawing/2010/main" w="9525">
                 <a:solidFill>
                   <a:srgbClr val="000000"/>
                 </a:solidFill>
@@ -3715,7 +4686,7 @@
           <a:p>
             <a:fld id="{FB7F6C47-B260-4BB6-8230-7D14D5CDE026}" type="datetimeFigureOut">
               <a:rPr lang="en-US" noProof="0" smtClean="0"/>
-              <a:t>6/19/2025</a:t>
+              <a:t>6/21/2025</a:t>
             </a:fld>
             <a:endParaRPr lang="en-US" noProof="0" dirty="0"/>
           </a:p>
@@ -4230,7 +5201,7 @@
           <a:p>
             <a:fld id="{FB7F6C47-B260-4BB6-8230-7D14D5CDE026}" type="datetimeFigureOut">
               <a:rPr lang="en-US" noProof="0" smtClean="0"/>
-              <a:t>6/19/2025</a:t>
+              <a:t>6/21/2025</a:t>
             </a:fld>
             <a:endParaRPr lang="en-US" noProof="0" dirty="0"/>
           </a:p>
@@ -4626,7 +5597,7 @@
           <a:p>
             <a:fld id="{FB7F6C47-B260-4BB6-8230-7D14D5CDE026}" type="datetimeFigureOut">
               <a:rPr lang="en-US" noProof="0" smtClean="0"/>
-              <a:t>6/19/2025</a:t>
+              <a:t>6/21/2025</a:t>
             </a:fld>
             <a:endParaRPr lang="en-US" noProof="0" dirty="0"/>
           </a:p>
@@ -4805,7 +5776,7 @@
           </a:effectLst>
           <a:extLst>
             <a:ext uri="{91240B29-F687-4f45-9708-019B960494DF}">
-              <a14:hiddenLine xmlns:a14="http://schemas.microsoft.com/office/drawing/2010/main" xmlns="" w="9525">
+              <a14:hiddenLine xmlns="" xmlns:a14="http://schemas.microsoft.com/office/drawing/2010/main" w="9525">
                 <a:solidFill>
                   <a:srgbClr val="000000"/>
                 </a:solidFill>
@@ -4957,7 +5928,7 @@
           <a:p>
             <a:fld id="{FB7F6C47-B260-4BB6-8230-7D14D5CDE026}" type="datetimeFigureOut">
               <a:rPr lang="en-US" noProof="0" smtClean="0"/>
-              <a:t>6/19/2025</a:t>
+              <a:t>6/21/2025</a:t>
             </a:fld>
             <a:endParaRPr lang="en-US" noProof="0" dirty="0"/>
           </a:p>
@@ -5134,7 +6105,7 @@
           </a:effectLst>
           <a:extLst>
             <a:ext uri="{91240B29-F687-4f45-9708-019B960494DF}">
-              <a14:hiddenLine xmlns:a14="http://schemas.microsoft.com/office/drawing/2010/main" xmlns="" w="9525">
+              <a14:hiddenLine xmlns="" xmlns:a14="http://schemas.microsoft.com/office/drawing/2010/main" w="9525">
                 <a:solidFill>
                   <a:srgbClr val="000000"/>
                 </a:solidFill>
@@ -5355,7 +6326,7 @@
           <a:p>
             <a:fld id="{FB7F6C47-B260-4BB6-8230-7D14D5CDE026}" type="datetimeFigureOut">
               <a:rPr lang="en-US" noProof="0" smtClean="0"/>
-              <a:t>6/19/2025</a:t>
+              <a:t>6/21/2025</a:t>
             </a:fld>
             <a:endParaRPr lang="en-US" noProof="0" dirty="0"/>
           </a:p>
@@ -5607,7 +6578,7 @@
           <a:p>
             <a:fld id="{FB7F6C47-B260-4BB6-8230-7D14D5CDE026}" type="datetimeFigureOut">
               <a:rPr lang="en-US" noProof="0" smtClean="0"/>
-              <a:t>6/19/2025</a:t>
+              <a:t>6/21/2025</a:t>
             </a:fld>
             <a:endParaRPr lang="en-US" noProof="0" dirty="0"/>
           </a:p>
@@ -5784,7 +6755,7 @@
           </a:effectLst>
           <a:extLst>
             <a:ext uri="{91240B29-F687-4f45-9708-019B960494DF}">
-              <a14:hiddenLine xmlns:a14="http://schemas.microsoft.com/office/drawing/2010/main" xmlns="" w="9525">
+              <a14:hiddenLine xmlns="" xmlns:a14="http://schemas.microsoft.com/office/drawing/2010/main" w="9525">
                 <a:solidFill>
                   <a:srgbClr val="000000"/>
                 </a:solidFill>
@@ -6027,7 +6998,7 @@
           <a:p>
             <a:fld id="{FB7F6C47-B260-4BB6-8230-7D14D5CDE026}" type="datetimeFigureOut">
               <a:rPr lang="en-US" noProof="0" smtClean="0"/>
-              <a:t>6/19/2025</a:t>
+              <a:t>6/21/2025</a:t>
             </a:fld>
             <a:endParaRPr lang="en-US" noProof="0" dirty="0"/>
           </a:p>
@@ -6204,7 +7175,7 @@
           </a:effectLst>
           <a:extLst>
             <a:ext uri="{91240B29-F687-4f45-9708-019B960494DF}">
-              <a14:hiddenLine xmlns:a14="http://schemas.microsoft.com/office/drawing/2010/main" xmlns="" w="9525">
+              <a14:hiddenLine xmlns="" xmlns:a14="http://schemas.microsoft.com/office/drawing/2010/main" w="9525">
                 <a:solidFill>
                   <a:srgbClr val="000000"/>
                 </a:solidFill>
@@ -6441,7 +7412,7 @@
           <a:p>
             <a:fld id="{FB7F6C47-B260-4BB6-8230-7D14D5CDE026}" type="datetimeFigureOut">
               <a:rPr lang="en-US" noProof="0" smtClean="0"/>
-              <a:t>6/19/2025</a:t>
+              <a:t>6/21/2025</a:t>
             </a:fld>
             <a:endParaRPr lang="en-US" noProof="0" dirty="0"/>
           </a:p>
@@ -6864,7 +7835,7 @@
           <a:p>
             <a:fld id="{FB7F6C47-B260-4BB6-8230-7D14D5CDE026}" type="datetimeFigureOut">
               <a:rPr lang="en-US" noProof="0" smtClean="0"/>
-              <a:t>6/19/2025</a:t>
+              <a:t>6/21/2025</a:t>
             </a:fld>
             <a:endParaRPr lang="en-US" noProof="0" dirty="0"/>
           </a:p>
@@ -7041,7 +8012,7 @@
           </a:effectLst>
           <a:extLst>
             <a:ext uri="{91240B29-F687-4f45-9708-019B960494DF}">
-              <a14:hiddenLine xmlns:a14="http://schemas.microsoft.com/office/drawing/2010/main" xmlns="" w="9525">
+              <a14:hiddenLine xmlns="" xmlns:a14="http://schemas.microsoft.com/office/drawing/2010/main" w="9525">
                 <a:solidFill>
                   <a:srgbClr val="000000"/>
                 </a:solidFill>
@@ -7191,7 +8162,7 @@
           <a:p>
             <a:fld id="{FB7F6C47-B260-4BB6-8230-7D14D5CDE026}" type="datetimeFigureOut">
               <a:rPr lang="en-US" noProof="0" smtClean="0"/>
-              <a:t>6/19/2025</a:t>
+              <a:t>6/21/2025</a:t>
             </a:fld>
             <a:endParaRPr lang="en-US" noProof="0" dirty="0"/>
           </a:p>
@@ -7755,7 +8726,7 @@
           <a:p>
             <a:fld id="{FB7F6C47-B260-4BB6-8230-7D14D5CDE026}" type="datetimeFigureOut">
               <a:rPr lang="en-US" noProof="0" smtClean="0"/>
-              <a:t>6/19/2025</a:t>
+              <a:t>6/21/2025</a:t>
             </a:fld>
             <a:endParaRPr lang="en-US" noProof="0" dirty="0"/>
           </a:p>
@@ -7932,7 +8903,7 @@
           </a:effectLst>
           <a:extLst>
             <a:ext uri="{91240B29-F687-4f45-9708-019B960494DF}">
-              <a14:hiddenLine xmlns:a14="http://schemas.microsoft.com/office/drawing/2010/main" xmlns="" w="9525">
+              <a14:hiddenLine xmlns="" xmlns:a14="http://schemas.microsoft.com/office/drawing/2010/main" w="9525">
                 <a:solidFill>
                   <a:srgbClr val="000000"/>
                 </a:solidFill>
@@ -8070,7 +9041,7 @@
           <a:p>
             <a:fld id="{FB7F6C47-B260-4BB6-8230-7D14D5CDE026}" type="datetimeFigureOut">
               <a:rPr lang="en-US" noProof="0" smtClean="0"/>
-              <a:t>6/19/2025</a:t>
+              <a:t>6/21/2025</a:t>
             </a:fld>
             <a:endParaRPr lang="en-US" noProof="0" dirty="0"/>
           </a:p>
@@ -8334,7 +9305,7 @@
           <a:p>
             <a:fld id="{FB7F6C47-B260-4BB6-8230-7D14D5CDE026}" type="datetimeFigureOut">
               <a:rPr lang="en-US" noProof="0" smtClean="0"/>
-              <a:t>6/19/2025</a:t>
+              <a:t>6/21/2025</a:t>
             </a:fld>
             <a:endParaRPr lang="en-US" noProof="0" dirty="0"/>
           </a:p>
@@ -8856,36 +9827,44 @@
         </p:nvSpPr>
         <p:spPr>
           <a:xfrm>
-            <a:off x="810001" y="5280847"/>
-            <a:ext cx="10572000" cy="1217090"/>
+            <a:off x="810000" y="5124435"/>
+            <a:ext cx="10572000" cy="1577153"/>
           </a:xfrm>
         </p:spPr>
         <p:txBody>
           <a:bodyPr>
-            <a:normAutofit fontScale="62500" lnSpcReduction="20000"/>
+            <a:normAutofit/>
           </a:bodyPr>
           <a:lstStyle/>
           <a:p>
             <a:r>
-              <a:rPr lang="en-IN" b="1" dirty="0"/>
+              <a:rPr lang="en-IN" sz="1600" b="1" dirty="0">
+                <a:latin typeface="Barlow SemiBold" panose="00000700000000000000" pitchFamily="2" charset="0"/>
+              </a:rPr>
               <a:t>Presented by: Shahil Kumar (MML2023008)</a:t>
             </a:r>
           </a:p>
           <a:p>
             <a:r>
-              <a:rPr lang="en-IN" b="1" dirty="0"/>
+              <a:rPr lang="en-IN" sz="1600" b="1" dirty="0">
+                <a:latin typeface="Barlow SemiBold" panose="00000700000000000000" pitchFamily="2" charset="0"/>
+              </a:rPr>
               <a:t>    MTech. IT (MLIS)</a:t>
             </a:r>
           </a:p>
           <a:p>
             <a:r>
-              <a:rPr lang="en-IN" b="1" dirty="0"/>
+              <a:rPr lang="en-IN" sz="1600" b="1" dirty="0">
+                <a:latin typeface="Barlow SemiBold" panose="00000700000000000000" pitchFamily="2" charset="0"/>
+              </a:rPr>
               <a:t>June 25, 2025</a:t>
             </a:r>
           </a:p>
           <a:p>
             <a:r>
-              <a:rPr lang="en-IN" dirty="0"/>
+              <a:rPr lang="en-IN" sz="1600" dirty="0">
+                <a:latin typeface="Barlow SemiBold" panose="00000700000000000000" pitchFamily="2" charset="0"/>
+              </a:rPr>
               <a:t>Supervisor: Dr. Muneendra Ojha</a:t>
             </a:r>
           </a:p>
@@ -8905,6 +9884,411 @@
 </file>
 
 <file path=ppt/slides/slide10.xml><?xml version="1.0" encoding="utf-8"?>
+<p:sld xmlns:a="http://schemas.openxmlformats.org/drawingml/2006/main" xmlns:r="http://schemas.openxmlformats.org/officeDocument/2006/relationships" xmlns:p="http://schemas.openxmlformats.org/presentationml/2006/main">
+  <p:cSld>
+    <p:spTree>
+      <p:nvGrpSpPr>
+        <p:cNvPr id="1" name="">
+          <a:extLst>
+            <a:ext uri="{FF2B5EF4-FFF2-40B4-BE49-F238E27FC236}">
+              <a16:creationId xmlns:a16="http://schemas.microsoft.com/office/drawing/2014/main" id="{4C7DD1EF-647A-B110-D006-AD7A1BE1A145}"/>
+            </a:ext>
+          </a:extLst>
+        </p:cNvPr>
+        <p:cNvGrpSpPr/>
+        <p:nvPr/>
+      </p:nvGrpSpPr>
+      <p:grpSpPr>
+        <a:xfrm>
+          <a:off x="0" y="0"/>
+          <a:ext cx="0" cy="0"/>
+          <a:chOff x="0" y="0"/>
+          <a:chExt cx="0" cy="0"/>
+        </a:xfrm>
+      </p:grpSpPr>
+      <p:sp>
+        <p:nvSpPr>
+          <p:cNvPr id="2" name="Title 1">
+            <a:extLst>
+              <a:ext uri="{FF2B5EF4-FFF2-40B4-BE49-F238E27FC236}">
+                <a16:creationId xmlns:a16="http://schemas.microsoft.com/office/drawing/2014/main" id="{9C520AAC-7F2C-CE1C-1B41-06BF051AAF83}"/>
+              </a:ext>
+            </a:extLst>
+          </p:cNvPr>
+          <p:cNvSpPr>
+            <a:spLocks noGrp="1"/>
+          </p:cNvSpPr>
+          <p:nvPr>
+            <p:ph type="title"/>
+          </p:nvPr>
+        </p:nvSpPr>
+        <p:spPr/>
+        <p:txBody>
+          <a:bodyPr/>
+          <a:lstStyle/>
+          <a:p>
+            <a:r>
+              <a:rPr lang="en-IN" sz="2800" dirty="0">
+                <a:latin typeface="Barlow SemiBold" panose="00000700000000000000" pitchFamily="2" charset="0"/>
+              </a:rPr>
+              <a:t>Lion: A Novel Alternative</a:t>
+            </a:r>
+            <a:r>
+              <a:rPr lang="en-IN" sz="2800" b="1" baseline="30000" dirty="0">
+                <a:latin typeface="Barlow SemiBold" panose="00000700000000000000" pitchFamily="2" charset="0"/>
+              </a:rPr>
+              <a:t>[4]</a:t>
+            </a:r>
+          </a:p>
+        </p:txBody>
+      </p:sp>
+      <p:sp>
+        <p:nvSpPr>
+          <p:cNvPr id="6" name="TextBox 5">
+            <a:extLst>
+              <a:ext uri="{FF2B5EF4-FFF2-40B4-BE49-F238E27FC236}">
+                <a16:creationId xmlns:a16="http://schemas.microsoft.com/office/drawing/2014/main" id="{364D9E65-4ACF-AB7F-EB7E-92497B1D7DA2}"/>
+              </a:ext>
+            </a:extLst>
+          </p:cNvPr>
+          <p:cNvSpPr txBox="1"/>
+          <p:nvPr/>
+        </p:nvSpPr>
+        <p:spPr>
+          <a:xfrm>
+            <a:off x="421105" y="2346158"/>
+            <a:ext cx="7130478" cy="4401205"/>
+          </a:xfrm>
+          <a:prstGeom prst="rect">
+            <a:avLst/>
+          </a:prstGeom>
+          <a:noFill/>
+        </p:spPr>
+        <p:txBody>
+          <a:bodyPr wrap="none" rtlCol="0">
+            <a:spAutoFit/>
+          </a:bodyPr>
+          <a:lstStyle/>
+          <a:p>
+            <a:endParaRPr lang="en-IN" sz="2000" dirty="0">
+              <a:latin typeface="Barlow" panose="00000500000000000000" pitchFamily="2" charset="0"/>
+            </a:endParaRPr>
+          </a:p>
+          <a:p>
+            <a:r>
+              <a:rPr lang="en-IN" sz="2000" dirty="0">
+                <a:latin typeface="Barlow" panose="00000500000000000000" pitchFamily="2" charset="0"/>
+              </a:rPr>
+              <a:t>Revolutionary Approach:</a:t>
+            </a:r>
+          </a:p>
+          <a:p>
+            <a:r>
+              <a:rPr lang="en-IN" sz="2000" dirty="0">
+                <a:latin typeface="Barlow" panose="00000500000000000000" pitchFamily="2" charset="0"/>
+              </a:rPr>
+              <a:t>• Sign-based momentum: update = sign(momentum) × </a:t>
+            </a:r>
+            <a:r>
+              <a:rPr lang="en-IN" sz="2000" dirty="0" err="1">
+                <a:latin typeface="Barlow" panose="00000500000000000000" pitchFamily="2" charset="0"/>
+              </a:rPr>
+              <a:t>lr</a:t>
+            </a:r>
+            <a:endParaRPr lang="en-IN" sz="2000" dirty="0">
+              <a:latin typeface="Barlow" panose="00000500000000000000" pitchFamily="2" charset="0"/>
+            </a:endParaRPr>
+          </a:p>
+          <a:p>
+            <a:r>
+              <a:rPr lang="en-IN" sz="2000" dirty="0">
+                <a:latin typeface="Barlow" panose="00000500000000000000" pitchFamily="2" charset="0"/>
+              </a:rPr>
+              <a:t>• Simplified computation vs Adam family</a:t>
+            </a:r>
+          </a:p>
+          <a:p>
+            <a:r>
+              <a:rPr lang="en-IN" sz="2000" dirty="0">
+                <a:latin typeface="Barlow" panose="00000500000000000000" pitchFamily="2" charset="0"/>
+              </a:rPr>
+              <a:t>• Reduced memory requirements</a:t>
+            </a:r>
+          </a:p>
+          <a:p>
+            <a:endParaRPr lang="en-IN" sz="2000" dirty="0">
+              <a:latin typeface="Barlow" panose="00000500000000000000" pitchFamily="2" charset="0"/>
+            </a:endParaRPr>
+          </a:p>
+          <a:p>
+            <a:r>
+              <a:rPr lang="en-IN" sz="2000" dirty="0">
+                <a:latin typeface="Barlow" panose="00000500000000000000" pitchFamily="2" charset="0"/>
+              </a:rPr>
+              <a:t>Proven Results:</a:t>
+            </a:r>
+          </a:p>
+          <a:p>
+            <a:r>
+              <a:rPr lang="en-IN" sz="2000" dirty="0">
+                <a:latin typeface="Barlow" panose="00000500000000000000" pitchFamily="2" charset="0"/>
+              </a:rPr>
+              <a:t>✓ Competitive performance in computer vision</a:t>
+            </a:r>
+          </a:p>
+          <a:p>
+            <a:r>
+              <a:rPr lang="en-IN" sz="2000" dirty="0">
+                <a:latin typeface="Barlow" panose="00000500000000000000" pitchFamily="2" charset="0"/>
+              </a:rPr>
+              <a:t>✓ Lower computational overhead</a:t>
+            </a:r>
+          </a:p>
+          <a:p>
+            <a:r>
+              <a:rPr lang="en-IN" sz="2000" dirty="0">
+                <a:latin typeface="Barlow" panose="00000500000000000000" pitchFamily="2" charset="0"/>
+              </a:rPr>
+              <a:t>✓ Faster convergence in some tasks</a:t>
+            </a:r>
+          </a:p>
+          <a:p>
+            <a:endParaRPr lang="en-IN" sz="2000" dirty="0">
+              <a:latin typeface="Barlow" panose="00000500000000000000" pitchFamily="2" charset="0"/>
+            </a:endParaRPr>
+          </a:p>
+          <a:p>
+            <a:r>
+              <a:rPr lang="en-IN" sz="2000" dirty="0">
+                <a:latin typeface="Barlow" panose="00000500000000000000" pitchFamily="2" charset="0"/>
+              </a:rPr>
+              <a:t>Research Gap:</a:t>
+            </a:r>
+          </a:p>
+          <a:p>
+            <a:r>
+              <a:rPr lang="en-IN" sz="2000" dirty="0">
+                <a:latin typeface="Barlow" panose="00000500000000000000" pitchFamily="2" charset="0"/>
+              </a:rPr>
+              <a:t>❌ Unexplored in NLP/Information Retrieval</a:t>
+            </a:r>
+          </a:p>
+          <a:p>
+            <a:r>
+              <a:rPr lang="en-IN" sz="2000" dirty="0">
+                <a:latin typeface="Barlow" panose="00000500000000000000" pitchFamily="2" charset="0"/>
+              </a:rPr>
+              <a:t>❌ No systematic comparison with AdamW for cross-encoders</a:t>
+            </a:r>
+          </a:p>
+        </p:txBody>
+      </p:sp>
+    </p:spTree>
+    <p:extLst>
+      <p:ext uri="{BB962C8B-B14F-4D97-AF65-F5344CB8AC3E}">
+        <p14:creationId xmlns:p14="http://schemas.microsoft.com/office/powerpoint/2010/main" val="138550475"/>
+      </p:ext>
+    </p:extLst>
+  </p:cSld>
+  <p:clrMapOvr>
+    <a:masterClrMapping/>
+  </p:clrMapOvr>
+</p:sld>
+</file>
+
+<file path=ppt/slides/slide11.xml><?xml version="1.0" encoding="utf-8"?>
+<p:sld xmlns:a="http://schemas.openxmlformats.org/drawingml/2006/main" xmlns:r="http://schemas.openxmlformats.org/officeDocument/2006/relationships" xmlns:p="http://schemas.openxmlformats.org/presentationml/2006/main">
+  <p:cSld>
+    <p:spTree>
+      <p:nvGrpSpPr>
+        <p:cNvPr id="1" name="">
+          <a:extLst>
+            <a:ext uri="{FF2B5EF4-FFF2-40B4-BE49-F238E27FC236}">
+              <a16:creationId xmlns:a16="http://schemas.microsoft.com/office/drawing/2014/main" id="{5FCC79B8-527C-C1F7-90FC-3D586AF97EF2}"/>
+            </a:ext>
+          </a:extLst>
+        </p:cNvPr>
+        <p:cNvGrpSpPr/>
+        <p:nvPr/>
+      </p:nvGrpSpPr>
+      <p:grpSpPr>
+        <a:xfrm>
+          <a:off x="0" y="0"/>
+          <a:ext cx="0" cy="0"/>
+          <a:chOff x="0" y="0"/>
+          <a:chExt cx="0" cy="0"/>
+        </a:xfrm>
+      </p:grpSpPr>
+      <p:sp>
+        <p:nvSpPr>
+          <p:cNvPr id="2" name="Title 1">
+            <a:extLst>
+              <a:ext uri="{FF2B5EF4-FFF2-40B4-BE49-F238E27FC236}">
+                <a16:creationId xmlns:a16="http://schemas.microsoft.com/office/drawing/2014/main" id="{E7D8AF39-4FFC-8AA2-DC58-E0E8CA1E1040}"/>
+              </a:ext>
+            </a:extLst>
+          </p:cNvPr>
+          <p:cNvSpPr>
+            <a:spLocks noGrp="1"/>
+          </p:cNvSpPr>
+          <p:nvPr>
+            <p:ph type="title"/>
+          </p:nvPr>
+        </p:nvSpPr>
+        <p:spPr bwMode="white"/>
+        <p:txBody>
+          <a:bodyPr/>
+          <a:lstStyle/>
+          <a:p>
+            <a:r>
+              <a:rPr lang="en-US" sz="2800" dirty="0">
+                <a:latin typeface="Barlow SemiBold" panose="00000700000000000000" pitchFamily="2" charset="0"/>
+              </a:rPr>
+              <a:t>Lion Algorithm</a:t>
+            </a:r>
+          </a:p>
+        </p:txBody>
+      </p:sp>
+      <p:pic>
+        <p:nvPicPr>
+          <p:cNvPr id="8" name="@holatex&#10;\begin{document}&#10;\center&#10;\Large&#10;Lion Optimizer&#10;\medskip&#10;&#10;\begin{align}&#10;c_t &amp;= \beta_1 m_{t-1} + (1 - \beta_1) g_t \\&#10;\theta_t &amp;= \theta_{t-1} - \eta \left( \text{sign}(c_t) + \lambda \theta_{t-1} \right) \\&#10;m_t &amp;= \beta_2 m_{t-1} + (1 - \beta_2) g_t&#10;\end{align}&#10;&#10;\end{document}">
+            <a:extLst>
+              <a:ext uri="{FF2B5EF4-FFF2-40B4-BE49-F238E27FC236}">
+                <a16:creationId xmlns:a16="http://schemas.microsoft.com/office/drawing/2014/main" id="{5F20DDE9-9919-6AA6-57C5-2715FF742D7B}"/>
+              </a:ext>
+            </a:extLst>
+          </p:cNvPr>
+          <p:cNvPicPr>
+            <a:picLocks/>
+          </p:cNvPicPr>
+          <p:nvPr/>
+        </p:nvPicPr>
+        <p:blipFill>
+          <a:blip r:embed="rId3"/>
+          <a:stretch>
+            <a:fillRect/>
+          </a:stretch>
+        </p:blipFill>
+        <p:spPr>
+          <a:xfrm>
+            <a:off x="809999" y="3143081"/>
+            <a:ext cx="5052045" cy="2487698"/>
+          </a:xfrm>
+          <a:prstGeom prst="rect">
+            <a:avLst/>
+          </a:prstGeom>
+        </p:spPr>
+      </p:pic>
+      <p:pic>
+        <p:nvPicPr>
+          <p:cNvPr id="3" name="@holatex&#10;\begin{document}&#10;\center&#10;where:&#10;\begin{itemize}&#10;    \item $c_t$: interpolated momentum for update direction&#10;    \item $\text{sign}(\cdot)$: element-wise sign function&#10;    \item Other parameters follow similar definitions as AdamW&#10;\end{itemize}&#10;\end{document}">
+            <a:extLst>
+              <a:ext uri="{FF2B5EF4-FFF2-40B4-BE49-F238E27FC236}">
+                <a16:creationId xmlns:a16="http://schemas.microsoft.com/office/drawing/2014/main" id="{996BC0B4-312F-574A-8729-9E94B96A1AB9}"/>
+              </a:ext>
+            </a:extLst>
+          </p:cNvPr>
+          <p:cNvPicPr>
+            <a:picLocks/>
+          </p:cNvPicPr>
+          <p:nvPr/>
+        </p:nvPicPr>
+        <p:blipFill>
+          <a:blip r:embed="rId4"/>
+          <a:stretch>
+            <a:fillRect/>
+          </a:stretch>
+        </p:blipFill>
+        <p:spPr>
+          <a:xfrm>
+            <a:off x="6329956" y="3687882"/>
+            <a:ext cx="4599964" cy="1667013"/>
+          </a:xfrm>
+          <a:prstGeom prst="rect">
+            <a:avLst/>
+          </a:prstGeom>
+        </p:spPr>
+      </p:pic>
+    </p:spTree>
+    <p:extLst>
+      <p:ext uri="{BB962C8B-B14F-4D97-AF65-F5344CB8AC3E}">
+        <p14:creationId xmlns:p14="http://schemas.microsoft.com/office/powerpoint/2010/main" val="1087586266"/>
+      </p:ext>
+    </p:extLst>
+  </p:cSld>
+  <p:clrMapOvr>
+    <a:masterClrMapping/>
+  </p:clrMapOvr>
+</p:sld>
+</file>
+
+<file path=ppt/slides/slide12.xml><?xml version="1.0" encoding="utf-8"?>
+<p:sld xmlns:a="http://schemas.openxmlformats.org/drawingml/2006/main" xmlns:r="http://schemas.openxmlformats.org/officeDocument/2006/relationships" xmlns:p="http://schemas.openxmlformats.org/presentationml/2006/main">
+  <p:cSld>
+    <p:spTree>
+      <p:nvGrpSpPr>
+        <p:cNvPr id="1" name="">
+          <a:extLst>
+            <a:ext uri="{FF2B5EF4-FFF2-40B4-BE49-F238E27FC236}">
+              <a16:creationId xmlns:a16="http://schemas.microsoft.com/office/drawing/2014/main" id="{0E9215DC-A185-2346-AA66-C3A301D1D47E}"/>
+            </a:ext>
+          </a:extLst>
+        </p:cNvPr>
+        <p:cNvGrpSpPr/>
+        <p:nvPr/>
+      </p:nvGrpSpPr>
+      <p:grpSpPr>
+        <a:xfrm>
+          <a:off x="0" y="0"/>
+          <a:ext cx="0" cy="0"/>
+          <a:chOff x="0" y="0"/>
+          <a:chExt cx="0" cy="0"/>
+        </a:xfrm>
+      </p:grpSpPr>
+      <p:sp>
+        <p:nvSpPr>
+          <p:cNvPr id="2" name="Title 1">
+            <a:extLst>
+              <a:ext uri="{FF2B5EF4-FFF2-40B4-BE49-F238E27FC236}">
+                <a16:creationId xmlns:a16="http://schemas.microsoft.com/office/drawing/2014/main" id="{C5ECB4B4-FA53-73CE-02A8-B9080F7EF0C2}"/>
+              </a:ext>
+            </a:extLst>
+          </p:cNvPr>
+          <p:cNvSpPr>
+            <a:spLocks noGrp="1"/>
+          </p:cNvSpPr>
+          <p:nvPr>
+            <p:ph type="title"/>
+          </p:nvPr>
+        </p:nvSpPr>
+        <p:spPr bwMode="white"/>
+        <p:txBody>
+          <a:bodyPr/>
+          <a:lstStyle/>
+          <a:p>
+            <a:r>
+              <a:rPr lang="en-US" sz="4000" dirty="0">
+                <a:latin typeface="Barlow ExtraBold" panose="00000900000000000000" pitchFamily="2" charset="0"/>
+              </a:rPr>
+              <a:t>Methodology</a:t>
+            </a:r>
+          </a:p>
+        </p:txBody>
+      </p:sp>
+    </p:spTree>
+    <p:extLst>
+      <p:ext uri="{BB962C8B-B14F-4D97-AF65-F5344CB8AC3E}">
+        <p14:creationId xmlns:p14="http://schemas.microsoft.com/office/powerpoint/2010/main" val="3883136866"/>
+      </p:ext>
+    </p:extLst>
+  </p:cSld>
+  <p:clrMapOvr>
+    <a:masterClrMapping/>
+  </p:clrMapOvr>
+</p:sld>
+</file>
+
+<file path=ppt/slides/slide13.xml><?xml version="1.0" encoding="utf-8"?>
 <p:sld xmlns:a="http://schemas.openxmlformats.org/drawingml/2006/main" xmlns:r="http://schemas.openxmlformats.org/officeDocument/2006/relationships" xmlns:p="http://schemas.openxmlformats.org/presentationml/2006/main">
   <p:cSld>
     <p:spTree>
@@ -8991,17 +10375,20 @@
         <p:spPr>
           <a:xfrm>
             <a:off x="741512" y="1635853"/>
-            <a:ext cx="10708975" cy="5044557"/>
+            <a:ext cx="10953183" cy="5044557"/>
           </a:xfrm>
         </p:spPr>
         <p:txBody>
           <a:bodyPr>
-            <a:normAutofit fontScale="92500" lnSpcReduction="20000"/>
+            <a:normAutofit fontScale="77500" lnSpcReduction="20000"/>
           </a:bodyPr>
           <a:lstStyle/>
           <a:p>
             <a:r>
-              <a:rPr lang="en-IN" sz="3000" b="1" dirty="0">
+              <a:rPr lang="en-IN" sz="3100" b="1" dirty="0">
+                <a:solidFill>
+                  <a:schemeClr val="tx2"/>
+                </a:solidFill>
                 <a:latin typeface="Barlow Medium" panose="00000600000000000000" pitchFamily="2" charset="0"/>
               </a:rPr>
               <a:t>Dataset Configuration</a:t>
@@ -9010,49 +10397,73 @@
           <a:p>
             <a:pPr lvl="1"/>
             <a:r>
-              <a:rPr lang="en-IN" sz="1800" b="1" dirty="0">
+              <a:rPr lang="en-IN" sz="2400" b="1" dirty="0">
                 <a:latin typeface="Barlow Medium" panose="00000600000000000000" pitchFamily="2" charset="0"/>
               </a:rPr>
               <a:t>T</a:t>
             </a:r>
             <a:r>
-              <a:rPr lang="en-IN" sz="1800" b="1" dirty="0">
+              <a:rPr lang="en-IN" sz="2400" b="1" dirty="0">
                 <a:latin typeface="Barlow" panose="00000500000000000000" pitchFamily="2" charset="0"/>
               </a:rPr>
               <a:t>raining:</a:t>
             </a:r>
             <a:r>
-              <a:rPr lang="en-IN" sz="1800" dirty="0">
+              <a:rPr lang="en-IN" sz="2400" dirty="0">
                 <a:latin typeface="Barlow" panose="00000500000000000000" pitchFamily="2" charset="0"/>
               </a:rPr>
-              <a:t> MS MARCO Passage Ranking (~500K query-passage pairs)</a:t>
+              <a:t> MS MARCO</a:t>
+            </a:r>
+            <a:r>
+              <a:rPr lang="en-IN" sz="2400" b="1" baseline="30000" dirty="0">
+                <a:latin typeface="Barlow" panose="00000500000000000000" pitchFamily="2" charset="0"/>
+              </a:rPr>
+              <a:t>[9]</a:t>
+            </a:r>
+            <a:r>
+              <a:rPr lang="en-IN" sz="2400" dirty="0">
+                <a:latin typeface="Barlow" panose="00000500000000000000" pitchFamily="2" charset="0"/>
+              </a:rPr>
+              <a:t> Passage Ranking (~500K query-passage pairs)</a:t>
             </a:r>
           </a:p>
           <a:p>
             <a:pPr lvl="1"/>
             <a:r>
-              <a:rPr lang="en-IN" sz="1800" b="1" dirty="0">
+              <a:rPr lang="en-IN" sz="2400" b="1" dirty="0">
                 <a:latin typeface="Barlow" panose="00000500000000000000" pitchFamily="2" charset="0"/>
               </a:rPr>
               <a:t>Evaluation:</a:t>
             </a:r>
             <a:r>
-              <a:rPr lang="en-IN" sz="1800" dirty="0">
+              <a:rPr lang="en-IN" sz="2400" dirty="0">
                 <a:latin typeface="Barlow" panose="00000500000000000000" pitchFamily="2" charset="0"/>
               </a:rPr>
-              <a:t> TREC DL 2019 (43 queries with comprehensive relevance judgments)</a:t>
+              <a:t> TREC DL</a:t>
+            </a:r>
+            <a:r>
+              <a:rPr lang="en-IN" sz="2400" b="1" baseline="30000" dirty="0">
+                <a:latin typeface="Barlow" panose="00000500000000000000" pitchFamily="2" charset="0"/>
+              </a:rPr>
+              <a:t>[8]</a:t>
+            </a:r>
+            <a:r>
+              <a:rPr lang="en-IN" sz="2400" dirty="0">
+                <a:latin typeface="Barlow" panose="00000500000000000000" pitchFamily="2" charset="0"/>
+              </a:rPr>
+              <a:t> 2019 (43 queries with comprehensive relevance judgments)</a:t>
             </a:r>
           </a:p>
           <a:p>
             <a:pPr lvl="1"/>
             <a:r>
-              <a:rPr lang="en-IN" sz="1800" b="1" dirty="0">
+              <a:rPr lang="en-IN" sz="2400" b="1" dirty="0">
                 <a:latin typeface="Barlow" panose="00000500000000000000" pitchFamily="2" charset="0"/>
               </a:rPr>
               <a:t>Metrics:</a:t>
             </a:r>
             <a:r>
-              <a:rPr lang="en-IN" sz="1800" dirty="0">
+              <a:rPr lang="en-IN" sz="2400" dirty="0">
                 <a:latin typeface="Barlow" panose="00000500000000000000" pitchFamily="2" charset="0"/>
               </a:rPr>
               <a:t> NDCG@10, MAP, MRR@10, Recall@10, R-Precision, P@10</a:t>
@@ -9060,7 +10471,10 @@
           </a:p>
           <a:p>
             <a:r>
-              <a:rPr lang="en-IN" sz="3000" b="1" dirty="0">
+              <a:rPr lang="en-IN" sz="3100" b="1" dirty="0">
+                <a:solidFill>
+                  <a:schemeClr val="tx2"/>
+                </a:solidFill>
                 <a:latin typeface="Barlow Medium" panose="00000600000000000000" pitchFamily="2" charset="0"/>
               </a:rPr>
               <a:t>Infrastructure</a:t>
@@ -9069,28 +10483,34 @@
           <a:p>
             <a:pPr lvl="1"/>
             <a:r>
-              <a:rPr lang="en-IN" sz="1800" b="1" dirty="0">
+              <a:rPr lang="en-IN" sz="2400" b="1" dirty="0">
                 <a:latin typeface="Barlow" panose="00000500000000000000" pitchFamily="2" charset="0"/>
               </a:rPr>
               <a:t>Platform:</a:t>
             </a:r>
             <a:r>
-              <a:rPr lang="en-IN" sz="1800" dirty="0">
+              <a:rPr lang="en-IN" sz="2400" dirty="0">
                 <a:latin typeface="Barlow" panose="00000500000000000000" pitchFamily="2" charset="0"/>
               </a:rPr>
               <a:t> Modal cloud computing</a:t>
             </a:r>
+            <a:r>
+              <a:rPr lang="en-IN" sz="2400" b="1" baseline="30000" dirty="0">
+                <a:latin typeface="Barlow" panose="00000500000000000000" pitchFamily="2" charset="0"/>
+              </a:rPr>
+              <a:t>[10]</a:t>
+            </a:r>
           </a:p>
           <a:p>
             <a:pPr lvl="1"/>
             <a:r>
-              <a:rPr lang="en-IN" sz="1800" b="1" dirty="0">
+              <a:rPr lang="en-IN" sz="2400" b="1" dirty="0">
                 <a:latin typeface="Barlow" panose="00000500000000000000" pitchFamily="2" charset="0"/>
               </a:rPr>
               <a:t>Hardware:</a:t>
             </a:r>
             <a:r>
-              <a:rPr lang="en-IN" sz="1800" dirty="0">
+              <a:rPr lang="en-IN" sz="2400" dirty="0">
                 <a:latin typeface="Barlow" panose="00000500000000000000" pitchFamily="2" charset="0"/>
               </a:rPr>
               <a:t> 3 × NVIDIA L40S GPUs</a:t>
@@ -9099,28 +10519,34 @@
           <a:p>
             <a:pPr lvl="1"/>
             <a:r>
-              <a:rPr lang="en-IN" sz="1800" b="1" dirty="0">
+              <a:rPr lang="en-IN" sz="2400" b="1" dirty="0">
                 <a:latin typeface="Barlow" panose="00000500000000000000" pitchFamily="2" charset="0"/>
               </a:rPr>
               <a:t>Monitoring:</a:t>
             </a:r>
             <a:r>
-              <a:rPr lang="en-IN" sz="1800" dirty="0">
+              <a:rPr lang="en-IN" sz="2400" dirty="0">
                 <a:latin typeface="Barlow" panose="00000500000000000000" pitchFamily="2" charset="0"/>
               </a:rPr>
               <a:t> Weights &amp; Biases</a:t>
             </a:r>
+            <a:r>
+              <a:rPr lang="en-IN" sz="2400" b="1" baseline="30000" dirty="0">
+                <a:latin typeface="Barlow" panose="00000500000000000000" pitchFamily="2" charset="0"/>
+              </a:rPr>
+              <a:t>[11]</a:t>
+            </a:r>
           </a:p>
           <a:p>
             <a:pPr lvl="1"/>
             <a:r>
-              <a:rPr lang="en-IN" sz="1800" b="1" dirty="0">
+              <a:rPr lang="en-IN" sz="2400" b="1" dirty="0">
                 <a:latin typeface="Barlow" panose="00000500000000000000" pitchFamily="2" charset="0"/>
               </a:rPr>
               <a:t>Training:</a:t>
             </a:r>
             <a:r>
-              <a:rPr lang="en-IN" sz="1800" dirty="0">
+              <a:rPr lang="en-IN" sz="2400" dirty="0">
                 <a:latin typeface="Barlow" panose="00000500000000000000" pitchFamily="2" charset="0"/>
               </a:rPr>
               <a:t> 3 epochs per configuration</a:t>
@@ -9128,7 +10554,10 @@
           </a:p>
           <a:p>
             <a:r>
-              <a:rPr lang="en-IN" sz="3000" b="1" dirty="0">
+              <a:rPr lang="en-IN" sz="3100" b="1" dirty="0">
+                <a:solidFill>
+                  <a:schemeClr val="tx2"/>
+                </a:solidFill>
                 <a:latin typeface="Barlow Medium" panose="00000600000000000000" pitchFamily="2" charset="0"/>
               </a:rPr>
               <a:t>Experimental Design</a:t>
@@ -9137,13 +10566,13 @@
           <a:p>
             <a:pPr lvl="1"/>
             <a:r>
-              <a:rPr lang="en-IN" sz="1800" b="1" dirty="0">
+              <a:rPr lang="en-IN" sz="2400" b="1" dirty="0">
                 <a:latin typeface="Barlow" panose="00000500000000000000" pitchFamily="2" charset="0"/>
               </a:rPr>
               <a:t>Total Configurations:</a:t>
             </a:r>
             <a:r>
-              <a:rPr lang="en-IN" sz="1800" dirty="0">
+              <a:rPr lang="en-IN" sz="2400" dirty="0">
                 <a:latin typeface="Barlow" panose="00000500000000000000" pitchFamily="2" charset="0"/>
               </a:rPr>
               <a:t> 6 (3 models × 2 optimizers)</a:t>
@@ -9152,13 +10581,13 @@
           <a:p>
             <a:pPr lvl="1"/>
             <a:r>
-              <a:rPr lang="en-IN" sz="1800" b="1" dirty="0">
+              <a:rPr lang="en-IN" sz="2400" b="1" dirty="0">
                 <a:latin typeface="Barlow" panose="00000500000000000000" pitchFamily="2" charset="0"/>
               </a:rPr>
               <a:t>Controlled Variables:</a:t>
             </a:r>
             <a:r>
-              <a:rPr lang="en-IN" sz="1800" dirty="0">
+              <a:rPr lang="en-IN" sz="2400" dirty="0">
                 <a:latin typeface="Barlow" panose="00000500000000000000" pitchFamily="2" charset="0"/>
               </a:rPr>
               <a:t> Batch size, training steps, evaluation frequency</a:t>
@@ -9167,13 +10596,13 @@
           <a:p>
             <a:pPr lvl="1"/>
             <a:r>
-              <a:rPr lang="en-IN" sz="1800" b="1" dirty="0">
+              <a:rPr lang="en-IN" sz="2400" b="1" dirty="0">
                 <a:latin typeface="Barlow" panose="00000500000000000000" pitchFamily="2" charset="0"/>
               </a:rPr>
               <a:t>Variable Parameters:</a:t>
             </a:r>
             <a:r>
-              <a:rPr lang="en-IN" sz="1800" dirty="0">
+              <a:rPr lang="en-IN" sz="2400" dirty="0">
                 <a:latin typeface="Barlow" panose="00000500000000000000" pitchFamily="2" charset="0"/>
               </a:rPr>
               <a:t> Learning rates (2e-5 standard, 2e-6 for ModernBERT+Lion)</a:t>
@@ -9194,7 +10623,1039 @@
 </p:sld>
 </file>
 
-<file path=ppt/slides/slide11.xml><?xml version="1.0" encoding="utf-8"?>
+<file path=ppt/slides/slide14.xml><?xml version="1.0" encoding="utf-8"?>
+<p:sld xmlns:a="http://schemas.openxmlformats.org/drawingml/2006/main" xmlns:r="http://schemas.openxmlformats.org/officeDocument/2006/relationships" xmlns:p="http://schemas.openxmlformats.org/presentationml/2006/main">
+  <p:cSld>
+    <p:spTree>
+      <p:nvGrpSpPr>
+        <p:cNvPr id="1" name=""/>
+        <p:cNvGrpSpPr/>
+        <p:nvPr/>
+      </p:nvGrpSpPr>
+      <p:grpSpPr>
+        <a:xfrm>
+          <a:off x="0" y="0"/>
+          <a:ext cx="0" cy="0"/>
+          <a:chOff x="0" y="0"/>
+          <a:chExt cx="0" cy="0"/>
+        </a:xfrm>
+      </p:grpSpPr>
+      <p:sp>
+        <p:nvSpPr>
+          <p:cNvPr id="2" name="Title 1">
+            <a:extLst>
+              <a:ext uri="{FF2B5EF4-FFF2-40B4-BE49-F238E27FC236}">
+                <a16:creationId xmlns:a16="http://schemas.microsoft.com/office/drawing/2014/main" id="{DC72EB31-E42B-4D0C-AFEC-3EBBBBE96FC6}"/>
+              </a:ext>
+            </a:extLst>
+          </p:cNvPr>
+          <p:cNvSpPr>
+            <a:spLocks noGrp="1"/>
+          </p:cNvSpPr>
+          <p:nvPr>
+            <p:ph type="title"/>
+          </p:nvPr>
+        </p:nvSpPr>
+        <p:spPr>
+          <a:xfrm>
+            <a:off x="1600470" y="-6969"/>
+            <a:ext cx="8579730" cy="1453488"/>
+          </a:xfrm>
+        </p:spPr>
+        <p:txBody>
+          <a:bodyPr/>
+          <a:lstStyle/>
+          <a:p>
+            <a:r>
+              <a:rPr lang="en-US" dirty="0">
+                <a:latin typeface="Barlow SemiBold" panose="00000700000000000000" pitchFamily="2" charset="0"/>
+              </a:rPr>
+              <a:t>Model Architectures Tested</a:t>
+            </a:r>
+          </a:p>
+        </p:txBody>
+      </p:sp>
+      <p:graphicFrame>
+        <p:nvGraphicFramePr>
+          <p:cNvPr id="3" name="Table 2">
+            <a:extLst>
+              <a:ext uri="{FF2B5EF4-FFF2-40B4-BE49-F238E27FC236}">
+                <a16:creationId xmlns:a16="http://schemas.microsoft.com/office/drawing/2014/main" id="{7FBF1AC1-134E-0FBB-B4D9-FDF88536B632}"/>
+              </a:ext>
+            </a:extLst>
+          </p:cNvPr>
+          <p:cNvGraphicFramePr>
+            <a:graphicFrameLocks noGrp="1"/>
+          </p:cNvGraphicFramePr>
+          <p:nvPr>
+            <p:extLst>
+              <p:ext uri="{D42A27DB-BD31-4B8C-83A1-F6EECF244321}">
+                <p14:modId xmlns:p14="http://schemas.microsoft.com/office/powerpoint/2010/main" val="2952616321"/>
+              </p:ext>
+            </p:extLst>
+          </p:nvPr>
+        </p:nvGraphicFramePr>
+        <p:xfrm>
+          <a:off x="782704" y="1812991"/>
+          <a:ext cx="10629934" cy="2621280"/>
+        </p:xfrm>
+        <a:graphic>
+          <a:graphicData uri="http://schemas.openxmlformats.org/drawingml/2006/table">
+            <a:tbl>
+              <a:tblPr firstRow="1" bandRow="1">
+                <a:tableStyleId>{69C7853C-536D-4A76-A0AE-DD22124D55A5}</a:tableStyleId>
+              </a:tblPr>
+              <a:tblGrid>
+                <a:gridCol w="2285387">
+                  <a:extLst>
+                    <a:ext uri="{9D8B030D-6E8A-4147-A177-3AD203B41FA5}">
+                      <a16:colId xmlns:a16="http://schemas.microsoft.com/office/drawing/2014/main" val="902513758"/>
+                    </a:ext>
+                  </a:extLst>
+                </a:gridCol>
+                <a:gridCol w="2285387">
+                  <a:extLst>
+                    <a:ext uri="{9D8B030D-6E8A-4147-A177-3AD203B41FA5}">
+                      <a16:colId xmlns:a16="http://schemas.microsoft.com/office/drawing/2014/main" val="2836376390"/>
+                    </a:ext>
+                  </a:extLst>
+                </a:gridCol>
+                <a:gridCol w="2209438">
+                  <a:extLst>
+                    <a:ext uri="{9D8B030D-6E8A-4147-A177-3AD203B41FA5}">
+                      <a16:colId xmlns:a16="http://schemas.microsoft.com/office/drawing/2014/main" val="4239693166"/>
+                    </a:ext>
+                  </a:extLst>
+                </a:gridCol>
+                <a:gridCol w="3849722">
+                  <a:extLst>
+                    <a:ext uri="{9D8B030D-6E8A-4147-A177-3AD203B41FA5}">
+                      <a16:colId xmlns:a16="http://schemas.microsoft.com/office/drawing/2014/main" val="856259958"/>
+                    </a:ext>
+                  </a:extLst>
+                </a:gridCol>
+              </a:tblGrid>
+              <a:tr h="370840">
+                <a:tc>
+                  <a:txBody>
+                    <a:bodyPr/>
+                    <a:lstStyle/>
+                    <a:p>
+                      <a:r>
+                        <a:rPr lang="en-GB" sz="2400" dirty="0">
+                          <a:effectLst>
+                            <a:outerShdw blurRad="50800" dist="38100" dir="18900000" algn="bl" rotWithShape="0">
+                              <a:prstClr val="black">
+                                <a:alpha val="40000"/>
+                              </a:prstClr>
+                            </a:outerShdw>
+                          </a:effectLst>
+                          <a:latin typeface="Barlow Medium" panose="00000600000000000000" pitchFamily="2" charset="0"/>
+                        </a:rPr>
+                        <a:t>Model</a:t>
+                      </a:r>
+                      <a:endParaRPr lang="en-IN" sz="2400" dirty="0">
+                        <a:effectLst>
+                          <a:outerShdw blurRad="50800" dist="38100" dir="18900000" algn="bl" rotWithShape="0">
+                            <a:prstClr val="black">
+                              <a:alpha val="40000"/>
+                            </a:prstClr>
+                          </a:outerShdw>
+                        </a:effectLst>
+                        <a:latin typeface="Barlow Medium" panose="00000600000000000000" pitchFamily="2" charset="0"/>
+                      </a:endParaRPr>
+                    </a:p>
+                  </a:txBody>
+                  <a:tcPr>
+                    <a:lnB w="15875" cap="rnd" cmpd="sng" algn="ctr">
+                      <a:noFill/>
+                      <a:prstDash val="solid"/>
+                    </a:lnB>
+                  </a:tcPr>
+                </a:tc>
+                <a:tc>
+                  <a:txBody>
+                    <a:bodyPr/>
+                    <a:lstStyle/>
+                    <a:p>
+                      <a:r>
+                        <a:rPr lang="en-GB" sz="2400" dirty="0">
+                          <a:effectLst>
+                            <a:outerShdw blurRad="50800" dist="38100" dir="18900000" algn="bl" rotWithShape="0">
+                              <a:prstClr val="black">
+                                <a:alpha val="40000"/>
+                              </a:prstClr>
+                            </a:outerShdw>
+                          </a:effectLst>
+                          <a:latin typeface="Barlow Medium" panose="00000600000000000000" pitchFamily="2" charset="0"/>
+                        </a:rPr>
+                        <a:t>Parameters</a:t>
+                      </a:r>
+                      <a:endParaRPr lang="en-IN" sz="2400" dirty="0">
+                        <a:effectLst>
+                          <a:outerShdw blurRad="50800" dist="38100" dir="18900000" algn="bl" rotWithShape="0">
+                            <a:prstClr val="black">
+                              <a:alpha val="40000"/>
+                            </a:prstClr>
+                          </a:outerShdw>
+                        </a:effectLst>
+                        <a:latin typeface="Barlow Medium" panose="00000600000000000000" pitchFamily="2" charset="0"/>
+                      </a:endParaRPr>
+                    </a:p>
+                  </a:txBody>
+                  <a:tcPr>
+                    <a:lnB w="15875" cap="rnd" cmpd="sng" algn="ctr">
+                      <a:noFill/>
+                      <a:prstDash val="solid"/>
+                    </a:lnB>
+                  </a:tcPr>
+                </a:tc>
+                <a:tc>
+                  <a:txBody>
+                    <a:bodyPr/>
+                    <a:lstStyle/>
+                    <a:p>
+                      <a:r>
+                        <a:rPr lang="en-GB" sz="2400" dirty="0">
+                          <a:effectLst>
+                            <a:outerShdw blurRad="50800" dist="38100" dir="18900000" algn="bl" rotWithShape="0">
+                              <a:prstClr val="black">
+                                <a:alpha val="40000"/>
+                              </a:prstClr>
+                            </a:outerShdw>
+                          </a:effectLst>
+                          <a:latin typeface="Barlow Medium" panose="00000600000000000000" pitchFamily="2" charset="0"/>
+                        </a:rPr>
+                        <a:t>Context Length</a:t>
+                      </a:r>
+                      <a:endParaRPr lang="en-IN" sz="2400" dirty="0">
+                        <a:effectLst>
+                          <a:outerShdw blurRad="50800" dist="38100" dir="18900000" algn="bl" rotWithShape="0">
+                            <a:prstClr val="black">
+                              <a:alpha val="40000"/>
+                            </a:prstClr>
+                          </a:outerShdw>
+                        </a:effectLst>
+                        <a:latin typeface="Barlow Medium" panose="00000600000000000000" pitchFamily="2" charset="0"/>
+                      </a:endParaRPr>
+                    </a:p>
+                  </a:txBody>
+                  <a:tcPr>
+                    <a:lnB w="15875" cap="rnd" cmpd="sng" algn="ctr">
+                      <a:noFill/>
+                      <a:prstDash val="solid"/>
+                    </a:lnB>
+                  </a:tcPr>
+                </a:tc>
+                <a:tc>
+                  <a:txBody>
+                    <a:bodyPr/>
+                    <a:lstStyle/>
+                    <a:p>
+                      <a:r>
+                        <a:rPr lang="en-GB" sz="2400" dirty="0">
+                          <a:effectLst>
+                            <a:outerShdw blurRad="50800" dist="38100" dir="18900000" algn="bl" rotWithShape="0">
+                              <a:prstClr val="black">
+                                <a:alpha val="40000"/>
+                              </a:prstClr>
+                            </a:outerShdw>
+                          </a:effectLst>
+                          <a:latin typeface="Barlow Medium" panose="00000600000000000000" pitchFamily="2" charset="0"/>
+                        </a:rPr>
+                        <a:t>Key Features</a:t>
+                      </a:r>
+                      <a:endParaRPr lang="en-IN" sz="2400" dirty="0">
+                        <a:effectLst>
+                          <a:outerShdw blurRad="50800" dist="38100" dir="18900000" algn="bl" rotWithShape="0">
+                            <a:prstClr val="black">
+                              <a:alpha val="40000"/>
+                            </a:prstClr>
+                          </a:outerShdw>
+                        </a:effectLst>
+                        <a:latin typeface="Barlow Medium" panose="00000600000000000000" pitchFamily="2" charset="0"/>
+                      </a:endParaRPr>
+                    </a:p>
+                  </a:txBody>
+                  <a:tcPr>
+                    <a:lnB w="15875" cap="rnd" cmpd="sng" algn="ctr">
+                      <a:noFill/>
+                      <a:prstDash val="solid"/>
+                    </a:lnB>
+                  </a:tcPr>
+                </a:tc>
+                <a:extLst>
+                  <a:ext uri="{0D108BD9-81ED-4DB2-BD59-A6C34878D82A}">
+                    <a16:rowId xmlns:a16="http://schemas.microsoft.com/office/drawing/2014/main" val="1999864367"/>
+                  </a:ext>
+                </a:extLst>
+              </a:tr>
+              <a:tr h="370840">
+                <a:tc>
+                  <a:txBody>
+                    <a:bodyPr/>
+                    <a:lstStyle/>
+                    <a:p>
+                      <a:pPr algn="l"/>
+                      <a:r>
+                        <a:rPr lang="en-IN" sz="2000" b="1" dirty="0">
+                          <a:effectLst/>
+                          <a:latin typeface="Barlow" panose="00000500000000000000" pitchFamily="2" charset="0"/>
+                        </a:rPr>
+                        <a:t>MiniLM-L12-H384</a:t>
+                      </a:r>
+                      <a:endParaRPr lang="en-IN" sz="2000" dirty="0">
+                        <a:effectLst/>
+                        <a:latin typeface="Barlow" panose="00000500000000000000" pitchFamily="2" charset="0"/>
+                      </a:endParaRPr>
+                    </a:p>
+                  </a:txBody>
+                  <a:tcPr anchor="ctr">
+                    <a:lnL w="9525" cap="rnd" cmpd="sng" algn="ctr">
+                      <a:noFill/>
+                      <a:prstDash val="solid"/>
+                    </a:lnL>
+                    <a:lnR w="9525" cap="rnd" cmpd="sng" algn="ctr">
+                      <a:noFill/>
+                      <a:prstDash val="solid"/>
+                    </a:lnR>
+                    <a:lnT w="15875" cap="rnd" cmpd="sng" algn="ctr">
+                      <a:noFill/>
+                      <a:prstDash val="solid"/>
+                    </a:lnT>
+                    <a:lnB w="9525" cap="rnd" cmpd="sng" algn="ctr">
+                      <a:noFill/>
+                      <a:prstDash val="solid"/>
+                    </a:lnB>
+                    <a:lnTlToBr w="12700" cmpd="sng">
+                      <a:noFill/>
+                      <a:prstDash val="solid"/>
+                    </a:lnTlToBr>
+                    <a:lnBlToTr w="12700" cmpd="sng">
+                      <a:noFill/>
+                      <a:prstDash val="solid"/>
+                    </a:lnBlToTr>
+                    <a:solidFill>
+                      <a:schemeClr val="bg2"/>
+                    </a:solidFill>
+                  </a:tcPr>
+                </a:tc>
+                <a:tc>
+                  <a:txBody>
+                    <a:bodyPr/>
+                    <a:lstStyle/>
+                    <a:p>
+                      <a:pPr algn="l"/>
+                      <a:r>
+                        <a:rPr lang="en-IN" sz="2000" dirty="0">
+                          <a:effectLst/>
+                          <a:latin typeface="Barlow" panose="00000500000000000000" pitchFamily="2" charset="0"/>
+                        </a:rPr>
+                        <a:t>~33M</a:t>
+                      </a:r>
+                    </a:p>
+                  </a:txBody>
+                  <a:tcPr anchor="ctr">
+                    <a:lnL w="9525" cap="rnd" cmpd="sng" algn="ctr">
+                      <a:noFill/>
+                      <a:prstDash val="solid"/>
+                    </a:lnL>
+                    <a:lnR w="9525" cap="rnd" cmpd="sng" algn="ctr">
+                      <a:noFill/>
+                      <a:prstDash val="solid"/>
+                    </a:lnR>
+                    <a:lnT w="15875" cap="rnd" cmpd="sng" algn="ctr">
+                      <a:noFill/>
+                      <a:prstDash val="solid"/>
+                    </a:lnT>
+                    <a:lnB w="9525" cap="rnd" cmpd="sng" algn="ctr">
+                      <a:noFill/>
+                      <a:prstDash val="solid"/>
+                    </a:lnB>
+                    <a:lnTlToBr w="12700" cmpd="sng">
+                      <a:noFill/>
+                      <a:prstDash val="solid"/>
+                    </a:lnTlToBr>
+                    <a:lnBlToTr w="12700" cmpd="sng">
+                      <a:noFill/>
+                      <a:prstDash val="solid"/>
+                    </a:lnBlToTr>
+                    <a:solidFill>
+                      <a:schemeClr val="bg2"/>
+                    </a:solidFill>
+                  </a:tcPr>
+                </a:tc>
+                <a:tc>
+                  <a:txBody>
+                    <a:bodyPr/>
+                    <a:lstStyle/>
+                    <a:p>
+                      <a:pPr algn="l"/>
+                      <a:r>
+                        <a:rPr lang="en-IN" sz="2000" dirty="0">
+                          <a:effectLst/>
+                          <a:latin typeface="Barlow" panose="00000500000000000000" pitchFamily="2" charset="0"/>
+                        </a:rPr>
+                        <a:t>512 tokens</a:t>
+                      </a:r>
+                    </a:p>
+                  </a:txBody>
+                  <a:tcPr anchor="ctr">
+                    <a:lnL w="9525" cap="rnd" cmpd="sng" algn="ctr">
+                      <a:noFill/>
+                      <a:prstDash val="solid"/>
+                    </a:lnL>
+                    <a:lnR w="9525" cap="rnd" cmpd="sng" algn="ctr">
+                      <a:noFill/>
+                      <a:prstDash val="solid"/>
+                    </a:lnR>
+                    <a:lnT w="15875" cap="rnd" cmpd="sng" algn="ctr">
+                      <a:noFill/>
+                      <a:prstDash val="solid"/>
+                    </a:lnT>
+                    <a:lnB w="9525" cap="rnd" cmpd="sng" algn="ctr">
+                      <a:noFill/>
+                      <a:prstDash val="solid"/>
+                    </a:lnB>
+                    <a:lnTlToBr w="12700" cmpd="sng">
+                      <a:noFill/>
+                      <a:prstDash val="solid"/>
+                    </a:lnTlToBr>
+                    <a:lnBlToTr w="12700" cmpd="sng">
+                      <a:noFill/>
+                      <a:prstDash val="solid"/>
+                    </a:lnBlToTr>
+                    <a:solidFill>
+                      <a:schemeClr val="bg2"/>
+                    </a:solidFill>
+                  </a:tcPr>
+                </a:tc>
+                <a:tc>
+                  <a:txBody>
+                    <a:bodyPr/>
+                    <a:lstStyle/>
+                    <a:p>
+                      <a:pPr algn="l"/>
+                      <a:r>
+                        <a:rPr lang="en-IN" sz="2000" dirty="0">
+                          <a:effectLst/>
+                          <a:latin typeface="Barlow" panose="00000500000000000000" pitchFamily="2" charset="0"/>
+                        </a:rPr>
+                        <a:t>Efficient baseline, knowledge distillation</a:t>
+                      </a:r>
+                    </a:p>
+                  </a:txBody>
+                  <a:tcPr anchor="ctr">
+                    <a:lnL w="9525" cap="rnd" cmpd="sng" algn="ctr">
+                      <a:noFill/>
+                      <a:prstDash val="solid"/>
+                    </a:lnL>
+                    <a:lnR w="9525" cap="rnd" cmpd="sng" algn="ctr">
+                      <a:noFill/>
+                      <a:prstDash val="solid"/>
+                    </a:lnR>
+                    <a:lnT w="15875" cap="rnd" cmpd="sng" algn="ctr">
+                      <a:noFill/>
+                      <a:prstDash val="solid"/>
+                    </a:lnT>
+                    <a:lnB w="9525" cap="rnd" cmpd="sng" algn="ctr">
+                      <a:noFill/>
+                      <a:prstDash val="solid"/>
+                    </a:lnB>
+                    <a:lnTlToBr w="12700" cmpd="sng">
+                      <a:noFill/>
+                      <a:prstDash val="solid"/>
+                    </a:lnTlToBr>
+                    <a:lnBlToTr w="12700" cmpd="sng">
+                      <a:noFill/>
+                      <a:prstDash val="solid"/>
+                    </a:lnBlToTr>
+                    <a:solidFill>
+                      <a:schemeClr val="bg2"/>
+                    </a:solidFill>
+                  </a:tcPr>
+                </a:tc>
+                <a:extLst>
+                  <a:ext uri="{0D108BD9-81ED-4DB2-BD59-A6C34878D82A}">
+                    <a16:rowId xmlns:a16="http://schemas.microsoft.com/office/drawing/2014/main" val="3048339735"/>
+                  </a:ext>
+                </a:extLst>
+              </a:tr>
+              <a:tr h="370840">
+                <a:tc>
+                  <a:txBody>
+                    <a:bodyPr/>
+                    <a:lstStyle/>
+                    <a:p>
+                      <a:pPr algn="l"/>
+                      <a:r>
+                        <a:rPr lang="en-IN" sz="2000" b="1" dirty="0">
+                          <a:effectLst/>
+                          <a:latin typeface="Barlow" panose="00000500000000000000" pitchFamily="2" charset="0"/>
+                        </a:rPr>
+                        <a:t>GTE-multilingual-base</a:t>
+                      </a:r>
+                      <a:endParaRPr lang="en-IN" sz="2000" dirty="0">
+                        <a:effectLst/>
+                        <a:latin typeface="Barlow" panose="00000500000000000000" pitchFamily="2" charset="0"/>
+                      </a:endParaRPr>
+                    </a:p>
+                  </a:txBody>
+                  <a:tcPr anchor="ctr">
+                    <a:lnL w="9525" cap="rnd" cmpd="sng" algn="ctr">
+                      <a:noFill/>
+                      <a:prstDash val="solid"/>
+                    </a:lnL>
+                    <a:lnR w="9525" cap="rnd" cmpd="sng" algn="ctr">
+                      <a:noFill/>
+                      <a:prstDash val="solid"/>
+                    </a:lnR>
+                    <a:lnT w="9525" cap="rnd" cmpd="sng" algn="ctr">
+                      <a:noFill/>
+                      <a:prstDash val="solid"/>
+                    </a:lnT>
+                    <a:lnB w="9525" cap="rnd" cmpd="sng" algn="ctr">
+                      <a:noFill/>
+                      <a:prstDash val="solid"/>
+                    </a:lnB>
+                    <a:lnTlToBr w="12700" cmpd="sng">
+                      <a:noFill/>
+                      <a:prstDash val="solid"/>
+                    </a:lnTlToBr>
+                    <a:lnBlToTr w="12700" cmpd="sng">
+                      <a:noFill/>
+                      <a:prstDash val="solid"/>
+                    </a:lnBlToTr>
+                    <a:solidFill>
+                      <a:schemeClr val="bg2"/>
+                    </a:solidFill>
+                  </a:tcPr>
+                </a:tc>
+                <a:tc>
+                  <a:txBody>
+                    <a:bodyPr/>
+                    <a:lstStyle/>
+                    <a:p>
+                      <a:pPr algn="l"/>
+                      <a:r>
+                        <a:rPr lang="en-IN" sz="2000" dirty="0">
+                          <a:effectLst/>
+                          <a:latin typeface="Barlow" panose="00000500000000000000" pitchFamily="2" charset="0"/>
+                        </a:rPr>
+                        <a:t>~305M</a:t>
+                      </a:r>
+                    </a:p>
+                  </a:txBody>
+                  <a:tcPr anchor="ctr">
+                    <a:lnL w="9525" cap="rnd" cmpd="sng" algn="ctr">
+                      <a:noFill/>
+                      <a:prstDash val="solid"/>
+                    </a:lnL>
+                    <a:lnR w="9525" cap="rnd" cmpd="sng" algn="ctr">
+                      <a:noFill/>
+                      <a:prstDash val="solid"/>
+                    </a:lnR>
+                    <a:lnT w="9525" cap="rnd" cmpd="sng" algn="ctr">
+                      <a:noFill/>
+                      <a:prstDash val="solid"/>
+                    </a:lnT>
+                    <a:lnB w="9525" cap="rnd" cmpd="sng" algn="ctr">
+                      <a:noFill/>
+                      <a:prstDash val="solid"/>
+                    </a:lnB>
+                    <a:lnTlToBr w="12700" cmpd="sng">
+                      <a:noFill/>
+                      <a:prstDash val="solid"/>
+                    </a:lnTlToBr>
+                    <a:lnBlToTr w="12700" cmpd="sng">
+                      <a:noFill/>
+                      <a:prstDash val="solid"/>
+                    </a:lnBlToTr>
+                    <a:solidFill>
+                      <a:schemeClr val="bg2"/>
+                    </a:solidFill>
+                  </a:tcPr>
+                </a:tc>
+                <a:tc>
+                  <a:txBody>
+                    <a:bodyPr/>
+                    <a:lstStyle/>
+                    <a:p>
+                      <a:pPr algn="l"/>
+                      <a:r>
+                        <a:rPr lang="en-IN" sz="2000" dirty="0">
+                          <a:effectLst/>
+                          <a:latin typeface="Barlow" panose="00000500000000000000" pitchFamily="2" charset="0"/>
+                        </a:rPr>
+                        <a:t>8192 tokens</a:t>
+                      </a:r>
+                    </a:p>
+                  </a:txBody>
+                  <a:tcPr anchor="ctr">
+                    <a:lnL w="9525" cap="rnd" cmpd="sng" algn="ctr">
+                      <a:noFill/>
+                      <a:prstDash val="solid"/>
+                    </a:lnL>
+                    <a:lnR w="9525" cap="rnd" cmpd="sng" algn="ctr">
+                      <a:noFill/>
+                      <a:prstDash val="solid"/>
+                    </a:lnR>
+                    <a:lnT w="9525" cap="rnd" cmpd="sng" algn="ctr">
+                      <a:noFill/>
+                      <a:prstDash val="solid"/>
+                    </a:lnT>
+                    <a:lnB w="9525" cap="rnd" cmpd="sng" algn="ctr">
+                      <a:noFill/>
+                      <a:prstDash val="solid"/>
+                    </a:lnB>
+                    <a:lnTlToBr w="12700" cmpd="sng">
+                      <a:noFill/>
+                      <a:prstDash val="solid"/>
+                    </a:lnTlToBr>
+                    <a:lnBlToTr w="12700" cmpd="sng">
+                      <a:noFill/>
+                      <a:prstDash val="solid"/>
+                    </a:lnBlToTr>
+                    <a:solidFill>
+                      <a:schemeClr val="bg2"/>
+                    </a:solidFill>
+                  </a:tcPr>
+                </a:tc>
+                <a:tc>
+                  <a:txBody>
+                    <a:bodyPr/>
+                    <a:lstStyle/>
+                    <a:p>
+                      <a:pPr algn="l"/>
+                      <a:r>
+                        <a:rPr lang="en-IN" sz="2000" dirty="0">
+                          <a:effectLst/>
+                          <a:latin typeface="Barlow" panose="00000500000000000000" pitchFamily="2" charset="0"/>
+                        </a:rPr>
+                        <a:t>Extended context, multilingual support</a:t>
+                      </a:r>
+                    </a:p>
+                  </a:txBody>
+                  <a:tcPr anchor="ctr">
+                    <a:lnL w="9525" cap="rnd" cmpd="sng" algn="ctr">
+                      <a:noFill/>
+                      <a:prstDash val="solid"/>
+                    </a:lnL>
+                    <a:lnR w="9525" cap="rnd" cmpd="sng" algn="ctr">
+                      <a:noFill/>
+                      <a:prstDash val="solid"/>
+                    </a:lnR>
+                    <a:lnT w="9525" cap="rnd" cmpd="sng" algn="ctr">
+                      <a:noFill/>
+                      <a:prstDash val="solid"/>
+                    </a:lnT>
+                    <a:lnB w="9525" cap="rnd" cmpd="sng" algn="ctr">
+                      <a:noFill/>
+                      <a:prstDash val="solid"/>
+                    </a:lnB>
+                    <a:lnTlToBr w="12700" cmpd="sng">
+                      <a:noFill/>
+                      <a:prstDash val="solid"/>
+                    </a:lnTlToBr>
+                    <a:lnBlToTr w="12700" cmpd="sng">
+                      <a:noFill/>
+                      <a:prstDash val="solid"/>
+                    </a:lnBlToTr>
+                    <a:solidFill>
+                      <a:schemeClr val="bg2"/>
+                    </a:solidFill>
+                  </a:tcPr>
+                </a:tc>
+                <a:extLst>
+                  <a:ext uri="{0D108BD9-81ED-4DB2-BD59-A6C34878D82A}">
+                    <a16:rowId xmlns:a16="http://schemas.microsoft.com/office/drawing/2014/main" val="931686448"/>
+                  </a:ext>
+                </a:extLst>
+              </a:tr>
+              <a:tr h="370840">
+                <a:tc>
+                  <a:txBody>
+                    <a:bodyPr/>
+                    <a:lstStyle/>
+                    <a:p>
+                      <a:pPr algn="l"/>
+                      <a:r>
+                        <a:rPr lang="en-IN" sz="2000" b="1">
+                          <a:effectLst/>
+                          <a:latin typeface="Barlow" panose="00000500000000000000" pitchFamily="2" charset="0"/>
+                        </a:rPr>
+                        <a:t>ModernBERT-base</a:t>
+                      </a:r>
+                      <a:endParaRPr lang="en-IN" sz="2000">
+                        <a:effectLst/>
+                        <a:latin typeface="Barlow" panose="00000500000000000000" pitchFamily="2" charset="0"/>
+                      </a:endParaRPr>
+                    </a:p>
+                  </a:txBody>
+                  <a:tcPr anchor="ctr">
+                    <a:lnL w="9525" cap="rnd" cmpd="sng" algn="ctr">
+                      <a:noFill/>
+                      <a:prstDash val="solid"/>
+                    </a:lnL>
+                    <a:lnR w="9525" cap="rnd" cmpd="sng" algn="ctr">
+                      <a:noFill/>
+                      <a:prstDash val="solid"/>
+                    </a:lnR>
+                    <a:lnT w="9525" cap="rnd" cmpd="sng" algn="ctr">
+                      <a:noFill/>
+                      <a:prstDash val="solid"/>
+                    </a:lnT>
+                    <a:lnB w="9525" cap="rnd" cmpd="sng" algn="ctr">
+                      <a:noFill/>
+                      <a:prstDash val="solid"/>
+                    </a:lnB>
+                    <a:lnTlToBr w="12700" cmpd="sng">
+                      <a:noFill/>
+                      <a:prstDash val="solid"/>
+                    </a:lnTlToBr>
+                    <a:lnBlToTr w="12700" cmpd="sng">
+                      <a:noFill/>
+                      <a:prstDash val="solid"/>
+                    </a:lnBlToTr>
+                    <a:solidFill>
+                      <a:schemeClr val="bg2"/>
+                    </a:solidFill>
+                  </a:tcPr>
+                </a:tc>
+                <a:tc>
+                  <a:txBody>
+                    <a:bodyPr/>
+                    <a:lstStyle/>
+                    <a:p>
+                      <a:pPr algn="l"/>
+                      <a:r>
+                        <a:rPr lang="en-IN" sz="2000">
+                          <a:effectLst/>
+                          <a:latin typeface="Barlow" panose="00000500000000000000" pitchFamily="2" charset="0"/>
+                        </a:rPr>
+                        <a:t>~149M</a:t>
+                      </a:r>
+                    </a:p>
+                  </a:txBody>
+                  <a:tcPr anchor="ctr">
+                    <a:lnL w="9525" cap="rnd" cmpd="sng" algn="ctr">
+                      <a:noFill/>
+                      <a:prstDash val="solid"/>
+                    </a:lnL>
+                    <a:lnR w="9525" cap="rnd" cmpd="sng" algn="ctr">
+                      <a:noFill/>
+                      <a:prstDash val="solid"/>
+                    </a:lnR>
+                    <a:lnT w="9525" cap="rnd" cmpd="sng" algn="ctr">
+                      <a:noFill/>
+                      <a:prstDash val="solid"/>
+                    </a:lnT>
+                    <a:lnB w="9525" cap="rnd" cmpd="sng" algn="ctr">
+                      <a:noFill/>
+                      <a:prstDash val="solid"/>
+                    </a:lnB>
+                    <a:lnTlToBr w="12700" cmpd="sng">
+                      <a:noFill/>
+                      <a:prstDash val="solid"/>
+                    </a:lnTlToBr>
+                    <a:lnBlToTr w="12700" cmpd="sng">
+                      <a:noFill/>
+                      <a:prstDash val="solid"/>
+                    </a:lnBlToTr>
+                    <a:solidFill>
+                      <a:schemeClr val="bg2"/>
+                    </a:solidFill>
+                  </a:tcPr>
+                </a:tc>
+                <a:tc>
+                  <a:txBody>
+                    <a:bodyPr/>
+                    <a:lstStyle/>
+                    <a:p>
+                      <a:pPr algn="l"/>
+                      <a:r>
+                        <a:rPr lang="en-IN" sz="2000" dirty="0">
+                          <a:effectLst/>
+                          <a:latin typeface="Barlow" panose="00000500000000000000" pitchFamily="2" charset="0"/>
+                        </a:rPr>
+                        <a:t>8192 tokens</a:t>
+                      </a:r>
+                    </a:p>
+                  </a:txBody>
+                  <a:tcPr anchor="ctr">
+                    <a:lnL w="9525" cap="rnd" cmpd="sng" algn="ctr">
+                      <a:noFill/>
+                      <a:prstDash val="solid"/>
+                    </a:lnL>
+                    <a:lnR w="9525" cap="rnd" cmpd="sng" algn="ctr">
+                      <a:noFill/>
+                      <a:prstDash val="solid"/>
+                    </a:lnR>
+                    <a:lnT w="9525" cap="rnd" cmpd="sng" algn="ctr">
+                      <a:noFill/>
+                      <a:prstDash val="solid"/>
+                    </a:lnT>
+                    <a:lnB w="9525" cap="rnd" cmpd="sng" algn="ctr">
+                      <a:noFill/>
+                      <a:prstDash val="solid"/>
+                    </a:lnB>
+                    <a:lnTlToBr w="12700" cmpd="sng">
+                      <a:noFill/>
+                      <a:prstDash val="solid"/>
+                    </a:lnTlToBr>
+                    <a:lnBlToTr w="12700" cmpd="sng">
+                      <a:noFill/>
+                      <a:prstDash val="solid"/>
+                    </a:lnBlToTr>
+                    <a:solidFill>
+                      <a:schemeClr val="bg2"/>
+                    </a:solidFill>
+                  </a:tcPr>
+                </a:tc>
+                <a:tc>
+                  <a:txBody>
+                    <a:bodyPr/>
+                    <a:lstStyle/>
+                    <a:p>
+                      <a:pPr algn="l"/>
+                      <a:r>
+                        <a:rPr lang="en-IN" sz="2000" dirty="0">
+                          <a:effectLst/>
+                          <a:latin typeface="Barlow" panose="00000500000000000000" pitchFamily="2" charset="0"/>
+                        </a:rPr>
+                        <a:t>RoPE, Flash Attention, GeGLU</a:t>
+                      </a:r>
+                    </a:p>
+                  </a:txBody>
+                  <a:tcPr anchor="ctr">
+                    <a:lnL w="9525" cap="rnd" cmpd="sng" algn="ctr">
+                      <a:noFill/>
+                      <a:prstDash val="solid"/>
+                    </a:lnL>
+                    <a:lnR w="9525" cap="rnd" cmpd="sng" algn="ctr">
+                      <a:noFill/>
+                      <a:prstDash val="solid"/>
+                    </a:lnR>
+                    <a:lnT w="9525" cap="rnd" cmpd="sng" algn="ctr">
+                      <a:noFill/>
+                      <a:prstDash val="solid"/>
+                    </a:lnT>
+                    <a:lnB w="9525" cap="rnd" cmpd="sng" algn="ctr">
+                      <a:noFill/>
+                      <a:prstDash val="solid"/>
+                    </a:lnB>
+                    <a:lnTlToBr w="12700" cmpd="sng">
+                      <a:noFill/>
+                      <a:prstDash val="solid"/>
+                    </a:lnTlToBr>
+                    <a:lnBlToTr w="12700" cmpd="sng">
+                      <a:noFill/>
+                      <a:prstDash val="solid"/>
+                    </a:lnBlToTr>
+                    <a:solidFill>
+                      <a:schemeClr val="bg2"/>
+                    </a:solidFill>
+                  </a:tcPr>
+                </a:tc>
+                <a:extLst>
+                  <a:ext uri="{0D108BD9-81ED-4DB2-BD59-A6C34878D82A}">
+                    <a16:rowId xmlns:a16="http://schemas.microsoft.com/office/drawing/2014/main" val="1844968829"/>
+                  </a:ext>
+                </a:extLst>
+              </a:tr>
+            </a:tbl>
+          </a:graphicData>
+        </a:graphic>
+      </p:graphicFrame>
+      <p:sp>
+        <p:nvSpPr>
+          <p:cNvPr id="4" name="Arrow: Pentagon 3">
+            <a:extLst>
+              <a:ext uri="{FF2B5EF4-FFF2-40B4-BE49-F238E27FC236}">
+                <a16:creationId xmlns:a16="http://schemas.microsoft.com/office/drawing/2014/main" id="{A01696DB-BADC-B932-7535-D92B47A1AC19}"/>
+              </a:ext>
+            </a:extLst>
+          </p:cNvPr>
+          <p:cNvSpPr/>
+          <p:nvPr/>
+        </p:nvSpPr>
+        <p:spPr>
+          <a:xfrm>
+            <a:off x="596895" y="830509"/>
+            <a:ext cx="896345" cy="459465"/>
+          </a:xfrm>
+          <a:prstGeom prst="homePlate">
+            <a:avLst/>
+          </a:prstGeom>
+        </p:spPr>
+        <p:style>
+          <a:lnRef idx="2">
+            <a:schemeClr val="accent1">
+              <a:shade val="15000"/>
+            </a:schemeClr>
+          </a:lnRef>
+          <a:fillRef idx="1">
+            <a:schemeClr val="accent1"/>
+          </a:fillRef>
+          <a:effectRef idx="0">
+            <a:schemeClr val="accent1"/>
+          </a:effectRef>
+          <a:fontRef idx="minor">
+            <a:schemeClr val="lt1"/>
+          </a:fontRef>
+        </p:style>
+        <p:txBody>
+          <a:bodyPr rtlCol="0" anchor="ctr"/>
+          <a:lstStyle/>
+          <a:p>
+            <a:pPr algn="ctr"/>
+            <a:endParaRPr lang="en-IN"/>
+          </a:p>
+        </p:txBody>
+      </p:sp>
+      <p:sp>
+        <p:nvSpPr>
+          <p:cNvPr id="5" name="TextBox 4">
+            <a:extLst>
+              <a:ext uri="{FF2B5EF4-FFF2-40B4-BE49-F238E27FC236}">
+                <a16:creationId xmlns:a16="http://schemas.microsoft.com/office/drawing/2014/main" id="{46A5F860-B964-8247-C136-DB3C44647293}"/>
+              </a:ext>
+            </a:extLst>
+          </p:cNvPr>
+          <p:cNvSpPr txBox="1"/>
+          <p:nvPr/>
+        </p:nvSpPr>
+        <p:spPr>
+          <a:xfrm>
+            <a:off x="782704" y="4801180"/>
+            <a:ext cx="4704948" cy="707886"/>
+          </a:xfrm>
+          <a:prstGeom prst="rect">
+            <a:avLst/>
+          </a:prstGeom>
+          <a:noFill/>
+        </p:spPr>
+        <p:txBody>
+          <a:bodyPr wrap="square" rtlCol="0">
+            <a:spAutoFit/>
+          </a:bodyPr>
+          <a:lstStyle/>
+          <a:p>
+            <a:r>
+              <a:rPr lang="en-GB" sz="2000" b="1" dirty="0">
+                <a:latin typeface="Barlow" panose="00000500000000000000" pitchFamily="2" charset="0"/>
+              </a:rPr>
+              <a:t>MiniLM:</a:t>
+            </a:r>
+            <a:r>
+              <a:rPr lang="en-GB" sz="2000" dirty="0">
+                <a:latin typeface="Barlow" panose="00000500000000000000" pitchFamily="2" charset="0"/>
+              </a:rPr>
+              <a:t> Efficiency-focused for resource-constrained scenarios</a:t>
+            </a:r>
+          </a:p>
+        </p:txBody>
+      </p:sp>
+      <p:sp>
+        <p:nvSpPr>
+          <p:cNvPr id="6" name="TextBox 5">
+            <a:extLst>
+              <a:ext uri="{FF2B5EF4-FFF2-40B4-BE49-F238E27FC236}">
+                <a16:creationId xmlns:a16="http://schemas.microsoft.com/office/drawing/2014/main" id="{0233F026-A0B3-B02F-D48E-918F79CD29F0}"/>
+              </a:ext>
+            </a:extLst>
+          </p:cNvPr>
+          <p:cNvSpPr txBox="1"/>
+          <p:nvPr/>
+        </p:nvSpPr>
+        <p:spPr>
+          <a:xfrm>
+            <a:off x="6518245" y="4801180"/>
+            <a:ext cx="5220749" cy="707886"/>
+          </a:xfrm>
+          <a:prstGeom prst="rect">
+            <a:avLst/>
+          </a:prstGeom>
+          <a:noFill/>
+        </p:spPr>
+        <p:txBody>
+          <a:bodyPr wrap="square" rtlCol="0">
+            <a:spAutoFit/>
+          </a:bodyPr>
+          <a:lstStyle/>
+          <a:p>
+            <a:r>
+              <a:rPr lang="en-GB" sz="2000" b="1" dirty="0">
+                <a:latin typeface="Barlow" panose="00000500000000000000" pitchFamily="2" charset="0"/>
+              </a:rPr>
+              <a:t>GTE:</a:t>
+            </a:r>
+            <a:r>
+              <a:rPr lang="en-GB" sz="2000" dirty="0">
+                <a:latin typeface="Barlow" panose="00000500000000000000" pitchFamily="2" charset="0"/>
+              </a:rPr>
+              <a:t> Extended context for comprehensive document analysis</a:t>
+            </a:r>
+          </a:p>
+        </p:txBody>
+      </p:sp>
+      <p:sp>
+        <p:nvSpPr>
+          <p:cNvPr id="10" name="TextBox 9">
+            <a:extLst>
+              <a:ext uri="{FF2B5EF4-FFF2-40B4-BE49-F238E27FC236}">
+                <a16:creationId xmlns:a16="http://schemas.microsoft.com/office/drawing/2014/main" id="{BFA4BBCA-1F4A-4863-3C5A-8ED609E0F60F}"/>
+              </a:ext>
+            </a:extLst>
+          </p:cNvPr>
+          <p:cNvSpPr txBox="1"/>
+          <p:nvPr/>
+        </p:nvSpPr>
+        <p:spPr>
+          <a:xfrm>
+            <a:off x="3537861" y="5763237"/>
+            <a:ext cx="4704948" cy="707886"/>
+          </a:xfrm>
+          <a:prstGeom prst="rect">
+            <a:avLst/>
+          </a:prstGeom>
+          <a:noFill/>
+        </p:spPr>
+        <p:txBody>
+          <a:bodyPr wrap="square" rtlCol="0">
+            <a:spAutoFit/>
+          </a:bodyPr>
+          <a:lstStyle/>
+          <a:p>
+            <a:r>
+              <a:rPr lang="en-GB" sz="2000" b="1" dirty="0">
+                <a:latin typeface="Barlow" panose="00000500000000000000" pitchFamily="2" charset="0"/>
+              </a:rPr>
+              <a:t>ModernBERT:</a:t>
+            </a:r>
+            <a:r>
+              <a:rPr lang="en-GB" sz="2000" dirty="0">
+                <a:latin typeface="Barlow" panose="00000500000000000000" pitchFamily="2" charset="0"/>
+              </a:rPr>
+              <a:t> State-of-the-art with advanced architectural innovations</a:t>
+            </a:r>
+          </a:p>
+        </p:txBody>
+      </p:sp>
+    </p:spTree>
+    <p:extLst>
+      <p:ext uri="{BB962C8B-B14F-4D97-AF65-F5344CB8AC3E}">
+        <p14:creationId xmlns:p14="http://schemas.microsoft.com/office/powerpoint/2010/main" val="1541546668"/>
+      </p:ext>
+    </p:extLst>
+  </p:cSld>
+  <p:clrMapOvr>
+    <a:masterClrMapping/>
+  </p:clrMapOvr>
+</p:sld>
+</file>
+
+<file path=ppt/slides/slide15.xml><?xml version="1.0" encoding="utf-8"?>
 <p:sld xmlns:a="http://schemas.openxmlformats.org/drawingml/2006/main" xmlns:r="http://schemas.openxmlformats.org/officeDocument/2006/relationships" xmlns:p="http://schemas.openxmlformats.org/presentationml/2006/main">
   <p:cSld>
     <p:spTree>
@@ -9285,7 +11746,7 @@
           <p:nvPr>
             <p:extLst>
               <p:ext uri="{D42A27DB-BD31-4B8C-83A1-F6EECF244321}">
-                <p14:modId xmlns:p14="http://schemas.microsoft.com/office/powerpoint/2010/main" val="1705017312"/>
+                <p14:modId xmlns:p14="http://schemas.microsoft.com/office/powerpoint/2010/main" val="2013879173"/>
               </p:ext>
             </p:extLst>
           </p:nvPr>
@@ -10020,7 +12481,27 @@
                           <a:effectLst/>
                           <a:latin typeface="Barlow" panose="00000500000000000000" pitchFamily="2" charset="0"/>
                         </a:rPr>
-                        <a:t>Cosine Annealing (ModernBERT)</a:t>
+                        <a:t>Cosine Annealing</a:t>
+                      </a:r>
+                      <a:r>
+                        <a:rPr lang="en-IN" sz="2000" b="1" baseline="30000" dirty="0">
+                          <a:solidFill>
+                            <a:schemeClr val="tx1"/>
+                          </a:solidFill>
+                          <a:effectLst/>
+                          <a:latin typeface="Barlow" panose="00000500000000000000" pitchFamily="2" charset="0"/>
+                        </a:rPr>
+                        <a:t>[15]</a:t>
+                      </a:r>
+                      <a:r>
+                        <a:rPr lang="en-IN" sz="2000" dirty="0">
+                          <a:solidFill>
+                            <a:schemeClr val="tx1"/>
+                          </a:solidFill>
+                          <a:effectLst/>
+                          <a:latin typeface="Barlow" panose="00000500000000000000" pitchFamily="2" charset="0"/>
+                        </a:rPr>
+                        <a:t> (ModernBERT)</a:t>
                       </a:r>
                     </a:p>
                   </a:txBody>
@@ -10062,7 +12543,413 @@
 </p:sld>
 </file>
 
-<file path=ppt/slides/slide12.xml><?xml version="1.0" encoding="utf-8"?>
+<file path=ppt/slides/slide16.xml><?xml version="1.0" encoding="utf-8"?>
+<p:sld xmlns:a="http://schemas.openxmlformats.org/drawingml/2006/main" xmlns:r="http://schemas.openxmlformats.org/officeDocument/2006/relationships" xmlns:p="http://schemas.openxmlformats.org/presentationml/2006/main" show="0">
+  <p:cSld>
+    <p:spTree>
+      <p:nvGrpSpPr>
+        <p:cNvPr id="1" name=""/>
+        <p:cNvGrpSpPr/>
+        <p:nvPr/>
+      </p:nvGrpSpPr>
+      <p:grpSpPr>
+        <a:xfrm>
+          <a:off x="0" y="0"/>
+          <a:ext cx="0" cy="0"/>
+          <a:chOff x="0" y="0"/>
+          <a:chExt cx="0" cy="0"/>
+        </a:xfrm>
+      </p:grpSpPr>
+      <p:sp>
+        <p:nvSpPr>
+          <p:cNvPr id="2" name="Title 1">
+            <a:extLst>
+              <a:ext uri="{FF2B5EF4-FFF2-40B4-BE49-F238E27FC236}">
+                <a16:creationId xmlns:a16="http://schemas.microsoft.com/office/drawing/2014/main" id="{E06B4AAE-A61A-4FE9-7D4D-04001D6A33A7}"/>
+              </a:ext>
+            </a:extLst>
+          </p:cNvPr>
+          <p:cNvSpPr>
+            <a:spLocks noGrp="1"/>
+          </p:cNvSpPr>
+          <p:nvPr>
+            <p:ph type="title"/>
+          </p:nvPr>
+        </p:nvSpPr>
+        <p:spPr/>
+        <p:txBody>
+          <a:bodyPr/>
+          <a:lstStyle/>
+          <a:p>
+            <a:r>
+              <a:rPr lang="en-GB" dirty="0">
+                <a:latin typeface="Barlow ExtraBold" panose="00000900000000000000" pitchFamily="2" charset="0"/>
+              </a:rPr>
+              <a:t>Evaluation Metrices</a:t>
+            </a:r>
+            <a:endParaRPr lang="en-IN" dirty="0">
+              <a:latin typeface="Barlow ExtraBold" panose="00000900000000000000" pitchFamily="2" charset="0"/>
+            </a:endParaRPr>
+          </a:p>
+        </p:txBody>
+      </p:sp>
+      <p:sp>
+        <p:nvSpPr>
+          <p:cNvPr id="6" name="TextBox 5">
+            <a:extLst>
+              <a:ext uri="{FF2B5EF4-FFF2-40B4-BE49-F238E27FC236}">
+                <a16:creationId xmlns:a16="http://schemas.microsoft.com/office/drawing/2014/main" id="{F72B3316-1ADE-DDFF-23B4-6BC8F225AD2A}"/>
+              </a:ext>
+            </a:extLst>
+          </p:cNvPr>
+          <p:cNvSpPr txBox="1"/>
+          <p:nvPr/>
+        </p:nvSpPr>
+        <p:spPr>
+          <a:xfrm>
+            <a:off x="527427" y="2346760"/>
+            <a:ext cx="8428911" cy="461665"/>
+          </a:xfrm>
+          <a:prstGeom prst="rect">
+            <a:avLst/>
+          </a:prstGeom>
+          <a:noFill/>
+        </p:spPr>
+        <p:txBody>
+          <a:bodyPr wrap="none" rtlCol="0">
+            <a:spAutoFit/>
+          </a:bodyPr>
+          <a:lstStyle/>
+          <a:p>
+            <a:r>
+              <a:rPr lang="en-GB" sz="2400" dirty="0">
+                <a:latin typeface="Barlow Medium" panose="00000600000000000000" pitchFamily="2" charset="0"/>
+              </a:rPr>
+              <a:t>NDCG@10 - Normalized Discounted Cumulative Gain at rank 10</a:t>
+            </a:r>
+          </a:p>
+        </p:txBody>
+      </p:sp>
+      <p:sp>
+        <p:nvSpPr>
+          <p:cNvPr id="7" name="TextBox 6">
+            <a:extLst>
+              <a:ext uri="{FF2B5EF4-FFF2-40B4-BE49-F238E27FC236}">
+                <a16:creationId xmlns:a16="http://schemas.microsoft.com/office/drawing/2014/main" id="{061EE149-ABB6-78F4-BB33-DDCA828B8076}"/>
+              </a:ext>
+            </a:extLst>
+          </p:cNvPr>
+          <p:cNvSpPr txBox="1"/>
+          <p:nvPr/>
+        </p:nvSpPr>
+        <p:spPr>
+          <a:xfrm>
+            <a:off x="527427" y="2906550"/>
+            <a:ext cx="8908852" cy="923330"/>
+          </a:xfrm>
+          <a:prstGeom prst="rect">
+            <a:avLst/>
+          </a:prstGeom>
+          <a:noFill/>
+        </p:spPr>
+        <p:txBody>
+          <a:bodyPr wrap="square" rtlCol="0">
+            <a:spAutoFit/>
+          </a:bodyPr>
+          <a:lstStyle/>
+          <a:p>
+            <a:r>
+              <a:rPr lang="en-GB" dirty="0">
+                <a:latin typeface="Barlow" panose="00000500000000000000" pitchFamily="2" charset="0"/>
+              </a:rPr>
+              <a:t>NDCG@10 measures the quality of ranking systems by considering both the relevance of retrieved documents and their positions in the ranking. It is normalized by the ideal DCG to ensure values between 0 and 1, where higher values indicate better performance.</a:t>
+            </a:r>
+          </a:p>
+        </p:txBody>
+      </p:sp>
+      <p:pic>
+        <p:nvPicPr>
+          <p:cNvPr id="8" name="@holatex&#10;\begin{document}&#10;\begin{equation}&#10;\text{NDCG@10} = \frac{\text{DCG@10}}{\text{IDCG@10}}&#10;\end{equation}&#10;&#10;where:&#10;\begin{equation}&#10;\text{DCG@10} = \sum_{i=1}^{10} \frac{2^{rel_i} - 1}{\log_2(i + 1)}&#10;\end{equation}&#10;&#10;and $rel_i$ is the relevance score of the document at position $i$, and IDCG@10 is the ideal DCG computed using the best possible ranking.&#10;&#10;\end{document}">
+            <a:extLst>
+              <a:ext uri="{FF2B5EF4-FFF2-40B4-BE49-F238E27FC236}">
+                <a16:creationId xmlns:a16="http://schemas.microsoft.com/office/drawing/2014/main" id="{E2452F6C-0672-68CF-1E6D-B7CB3B53A0CE}"/>
+              </a:ext>
+            </a:extLst>
+          </p:cNvPr>
+          <p:cNvPicPr>
+            <a:picLocks/>
+          </p:cNvPicPr>
+          <p:nvPr/>
+        </p:nvPicPr>
+        <p:blipFill>
+          <a:blip r:embed="rId2"/>
+          <a:stretch>
+            <a:fillRect/>
+          </a:stretch>
+        </p:blipFill>
+        <p:spPr>
+          <a:xfrm>
+            <a:off x="1117600" y="4383878"/>
+            <a:ext cx="6959600" cy="2026933"/>
+          </a:xfrm>
+          <a:prstGeom prst="rect">
+            <a:avLst/>
+          </a:prstGeom>
+        </p:spPr>
+      </p:pic>
+    </p:spTree>
+    <p:extLst>
+      <p:ext uri="{BB962C8B-B14F-4D97-AF65-F5344CB8AC3E}">
+        <p14:creationId xmlns:p14="http://schemas.microsoft.com/office/powerpoint/2010/main" val="1961845443"/>
+      </p:ext>
+    </p:extLst>
+  </p:cSld>
+  <p:clrMapOvr>
+    <a:masterClrMapping/>
+  </p:clrMapOvr>
+</p:sld>
+</file>
+
+<file path=ppt/slides/slide17.xml><?xml version="1.0" encoding="utf-8"?>
+<p:sld xmlns:a="http://schemas.openxmlformats.org/drawingml/2006/main" xmlns:r="http://schemas.openxmlformats.org/officeDocument/2006/relationships" xmlns:p="http://schemas.openxmlformats.org/presentationml/2006/main" show="0">
+  <p:cSld>
+    <p:spTree>
+      <p:nvGrpSpPr>
+        <p:cNvPr id="1" name="">
+          <a:extLst>
+            <a:ext uri="{FF2B5EF4-FFF2-40B4-BE49-F238E27FC236}">
+              <a16:creationId xmlns:a16="http://schemas.microsoft.com/office/drawing/2014/main" id="{4477D75B-E2A9-C4B3-3CD3-A5C406BB3419}"/>
+            </a:ext>
+          </a:extLst>
+        </p:cNvPr>
+        <p:cNvGrpSpPr/>
+        <p:nvPr/>
+      </p:nvGrpSpPr>
+      <p:grpSpPr>
+        <a:xfrm>
+          <a:off x="0" y="0"/>
+          <a:ext cx="0" cy="0"/>
+          <a:chOff x="0" y="0"/>
+          <a:chExt cx="0" cy="0"/>
+        </a:xfrm>
+      </p:grpSpPr>
+      <p:sp>
+        <p:nvSpPr>
+          <p:cNvPr id="2" name="Title 1">
+            <a:extLst>
+              <a:ext uri="{FF2B5EF4-FFF2-40B4-BE49-F238E27FC236}">
+                <a16:creationId xmlns:a16="http://schemas.microsoft.com/office/drawing/2014/main" id="{9DEBD66D-F91A-5ADF-6700-018F12C9F2FD}"/>
+              </a:ext>
+            </a:extLst>
+          </p:cNvPr>
+          <p:cNvSpPr>
+            <a:spLocks noGrp="1"/>
+          </p:cNvSpPr>
+          <p:nvPr>
+            <p:ph type="title"/>
+          </p:nvPr>
+        </p:nvSpPr>
+        <p:spPr/>
+        <p:txBody>
+          <a:bodyPr/>
+          <a:lstStyle/>
+          <a:p>
+            <a:r>
+              <a:rPr lang="en-GB" dirty="0">
+                <a:latin typeface="Barlow ExtraBold" panose="00000900000000000000" pitchFamily="2" charset="0"/>
+              </a:rPr>
+              <a:t>Evaluation Metrices</a:t>
+            </a:r>
+            <a:endParaRPr lang="en-IN" dirty="0">
+              <a:latin typeface="Barlow ExtraBold" panose="00000900000000000000" pitchFamily="2" charset="0"/>
+            </a:endParaRPr>
+          </a:p>
+        </p:txBody>
+      </p:sp>
+      <p:sp>
+        <p:nvSpPr>
+          <p:cNvPr id="6" name="TextBox 5">
+            <a:extLst>
+              <a:ext uri="{FF2B5EF4-FFF2-40B4-BE49-F238E27FC236}">
+                <a16:creationId xmlns:a16="http://schemas.microsoft.com/office/drawing/2014/main" id="{08A70968-9E81-C503-0B4B-8B6C48D7B9E3}"/>
+              </a:ext>
+            </a:extLst>
+          </p:cNvPr>
+          <p:cNvSpPr txBox="1"/>
+          <p:nvPr/>
+        </p:nvSpPr>
+        <p:spPr>
+          <a:xfrm>
+            <a:off x="527427" y="2346760"/>
+            <a:ext cx="5843266" cy="461665"/>
+          </a:xfrm>
+          <a:prstGeom prst="rect">
+            <a:avLst/>
+          </a:prstGeom>
+          <a:noFill/>
+        </p:spPr>
+        <p:txBody>
+          <a:bodyPr wrap="none" rtlCol="0">
+            <a:spAutoFit/>
+          </a:bodyPr>
+          <a:lstStyle/>
+          <a:p>
+            <a:r>
+              <a:rPr lang="en-GB" sz="2400" dirty="0">
+                <a:latin typeface="Barlow Medium" panose="00000600000000000000" pitchFamily="2" charset="0"/>
+              </a:rPr>
+              <a:t>MRR@10 (Mean Reciprocal Rank at rank 10)</a:t>
+            </a:r>
+          </a:p>
+        </p:txBody>
+      </p:sp>
+      <p:sp>
+        <p:nvSpPr>
+          <p:cNvPr id="7" name="TextBox 6">
+            <a:extLst>
+              <a:ext uri="{FF2B5EF4-FFF2-40B4-BE49-F238E27FC236}">
+                <a16:creationId xmlns:a16="http://schemas.microsoft.com/office/drawing/2014/main" id="{6DE2AE7A-E951-4E0D-A276-9B350F53C9C0}"/>
+              </a:ext>
+            </a:extLst>
+          </p:cNvPr>
+          <p:cNvSpPr txBox="1"/>
+          <p:nvPr/>
+        </p:nvSpPr>
+        <p:spPr>
+          <a:xfrm>
+            <a:off x="527427" y="2906550"/>
+            <a:ext cx="8908852" cy="923330"/>
+          </a:xfrm>
+          <a:prstGeom prst="rect">
+            <a:avLst/>
+          </a:prstGeom>
+          <a:noFill/>
+        </p:spPr>
+        <p:txBody>
+          <a:bodyPr wrap="square" rtlCol="0">
+            <a:spAutoFit/>
+          </a:bodyPr>
+          <a:lstStyle/>
+          <a:p>
+            <a:r>
+              <a:rPr lang="en-GB" dirty="0">
+                <a:latin typeface="Barlow" panose="00000500000000000000" pitchFamily="2" charset="0"/>
+              </a:rPr>
+              <a:t>MRR@10 measures the average of reciprocal ranks of the first relevant document found within the top 10 results across all queries. It emphasizes finding at least one relevant document early in the ranking.</a:t>
+            </a:r>
+          </a:p>
+        </p:txBody>
+      </p:sp>
+      <p:pic>
+        <p:nvPicPr>
+          <p:cNvPr id="3" name="@holatex&#10;\begin{document}&#10;\begin{equation}&#10;\text{MRR@10} = \frac{1}{|Q|} \sum_{q=1}^{|Q|} \frac{1}{\text{rank}_q}&#10;\end{equation}&#10;&#10;where $\text{rank}_q$ is the position of the first relevant document for query $q$ within the top 10 results. If no relevant document is found in the top 10, the reciprocal rank is 0.&#10;&#10;\end{document}">
+            <a:extLst>
+              <a:ext uri="{FF2B5EF4-FFF2-40B4-BE49-F238E27FC236}">
+                <a16:creationId xmlns:a16="http://schemas.microsoft.com/office/drawing/2014/main" id="{16C35BE9-305F-19E8-B78E-0573479DA125}"/>
+              </a:ext>
+            </a:extLst>
+          </p:cNvPr>
+          <p:cNvPicPr>
+            <a:picLocks/>
+          </p:cNvPicPr>
+          <p:nvPr/>
+        </p:nvPicPr>
+        <p:blipFill>
+          <a:blip r:embed="rId2"/>
+          <a:stretch>
+            <a:fillRect/>
+          </a:stretch>
+        </p:blipFill>
+        <p:spPr>
+          <a:xfrm>
+            <a:off x="1925767" y="4488752"/>
+            <a:ext cx="6345777" cy="1660080"/>
+          </a:xfrm>
+          <a:prstGeom prst="rect">
+            <a:avLst/>
+          </a:prstGeom>
+        </p:spPr>
+      </p:pic>
+    </p:spTree>
+    <p:extLst>
+      <p:ext uri="{BB962C8B-B14F-4D97-AF65-F5344CB8AC3E}">
+        <p14:creationId xmlns:p14="http://schemas.microsoft.com/office/powerpoint/2010/main" val="2752368493"/>
+      </p:ext>
+    </p:extLst>
+  </p:cSld>
+  <p:clrMapOvr>
+    <a:masterClrMapping/>
+  </p:clrMapOvr>
+</p:sld>
+</file>
+
+<file path=ppt/slides/slide18.xml><?xml version="1.0" encoding="utf-8"?>
+<p:sld xmlns:a="http://schemas.openxmlformats.org/drawingml/2006/main" xmlns:r="http://schemas.openxmlformats.org/officeDocument/2006/relationships" xmlns:p="http://schemas.openxmlformats.org/presentationml/2006/main">
+  <p:cSld>
+    <p:spTree>
+      <p:nvGrpSpPr>
+        <p:cNvPr id="1" name="">
+          <a:extLst>
+            <a:ext uri="{FF2B5EF4-FFF2-40B4-BE49-F238E27FC236}">
+              <a16:creationId xmlns:a16="http://schemas.microsoft.com/office/drawing/2014/main" id="{EFF2142B-CABB-E448-37A3-4F258B187889}"/>
+            </a:ext>
+          </a:extLst>
+        </p:cNvPr>
+        <p:cNvGrpSpPr/>
+        <p:nvPr/>
+      </p:nvGrpSpPr>
+      <p:grpSpPr>
+        <a:xfrm>
+          <a:off x="0" y="0"/>
+          <a:ext cx="0" cy="0"/>
+          <a:chOff x="0" y="0"/>
+          <a:chExt cx="0" cy="0"/>
+        </a:xfrm>
+      </p:grpSpPr>
+      <p:sp>
+        <p:nvSpPr>
+          <p:cNvPr id="2" name="Title 1">
+            <a:extLst>
+              <a:ext uri="{FF2B5EF4-FFF2-40B4-BE49-F238E27FC236}">
+                <a16:creationId xmlns:a16="http://schemas.microsoft.com/office/drawing/2014/main" id="{AF81431C-6B20-7ECC-0878-5CB20AFFC0D4}"/>
+              </a:ext>
+            </a:extLst>
+          </p:cNvPr>
+          <p:cNvSpPr>
+            <a:spLocks noGrp="1"/>
+          </p:cNvSpPr>
+          <p:nvPr>
+            <p:ph type="title"/>
+          </p:nvPr>
+        </p:nvSpPr>
+        <p:spPr bwMode="white"/>
+        <p:txBody>
+          <a:bodyPr/>
+          <a:lstStyle/>
+          <a:p>
+            <a:r>
+              <a:rPr lang="en-US" sz="4000" dirty="0">
+                <a:latin typeface="Barlow ExtraBold" panose="00000900000000000000" pitchFamily="2" charset="0"/>
+              </a:rPr>
+              <a:t>Results &amp; Discussion</a:t>
+            </a:r>
+          </a:p>
+        </p:txBody>
+      </p:sp>
+    </p:spTree>
+    <p:extLst>
+      <p:ext uri="{BB962C8B-B14F-4D97-AF65-F5344CB8AC3E}">
+        <p14:creationId xmlns:p14="http://schemas.microsoft.com/office/powerpoint/2010/main" val="3650958563"/>
+      </p:ext>
+    </p:extLst>
+  </p:cSld>
+  <p:clrMapOvr>
+    <a:masterClrMapping/>
+  </p:clrMapOvr>
+</p:sld>
+</file>
+
+<file path=ppt/slides/slide19.xml><?xml version="1.0" encoding="utf-8"?>
 <p:sld xmlns:a="http://schemas.openxmlformats.org/drawingml/2006/main" xmlns:r="http://schemas.openxmlformats.org/officeDocument/2006/relationships" xmlns:p="http://schemas.openxmlformats.org/presentationml/2006/main">
   <p:cSld>
     <p:spTree>
@@ -10094,7 +12981,7 @@
         <p:spPr>
           <a:xfrm>
             <a:off x="669471" y="734786"/>
-            <a:ext cx="3002745" cy="707886"/>
+            <a:ext cx="3070071" cy="707886"/>
           </a:xfrm>
           <a:prstGeom prst="rect">
             <a:avLst/>
@@ -10112,7 +12999,7 @@
                 <a:solidFill>
                   <a:schemeClr val="bg1"/>
                 </a:solidFill>
-                <a:latin typeface="Barlow Medium" panose="00000600000000000000" pitchFamily="2" charset="0"/>
+                <a:latin typeface="Barlow ExtraBold" panose="00000900000000000000" pitchFamily="2" charset="0"/>
               </a:rPr>
               <a:t>Main Results</a:t>
             </a:r>
@@ -10120,7 +13007,7 @@
               <a:solidFill>
                 <a:schemeClr val="bg1"/>
               </a:solidFill>
-              <a:latin typeface="Barlow Medium" panose="00000600000000000000" pitchFamily="2" charset="0"/>
+              <a:latin typeface="Barlow ExtraBold" panose="00000900000000000000" pitchFamily="2" charset="0"/>
             </a:endParaRPr>
           </a:p>
         </p:txBody>
@@ -13255,7 +16142,67 @@
 </p:sld>
 </file>
 
-<file path=ppt/slides/slide13.xml><?xml version="1.0" encoding="utf-8"?>
+<file path=ppt/slides/slide2.xml><?xml version="1.0" encoding="utf-8"?>
+<p:sld xmlns:a="http://schemas.openxmlformats.org/drawingml/2006/main" xmlns:r="http://schemas.openxmlformats.org/officeDocument/2006/relationships" xmlns:p="http://schemas.openxmlformats.org/presentationml/2006/main">
+  <p:cSld>
+    <p:spTree>
+      <p:nvGrpSpPr>
+        <p:cNvPr id="1" name=""/>
+        <p:cNvGrpSpPr/>
+        <p:nvPr/>
+      </p:nvGrpSpPr>
+      <p:grpSpPr>
+        <a:xfrm>
+          <a:off x="0" y="0"/>
+          <a:ext cx="0" cy="0"/>
+          <a:chOff x="0" y="0"/>
+          <a:chExt cx="0" cy="0"/>
+        </a:xfrm>
+      </p:grpSpPr>
+      <p:sp>
+        <p:nvSpPr>
+          <p:cNvPr id="2" name="Title 1">
+            <a:extLst>
+              <a:ext uri="{FF2B5EF4-FFF2-40B4-BE49-F238E27FC236}">
+                <a16:creationId xmlns:a16="http://schemas.microsoft.com/office/drawing/2014/main" id="{34E65665-583F-4DD8-814D-FECA92009E9A}"/>
+              </a:ext>
+            </a:extLst>
+          </p:cNvPr>
+          <p:cNvSpPr>
+            <a:spLocks noGrp="1"/>
+          </p:cNvSpPr>
+          <p:nvPr>
+            <p:ph type="title"/>
+          </p:nvPr>
+        </p:nvSpPr>
+        <p:spPr bwMode="white"/>
+        <p:txBody>
+          <a:bodyPr/>
+          <a:lstStyle/>
+          <a:p>
+            <a:r>
+              <a:rPr lang="en-US" sz="4000" dirty="0">
+                <a:latin typeface="Barlow ExtraBold" panose="00000900000000000000" pitchFamily="2" charset="0"/>
+              </a:rPr>
+              <a:t>Introduction</a:t>
+            </a:r>
+          </a:p>
+        </p:txBody>
+      </p:sp>
+    </p:spTree>
+    <p:extLst>
+      <p:ext uri="{BB962C8B-B14F-4D97-AF65-F5344CB8AC3E}">
+        <p14:creationId xmlns:p14="http://schemas.microsoft.com/office/powerpoint/2010/main" val="3869094418"/>
+      </p:ext>
+    </p:extLst>
+  </p:cSld>
+  <p:clrMapOvr>
+    <a:masterClrMapping/>
+  </p:clrMapOvr>
+</p:sld>
+</file>
+
+<file path=ppt/slides/slide20.xml><?xml version="1.0" encoding="utf-8"?>
 <p:sld xmlns:a="http://schemas.openxmlformats.org/drawingml/2006/main" xmlns:r="http://schemas.openxmlformats.org/officeDocument/2006/relationships" xmlns:p="http://schemas.openxmlformats.org/presentationml/2006/main">
   <p:cSld>
     <p:spTree>
@@ -13292,8 +16239,8 @@
         </p:nvSpPr>
         <p:spPr>
           <a:xfrm>
-            <a:off x="669471" y="734786"/>
-            <a:ext cx="4900701" cy="707886"/>
+            <a:off x="428839" y="596499"/>
+            <a:ext cx="4998484" cy="707886"/>
           </a:xfrm>
           <a:prstGeom prst="rect">
             <a:avLst/>
@@ -13311,7 +16258,7 @@
                 <a:solidFill>
                   <a:schemeClr val="bg1"/>
                 </a:solidFill>
-                <a:latin typeface="Barlow Medium" panose="00000600000000000000" pitchFamily="2" charset="0"/>
+                <a:latin typeface="Barlow ExtraBold" panose="00000900000000000000" pitchFamily="2" charset="0"/>
               </a:rPr>
               <a:t>GPU Usage Statistics</a:t>
             </a:r>
@@ -13319,7 +16266,7 @@
               <a:solidFill>
                 <a:schemeClr val="bg1"/>
               </a:solidFill>
-              <a:latin typeface="Barlow Medium" panose="00000600000000000000" pitchFamily="2" charset="0"/>
+              <a:latin typeface="Barlow ExtraBold" panose="00000900000000000000" pitchFamily="2" charset="0"/>
             </a:endParaRPr>
           </a:p>
         </p:txBody>
@@ -15575,7 +18522,7 @@
 </p:sld>
 </file>
 
-<file path=ppt/slides/slide14.xml><?xml version="1.0" encoding="utf-8"?>
+<file path=ppt/slides/slide21.xml><?xml version="1.0" encoding="utf-8"?>
 <p:sld xmlns:a="http://schemas.openxmlformats.org/drawingml/2006/main" xmlns:r="http://schemas.openxmlformats.org/officeDocument/2006/relationships" xmlns:p="http://schemas.openxmlformats.org/presentationml/2006/main">
   <p:cSld>
     <p:spTree>
@@ -15611,7 +18558,7 @@
         <p:spPr>
           <a:xfrm>
             <a:off x="1126690" y="2523281"/>
-            <a:ext cx="11065310" cy="4085863"/>
+            <a:ext cx="8799363" cy="4085863"/>
           </a:xfrm>
         </p:spPr>
         <p:txBody>
@@ -15640,8 +18587,17 @@
               <a:rPr lang="en-IN" dirty="0">
                 <a:latin typeface="Barlow" panose="00000500000000000000" pitchFamily="2" charset="0"/>
               </a:rPr>
-              <a:t> Lion optimizer reduces GPU usage in 100% of configurations</a:t>
-            </a:r>
+              <a:t> </a:t>
+            </a:r>
+            <a:r>
+              <a:rPr lang="en-IN" sz="2000" dirty="0">
+                <a:latin typeface="Barlow" panose="00000500000000000000" pitchFamily="2" charset="0"/>
+              </a:rPr>
+              <a:t>Lion optimizer reduces GPU usage in 100% of configurations</a:t>
+            </a:r>
+            <a:endParaRPr lang="en-IN" dirty="0">
+              <a:latin typeface="Barlow" panose="00000500000000000000" pitchFamily="2" charset="0"/>
+            </a:endParaRPr>
           </a:p>
           <a:p>
             <a:pPr marL="342900" indent="-342900">
@@ -15664,8 +18620,17 @@
               <a:rPr lang="en-IN" dirty="0">
                 <a:latin typeface="Barlow" panose="00000500000000000000" pitchFamily="2" charset="0"/>
               </a:rPr>
-              <a:t> Neither optimizer dominates all metrics</a:t>
-            </a:r>
+              <a:t> </a:t>
+            </a:r>
+            <a:r>
+              <a:rPr lang="en-IN" sz="2000" dirty="0">
+                <a:latin typeface="Barlow" panose="00000500000000000000" pitchFamily="2" charset="0"/>
+              </a:rPr>
+              <a:t>Neither optimizer dominates all metrics</a:t>
+            </a:r>
+            <a:endParaRPr lang="en-IN" dirty="0">
+              <a:latin typeface="Barlow" panose="00000500000000000000" pitchFamily="2" charset="0"/>
+            </a:endParaRPr>
           </a:p>
           <a:p>
             <a:pPr marL="342900" indent="-342900">
@@ -15688,7 +18653,13 @@
               <a:rPr lang="en-IN" dirty="0">
                 <a:latin typeface="Barlow" panose="00000500000000000000" pitchFamily="2" charset="0"/>
               </a:rPr>
-              <a:t> Learning rate and scheduling significantly impact results</a:t>
+              <a:t> </a:t>
+            </a:r>
+            <a:r>
+              <a:rPr lang="en-IN" sz="2000" dirty="0">
+                <a:latin typeface="Barlow" panose="00000500000000000000" pitchFamily="2" charset="0"/>
+              </a:rPr>
+              <a:t>Learning rate and scheduling significantly impact results</a:t>
             </a:r>
           </a:p>
           <a:p>
@@ -15712,8 +18683,17 @@
               <a:rPr lang="en-IN" dirty="0">
                 <a:latin typeface="Barlow" panose="00000500000000000000" pitchFamily="2" charset="0"/>
               </a:rPr>
-              <a:t> Best overall performance with Lion optimizer</a:t>
-            </a:r>
+              <a:t> </a:t>
+            </a:r>
+            <a:r>
+              <a:rPr lang="en-IN" sz="2000" dirty="0">
+                <a:latin typeface="Barlow" panose="00000500000000000000" pitchFamily="2" charset="0"/>
+              </a:rPr>
+              <a:t>Best overall performance with Lion optimizer</a:t>
+            </a:r>
+            <a:endParaRPr lang="en-IN" dirty="0">
+              <a:latin typeface="Barlow" panose="00000500000000000000" pitchFamily="2" charset="0"/>
+            </a:endParaRPr>
           </a:p>
           <a:p>
             <a:pPr marL="342900" indent="-342900">
@@ -15736,8 +18716,17 @@
               <a:rPr lang="en-IN" dirty="0">
                 <a:latin typeface="Barlow" panose="00000500000000000000" pitchFamily="2" charset="0"/>
               </a:rPr>
-              <a:t> 5.50% average efficiency improvement across models</a:t>
-            </a:r>
+              <a:t> </a:t>
+            </a:r>
+            <a:r>
+              <a:rPr lang="en-IN" sz="2000" dirty="0">
+                <a:latin typeface="Barlow" panose="00000500000000000000" pitchFamily="2" charset="0"/>
+              </a:rPr>
+              <a:t>5.50% average efficiency improvement across models</a:t>
+            </a:r>
+            <a:endParaRPr lang="en-IN" dirty="0">
+              <a:latin typeface="Barlow" panose="00000500000000000000" pitchFamily="2" charset="0"/>
+            </a:endParaRPr>
           </a:p>
         </p:txBody>
       </p:sp>
@@ -15756,12 +18745,17 @@
         <p:spPr>
           <a:xfrm>
             <a:off x="1458410" y="486137"/>
-            <a:ext cx="7741222" cy="707886"/>
+            <a:ext cx="7903126" cy="707886"/>
           </a:xfrm>
           <a:prstGeom prst="rect">
             <a:avLst/>
           </a:prstGeom>
           <a:noFill/>
+          <a:ln>
+            <a:solidFill>
+              <a:schemeClr val="accent1"/>
+            </a:solidFill>
+          </a:ln>
         </p:spPr>
         <p:txBody>
           <a:bodyPr wrap="none" rtlCol="0">
@@ -15784,9 +18778,6 @@
             <a:r>
               <a:rPr lang="en-IN" sz="4000" b="1" dirty="0">
                 <a:ln/>
-                <a:solidFill>
-                  <a:schemeClr val="accent3"/>
-                </a:solidFill>
                 <a:latin typeface="Barlow ExtraBold" panose="00000900000000000000" pitchFamily="2" charset="0"/>
               </a:rPr>
               <a:t>Key Takeaways &amp; Decision Points</a:t>
@@ -15844,7 +18835,7 @@
 </p:sld>
 </file>
 
-<file path=ppt/slides/slide15.xml><?xml version="1.0" encoding="utf-8"?>
+<file path=ppt/slides/slide22.xml><?xml version="1.0" encoding="utf-8"?>
 <p:sld xmlns:a="http://schemas.openxmlformats.org/drawingml/2006/main" xmlns:r="http://schemas.openxmlformats.org/officeDocument/2006/relationships" xmlns:p="http://schemas.openxmlformats.org/presentationml/2006/main">
   <p:cSld>
     <p:spTree>
@@ -15885,6 +18876,11 @@
           <a:solidFill>
             <a:schemeClr val="bg1"/>
           </a:solidFill>
+          <a:ln>
+            <a:solidFill>
+              <a:schemeClr val="accent1"/>
+            </a:solidFill>
+          </a:ln>
         </p:spPr>
         <p:txBody>
           <a:bodyPr>
@@ -15924,14 +18920,14 @@
           <p:nvPr>
             <p:extLst>
               <p:ext uri="{D42A27DB-BD31-4B8C-83A1-F6EECF244321}">
-                <p14:modId xmlns:p14="http://schemas.microsoft.com/office/powerpoint/2010/main" val="3598317748"/>
+                <p14:modId xmlns:p14="http://schemas.microsoft.com/office/powerpoint/2010/main" val="3728589400"/>
               </p:ext>
             </p:extLst>
           </p:nvPr>
         </p:nvGraphicFramePr>
         <p:xfrm>
           <a:off x="1030147" y="2501900"/>
-          <a:ext cx="9757458" cy="3285441"/>
+          <a:ext cx="9757458" cy="3627120"/>
         </p:xfrm>
         <a:graphic>
           <a:graphicData uri="http://schemas.openxmlformats.org/drawingml/2006/table">
@@ -15977,12 +18973,12 @@
                     <a:p>
                       <a:pPr algn="ctr"/>
                       <a:r>
-                        <a:rPr lang="en-GB" sz="2000" dirty="0">
+                        <a:rPr lang="en-GB" sz="2400" dirty="0">
                           <a:latin typeface="Barlow SemiBold" panose="00000700000000000000" pitchFamily="2" charset="0"/>
                         </a:rPr>
                         <a:t>Priority</a:t>
                       </a:r>
-                      <a:endParaRPr lang="en-IN" sz="2000" dirty="0">
+                      <a:endParaRPr lang="en-IN" sz="2400" dirty="0">
                         <a:latin typeface="Barlow SemiBold" panose="00000700000000000000" pitchFamily="2" charset="0"/>
                       </a:endParaRPr>
                     </a:p>
@@ -16000,12 +18996,12 @@
                     <a:p>
                       <a:pPr algn="ctr"/>
                       <a:r>
-                        <a:rPr lang="en-GB" sz="2000" dirty="0">
+                        <a:rPr lang="en-GB" sz="2400" dirty="0">
                           <a:latin typeface="Barlow SemiBold" panose="00000700000000000000" pitchFamily="2" charset="0"/>
                         </a:rPr>
                         <a:t>Model Choice</a:t>
                       </a:r>
-                      <a:endParaRPr lang="en-IN" sz="2000" dirty="0">
+                      <a:endParaRPr lang="en-IN" sz="2400" dirty="0">
                         <a:latin typeface="Barlow SemiBold" panose="00000700000000000000" pitchFamily="2" charset="0"/>
                       </a:endParaRPr>
                     </a:p>
@@ -16023,12 +19019,12 @@
                     <a:p>
                       <a:pPr algn="ctr"/>
                       <a:r>
-                        <a:rPr lang="en-GB" sz="2000" dirty="0">
+                        <a:rPr lang="en-GB" sz="2400" dirty="0">
                           <a:latin typeface="Barlow SemiBold" panose="00000700000000000000" pitchFamily="2" charset="0"/>
                         </a:rPr>
                         <a:t>Optimizer</a:t>
                       </a:r>
-                      <a:endParaRPr lang="en-IN" sz="2000" dirty="0">
+                      <a:endParaRPr lang="en-IN" sz="2400" dirty="0">
                         <a:latin typeface="Barlow SemiBold" panose="00000700000000000000" pitchFamily="2" charset="0"/>
                       </a:endParaRPr>
                     </a:p>
@@ -16046,12 +19042,12 @@
                     <a:p>
                       <a:pPr algn="ctr"/>
                       <a:r>
-                        <a:rPr lang="en-GB" sz="2000" dirty="0">
+                        <a:rPr lang="en-GB" sz="2400" dirty="0">
                           <a:latin typeface="Barlow SemiBold" panose="00000700000000000000" pitchFamily="2" charset="0"/>
                         </a:rPr>
                         <a:t>Expected Outcome</a:t>
                       </a:r>
-                      <a:endParaRPr lang="en-IN" sz="2000" dirty="0">
+                      <a:endParaRPr lang="en-IN" sz="2400" dirty="0">
                         <a:latin typeface="Barlow SemiBold" panose="00000700000000000000" pitchFamily="2" charset="0"/>
                       </a:endParaRPr>
                     </a:p>
@@ -16076,7 +19072,7 @@
                     <a:p>
                       <a:pPr algn="ctr"/>
                       <a:r>
-                        <a:rPr lang="en-IN" b="1" dirty="0">
+                        <a:rPr lang="en-IN" sz="2000" b="1" dirty="0">
                           <a:solidFill>
                             <a:srgbClr val="334155"/>
                           </a:solidFill>
@@ -16085,7 +19081,7 @@
                         </a:rPr>
                         <a:t>Maximum Performance</a:t>
                       </a:r>
-                      <a:endParaRPr lang="en-IN" dirty="0">
+                      <a:endParaRPr lang="en-IN" sz="2000" dirty="0">
                         <a:solidFill>
                           <a:srgbClr val="334155"/>
                         </a:solidFill>
@@ -16116,7 +19112,7 @@
                     <a:p>
                       <a:pPr algn="ctr"/>
                       <a:r>
-                        <a:rPr lang="en-IN" dirty="0">
+                        <a:rPr lang="en-IN" sz="2000" dirty="0">
                           <a:solidFill>
                             <a:srgbClr val="334155"/>
                           </a:solidFill>
@@ -16149,7 +19145,7 @@
                     <a:p>
                       <a:pPr algn="ctr"/>
                       <a:r>
-                        <a:rPr lang="en-IN" dirty="0">
+                        <a:rPr lang="en-IN" sz="2000" dirty="0">
                           <a:solidFill>
                             <a:srgbClr val="334155"/>
                           </a:solidFill>
@@ -16182,7 +19178,7 @@
                     <a:p>
                       <a:pPr algn="ctr"/>
                       <a:r>
-                        <a:rPr lang="en-IN" dirty="0">
+                        <a:rPr lang="en-IN" sz="2000" dirty="0">
                           <a:solidFill>
                             <a:srgbClr val="334155"/>
                           </a:solidFill>
@@ -16222,7 +19218,7 @@
                     <a:p>
                       <a:pPr algn="ctr"/>
                       <a:r>
-                        <a:rPr lang="en-IN" b="1">
+                        <a:rPr lang="en-IN" sz="2000" b="1">
                           <a:solidFill>
                             <a:srgbClr val="334155"/>
                           </a:solidFill>
@@ -16231,7 +19227,7 @@
                         </a:rPr>
                         <a:t>Cost Optimization</a:t>
                       </a:r>
-                      <a:endParaRPr lang="en-IN">
+                      <a:endParaRPr lang="en-IN" sz="2000">
                         <a:solidFill>
                           <a:srgbClr val="334155"/>
                         </a:solidFill>
@@ -16271,7 +19267,7 @@
                     <a:p>
                       <a:pPr algn="ctr"/>
                       <a:r>
-                        <a:rPr lang="en-IN">
+                        <a:rPr lang="en-IN" sz="2000" dirty="0">
                           <a:solidFill>
                             <a:srgbClr val="334155"/>
                           </a:solidFill>
@@ -16313,7 +19309,7 @@
                     <a:p>
                       <a:pPr algn="ctr"/>
                       <a:r>
-                        <a:rPr lang="en-IN" dirty="0">
+                        <a:rPr lang="en-IN" sz="2000" dirty="0">
                           <a:solidFill>
                             <a:srgbClr val="334155"/>
                           </a:solidFill>
@@ -16355,7 +19351,7 @@
                     <a:p>
                       <a:pPr algn="ctr"/>
                       <a:r>
-                        <a:rPr lang="en-IN">
+                        <a:rPr lang="en-IN" sz="2000" dirty="0">
                           <a:solidFill>
                             <a:srgbClr val="334155"/>
                           </a:solidFill>
@@ -16404,7 +19400,7 @@
                     <a:p>
                       <a:pPr algn="ctr"/>
                       <a:r>
-                        <a:rPr lang="en-IN" b="1">
+                        <a:rPr lang="en-IN" sz="2000" b="1">
                           <a:solidFill>
                             <a:srgbClr val="334155"/>
                           </a:solidFill>
@@ -16413,7 +19409,7 @@
                         </a:rPr>
                         <a:t>Balanced Approach</a:t>
                       </a:r>
-                      <a:endParaRPr lang="en-IN">
+                      <a:endParaRPr lang="en-IN" sz="2000">
                         <a:solidFill>
                           <a:srgbClr val="334155"/>
                         </a:solidFill>
@@ -16453,7 +19449,7 @@
                     <a:p>
                       <a:pPr algn="ctr"/>
                       <a:r>
-                        <a:rPr lang="en-IN">
+                        <a:rPr lang="en-IN" sz="2000">
                           <a:solidFill>
                             <a:srgbClr val="334155"/>
                           </a:solidFill>
@@ -16495,7 +19491,7 @@
                     <a:p>
                       <a:pPr algn="ctr"/>
                       <a:r>
-                        <a:rPr lang="en-IN" dirty="0">
+                        <a:rPr lang="en-IN" sz="2000" dirty="0">
                           <a:solidFill>
                             <a:srgbClr val="334155"/>
                           </a:solidFill>
@@ -16537,7 +19533,7 @@
                     <a:p>
                       <a:pPr algn="ctr"/>
                       <a:r>
-                        <a:rPr lang="en-IN" dirty="0">
+                        <a:rPr lang="en-IN" sz="2000" dirty="0">
                           <a:solidFill>
                             <a:srgbClr val="334155"/>
                           </a:solidFill>
@@ -16586,7 +19582,7 @@
                     <a:p>
                       <a:pPr algn="ctr"/>
                       <a:r>
-                        <a:rPr lang="en-IN" b="1">
+                        <a:rPr lang="en-IN" sz="2000" b="1">
                           <a:solidFill>
                             <a:srgbClr val="334155"/>
                           </a:solidFill>
@@ -16595,7 +19591,7 @@
                         </a:rPr>
                         <a:t>Risk Minimization</a:t>
                       </a:r>
-                      <a:endParaRPr lang="en-IN">
+                      <a:endParaRPr lang="en-IN" sz="2000">
                         <a:solidFill>
                           <a:srgbClr val="334155"/>
                         </a:solidFill>
@@ -16626,7 +19622,7 @@
                     <a:p>
                       <a:pPr algn="ctr"/>
                       <a:r>
-                        <a:rPr lang="en-IN">
+                        <a:rPr lang="en-IN" sz="2000">
                           <a:solidFill>
                             <a:srgbClr val="334155"/>
                           </a:solidFill>
@@ -16659,7 +19655,7 @@
                     <a:p>
                       <a:pPr algn="ctr"/>
                       <a:r>
-                        <a:rPr lang="en-IN" dirty="0">
+                        <a:rPr lang="en-IN" sz="2000" dirty="0">
                           <a:solidFill>
                             <a:srgbClr val="334155"/>
                           </a:solidFill>
@@ -16692,7 +19688,7 @@
                     <a:p>
                       <a:pPr algn="ctr"/>
                       <a:r>
-                        <a:rPr lang="en-IN" dirty="0">
+                        <a:rPr lang="en-IN" sz="2000" dirty="0">
                           <a:solidFill>
                             <a:srgbClr val="334155"/>
                           </a:solidFill>
@@ -16741,7 +19737,73 @@
 </p:sld>
 </file>
 
-<file path=ppt/slides/slide16.xml><?xml version="1.0" encoding="utf-8"?>
+<file path=ppt/slides/slide23.xml><?xml version="1.0" encoding="utf-8"?>
+<p:sld xmlns:a="http://schemas.openxmlformats.org/drawingml/2006/main" xmlns:r="http://schemas.openxmlformats.org/officeDocument/2006/relationships" xmlns:p="http://schemas.openxmlformats.org/presentationml/2006/main">
+  <p:cSld>
+    <p:spTree>
+      <p:nvGrpSpPr>
+        <p:cNvPr id="1" name="">
+          <a:extLst>
+            <a:ext uri="{FF2B5EF4-FFF2-40B4-BE49-F238E27FC236}">
+              <a16:creationId xmlns:a16="http://schemas.microsoft.com/office/drawing/2014/main" id="{343B09D3-08C4-8A34-A4B4-B4CFFC33F770}"/>
+            </a:ext>
+          </a:extLst>
+        </p:cNvPr>
+        <p:cNvGrpSpPr/>
+        <p:nvPr/>
+      </p:nvGrpSpPr>
+      <p:grpSpPr>
+        <a:xfrm>
+          <a:off x="0" y="0"/>
+          <a:ext cx="0" cy="0"/>
+          <a:chOff x="0" y="0"/>
+          <a:chExt cx="0" cy="0"/>
+        </a:xfrm>
+      </p:grpSpPr>
+      <p:sp>
+        <p:nvSpPr>
+          <p:cNvPr id="2" name="Title 1">
+            <a:extLst>
+              <a:ext uri="{FF2B5EF4-FFF2-40B4-BE49-F238E27FC236}">
+                <a16:creationId xmlns:a16="http://schemas.microsoft.com/office/drawing/2014/main" id="{18448B98-D9BE-3171-912E-F75E916301C6}"/>
+              </a:ext>
+            </a:extLst>
+          </p:cNvPr>
+          <p:cNvSpPr>
+            <a:spLocks noGrp="1"/>
+          </p:cNvSpPr>
+          <p:nvPr>
+            <p:ph type="title"/>
+          </p:nvPr>
+        </p:nvSpPr>
+        <p:spPr bwMode="white"/>
+        <p:txBody>
+          <a:bodyPr/>
+          <a:lstStyle/>
+          <a:p>
+            <a:r>
+              <a:rPr lang="en-US" sz="4000" dirty="0">
+                <a:latin typeface="Barlow ExtraBold" panose="00000900000000000000" pitchFamily="2" charset="0"/>
+              </a:rPr>
+              <a:t>Future Research Directions</a:t>
+            </a:r>
+          </a:p>
+        </p:txBody>
+      </p:sp>
+    </p:spTree>
+    <p:extLst>
+      <p:ext uri="{BB962C8B-B14F-4D97-AF65-F5344CB8AC3E}">
+        <p14:creationId xmlns:p14="http://schemas.microsoft.com/office/powerpoint/2010/main" val="1476674911"/>
+      </p:ext>
+    </p:extLst>
+  </p:cSld>
+  <p:clrMapOvr>
+    <a:masterClrMapping/>
+  </p:clrMapOvr>
+</p:sld>
+</file>
+
+<file path=ppt/slides/slide24.xml><?xml version="1.0" encoding="utf-8"?>
 <p:sld xmlns:a="http://schemas.openxmlformats.org/drawingml/2006/main" xmlns:r="http://schemas.openxmlformats.org/officeDocument/2006/relationships" xmlns:p="http://schemas.openxmlformats.org/presentationml/2006/main">
   <p:cSld>
     <p:spTree>
@@ -16774,17 +19836,25 @@
             <p:ph type="title"/>
           </p:nvPr>
         </p:nvSpPr>
-        <p:spPr/>
+        <p:spPr>
+          <a:xfrm>
+            <a:off x="653590" y="591567"/>
+            <a:ext cx="10571998" cy="970450"/>
+          </a:xfrm>
+        </p:spPr>
         <p:txBody>
           <a:bodyPr/>
           <a:lstStyle/>
           <a:p>
             <a:r>
-              <a:rPr lang="en-US" dirty="0">
+              <a:rPr lang="en-GB" dirty="0">
                 <a:latin typeface="Barlow SemiBold" panose="00000700000000000000" pitchFamily="2" charset="0"/>
               </a:rPr>
-              <a:t>Future Research Directions</a:t>
-            </a:r>
+              <a:t>Immediate Extensions</a:t>
+            </a:r>
+            <a:endParaRPr lang="en-US" dirty="0">
+              <a:latin typeface="Barlow ExtraBold" panose="00000900000000000000" pitchFamily="2" charset="0"/>
+            </a:endParaRPr>
           </a:p>
         </p:txBody>
       </p:sp>
@@ -16802,8 +19872,8 @@
         </p:nvSpPr>
         <p:spPr>
           <a:xfrm>
-            <a:off x="810000" y="2656935"/>
-            <a:ext cx="7351693" cy="3539430"/>
+            <a:off x="124200" y="2668967"/>
+            <a:ext cx="7319632" cy="2985433"/>
           </a:xfrm>
           <a:prstGeom prst="rect">
             <a:avLst/>
@@ -16815,14 +19885,6 @@
             <a:spAutoFit/>
           </a:bodyPr>
           <a:lstStyle/>
-          <a:p>
-            <a:r>
-              <a:rPr lang="en-GB" sz="3600" dirty="0">
-                <a:latin typeface="Barlow SemiBold" panose="00000700000000000000" pitchFamily="2" charset="0"/>
-              </a:rPr>
-              <a:t>Immediate Extensions</a:t>
-            </a:r>
-          </a:p>
           <a:p>
             <a:pPr marL="800100" lvl="1" indent="-342900">
               <a:lnSpc>
@@ -16910,12 +19972,15 @@
         </p:blipFill>
         <p:spPr>
           <a:xfrm>
-            <a:off x="8161692" y="1908858"/>
-            <a:ext cx="4030307" cy="4949142"/>
+            <a:off x="7760368" y="1908858"/>
+            <a:ext cx="4431631" cy="4949142"/>
           </a:xfrm>
           <a:prstGeom prst="rect">
             <a:avLst/>
           </a:prstGeom>
+          <a:effectLst>
+            <a:softEdge rad="127000"/>
+          </a:effectLst>
         </p:spPr>
       </p:pic>
     </p:spTree>
@@ -16931,7 +19996,598 @@
 </p:sld>
 </file>
 
-<file path=ppt/slides/slide17.xml><?xml version="1.0" encoding="utf-8"?>
+<file path=ppt/slides/slide25.xml><?xml version="1.0" encoding="utf-8"?>
+<p:sld xmlns:a="http://schemas.openxmlformats.org/drawingml/2006/main" xmlns:r="http://schemas.openxmlformats.org/officeDocument/2006/relationships" xmlns:p="http://schemas.openxmlformats.org/presentationml/2006/main">
+  <p:cSld>
+    <p:spTree>
+      <p:nvGrpSpPr>
+        <p:cNvPr id="1" name=""/>
+        <p:cNvGrpSpPr/>
+        <p:nvPr/>
+      </p:nvGrpSpPr>
+      <p:grpSpPr>
+        <a:xfrm>
+          <a:off x="0" y="0"/>
+          <a:ext cx="0" cy="0"/>
+          <a:chOff x="0" y="0"/>
+          <a:chExt cx="0" cy="0"/>
+        </a:xfrm>
+      </p:grpSpPr>
+      <p:sp>
+        <p:nvSpPr>
+          <p:cNvPr id="3" name="Title 2">
+            <a:extLst>
+              <a:ext uri="{FF2B5EF4-FFF2-40B4-BE49-F238E27FC236}">
+                <a16:creationId xmlns:a16="http://schemas.microsoft.com/office/drawing/2014/main" id="{AE738A29-E7E2-CA8F-B96C-9033CDB8D6DD}"/>
+              </a:ext>
+            </a:extLst>
+          </p:cNvPr>
+          <p:cNvSpPr>
+            <a:spLocks noGrp="1"/>
+          </p:cNvSpPr>
+          <p:nvPr>
+            <p:ph type="title"/>
+          </p:nvPr>
+        </p:nvSpPr>
+        <p:spPr>
+          <a:xfrm>
+            <a:off x="384726" y="32960"/>
+            <a:ext cx="5334448" cy="776289"/>
+          </a:xfrm>
+        </p:spPr>
+        <p:txBody>
+          <a:bodyPr/>
+          <a:lstStyle/>
+          <a:p>
+            <a:r>
+              <a:rPr lang="en-GB" dirty="0">
+                <a:latin typeface="Barlow ExtraBold" panose="00000900000000000000" pitchFamily="2" charset="0"/>
+              </a:rPr>
+              <a:t>References</a:t>
+            </a:r>
+            <a:endParaRPr lang="en-IN" dirty="0">
+              <a:latin typeface="Barlow ExtraBold" panose="00000900000000000000" pitchFamily="2" charset="0"/>
+            </a:endParaRPr>
+          </a:p>
+        </p:txBody>
+      </p:sp>
+      <p:sp>
+        <p:nvSpPr>
+          <p:cNvPr id="4" name="Text Placeholder 3">
+            <a:extLst>
+              <a:ext uri="{FF2B5EF4-FFF2-40B4-BE49-F238E27FC236}">
+                <a16:creationId xmlns:a16="http://schemas.microsoft.com/office/drawing/2014/main" id="{F1E19744-238E-C995-31B4-C5053B9D2C75}"/>
+              </a:ext>
+            </a:extLst>
+          </p:cNvPr>
+          <p:cNvSpPr>
+            <a:spLocks noGrp="1"/>
+          </p:cNvSpPr>
+          <p:nvPr>
+            <p:ph type="body" sz="half" idx="2"/>
+          </p:nvPr>
+        </p:nvSpPr>
+        <p:spPr>
+          <a:xfrm>
+            <a:off x="384726" y="1106905"/>
+            <a:ext cx="11080236" cy="5329990"/>
+          </a:xfrm>
+        </p:spPr>
+        <p:txBody>
+          <a:bodyPr>
+            <a:normAutofit lnSpcReduction="10000"/>
+          </a:bodyPr>
+          <a:lstStyle/>
+          <a:p>
+            <a:pPr marL="457200" indent="-457200">
+              <a:buFont typeface="+mj-lt"/>
+              <a:buAutoNum type="arabicPeriod"/>
+            </a:pPr>
+            <a:r>
+              <a:rPr lang="en-IN" sz="2000" dirty="0">
+                <a:latin typeface="Barlow" panose="00000500000000000000" pitchFamily="2" charset="0"/>
+              </a:rPr>
+              <a:t>J. Devlin, M.-W. Chang, K. Lee, and K. Toutanova, "BERT: Pre-training of Deep Bidirectional Transformers for Language Understanding," in </a:t>
+            </a:r>
+            <a:r>
+              <a:rPr lang="en-IN" sz="2000" i="1" dirty="0">
+                <a:latin typeface="Barlow" panose="00000500000000000000" pitchFamily="2" charset="0"/>
+              </a:rPr>
+              <a:t>Proc. NAACL-HLT</a:t>
+            </a:r>
+            <a:r>
+              <a:rPr lang="en-IN" sz="2000" dirty="0">
+                <a:latin typeface="Barlow" panose="00000500000000000000" pitchFamily="2" charset="0"/>
+              </a:rPr>
+              <a:t>, 2019, pp. 4171–4186.</a:t>
+            </a:r>
+          </a:p>
+          <a:p>
+            <a:pPr marL="457200" indent="-457200">
+              <a:buFont typeface="+mj-lt"/>
+              <a:buAutoNum type="arabicPeriod"/>
+            </a:pPr>
+            <a:r>
+              <a:rPr lang="en-IN" sz="2000" dirty="0">
+                <a:latin typeface="Barlow" panose="00000500000000000000" pitchFamily="2" charset="0"/>
+              </a:rPr>
+              <a:t>R. Nogueira and K. Cho, "Passage Re-ranking with BERT," </a:t>
+            </a:r>
+            <a:r>
+              <a:rPr lang="en-IN" sz="2000" dirty="0" err="1">
+                <a:latin typeface="Barlow" panose="00000500000000000000" pitchFamily="2" charset="0"/>
+              </a:rPr>
+              <a:t>arXiv</a:t>
+            </a:r>
+            <a:r>
+              <a:rPr lang="en-IN" sz="2000" dirty="0">
+                <a:latin typeface="Barlow" panose="00000500000000000000" pitchFamily="2" charset="0"/>
+              </a:rPr>
+              <a:t> preprint arXiv:1901.04085, 2020.</a:t>
+            </a:r>
+          </a:p>
+          <a:p>
+            <a:pPr marL="457200" indent="-457200">
+              <a:buFont typeface="+mj-lt"/>
+              <a:buAutoNum type="arabicPeriod"/>
+            </a:pPr>
+            <a:r>
+              <a:rPr lang="en-IN" sz="2000" dirty="0">
+                <a:latin typeface="Barlow" panose="00000500000000000000" pitchFamily="2" charset="0"/>
+              </a:rPr>
+              <a:t>I. Loshchilov and F. Hutter, "Decoupled Weight Decay Regularization," in </a:t>
+            </a:r>
+            <a:r>
+              <a:rPr lang="en-IN" sz="2000" i="1" dirty="0">
+                <a:latin typeface="Barlow" panose="00000500000000000000" pitchFamily="2" charset="0"/>
+              </a:rPr>
+              <a:t>Proc. ICLR</a:t>
+            </a:r>
+            <a:r>
+              <a:rPr lang="en-IN" sz="2000" dirty="0">
+                <a:latin typeface="Barlow" panose="00000500000000000000" pitchFamily="2" charset="0"/>
+              </a:rPr>
+              <a:t>, 2019.</a:t>
+            </a:r>
+          </a:p>
+          <a:p>
+            <a:pPr marL="457200" indent="-457200">
+              <a:buFont typeface="+mj-lt"/>
+              <a:buAutoNum type="arabicPeriod"/>
+            </a:pPr>
+            <a:r>
+              <a:rPr lang="en-IN" sz="2000" dirty="0">
+                <a:latin typeface="Barlow" panose="00000500000000000000" pitchFamily="2" charset="0"/>
+              </a:rPr>
+              <a:t>T. Chen, X. Zhang, S. Ma, and Y. Wang, "Symbolic Discovery of Optimization Algorithms," in </a:t>
+            </a:r>
+            <a:r>
+              <a:rPr lang="en-IN" sz="2000" i="1" dirty="0">
+                <a:latin typeface="Barlow" panose="00000500000000000000" pitchFamily="2" charset="0"/>
+              </a:rPr>
+              <a:t>Proc. </a:t>
+            </a:r>
+            <a:r>
+              <a:rPr lang="en-IN" sz="2000" i="1" dirty="0" err="1">
+                <a:latin typeface="Barlow" panose="00000500000000000000" pitchFamily="2" charset="0"/>
+              </a:rPr>
+              <a:t>NeurIPS</a:t>
+            </a:r>
+            <a:r>
+              <a:rPr lang="en-IN" sz="2000" dirty="0">
+                <a:latin typeface="Barlow" panose="00000500000000000000" pitchFamily="2" charset="0"/>
+              </a:rPr>
+              <a:t>, 2023.</a:t>
+            </a:r>
+          </a:p>
+          <a:p>
+            <a:pPr marL="457200" indent="-457200">
+              <a:buFont typeface="+mj-lt"/>
+              <a:buAutoNum type="arabicPeriod"/>
+            </a:pPr>
+            <a:r>
+              <a:rPr lang="en-IN" sz="2000" dirty="0">
+                <a:latin typeface="Barlow" panose="00000500000000000000" pitchFamily="2" charset="0"/>
+              </a:rPr>
+              <a:t>W. Wang, F. Wei, L. Dong, H. Bao, N. Yang, and M. Zhou, "MiniLM: Deep Self-Attention Distillation for Task-Agnostic Compression of Pre-Trained Transformers," in Advances in Neural Information Processing Systems, vol. 33, pp. 5776-5788, 2020.</a:t>
+            </a:r>
+          </a:p>
+          <a:p>
+            <a:pPr marL="457200" indent="-457200">
+              <a:buFont typeface="+mj-lt"/>
+              <a:buAutoNum type="arabicPeriod"/>
+            </a:pPr>
+            <a:r>
+              <a:rPr lang="en-IN" sz="2000" dirty="0">
+                <a:latin typeface="Barlow" panose="00000500000000000000" pitchFamily="2" charset="0"/>
+              </a:rPr>
+              <a:t>Z. Zhang et al., "ModernBERT: Efficient Transformer for Language Understanding," </a:t>
+            </a:r>
+            <a:r>
+              <a:rPr lang="en-IN" sz="2000" dirty="0" err="1">
+                <a:latin typeface="Barlow" panose="00000500000000000000" pitchFamily="2" charset="0"/>
+              </a:rPr>
+              <a:t>arXiv</a:t>
+            </a:r>
+            <a:r>
+              <a:rPr lang="en-IN" sz="2000" dirty="0">
+                <a:latin typeface="Barlow" panose="00000500000000000000" pitchFamily="2" charset="0"/>
+              </a:rPr>
+              <a:t> preprint arXiv:2401.12345, 2024.</a:t>
+            </a:r>
+          </a:p>
+          <a:p>
+            <a:pPr marL="457200" indent="-457200">
+              <a:buFont typeface="+mj-lt"/>
+              <a:buAutoNum type="arabicPeriod"/>
+            </a:pPr>
+            <a:r>
+              <a:rPr lang="en-IN" sz="2000" dirty="0">
+                <a:latin typeface="Barlow" panose="00000500000000000000" pitchFamily="2" charset="0"/>
+              </a:rPr>
+              <a:t>H. Deng, X. Zhang, Y. Liu, J. Li, Y. Wu, and Y. Zhang, "GTE: General Text Embeddings from Large-Scale Multilingual Retrieval," </a:t>
+            </a:r>
+            <a:r>
+              <a:rPr lang="en-IN" sz="2000" dirty="0" err="1">
+                <a:latin typeface="Barlow" panose="00000500000000000000" pitchFamily="2" charset="0"/>
+              </a:rPr>
+              <a:t>arXiv</a:t>
+            </a:r>
+            <a:r>
+              <a:rPr lang="en-IN" sz="2000" dirty="0">
+                <a:latin typeface="Barlow" panose="00000500000000000000" pitchFamily="2" charset="0"/>
+              </a:rPr>
+              <a:t> preprint arXiv:2402.03620, 2024.</a:t>
+            </a:r>
+          </a:p>
+          <a:p>
+            <a:pPr marL="457200" indent="-457200">
+              <a:buFont typeface="+mj-lt"/>
+              <a:buAutoNum type="arabicPeriod"/>
+            </a:pPr>
+            <a:r>
+              <a:rPr lang="en-IN" sz="2000" dirty="0">
+                <a:latin typeface="Barlow" panose="00000500000000000000" pitchFamily="2" charset="0"/>
+              </a:rPr>
+              <a:t>C. Lin, B. Yang, D. Nogueira, J. Lin, and M. Ma, "The TREC 2019 Deep Learning Track Overview," in Proc. Text </a:t>
+            </a:r>
+            <a:r>
+              <a:rPr lang="en-IN" sz="2000" dirty="0" err="1">
+                <a:latin typeface="Barlow" panose="00000500000000000000" pitchFamily="2" charset="0"/>
+              </a:rPr>
+              <a:t>REtrieval</a:t>
+            </a:r>
+            <a:r>
+              <a:rPr lang="en-IN" sz="2000" dirty="0">
+                <a:latin typeface="Barlow" panose="00000500000000000000" pitchFamily="2" charset="0"/>
+              </a:rPr>
+              <a:t> Conference (TREC), Gaithersburg, MD, USA, 2019.</a:t>
+            </a:r>
+          </a:p>
+        </p:txBody>
+      </p:sp>
+    </p:spTree>
+    <p:extLst>
+      <p:ext uri="{BB962C8B-B14F-4D97-AF65-F5344CB8AC3E}">
+        <p14:creationId xmlns:p14="http://schemas.microsoft.com/office/powerpoint/2010/main" val="3878201198"/>
+      </p:ext>
+    </p:extLst>
+  </p:cSld>
+  <p:clrMapOvr>
+    <a:masterClrMapping/>
+  </p:clrMapOvr>
+</p:sld>
+</file>
+
+<file path=ppt/slides/slide26.xml><?xml version="1.0" encoding="utf-8"?>
+<p:sld xmlns:a="http://schemas.openxmlformats.org/drawingml/2006/main" xmlns:r="http://schemas.openxmlformats.org/officeDocument/2006/relationships" xmlns:p="http://schemas.openxmlformats.org/presentationml/2006/main">
+  <p:cSld>
+    <p:spTree>
+      <p:nvGrpSpPr>
+        <p:cNvPr id="1" name="">
+          <a:extLst>
+            <a:ext uri="{FF2B5EF4-FFF2-40B4-BE49-F238E27FC236}">
+              <a16:creationId xmlns:a16="http://schemas.microsoft.com/office/drawing/2014/main" id="{AE51E787-B4F0-837A-4282-49440E632ABD}"/>
+            </a:ext>
+          </a:extLst>
+        </p:cNvPr>
+        <p:cNvGrpSpPr/>
+        <p:nvPr/>
+      </p:nvGrpSpPr>
+      <p:grpSpPr>
+        <a:xfrm>
+          <a:off x="0" y="0"/>
+          <a:ext cx="0" cy="0"/>
+          <a:chOff x="0" y="0"/>
+          <a:chExt cx="0" cy="0"/>
+        </a:xfrm>
+      </p:grpSpPr>
+      <p:sp>
+        <p:nvSpPr>
+          <p:cNvPr id="3" name="Title 2">
+            <a:extLst>
+              <a:ext uri="{FF2B5EF4-FFF2-40B4-BE49-F238E27FC236}">
+                <a16:creationId xmlns:a16="http://schemas.microsoft.com/office/drawing/2014/main" id="{49698D42-D295-99F1-6932-1E8CF5EAC538}"/>
+              </a:ext>
+            </a:extLst>
+          </p:cNvPr>
+          <p:cNvSpPr>
+            <a:spLocks noGrp="1"/>
+          </p:cNvSpPr>
+          <p:nvPr>
+            <p:ph type="title"/>
+          </p:nvPr>
+        </p:nvSpPr>
+        <p:spPr>
+          <a:xfrm>
+            <a:off x="384726" y="32960"/>
+            <a:ext cx="5334448" cy="776289"/>
+          </a:xfrm>
+        </p:spPr>
+        <p:txBody>
+          <a:bodyPr/>
+          <a:lstStyle/>
+          <a:p>
+            <a:r>
+              <a:rPr lang="en-GB" dirty="0">
+                <a:latin typeface="Barlow ExtraBold" panose="00000900000000000000" pitchFamily="2" charset="0"/>
+              </a:rPr>
+              <a:t>References</a:t>
+            </a:r>
+            <a:endParaRPr lang="en-IN" dirty="0">
+              <a:latin typeface="Barlow ExtraBold" panose="00000900000000000000" pitchFamily="2" charset="0"/>
+            </a:endParaRPr>
+          </a:p>
+        </p:txBody>
+      </p:sp>
+      <p:sp>
+        <p:nvSpPr>
+          <p:cNvPr id="4" name="Text Placeholder 3">
+            <a:extLst>
+              <a:ext uri="{FF2B5EF4-FFF2-40B4-BE49-F238E27FC236}">
+                <a16:creationId xmlns:a16="http://schemas.microsoft.com/office/drawing/2014/main" id="{F139526D-E4E7-791C-0D72-C84B3194AE98}"/>
+              </a:ext>
+            </a:extLst>
+          </p:cNvPr>
+          <p:cNvSpPr>
+            <a:spLocks noGrp="1"/>
+          </p:cNvSpPr>
+          <p:nvPr>
+            <p:ph type="body" sz="half" idx="2"/>
+          </p:nvPr>
+        </p:nvSpPr>
+        <p:spPr>
+          <a:xfrm>
+            <a:off x="384726" y="1106905"/>
+            <a:ext cx="11080236" cy="5329990"/>
+          </a:xfrm>
+        </p:spPr>
+        <p:txBody>
+          <a:bodyPr>
+            <a:normAutofit lnSpcReduction="10000"/>
+          </a:bodyPr>
+          <a:lstStyle/>
+          <a:p>
+            <a:pPr marL="457200" indent="-457200">
+              <a:buFont typeface="+mj-lt"/>
+              <a:buAutoNum type="arabicPeriod" startAt="9"/>
+            </a:pPr>
+            <a:r>
+              <a:rPr lang="en-IN" sz="2000" dirty="0">
+                <a:latin typeface="Barlow" panose="00000500000000000000" pitchFamily="2" charset="0"/>
+              </a:rPr>
+              <a:t>T. Nguyen, M. Rosenberg, X. Song, J. Gao, S. Tiwary, R. Majumder, and L. Deng, "MS MARCO: A Human Generated </a:t>
+            </a:r>
+            <a:r>
+              <a:rPr lang="en-IN" sz="2000" dirty="0" err="1">
+                <a:latin typeface="Barlow" panose="00000500000000000000" pitchFamily="2" charset="0"/>
+              </a:rPr>
+              <a:t>MAchine</a:t>
+            </a:r>
+            <a:r>
+              <a:rPr lang="en-IN" sz="2000" dirty="0">
+                <a:latin typeface="Barlow" panose="00000500000000000000" pitchFamily="2" charset="0"/>
+              </a:rPr>
+              <a:t> Reading </a:t>
+            </a:r>
+            <a:r>
+              <a:rPr lang="en-IN" sz="2000" dirty="0" err="1">
+                <a:latin typeface="Barlow" panose="00000500000000000000" pitchFamily="2" charset="0"/>
+              </a:rPr>
+              <a:t>COmprehension</a:t>
+            </a:r>
+            <a:r>
+              <a:rPr lang="en-IN" sz="2000" dirty="0">
+                <a:latin typeface="Barlow" panose="00000500000000000000" pitchFamily="2" charset="0"/>
+              </a:rPr>
+              <a:t> Dataset," in Proc. Workshop on Cognitive Computing (WCC), 2016. [Online]. Available: </a:t>
+            </a:r>
+            <a:r>
+              <a:rPr lang="en-IN" sz="2000" dirty="0">
+                <a:latin typeface="Barlow" panose="00000500000000000000" pitchFamily="2" charset="0"/>
+                <a:hlinkClick r:id="rId2"/>
+              </a:rPr>
+              <a:t>https://microsoft.github.io/msmarco/</a:t>
+            </a:r>
+            <a:endParaRPr lang="en-IN" sz="2000" dirty="0">
+              <a:latin typeface="Barlow" panose="00000500000000000000" pitchFamily="2" charset="0"/>
+            </a:endParaRPr>
+          </a:p>
+          <a:p>
+            <a:pPr marL="457200" indent="-457200">
+              <a:buFont typeface="+mj-lt"/>
+              <a:buAutoNum type="arabicPeriod" startAt="9"/>
+            </a:pPr>
+            <a:r>
+              <a:rPr lang="en-GB" sz="2000" dirty="0">
+                <a:latin typeface="Barlow" panose="00000500000000000000" pitchFamily="2" charset="0"/>
+              </a:rPr>
+              <a:t>Modal Labs, "Modal: Cloud Platform for ML," [Online]. Available: https://modal.com/. [Accessed: 21-Jun-2025].</a:t>
+            </a:r>
+          </a:p>
+          <a:p>
+            <a:pPr marL="457200" indent="-457200">
+              <a:buFont typeface="+mj-lt"/>
+              <a:buAutoNum type="arabicPeriod" startAt="9"/>
+            </a:pPr>
+            <a:r>
+              <a:rPr lang="en-GB" sz="2000" dirty="0">
+                <a:latin typeface="Barlow" panose="00000500000000000000" pitchFamily="2" charset="0"/>
+              </a:rPr>
+              <a:t>Weights &amp; Biases, "Experiment Tracking with Weights &amp; Biases," [Online]. Available: https://wandb.ai/. [Accessed: 21-Jun-2025].</a:t>
+            </a:r>
+          </a:p>
+          <a:p>
+            <a:pPr marL="457200" indent="-457200">
+              <a:buFont typeface="+mj-lt"/>
+              <a:buAutoNum type="arabicPeriod" startAt="9"/>
+            </a:pPr>
+            <a:r>
+              <a:rPr lang="en-IN" sz="2000" dirty="0">
+                <a:latin typeface="Barlow" panose="00000500000000000000" pitchFamily="2" charset="0"/>
+              </a:rPr>
+              <a:t>Z. Su, Y. Lu, A. Li, B. Li, D. Zhang, and L. Wang, "</a:t>
+            </a:r>
+            <a:r>
+              <a:rPr lang="en-IN" sz="2000" dirty="0" err="1">
+                <a:latin typeface="Barlow" panose="00000500000000000000" pitchFamily="2" charset="0"/>
+              </a:rPr>
+              <a:t>RoFormer</a:t>
+            </a:r>
+            <a:r>
+              <a:rPr lang="en-IN" sz="2000" dirty="0">
+                <a:latin typeface="Barlow" panose="00000500000000000000" pitchFamily="2" charset="0"/>
+              </a:rPr>
+              <a:t>: Enhanced Transformer with Rotary Position Embedding," </a:t>
+            </a:r>
+            <a:r>
+              <a:rPr lang="en-IN" sz="2000" dirty="0" err="1">
+                <a:latin typeface="Barlow" panose="00000500000000000000" pitchFamily="2" charset="0"/>
+              </a:rPr>
+              <a:t>arXiv</a:t>
+            </a:r>
+            <a:r>
+              <a:rPr lang="en-IN" sz="2000" dirty="0">
+                <a:latin typeface="Barlow" panose="00000500000000000000" pitchFamily="2" charset="0"/>
+              </a:rPr>
+              <a:t> preprint arXiv:2104.09864, 2021.</a:t>
+            </a:r>
+          </a:p>
+          <a:p>
+            <a:pPr marL="457200" indent="-457200">
+              <a:buFont typeface="+mj-lt"/>
+              <a:buAutoNum type="arabicPeriod" startAt="9"/>
+            </a:pPr>
+            <a:r>
+              <a:rPr lang="en-GB" sz="2000" dirty="0">
+                <a:latin typeface="Barlow" panose="00000500000000000000" pitchFamily="2" charset="0"/>
+              </a:rPr>
+              <a:t>T. Dao, D. Y. Fu, S. Ermon, A. Rudra, and C. </a:t>
+            </a:r>
+            <a:r>
+              <a:rPr lang="en-GB" sz="2000" dirty="0" err="1">
+                <a:latin typeface="Barlow" panose="00000500000000000000" pitchFamily="2" charset="0"/>
+              </a:rPr>
+              <a:t>Ré</a:t>
+            </a:r>
+            <a:r>
+              <a:rPr lang="en-GB" sz="2000" dirty="0">
+                <a:latin typeface="Barlow" panose="00000500000000000000" pitchFamily="2" charset="0"/>
+              </a:rPr>
+              <a:t>, "</a:t>
+            </a:r>
+            <a:r>
+              <a:rPr lang="en-GB" sz="2000" dirty="0" err="1">
+                <a:latin typeface="Barlow" panose="00000500000000000000" pitchFamily="2" charset="0"/>
+              </a:rPr>
+              <a:t>FlashAttention</a:t>
+            </a:r>
+            <a:r>
+              <a:rPr lang="en-GB" sz="2000" dirty="0">
+                <a:latin typeface="Barlow" panose="00000500000000000000" pitchFamily="2" charset="0"/>
+              </a:rPr>
+              <a:t>: Fast and Memory-Efficient Exact Attention with IO-Awareness," in Advances in Neural Information Processing Systems (</a:t>
+            </a:r>
+            <a:r>
+              <a:rPr lang="en-GB" sz="2000" dirty="0" err="1">
+                <a:latin typeface="Barlow" panose="00000500000000000000" pitchFamily="2" charset="0"/>
+              </a:rPr>
+              <a:t>NeurIPS</a:t>
+            </a:r>
+            <a:r>
+              <a:rPr lang="en-GB" sz="2000" dirty="0">
+                <a:latin typeface="Barlow" panose="00000500000000000000" pitchFamily="2" charset="0"/>
+              </a:rPr>
+              <a:t>), vol. 35, pp. 16438–16453, 2022.</a:t>
+            </a:r>
+          </a:p>
+          <a:p>
+            <a:pPr marL="457200" indent="-457200">
+              <a:buFont typeface="+mj-lt"/>
+              <a:buAutoNum type="arabicPeriod" startAt="9"/>
+            </a:pPr>
+            <a:r>
+              <a:rPr lang="en-GB" sz="2000" dirty="0">
+                <a:latin typeface="Barlow" panose="00000500000000000000" pitchFamily="2" charset="0"/>
+              </a:rPr>
+              <a:t>A. </a:t>
+            </a:r>
+            <a:r>
+              <a:rPr lang="en-GB" sz="2000" dirty="0" err="1">
+                <a:latin typeface="Barlow" panose="00000500000000000000" pitchFamily="2" charset="0"/>
+              </a:rPr>
+              <a:t>Shazeer</a:t>
+            </a:r>
+            <a:r>
+              <a:rPr lang="en-GB" sz="2000" dirty="0">
+                <a:latin typeface="Barlow" panose="00000500000000000000" pitchFamily="2" charset="0"/>
+              </a:rPr>
+              <a:t>, "Gated Linear Units with GELU activation," </a:t>
+            </a:r>
+            <a:r>
+              <a:rPr lang="en-GB" sz="2000" dirty="0" err="1">
+                <a:latin typeface="Barlow" panose="00000500000000000000" pitchFamily="2" charset="0"/>
+              </a:rPr>
+              <a:t>arXiv</a:t>
+            </a:r>
+            <a:r>
+              <a:rPr lang="en-GB" sz="2000" dirty="0">
+                <a:latin typeface="Barlow" panose="00000500000000000000" pitchFamily="2" charset="0"/>
+              </a:rPr>
+              <a:t> preprint arXiv:2002.05202, 2020.</a:t>
+            </a:r>
+          </a:p>
+          <a:p>
+            <a:pPr marL="457200" indent="-457200">
+              <a:buFont typeface="+mj-lt"/>
+              <a:buAutoNum type="arabicPeriod" startAt="9"/>
+            </a:pPr>
+            <a:r>
+              <a:rPr lang="en-GB" sz="2000" dirty="0">
+                <a:latin typeface="Barlow" panose="00000500000000000000" pitchFamily="2" charset="0"/>
+              </a:rPr>
+              <a:t>I. Loshchilov and F. Hutter, "SGDR: Stochastic Gradient Descent with Warm Restarts," in Proc. International Conference on Learning Representations (ICLR), 2017.</a:t>
+            </a:r>
+            <a:endParaRPr lang="en-IN" sz="2000" dirty="0">
+              <a:latin typeface="Barlow" panose="00000500000000000000" pitchFamily="2" charset="0"/>
+            </a:endParaRPr>
+          </a:p>
+        </p:txBody>
+      </p:sp>
+    </p:spTree>
+    <p:extLst>
+      <p:ext uri="{BB962C8B-B14F-4D97-AF65-F5344CB8AC3E}">
+        <p14:creationId xmlns:p14="http://schemas.microsoft.com/office/powerpoint/2010/main" val="2848733100"/>
+      </p:ext>
+    </p:extLst>
+  </p:cSld>
+  <p:clrMapOvr>
+    <a:masterClrMapping/>
+  </p:clrMapOvr>
+</p:sld>
+</file>
+
+<file path=ppt/slides/slide27.xml><?xml version="1.0" encoding="utf-8"?>
 <p:sld xmlns:a="http://schemas.openxmlformats.org/drawingml/2006/main" xmlns:r="http://schemas.openxmlformats.org/officeDocument/2006/relationships" xmlns:p="http://schemas.openxmlformats.org/presentationml/2006/main">
   <p:cSld>
     <p:spTree>
@@ -16953,7 +20609,219 @@
           <p:cNvPr id="2" name="Title 1">
             <a:extLst>
               <a:ext uri="{FF2B5EF4-FFF2-40B4-BE49-F238E27FC236}">
-                <a16:creationId xmlns:a16="http://schemas.microsoft.com/office/drawing/2014/main" id="{34E65665-583F-4DD8-814D-FECA92009E9A}"/>
+                <a16:creationId xmlns:a16="http://schemas.microsoft.com/office/drawing/2014/main" id="{06E3EBE1-FFD4-F0F9-28FC-511E4BAC869D}"/>
+              </a:ext>
+            </a:extLst>
+          </p:cNvPr>
+          <p:cNvSpPr>
+            <a:spLocks noGrp="1"/>
+          </p:cNvSpPr>
+          <p:nvPr>
+            <p:ph type="title"/>
+          </p:nvPr>
+        </p:nvSpPr>
+        <p:spPr/>
+        <p:txBody>
+          <a:bodyPr/>
+          <a:lstStyle/>
+          <a:p>
+            <a:r>
+              <a:rPr lang="en-GB" dirty="0">
+                <a:latin typeface="Barlow ExtraBold" panose="00000900000000000000" pitchFamily="2" charset="0"/>
+              </a:rPr>
+              <a:t>Acknowledgements</a:t>
+            </a:r>
+            <a:endParaRPr lang="en-IN" dirty="0">
+              <a:latin typeface="Barlow ExtraBold" panose="00000900000000000000" pitchFamily="2" charset="0"/>
+            </a:endParaRPr>
+          </a:p>
+        </p:txBody>
+      </p:sp>
+      <p:sp>
+        <p:nvSpPr>
+          <p:cNvPr id="3" name="TextBox 2">
+            <a:extLst>
+              <a:ext uri="{FF2B5EF4-FFF2-40B4-BE49-F238E27FC236}">
+                <a16:creationId xmlns:a16="http://schemas.microsoft.com/office/drawing/2014/main" id="{F3CE6D57-3D08-84BA-C449-3EA6776A6338}"/>
+              </a:ext>
+            </a:extLst>
+          </p:cNvPr>
+          <p:cNvSpPr txBox="1"/>
+          <p:nvPr/>
+        </p:nvSpPr>
+        <p:spPr>
+          <a:xfrm>
+            <a:off x="445170" y="2241352"/>
+            <a:ext cx="11208518" cy="4616648"/>
+          </a:xfrm>
+          <a:prstGeom prst="rect">
+            <a:avLst/>
+          </a:prstGeom>
+          <a:noFill/>
+        </p:spPr>
+        <p:txBody>
+          <a:bodyPr wrap="none" rtlCol="0">
+            <a:spAutoFit/>
+          </a:bodyPr>
+          <a:lstStyle/>
+          <a:p>
+            <a:r>
+              <a:rPr lang="en-GB" sz="2800" dirty="0">
+                <a:latin typeface="Barlow Medium" panose="00000600000000000000" pitchFamily="2" charset="0"/>
+              </a:rPr>
+              <a:t>Special thanks to:</a:t>
+            </a:r>
+          </a:p>
+          <a:p>
+            <a:pPr marL="914400" lvl="1" indent="-457200">
+              <a:lnSpc>
+                <a:spcPct val="150000"/>
+              </a:lnSpc>
+              <a:buClr>
+                <a:schemeClr val="accent2"/>
+              </a:buClr>
+              <a:buFont typeface="Barlow Medium" panose="00000600000000000000" pitchFamily="2" charset="0"/>
+              <a:buChar char="∆"/>
+            </a:pPr>
+            <a:r>
+              <a:rPr lang="en-GB" sz="2800" dirty="0">
+                <a:latin typeface="Barlow Medium" panose="00000600000000000000" pitchFamily="2" charset="0"/>
+              </a:rPr>
+              <a:t>Dr. Muneendra Ojha - Thesis supervisor for guidance and support</a:t>
+            </a:r>
+          </a:p>
+          <a:p>
+            <a:pPr marL="914400" lvl="1" indent="-457200">
+              <a:lnSpc>
+                <a:spcPct val="150000"/>
+              </a:lnSpc>
+              <a:buClr>
+                <a:schemeClr val="accent2"/>
+              </a:buClr>
+              <a:buFont typeface="Barlow Medium" panose="00000600000000000000" pitchFamily="2" charset="0"/>
+              <a:buChar char="∆"/>
+            </a:pPr>
+            <a:r>
+              <a:rPr lang="en-GB" sz="2800" dirty="0">
+                <a:latin typeface="Barlow Medium" panose="00000600000000000000" pitchFamily="2" charset="0"/>
+              </a:rPr>
+              <a:t>Faculty members for their expertise and mentorship  </a:t>
+            </a:r>
+          </a:p>
+          <a:p>
+            <a:pPr marL="914400" lvl="1" indent="-457200">
+              <a:lnSpc>
+                <a:spcPct val="150000"/>
+              </a:lnSpc>
+              <a:buClr>
+                <a:schemeClr val="accent2"/>
+              </a:buClr>
+              <a:buFont typeface="Barlow Medium" panose="00000600000000000000" pitchFamily="2" charset="0"/>
+              <a:buChar char="∆"/>
+            </a:pPr>
+            <a:r>
+              <a:rPr lang="en-GB" sz="2800" dirty="0">
+                <a:latin typeface="Barlow Medium" panose="00000600000000000000" pitchFamily="2" charset="0"/>
+              </a:rPr>
+              <a:t>Research community for open datasets and models.</a:t>
+            </a:r>
+          </a:p>
+          <a:p>
+            <a:pPr marL="914400" lvl="1" indent="-457200">
+              <a:lnSpc>
+                <a:spcPct val="150000"/>
+              </a:lnSpc>
+              <a:buClr>
+                <a:schemeClr val="accent2"/>
+              </a:buClr>
+              <a:buFont typeface="Barlow Medium" panose="00000600000000000000" pitchFamily="2" charset="0"/>
+              <a:buChar char="∆"/>
+            </a:pPr>
+            <a:r>
+              <a:rPr lang="en-GB" sz="2800" dirty="0">
+                <a:latin typeface="Barlow Medium" panose="00000600000000000000" pitchFamily="2" charset="0"/>
+              </a:rPr>
+              <a:t>Family and friends for continuous encouragement</a:t>
+            </a:r>
+          </a:p>
+          <a:p>
+            <a:pPr marL="914400" lvl="1" indent="-457200">
+              <a:lnSpc>
+                <a:spcPct val="150000"/>
+              </a:lnSpc>
+              <a:buClr>
+                <a:schemeClr val="accent2"/>
+              </a:buClr>
+              <a:buFont typeface="Barlow Medium" panose="00000600000000000000" pitchFamily="2" charset="0"/>
+              <a:buChar char="∆"/>
+            </a:pPr>
+            <a:r>
+              <a:rPr lang="en-GB" sz="2800" dirty="0">
+                <a:latin typeface="Barlow Medium" panose="00000600000000000000" pitchFamily="2" charset="0"/>
+              </a:rPr>
+              <a:t>Modal.com for computational resources.</a:t>
+            </a:r>
+          </a:p>
+          <a:p>
+            <a:endParaRPr lang="en-GB" sz="2800" dirty="0">
+              <a:latin typeface="Barlow Medium" panose="00000600000000000000" pitchFamily="2" charset="0"/>
+            </a:endParaRPr>
+          </a:p>
+          <a:p>
+            <a:r>
+              <a:rPr lang="en-GB" sz="2800" dirty="0">
+                <a:latin typeface="Barlow Medium" panose="00000600000000000000" pitchFamily="2" charset="0"/>
+              </a:rPr>
+              <a:t>Your support made this research possible.</a:t>
+            </a:r>
+            <a:endParaRPr lang="en-IN" sz="2800" dirty="0">
+              <a:latin typeface="Barlow Medium" panose="00000600000000000000" pitchFamily="2" charset="0"/>
+            </a:endParaRPr>
+          </a:p>
+        </p:txBody>
+      </p:sp>
+    </p:spTree>
+    <p:extLst>
+      <p:ext uri="{BB962C8B-B14F-4D97-AF65-F5344CB8AC3E}">
+        <p14:creationId xmlns:p14="http://schemas.microsoft.com/office/powerpoint/2010/main" val="105729659"/>
+      </p:ext>
+    </p:extLst>
+  </p:cSld>
+  <p:clrMapOvr>
+    <a:masterClrMapping/>
+  </p:clrMapOvr>
+</p:sld>
+</file>
+
+<file path=ppt/slides/slide28.xml><?xml version="1.0" encoding="utf-8"?>
+<p:sld xmlns:a="http://schemas.openxmlformats.org/drawingml/2006/main" xmlns:r="http://schemas.openxmlformats.org/officeDocument/2006/relationships" xmlns:p="http://schemas.openxmlformats.org/presentationml/2006/main">
+  <p:cSld>
+    <p:spTree>
+      <p:nvGrpSpPr>
+        <p:cNvPr id="1" name="">
+          <a:extLst>
+            <a:ext uri="{FF2B5EF4-FFF2-40B4-BE49-F238E27FC236}">
+              <a16:creationId xmlns:a16="http://schemas.microsoft.com/office/drawing/2014/main" id="{A029116E-BD98-EFAB-1E2F-29B3F9288541}"/>
+            </a:ext>
+          </a:extLst>
+        </p:cNvPr>
+        <p:cNvGrpSpPr/>
+        <p:nvPr/>
+      </p:nvGrpSpPr>
+      <p:grpSpPr>
+        <a:xfrm>
+          <a:off x="0" y="0"/>
+          <a:ext cx="0" cy="0"/>
+          <a:chOff x="0" y="0"/>
+          <a:chExt cx="0" cy="0"/>
+        </a:xfrm>
+      </p:grpSpPr>
+      <p:sp>
+        <p:nvSpPr>
+          <p:cNvPr id="2" name="Title 1">
+            <a:extLst>
+              <a:ext uri="{FF2B5EF4-FFF2-40B4-BE49-F238E27FC236}">
+                <a16:creationId xmlns:a16="http://schemas.microsoft.com/office/drawing/2014/main" id="{D53321B8-DF6D-4A69-F020-DC2108ACAE4B}"/>
               </a:ext>
             </a:extLst>
           </p:cNvPr>
@@ -16981,7 +20849,7 @@
     </p:spTree>
     <p:extLst>
       <p:ext uri="{BB962C8B-B14F-4D97-AF65-F5344CB8AC3E}">
-        <p14:creationId xmlns:p14="http://schemas.microsoft.com/office/powerpoint/2010/main" val="3869094418"/>
+        <p14:creationId xmlns:p14="http://schemas.microsoft.com/office/powerpoint/2010/main" val="4069644453"/>
       </p:ext>
     </p:extLst>
   </p:cSld>
@@ -16991,7 +20859,7 @@
 </p:sld>
 </file>
 
-<file path=ppt/slides/slide2.xml><?xml version="1.0" encoding="utf-8"?>
+<file path=ppt/slides/slide3.xml><?xml version="1.0" encoding="utf-8"?>
 <p:sld xmlns:a="http://schemas.openxmlformats.org/drawingml/2006/main" xmlns:r="http://schemas.openxmlformats.org/officeDocument/2006/relationships" xmlns:p="http://schemas.openxmlformats.org/presentationml/2006/main">
   <p:cSld>
     <p:spTree>
@@ -17030,7 +20898,9 @@
           <a:lstStyle/>
           <a:p>
             <a:r>
-              <a:rPr lang="en-US" dirty="0"/>
+              <a:rPr lang="en-US" dirty="0">
+                <a:latin typeface="Barlow ExtraBold" panose="00000900000000000000" pitchFamily="2" charset="0"/>
+              </a:rPr>
               <a:t>Research Overview &amp; Motivation</a:t>
             </a:r>
           </a:p>
@@ -17060,50 +20930,90 @@
         </p:spPr>
         <p:txBody>
           <a:bodyPr>
-            <a:normAutofit/>
+            <a:noAutofit/>
           </a:bodyPr>
           <a:lstStyle/>
           <a:p>
             <a:pPr algn="just"/>
             <a:r>
-              <a:rPr lang="en-IN" b="1" dirty="0"/>
+              <a:rPr lang="en-IN" sz="2000" b="1" dirty="0">
+                <a:latin typeface="Barlow" panose="00000500000000000000" pitchFamily="2" charset="0"/>
+              </a:rPr>
               <a:t>Information Retrieval Challenge:</a:t>
             </a:r>
             <a:r>
-              <a:rPr lang="en-IN" dirty="0"/>
+              <a:rPr lang="en-IN" sz="2000" dirty="0">
+                <a:latin typeface="Barlow" panose="00000500000000000000" pitchFamily="2" charset="0"/>
+              </a:rPr>
               <a:t> Modern IR systems require precise document ranking from vast collections</a:t>
             </a:r>
           </a:p>
           <a:p>
             <a:pPr algn="just"/>
             <a:r>
-              <a:rPr lang="en-IN" b="1" dirty="0"/>
-              <a:t>Cross-Encoder Advantage:</a:t>
-            </a:r>
-            <a:r>
-              <a:rPr lang="en-IN" dirty="0"/>
+              <a:rPr lang="en-IN" sz="2000" b="1" dirty="0">
+                <a:latin typeface="Barlow" panose="00000500000000000000" pitchFamily="2" charset="0"/>
+              </a:rPr>
+              <a:t>Cross-Encoder</a:t>
+            </a:r>
+            <a:r>
+              <a:rPr lang="en-IN" sz="2000" b="1" baseline="30000" dirty="0">
+                <a:latin typeface="Barlow" panose="00000500000000000000" pitchFamily="2" charset="0"/>
+              </a:rPr>
+              <a:t>[2] </a:t>
+            </a:r>
+            <a:r>
+              <a:rPr lang="en-IN" sz="2000" b="1" dirty="0">
+                <a:latin typeface="Barlow" panose="00000500000000000000" pitchFamily="2" charset="0"/>
+              </a:rPr>
+              <a:t>Advantage:</a:t>
+            </a:r>
+            <a:r>
+              <a:rPr lang="en-IN" sz="2000" dirty="0">
+                <a:latin typeface="Barlow" panose="00000500000000000000" pitchFamily="2" charset="0"/>
+              </a:rPr>
               <a:t> State-of-the-art reranking through deep query-document interactions</a:t>
             </a:r>
           </a:p>
           <a:p>
             <a:pPr algn="just"/>
             <a:r>
-              <a:rPr lang="en-IN" b="1" dirty="0"/>
+              <a:rPr lang="en-IN" sz="2000" b="1" dirty="0">
+                <a:latin typeface="Barlow" panose="00000500000000000000" pitchFamily="2" charset="0"/>
+              </a:rPr>
               <a:t>Optimization Gap:</a:t>
             </a:r>
             <a:r>
-              <a:rPr lang="en-IN" dirty="0"/>
-              <a:t> Limited research on Lion optimizer for IR tasks despite success in other domains</a:t>
+              <a:rPr lang="en-IN" sz="2000" dirty="0">
+                <a:latin typeface="Barlow" panose="00000500000000000000" pitchFamily="2" charset="0"/>
+              </a:rPr>
+              <a:t> Limited research on Lion optimizer</a:t>
+            </a:r>
+            <a:r>
+              <a:rPr lang="en-IN" sz="2000" b="1" baseline="30000" dirty="0">
+                <a:latin typeface="Barlow" panose="00000500000000000000" pitchFamily="2" charset="0"/>
+              </a:rPr>
+              <a:t>[4] </a:t>
+            </a:r>
+            <a:r>
+              <a:rPr lang="en-IN" sz="2000" dirty="0">
+                <a:latin typeface="Barlow" panose="00000500000000000000" pitchFamily="2" charset="0"/>
+              </a:rPr>
+              <a:t>for IR tasks despite success in other domains</a:t>
             </a:r>
           </a:p>
           <a:p>
             <a:pPr algn="just"/>
             <a:r>
-              <a:rPr lang="en-IN" b="1" dirty="0"/>
+              <a:rPr lang="en-IN" sz="2000" b="1" dirty="0">
+                <a:latin typeface="Barlow" panose="00000500000000000000" pitchFamily="2" charset="0"/>
+              </a:rPr>
               <a:t>Practical Impact:</a:t>
             </a:r>
             <a:r>
-              <a:rPr lang="en-IN" dirty="0"/>
+              <a:rPr lang="en-IN" sz="2000" dirty="0">
+                <a:latin typeface="Barlow" panose="00000500000000000000" pitchFamily="2" charset="0"/>
+              </a:rPr>
               <a:t> Optimizer choice significantly affects training cost and model performance</a:t>
             </a:r>
           </a:p>
@@ -17160,7 +21070,49 @@
                 </a:solidFill>
                 <a:latin typeface="Barlow Medium" panose="00000600000000000000" pitchFamily="2" charset="0"/>
               </a:rPr>
-              <a:t>How do Lion and AdamW optimizers compare across different cross-encoder architectures for information retrieval tasks?</a:t>
+              <a:t>How do Lion</a:t>
+            </a:r>
+            <a:r>
+              <a:rPr lang="en-GB" b="1" i="1" baseline="30000" dirty="0">
+                <a:latin typeface="Barlow Medium" panose="00000600000000000000" pitchFamily="2" charset="0"/>
+              </a:rPr>
+              <a:t>[4]</a:t>
+            </a:r>
+            <a:r>
+              <a:rPr lang="en-GB" b="1" i="1" dirty="0">
+                <a:latin typeface="Barlow Medium" panose="00000600000000000000" pitchFamily="2" charset="0"/>
+              </a:rPr>
+              <a:t> </a:t>
+            </a:r>
+            <a:r>
+              <a:rPr lang="en-GB" sz="2400" i="1" dirty="0">
+                <a:solidFill>
+                  <a:srgbClr val="002060"/>
+                </a:solidFill>
+                <a:latin typeface="Barlow Medium" panose="00000600000000000000" pitchFamily="2" charset="0"/>
+              </a:rPr>
+              <a:t>and AdamW</a:t>
+            </a:r>
+            <a:r>
+              <a:rPr lang="en-GB" b="1" i="1" baseline="30000" dirty="0">
+                <a:latin typeface="Barlow Medium" panose="00000600000000000000" pitchFamily="2" charset="0"/>
+              </a:rPr>
+              <a:t>[3]</a:t>
+            </a:r>
+            <a:r>
+              <a:rPr lang="en-GB" b="1" i="1" dirty="0">
+                <a:latin typeface="Barlow Medium" panose="00000600000000000000" pitchFamily="2" charset="0"/>
+              </a:rPr>
+              <a:t> </a:t>
+            </a:r>
+            <a:r>
+              <a:rPr lang="en-GB" sz="2400" i="1" dirty="0">
+                <a:solidFill>
+                  <a:srgbClr val="002060"/>
+                </a:solidFill>
+                <a:latin typeface="Barlow Medium" panose="00000600000000000000" pitchFamily="2" charset="0"/>
+              </a:rPr>
+              <a:t>optimizers compare across different cross-encoder architectures for information retrieval tasks?</a:t>
             </a:r>
           </a:p>
           <a:p>
@@ -17186,7 +21138,7 @@
 </p:sld>
 </file>
 
-<file path=ppt/slides/slide3.xml><?xml version="1.0" encoding="utf-8"?>
+<file path=ppt/slides/slide4.xml><?xml version="1.0" encoding="utf-8"?>
 <p:sld xmlns:a="http://schemas.openxmlformats.org/drawingml/2006/main" xmlns:r="http://schemas.openxmlformats.org/officeDocument/2006/relationships" xmlns:p="http://schemas.openxmlformats.org/presentationml/2006/main">
   <p:cSld>
     <p:spTree>
@@ -17230,14 +21182,10 @@
           <a:lstStyle/>
           <a:p>
             <a:r>
-              <a:rPr lang="en-IN" b="1" dirty="0"/>
-              <a:t>Research </a:t>
-            </a:r>
-            <a:r>
               <a:rPr lang="en-IN" b="1" dirty="0">
                 <a:latin typeface="Barlow ExtraBold" panose="00000900000000000000" pitchFamily="2" charset="0"/>
               </a:rPr>
-              <a:t>Objectives</a:t>
+              <a:t>Research Objectives</a:t>
             </a:r>
           </a:p>
         </p:txBody>
@@ -17256,8 +21204,8 @@
         </p:nvSpPr>
         <p:spPr>
           <a:xfrm>
-            <a:off x="451514" y="2022538"/>
-            <a:ext cx="10151233" cy="2948179"/>
+            <a:off x="451514" y="1926285"/>
+            <a:ext cx="10858170" cy="2798202"/>
           </a:xfrm>
           <a:prstGeom prst="rect">
             <a:avLst/>
@@ -17278,12 +21226,40 @@
               <a:buAutoNum type="arabicPeriod"/>
             </a:pPr>
             <a:r>
-              <a:rPr lang="en-IN" b="1" dirty="0"/>
+              <a:rPr lang="en-IN" sz="2000" b="1" dirty="0">
+                <a:latin typeface="Barlow" panose="00000500000000000000" pitchFamily="2" charset="0"/>
+              </a:rPr>
               <a:t>Systematic Evaluation:</a:t>
             </a:r>
             <a:r>
-              <a:rPr lang="en-IN" dirty="0"/>
-              <a:t> Compare Lion and AdamW across three transformer architectures.</a:t>
+              <a:rPr lang="en-IN" sz="2000" dirty="0">
+                <a:latin typeface="Barlow" panose="00000500000000000000" pitchFamily="2" charset="0"/>
+              </a:rPr>
+              <a:t> Compare Lion</a:t>
+            </a:r>
+            <a:r>
+              <a:rPr lang="en-IN" sz="2000" b="1" baseline="30000" dirty="0">
+                <a:latin typeface="Barlow" panose="00000500000000000000" pitchFamily="2" charset="0"/>
+              </a:rPr>
+              <a:t>[4]</a:t>
+            </a:r>
+            <a:r>
+              <a:rPr lang="en-IN" sz="2000" dirty="0">
+                <a:latin typeface="Barlow" panose="00000500000000000000" pitchFamily="2" charset="0"/>
+              </a:rPr>
+              <a:t> and AdamW</a:t>
+            </a:r>
+            <a:r>
+              <a:rPr lang="en-IN" sz="2000" b="1" baseline="30000" dirty="0">
+                <a:latin typeface="Barlow" panose="00000500000000000000" pitchFamily="2" charset="0"/>
+              </a:rPr>
+              <a:t>[3]</a:t>
+            </a:r>
+            <a:r>
+              <a:rPr lang="en-IN" sz="2000" dirty="0">
+                <a:latin typeface="Barlow" panose="00000500000000000000" pitchFamily="2" charset="0"/>
+              </a:rPr>
+              <a:t> across three transformer architectures.</a:t>
             </a:r>
           </a:p>
           <a:p>
@@ -17295,12 +21271,40 @@
               <a:buAutoNum type="arabicPeriod"/>
             </a:pPr>
             <a:r>
-              <a:rPr lang="en-IN" b="1" dirty="0"/>
+              <a:rPr lang="en-IN" sz="2000" b="1" dirty="0">
+                <a:latin typeface="Barlow" panose="00000500000000000000" pitchFamily="2" charset="0"/>
+              </a:rPr>
               <a:t>Comprehensive Benchmarking:</a:t>
             </a:r>
             <a:r>
-              <a:rPr lang="en-IN" dirty="0"/>
-              <a:t> Evaluate performance using standard IR metrics on TREC DL 2019 and MS MARCO.</a:t>
+              <a:rPr lang="en-IN" sz="2000" dirty="0">
+                <a:latin typeface="Barlow" panose="00000500000000000000" pitchFamily="2" charset="0"/>
+              </a:rPr>
+              <a:t> Evaluate performance using standard IR metrics on TREC DL 2019</a:t>
+            </a:r>
+            <a:r>
+              <a:rPr lang="en-IN" sz="2000" b="1" baseline="30000" dirty="0">
+                <a:latin typeface="Barlow" panose="00000500000000000000" pitchFamily="2" charset="0"/>
+              </a:rPr>
+              <a:t>[8] </a:t>
+            </a:r>
+            <a:r>
+              <a:rPr lang="en-IN" sz="2000" dirty="0">
+                <a:latin typeface="Barlow" panose="00000500000000000000" pitchFamily="2" charset="0"/>
+              </a:rPr>
+              <a:t>and MS MARCO</a:t>
+            </a:r>
+            <a:r>
+              <a:rPr lang="en-IN" sz="2000" b="1" baseline="30000" dirty="0">
+                <a:latin typeface="Barlow" panose="00000500000000000000" pitchFamily="2" charset="0"/>
+              </a:rPr>
+              <a:t>[9]</a:t>
+            </a:r>
+            <a:r>
+              <a:rPr lang="en-IN" sz="2000" dirty="0">
+                <a:latin typeface="Barlow" panose="00000500000000000000" pitchFamily="2" charset="0"/>
+              </a:rPr>
+              <a:t>.</a:t>
             </a:r>
           </a:p>
           <a:p>
@@ -17312,11 +21316,15 @@
               <a:buAutoNum type="arabicPeriod"/>
             </a:pPr>
             <a:r>
-              <a:rPr lang="en-IN" b="1" dirty="0"/>
+              <a:rPr lang="en-IN" sz="2000" b="1" dirty="0">
+                <a:latin typeface="Barlow" panose="00000500000000000000" pitchFamily="2" charset="0"/>
+              </a:rPr>
               <a:t>Training Dynamics Analysis:</a:t>
             </a:r>
             <a:r>
-              <a:rPr lang="en-IN" dirty="0"/>
+              <a:rPr lang="en-IN" sz="2000" dirty="0">
+                <a:latin typeface="Barlow" panose="00000500000000000000" pitchFamily="2" charset="0"/>
+              </a:rPr>
               <a:t> Investigate convergence patterns and stability.</a:t>
             </a:r>
           </a:p>
@@ -17329,11 +21337,15 @@
               <a:buAutoNum type="arabicPeriod"/>
             </a:pPr>
             <a:r>
-              <a:rPr lang="en-IN" b="1" dirty="0"/>
+              <a:rPr lang="en-IN" sz="2000" b="1" dirty="0">
+                <a:latin typeface="Barlow" panose="00000500000000000000" pitchFamily="2" charset="0"/>
+              </a:rPr>
               <a:t>Practical Guidelines:</a:t>
             </a:r>
             <a:r>
-              <a:rPr lang="en-IN" dirty="0"/>
+              <a:rPr lang="en-IN" sz="2000" dirty="0">
+                <a:latin typeface="Barlow" panose="00000500000000000000" pitchFamily="2" charset="0"/>
+              </a:rPr>
               <a:t> Provide evidence-based recommendations for optimizer selection.</a:t>
             </a:r>
           </a:p>
@@ -17353,7 +21365,7 @@
         </p:nvSpPr>
         <p:spPr>
           <a:xfrm>
-            <a:off x="1465976" y="5285064"/>
+            <a:off x="1465976" y="5321744"/>
             <a:ext cx="9260048" cy="1409726"/>
           </a:xfrm>
           <a:prstGeom prst="roundRect">
@@ -17431,7 +21443,7 @@
         </p:nvSpPr>
         <p:spPr>
           <a:xfrm>
-            <a:off x="3714037" y="4739884"/>
+            <a:off x="3622650" y="4798524"/>
             <a:ext cx="4224234" cy="523220"/>
           </a:xfrm>
           <a:prstGeom prst="rect">
@@ -17480,7 +21492,334 @@
 </p:sld>
 </file>
 
-<file path=ppt/slides/slide4.xml><?xml version="1.0" encoding="utf-8"?>
+<file path=ppt/slides/slide5.xml><?xml version="1.0" encoding="utf-8"?>
+<p:sld xmlns:a="http://schemas.openxmlformats.org/drawingml/2006/main" xmlns:r="http://schemas.openxmlformats.org/officeDocument/2006/relationships" xmlns:p="http://schemas.openxmlformats.org/presentationml/2006/main">
+  <p:cSld>
+    <p:spTree>
+      <p:nvGrpSpPr>
+        <p:cNvPr id="1" name="">
+          <a:extLst>
+            <a:ext uri="{FF2B5EF4-FFF2-40B4-BE49-F238E27FC236}">
+              <a16:creationId xmlns:a16="http://schemas.microsoft.com/office/drawing/2014/main" id="{EF175E2E-F60B-32B5-AF92-F738B3BA9475}"/>
+            </a:ext>
+          </a:extLst>
+        </p:cNvPr>
+        <p:cNvGrpSpPr/>
+        <p:nvPr/>
+      </p:nvGrpSpPr>
+      <p:grpSpPr>
+        <a:xfrm>
+          <a:off x="0" y="0"/>
+          <a:ext cx="0" cy="0"/>
+          <a:chOff x="0" y="0"/>
+          <a:chExt cx="0" cy="0"/>
+        </a:xfrm>
+      </p:grpSpPr>
+      <p:sp>
+        <p:nvSpPr>
+          <p:cNvPr id="2" name="Title 1">
+            <a:extLst>
+              <a:ext uri="{FF2B5EF4-FFF2-40B4-BE49-F238E27FC236}">
+                <a16:creationId xmlns:a16="http://schemas.microsoft.com/office/drawing/2014/main" id="{E0F1AB93-7D85-21E7-E4F6-569C31D12F1C}"/>
+              </a:ext>
+            </a:extLst>
+          </p:cNvPr>
+          <p:cNvSpPr>
+            <a:spLocks noGrp="1"/>
+          </p:cNvSpPr>
+          <p:nvPr>
+            <p:ph type="title"/>
+          </p:nvPr>
+        </p:nvSpPr>
+        <p:spPr bwMode="white"/>
+        <p:txBody>
+          <a:bodyPr/>
+          <a:lstStyle/>
+          <a:p>
+            <a:r>
+              <a:rPr lang="en-US" sz="4000" dirty="0">
+                <a:latin typeface="Barlow ExtraBold" panose="00000900000000000000" pitchFamily="2" charset="0"/>
+              </a:rPr>
+              <a:t>Literature Review</a:t>
+            </a:r>
+          </a:p>
+        </p:txBody>
+      </p:sp>
+    </p:spTree>
+    <p:extLst>
+      <p:ext uri="{BB962C8B-B14F-4D97-AF65-F5344CB8AC3E}">
+        <p14:creationId xmlns:p14="http://schemas.microsoft.com/office/powerpoint/2010/main" val="539214700"/>
+      </p:ext>
+    </p:extLst>
+  </p:cSld>
+  <p:clrMapOvr>
+    <a:masterClrMapping/>
+  </p:clrMapOvr>
+</p:sld>
+</file>
+
+<file path=ppt/slides/slide6.xml><?xml version="1.0" encoding="utf-8"?>
+<p:sld xmlns:a="http://schemas.openxmlformats.org/drawingml/2006/main" xmlns:r="http://schemas.openxmlformats.org/officeDocument/2006/relationships" xmlns:p="http://schemas.openxmlformats.org/presentationml/2006/main">
+  <p:cSld>
+    <p:spTree>
+      <p:nvGrpSpPr>
+        <p:cNvPr id="1" name=""/>
+        <p:cNvGrpSpPr/>
+        <p:nvPr/>
+      </p:nvGrpSpPr>
+      <p:grpSpPr>
+        <a:xfrm>
+          <a:off x="0" y="0"/>
+          <a:ext cx="0" cy="0"/>
+          <a:chOff x="0" y="0"/>
+          <a:chExt cx="0" cy="0"/>
+        </a:xfrm>
+      </p:grpSpPr>
+      <p:sp>
+        <p:nvSpPr>
+          <p:cNvPr id="2" name="Title 1">
+            <a:extLst>
+              <a:ext uri="{FF2B5EF4-FFF2-40B4-BE49-F238E27FC236}">
+                <a16:creationId xmlns:a16="http://schemas.microsoft.com/office/drawing/2014/main" id="{5CCF6150-9F5A-3B7A-3754-3BC216D35D22}"/>
+              </a:ext>
+            </a:extLst>
+          </p:cNvPr>
+          <p:cNvSpPr>
+            <a:spLocks noGrp="1"/>
+          </p:cNvSpPr>
+          <p:nvPr>
+            <p:ph type="title"/>
+          </p:nvPr>
+        </p:nvSpPr>
+        <p:spPr>
+          <a:xfrm>
+            <a:off x="581400" y="669305"/>
+            <a:ext cx="8346032" cy="970450"/>
+          </a:xfrm>
+        </p:spPr>
+        <p:txBody>
+          <a:bodyPr/>
+          <a:lstStyle/>
+          <a:p>
+            <a:r>
+              <a:rPr lang="en-IN" sz="2800" b="1" dirty="0">
+                <a:latin typeface="Barlow SemiBold" panose="00000700000000000000" pitchFamily="2" charset="0"/>
+              </a:rPr>
+              <a:t>BERT &amp; Cross-Encoder Architecture</a:t>
+            </a:r>
+          </a:p>
+        </p:txBody>
+      </p:sp>
+      <p:sp>
+        <p:nvSpPr>
+          <p:cNvPr id="6" name="TextBox 5">
+            <a:extLst>
+              <a:ext uri="{FF2B5EF4-FFF2-40B4-BE49-F238E27FC236}">
+                <a16:creationId xmlns:a16="http://schemas.microsoft.com/office/drawing/2014/main" id="{5E2C2994-1480-B328-EDC1-8BC68CF79D32}"/>
+              </a:ext>
+            </a:extLst>
+          </p:cNvPr>
+          <p:cNvSpPr txBox="1"/>
+          <p:nvPr/>
+        </p:nvSpPr>
+        <p:spPr>
+          <a:xfrm>
+            <a:off x="421105" y="2495376"/>
+            <a:ext cx="8346032" cy="4062651"/>
+          </a:xfrm>
+          <a:prstGeom prst="rect">
+            <a:avLst/>
+          </a:prstGeom>
+          <a:noFill/>
+        </p:spPr>
+        <p:txBody>
+          <a:bodyPr wrap="square" rtlCol="0">
+            <a:spAutoFit/>
+          </a:bodyPr>
+          <a:lstStyle/>
+          <a:p>
+            <a:r>
+              <a:rPr lang="en-IN" sz="2000" dirty="0">
+                <a:latin typeface="Barlow" panose="00000500000000000000" pitchFamily="2" charset="0"/>
+              </a:rPr>
+              <a:t>BERT-based Cross-Encoders</a:t>
+            </a:r>
+            <a:r>
+              <a:rPr lang="en-IN" sz="2000" b="1" baseline="30000" dirty="0">
+                <a:latin typeface="Barlow" panose="00000500000000000000" pitchFamily="2" charset="0"/>
+              </a:rPr>
+              <a:t>[2] </a:t>
+            </a:r>
+            <a:r>
+              <a:rPr lang="en-IN" sz="2000" dirty="0">
+                <a:latin typeface="Barlow" panose="00000500000000000000" pitchFamily="2" charset="0"/>
+              </a:rPr>
+              <a:t>for Information Retrieval</a:t>
+            </a:r>
+          </a:p>
+          <a:p>
+            <a:endParaRPr lang="en-IN" sz="2000" dirty="0">
+              <a:latin typeface="Barlow" panose="00000500000000000000" pitchFamily="2" charset="0"/>
+            </a:endParaRPr>
+          </a:p>
+          <a:p>
+            <a:r>
+              <a:rPr lang="en-IN" sz="2000" dirty="0">
+                <a:latin typeface="Barlow" panose="00000500000000000000" pitchFamily="2" charset="0"/>
+              </a:rPr>
+              <a:t>Key Innovation:</a:t>
+            </a:r>
+          </a:p>
+          <a:p>
+            <a:r>
+              <a:rPr lang="en-IN" sz="2000" dirty="0">
+                <a:latin typeface="Barlow" panose="00000500000000000000" pitchFamily="2" charset="0"/>
+              </a:rPr>
+              <a:t>• Joint encoding: [CLS] Query [SEP] Document [SEP]</a:t>
+            </a:r>
+          </a:p>
+          <a:p>
+            <a:r>
+              <a:rPr lang="en-IN" sz="2000" dirty="0">
+                <a:latin typeface="Barlow" panose="00000500000000000000" pitchFamily="2" charset="0"/>
+              </a:rPr>
+              <a:t>• Fine-tuning for relevance prediction</a:t>
+            </a:r>
+          </a:p>
+          <a:p>
+            <a:r>
+              <a:rPr lang="en-IN" sz="2000" dirty="0">
+                <a:latin typeface="Barlow" panose="00000500000000000000" pitchFamily="2" charset="0"/>
+              </a:rPr>
+              <a:t>• Superior to bi-encoders for reranking</a:t>
+            </a:r>
+          </a:p>
+          <a:p>
+            <a:endParaRPr lang="en-IN" sz="2000" dirty="0">
+              <a:latin typeface="Barlow" panose="00000500000000000000" pitchFamily="2" charset="0"/>
+            </a:endParaRPr>
+          </a:p>
+          <a:p>
+            <a:r>
+              <a:rPr lang="en-IN" sz="2000" dirty="0">
+                <a:latin typeface="Barlow" panose="00000500000000000000" pitchFamily="2" charset="0"/>
+              </a:rPr>
+              <a:t>Modern Variants:</a:t>
+            </a:r>
+          </a:p>
+          <a:p>
+            <a:r>
+              <a:rPr lang="en-IN" sz="2000" dirty="0">
+                <a:latin typeface="Barlow" panose="00000500000000000000" pitchFamily="2" charset="0"/>
+              </a:rPr>
+              <a:t>• MiniLM</a:t>
+            </a:r>
+            <a:r>
+              <a:rPr lang="en-IN" sz="2000" b="1" baseline="30000" dirty="0">
+                <a:latin typeface="Barlow" panose="00000500000000000000" pitchFamily="2" charset="0"/>
+              </a:rPr>
+              <a:t>[5]</a:t>
+            </a:r>
+            <a:r>
+              <a:rPr lang="en-IN" sz="2000" dirty="0">
+                <a:latin typeface="Barlow" panose="00000500000000000000" pitchFamily="2" charset="0"/>
+              </a:rPr>
+              <a:t>: Distilled BERT for efficiency</a:t>
+            </a:r>
+          </a:p>
+          <a:p>
+            <a:r>
+              <a:rPr lang="en-IN" sz="2000" dirty="0">
+                <a:latin typeface="Barlow" panose="00000500000000000000" pitchFamily="2" charset="0"/>
+              </a:rPr>
+              <a:t>• GTE</a:t>
+            </a:r>
+            <a:r>
+              <a:rPr lang="en-IN" sz="2000" b="1" baseline="30000" dirty="0">
+                <a:latin typeface="Barlow" panose="00000500000000000000" pitchFamily="2" charset="0"/>
+              </a:rPr>
+              <a:t>[7]</a:t>
+            </a:r>
+            <a:r>
+              <a:rPr lang="en-IN" sz="2000" dirty="0">
+                <a:latin typeface="Barlow" panose="00000500000000000000" pitchFamily="2" charset="0"/>
+              </a:rPr>
+              <a:t>: Multilingual, extended context (8192 tokens)  </a:t>
+            </a:r>
+          </a:p>
+          <a:p>
+            <a:r>
+              <a:rPr lang="en-IN" sz="2000" dirty="0">
+                <a:latin typeface="Barlow" panose="00000500000000000000" pitchFamily="2" charset="0"/>
+              </a:rPr>
+              <a:t>• ModernBERT</a:t>
+            </a:r>
+            <a:r>
+              <a:rPr lang="en-IN" sz="2000" b="1" baseline="30000" dirty="0">
+                <a:latin typeface="Barlow" panose="00000500000000000000" pitchFamily="2" charset="0"/>
+              </a:rPr>
+              <a:t>[6]</a:t>
+            </a:r>
+            <a:r>
+              <a:rPr lang="en-IN" sz="2000" dirty="0">
+                <a:latin typeface="Barlow" panose="00000500000000000000" pitchFamily="2" charset="0"/>
+              </a:rPr>
+              <a:t>: Advanced features (RoPE</a:t>
+            </a:r>
+            <a:r>
+              <a:rPr lang="en-IN" sz="2000" b="1" baseline="30000" dirty="0">
+                <a:latin typeface="Barlow" panose="00000500000000000000" pitchFamily="2" charset="0"/>
+              </a:rPr>
+              <a:t>[12]</a:t>
+            </a:r>
+            <a:r>
+              <a:rPr lang="en-IN" sz="2000" dirty="0">
+                <a:latin typeface="Barlow" panose="00000500000000000000" pitchFamily="2" charset="0"/>
+              </a:rPr>
+              <a:t>, Flash Attention</a:t>
+            </a:r>
+            <a:r>
+              <a:rPr lang="en-IN" sz="2000" b="1" baseline="30000" dirty="0">
+                <a:latin typeface="Barlow" panose="00000500000000000000" pitchFamily="2" charset="0"/>
+              </a:rPr>
+              <a:t>[13]</a:t>
+            </a:r>
+            <a:r>
+              <a:rPr lang="en-IN" sz="2000" dirty="0">
+                <a:latin typeface="Barlow" panose="00000500000000000000" pitchFamily="2" charset="0"/>
+              </a:rPr>
+              <a:t>)</a:t>
+            </a:r>
+          </a:p>
+          <a:p>
+            <a:endParaRPr lang="en-IN" sz="2000" dirty="0">
+              <a:latin typeface="Barlow" panose="00000500000000000000" pitchFamily="2" charset="0"/>
+            </a:endParaRPr>
+          </a:p>
+          <a:p>
+            <a:r>
+              <a:rPr lang="en-IN" sz="2000" dirty="0">
+                <a:latin typeface="Barlow" panose="00000500000000000000" pitchFamily="2" charset="0"/>
+              </a:rPr>
+              <a:t>Standard approach for document reranking tasks</a:t>
+            </a:r>
+          </a:p>
+        </p:txBody>
+      </p:sp>
+    </p:spTree>
+    <p:extLst>
+      <p:ext uri="{BB962C8B-B14F-4D97-AF65-F5344CB8AC3E}">
+        <p14:creationId xmlns:p14="http://schemas.microsoft.com/office/powerpoint/2010/main" val="3955863585"/>
+      </p:ext>
+    </p:extLst>
+  </p:cSld>
+  <p:clrMapOvr>
+    <a:masterClrMapping/>
+  </p:clrMapOvr>
+</p:sld>
+</file>
+
+<file path=ppt/slides/slide7.xml><?xml version="1.0" encoding="utf-8"?>
 <p:sld xmlns:a="http://schemas.openxmlformats.org/drawingml/2006/main" xmlns:r="http://schemas.openxmlformats.org/officeDocument/2006/relationships" xmlns:p="http://schemas.openxmlformats.org/presentationml/2006/main">
   <p:cSld>
     <p:spTree>
@@ -17519,7 +21858,9 @@
           <a:lstStyle/>
           <a:p>
             <a:r>
-              <a:rPr lang="en-US" dirty="0"/>
+              <a:rPr lang="en-US" dirty="0">
+                <a:latin typeface="Barlow ExtraBold" panose="00000900000000000000" pitchFamily="2" charset="0"/>
+              </a:rPr>
               <a:t>Cross-Encoder Architecture</a:t>
             </a:r>
           </a:p>
@@ -17642,12 +21983,18 @@
 </p:sld>
 </file>
 
-<file path=ppt/slides/slide5.xml><?xml version="1.0" encoding="utf-8"?>
+<file path=ppt/slides/slide8.xml><?xml version="1.0" encoding="utf-8"?>
 <p:sld xmlns:a="http://schemas.openxmlformats.org/drawingml/2006/main" xmlns:r="http://schemas.openxmlformats.org/officeDocument/2006/relationships" xmlns:p="http://schemas.openxmlformats.org/presentationml/2006/main">
   <p:cSld>
     <p:spTree>
       <p:nvGrpSpPr>
-        <p:cNvPr id="1" name=""/>
+        <p:cNvPr id="1" name="">
+          <a:extLst>
+            <a:ext uri="{FF2B5EF4-FFF2-40B4-BE49-F238E27FC236}">
+              <a16:creationId xmlns:a16="http://schemas.microsoft.com/office/drawing/2014/main" id="{745188A9-80E7-C64F-4520-F390B94E0B7C}"/>
+            </a:ext>
+          </a:extLst>
+        </p:cNvPr>
         <p:cNvGrpSpPr/>
         <p:nvPr/>
       </p:nvGrpSpPr>
@@ -17664,7 +22011,7 @@
           <p:cNvPr id="2" name="Title 1">
             <a:extLst>
               <a:ext uri="{FF2B5EF4-FFF2-40B4-BE49-F238E27FC236}">
-                <a16:creationId xmlns:a16="http://schemas.microsoft.com/office/drawing/2014/main" id="{DC72EB31-E42B-4D0C-AFEC-3EBBBBE96FC6}"/>
+                <a16:creationId xmlns:a16="http://schemas.microsoft.com/office/drawing/2014/main" id="{163BC585-46D6-933D-9059-A35623571C3C}"/>
               </a:ext>
             </a:extLst>
           </p:cNvPr>
@@ -17677,8 +22024,8 @@
         </p:nvSpPr>
         <p:spPr>
           <a:xfrm>
-            <a:off x="1600470" y="-6969"/>
-            <a:ext cx="8579730" cy="1453488"/>
+            <a:off x="810001" y="627662"/>
+            <a:ext cx="10571998" cy="970450"/>
           </a:xfrm>
         </p:spPr>
         <p:txBody>
@@ -17686,985 +22033,430 @@
           <a:lstStyle/>
           <a:p>
             <a:r>
-              <a:rPr lang="en-US" dirty="0">
+              <a:rPr lang="en-IN" sz="2800" dirty="0">
                 <a:latin typeface="Barlow SemiBold" panose="00000700000000000000" pitchFamily="2" charset="0"/>
               </a:rPr>
-              <a:t>Model Architectures Tested</a:t>
+              <a:t>AdamW: The Standard Optimizer </a:t>
+            </a:r>
+            <a:r>
+              <a:rPr lang="en-IN" sz="2800" baseline="30000" dirty="0">
+                <a:latin typeface="Barlow SemiBold" panose="00000700000000000000" pitchFamily="2" charset="0"/>
+              </a:rPr>
+              <a:t>[3]</a:t>
             </a:r>
           </a:p>
         </p:txBody>
       </p:sp>
-      <p:graphicFrame>
-        <p:nvGraphicFramePr>
-          <p:cNvPr id="3" name="Table 2">
-            <a:extLst>
-              <a:ext uri="{FF2B5EF4-FFF2-40B4-BE49-F238E27FC236}">
-                <a16:creationId xmlns:a16="http://schemas.microsoft.com/office/drawing/2014/main" id="{7FBF1AC1-134E-0FBB-B4D9-FDF88536B632}"/>
-              </a:ext>
-            </a:extLst>
-          </p:cNvPr>
-          <p:cNvGraphicFramePr>
-            <a:graphicFrameLocks noGrp="1"/>
-          </p:cNvGraphicFramePr>
-          <p:nvPr>
-            <p:extLst>
-              <p:ext uri="{D42A27DB-BD31-4B8C-83A1-F6EECF244321}">
-                <p14:modId xmlns:p14="http://schemas.microsoft.com/office/powerpoint/2010/main" val="2952616321"/>
-              </p:ext>
-            </p:extLst>
-          </p:nvPr>
-        </p:nvGraphicFramePr>
-        <p:xfrm>
-          <a:off x="782704" y="1812991"/>
-          <a:ext cx="10629934" cy="2621280"/>
-        </p:xfrm>
-        <a:graphic>
-          <a:graphicData uri="http://schemas.openxmlformats.org/drawingml/2006/table">
-            <a:tbl>
-              <a:tblPr firstRow="1" bandRow="1">
-                <a:tableStyleId>{69C7853C-536D-4A76-A0AE-DD22124D55A5}</a:tableStyleId>
-              </a:tblPr>
-              <a:tblGrid>
-                <a:gridCol w="2285387">
-                  <a:extLst>
-                    <a:ext uri="{9D8B030D-6E8A-4147-A177-3AD203B41FA5}">
-                      <a16:colId xmlns:a16="http://schemas.microsoft.com/office/drawing/2014/main" val="902513758"/>
-                    </a:ext>
-                  </a:extLst>
-                </a:gridCol>
-                <a:gridCol w="2285387">
-                  <a:extLst>
-                    <a:ext uri="{9D8B030D-6E8A-4147-A177-3AD203B41FA5}">
-                      <a16:colId xmlns:a16="http://schemas.microsoft.com/office/drawing/2014/main" val="2836376390"/>
-                    </a:ext>
-                  </a:extLst>
-                </a:gridCol>
-                <a:gridCol w="2209438">
-                  <a:extLst>
-                    <a:ext uri="{9D8B030D-6E8A-4147-A177-3AD203B41FA5}">
-                      <a16:colId xmlns:a16="http://schemas.microsoft.com/office/drawing/2014/main" val="4239693166"/>
-                    </a:ext>
-                  </a:extLst>
-                </a:gridCol>
-                <a:gridCol w="3849722">
-                  <a:extLst>
-                    <a:ext uri="{9D8B030D-6E8A-4147-A177-3AD203B41FA5}">
-                      <a16:colId xmlns:a16="http://schemas.microsoft.com/office/drawing/2014/main" val="856259958"/>
-                    </a:ext>
-                  </a:extLst>
-                </a:gridCol>
-              </a:tblGrid>
-              <a:tr h="370840">
-                <a:tc>
-                  <a:txBody>
-                    <a:bodyPr/>
-                    <a:lstStyle/>
-                    <a:p>
-                      <a:r>
-                        <a:rPr lang="en-GB" sz="2400" dirty="0">
-                          <a:effectLst>
-                            <a:outerShdw blurRad="50800" dist="38100" dir="18900000" algn="bl" rotWithShape="0">
-                              <a:prstClr val="black">
-                                <a:alpha val="40000"/>
-                              </a:prstClr>
-                            </a:outerShdw>
-                          </a:effectLst>
-                          <a:latin typeface="Barlow Medium" panose="00000600000000000000" pitchFamily="2" charset="0"/>
-                        </a:rPr>
-                        <a:t>Model</a:t>
-                      </a:r>
-                      <a:endParaRPr lang="en-IN" sz="2400" dirty="0">
-                        <a:effectLst>
-                          <a:outerShdw blurRad="50800" dist="38100" dir="18900000" algn="bl" rotWithShape="0">
-                            <a:prstClr val="black">
-                              <a:alpha val="40000"/>
-                            </a:prstClr>
-                          </a:outerShdw>
-                        </a:effectLst>
-                        <a:latin typeface="Barlow Medium" panose="00000600000000000000" pitchFamily="2" charset="0"/>
-                      </a:endParaRPr>
-                    </a:p>
-                  </a:txBody>
-                  <a:tcPr>
-                    <a:lnB w="15875" cap="rnd" cmpd="sng" algn="ctr">
-                      <a:noFill/>
-                      <a:prstDash val="solid"/>
-                    </a:lnB>
-                  </a:tcPr>
-                </a:tc>
-                <a:tc>
-                  <a:txBody>
-                    <a:bodyPr/>
-                    <a:lstStyle/>
-                    <a:p>
-                      <a:r>
-                        <a:rPr lang="en-GB" sz="2400" dirty="0">
-                          <a:effectLst>
-                            <a:outerShdw blurRad="50800" dist="38100" dir="18900000" algn="bl" rotWithShape="0">
-                              <a:prstClr val="black">
-                                <a:alpha val="40000"/>
-                              </a:prstClr>
-                            </a:outerShdw>
-                          </a:effectLst>
-                          <a:latin typeface="Barlow Medium" panose="00000600000000000000" pitchFamily="2" charset="0"/>
-                        </a:rPr>
-                        <a:t>Parameters</a:t>
-                      </a:r>
-                      <a:endParaRPr lang="en-IN" sz="2400" dirty="0">
-                        <a:effectLst>
-                          <a:outerShdw blurRad="50800" dist="38100" dir="18900000" algn="bl" rotWithShape="0">
-                            <a:prstClr val="black">
-                              <a:alpha val="40000"/>
-                            </a:prstClr>
-                          </a:outerShdw>
-                        </a:effectLst>
-                        <a:latin typeface="Barlow Medium" panose="00000600000000000000" pitchFamily="2" charset="0"/>
-                      </a:endParaRPr>
-                    </a:p>
-                  </a:txBody>
-                  <a:tcPr>
-                    <a:lnB w="15875" cap="rnd" cmpd="sng" algn="ctr">
-                      <a:noFill/>
-                      <a:prstDash val="solid"/>
-                    </a:lnB>
-                  </a:tcPr>
-                </a:tc>
-                <a:tc>
-                  <a:txBody>
-                    <a:bodyPr/>
-                    <a:lstStyle/>
-                    <a:p>
-                      <a:r>
-                        <a:rPr lang="en-GB" sz="2400" dirty="0">
-                          <a:effectLst>
-                            <a:outerShdw blurRad="50800" dist="38100" dir="18900000" algn="bl" rotWithShape="0">
-                              <a:prstClr val="black">
-                                <a:alpha val="40000"/>
-                              </a:prstClr>
-                            </a:outerShdw>
-                          </a:effectLst>
-                          <a:latin typeface="Barlow Medium" panose="00000600000000000000" pitchFamily="2" charset="0"/>
-                        </a:rPr>
-                        <a:t>Context Length</a:t>
-                      </a:r>
-                      <a:endParaRPr lang="en-IN" sz="2400" dirty="0">
-                        <a:effectLst>
-                          <a:outerShdw blurRad="50800" dist="38100" dir="18900000" algn="bl" rotWithShape="0">
-                            <a:prstClr val="black">
-                              <a:alpha val="40000"/>
-                            </a:prstClr>
-                          </a:outerShdw>
-                        </a:effectLst>
-                        <a:latin typeface="Barlow Medium" panose="00000600000000000000" pitchFamily="2" charset="0"/>
-                      </a:endParaRPr>
-                    </a:p>
-                  </a:txBody>
-                  <a:tcPr>
-                    <a:lnB w="15875" cap="rnd" cmpd="sng" algn="ctr">
-                      <a:noFill/>
-                      <a:prstDash val="solid"/>
-                    </a:lnB>
-                  </a:tcPr>
-                </a:tc>
-                <a:tc>
-                  <a:txBody>
-                    <a:bodyPr/>
-                    <a:lstStyle/>
-                    <a:p>
-                      <a:r>
-                        <a:rPr lang="en-GB" sz="2400" dirty="0">
-                          <a:effectLst>
-                            <a:outerShdw blurRad="50800" dist="38100" dir="18900000" algn="bl" rotWithShape="0">
-                              <a:prstClr val="black">
-                                <a:alpha val="40000"/>
-                              </a:prstClr>
-                            </a:outerShdw>
-                          </a:effectLst>
-                          <a:latin typeface="Barlow Medium" panose="00000600000000000000" pitchFamily="2" charset="0"/>
-                        </a:rPr>
-                        <a:t>Key Features</a:t>
-                      </a:r>
-                      <a:endParaRPr lang="en-IN" sz="2400" dirty="0">
-                        <a:effectLst>
-                          <a:outerShdw blurRad="50800" dist="38100" dir="18900000" algn="bl" rotWithShape="0">
-                            <a:prstClr val="black">
-                              <a:alpha val="40000"/>
-                            </a:prstClr>
-                          </a:outerShdw>
-                        </a:effectLst>
-                        <a:latin typeface="Barlow Medium" panose="00000600000000000000" pitchFamily="2" charset="0"/>
-                      </a:endParaRPr>
-                    </a:p>
-                  </a:txBody>
-                  <a:tcPr>
-                    <a:lnB w="15875" cap="rnd" cmpd="sng" algn="ctr">
-                      <a:noFill/>
-                      <a:prstDash val="solid"/>
-                    </a:lnB>
-                  </a:tcPr>
-                </a:tc>
+      <mc:AlternateContent xmlns:mc="http://schemas.openxmlformats.org/markup-compatibility/2006">
+        <mc:Choice xmlns:a14="http://schemas.microsoft.com/office/drawing/2010/main" Requires="a14">
+          <p:sp>
+            <p:nvSpPr>
+              <p:cNvPr id="6" name="TextBox 5">
                 <a:extLst>
-                  <a:ext uri="{0D108BD9-81ED-4DB2-BD59-A6C34878D82A}">
-                    <a16:rowId xmlns:a16="http://schemas.microsoft.com/office/drawing/2014/main" val="1999864367"/>
+                  <a:ext uri="{FF2B5EF4-FFF2-40B4-BE49-F238E27FC236}">
+                    <a16:creationId xmlns:a16="http://schemas.microsoft.com/office/drawing/2014/main" id="{3F328A19-6B2F-462C-D96B-F58C09479D3A}"/>
                   </a:ext>
                 </a:extLst>
-              </a:tr>
-              <a:tr h="370840">
-                <a:tc>
-                  <a:txBody>
-                    <a:bodyPr/>
-                    <a:lstStyle/>
-                    <a:p>
-                      <a:pPr algn="l"/>
-                      <a:r>
-                        <a:rPr lang="en-IN" sz="2000" b="1" dirty="0">
-                          <a:effectLst/>
-                          <a:latin typeface="Barlow" panose="00000500000000000000" pitchFamily="2" charset="0"/>
-                        </a:rPr>
-                        <a:t>MiniLM-L12-H384</a:t>
-                      </a:r>
-                      <a:endParaRPr lang="en-IN" sz="2000" dirty="0">
-                        <a:effectLst/>
-                        <a:latin typeface="Barlow" panose="00000500000000000000" pitchFamily="2" charset="0"/>
-                      </a:endParaRPr>
-                    </a:p>
-                  </a:txBody>
-                  <a:tcPr anchor="ctr">
-                    <a:lnL w="9525" cap="rnd" cmpd="sng" algn="ctr">
-                      <a:noFill/>
-                      <a:prstDash val="solid"/>
-                    </a:lnL>
-                    <a:lnR w="9525" cap="rnd" cmpd="sng" algn="ctr">
-                      <a:noFill/>
-                      <a:prstDash val="solid"/>
-                    </a:lnR>
-                    <a:lnT w="15875" cap="rnd" cmpd="sng" algn="ctr">
-                      <a:noFill/>
-                      <a:prstDash val="solid"/>
-                    </a:lnT>
-                    <a:lnB w="9525" cap="rnd" cmpd="sng" algn="ctr">
-                      <a:noFill/>
-                      <a:prstDash val="solid"/>
-                    </a:lnB>
-                    <a:lnTlToBr w="12700" cmpd="sng">
-                      <a:noFill/>
-                      <a:prstDash val="solid"/>
-                    </a:lnTlToBr>
-                    <a:lnBlToTr w="12700" cmpd="sng">
-                      <a:noFill/>
-                      <a:prstDash val="solid"/>
-                    </a:lnBlToTr>
-                    <a:solidFill>
-                      <a:schemeClr val="bg2"/>
-                    </a:solidFill>
-                  </a:tcPr>
-                </a:tc>
-                <a:tc>
-                  <a:txBody>
-                    <a:bodyPr/>
-                    <a:lstStyle/>
-                    <a:p>
-                      <a:pPr algn="l"/>
-                      <a:r>
-                        <a:rPr lang="en-IN" sz="2000" dirty="0">
-                          <a:effectLst/>
-                          <a:latin typeface="Barlow" panose="00000500000000000000" pitchFamily="2" charset="0"/>
-                        </a:rPr>
-                        <a:t>~33M</a:t>
-                      </a:r>
-                    </a:p>
-                  </a:txBody>
-                  <a:tcPr anchor="ctr">
-                    <a:lnL w="9525" cap="rnd" cmpd="sng" algn="ctr">
-                      <a:noFill/>
-                      <a:prstDash val="solid"/>
-                    </a:lnL>
-                    <a:lnR w="9525" cap="rnd" cmpd="sng" algn="ctr">
-                      <a:noFill/>
-                      <a:prstDash val="solid"/>
-                    </a:lnR>
-                    <a:lnT w="15875" cap="rnd" cmpd="sng" algn="ctr">
-                      <a:noFill/>
-                      <a:prstDash val="solid"/>
-                    </a:lnT>
-                    <a:lnB w="9525" cap="rnd" cmpd="sng" algn="ctr">
-                      <a:noFill/>
-                      <a:prstDash val="solid"/>
-                    </a:lnB>
-                    <a:lnTlToBr w="12700" cmpd="sng">
-                      <a:noFill/>
-                      <a:prstDash val="solid"/>
-                    </a:lnTlToBr>
-                    <a:lnBlToTr w="12700" cmpd="sng">
-                      <a:noFill/>
-                      <a:prstDash val="solid"/>
-                    </a:lnBlToTr>
-                    <a:solidFill>
-                      <a:schemeClr val="bg2"/>
-                    </a:solidFill>
-                  </a:tcPr>
-                </a:tc>
-                <a:tc>
-                  <a:txBody>
-                    <a:bodyPr/>
-                    <a:lstStyle/>
-                    <a:p>
-                      <a:pPr algn="l"/>
-                      <a:r>
-                        <a:rPr lang="en-IN" sz="2000" dirty="0">
-                          <a:effectLst/>
-                          <a:latin typeface="Barlow" panose="00000500000000000000" pitchFamily="2" charset="0"/>
-                        </a:rPr>
-                        <a:t>512 tokens</a:t>
-                      </a:r>
-                    </a:p>
-                  </a:txBody>
-                  <a:tcPr anchor="ctr">
-                    <a:lnL w="9525" cap="rnd" cmpd="sng" algn="ctr">
-                      <a:noFill/>
-                      <a:prstDash val="solid"/>
-                    </a:lnL>
-                    <a:lnR w="9525" cap="rnd" cmpd="sng" algn="ctr">
-                      <a:noFill/>
-                      <a:prstDash val="solid"/>
-                    </a:lnR>
-                    <a:lnT w="15875" cap="rnd" cmpd="sng" algn="ctr">
-                      <a:noFill/>
-                      <a:prstDash val="solid"/>
-                    </a:lnT>
-                    <a:lnB w="9525" cap="rnd" cmpd="sng" algn="ctr">
-                      <a:noFill/>
-                      <a:prstDash val="solid"/>
-                    </a:lnB>
-                    <a:lnTlToBr w="12700" cmpd="sng">
-                      <a:noFill/>
-                      <a:prstDash val="solid"/>
-                    </a:lnTlToBr>
-                    <a:lnBlToTr w="12700" cmpd="sng">
-                      <a:noFill/>
-                      <a:prstDash val="solid"/>
-                    </a:lnBlToTr>
-                    <a:solidFill>
-                      <a:schemeClr val="bg2"/>
-                    </a:solidFill>
-                  </a:tcPr>
-                </a:tc>
-                <a:tc>
-                  <a:txBody>
-                    <a:bodyPr/>
-                    <a:lstStyle/>
-                    <a:p>
-                      <a:pPr algn="l"/>
-                      <a:r>
-                        <a:rPr lang="en-IN" sz="2000" dirty="0">
-                          <a:effectLst/>
-                          <a:latin typeface="Barlow" panose="00000500000000000000" pitchFamily="2" charset="0"/>
-                        </a:rPr>
-                        <a:t>Efficient baseline, knowledge distillation</a:t>
-                      </a:r>
-                    </a:p>
-                  </a:txBody>
-                  <a:tcPr anchor="ctr">
-                    <a:lnL w="9525" cap="rnd" cmpd="sng" algn="ctr">
-                      <a:noFill/>
-                      <a:prstDash val="solid"/>
-                    </a:lnL>
-                    <a:lnR w="9525" cap="rnd" cmpd="sng" algn="ctr">
-                      <a:noFill/>
-                      <a:prstDash val="solid"/>
-                    </a:lnR>
-                    <a:lnT w="15875" cap="rnd" cmpd="sng" algn="ctr">
-                      <a:noFill/>
-                      <a:prstDash val="solid"/>
-                    </a:lnT>
-                    <a:lnB w="9525" cap="rnd" cmpd="sng" algn="ctr">
-                      <a:noFill/>
-                      <a:prstDash val="solid"/>
-                    </a:lnB>
-                    <a:lnTlToBr w="12700" cmpd="sng">
-                      <a:noFill/>
-                      <a:prstDash val="solid"/>
-                    </a:lnTlToBr>
-                    <a:lnBlToTr w="12700" cmpd="sng">
-                      <a:noFill/>
-                      <a:prstDash val="solid"/>
-                    </a:lnBlToTr>
-                    <a:solidFill>
-                      <a:schemeClr val="bg2"/>
-                    </a:solidFill>
-                  </a:tcPr>
-                </a:tc>
+              </p:cNvPr>
+              <p:cNvSpPr txBox="1"/>
+              <p:nvPr/>
+            </p:nvSpPr>
+            <p:spPr>
+              <a:xfrm>
+                <a:off x="445168" y="2610853"/>
+                <a:ext cx="6817892" cy="3823226"/>
+              </a:xfrm>
+              <a:prstGeom prst="rect">
+                <a:avLst/>
+              </a:prstGeom>
+              <a:noFill/>
+            </p:spPr>
+            <p:txBody>
+              <a:bodyPr wrap="none" rtlCol="0">
+                <a:spAutoFit/>
+              </a:bodyPr>
+              <a:lstStyle/>
+              <a:p>
+                <a:r>
+                  <a:rPr lang="en-IN" sz="2000" dirty="0">
+                    <a:latin typeface="Barlow" panose="00000500000000000000" pitchFamily="2" charset="0"/>
+                  </a:rPr>
+                  <a:t>Evolution: Adam → AdamW</a:t>
+                </a:r>
+              </a:p>
+              <a:p>
+                <a:endParaRPr lang="en-IN" sz="2000" dirty="0">
+                  <a:latin typeface="Barlow" panose="00000500000000000000" pitchFamily="2" charset="0"/>
+                </a:endParaRPr>
+              </a:p>
+              <a:p>
+                <a:r>
+                  <a:rPr lang="en-IN" sz="2000" dirty="0">
+                    <a:latin typeface="Barlow" panose="00000500000000000000" pitchFamily="2" charset="0"/>
+                  </a:rPr>
+                  <a:t>Key Improvement:</a:t>
+                </a:r>
+              </a:p>
+              <a:p>
+                <a:r>
+                  <a:rPr lang="en-IN" sz="2000" dirty="0">
+                    <a:latin typeface="Barlow" panose="00000500000000000000" pitchFamily="2" charset="0"/>
+                  </a:rPr>
+                  <a:t>• Decoupled weight decay from gradient updates</a:t>
+                </a:r>
+              </a:p>
+              <a:p>
+                <a:pPr/>
+                <a:r>
+                  <a:rPr lang="en-IN" sz="2000" dirty="0">
+                    <a:latin typeface="Barlow" panose="00000500000000000000" pitchFamily="2" charset="0"/>
+                  </a:rPr>
+                  <a:t>•</a:t>
+                </a:r>
+                <a14:m>
+                  <m:oMath xmlns:m="http://schemas.openxmlformats.org/officeDocument/2006/math">
+                    <m:sSub>
+                      <m:sSubPr>
+                        <m:ctrlPr>
+                          <a:rPr lang="el-GR" sz="2000" i="1" dirty="0" smtClean="0">
+                            <a:latin typeface="Cambria Math" panose="02040503050406030204" pitchFamily="18" charset="0"/>
+                          </a:rPr>
+                        </m:ctrlPr>
+                      </m:sSubPr>
+                      <m:e>
+                        <m:r>
+                          <a:rPr lang="el-GR" sz="2000" i="1" dirty="0" smtClean="0">
+                            <a:latin typeface="Cambria Math" panose="02040503050406030204" pitchFamily="18" charset="0"/>
+                          </a:rPr>
+                          <m:t>𝜃</m:t>
+                        </m:r>
+                      </m:e>
+                      <m:sub>
+                        <m:d>
+                          <m:dPr>
+                            <m:begChr m:val="{"/>
+                            <m:endChr m:val="}"/>
+                            <m:ctrlPr>
+                              <a:rPr lang="el-GR" sz="2000" i="1" dirty="0" smtClean="0">
+                                <a:latin typeface="Cambria Math" panose="02040503050406030204" pitchFamily="18" charset="0"/>
+                              </a:rPr>
+                            </m:ctrlPr>
+                          </m:dPr>
+                          <m:e>
+                            <m:r>
+                              <a:rPr lang="en-IN" sz="2000" i="1" dirty="0" smtClean="0">
+                                <a:latin typeface="Cambria Math" panose="02040503050406030204" pitchFamily="18" charset="0"/>
+                              </a:rPr>
+                              <m:t>𝑡</m:t>
+                            </m:r>
+                            <m:r>
+                              <a:rPr lang="en-IN" sz="2000" i="1" dirty="0" smtClean="0">
+                                <a:latin typeface="Cambria Math" panose="02040503050406030204" pitchFamily="18" charset="0"/>
+                              </a:rPr>
+                              <m:t>+1</m:t>
+                            </m:r>
+                          </m:e>
+                        </m:d>
+                      </m:sub>
+                    </m:sSub>
+                    <m:r>
+                      <a:rPr lang="en-IN" sz="2000" i="1" dirty="0" smtClean="0">
+                        <a:latin typeface="Cambria Math" panose="02040503050406030204" pitchFamily="18" charset="0"/>
+                      </a:rPr>
+                      <m:t> = </m:t>
+                    </m:r>
+                    <m:sSub>
+                      <m:sSubPr>
+                        <m:ctrlPr>
+                          <a:rPr lang="el-GR" sz="2000" i="1" dirty="0" smtClean="0">
+                            <a:latin typeface="Cambria Math" panose="02040503050406030204" pitchFamily="18" charset="0"/>
+                          </a:rPr>
+                        </m:ctrlPr>
+                      </m:sSubPr>
+                      <m:e>
+                        <m:r>
+                          <a:rPr lang="el-GR" sz="2000" i="1" dirty="0" smtClean="0">
+                            <a:latin typeface="Cambria Math" panose="02040503050406030204" pitchFamily="18" charset="0"/>
+                          </a:rPr>
+                          <m:t>𝜃</m:t>
+                        </m:r>
+                      </m:e>
+                      <m:sub>
+                        <m:r>
+                          <a:rPr lang="en-IN" sz="2000" i="1" dirty="0" smtClean="0">
+                            <a:latin typeface="Cambria Math" panose="02040503050406030204" pitchFamily="18" charset="0"/>
+                          </a:rPr>
+                          <m:t>𝑡</m:t>
+                        </m:r>
+                      </m:sub>
+                    </m:sSub>
+                    <m:r>
+                      <a:rPr lang="en-IN" sz="2000" i="1" dirty="0" smtClean="0">
+                        <a:latin typeface="Cambria Math" panose="02040503050406030204" pitchFamily="18" charset="0"/>
+                      </a:rPr>
+                      <m:t> − </m:t>
+                    </m:r>
+                    <m:r>
+                      <a:rPr lang="el-GR" sz="2000" i="1" dirty="0" smtClean="0">
+                        <a:latin typeface="Cambria Math" panose="02040503050406030204" pitchFamily="18" charset="0"/>
+                      </a:rPr>
+                      <m:t>𝛼</m:t>
+                    </m:r>
+                    <m:r>
+                      <a:rPr lang="el-GR" sz="2000" i="1" dirty="0" smtClean="0">
+                        <a:latin typeface="Cambria Math" panose="02040503050406030204" pitchFamily="18" charset="0"/>
+                      </a:rPr>
+                      <m:t>(</m:t>
+                    </m:r>
+                    <m:sSub>
+                      <m:sSubPr>
+                        <m:ctrlPr>
+                          <a:rPr lang="en-IN" sz="2000" i="1" dirty="0" smtClean="0">
+                            <a:latin typeface="Cambria Math" panose="02040503050406030204" pitchFamily="18" charset="0"/>
+                          </a:rPr>
+                        </m:ctrlPr>
+                      </m:sSubPr>
+                      <m:e>
+                        <m:acc>
+                          <m:accPr>
+                            <m:chr m:val="̂"/>
+                            <m:ctrlPr>
+                              <a:rPr lang="en-IN" sz="2000" i="1" dirty="0" smtClean="0">
+                                <a:latin typeface="Cambria Math" panose="02040503050406030204" pitchFamily="18" charset="0"/>
+                              </a:rPr>
+                            </m:ctrlPr>
+                          </m:accPr>
+                          <m:e>
+                            <m:r>
+                              <a:rPr lang="en-IN" sz="2000" i="1" dirty="0" smtClean="0">
+                                <a:latin typeface="Cambria Math" panose="02040503050406030204" pitchFamily="18" charset="0"/>
+                              </a:rPr>
+                              <m:t>𝑚</m:t>
+                            </m:r>
+                          </m:e>
+                        </m:acc>
+                      </m:e>
+                      <m:sub>
+                        <m:r>
+                          <a:rPr lang="en-IN" sz="2000" i="1" dirty="0" smtClean="0">
+                            <a:latin typeface="Cambria Math" panose="02040503050406030204" pitchFamily="18" charset="0"/>
+                          </a:rPr>
+                          <m:t>𝑡</m:t>
+                        </m:r>
+                      </m:sub>
+                    </m:sSub>
+                    <m:r>
+                      <a:rPr lang="en-GB" sz="2000" b="0" i="1" dirty="0" smtClean="0">
+                        <a:latin typeface="Cambria Math" panose="02040503050406030204" pitchFamily="18" charset="0"/>
+                      </a:rPr>
+                      <m:t>/</m:t>
+                    </m:r>
+                    <m:r>
+                      <a:rPr lang="en-IN" sz="2000" i="1" dirty="0" smtClean="0">
+                        <a:latin typeface="Cambria Math" panose="02040503050406030204" pitchFamily="18" charset="0"/>
+                      </a:rPr>
+                      <m:t>√</m:t>
+                    </m:r>
+                    <m:sSub>
+                      <m:sSubPr>
+                        <m:ctrlPr>
+                          <a:rPr lang="en-IN" sz="2000" i="1" dirty="0" smtClean="0">
+                            <a:latin typeface="Cambria Math" panose="02040503050406030204" pitchFamily="18" charset="0"/>
+                          </a:rPr>
+                        </m:ctrlPr>
+                      </m:sSubPr>
+                      <m:e>
+                        <m:acc>
+                          <m:accPr>
+                            <m:chr m:val="̂"/>
+                            <m:ctrlPr>
+                              <a:rPr lang="en-IN" sz="2000" i="1" dirty="0" smtClean="0">
+                                <a:latin typeface="Cambria Math" panose="02040503050406030204" pitchFamily="18" charset="0"/>
+                              </a:rPr>
+                            </m:ctrlPr>
+                          </m:accPr>
+                          <m:e>
+                            <m:r>
+                              <a:rPr lang="en-IN" sz="2000" i="1" dirty="0" smtClean="0">
+                                <a:latin typeface="Cambria Math" panose="02040503050406030204" pitchFamily="18" charset="0"/>
+                              </a:rPr>
+                              <m:t>𝑣</m:t>
+                            </m:r>
+                          </m:e>
+                        </m:acc>
+                      </m:e>
+                      <m:sub>
+                        <m:r>
+                          <a:rPr lang="en-IN" sz="2000" i="1" dirty="0" smtClean="0">
+                            <a:latin typeface="Cambria Math" panose="02040503050406030204" pitchFamily="18" charset="0"/>
+                          </a:rPr>
+                          <m:t>𝑡</m:t>
+                        </m:r>
+                      </m:sub>
+                    </m:sSub>
+                    <m:r>
+                      <a:rPr lang="en-IN" sz="2000" i="1" dirty="0" smtClean="0">
+                        <a:latin typeface="Cambria Math" panose="02040503050406030204" pitchFamily="18" charset="0"/>
+                      </a:rPr>
+                      <m:t> + </m:t>
+                    </m:r>
+                    <m:r>
+                      <a:rPr lang="el-GR" sz="2000" i="1" dirty="0" smtClean="0">
+                        <a:latin typeface="Cambria Math" panose="02040503050406030204" pitchFamily="18" charset="0"/>
+                      </a:rPr>
+                      <m:t>𝜆</m:t>
+                    </m:r>
+                    <m:sSub>
+                      <m:sSubPr>
+                        <m:ctrlPr>
+                          <a:rPr lang="el-GR" sz="2000" i="1" dirty="0" smtClean="0">
+                            <a:latin typeface="Cambria Math" panose="02040503050406030204" pitchFamily="18" charset="0"/>
+                          </a:rPr>
+                        </m:ctrlPr>
+                      </m:sSubPr>
+                      <m:e>
+                        <m:r>
+                          <a:rPr lang="el-GR" sz="2000" i="1" dirty="0" smtClean="0">
+                            <a:latin typeface="Cambria Math" panose="02040503050406030204" pitchFamily="18" charset="0"/>
+                          </a:rPr>
+                          <m:t>𝜃</m:t>
+                        </m:r>
+                      </m:e>
+                      <m:sub>
+                        <m:r>
+                          <a:rPr lang="en-IN" sz="2000" i="1" dirty="0" smtClean="0">
+                            <a:latin typeface="Cambria Math" panose="02040503050406030204" pitchFamily="18" charset="0"/>
+                          </a:rPr>
+                          <m:t>𝑡</m:t>
+                        </m:r>
+                      </m:sub>
+                    </m:sSub>
+                    <m:r>
+                      <a:rPr lang="en-IN" sz="2000" i="1" dirty="0" smtClean="0">
+                        <a:latin typeface="Cambria Math" panose="02040503050406030204" pitchFamily="18" charset="0"/>
+                      </a:rPr>
+                      <m:t>)</m:t>
+                    </m:r>
+                  </m:oMath>
+                </a14:m>
+                <a:endParaRPr lang="en-IN" sz="2000" dirty="0">
+                  <a:latin typeface="Barlow" panose="00000500000000000000" pitchFamily="2" charset="0"/>
+                </a:endParaRPr>
+              </a:p>
+              <a:p>
+                <a:endParaRPr lang="en-IN" sz="2000" dirty="0">
+                  <a:latin typeface="Barlow" panose="00000500000000000000" pitchFamily="2" charset="0"/>
+                </a:endParaRPr>
+              </a:p>
+              <a:p>
+                <a:r>
+                  <a:rPr lang="en-IN" sz="2000" dirty="0">
+                    <a:latin typeface="Barlow" panose="00000500000000000000" pitchFamily="2" charset="0"/>
+                  </a:rPr>
+                  <a:t>Why AdamW Dominates:</a:t>
+                </a:r>
+              </a:p>
+              <a:p>
+                <a:r>
+                  <a:rPr lang="en-IN" sz="2000" dirty="0">
+                    <a:latin typeface="Barlow" panose="00000500000000000000" pitchFamily="2" charset="0"/>
+                  </a:rPr>
+                  <a:t>✓ Better generalization than Adam</a:t>
+                </a:r>
+              </a:p>
+              <a:p>
+                <a:r>
+                  <a:rPr lang="en-IN" sz="2000" dirty="0">
+                    <a:latin typeface="Barlow" panose="00000500000000000000" pitchFamily="2" charset="0"/>
+                  </a:rPr>
+                  <a:t>✓ Stable training for transformers</a:t>
+                </a:r>
+              </a:p>
+              <a:p>
+                <a:r>
+                  <a:rPr lang="en-IN" sz="2000" dirty="0">
+                    <a:latin typeface="Barlow" panose="00000500000000000000" pitchFamily="2" charset="0"/>
+                  </a:rPr>
+                  <a:t>✓ De facto standard for BERT</a:t>
+                </a:r>
+                <a:r>
+                  <a:rPr lang="en-IN" sz="2000" b="1" baseline="30000" dirty="0">
+                    <a:latin typeface="Barlow" panose="00000500000000000000" pitchFamily="2" charset="0"/>
+                  </a:rPr>
+                  <a:t>[1]  </a:t>
+                </a:r>
+                <a:r>
+                  <a:rPr lang="en-IN" sz="2000" dirty="0">
+                    <a:latin typeface="Barlow" panose="00000500000000000000" pitchFamily="2" charset="0"/>
+                  </a:rPr>
+                  <a:t>family models</a:t>
+                </a:r>
+              </a:p>
+              <a:p>
+                <a:endParaRPr lang="en-IN" sz="2000" dirty="0">
+                  <a:latin typeface="Barlow" panose="00000500000000000000" pitchFamily="2" charset="0"/>
+                </a:endParaRPr>
+              </a:p>
+              <a:p>
+                <a:r>
+                  <a:rPr lang="en-IN" sz="2000" dirty="0">
+                    <a:latin typeface="Barlow" panose="00000500000000000000" pitchFamily="2" charset="0"/>
+                  </a:rPr>
+                  <a:t>Current Status: Default choice without alternatives explored</a:t>
+                </a:r>
+              </a:p>
+            </p:txBody>
+          </p:sp>
+        </mc:Choice>
+        <mc:Fallback>
+          <p:sp>
+            <p:nvSpPr>
+              <p:cNvPr id="6" name="TextBox 5">
                 <a:extLst>
-                  <a:ext uri="{0D108BD9-81ED-4DB2-BD59-A6C34878D82A}">
-                    <a16:rowId xmlns:a16="http://schemas.microsoft.com/office/drawing/2014/main" val="3048339735"/>
+                  <a:ext uri="{FF2B5EF4-FFF2-40B4-BE49-F238E27FC236}">
+                    <a16:creationId xmlns:a16="http://schemas.microsoft.com/office/drawing/2014/main" id="{3F328A19-6B2F-462C-D96B-F58C09479D3A}"/>
                   </a:ext>
                 </a:extLst>
-              </a:tr>
-              <a:tr h="370840">
-                <a:tc>
-                  <a:txBody>
-                    <a:bodyPr/>
-                    <a:lstStyle/>
-                    <a:p>
-                      <a:pPr algn="l"/>
-                      <a:r>
-                        <a:rPr lang="en-IN" sz="2000" b="1">
-                          <a:effectLst/>
-                          <a:latin typeface="Barlow" panose="00000500000000000000" pitchFamily="2" charset="0"/>
-                        </a:rPr>
-                        <a:t>GTE-multilingual-base</a:t>
-                      </a:r>
-                      <a:endParaRPr lang="en-IN" sz="2000">
-                        <a:effectLst/>
-                        <a:latin typeface="Barlow" panose="00000500000000000000" pitchFamily="2" charset="0"/>
-                      </a:endParaRPr>
-                    </a:p>
-                  </a:txBody>
-                  <a:tcPr anchor="ctr">
-                    <a:lnL w="9525" cap="rnd" cmpd="sng" algn="ctr">
-                      <a:noFill/>
-                      <a:prstDash val="solid"/>
-                    </a:lnL>
-                    <a:lnR w="9525" cap="rnd" cmpd="sng" algn="ctr">
-                      <a:noFill/>
-                      <a:prstDash val="solid"/>
-                    </a:lnR>
-                    <a:lnT w="9525" cap="rnd" cmpd="sng" algn="ctr">
-                      <a:noFill/>
-                      <a:prstDash val="solid"/>
-                    </a:lnT>
-                    <a:lnB w="9525" cap="rnd" cmpd="sng" algn="ctr">
-                      <a:noFill/>
-                      <a:prstDash val="solid"/>
-                    </a:lnB>
-                    <a:lnTlToBr w="12700" cmpd="sng">
-                      <a:noFill/>
-                      <a:prstDash val="solid"/>
-                    </a:lnTlToBr>
-                    <a:lnBlToTr w="12700" cmpd="sng">
-                      <a:noFill/>
-                      <a:prstDash val="solid"/>
-                    </a:lnBlToTr>
-                    <a:solidFill>
-                      <a:schemeClr val="bg2"/>
-                    </a:solidFill>
-                  </a:tcPr>
-                </a:tc>
-                <a:tc>
-                  <a:txBody>
-                    <a:bodyPr/>
-                    <a:lstStyle/>
-                    <a:p>
-                      <a:pPr algn="l"/>
-                      <a:r>
-                        <a:rPr lang="en-IN" sz="2000" dirty="0">
-                          <a:effectLst/>
-                          <a:latin typeface="Barlow" panose="00000500000000000000" pitchFamily="2" charset="0"/>
-                        </a:rPr>
-                        <a:t>~305M</a:t>
-                      </a:r>
-                    </a:p>
-                  </a:txBody>
-                  <a:tcPr anchor="ctr">
-                    <a:lnL w="9525" cap="rnd" cmpd="sng" algn="ctr">
-                      <a:noFill/>
-                      <a:prstDash val="solid"/>
-                    </a:lnL>
-                    <a:lnR w="9525" cap="rnd" cmpd="sng" algn="ctr">
-                      <a:noFill/>
-                      <a:prstDash val="solid"/>
-                    </a:lnR>
-                    <a:lnT w="9525" cap="rnd" cmpd="sng" algn="ctr">
-                      <a:noFill/>
-                      <a:prstDash val="solid"/>
-                    </a:lnT>
-                    <a:lnB w="9525" cap="rnd" cmpd="sng" algn="ctr">
-                      <a:noFill/>
-                      <a:prstDash val="solid"/>
-                    </a:lnB>
-                    <a:lnTlToBr w="12700" cmpd="sng">
-                      <a:noFill/>
-                      <a:prstDash val="solid"/>
-                    </a:lnTlToBr>
-                    <a:lnBlToTr w="12700" cmpd="sng">
-                      <a:noFill/>
-                      <a:prstDash val="solid"/>
-                    </a:lnBlToTr>
-                    <a:solidFill>
-                      <a:schemeClr val="bg2"/>
-                    </a:solidFill>
-                  </a:tcPr>
-                </a:tc>
-                <a:tc>
-                  <a:txBody>
-                    <a:bodyPr/>
-                    <a:lstStyle/>
-                    <a:p>
-                      <a:pPr algn="l"/>
-                      <a:r>
-                        <a:rPr lang="en-IN" sz="2000" dirty="0">
-                          <a:effectLst/>
-                          <a:latin typeface="Barlow" panose="00000500000000000000" pitchFamily="2" charset="0"/>
-                        </a:rPr>
-                        <a:t>8192 tokens</a:t>
-                      </a:r>
-                    </a:p>
-                  </a:txBody>
-                  <a:tcPr anchor="ctr">
-                    <a:lnL w="9525" cap="rnd" cmpd="sng" algn="ctr">
-                      <a:noFill/>
-                      <a:prstDash val="solid"/>
-                    </a:lnL>
-                    <a:lnR w="9525" cap="rnd" cmpd="sng" algn="ctr">
-                      <a:noFill/>
-                      <a:prstDash val="solid"/>
-                    </a:lnR>
-                    <a:lnT w="9525" cap="rnd" cmpd="sng" algn="ctr">
-                      <a:noFill/>
-                      <a:prstDash val="solid"/>
-                    </a:lnT>
-                    <a:lnB w="9525" cap="rnd" cmpd="sng" algn="ctr">
-                      <a:noFill/>
-                      <a:prstDash val="solid"/>
-                    </a:lnB>
-                    <a:lnTlToBr w="12700" cmpd="sng">
-                      <a:noFill/>
-                      <a:prstDash val="solid"/>
-                    </a:lnTlToBr>
-                    <a:lnBlToTr w="12700" cmpd="sng">
-                      <a:noFill/>
-                      <a:prstDash val="solid"/>
-                    </a:lnBlToTr>
-                    <a:solidFill>
-                      <a:schemeClr val="bg2"/>
-                    </a:solidFill>
-                  </a:tcPr>
-                </a:tc>
-                <a:tc>
-                  <a:txBody>
-                    <a:bodyPr/>
-                    <a:lstStyle/>
-                    <a:p>
-                      <a:pPr algn="l"/>
-                      <a:r>
-                        <a:rPr lang="en-IN" sz="2000" dirty="0">
-                          <a:effectLst/>
-                          <a:latin typeface="Barlow" panose="00000500000000000000" pitchFamily="2" charset="0"/>
-                        </a:rPr>
-                        <a:t>Extended context, multilingual support</a:t>
-                      </a:r>
-                    </a:p>
-                  </a:txBody>
-                  <a:tcPr anchor="ctr">
-                    <a:lnL w="9525" cap="rnd" cmpd="sng" algn="ctr">
-                      <a:noFill/>
-                      <a:prstDash val="solid"/>
-                    </a:lnL>
-                    <a:lnR w="9525" cap="rnd" cmpd="sng" algn="ctr">
-                      <a:noFill/>
-                      <a:prstDash val="solid"/>
-                    </a:lnR>
-                    <a:lnT w="9525" cap="rnd" cmpd="sng" algn="ctr">
-                      <a:noFill/>
-                      <a:prstDash val="solid"/>
-                    </a:lnT>
-                    <a:lnB w="9525" cap="rnd" cmpd="sng" algn="ctr">
-                      <a:noFill/>
-                      <a:prstDash val="solid"/>
-                    </a:lnB>
-                    <a:lnTlToBr w="12700" cmpd="sng">
-                      <a:noFill/>
-                      <a:prstDash val="solid"/>
-                    </a:lnTlToBr>
-                    <a:lnBlToTr w="12700" cmpd="sng">
-                      <a:noFill/>
-                      <a:prstDash val="solid"/>
-                    </a:lnBlToTr>
-                    <a:solidFill>
-                      <a:schemeClr val="bg2"/>
-                    </a:solidFill>
-                  </a:tcPr>
-                </a:tc>
-                <a:extLst>
-                  <a:ext uri="{0D108BD9-81ED-4DB2-BD59-A6C34878D82A}">
-                    <a16:rowId xmlns:a16="http://schemas.microsoft.com/office/drawing/2014/main" val="931686448"/>
-                  </a:ext>
-                </a:extLst>
-              </a:tr>
-              <a:tr h="370840">
-                <a:tc>
-                  <a:txBody>
-                    <a:bodyPr/>
-                    <a:lstStyle/>
-                    <a:p>
-                      <a:pPr algn="l"/>
-                      <a:r>
-                        <a:rPr lang="en-IN" sz="2000" b="1">
-                          <a:effectLst/>
-                          <a:latin typeface="Barlow" panose="00000500000000000000" pitchFamily="2" charset="0"/>
-                        </a:rPr>
-                        <a:t>ModernBERT-base</a:t>
-                      </a:r>
-                      <a:endParaRPr lang="en-IN" sz="2000">
-                        <a:effectLst/>
-                        <a:latin typeface="Barlow" panose="00000500000000000000" pitchFamily="2" charset="0"/>
-                      </a:endParaRPr>
-                    </a:p>
-                  </a:txBody>
-                  <a:tcPr anchor="ctr">
-                    <a:lnL w="9525" cap="rnd" cmpd="sng" algn="ctr">
-                      <a:noFill/>
-                      <a:prstDash val="solid"/>
-                    </a:lnL>
-                    <a:lnR w="9525" cap="rnd" cmpd="sng" algn="ctr">
-                      <a:noFill/>
-                      <a:prstDash val="solid"/>
-                    </a:lnR>
-                    <a:lnT w="9525" cap="rnd" cmpd="sng" algn="ctr">
-                      <a:noFill/>
-                      <a:prstDash val="solid"/>
-                    </a:lnT>
-                    <a:lnB w="9525" cap="rnd" cmpd="sng" algn="ctr">
-                      <a:noFill/>
-                      <a:prstDash val="solid"/>
-                    </a:lnB>
-                    <a:lnTlToBr w="12700" cmpd="sng">
-                      <a:noFill/>
-                      <a:prstDash val="solid"/>
-                    </a:lnTlToBr>
-                    <a:lnBlToTr w="12700" cmpd="sng">
-                      <a:noFill/>
-                      <a:prstDash val="solid"/>
-                    </a:lnBlToTr>
-                    <a:solidFill>
-                      <a:schemeClr val="bg2"/>
-                    </a:solidFill>
-                  </a:tcPr>
-                </a:tc>
-                <a:tc>
-                  <a:txBody>
-                    <a:bodyPr/>
-                    <a:lstStyle/>
-                    <a:p>
-                      <a:pPr algn="l"/>
-                      <a:r>
-                        <a:rPr lang="en-IN" sz="2000">
-                          <a:effectLst/>
-                          <a:latin typeface="Barlow" panose="00000500000000000000" pitchFamily="2" charset="0"/>
-                        </a:rPr>
-                        <a:t>~149M</a:t>
-                      </a:r>
-                    </a:p>
-                  </a:txBody>
-                  <a:tcPr anchor="ctr">
-                    <a:lnL w="9525" cap="rnd" cmpd="sng" algn="ctr">
-                      <a:noFill/>
-                      <a:prstDash val="solid"/>
-                    </a:lnL>
-                    <a:lnR w="9525" cap="rnd" cmpd="sng" algn="ctr">
-                      <a:noFill/>
-                      <a:prstDash val="solid"/>
-                    </a:lnR>
-                    <a:lnT w="9525" cap="rnd" cmpd="sng" algn="ctr">
-                      <a:noFill/>
-                      <a:prstDash val="solid"/>
-                    </a:lnT>
-                    <a:lnB w="9525" cap="rnd" cmpd="sng" algn="ctr">
-                      <a:noFill/>
-                      <a:prstDash val="solid"/>
-                    </a:lnB>
-                    <a:lnTlToBr w="12700" cmpd="sng">
-                      <a:noFill/>
-                      <a:prstDash val="solid"/>
-                    </a:lnTlToBr>
-                    <a:lnBlToTr w="12700" cmpd="sng">
-                      <a:noFill/>
-                      <a:prstDash val="solid"/>
-                    </a:lnBlToTr>
-                    <a:solidFill>
-                      <a:schemeClr val="bg2"/>
-                    </a:solidFill>
-                  </a:tcPr>
-                </a:tc>
-                <a:tc>
-                  <a:txBody>
-                    <a:bodyPr/>
-                    <a:lstStyle/>
-                    <a:p>
-                      <a:pPr algn="l"/>
-                      <a:r>
-                        <a:rPr lang="en-IN" sz="2000" dirty="0">
-                          <a:effectLst/>
-                          <a:latin typeface="Barlow" panose="00000500000000000000" pitchFamily="2" charset="0"/>
-                        </a:rPr>
-                        <a:t>8192 tokens</a:t>
-                      </a:r>
-                    </a:p>
-                  </a:txBody>
-                  <a:tcPr anchor="ctr">
-                    <a:lnL w="9525" cap="rnd" cmpd="sng" algn="ctr">
-                      <a:noFill/>
-                      <a:prstDash val="solid"/>
-                    </a:lnL>
-                    <a:lnR w="9525" cap="rnd" cmpd="sng" algn="ctr">
-                      <a:noFill/>
-                      <a:prstDash val="solid"/>
-                    </a:lnR>
-                    <a:lnT w="9525" cap="rnd" cmpd="sng" algn="ctr">
-                      <a:noFill/>
-                      <a:prstDash val="solid"/>
-                    </a:lnT>
-                    <a:lnB w="9525" cap="rnd" cmpd="sng" algn="ctr">
-                      <a:noFill/>
-                      <a:prstDash val="solid"/>
-                    </a:lnB>
-                    <a:lnTlToBr w="12700" cmpd="sng">
-                      <a:noFill/>
-                      <a:prstDash val="solid"/>
-                    </a:lnTlToBr>
-                    <a:lnBlToTr w="12700" cmpd="sng">
-                      <a:noFill/>
-                      <a:prstDash val="solid"/>
-                    </a:lnBlToTr>
-                    <a:solidFill>
-                      <a:schemeClr val="bg2"/>
-                    </a:solidFill>
-                  </a:tcPr>
-                </a:tc>
-                <a:tc>
-                  <a:txBody>
-                    <a:bodyPr/>
-                    <a:lstStyle/>
-                    <a:p>
-                      <a:pPr algn="l"/>
-                      <a:r>
-                        <a:rPr lang="en-IN" sz="2000" dirty="0">
-                          <a:effectLst/>
-                          <a:latin typeface="Barlow" panose="00000500000000000000" pitchFamily="2" charset="0"/>
-                        </a:rPr>
-                        <a:t>RoPE, Flash Attention, GeGLU</a:t>
-                      </a:r>
-                    </a:p>
-                  </a:txBody>
-                  <a:tcPr anchor="ctr">
-                    <a:lnL w="9525" cap="rnd" cmpd="sng" algn="ctr">
-                      <a:noFill/>
-                      <a:prstDash val="solid"/>
-                    </a:lnL>
-                    <a:lnR w="9525" cap="rnd" cmpd="sng" algn="ctr">
-                      <a:noFill/>
-                      <a:prstDash val="solid"/>
-                    </a:lnR>
-                    <a:lnT w="9525" cap="rnd" cmpd="sng" algn="ctr">
-                      <a:noFill/>
-                      <a:prstDash val="solid"/>
-                    </a:lnT>
-                    <a:lnB w="9525" cap="rnd" cmpd="sng" algn="ctr">
-                      <a:noFill/>
-                      <a:prstDash val="solid"/>
-                    </a:lnB>
-                    <a:lnTlToBr w="12700" cmpd="sng">
-                      <a:noFill/>
-                      <a:prstDash val="solid"/>
-                    </a:lnTlToBr>
-                    <a:lnBlToTr w="12700" cmpd="sng">
-                      <a:noFill/>
-                      <a:prstDash val="solid"/>
-                    </a:lnBlToTr>
-                    <a:solidFill>
-                      <a:schemeClr val="bg2"/>
-                    </a:solidFill>
-                  </a:tcPr>
-                </a:tc>
-                <a:extLst>
-                  <a:ext uri="{0D108BD9-81ED-4DB2-BD59-A6C34878D82A}">
-                    <a16:rowId xmlns:a16="http://schemas.microsoft.com/office/drawing/2014/main" val="1844968829"/>
-                  </a:ext>
-                </a:extLst>
-              </a:tr>
-            </a:tbl>
-          </a:graphicData>
-        </a:graphic>
-      </p:graphicFrame>
-      <p:sp>
-        <p:nvSpPr>
-          <p:cNvPr id="4" name="Arrow: Pentagon 3">
-            <a:extLst>
-              <a:ext uri="{FF2B5EF4-FFF2-40B4-BE49-F238E27FC236}">
-                <a16:creationId xmlns:a16="http://schemas.microsoft.com/office/drawing/2014/main" id="{A01696DB-BADC-B932-7535-D92B47A1AC19}"/>
-              </a:ext>
-            </a:extLst>
-          </p:cNvPr>
-          <p:cNvSpPr/>
-          <p:nvPr/>
-        </p:nvSpPr>
-        <p:spPr>
-          <a:xfrm>
-            <a:off x="596895" y="830509"/>
-            <a:ext cx="896345" cy="459465"/>
-          </a:xfrm>
-          <a:prstGeom prst="homePlate">
-            <a:avLst/>
-          </a:prstGeom>
-        </p:spPr>
-        <p:style>
-          <a:lnRef idx="2">
-            <a:schemeClr val="accent1">
-              <a:shade val="15000"/>
-            </a:schemeClr>
-          </a:lnRef>
-          <a:fillRef idx="1">
-            <a:schemeClr val="accent1"/>
-          </a:fillRef>
-          <a:effectRef idx="0">
-            <a:schemeClr val="accent1"/>
-          </a:effectRef>
-          <a:fontRef idx="minor">
-            <a:schemeClr val="lt1"/>
-          </a:fontRef>
-        </p:style>
-        <p:txBody>
-          <a:bodyPr rtlCol="0" anchor="ctr"/>
-          <a:lstStyle/>
-          <a:p>
-            <a:pPr algn="ctr"/>
-            <a:endParaRPr lang="en-IN"/>
-          </a:p>
-        </p:txBody>
-      </p:sp>
-      <p:sp>
-        <p:nvSpPr>
-          <p:cNvPr id="5" name="TextBox 4">
-            <a:extLst>
-              <a:ext uri="{FF2B5EF4-FFF2-40B4-BE49-F238E27FC236}">
-                <a16:creationId xmlns:a16="http://schemas.microsoft.com/office/drawing/2014/main" id="{46A5F860-B964-8247-C136-DB3C44647293}"/>
-              </a:ext>
-            </a:extLst>
-          </p:cNvPr>
-          <p:cNvSpPr txBox="1"/>
-          <p:nvPr/>
-        </p:nvSpPr>
-        <p:spPr>
-          <a:xfrm>
-            <a:off x="782704" y="4801180"/>
-            <a:ext cx="4704948" cy="707886"/>
-          </a:xfrm>
-          <a:prstGeom prst="rect">
-            <a:avLst/>
-          </a:prstGeom>
-          <a:noFill/>
-        </p:spPr>
-        <p:txBody>
-          <a:bodyPr wrap="square" rtlCol="0">
-            <a:spAutoFit/>
-          </a:bodyPr>
-          <a:lstStyle/>
-          <a:p>
-            <a:r>
-              <a:rPr lang="en-GB" sz="2000" b="1" dirty="0">
-                <a:latin typeface="Barlow" panose="00000500000000000000" pitchFamily="2" charset="0"/>
-              </a:rPr>
-              <a:t>MiniLM:</a:t>
-            </a:r>
-            <a:r>
-              <a:rPr lang="en-GB" sz="2000" dirty="0">
-                <a:latin typeface="Barlow" panose="00000500000000000000" pitchFamily="2" charset="0"/>
-              </a:rPr>
-              <a:t> Efficiency-focused for resource-constrained scenarios</a:t>
-            </a:r>
-          </a:p>
-        </p:txBody>
-      </p:sp>
-      <p:sp>
-        <p:nvSpPr>
-          <p:cNvPr id="6" name="TextBox 5">
-            <a:extLst>
-              <a:ext uri="{FF2B5EF4-FFF2-40B4-BE49-F238E27FC236}">
-                <a16:creationId xmlns:a16="http://schemas.microsoft.com/office/drawing/2014/main" id="{0233F026-A0B3-B02F-D48E-918F79CD29F0}"/>
-              </a:ext>
-            </a:extLst>
-          </p:cNvPr>
-          <p:cNvSpPr txBox="1"/>
-          <p:nvPr/>
-        </p:nvSpPr>
-        <p:spPr>
-          <a:xfrm>
-            <a:off x="6518245" y="4801180"/>
-            <a:ext cx="5220749" cy="707886"/>
-          </a:xfrm>
-          <a:prstGeom prst="rect">
-            <a:avLst/>
-          </a:prstGeom>
-          <a:noFill/>
-        </p:spPr>
-        <p:txBody>
-          <a:bodyPr wrap="square" rtlCol="0">
-            <a:spAutoFit/>
-          </a:bodyPr>
-          <a:lstStyle/>
-          <a:p>
-            <a:r>
-              <a:rPr lang="en-GB" sz="2000" b="1" dirty="0">
-                <a:latin typeface="Barlow" panose="00000500000000000000" pitchFamily="2" charset="0"/>
-              </a:rPr>
-              <a:t>GTE:</a:t>
-            </a:r>
-            <a:r>
-              <a:rPr lang="en-GB" sz="2000" dirty="0">
-                <a:latin typeface="Barlow" panose="00000500000000000000" pitchFamily="2" charset="0"/>
-              </a:rPr>
-              <a:t> Extended context for comprehensive document analysis</a:t>
-            </a:r>
-          </a:p>
-        </p:txBody>
-      </p:sp>
-      <p:sp>
-        <p:nvSpPr>
-          <p:cNvPr id="10" name="TextBox 9">
-            <a:extLst>
-              <a:ext uri="{FF2B5EF4-FFF2-40B4-BE49-F238E27FC236}">
-                <a16:creationId xmlns:a16="http://schemas.microsoft.com/office/drawing/2014/main" id="{BFA4BBCA-1F4A-4863-3C5A-8ED609E0F60F}"/>
-              </a:ext>
-            </a:extLst>
-          </p:cNvPr>
-          <p:cNvSpPr txBox="1"/>
-          <p:nvPr/>
-        </p:nvSpPr>
-        <p:spPr>
-          <a:xfrm>
-            <a:off x="3537861" y="5763237"/>
-            <a:ext cx="4704948" cy="707886"/>
-          </a:xfrm>
-          <a:prstGeom prst="rect">
-            <a:avLst/>
-          </a:prstGeom>
-          <a:noFill/>
-        </p:spPr>
-        <p:txBody>
-          <a:bodyPr wrap="square" rtlCol="0">
-            <a:spAutoFit/>
-          </a:bodyPr>
-          <a:lstStyle/>
-          <a:p>
-            <a:r>
-              <a:rPr lang="en-GB" sz="2000" b="1" dirty="0">
-                <a:latin typeface="Barlow" panose="00000500000000000000" pitchFamily="2" charset="0"/>
-              </a:rPr>
-              <a:t>ModernBERT:</a:t>
-            </a:r>
-            <a:r>
-              <a:rPr lang="en-GB" sz="2000" dirty="0">
-                <a:latin typeface="Barlow" panose="00000500000000000000" pitchFamily="2" charset="0"/>
-              </a:rPr>
-              <a:t> State-of-the-art with advanced architectural innovations</a:t>
-            </a:r>
-          </a:p>
-        </p:txBody>
-      </p:sp>
+              </p:cNvPr>
+              <p:cNvSpPr txBox="1">
+                <a:spLocks noRot="1" noChangeAspect="1" noMove="1" noResize="1" noEditPoints="1" noAdjustHandles="1" noChangeArrowheads="1" noChangeShapeType="1" noTextEdit="1"/>
+              </p:cNvSpPr>
+              <p:nvPr/>
+            </p:nvSpPr>
+            <p:spPr>
+              <a:xfrm>
+                <a:off x="445168" y="2610853"/>
+                <a:ext cx="6817892" cy="3823226"/>
+              </a:xfrm>
+              <a:prstGeom prst="rect">
+                <a:avLst/>
+              </a:prstGeom>
+              <a:blipFill>
+                <a:blip r:embed="rId2"/>
+                <a:stretch>
+                  <a:fillRect l="-894" t="-957" r="-89" b="-2233"/>
+                </a:stretch>
+              </a:blipFill>
+            </p:spPr>
+            <p:txBody>
+              <a:bodyPr/>
+              <a:lstStyle/>
+              <a:p>
+                <a:r>
+                  <a:rPr lang="en-IN">
+                    <a:noFill/>
+                  </a:rPr>
+                  <a:t> </a:t>
+                </a:r>
+              </a:p>
+            </p:txBody>
+          </p:sp>
+        </mc:Fallback>
+      </mc:AlternateContent>
     </p:spTree>
     <p:extLst>
       <p:ext uri="{BB962C8B-B14F-4D97-AF65-F5344CB8AC3E}">
-        <p14:creationId xmlns:p14="http://schemas.microsoft.com/office/powerpoint/2010/main" val="1541546668"/>
+        <p14:creationId xmlns:p14="http://schemas.microsoft.com/office/powerpoint/2010/main" val="3552484170"/>
       </p:ext>
     </p:extLst>
   </p:cSld>
@@ -18674,7 +22466,7 @@
 </p:sld>
 </file>
 
-<file path=ppt/slides/slide6.xml><?xml version="1.0" encoding="utf-8"?>
+<file path=ppt/slides/slide9.xml><?xml version="1.0" encoding="utf-8"?>
 <p:sld xmlns:a="http://schemas.openxmlformats.org/drawingml/2006/main" xmlns:r="http://schemas.openxmlformats.org/officeDocument/2006/relationships" xmlns:p="http://schemas.openxmlformats.org/presentationml/2006/main">
   <p:cSld>
     <p:spTree>
@@ -18713,10 +22505,10 @@
           <a:lstStyle/>
           <a:p>
             <a:r>
-              <a:rPr lang="en-US" dirty="0">
-                <a:latin typeface="Barlow ExtraBold" panose="00000900000000000000" pitchFamily="2" charset="0"/>
-              </a:rPr>
-              <a:t>Optimizers Comparison (AdamW)</a:t>
+              <a:rPr lang="en-US" sz="2800" dirty="0">
+                <a:latin typeface="Barlow SemiBold" panose="00000700000000000000" pitchFamily="2" charset="0"/>
+              </a:rPr>
+              <a:t>AdamW Algorithm</a:t>
             </a:r>
           </a:p>
         </p:txBody>
@@ -18785,472 +22577,6 @@
     <p:extLst>
       <p:ext uri="{BB962C8B-B14F-4D97-AF65-F5344CB8AC3E}">
         <p14:creationId xmlns:p14="http://schemas.microsoft.com/office/powerpoint/2010/main" val="1729462857"/>
-      </p:ext>
-    </p:extLst>
-  </p:cSld>
-  <p:clrMapOvr>
-    <a:masterClrMapping/>
-  </p:clrMapOvr>
-</p:sld>
-</file>
-
-<file path=ppt/slides/slide7.xml><?xml version="1.0" encoding="utf-8"?>
-<p:sld xmlns:a="http://schemas.openxmlformats.org/drawingml/2006/main" xmlns:r="http://schemas.openxmlformats.org/officeDocument/2006/relationships" xmlns:p="http://schemas.openxmlformats.org/presentationml/2006/main">
-  <p:cSld>
-    <p:spTree>
-      <p:nvGrpSpPr>
-        <p:cNvPr id="1" name="">
-          <a:extLst>
-            <a:ext uri="{FF2B5EF4-FFF2-40B4-BE49-F238E27FC236}">
-              <a16:creationId xmlns:a16="http://schemas.microsoft.com/office/drawing/2014/main" id="{5FCC79B8-527C-C1F7-90FC-3D586AF97EF2}"/>
-            </a:ext>
-          </a:extLst>
-        </p:cNvPr>
-        <p:cNvGrpSpPr/>
-        <p:nvPr/>
-      </p:nvGrpSpPr>
-      <p:grpSpPr>
-        <a:xfrm>
-          <a:off x="0" y="0"/>
-          <a:ext cx="0" cy="0"/>
-          <a:chOff x="0" y="0"/>
-          <a:chExt cx="0" cy="0"/>
-        </a:xfrm>
-      </p:grpSpPr>
-      <p:sp>
-        <p:nvSpPr>
-          <p:cNvPr id="2" name="Title 1">
-            <a:extLst>
-              <a:ext uri="{FF2B5EF4-FFF2-40B4-BE49-F238E27FC236}">
-                <a16:creationId xmlns:a16="http://schemas.microsoft.com/office/drawing/2014/main" id="{E7D8AF39-4FFC-8AA2-DC58-E0E8CA1E1040}"/>
-              </a:ext>
-            </a:extLst>
-          </p:cNvPr>
-          <p:cNvSpPr>
-            <a:spLocks noGrp="1"/>
-          </p:cNvSpPr>
-          <p:nvPr>
-            <p:ph type="title"/>
-          </p:nvPr>
-        </p:nvSpPr>
-        <p:spPr bwMode="white"/>
-        <p:txBody>
-          <a:bodyPr/>
-          <a:lstStyle/>
-          <a:p>
-            <a:r>
-              <a:rPr lang="en-US" dirty="0">
-                <a:latin typeface="Barlow ExtraBold" panose="00000900000000000000" pitchFamily="2" charset="0"/>
-              </a:rPr>
-              <a:t>Optimizers Comparison (Lion)</a:t>
-            </a:r>
-          </a:p>
-        </p:txBody>
-      </p:sp>
-      <p:pic>
-        <p:nvPicPr>
-          <p:cNvPr id="8" name="@holatex&#10;\begin{document}&#10;\center&#10;\Large&#10;Lion Optimizer&#10;\medskip&#10;&#10;\begin{align}&#10;c_t &amp;= \beta_1 m_{t-1} + (1 - \beta_1) g_t \\&#10;\theta_t &amp;= \theta_{t-1} - \eta \left( \text{sign}(c_t) + \lambda \theta_{t-1} \right) \\&#10;m_t &amp;= \beta_2 m_{t-1} + (1 - \beta_2) g_t&#10;\end{align}&#10;&#10;\end{document}">
-            <a:extLst>
-              <a:ext uri="{FF2B5EF4-FFF2-40B4-BE49-F238E27FC236}">
-                <a16:creationId xmlns:a16="http://schemas.microsoft.com/office/drawing/2014/main" id="{5F20DDE9-9919-6AA6-57C5-2715FF742D7B}"/>
-              </a:ext>
-            </a:extLst>
-          </p:cNvPr>
-          <p:cNvPicPr>
-            <a:picLocks/>
-          </p:cNvPicPr>
-          <p:nvPr/>
-        </p:nvPicPr>
-        <p:blipFill>
-          <a:blip r:embed="rId3"/>
-          <a:stretch>
-            <a:fillRect/>
-          </a:stretch>
-        </p:blipFill>
-        <p:spPr>
-          <a:xfrm>
-            <a:off x="809999" y="3291364"/>
-            <a:ext cx="4599964" cy="2211814"/>
-          </a:xfrm>
-          <a:prstGeom prst="rect">
-            <a:avLst/>
-          </a:prstGeom>
-        </p:spPr>
-      </p:pic>
-      <p:pic>
-        <p:nvPicPr>
-          <p:cNvPr id="3" name="@holatex&#10;\begin{document}&#10;\center&#10;where:&#10;\begin{itemize}&#10;    \item $c_t$: interpolated momentum for update direction&#10;    \item $\text{sign}(\cdot)$: element-wise sign function&#10;    \item Other parameters follow similar definitions as AdamW&#10;\end{itemize}&#10;\end{document}">
-            <a:extLst>
-              <a:ext uri="{FF2B5EF4-FFF2-40B4-BE49-F238E27FC236}">
-                <a16:creationId xmlns:a16="http://schemas.microsoft.com/office/drawing/2014/main" id="{996BC0B4-312F-574A-8729-9E94B96A1AB9}"/>
-              </a:ext>
-            </a:extLst>
-          </p:cNvPr>
-          <p:cNvPicPr>
-            <a:picLocks/>
-          </p:cNvPicPr>
-          <p:nvPr/>
-        </p:nvPicPr>
-        <p:blipFill>
-          <a:blip r:embed="rId4"/>
-          <a:stretch>
-            <a:fillRect/>
-          </a:stretch>
-        </p:blipFill>
-        <p:spPr>
-          <a:xfrm>
-            <a:off x="6329956" y="3687882"/>
-            <a:ext cx="4599964" cy="1667013"/>
-          </a:xfrm>
-          <a:prstGeom prst="rect">
-            <a:avLst/>
-          </a:prstGeom>
-        </p:spPr>
-      </p:pic>
-    </p:spTree>
-    <p:extLst>
-      <p:ext uri="{BB962C8B-B14F-4D97-AF65-F5344CB8AC3E}">
-        <p14:creationId xmlns:p14="http://schemas.microsoft.com/office/powerpoint/2010/main" val="1087586266"/>
-      </p:ext>
-    </p:extLst>
-  </p:cSld>
-  <p:clrMapOvr>
-    <a:masterClrMapping/>
-  </p:clrMapOvr>
-</p:sld>
-</file>
-
-<file path=ppt/slides/slide8.xml><?xml version="1.0" encoding="utf-8"?>
-<p:sld xmlns:a="http://schemas.openxmlformats.org/drawingml/2006/main" xmlns:r="http://schemas.openxmlformats.org/officeDocument/2006/relationships" xmlns:p="http://schemas.openxmlformats.org/presentationml/2006/main">
-  <p:cSld>
-    <p:spTree>
-      <p:nvGrpSpPr>
-        <p:cNvPr id="1" name=""/>
-        <p:cNvGrpSpPr/>
-        <p:nvPr/>
-      </p:nvGrpSpPr>
-      <p:grpSpPr>
-        <a:xfrm>
-          <a:off x="0" y="0"/>
-          <a:ext cx="0" cy="0"/>
-          <a:chOff x="0" y="0"/>
-          <a:chExt cx="0" cy="0"/>
-        </a:xfrm>
-      </p:grpSpPr>
-      <p:sp>
-        <p:nvSpPr>
-          <p:cNvPr id="2" name="Title 1">
-            <a:extLst>
-              <a:ext uri="{FF2B5EF4-FFF2-40B4-BE49-F238E27FC236}">
-                <a16:creationId xmlns:a16="http://schemas.microsoft.com/office/drawing/2014/main" id="{E06B4AAE-A61A-4FE9-7D4D-04001D6A33A7}"/>
-              </a:ext>
-            </a:extLst>
-          </p:cNvPr>
-          <p:cNvSpPr>
-            <a:spLocks noGrp="1"/>
-          </p:cNvSpPr>
-          <p:nvPr>
-            <p:ph type="title"/>
-          </p:nvPr>
-        </p:nvSpPr>
-        <p:spPr/>
-        <p:txBody>
-          <a:bodyPr/>
-          <a:lstStyle/>
-          <a:p>
-            <a:r>
-              <a:rPr lang="en-GB" dirty="0">
-                <a:latin typeface="Barlow SemiBold" panose="00000700000000000000" pitchFamily="2" charset="0"/>
-              </a:rPr>
-              <a:t>Evaluation Metrices</a:t>
-            </a:r>
-            <a:endParaRPr lang="en-IN" dirty="0">
-              <a:latin typeface="Barlow SemiBold" panose="00000700000000000000" pitchFamily="2" charset="0"/>
-            </a:endParaRPr>
-          </a:p>
-        </p:txBody>
-      </p:sp>
-      <p:sp>
-        <p:nvSpPr>
-          <p:cNvPr id="6" name="TextBox 5">
-            <a:extLst>
-              <a:ext uri="{FF2B5EF4-FFF2-40B4-BE49-F238E27FC236}">
-                <a16:creationId xmlns:a16="http://schemas.microsoft.com/office/drawing/2014/main" id="{F72B3316-1ADE-DDFF-23B4-6BC8F225AD2A}"/>
-              </a:ext>
-            </a:extLst>
-          </p:cNvPr>
-          <p:cNvSpPr txBox="1"/>
-          <p:nvPr/>
-        </p:nvSpPr>
-        <p:spPr>
-          <a:xfrm>
-            <a:off x="527427" y="2346760"/>
-            <a:ext cx="8428911" cy="461665"/>
-          </a:xfrm>
-          <a:prstGeom prst="rect">
-            <a:avLst/>
-          </a:prstGeom>
-          <a:noFill/>
-        </p:spPr>
-        <p:txBody>
-          <a:bodyPr wrap="none" rtlCol="0">
-            <a:spAutoFit/>
-          </a:bodyPr>
-          <a:lstStyle/>
-          <a:p>
-            <a:r>
-              <a:rPr lang="en-GB" sz="2400" dirty="0">
-                <a:latin typeface="Barlow Medium" panose="00000600000000000000" pitchFamily="2" charset="0"/>
-              </a:rPr>
-              <a:t>NDCG@10 - Normalized Discounted Cumulative Gain at rank 10</a:t>
-            </a:r>
-          </a:p>
-        </p:txBody>
-      </p:sp>
-      <p:sp>
-        <p:nvSpPr>
-          <p:cNvPr id="7" name="TextBox 6">
-            <a:extLst>
-              <a:ext uri="{FF2B5EF4-FFF2-40B4-BE49-F238E27FC236}">
-                <a16:creationId xmlns:a16="http://schemas.microsoft.com/office/drawing/2014/main" id="{061EE149-ABB6-78F4-BB33-DDCA828B8076}"/>
-              </a:ext>
-            </a:extLst>
-          </p:cNvPr>
-          <p:cNvSpPr txBox="1"/>
-          <p:nvPr/>
-        </p:nvSpPr>
-        <p:spPr>
-          <a:xfrm>
-            <a:off x="527427" y="2906550"/>
-            <a:ext cx="8908852" cy="923330"/>
-          </a:xfrm>
-          <a:prstGeom prst="rect">
-            <a:avLst/>
-          </a:prstGeom>
-          <a:noFill/>
-        </p:spPr>
-        <p:txBody>
-          <a:bodyPr wrap="square" rtlCol="0">
-            <a:spAutoFit/>
-          </a:bodyPr>
-          <a:lstStyle/>
-          <a:p>
-            <a:r>
-              <a:rPr lang="en-GB" dirty="0">
-                <a:latin typeface="Barlow" panose="00000500000000000000" pitchFamily="2" charset="0"/>
-              </a:rPr>
-              <a:t>NDCG@10 measures the quality of ranking systems by considering both the relevance of retrieved documents and their positions in the ranking. It is normalized by the ideal DCG to ensure values between 0 and 1, where higher values indicate better performance.</a:t>
-            </a:r>
-          </a:p>
-        </p:txBody>
-      </p:sp>
-      <p:pic>
-        <p:nvPicPr>
-          <p:cNvPr id="8" name="@holatex&#10;\begin{document}&#10;\begin{equation}&#10;\text{NDCG@10} = \frac{\text{DCG@10}}{\text{IDCG@10}}&#10;\end{equation}&#10;&#10;where:&#10;\begin{equation}&#10;\text{DCG@10} = \sum_{i=1}^{10} \frac{2^{rel_i} - 1}{\log_2(i + 1)}&#10;\end{equation}&#10;&#10;and $rel_i$ is the relevance score of the document at position $i$, and IDCG@10 is the ideal DCG computed using the best possible ranking.&#10;&#10;\end{document}">
-            <a:extLst>
-              <a:ext uri="{FF2B5EF4-FFF2-40B4-BE49-F238E27FC236}">
-                <a16:creationId xmlns:a16="http://schemas.microsoft.com/office/drawing/2014/main" id="{E2452F6C-0672-68CF-1E6D-B7CB3B53A0CE}"/>
-              </a:ext>
-            </a:extLst>
-          </p:cNvPr>
-          <p:cNvPicPr>
-            <a:picLocks/>
-          </p:cNvPicPr>
-          <p:nvPr/>
-        </p:nvPicPr>
-        <p:blipFill>
-          <a:blip r:embed="rId2"/>
-          <a:stretch>
-            <a:fillRect/>
-          </a:stretch>
-        </p:blipFill>
-        <p:spPr>
-          <a:xfrm>
-            <a:off x="1117600" y="4383878"/>
-            <a:ext cx="6959600" cy="2026933"/>
-          </a:xfrm>
-          <a:prstGeom prst="rect">
-            <a:avLst/>
-          </a:prstGeom>
-        </p:spPr>
-      </p:pic>
-    </p:spTree>
-    <p:extLst>
-      <p:ext uri="{BB962C8B-B14F-4D97-AF65-F5344CB8AC3E}">
-        <p14:creationId xmlns:p14="http://schemas.microsoft.com/office/powerpoint/2010/main" val="1961845443"/>
-      </p:ext>
-    </p:extLst>
-  </p:cSld>
-  <p:clrMapOvr>
-    <a:masterClrMapping/>
-  </p:clrMapOvr>
-</p:sld>
-</file>
-
-<file path=ppt/slides/slide9.xml><?xml version="1.0" encoding="utf-8"?>
-<p:sld xmlns:a="http://schemas.openxmlformats.org/drawingml/2006/main" xmlns:r="http://schemas.openxmlformats.org/officeDocument/2006/relationships" xmlns:p="http://schemas.openxmlformats.org/presentationml/2006/main">
-  <p:cSld>
-    <p:spTree>
-      <p:nvGrpSpPr>
-        <p:cNvPr id="1" name="">
-          <a:extLst>
-            <a:ext uri="{FF2B5EF4-FFF2-40B4-BE49-F238E27FC236}">
-              <a16:creationId xmlns:a16="http://schemas.microsoft.com/office/drawing/2014/main" id="{4477D75B-E2A9-C4B3-3CD3-A5C406BB3419}"/>
-            </a:ext>
-          </a:extLst>
-        </p:cNvPr>
-        <p:cNvGrpSpPr/>
-        <p:nvPr/>
-      </p:nvGrpSpPr>
-      <p:grpSpPr>
-        <a:xfrm>
-          <a:off x="0" y="0"/>
-          <a:ext cx="0" cy="0"/>
-          <a:chOff x="0" y="0"/>
-          <a:chExt cx="0" cy="0"/>
-        </a:xfrm>
-      </p:grpSpPr>
-      <p:sp>
-        <p:nvSpPr>
-          <p:cNvPr id="2" name="Title 1">
-            <a:extLst>
-              <a:ext uri="{FF2B5EF4-FFF2-40B4-BE49-F238E27FC236}">
-                <a16:creationId xmlns:a16="http://schemas.microsoft.com/office/drawing/2014/main" id="{9DEBD66D-F91A-5ADF-6700-018F12C9F2FD}"/>
-              </a:ext>
-            </a:extLst>
-          </p:cNvPr>
-          <p:cNvSpPr>
-            <a:spLocks noGrp="1"/>
-          </p:cNvSpPr>
-          <p:nvPr>
-            <p:ph type="title"/>
-          </p:nvPr>
-        </p:nvSpPr>
-        <p:spPr/>
-        <p:txBody>
-          <a:bodyPr/>
-          <a:lstStyle/>
-          <a:p>
-            <a:r>
-              <a:rPr lang="en-GB" dirty="0">
-                <a:latin typeface="Barlow SemiBold" panose="00000700000000000000" pitchFamily="2" charset="0"/>
-              </a:rPr>
-              <a:t>Evaluation Metrices</a:t>
-            </a:r>
-            <a:endParaRPr lang="en-IN" dirty="0">
-              <a:latin typeface="Barlow SemiBold" panose="00000700000000000000" pitchFamily="2" charset="0"/>
-            </a:endParaRPr>
-          </a:p>
-        </p:txBody>
-      </p:sp>
-      <p:sp>
-        <p:nvSpPr>
-          <p:cNvPr id="6" name="TextBox 5">
-            <a:extLst>
-              <a:ext uri="{FF2B5EF4-FFF2-40B4-BE49-F238E27FC236}">
-                <a16:creationId xmlns:a16="http://schemas.microsoft.com/office/drawing/2014/main" id="{08A70968-9E81-C503-0B4B-8B6C48D7B9E3}"/>
-              </a:ext>
-            </a:extLst>
-          </p:cNvPr>
-          <p:cNvSpPr txBox="1"/>
-          <p:nvPr/>
-        </p:nvSpPr>
-        <p:spPr>
-          <a:xfrm>
-            <a:off x="527427" y="2346760"/>
-            <a:ext cx="5843266" cy="461665"/>
-          </a:xfrm>
-          <a:prstGeom prst="rect">
-            <a:avLst/>
-          </a:prstGeom>
-          <a:noFill/>
-        </p:spPr>
-        <p:txBody>
-          <a:bodyPr wrap="none" rtlCol="0">
-            <a:spAutoFit/>
-          </a:bodyPr>
-          <a:lstStyle/>
-          <a:p>
-            <a:r>
-              <a:rPr lang="en-GB" sz="2400" dirty="0">
-                <a:latin typeface="Barlow Medium" panose="00000600000000000000" pitchFamily="2" charset="0"/>
-              </a:rPr>
-              <a:t>MRR@10 (Mean Reciprocal Rank at rank 10)</a:t>
-            </a:r>
-          </a:p>
-        </p:txBody>
-      </p:sp>
-      <p:sp>
-        <p:nvSpPr>
-          <p:cNvPr id="7" name="TextBox 6">
-            <a:extLst>
-              <a:ext uri="{FF2B5EF4-FFF2-40B4-BE49-F238E27FC236}">
-                <a16:creationId xmlns:a16="http://schemas.microsoft.com/office/drawing/2014/main" id="{6DE2AE7A-E951-4E0D-A276-9B350F53C9C0}"/>
-              </a:ext>
-            </a:extLst>
-          </p:cNvPr>
-          <p:cNvSpPr txBox="1"/>
-          <p:nvPr/>
-        </p:nvSpPr>
-        <p:spPr>
-          <a:xfrm>
-            <a:off x="527427" y="2906550"/>
-            <a:ext cx="8908852" cy="923330"/>
-          </a:xfrm>
-          <a:prstGeom prst="rect">
-            <a:avLst/>
-          </a:prstGeom>
-          <a:noFill/>
-        </p:spPr>
-        <p:txBody>
-          <a:bodyPr wrap="square" rtlCol="0">
-            <a:spAutoFit/>
-          </a:bodyPr>
-          <a:lstStyle/>
-          <a:p>
-            <a:r>
-              <a:rPr lang="en-GB" dirty="0">
-                <a:latin typeface="Barlow" panose="00000500000000000000" pitchFamily="2" charset="0"/>
-              </a:rPr>
-              <a:t>MRR@10 measures the average of reciprocal ranks of the first relevant document found within the top 10 results across all queries. It emphasizes finding at least one relevant document early in the ranking.</a:t>
-            </a:r>
-          </a:p>
-        </p:txBody>
-      </p:sp>
-      <p:pic>
-        <p:nvPicPr>
-          <p:cNvPr id="3" name="@holatex&#10;\begin{document}&#10;\begin{equation}&#10;\text{MRR@10} = \frac{1}{|Q|} \sum_{q=1}^{|Q|} \frac{1}{\text{rank}_q}&#10;\end{equation}&#10;&#10;where $\text{rank}_q$ is the position of the first relevant document for query $q$ within the top 10 results. If no relevant document is found in the top 10, the reciprocal rank is 0.&#10;&#10;\end{document}">
-            <a:extLst>
-              <a:ext uri="{FF2B5EF4-FFF2-40B4-BE49-F238E27FC236}">
-                <a16:creationId xmlns:a16="http://schemas.microsoft.com/office/drawing/2014/main" id="{16C35BE9-305F-19E8-B78E-0573479DA125}"/>
-              </a:ext>
-            </a:extLst>
-          </p:cNvPr>
-          <p:cNvPicPr>
-            <a:picLocks/>
-          </p:cNvPicPr>
-          <p:nvPr/>
-        </p:nvPicPr>
-        <p:blipFill>
-          <a:blip r:embed="rId2"/>
-          <a:stretch>
-            <a:fillRect/>
-          </a:stretch>
-        </p:blipFill>
-        <p:spPr>
-          <a:xfrm>
-            <a:off x="1925767" y="4488752"/>
-            <a:ext cx="6345777" cy="1660080"/>
-          </a:xfrm>
-          <a:prstGeom prst="rect">
-            <a:avLst/>
-          </a:prstGeom>
-        </p:spPr>
-      </p:pic>
-    </p:spTree>
-    <p:extLst>
-      <p:ext uri="{BB962C8B-B14F-4D97-AF65-F5344CB8AC3E}">
-        <p14:creationId xmlns:p14="http://schemas.microsoft.com/office/powerpoint/2010/main" val="2752368493"/>
       </p:ext>
     </p:extLst>
   </p:cSld>
@@ -20108,6 +23434,15 @@
 </file>
 
 <file path=customXml/item1.xml><?xml version="1.0" encoding="utf-8"?>
+<?mso-contentType ?>
+<FormTemplates xmlns="http://schemas.microsoft.com/sharepoint/v3/contenttype/forms">
+  <Display>DocumentLibraryForm</Display>
+  <Edit>DocumentLibraryForm</Edit>
+  <New>DocumentLibraryForm</New>
+</FormTemplates>
+</file>
+
+<file path=customXml/item2.xml><?xml version="1.0" encoding="utf-8"?>
 <p:properties xmlns:p="http://schemas.microsoft.com/office/2006/metadata/properties" xmlns:xsi="http://www.w3.org/2001/XMLSchema-instance" xmlns:pc="http://schemas.microsoft.com/office/infopath/2007/PartnerControls">
   <documentManagement>
     <_ip_UnifiedCompliancePolicyUIAction xmlns="http://schemas.microsoft.com/sharepoint/v3" xsi:nil="true"/>
@@ -20125,15 +23460,6 @@
     <MediaServiceKeyPoints xmlns="71af3243-3dd4-4a8d-8c0d-dd76da1f02a5" xsi:nil="true"/>
   </documentManagement>
 </p:properties>
-</file>
-
-<file path=customXml/item2.xml><?xml version="1.0" encoding="utf-8"?>
-<?mso-contentType ?>
-<FormTemplates xmlns="http://schemas.microsoft.com/sharepoint/v3/contenttype/forms">
-  <Display>DocumentLibraryForm</Display>
-  <Edit>DocumentLibraryForm</Edit>
-  <New>DocumentLibraryForm</New>
-</FormTemplates>
 </file>
 
 <file path=customXml/item3.xml><?xml version="1.0" encoding="utf-8"?>
@@ -20425,21 +23751,28 @@
 </file>
 
 <file path=customXml/itemProps1.xml><?xml version="1.0" encoding="utf-8"?>
-<ds:datastoreItem xmlns:ds="http://schemas.openxmlformats.org/officeDocument/2006/customXml" ds:itemID="{BC8413E5-0484-489B-B293-D8720B6027F2}">
+<ds:datastoreItem xmlns:ds="http://schemas.openxmlformats.org/officeDocument/2006/customXml" ds:itemID="{019B3EA6-E2E1-4B68-B700-9432F9FC79DA}">
   <ds:schemaRefs>
-    <ds:schemaRef ds:uri="http://schemas.microsoft.com/office/2006/metadata/properties"/>
-    <ds:schemaRef ds:uri="http://schemas.microsoft.com/office/infopath/2007/PartnerControls"/>
-    <ds:schemaRef ds:uri="http://schemas.microsoft.com/sharepoint/v3"/>
-    <ds:schemaRef ds:uri="71af3243-3dd4-4a8d-8c0d-dd76da1f02a5"/>
-    <ds:schemaRef ds:uri="230e9df3-be65-4c73-a93b-d1236ebd677e"/>
+    <ds:schemaRef ds:uri="http://schemas.microsoft.com/sharepoint/v3/contenttype/forms"/>
   </ds:schemaRefs>
 </ds:datastoreItem>
 </file>
 
 <file path=customXml/itemProps2.xml><?xml version="1.0" encoding="utf-8"?>
-<ds:datastoreItem xmlns:ds="http://schemas.openxmlformats.org/officeDocument/2006/customXml" ds:itemID="{019B3EA6-E2E1-4B68-B700-9432F9FC79DA}">
+<ds:datastoreItem xmlns:ds="http://schemas.openxmlformats.org/officeDocument/2006/customXml" ds:itemID="{BC8413E5-0484-489B-B293-D8720B6027F2}">
   <ds:schemaRefs>
-    <ds:schemaRef ds:uri="http://schemas.microsoft.com/sharepoint/v3/contenttype/forms"/>
+    <ds:schemaRef ds:uri="16c05727-aa75-4e4a-9b5f-8a80a1165891"/>
+    <ds:schemaRef ds:uri="http://purl.org/dc/terms/"/>
+    <ds:schemaRef ds:uri="http://schemas.microsoft.com/office/2006/metadata/properties"/>
+    <ds:schemaRef ds:uri="http://schemas.microsoft.com/office/infopath/2007/PartnerControls"/>
+    <ds:schemaRef ds:uri="http://www.w3.org/XML/1998/namespace"/>
+    <ds:schemaRef ds:uri="http://schemas.microsoft.com/office/2006/documentManagement/types"/>
+    <ds:schemaRef ds:uri="http://schemas.openxmlformats.org/package/2006/metadata/core-properties"/>
+    <ds:schemaRef ds:uri="71af3243-3dd4-4a8d-8c0d-dd76da1f02a5"/>
+    <ds:schemaRef ds:uri="230e9df3-be65-4c73-a93b-d1236ebd677e"/>
+    <ds:schemaRef ds:uri="http://schemas.microsoft.com/sharepoint/v3"/>
+    <ds:schemaRef ds:uri="http://purl.org/dc/dcmitype/"/>
+    <ds:schemaRef ds:uri="http://purl.org/dc/elements/1.1/"/>
   </ds:schemaRefs>
 </ds:datastoreItem>
 </file>

--- a/cross_encoder/thesis/Thesis_presentation.pptx
+++ b/cross_encoder/thesis/Thesis_presentation.pptx
@@ -242,7 +242,7 @@
           <a:p>
             <a:fld id="{8E836F02-AF67-416B-AB85-08CFF698F86D}" type="datetimeFigureOut">
               <a:rPr lang="en-US" smtClean="0"/>
-              <a:t>6/21/2025</a:t>
+              <a:t>6/22/2025</a:t>
             </a:fld>
             <a:endParaRPr lang="en-US" dirty="0"/>
           </a:p>
@@ -419,7 +419,7 @@
           <a:p>
             <a:fld id="{45B7E8F0-931C-4E43-98D1-A3CD0E0034DC}" type="datetimeFigureOut">
               <a:rPr lang="en-US" smtClean="0"/>
-              <a:t>6/21/2025</a:t>
+              <a:t>6/22/2025</a:t>
             </a:fld>
             <a:endParaRPr lang="en-US" dirty="0"/>
           </a:p>
@@ -2769,7 +2769,7 @@
           </a:effectLst>
           <a:extLst>
             <a:ext uri="{91240B29-F687-4f45-9708-019B960494DF}">
-              <a14:hiddenLine xmlns="" xmlns:a14="http://schemas.microsoft.com/office/drawing/2010/main" w="9525">
+              <a14:hiddenLine xmlns:a14="http://schemas.microsoft.com/office/drawing/2010/main" xmlns="" w="9525">
                 <a:solidFill>
                   <a:srgbClr val="000000"/>
                 </a:solidFill>
@@ -2961,7 +2961,7 @@
           <a:p>
             <a:fld id="{FB7F6C47-B260-4BB6-8230-7D14D5CDE026}" type="datetimeFigureOut">
               <a:rPr lang="en-US" noProof="0" smtClean="0"/>
-              <a:t>6/21/2025</a:t>
+              <a:t>6/22/2025</a:t>
             </a:fld>
             <a:endParaRPr lang="en-US" noProof="0" dirty="0"/>
           </a:p>
@@ -3320,7 +3320,7 @@
           <a:p>
             <a:fld id="{FB7F6C47-B260-4BB6-8230-7D14D5CDE026}" type="datetimeFigureOut">
               <a:rPr lang="en-US" noProof="0" smtClean="0"/>
-              <a:t>6/21/2025</a:t>
+              <a:t>6/22/2025</a:t>
             </a:fld>
             <a:endParaRPr lang="en-US" noProof="0" dirty="0"/>
           </a:p>
@@ -3497,7 +3497,7 @@
           </a:effectLst>
           <a:extLst>
             <a:ext uri="{91240B29-F687-4f45-9708-019B960494DF}">
-              <a14:hiddenLine xmlns="" xmlns:a14="http://schemas.microsoft.com/office/drawing/2010/main" w="9525">
+              <a14:hiddenLine xmlns:a14="http://schemas.microsoft.com/office/drawing/2010/main" xmlns="" w="9525">
                 <a:solidFill>
                   <a:srgbClr val="000000"/>
                 </a:solidFill>
@@ -3825,7 +3825,7 @@
           <a:p>
             <a:fld id="{FB7F6C47-B260-4BB6-8230-7D14D5CDE026}" type="datetimeFigureOut">
               <a:rPr lang="en-US" noProof="0" smtClean="0"/>
-              <a:t>6/21/2025</a:t>
+              <a:t>6/22/2025</a:t>
             </a:fld>
             <a:endParaRPr lang="en-US" noProof="0" dirty="0"/>
           </a:p>
@@ -4002,7 +4002,7 @@
           </a:effectLst>
           <a:extLst>
             <a:ext uri="{91240B29-F687-4f45-9708-019B960494DF}">
-              <a14:hiddenLine xmlns="" xmlns:a14="http://schemas.microsoft.com/office/drawing/2010/main" w="9525">
+              <a14:hiddenLine xmlns:a14="http://schemas.microsoft.com/office/drawing/2010/main" xmlns="" w="9525">
                 <a:solidFill>
                   <a:srgbClr val="000000"/>
                 </a:solidFill>
@@ -4077,7 +4077,7 @@
           <a:p>
             <a:fld id="{FB7F6C47-B260-4BB6-8230-7D14D5CDE026}" type="datetimeFigureOut">
               <a:rPr lang="en-US" noProof="0" smtClean="0"/>
-              <a:t>6/21/2025</a:t>
+              <a:t>6/22/2025</a:t>
             </a:fld>
             <a:endParaRPr lang="en-US" noProof="0" dirty="0"/>
           </a:p>
@@ -4193,7 +4193,7 @@
           <a:p>
             <a:fld id="{FB7F6C47-B260-4BB6-8230-7D14D5CDE026}" type="datetimeFigureOut">
               <a:rPr lang="en-US" noProof="0" smtClean="0"/>
-              <a:t>6/21/2025</a:t>
+              <a:t>6/22/2025</a:t>
             </a:fld>
             <a:endParaRPr lang="en-US" noProof="0" dirty="0"/>
           </a:p>
@@ -4481,7 +4481,7 @@
           </a:effectLst>
           <a:extLst>
             <a:ext uri="{91240B29-F687-4f45-9708-019B960494DF}">
-              <a14:hiddenLine xmlns="" xmlns:a14="http://schemas.microsoft.com/office/drawing/2010/main" w="9525">
+              <a14:hiddenLine xmlns:a14="http://schemas.microsoft.com/office/drawing/2010/main" xmlns="" w="9525">
                 <a:solidFill>
                   <a:srgbClr val="000000"/>
                 </a:solidFill>
@@ -4686,7 +4686,7 @@
           <a:p>
             <a:fld id="{FB7F6C47-B260-4BB6-8230-7D14D5CDE026}" type="datetimeFigureOut">
               <a:rPr lang="en-US" noProof="0" smtClean="0"/>
-              <a:t>6/21/2025</a:t>
+              <a:t>6/22/2025</a:t>
             </a:fld>
             <a:endParaRPr lang="en-US" noProof="0" dirty="0"/>
           </a:p>
@@ -5201,7 +5201,7 @@
           <a:p>
             <a:fld id="{FB7F6C47-B260-4BB6-8230-7D14D5CDE026}" type="datetimeFigureOut">
               <a:rPr lang="en-US" noProof="0" smtClean="0"/>
-              <a:t>6/21/2025</a:t>
+              <a:t>6/22/2025</a:t>
             </a:fld>
             <a:endParaRPr lang="en-US" noProof="0" dirty="0"/>
           </a:p>
@@ -5597,7 +5597,7 @@
           <a:p>
             <a:fld id="{FB7F6C47-B260-4BB6-8230-7D14D5CDE026}" type="datetimeFigureOut">
               <a:rPr lang="en-US" noProof="0" smtClean="0"/>
-              <a:t>6/21/2025</a:t>
+              <a:t>6/22/2025</a:t>
             </a:fld>
             <a:endParaRPr lang="en-US" noProof="0" dirty="0"/>
           </a:p>
@@ -5776,7 +5776,7 @@
           </a:effectLst>
           <a:extLst>
             <a:ext uri="{91240B29-F687-4f45-9708-019B960494DF}">
-              <a14:hiddenLine xmlns="" xmlns:a14="http://schemas.microsoft.com/office/drawing/2010/main" w="9525">
+              <a14:hiddenLine xmlns:a14="http://schemas.microsoft.com/office/drawing/2010/main" xmlns="" w="9525">
                 <a:solidFill>
                   <a:srgbClr val="000000"/>
                 </a:solidFill>
@@ -5928,7 +5928,7 @@
           <a:p>
             <a:fld id="{FB7F6C47-B260-4BB6-8230-7D14D5CDE026}" type="datetimeFigureOut">
               <a:rPr lang="en-US" noProof="0" smtClean="0"/>
-              <a:t>6/21/2025</a:t>
+              <a:t>6/22/2025</a:t>
             </a:fld>
             <a:endParaRPr lang="en-US" noProof="0" dirty="0"/>
           </a:p>
@@ -6105,7 +6105,7 @@
           </a:effectLst>
           <a:extLst>
             <a:ext uri="{91240B29-F687-4f45-9708-019B960494DF}">
-              <a14:hiddenLine xmlns="" xmlns:a14="http://schemas.microsoft.com/office/drawing/2010/main" w="9525">
+              <a14:hiddenLine xmlns:a14="http://schemas.microsoft.com/office/drawing/2010/main" xmlns="" w="9525">
                 <a:solidFill>
                   <a:srgbClr val="000000"/>
                 </a:solidFill>
@@ -6326,7 +6326,7 @@
           <a:p>
             <a:fld id="{FB7F6C47-B260-4BB6-8230-7D14D5CDE026}" type="datetimeFigureOut">
               <a:rPr lang="en-US" noProof="0" smtClean="0"/>
-              <a:t>6/21/2025</a:t>
+              <a:t>6/22/2025</a:t>
             </a:fld>
             <a:endParaRPr lang="en-US" noProof="0" dirty="0"/>
           </a:p>
@@ -6578,7 +6578,7 @@
           <a:p>
             <a:fld id="{FB7F6C47-B260-4BB6-8230-7D14D5CDE026}" type="datetimeFigureOut">
               <a:rPr lang="en-US" noProof="0" smtClean="0"/>
-              <a:t>6/21/2025</a:t>
+              <a:t>6/22/2025</a:t>
             </a:fld>
             <a:endParaRPr lang="en-US" noProof="0" dirty="0"/>
           </a:p>
@@ -6755,7 +6755,7 @@
           </a:effectLst>
           <a:extLst>
             <a:ext uri="{91240B29-F687-4f45-9708-019B960494DF}">
-              <a14:hiddenLine xmlns="" xmlns:a14="http://schemas.microsoft.com/office/drawing/2010/main" w="9525">
+              <a14:hiddenLine xmlns:a14="http://schemas.microsoft.com/office/drawing/2010/main" xmlns="" w="9525">
                 <a:solidFill>
                   <a:srgbClr val="000000"/>
                 </a:solidFill>
@@ -6998,7 +6998,7 @@
           <a:p>
             <a:fld id="{FB7F6C47-B260-4BB6-8230-7D14D5CDE026}" type="datetimeFigureOut">
               <a:rPr lang="en-US" noProof="0" smtClean="0"/>
-              <a:t>6/21/2025</a:t>
+              <a:t>6/22/2025</a:t>
             </a:fld>
             <a:endParaRPr lang="en-US" noProof="0" dirty="0"/>
           </a:p>
@@ -7175,7 +7175,7 @@
           </a:effectLst>
           <a:extLst>
             <a:ext uri="{91240B29-F687-4f45-9708-019B960494DF}">
-              <a14:hiddenLine xmlns="" xmlns:a14="http://schemas.microsoft.com/office/drawing/2010/main" w="9525">
+              <a14:hiddenLine xmlns:a14="http://schemas.microsoft.com/office/drawing/2010/main" xmlns="" w="9525">
                 <a:solidFill>
                   <a:srgbClr val="000000"/>
                 </a:solidFill>
@@ -7412,7 +7412,7 @@
           <a:p>
             <a:fld id="{FB7F6C47-B260-4BB6-8230-7D14D5CDE026}" type="datetimeFigureOut">
               <a:rPr lang="en-US" noProof="0" smtClean="0"/>
-              <a:t>6/21/2025</a:t>
+              <a:t>6/22/2025</a:t>
             </a:fld>
             <a:endParaRPr lang="en-US" noProof="0" dirty="0"/>
           </a:p>
@@ -7835,7 +7835,7 @@
           <a:p>
             <a:fld id="{FB7F6C47-B260-4BB6-8230-7D14D5CDE026}" type="datetimeFigureOut">
               <a:rPr lang="en-US" noProof="0" smtClean="0"/>
-              <a:t>6/21/2025</a:t>
+              <a:t>6/22/2025</a:t>
             </a:fld>
             <a:endParaRPr lang="en-US" noProof="0" dirty="0"/>
           </a:p>
@@ -8012,7 +8012,7 @@
           </a:effectLst>
           <a:extLst>
             <a:ext uri="{91240B29-F687-4f45-9708-019B960494DF}">
-              <a14:hiddenLine xmlns="" xmlns:a14="http://schemas.microsoft.com/office/drawing/2010/main" w="9525">
+              <a14:hiddenLine xmlns:a14="http://schemas.microsoft.com/office/drawing/2010/main" xmlns="" w="9525">
                 <a:solidFill>
                   <a:srgbClr val="000000"/>
                 </a:solidFill>
@@ -8162,7 +8162,7 @@
           <a:p>
             <a:fld id="{FB7F6C47-B260-4BB6-8230-7D14D5CDE026}" type="datetimeFigureOut">
               <a:rPr lang="en-US" noProof="0" smtClean="0"/>
-              <a:t>6/21/2025</a:t>
+              <a:t>6/22/2025</a:t>
             </a:fld>
             <a:endParaRPr lang="en-US" noProof="0" dirty="0"/>
           </a:p>
@@ -8726,7 +8726,7 @@
           <a:p>
             <a:fld id="{FB7F6C47-B260-4BB6-8230-7D14D5CDE026}" type="datetimeFigureOut">
               <a:rPr lang="en-US" noProof="0" smtClean="0"/>
-              <a:t>6/21/2025</a:t>
+              <a:t>6/22/2025</a:t>
             </a:fld>
             <a:endParaRPr lang="en-US" noProof="0" dirty="0"/>
           </a:p>
@@ -8903,7 +8903,7 @@
           </a:effectLst>
           <a:extLst>
             <a:ext uri="{91240B29-F687-4f45-9708-019B960494DF}">
-              <a14:hiddenLine xmlns="" xmlns:a14="http://schemas.microsoft.com/office/drawing/2010/main" w="9525">
+              <a14:hiddenLine xmlns:a14="http://schemas.microsoft.com/office/drawing/2010/main" xmlns="" w="9525">
                 <a:solidFill>
                   <a:srgbClr val="000000"/>
                 </a:solidFill>
@@ -9041,7 +9041,7 @@
           <a:p>
             <a:fld id="{FB7F6C47-B260-4BB6-8230-7D14D5CDE026}" type="datetimeFigureOut">
               <a:rPr lang="en-US" noProof="0" smtClean="0"/>
-              <a:t>6/21/2025</a:t>
+              <a:t>6/22/2025</a:t>
             </a:fld>
             <a:endParaRPr lang="en-US" noProof="0" dirty="0"/>
           </a:p>
@@ -9305,7 +9305,7 @@
           <a:p>
             <a:fld id="{FB7F6C47-B260-4BB6-8230-7D14D5CDE026}" type="datetimeFigureOut">
               <a:rPr lang="en-US" noProof="0" smtClean="0"/>
-              <a:t>6/21/2025</a:t>
+              <a:t>6/22/2025</a:t>
             </a:fld>
             <a:endParaRPr lang="en-US" noProof="0" dirty="0"/>
           </a:p>
@@ -9956,8 +9956,8 @@
         </p:nvSpPr>
         <p:spPr>
           <a:xfrm>
-            <a:off x="421105" y="2346158"/>
-            <a:ext cx="7130478" cy="4401205"/>
+            <a:off x="469232" y="2117892"/>
+            <a:ext cx="7173759" cy="4401205"/>
           </a:xfrm>
           <a:prstGeom prst="rect">
             <a:avLst/>
@@ -9987,17 +9987,8 @@
               <a:rPr lang="en-IN" sz="2000" dirty="0">
                 <a:latin typeface="Barlow" panose="00000500000000000000" pitchFamily="2" charset="0"/>
               </a:rPr>
-              <a:t>• Sign-based momentum: update = sign(momentum) × </a:t>
-            </a:r>
-            <a:r>
-              <a:rPr lang="en-IN" sz="2000" dirty="0" err="1">
-                <a:latin typeface="Barlow" panose="00000500000000000000" pitchFamily="2" charset="0"/>
-              </a:rPr>
-              <a:t>lr</a:t>
-            </a:r>
-            <a:endParaRPr lang="en-IN" sz="2000" dirty="0">
-              <a:latin typeface="Barlow" panose="00000500000000000000" pitchFamily="2" charset="0"/>
-            </a:endParaRPr>
+              <a:t>• Sign-based momentum</a:t>
+            </a:r>
           </a:p>
           <a:p>
             <a:r>
@@ -20111,19 +20102,7 @@
               <a:rPr lang="en-IN" sz="2000" dirty="0">
                 <a:latin typeface="Barlow" panose="00000500000000000000" pitchFamily="2" charset="0"/>
               </a:rPr>
-              <a:t>R. Nogueira and K. Cho, "Passage Re-ranking with BERT," </a:t>
-            </a:r>
-            <a:r>
-              <a:rPr lang="en-IN" sz="2000" dirty="0" err="1">
-                <a:latin typeface="Barlow" panose="00000500000000000000" pitchFamily="2" charset="0"/>
-              </a:rPr>
-              <a:t>arXiv</a:t>
-            </a:r>
-            <a:r>
-              <a:rPr lang="en-IN" sz="2000" dirty="0">
-                <a:latin typeface="Barlow" panose="00000500000000000000" pitchFamily="2" charset="0"/>
-              </a:rPr>
-              <a:t> preprint arXiv:1901.04085, 2020.</a:t>
+              <a:t>R. Nogueira and K. Cho, "Passage Re-ranking with BERT," arXiv preprint arXiv:1901.04085, 2020.</a:t>
             </a:r>
           </a:p>
           <a:p>
@@ -20165,13 +20144,7 @@
               <a:rPr lang="en-IN" sz="2000" i="1" dirty="0">
                 <a:latin typeface="Barlow" panose="00000500000000000000" pitchFamily="2" charset="0"/>
               </a:rPr>
-              <a:t>Proc. </a:t>
-            </a:r>
-            <a:r>
-              <a:rPr lang="en-IN" sz="2000" i="1" dirty="0" err="1">
-                <a:latin typeface="Barlow" panose="00000500000000000000" pitchFamily="2" charset="0"/>
-              </a:rPr>
-              <a:t>NeurIPS</a:t>
+              <a:t>Proc. NeurIPS</a:t>
             </a:r>
             <a:r>
               <a:rPr lang="en-IN" sz="2000" dirty="0">
@@ -20201,19 +20174,7 @@
               <a:rPr lang="en-IN" sz="2000" dirty="0">
                 <a:latin typeface="Barlow" panose="00000500000000000000" pitchFamily="2" charset="0"/>
               </a:rPr>
-              <a:t>Z. Zhang et al., "ModernBERT: Efficient Transformer for Language Understanding," </a:t>
-            </a:r>
-            <a:r>
-              <a:rPr lang="en-IN" sz="2000" dirty="0" err="1">
-                <a:latin typeface="Barlow" panose="00000500000000000000" pitchFamily="2" charset="0"/>
-              </a:rPr>
-              <a:t>arXiv</a:t>
-            </a:r>
-            <a:r>
-              <a:rPr lang="en-IN" sz="2000" dirty="0">
-                <a:latin typeface="Barlow" panose="00000500000000000000" pitchFamily="2" charset="0"/>
-              </a:rPr>
-              <a:t> preprint arXiv:2401.12345, 2024.</a:t>
+              <a:t>Z. Zhang et al., "ModernBERT: Efficient Transformer for Language Understanding," arXiv preprint arXiv:2401.12345, 2024.</a:t>
             </a:r>
           </a:p>
           <a:p>
@@ -20225,19 +20186,7 @@
               <a:rPr lang="en-IN" sz="2000" dirty="0">
                 <a:latin typeface="Barlow" panose="00000500000000000000" pitchFamily="2" charset="0"/>
               </a:rPr>
-              <a:t>H. Deng, X. Zhang, Y. Liu, J. Li, Y. Wu, and Y. Zhang, "GTE: General Text Embeddings from Large-Scale Multilingual Retrieval," </a:t>
-            </a:r>
-            <a:r>
-              <a:rPr lang="en-IN" sz="2000" dirty="0" err="1">
-                <a:latin typeface="Barlow" panose="00000500000000000000" pitchFamily="2" charset="0"/>
-              </a:rPr>
-              <a:t>arXiv</a:t>
-            </a:r>
-            <a:r>
-              <a:rPr lang="en-IN" sz="2000" dirty="0">
-                <a:latin typeface="Barlow" panose="00000500000000000000" pitchFamily="2" charset="0"/>
-              </a:rPr>
-              <a:t> preprint arXiv:2402.03620, 2024.</a:t>
+              <a:t>H. Deng, X. Zhang, Y. Liu, J. Li, Y. Wu, and Y. Zhang, "GTE: General Text Embeddings from Large-Scale Multilingual Retrieval," arXiv preprint arXiv:2402.03620, 2024.</a:t>
             </a:r>
           </a:p>
           <a:p>
@@ -20249,19 +20198,7 @@
               <a:rPr lang="en-IN" sz="2000" dirty="0">
                 <a:latin typeface="Barlow" panose="00000500000000000000" pitchFamily="2" charset="0"/>
               </a:rPr>
-              <a:t>C. Lin, B. Yang, D. Nogueira, J. Lin, and M. Ma, "The TREC 2019 Deep Learning Track Overview," in Proc. Text </a:t>
-            </a:r>
-            <a:r>
-              <a:rPr lang="en-IN" sz="2000" dirty="0" err="1">
-                <a:latin typeface="Barlow" panose="00000500000000000000" pitchFamily="2" charset="0"/>
-              </a:rPr>
-              <a:t>REtrieval</a:t>
-            </a:r>
-            <a:r>
-              <a:rPr lang="en-IN" sz="2000" dirty="0">
-                <a:latin typeface="Barlow" panose="00000500000000000000" pitchFamily="2" charset="0"/>
-              </a:rPr>
-              <a:t> Conference (TREC), Gaithersburg, MD, USA, 2019.</a:t>
+              <a:t>C. Lin, B. Yang, D. Nogueira, J. Lin, and M. Ma, "The TREC 2019 Deep Learning Track Overview," in Proc. Text REtrieval Conference (TREC), Gaithersburg, MD, USA, 2019.</a:t>
             </a:r>
           </a:p>
         </p:txBody>
@@ -20376,31 +20313,7 @@
               <a:rPr lang="en-IN" sz="2000" dirty="0">
                 <a:latin typeface="Barlow" panose="00000500000000000000" pitchFamily="2" charset="0"/>
               </a:rPr>
-              <a:t>T. Nguyen, M. Rosenberg, X. Song, J. Gao, S. Tiwary, R. Majumder, and L. Deng, "MS MARCO: A Human Generated </a:t>
-            </a:r>
-            <a:r>
-              <a:rPr lang="en-IN" sz="2000" dirty="0" err="1">
-                <a:latin typeface="Barlow" panose="00000500000000000000" pitchFamily="2" charset="0"/>
-              </a:rPr>
-              <a:t>MAchine</a:t>
-            </a:r>
-            <a:r>
-              <a:rPr lang="en-IN" sz="2000" dirty="0">
-                <a:latin typeface="Barlow" panose="00000500000000000000" pitchFamily="2" charset="0"/>
-              </a:rPr>
-              <a:t> Reading </a:t>
-            </a:r>
-            <a:r>
-              <a:rPr lang="en-IN" sz="2000" dirty="0" err="1">
-                <a:latin typeface="Barlow" panose="00000500000000000000" pitchFamily="2" charset="0"/>
-              </a:rPr>
-              <a:t>COmprehension</a:t>
-            </a:r>
-            <a:r>
-              <a:rPr lang="en-IN" sz="2000" dirty="0">
-                <a:latin typeface="Barlow" panose="00000500000000000000" pitchFamily="2" charset="0"/>
-              </a:rPr>
-              <a:t> Dataset," in Proc. Workshop on Cognitive Computing (WCC), 2016. [Online]. Available: </a:t>
+              <a:t>T. Nguyen, M. Rosenberg, X. Song, J. Gao, S. Tiwary, R. Majumder, and L. Deng, "MS MARCO: A Human Generated MAchine Reading COmprehension Dataset," in Proc. Workshop on Cognitive Computing (WCC), 2016. [Online]. Available: </a:t>
             </a:r>
             <a:r>
               <a:rPr lang="en-IN" sz="2000" dirty="0">
@@ -20446,31 +20359,7 @@
               <a:rPr lang="en-IN" sz="2000" dirty="0">
                 <a:latin typeface="Barlow" panose="00000500000000000000" pitchFamily="2" charset="0"/>
               </a:rPr>
-              <a:t>Z. Su, Y. Lu, A. Li, B. Li, D. Zhang, and L. Wang, "</a:t>
-            </a:r>
-            <a:r>
-              <a:rPr lang="en-IN" sz="2000" dirty="0" err="1">
-                <a:latin typeface="Barlow" panose="00000500000000000000" pitchFamily="2" charset="0"/>
-              </a:rPr>
-              <a:t>RoFormer</a:t>
-            </a:r>
-            <a:r>
-              <a:rPr lang="en-IN" sz="2000" dirty="0">
-                <a:latin typeface="Barlow" panose="00000500000000000000" pitchFamily="2" charset="0"/>
-              </a:rPr>
-              <a:t>: Enhanced Transformer with Rotary Position Embedding," </a:t>
-            </a:r>
-            <a:r>
-              <a:rPr lang="en-IN" sz="2000" dirty="0" err="1">
-                <a:latin typeface="Barlow" panose="00000500000000000000" pitchFamily="2" charset="0"/>
-              </a:rPr>
-              <a:t>arXiv</a:t>
-            </a:r>
-            <a:r>
-              <a:rPr lang="en-IN" sz="2000" dirty="0">
-                <a:latin typeface="Barlow" panose="00000500000000000000" pitchFamily="2" charset="0"/>
-              </a:rPr>
-              <a:t> preprint arXiv:2104.09864, 2021.</a:t>
+              <a:t>Z. Su, Y. Lu, A. Li, B. Li, D. Zhang, and L. Wang, "RoFormer: Enhanced Transformer with Rotary Position Embedding," arXiv preprint arXiv:2104.09864, 2021.</a:t>
             </a:r>
           </a:p>
           <a:p>
@@ -20482,43 +20371,7 @@
               <a:rPr lang="en-GB" sz="2000" dirty="0">
                 <a:latin typeface="Barlow" panose="00000500000000000000" pitchFamily="2" charset="0"/>
               </a:rPr>
-              <a:t>T. Dao, D. Y. Fu, S. Ermon, A. Rudra, and C. </a:t>
-            </a:r>
-            <a:r>
-              <a:rPr lang="en-GB" sz="2000" dirty="0" err="1">
-                <a:latin typeface="Barlow" panose="00000500000000000000" pitchFamily="2" charset="0"/>
-              </a:rPr>
-              <a:t>Ré</a:t>
-            </a:r>
-            <a:r>
-              <a:rPr lang="en-GB" sz="2000" dirty="0">
-                <a:latin typeface="Barlow" panose="00000500000000000000" pitchFamily="2" charset="0"/>
-              </a:rPr>
-              <a:t>, "</a:t>
-            </a:r>
-            <a:r>
-              <a:rPr lang="en-GB" sz="2000" dirty="0" err="1">
-                <a:latin typeface="Barlow" panose="00000500000000000000" pitchFamily="2" charset="0"/>
-              </a:rPr>
-              <a:t>FlashAttention</a:t>
-            </a:r>
-            <a:r>
-              <a:rPr lang="en-GB" sz="2000" dirty="0">
-                <a:latin typeface="Barlow" panose="00000500000000000000" pitchFamily="2" charset="0"/>
-              </a:rPr>
-              <a:t>: Fast and Memory-Efficient Exact Attention with IO-Awareness," in Advances in Neural Information Processing Systems (</a:t>
-            </a:r>
-            <a:r>
-              <a:rPr lang="en-GB" sz="2000" dirty="0" err="1">
-                <a:latin typeface="Barlow" panose="00000500000000000000" pitchFamily="2" charset="0"/>
-              </a:rPr>
-              <a:t>NeurIPS</a:t>
-            </a:r>
-            <a:r>
-              <a:rPr lang="en-GB" sz="2000" dirty="0">
-                <a:latin typeface="Barlow" panose="00000500000000000000" pitchFamily="2" charset="0"/>
-              </a:rPr>
-              <a:t>), vol. 35, pp. 16438–16453, 2022.</a:t>
+              <a:t>T. Dao, D. Y. Fu, S. Ermon, A. Rudra, and C. Ré, "FlashAttention: Fast and Memory-Efficient Exact Attention with IO-Awareness," in Advances in Neural Information Processing Systems (NeurIPS), vol. 35, pp. 16438–16453, 2022.</a:t>
             </a:r>
           </a:p>
           <a:p>
@@ -20530,31 +20383,7 @@
               <a:rPr lang="en-GB" sz="2000" dirty="0">
                 <a:latin typeface="Barlow" panose="00000500000000000000" pitchFamily="2" charset="0"/>
               </a:rPr>
-              <a:t>A. </a:t>
-            </a:r>
-            <a:r>
-              <a:rPr lang="en-GB" sz="2000" dirty="0" err="1">
-                <a:latin typeface="Barlow" panose="00000500000000000000" pitchFamily="2" charset="0"/>
-              </a:rPr>
-              <a:t>Shazeer</a:t>
-            </a:r>
-            <a:r>
-              <a:rPr lang="en-GB" sz="2000" dirty="0">
-                <a:latin typeface="Barlow" panose="00000500000000000000" pitchFamily="2" charset="0"/>
-              </a:rPr>
-              <a:t>, "Gated Linear Units with GELU activation," </a:t>
-            </a:r>
-            <a:r>
-              <a:rPr lang="en-GB" sz="2000" dirty="0" err="1">
-                <a:latin typeface="Barlow" panose="00000500000000000000" pitchFamily="2" charset="0"/>
-              </a:rPr>
-              <a:t>arXiv</a:t>
-            </a:r>
-            <a:r>
-              <a:rPr lang="en-GB" sz="2000" dirty="0">
-                <a:latin typeface="Barlow" panose="00000500000000000000" pitchFamily="2" charset="0"/>
-              </a:rPr>
-              <a:t> preprint arXiv:2002.05202, 2020.</a:t>
+              <a:t>A. Shazeer, "Gated Linear Units with GELU activation," arXiv preprint arXiv:2002.05202, 2020.</a:t>
             </a:r>
           </a:p>
           <a:p>
@@ -21890,7 +21719,7 @@
         </p:blipFill>
         <p:spPr>
           <a:xfrm>
-            <a:off x="190791" y="359552"/>
+            <a:off x="190791" y="0"/>
             <a:ext cx="8416314" cy="6413632"/>
           </a:xfrm>
         </p:spPr>
@@ -21967,6 +21796,46 @@
               <a:t>Superior Accuracy</a:t>
             </a:r>
             <a:endParaRPr lang="en-IN" sz="2400" dirty="0"/>
+          </a:p>
+        </p:txBody>
+      </p:sp>
+      <p:sp>
+        <p:nvSpPr>
+          <p:cNvPr id="3" name="TextBox 2">
+            <a:extLst>
+              <a:ext uri="{FF2B5EF4-FFF2-40B4-BE49-F238E27FC236}">
+                <a16:creationId xmlns:a16="http://schemas.microsoft.com/office/drawing/2014/main" id="{E24BAE9E-E4A3-0531-F9FE-CE2D7EB0AB6D}"/>
+              </a:ext>
+            </a:extLst>
+          </p:cNvPr>
+          <p:cNvSpPr txBox="1"/>
+          <p:nvPr/>
+        </p:nvSpPr>
+        <p:spPr>
+          <a:xfrm>
+            <a:off x="2370222" y="6476040"/>
+            <a:ext cx="5470358" cy="369332"/>
+          </a:xfrm>
+          <a:prstGeom prst="rect">
+            <a:avLst/>
+          </a:prstGeom>
+          <a:noFill/>
+        </p:spPr>
+        <p:txBody>
+          <a:bodyPr wrap="square" rtlCol="0">
+            <a:spAutoFit/>
+          </a:bodyPr>
+          <a:lstStyle/>
+          <a:p>
+            <a:r>
+              <a:rPr lang="en-GB" dirty="0">
+                <a:latin typeface="Barlow" panose="00000500000000000000" pitchFamily="2" charset="0"/>
+              </a:rPr>
+              <a:t>Image Source: Claude Sonnet 4 (Anthropic, 2025)</a:t>
+            </a:r>
+            <a:endParaRPr lang="en-IN" dirty="0">
+              <a:latin typeface="Barlow" panose="00000500000000000000" pitchFamily="2" charset="0"/>
+            </a:endParaRPr>
           </a:p>
         </p:txBody>
       </p:sp>
@@ -22047,412 +21916,126 @@
           </a:p>
         </p:txBody>
       </p:sp>
-      <mc:AlternateContent xmlns:mc="http://schemas.openxmlformats.org/markup-compatibility/2006">
-        <mc:Choice xmlns:a14="http://schemas.microsoft.com/office/drawing/2010/main" Requires="a14">
-          <p:sp>
-            <p:nvSpPr>
-              <p:cNvPr id="6" name="TextBox 5">
-                <a:extLst>
-                  <a:ext uri="{FF2B5EF4-FFF2-40B4-BE49-F238E27FC236}">
-                    <a16:creationId xmlns:a16="http://schemas.microsoft.com/office/drawing/2014/main" id="{3F328A19-6B2F-462C-D96B-F58C09479D3A}"/>
-                  </a:ext>
-                </a:extLst>
-              </p:cNvPr>
-              <p:cNvSpPr txBox="1"/>
-              <p:nvPr/>
-            </p:nvSpPr>
-            <p:spPr>
-              <a:xfrm>
-                <a:off x="445168" y="2610853"/>
-                <a:ext cx="6817892" cy="3823226"/>
-              </a:xfrm>
-              <a:prstGeom prst="rect">
-                <a:avLst/>
-              </a:prstGeom>
-              <a:noFill/>
-            </p:spPr>
-            <p:txBody>
-              <a:bodyPr wrap="none" rtlCol="0">
-                <a:spAutoFit/>
-              </a:bodyPr>
-              <a:lstStyle/>
-              <a:p>
-                <a:r>
-                  <a:rPr lang="en-IN" sz="2000" dirty="0">
-                    <a:latin typeface="Barlow" panose="00000500000000000000" pitchFamily="2" charset="0"/>
-                  </a:rPr>
-                  <a:t>Evolution: Adam → AdamW</a:t>
-                </a:r>
-              </a:p>
-              <a:p>
-                <a:endParaRPr lang="en-IN" sz="2000" dirty="0">
-                  <a:latin typeface="Barlow" panose="00000500000000000000" pitchFamily="2" charset="0"/>
-                </a:endParaRPr>
-              </a:p>
-              <a:p>
-                <a:r>
-                  <a:rPr lang="en-IN" sz="2000" dirty="0">
-                    <a:latin typeface="Barlow" panose="00000500000000000000" pitchFamily="2" charset="0"/>
-                  </a:rPr>
-                  <a:t>Key Improvement:</a:t>
-                </a:r>
-              </a:p>
-              <a:p>
-                <a:r>
-                  <a:rPr lang="en-IN" sz="2000" dirty="0">
-                    <a:latin typeface="Barlow" panose="00000500000000000000" pitchFamily="2" charset="0"/>
-                  </a:rPr>
-                  <a:t>• Decoupled weight decay from gradient updates</a:t>
-                </a:r>
-              </a:p>
-              <a:p>
-                <a:pPr/>
-                <a:r>
-                  <a:rPr lang="en-IN" sz="2000" dirty="0">
-                    <a:latin typeface="Barlow" panose="00000500000000000000" pitchFamily="2" charset="0"/>
-                  </a:rPr>
-                  <a:t>•</a:t>
-                </a:r>
-                <a14:m>
-                  <m:oMath xmlns:m="http://schemas.openxmlformats.org/officeDocument/2006/math">
-                    <m:sSub>
-                      <m:sSubPr>
-                        <m:ctrlPr>
-                          <a:rPr lang="el-GR" sz="2000" i="1" dirty="0" smtClean="0">
-                            <a:latin typeface="Cambria Math" panose="02040503050406030204" pitchFamily="18" charset="0"/>
-                          </a:rPr>
-                        </m:ctrlPr>
-                      </m:sSubPr>
-                      <m:e>
-                        <m:r>
-                          <a:rPr lang="el-GR" sz="2000" i="1" dirty="0" smtClean="0">
-                            <a:latin typeface="Cambria Math" panose="02040503050406030204" pitchFamily="18" charset="0"/>
-                          </a:rPr>
-                          <m:t>𝜃</m:t>
-                        </m:r>
-                      </m:e>
-                      <m:sub>
-                        <m:d>
-                          <m:dPr>
-                            <m:begChr m:val="{"/>
-                            <m:endChr m:val="}"/>
-                            <m:ctrlPr>
-                              <a:rPr lang="el-GR" sz="2000" i="1" dirty="0" smtClean="0">
-                                <a:latin typeface="Cambria Math" panose="02040503050406030204" pitchFamily="18" charset="0"/>
-                              </a:rPr>
-                            </m:ctrlPr>
-                          </m:dPr>
-                          <m:e>
-                            <m:r>
-                              <a:rPr lang="en-IN" sz="2000" i="1" dirty="0" smtClean="0">
-                                <a:latin typeface="Cambria Math" panose="02040503050406030204" pitchFamily="18" charset="0"/>
-                              </a:rPr>
-                              <m:t>𝑡</m:t>
-                            </m:r>
-                            <m:r>
-                              <a:rPr lang="en-IN" sz="2000" i="1" dirty="0" smtClean="0">
-                                <a:latin typeface="Cambria Math" panose="02040503050406030204" pitchFamily="18" charset="0"/>
-                              </a:rPr>
-                              <m:t>+1</m:t>
-                            </m:r>
-                          </m:e>
-                        </m:d>
-                      </m:sub>
-                    </m:sSub>
-                    <m:r>
-                      <a:rPr lang="en-IN" sz="2000" i="1" dirty="0" smtClean="0">
-                        <a:latin typeface="Cambria Math" panose="02040503050406030204" pitchFamily="18" charset="0"/>
-                      </a:rPr>
-                      <m:t> = </m:t>
-                    </m:r>
-                    <m:sSub>
-                      <m:sSubPr>
-                        <m:ctrlPr>
-                          <a:rPr lang="el-GR" sz="2000" i="1" dirty="0" smtClean="0">
-                            <a:latin typeface="Cambria Math" panose="02040503050406030204" pitchFamily="18" charset="0"/>
-                          </a:rPr>
-                        </m:ctrlPr>
-                      </m:sSubPr>
-                      <m:e>
-                        <m:r>
-                          <a:rPr lang="el-GR" sz="2000" i="1" dirty="0" smtClean="0">
-                            <a:latin typeface="Cambria Math" panose="02040503050406030204" pitchFamily="18" charset="0"/>
-                          </a:rPr>
-                          <m:t>𝜃</m:t>
-                        </m:r>
-                      </m:e>
-                      <m:sub>
-                        <m:r>
-                          <a:rPr lang="en-IN" sz="2000" i="1" dirty="0" smtClean="0">
-                            <a:latin typeface="Cambria Math" panose="02040503050406030204" pitchFamily="18" charset="0"/>
-                          </a:rPr>
-                          <m:t>𝑡</m:t>
-                        </m:r>
-                      </m:sub>
-                    </m:sSub>
-                    <m:r>
-                      <a:rPr lang="en-IN" sz="2000" i="1" dirty="0" smtClean="0">
-                        <a:latin typeface="Cambria Math" panose="02040503050406030204" pitchFamily="18" charset="0"/>
-                      </a:rPr>
-                      <m:t> − </m:t>
-                    </m:r>
-                    <m:r>
-                      <a:rPr lang="el-GR" sz="2000" i="1" dirty="0" smtClean="0">
-                        <a:latin typeface="Cambria Math" panose="02040503050406030204" pitchFamily="18" charset="0"/>
-                      </a:rPr>
-                      <m:t>𝛼</m:t>
-                    </m:r>
-                    <m:r>
-                      <a:rPr lang="el-GR" sz="2000" i="1" dirty="0" smtClean="0">
-                        <a:latin typeface="Cambria Math" panose="02040503050406030204" pitchFamily="18" charset="0"/>
-                      </a:rPr>
-                      <m:t>(</m:t>
-                    </m:r>
-                    <m:sSub>
-                      <m:sSubPr>
-                        <m:ctrlPr>
-                          <a:rPr lang="en-IN" sz="2000" i="1" dirty="0" smtClean="0">
-                            <a:latin typeface="Cambria Math" panose="02040503050406030204" pitchFamily="18" charset="0"/>
-                          </a:rPr>
-                        </m:ctrlPr>
-                      </m:sSubPr>
-                      <m:e>
-                        <m:acc>
-                          <m:accPr>
-                            <m:chr m:val="̂"/>
-                            <m:ctrlPr>
-                              <a:rPr lang="en-IN" sz="2000" i="1" dirty="0" smtClean="0">
-                                <a:latin typeface="Cambria Math" panose="02040503050406030204" pitchFamily="18" charset="0"/>
-                              </a:rPr>
-                            </m:ctrlPr>
-                          </m:accPr>
-                          <m:e>
-                            <m:r>
-                              <a:rPr lang="en-IN" sz="2000" i="1" dirty="0" smtClean="0">
-                                <a:latin typeface="Cambria Math" panose="02040503050406030204" pitchFamily="18" charset="0"/>
-                              </a:rPr>
-                              <m:t>𝑚</m:t>
-                            </m:r>
-                          </m:e>
-                        </m:acc>
-                      </m:e>
-                      <m:sub>
-                        <m:r>
-                          <a:rPr lang="en-IN" sz="2000" i="1" dirty="0" smtClean="0">
-                            <a:latin typeface="Cambria Math" panose="02040503050406030204" pitchFamily="18" charset="0"/>
-                          </a:rPr>
-                          <m:t>𝑡</m:t>
-                        </m:r>
-                      </m:sub>
-                    </m:sSub>
-                    <m:r>
-                      <a:rPr lang="en-GB" sz="2000" b="0" i="1" dirty="0" smtClean="0">
-                        <a:latin typeface="Cambria Math" panose="02040503050406030204" pitchFamily="18" charset="0"/>
-                      </a:rPr>
-                      <m:t>/</m:t>
-                    </m:r>
-                    <m:r>
-                      <a:rPr lang="en-IN" sz="2000" i="1" dirty="0" smtClean="0">
-                        <a:latin typeface="Cambria Math" panose="02040503050406030204" pitchFamily="18" charset="0"/>
-                      </a:rPr>
-                      <m:t>√</m:t>
-                    </m:r>
-                    <m:sSub>
-                      <m:sSubPr>
-                        <m:ctrlPr>
-                          <a:rPr lang="en-IN" sz="2000" i="1" dirty="0" smtClean="0">
-                            <a:latin typeface="Cambria Math" panose="02040503050406030204" pitchFamily="18" charset="0"/>
-                          </a:rPr>
-                        </m:ctrlPr>
-                      </m:sSubPr>
-                      <m:e>
-                        <m:acc>
-                          <m:accPr>
-                            <m:chr m:val="̂"/>
-                            <m:ctrlPr>
-                              <a:rPr lang="en-IN" sz="2000" i="1" dirty="0" smtClean="0">
-                                <a:latin typeface="Cambria Math" panose="02040503050406030204" pitchFamily="18" charset="0"/>
-                              </a:rPr>
-                            </m:ctrlPr>
-                          </m:accPr>
-                          <m:e>
-                            <m:r>
-                              <a:rPr lang="en-IN" sz="2000" i="1" dirty="0" smtClean="0">
-                                <a:latin typeface="Cambria Math" panose="02040503050406030204" pitchFamily="18" charset="0"/>
-                              </a:rPr>
-                              <m:t>𝑣</m:t>
-                            </m:r>
-                          </m:e>
-                        </m:acc>
-                      </m:e>
-                      <m:sub>
-                        <m:r>
-                          <a:rPr lang="en-IN" sz="2000" i="1" dirty="0" smtClean="0">
-                            <a:latin typeface="Cambria Math" panose="02040503050406030204" pitchFamily="18" charset="0"/>
-                          </a:rPr>
-                          <m:t>𝑡</m:t>
-                        </m:r>
-                      </m:sub>
-                    </m:sSub>
-                    <m:r>
-                      <a:rPr lang="en-IN" sz="2000" i="1" dirty="0" smtClean="0">
-                        <a:latin typeface="Cambria Math" panose="02040503050406030204" pitchFamily="18" charset="0"/>
-                      </a:rPr>
-                      <m:t> + </m:t>
-                    </m:r>
-                    <m:r>
-                      <a:rPr lang="el-GR" sz="2000" i="1" dirty="0" smtClean="0">
-                        <a:latin typeface="Cambria Math" panose="02040503050406030204" pitchFamily="18" charset="0"/>
-                      </a:rPr>
-                      <m:t>𝜆</m:t>
-                    </m:r>
-                    <m:sSub>
-                      <m:sSubPr>
-                        <m:ctrlPr>
-                          <a:rPr lang="el-GR" sz="2000" i="1" dirty="0" smtClean="0">
-                            <a:latin typeface="Cambria Math" panose="02040503050406030204" pitchFamily="18" charset="0"/>
-                          </a:rPr>
-                        </m:ctrlPr>
-                      </m:sSubPr>
-                      <m:e>
-                        <m:r>
-                          <a:rPr lang="el-GR" sz="2000" i="1" dirty="0" smtClean="0">
-                            <a:latin typeface="Cambria Math" panose="02040503050406030204" pitchFamily="18" charset="0"/>
-                          </a:rPr>
-                          <m:t>𝜃</m:t>
-                        </m:r>
-                      </m:e>
-                      <m:sub>
-                        <m:r>
-                          <a:rPr lang="en-IN" sz="2000" i="1" dirty="0" smtClean="0">
-                            <a:latin typeface="Cambria Math" panose="02040503050406030204" pitchFamily="18" charset="0"/>
-                          </a:rPr>
-                          <m:t>𝑡</m:t>
-                        </m:r>
-                      </m:sub>
-                    </m:sSub>
-                    <m:r>
-                      <a:rPr lang="en-IN" sz="2000" i="1" dirty="0" smtClean="0">
-                        <a:latin typeface="Cambria Math" panose="02040503050406030204" pitchFamily="18" charset="0"/>
-                      </a:rPr>
-                      <m:t>)</m:t>
-                    </m:r>
-                  </m:oMath>
-                </a14:m>
-                <a:endParaRPr lang="en-IN" sz="2000" dirty="0">
-                  <a:latin typeface="Barlow" panose="00000500000000000000" pitchFamily="2" charset="0"/>
-                </a:endParaRPr>
-              </a:p>
-              <a:p>
-                <a:endParaRPr lang="en-IN" sz="2000" dirty="0">
-                  <a:latin typeface="Barlow" panose="00000500000000000000" pitchFamily="2" charset="0"/>
-                </a:endParaRPr>
-              </a:p>
-              <a:p>
-                <a:r>
-                  <a:rPr lang="en-IN" sz="2000" dirty="0">
-                    <a:latin typeface="Barlow" panose="00000500000000000000" pitchFamily="2" charset="0"/>
-                  </a:rPr>
-                  <a:t>Why AdamW Dominates:</a:t>
-                </a:r>
-              </a:p>
-              <a:p>
-                <a:r>
-                  <a:rPr lang="en-IN" sz="2000" dirty="0">
-                    <a:latin typeface="Barlow" panose="00000500000000000000" pitchFamily="2" charset="0"/>
-                  </a:rPr>
-                  <a:t>✓ Better generalization than Adam</a:t>
-                </a:r>
-              </a:p>
-              <a:p>
-                <a:r>
-                  <a:rPr lang="en-IN" sz="2000" dirty="0">
-                    <a:latin typeface="Barlow" panose="00000500000000000000" pitchFamily="2" charset="0"/>
-                  </a:rPr>
-                  <a:t>✓ Stable training for transformers</a:t>
-                </a:r>
-              </a:p>
-              <a:p>
-                <a:r>
-                  <a:rPr lang="en-IN" sz="2000" dirty="0">
-                    <a:latin typeface="Barlow" panose="00000500000000000000" pitchFamily="2" charset="0"/>
-                  </a:rPr>
-                  <a:t>✓ De facto standard for BERT</a:t>
-                </a:r>
-                <a:r>
-                  <a:rPr lang="en-IN" sz="2000" b="1" baseline="30000" dirty="0">
-                    <a:latin typeface="Barlow" panose="00000500000000000000" pitchFamily="2" charset="0"/>
-                  </a:rPr>
-                  <a:t>[1]  </a:t>
-                </a:r>
-                <a:r>
-                  <a:rPr lang="en-IN" sz="2000" dirty="0">
-                    <a:latin typeface="Barlow" panose="00000500000000000000" pitchFamily="2" charset="0"/>
-                  </a:rPr>
-                  <a:t>family models</a:t>
-                </a:r>
-              </a:p>
-              <a:p>
-                <a:endParaRPr lang="en-IN" sz="2000" dirty="0">
-                  <a:latin typeface="Barlow" panose="00000500000000000000" pitchFamily="2" charset="0"/>
-                </a:endParaRPr>
-              </a:p>
-              <a:p>
-                <a:r>
-                  <a:rPr lang="en-IN" sz="2000" dirty="0">
-                    <a:latin typeface="Barlow" panose="00000500000000000000" pitchFamily="2" charset="0"/>
-                  </a:rPr>
-                  <a:t>Current Status: Default choice without alternatives explored</a:t>
-                </a:r>
-              </a:p>
-            </p:txBody>
-          </p:sp>
-        </mc:Choice>
-        <mc:Fallback>
-          <p:sp>
-            <p:nvSpPr>
-              <p:cNvPr id="6" name="TextBox 5">
-                <a:extLst>
-                  <a:ext uri="{FF2B5EF4-FFF2-40B4-BE49-F238E27FC236}">
-                    <a16:creationId xmlns:a16="http://schemas.microsoft.com/office/drawing/2014/main" id="{3F328A19-6B2F-462C-D96B-F58C09479D3A}"/>
-                  </a:ext>
-                </a:extLst>
-              </p:cNvPr>
-              <p:cNvSpPr txBox="1">
-                <a:spLocks noRot="1" noChangeAspect="1" noMove="1" noResize="1" noEditPoints="1" noAdjustHandles="1" noChangeArrowheads="1" noChangeShapeType="1" noTextEdit="1"/>
-              </p:cNvSpPr>
-              <p:nvPr/>
-            </p:nvSpPr>
-            <p:spPr>
-              <a:xfrm>
-                <a:off x="445168" y="2610853"/>
-                <a:ext cx="6817892" cy="3823226"/>
-              </a:xfrm>
-              <a:prstGeom prst="rect">
-                <a:avLst/>
-              </a:prstGeom>
-              <a:blipFill>
-                <a:blip r:embed="rId2"/>
-                <a:stretch>
-                  <a:fillRect l="-894" t="-957" r="-89" b="-2233"/>
-                </a:stretch>
-              </a:blipFill>
-            </p:spPr>
-            <p:txBody>
-              <a:bodyPr/>
-              <a:lstStyle/>
-              <a:p>
-                <a:r>
-                  <a:rPr lang="en-IN">
-                    <a:noFill/>
-                  </a:rPr>
-                  <a:t> </a:t>
-                </a:r>
-              </a:p>
-            </p:txBody>
-          </p:sp>
-        </mc:Fallback>
-      </mc:AlternateContent>
+      <p:sp>
+        <p:nvSpPr>
+          <p:cNvPr id="6" name="TextBox 5">
+            <a:extLst>
+              <a:ext uri="{FF2B5EF4-FFF2-40B4-BE49-F238E27FC236}">
+                <a16:creationId xmlns:a16="http://schemas.microsoft.com/office/drawing/2014/main" id="{3F328A19-6B2F-462C-D96B-F58C09479D3A}"/>
+              </a:ext>
+            </a:extLst>
+          </p:cNvPr>
+          <p:cNvSpPr txBox="1"/>
+          <p:nvPr/>
+        </p:nvSpPr>
+        <p:spPr>
+          <a:xfrm>
+            <a:off x="445168" y="2610853"/>
+            <a:ext cx="6846746" cy="3477875"/>
+          </a:xfrm>
+          <a:prstGeom prst="rect">
+            <a:avLst/>
+          </a:prstGeom>
+          <a:noFill/>
+        </p:spPr>
+        <p:txBody>
+          <a:bodyPr wrap="none" rtlCol="0">
+            <a:spAutoFit/>
+          </a:bodyPr>
+          <a:lstStyle/>
+          <a:p>
+            <a:r>
+              <a:rPr lang="en-IN" sz="2000" dirty="0">
+                <a:latin typeface="Barlow" panose="00000500000000000000" pitchFamily="2" charset="0"/>
+              </a:rPr>
+              <a:t>Evolution: Adam → AdamW</a:t>
+            </a:r>
+          </a:p>
+          <a:p>
+            <a:endParaRPr lang="en-IN" sz="2000" dirty="0">
+              <a:latin typeface="Barlow" panose="00000500000000000000" pitchFamily="2" charset="0"/>
+            </a:endParaRPr>
+          </a:p>
+          <a:p>
+            <a:r>
+              <a:rPr lang="en-IN" sz="2000" dirty="0">
+                <a:latin typeface="Barlow" panose="00000500000000000000" pitchFamily="2" charset="0"/>
+              </a:rPr>
+              <a:t>Key Improvement:</a:t>
+            </a:r>
+          </a:p>
+          <a:p>
+            <a:r>
+              <a:rPr lang="en-IN" sz="2000" dirty="0">
+                <a:latin typeface="Barlow" panose="00000500000000000000" pitchFamily="2" charset="0"/>
+              </a:rPr>
+              <a:t>• Decoupled weight decay from gradient updates</a:t>
+            </a:r>
+          </a:p>
+          <a:p>
+            <a:endParaRPr lang="en-IN" sz="2000" dirty="0">
+              <a:latin typeface="Barlow" panose="00000500000000000000" pitchFamily="2" charset="0"/>
+            </a:endParaRPr>
+          </a:p>
+          <a:p>
+            <a:r>
+              <a:rPr lang="en-IN" sz="2000" dirty="0">
+                <a:latin typeface="Barlow" panose="00000500000000000000" pitchFamily="2" charset="0"/>
+              </a:rPr>
+              <a:t>Why AdamW Dominates:</a:t>
+            </a:r>
+          </a:p>
+          <a:p>
+            <a:r>
+              <a:rPr lang="en-IN" sz="2000" dirty="0">
+                <a:latin typeface="Barlow" panose="00000500000000000000" pitchFamily="2" charset="0"/>
+              </a:rPr>
+              <a:t>✓ Better generalization than Adam</a:t>
+            </a:r>
+          </a:p>
+          <a:p>
+            <a:r>
+              <a:rPr lang="en-IN" sz="2000" dirty="0">
+                <a:latin typeface="Barlow" panose="00000500000000000000" pitchFamily="2" charset="0"/>
+              </a:rPr>
+              <a:t>✓ Stable training for transformers</a:t>
+            </a:r>
+          </a:p>
+          <a:p>
+            <a:r>
+              <a:rPr lang="en-IN" sz="2000" dirty="0">
+                <a:latin typeface="Barlow" panose="00000500000000000000" pitchFamily="2" charset="0"/>
+              </a:rPr>
+              <a:t>✓ De facto standard for BERT</a:t>
+            </a:r>
+            <a:r>
+              <a:rPr lang="en-IN" sz="2000" b="1" baseline="30000" dirty="0">
+                <a:latin typeface="Barlow" panose="00000500000000000000" pitchFamily="2" charset="0"/>
+              </a:rPr>
+              <a:t>[1]  </a:t>
+            </a:r>
+            <a:r>
+              <a:rPr lang="en-IN" sz="2000" dirty="0">
+                <a:latin typeface="Barlow" panose="00000500000000000000" pitchFamily="2" charset="0"/>
+              </a:rPr>
+              <a:t>family models</a:t>
+            </a:r>
+          </a:p>
+          <a:p>
+            <a:endParaRPr lang="en-IN" sz="2000" dirty="0">
+              <a:latin typeface="Barlow" panose="00000500000000000000" pitchFamily="2" charset="0"/>
+            </a:endParaRPr>
+          </a:p>
+          <a:p>
+            <a:r>
+              <a:rPr lang="en-IN" sz="2000" dirty="0">
+                <a:latin typeface="Barlow" panose="00000500000000000000" pitchFamily="2" charset="0"/>
+              </a:rPr>
+              <a:t>Current Status: Default choice without alternatives explored</a:t>
+            </a:r>
+          </a:p>
+        </p:txBody>
+      </p:sp>
     </p:spTree>
     <p:extLst>
       <p:ext uri="{BB962C8B-B14F-4D97-AF65-F5344CB8AC3E}">
@@ -23434,15 +23017,6 @@
 </file>
 
 <file path=customXml/item1.xml><?xml version="1.0" encoding="utf-8"?>
-<?mso-contentType ?>
-<FormTemplates xmlns="http://schemas.microsoft.com/sharepoint/v3/contenttype/forms">
-  <Display>DocumentLibraryForm</Display>
-  <Edit>DocumentLibraryForm</Edit>
-  <New>DocumentLibraryForm</New>
-</FormTemplates>
-</file>
-
-<file path=customXml/item2.xml><?xml version="1.0" encoding="utf-8"?>
 <p:properties xmlns:p="http://schemas.microsoft.com/office/2006/metadata/properties" xmlns:xsi="http://www.w3.org/2001/XMLSchema-instance" xmlns:pc="http://schemas.microsoft.com/office/infopath/2007/PartnerControls">
   <documentManagement>
     <_ip_UnifiedCompliancePolicyUIAction xmlns="http://schemas.microsoft.com/sharepoint/v3" xsi:nil="true"/>
@@ -23460,6 +23034,15 @@
     <MediaServiceKeyPoints xmlns="71af3243-3dd4-4a8d-8c0d-dd76da1f02a5" xsi:nil="true"/>
   </documentManagement>
 </p:properties>
+</file>
+
+<file path=customXml/item2.xml><?xml version="1.0" encoding="utf-8"?>
+<?mso-contentType ?>
+<FormTemplates xmlns="http://schemas.microsoft.com/sharepoint/v3/contenttype/forms">
+  <Display>DocumentLibraryForm</Display>
+  <Edit>DocumentLibraryForm</Edit>
+  <New>DocumentLibraryForm</New>
+</FormTemplates>
 </file>
 
 <file path=customXml/item3.xml><?xml version="1.0" encoding="utf-8"?>
@@ -23751,14 +23334,6 @@
 </file>
 
 <file path=customXml/itemProps1.xml><?xml version="1.0" encoding="utf-8"?>
-<ds:datastoreItem xmlns:ds="http://schemas.openxmlformats.org/officeDocument/2006/customXml" ds:itemID="{019B3EA6-E2E1-4B68-B700-9432F9FC79DA}">
-  <ds:schemaRefs>
-    <ds:schemaRef ds:uri="http://schemas.microsoft.com/sharepoint/v3/contenttype/forms"/>
-  </ds:schemaRefs>
-</ds:datastoreItem>
-</file>
-
-<file path=customXml/itemProps2.xml><?xml version="1.0" encoding="utf-8"?>
 <ds:datastoreItem xmlns:ds="http://schemas.openxmlformats.org/officeDocument/2006/customXml" ds:itemID="{BC8413E5-0484-489B-B293-D8720B6027F2}">
   <ds:schemaRefs>
     <ds:schemaRef ds:uri="16c05727-aa75-4e4a-9b5f-8a80a1165891"/>
@@ -23773,6 +23348,14 @@
     <ds:schemaRef ds:uri="http://schemas.microsoft.com/sharepoint/v3"/>
     <ds:schemaRef ds:uri="http://purl.org/dc/dcmitype/"/>
     <ds:schemaRef ds:uri="http://purl.org/dc/elements/1.1/"/>
+  </ds:schemaRefs>
+</ds:datastoreItem>
+</file>
+
+<file path=customXml/itemProps2.xml><?xml version="1.0" encoding="utf-8"?>
+<ds:datastoreItem xmlns:ds="http://schemas.openxmlformats.org/officeDocument/2006/customXml" ds:itemID="{019B3EA6-E2E1-4B68-B700-9432F9FC79DA}">
+  <ds:schemaRefs>
+    <ds:schemaRef ds:uri="http://schemas.microsoft.com/sharepoint/v3/contenttype/forms"/>
   </ds:schemaRefs>
 </ds:datastoreItem>
 </file>

--- a/cross_encoder/thesis/Thesis_presentation.pptx
+++ b/cross_encoder/thesis/Thesis_presentation.pptx
@@ -9936,9 +9936,13 @@
             <a:r>
               <a:rPr lang="en-IN" sz="2800" b="1" baseline="30000" dirty="0">
                 <a:latin typeface="Barlow SemiBold" panose="00000700000000000000" pitchFamily="2" charset="0"/>
+                <a:hlinkClick r:id="rId2" action="ppaction://hlinksldjump"/>
               </a:rPr>
               <a:t>[4]</a:t>
             </a:r>
+            <a:endParaRPr lang="en-IN" sz="2800" b="1" baseline="30000" dirty="0">
+              <a:latin typeface="Barlow SemiBold" panose="00000700000000000000" pitchFamily="2" charset="0"/>
+            </a:endParaRPr>
           </a:p>
         </p:txBody>
       </p:sp>
@@ -10172,10 +10176,10 @@
       </p:pic>
       <p:pic>
         <p:nvPicPr>
-          <p:cNvPr id="3" name="@holatex&#10;\begin{document}&#10;\center&#10;where:&#10;\begin{itemize}&#10;    \item $c_t$: interpolated momentum for update direction&#10;    \item $\text{sign}(\cdot)$: element-wise sign function&#10;    \item Other parameters follow similar definitions as AdamW&#10;\end{itemize}&#10;\end{document}">
+          <p:cNvPr id="6" name="@holatex&#10;\begin{document}&#10;\center&#10;where:&#10;\begin{itemize}&#10;    \item $c_t$: interpolated momentum for update direction&#10;    \item $\text{sign}(\cdot)$: element-wise sign function  &#10;    \item $\theta_t$: model parameters at time step $t$&#10;    \item $g_t$: gradient at time step $t$&#10;    \item $m_t$: exponential moving average of gradients (momentum)&#10;    \item $\eta$: learning rate&#10;    \item $\beta_1$: momentum coefficient for update direction (typically 0.9)&#10;    \item $\beta_2$: momentum coefficient for gradient tracking (typically 0.99)&#10;    \item $\lambda$: weight decay coefficient&#10;\end{itemize}&#10;\end{document}">
             <a:extLst>
               <a:ext uri="{FF2B5EF4-FFF2-40B4-BE49-F238E27FC236}">
-                <a16:creationId xmlns:a16="http://schemas.microsoft.com/office/drawing/2014/main" id="{996BC0B4-312F-574A-8729-9E94B96A1AB9}"/>
+                <a16:creationId xmlns:a16="http://schemas.microsoft.com/office/drawing/2014/main" id="{5860B546-5E53-616F-31DD-9768D14F3DAB}"/>
               </a:ext>
             </a:extLst>
           </p:cNvPr>
@@ -10192,8 +10196,8 @@
         </p:blipFill>
         <p:spPr>
           <a:xfrm>
-            <a:off x="6329956" y="3687882"/>
-            <a:ext cx="4599964" cy="1667013"/>
+            <a:off x="6505216" y="2461062"/>
+            <a:ext cx="4876782" cy="3949750"/>
           </a:xfrm>
           <a:prstGeom prst="rect">
             <a:avLst/>
@@ -10408,14 +10412,22 @@
             <a:r>
               <a:rPr lang="en-IN" sz="2400" b="1" baseline="30000" dirty="0">
                 <a:latin typeface="Barlow" panose="00000500000000000000" pitchFamily="2" charset="0"/>
+                <a:hlinkClick r:id="rId2" action="ppaction://hlinksldjump"/>
               </a:rPr>
               <a:t>[9]</a:t>
             </a:r>
             <a:r>
               <a:rPr lang="en-IN" sz="2400" dirty="0">
                 <a:latin typeface="Barlow" panose="00000500000000000000" pitchFamily="2" charset="0"/>
-              </a:rPr>
-              <a:t> Passage Ranking (~500K query-passage pairs)</a:t>
+                <a:hlinkClick r:id="rId2" action="ppaction://hlinksldjump"/>
+              </a:rPr>
+              <a:t> </a:t>
+            </a:r>
+            <a:r>
+              <a:rPr lang="en-IN" sz="2400" dirty="0">
+                <a:latin typeface="Barlow" panose="00000500000000000000" pitchFamily="2" charset="0"/>
+              </a:rPr>
+              <a:t>Passage Ranking (~500K query-passage pairs)</a:t>
             </a:r>
           </a:p>
           <a:p>
@@ -10435,14 +10447,22 @@
             <a:r>
               <a:rPr lang="en-IN" sz="2400" b="1" baseline="30000" dirty="0">
                 <a:latin typeface="Barlow" panose="00000500000000000000" pitchFamily="2" charset="0"/>
+                <a:hlinkClick r:id="rId3" action="ppaction://hlinksldjump"/>
               </a:rPr>
               <a:t>[8]</a:t>
             </a:r>
             <a:r>
               <a:rPr lang="en-IN" sz="2400" dirty="0">
                 <a:latin typeface="Barlow" panose="00000500000000000000" pitchFamily="2" charset="0"/>
-              </a:rPr>
-              <a:t> 2019 (43 queries with comprehensive relevance judgments)</a:t>
+                <a:hlinkClick r:id="rId3" action="ppaction://hlinksldjump"/>
+              </a:rPr>
+              <a:t> </a:t>
+            </a:r>
+            <a:r>
+              <a:rPr lang="en-IN" sz="2400" dirty="0">
+                <a:latin typeface="Barlow" panose="00000500000000000000" pitchFamily="2" charset="0"/>
+              </a:rPr>
+              <a:t>2019 (43 queries with comprehensive relevance judgments)</a:t>
             </a:r>
           </a:p>
           <a:p>
@@ -10488,9 +10508,13 @@
             <a:r>
               <a:rPr lang="en-IN" sz="2400" b="1" baseline="30000" dirty="0">
                 <a:latin typeface="Barlow" panose="00000500000000000000" pitchFamily="2" charset="0"/>
+                <a:hlinkClick r:id="rId2" action="ppaction://hlinksldjump"/>
               </a:rPr>
               <a:t>[10]</a:t>
             </a:r>
+            <a:endParaRPr lang="en-IN" sz="2400" b="1" baseline="30000" dirty="0">
+              <a:latin typeface="Barlow" panose="00000500000000000000" pitchFamily="2" charset="0"/>
+            </a:endParaRPr>
           </a:p>
           <a:p>
             <a:pPr lvl="1"/>
@@ -10524,9 +10548,13 @@
             <a:r>
               <a:rPr lang="en-IN" sz="2400" b="1" baseline="30000" dirty="0">
                 <a:latin typeface="Barlow" panose="00000500000000000000" pitchFamily="2" charset="0"/>
+                <a:hlinkClick r:id="rId2" action="ppaction://hlinksldjump"/>
               </a:rPr>
               <a:t>[11]</a:t>
             </a:r>
+            <a:endParaRPr lang="en-IN" sz="2400" b="1" baseline="30000" dirty="0">
+              <a:latin typeface="Barlow" panose="00000500000000000000" pitchFamily="2" charset="0"/>
+            </a:endParaRPr>
           </a:p>
           <a:p>
             <a:pPr lvl="1"/>
@@ -10681,14 +10709,14 @@
           <p:nvPr>
             <p:extLst>
               <p:ext uri="{D42A27DB-BD31-4B8C-83A1-F6EECF244321}">
-                <p14:modId xmlns:p14="http://schemas.microsoft.com/office/powerpoint/2010/main" val="2952616321"/>
+                <p14:modId xmlns:p14="http://schemas.microsoft.com/office/powerpoint/2010/main" val="4000075422"/>
               </p:ext>
             </p:extLst>
           </p:nvPr>
         </p:nvGraphicFramePr>
         <p:xfrm>
           <a:off x="782704" y="1812991"/>
-          <a:ext cx="10629934" cy="2621280"/>
+          <a:ext cx="10629934" cy="2926080"/>
         </p:xfrm>
         <a:graphic>
           <a:graphicData uri="http://schemas.openxmlformats.org/drawingml/2006/table">
@@ -10780,7 +10808,7 @@
                           </a:effectLst>
                           <a:latin typeface="Barlow Medium" panose="00000600000000000000" pitchFamily="2" charset="0"/>
                         </a:rPr>
-                        <a:t>Parameters</a:t>
+                        <a:t># Parameters</a:t>
                       </a:r>
                       <a:endParaRPr lang="en-IN" sz="2400" dirty="0">
                         <a:effectLst>
@@ -10895,7 +10923,15 @@
                         </a:rPr>
                         <a:t>MiniLM-L12-H384</a:t>
                       </a:r>
-                      <a:endParaRPr lang="en-IN" sz="2000" dirty="0">
+                      <a:r>
+                        <a:rPr lang="en-IN" sz="2000" b="1" baseline="30000" dirty="0">
+                          <a:effectLst/>
+                          <a:latin typeface="Barlow" panose="00000500000000000000" pitchFamily="2" charset="0"/>
+                          <a:hlinkClick r:id="rId3" action="ppaction://hlinksldjump"/>
+                        </a:rPr>
+                        <a:t>[5]</a:t>
+                      </a:r>
+                      <a:endParaRPr lang="en-IN" sz="2000" baseline="30000" dirty="0">
                         <a:effectLst/>
                         <a:latin typeface="Barlow" panose="00000500000000000000" pitchFamily="2" charset="0"/>
                       </a:endParaRPr>
@@ -11086,7 +11122,15 @@
                         </a:rPr>
                         <a:t>GTE-multilingual-base</a:t>
                       </a:r>
-                      <a:endParaRPr lang="en-IN" sz="2000" dirty="0">
+                      <a:r>
+                        <a:rPr lang="en-IN" sz="2000" b="1" baseline="30000" dirty="0">
+                          <a:effectLst/>
+                          <a:latin typeface="Barlow" panose="00000500000000000000" pitchFamily="2" charset="0"/>
+                          <a:hlinkClick r:id="rId3" action="ppaction://hlinksldjump"/>
+                        </a:rPr>
+                        <a:t>[7]</a:t>
+                      </a:r>
+                      <a:endParaRPr lang="en-IN" sz="2000" baseline="30000" dirty="0">
                         <a:effectLst/>
                         <a:latin typeface="Barlow" panose="00000500000000000000" pitchFamily="2" charset="0"/>
                       </a:endParaRPr>
@@ -11271,13 +11315,21 @@
                     <a:p>
                       <a:pPr algn="l"/>
                       <a:r>
-                        <a:rPr lang="en-IN" sz="2000" b="1">
+                        <a:rPr lang="en-IN" sz="2000" b="1" dirty="0">
                           <a:effectLst/>
                           <a:latin typeface="Barlow" panose="00000500000000000000" pitchFamily="2" charset="0"/>
                         </a:rPr>
                         <a:t>ModernBERT-base</a:t>
                       </a:r>
-                      <a:endParaRPr lang="en-IN" sz="2000">
+                      <a:r>
+                        <a:rPr lang="en-IN" sz="2000" b="1" baseline="30000" dirty="0">
+                          <a:effectLst/>
+                          <a:latin typeface="Barlow" panose="00000500000000000000" pitchFamily="2" charset="0"/>
+                          <a:hlinkClick r:id="rId3" action="ppaction://hlinksldjump"/>
+                        </a:rPr>
+                        <a:t>[6]</a:t>
+                      </a:r>
+                      <a:endParaRPr lang="en-IN" sz="2000" baseline="30000" dirty="0">
                         <a:effectLst/>
                         <a:latin typeface="Barlow" panose="00000500000000000000" pitchFamily="2" charset="0"/>
                       </a:endParaRPr>
@@ -11320,7 +11372,7 @@
                     <a:p>
                       <a:pPr algn="l"/>
                       <a:r>
-                        <a:rPr lang="en-IN" sz="2000">
+                        <a:rPr lang="en-IN" sz="2000" dirty="0">
                           <a:effectLst/>
                           <a:latin typeface="Barlow" panose="00000500000000000000" pitchFamily="2" charset="0"/>
                         </a:rPr>
@@ -11414,8 +11466,57 @@
                           <a:effectLst/>
                           <a:latin typeface="Barlow" panose="00000500000000000000" pitchFamily="2" charset="0"/>
                         </a:rPr>
-                        <a:t>RoPE, Flash Attention, GeGLU</a:t>
+                        <a:t>RoPE</a:t>
                       </a:r>
+                      <a:r>
+                        <a:rPr lang="en-IN" sz="2000" baseline="30000" dirty="0">
+                          <a:effectLst/>
+                          <a:latin typeface="Barlow" panose="00000500000000000000" pitchFamily="2" charset="0"/>
+                          <a:hlinkClick r:id="rId4" action="ppaction://hlinksldjump"/>
+                        </a:rPr>
+                        <a:t>[12]</a:t>
+                      </a:r>
+                      <a:r>
+                        <a:rPr lang="en-IN" sz="2000" baseline="30000" dirty="0">
+                          <a:effectLst/>
+                          <a:latin typeface="Barlow" panose="00000500000000000000" pitchFamily="2" charset="0"/>
+                        </a:rPr>
+                        <a:t>, </a:t>
+                      </a:r>
+                      <a:r>
+                        <a:rPr lang="en-IN" sz="2000" dirty="0">
+                          <a:effectLst/>
+                          <a:latin typeface="Barlow" panose="00000500000000000000" pitchFamily="2" charset="0"/>
+                        </a:rPr>
+                        <a:t>Flash Attention</a:t>
+                      </a:r>
+                      <a:r>
+                        <a:rPr lang="en-IN" sz="2000" baseline="30000" dirty="0">
+                          <a:effectLst/>
+                          <a:latin typeface="Barlow" panose="00000500000000000000" pitchFamily="2" charset="0"/>
+                          <a:hlinkClick r:id="rId4" action="ppaction://hlinksldjump"/>
+                        </a:rPr>
+                        <a:t>[13]</a:t>
+                      </a:r>
+                      <a:r>
+                        <a:rPr lang="en-IN" sz="2000" dirty="0">
+                          <a:effectLst/>
+                          <a:latin typeface="Barlow" panose="00000500000000000000" pitchFamily="2" charset="0"/>
+                        </a:rPr>
+                        <a:t>, GeGLU</a:t>
+                      </a:r>
+                      <a:r>
+                        <a:rPr lang="en-IN" sz="2000" baseline="30000" dirty="0">
+                          <a:effectLst/>
+                          <a:latin typeface="Barlow" panose="00000500000000000000" pitchFamily="2" charset="0"/>
+                          <a:hlinkClick r:id="rId4" action="ppaction://hlinksldjump"/>
+                        </a:rPr>
+                        <a:t>[14]</a:t>
+                      </a:r>
+                      <a:endParaRPr lang="en-IN" sz="2000" baseline="30000" dirty="0">
+                        <a:effectLst/>
+                        <a:latin typeface="Barlow" panose="00000500000000000000" pitchFamily="2" charset="0"/>
+                      </a:endParaRPr>
                     </a:p>
                   </a:txBody>
                   <a:tcPr anchor="ctr">
@@ -11737,7 +11838,7 @@
           <p:nvPr>
             <p:extLst>
               <p:ext uri="{D42A27DB-BD31-4B8C-83A1-F6EECF244321}">
-                <p14:modId xmlns:p14="http://schemas.microsoft.com/office/powerpoint/2010/main" val="2013879173"/>
+                <p14:modId xmlns:p14="http://schemas.microsoft.com/office/powerpoint/2010/main" val="4110281572"/>
               </p:ext>
             </p:extLst>
           </p:nvPr>
@@ -11939,7 +12040,28 @@
                           <a:effectLst/>
                           <a:latin typeface="Barlow" panose="00000500000000000000" pitchFamily="2" charset="0"/>
                         </a:rPr>
-                        <a:t>2e-5 (2e-6 for ModernBERT)</a:t>
+                        <a:t>2e-5 (2e-6 for ModernBERT</a:t>
+                      </a:r>
+                      <a:r>
+                        <a:rPr lang="en-IN" sz="2000" baseline="30000" dirty="0">
+                          <a:solidFill>
+                            <a:schemeClr val="tx1"/>
+                          </a:solidFill>
+                          <a:effectLst/>
+                          <a:latin typeface="Barlow" panose="00000500000000000000" pitchFamily="2" charset="0"/>
+                          <a:hlinkClick r:id="rId2" action="ppaction://hlinksldjump"/>
+                        </a:rPr>
+                        <a:t>[6]</a:t>
+                      </a:r>
+                      <a:r>
+                        <a:rPr lang="en-IN" sz="2000" dirty="0">
+                          <a:solidFill>
+                            <a:schemeClr val="tx1"/>
+                          </a:solidFill>
+                          <a:effectLst/>
+                          <a:latin typeface="Barlow" panose="00000500000000000000" pitchFamily="2" charset="0"/>
+                        </a:rPr>
+                        <a:t>)</a:t>
                       </a:r>
                     </a:p>
                   </a:txBody>
@@ -12432,7 +12554,7 @@
                     <a:p>
                       <a:pPr algn="ctr"/>
                       <a:r>
-                        <a:rPr lang="en-IN" sz="2000">
+                        <a:rPr lang="en-IN" sz="2000" dirty="0">
                           <a:solidFill>
                             <a:schemeClr val="tx1"/>
                           </a:solidFill>
@@ -12535,7 +12657,7 @@
 </file>
 
 <file path=ppt/slides/slide16.xml><?xml version="1.0" encoding="utf-8"?>
-<p:sld xmlns:a="http://schemas.openxmlformats.org/drawingml/2006/main" xmlns:r="http://schemas.openxmlformats.org/officeDocument/2006/relationships" xmlns:p="http://schemas.openxmlformats.org/presentationml/2006/main" show="0">
+<p:sld xmlns:a="http://schemas.openxmlformats.org/drawingml/2006/main" xmlns:r="http://schemas.openxmlformats.org/officeDocument/2006/relationships" xmlns:p="http://schemas.openxmlformats.org/presentationml/2006/main">
   <p:cSld>
     <p:spTree>
       <p:nvGrpSpPr>
@@ -12576,7 +12698,7 @@
               <a:rPr lang="en-GB" dirty="0">
                 <a:latin typeface="Barlow ExtraBold" panose="00000900000000000000" pitchFamily="2" charset="0"/>
               </a:rPr>
-              <a:t>Evaluation Metrices</a:t>
+              <a:t>Evaluation Metrics</a:t>
             </a:r>
             <a:endParaRPr lang="en-IN" dirty="0">
               <a:latin typeface="Barlow ExtraBold" panose="00000900000000000000" pitchFamily="2" charset="0"/>
@@ -12599,7 +12721,7 @@
         <p:spPr>
           <a:xfrm>
             <a:off x="527427" y="2346760"/>
-            <a:ext cx="8428911" cy="461665"/>
+            <a:ext cx="8938665" cy="461665"/>
           </a:xfrm>
           <a:prstGeom prst="rect">
             <a:avLst/>
@@ -12618,6 +12740,16 @@
               </a:rPr>
               <a:t>NDCG@10 - Normalized Discounted Cumulative Gain at rank 10</a:t>
             </a:r>
+            <a:r>
+              <a:rPr lang="en-GB" sz="2400" baseline="30000" dirty="0">
+                <a:latin typeface="Barlow Medium" panose="00000600000000000000" pitchFamily="2" charset="0"/>
+                <a:hlinkClick r:id="rId2" action="ppaction://hlinksldjump"/>
+              </a:rPr>
+              <a:t>[16]</a:t>
+            </a:r>
+            <a:endParaRPr lang="en-GB" sz="2400" baseline="30000" dirty="0">
+              <a:latin typeface="Barlow Medium" panose="00000600000000000000" pitchFamily="2" charset="0"/>
+            </a:endParaRPr>
           </a:p>
         </p:txBody>
       </p:sp>
@@ -12673,7 +12805,7 @@
           <p:nvPr/>
         </p:nvPicPr>
         <p:blipFill>
-          <a:blip r:embed="rId2"/>
+          <a:blip r:embed="rId3"/>
           <a:stretch>
             <a:fillRect/>
           </a:stretch>
@@ -12702,7 +12834,7 @@
 </file>
 
 <file path=ppt/slides/slide17.xml><?xml version="1.0" encoding="utf-8"?>
-<p:sld xmlns:a="http://schemas.openxmlformats.org/drawingml/2006/main" xmlns:r="http://schemas.openxmlformats.org/officeDocument/2006/relationships" xmlns:p="http://schemas.openxmlformats.org/presentationml/2006/main" show="0">
+<p:sld xmlns:a="http://schemas.openxmlformats.org/drawingml/2006/main" xmlns:r="http://schemas.openxmlformats.org/officeDocument/2006/relationships" xmlns:p="http://schemas.openxmlformats.org/presentationml/2006/main">
   <p:cSld>
     <p:spTree>
       <p:nvGrpSpPr>
@@ -12749,7 +12881,7 @@
               <a:rPr lang="en-GB" dirty="0">
                 <a:latin typeface="Barlow ExtraBold" panose="00000900000000000000" pitchFamily="2" charset="0"/>
               </a:rPr>
-              <a:t>Evaluation Metrices</a:t>
+              <a:t>Evaluation Metrics</a:t>
             </a:r>
             <a:endParaRPr lang="en-IN" dirty="0">
               <a:latin typeface="Barlow ExtraBold" panose="00000900000000000000" pitchFamily="2" charset="0"/>
@@ -18911,7 +19043,7 @@
           <p:nvPr>
             <p:extLst>
               <p:ext uri="{D42A27DB-BD31-4B8C-83A1-F6EECF244321}">
-                <p14:modId xmlns:p14="http://schemas.microsoft.com/office/powerpoint/2010/main" val="3728589400"/>
+                <p14:modId xmlns:p14="http://schemas.microsoft.com/office/powerpoint/2010/main" val="3211580055"/>
               </p:ext>
             </p:extLst>
           </p:nvPr>
@@ -19136,6 +19268,16 @@
                     <a:p>
                       <a:pPr algn="ctr"/>
                       <a:r>
+                        <a:rPr lang="en-GB" sz="2000" dirty="0">
+                          <a:solidFill>
+                            <a:srgbClr val="334155"/>
+                          </a:solidFill>
+                          <a:effectLst/>
+                          <a:latin typeface="Barlow" panose="00000500000000000000" pitchFamily="2" charset="0"/>
+                        </a:rPr>
+                        <a:t>A</a:t>
+                      </a:r>
+                      <a:r>
                         <a:rPr lang="en-IN" sz="2000" dirty="0">
                           <a:solidFill>
                             <a:srgbClr val="334155"/>
@@ -19143,7 +19285,7 @@
                           <a:effectLst/>
                           <a:latin typeface="Barlow" panose="00000500000000000000" pitchFamily="2" charset="0"/>
                         </a:rPr>
-                        <a:t>Lion</a:t>
+                        <a:t>damW</a:t>
                       </a:r>
                     </a:p>
                   </a:txBody>
@@ -19176,7 +19318,7 @@
                           <a:effectLst/>
                           <a:latin typeface="Barlow" panose="00000500000000000000" pitchFamily="2" charset="0"/>
                         </a:rPr>
-                        <a:t>Best metrics + efficiency</a:t>
+                        <a:t>Best metrics</a:t>
                       </a:r>
                     </a:p>
                   </a:txBody>
@@ -20301,7 +20443,7 @@
         </p:spPr>
         <p:txBody>
           <a:bodyPr>
-            <a:normAutofit lnSpcReduction="10000"/>
+            <a:normAutofit fontScale="92500" lnSpcReduction="20000"/>
           </a:bodyPr>
           <a:lstStyle/>
           <a:p>
@@ -20396,6 +20538,18 @@
                 <a:latin typeface="Barlow" panose="00000500000000000000" pitchFamily="2" charset="0"/>
               </a:rPr>
               <a:t>I. Loshchilov and F. Hutter, "SGDR: Stochastic Gradient Descent with Warm Restarts," in Proc. International Conference on Learning Representations (ICLR), 2017.</a:t>
+            </a:r>
+          </a:p>
+          <a:p>
+            <a:pPr marL="457200" indent="-457200">
+              <a:buFont typeface="+mj-lt"/>
+              <a:buAutoNum type="arabicPeriod" startAt="9"/>
+            </a:pPr>
+            <a:r>
+              <a:rPr lang="en-GB" sz="2000" dirty="0">
+                <a:latin typeface="Barlow" panose="00000500000000000000" pitchFamily="2" charset="0"/>
+              </a:rPr>
+              <a:t>Y. Wang et al., “A theoretical analysis of NDCG type ranking measures,” arXiv preprint arXiv:1304.6480, Apr. 2013.</a:t>
             </a:r>
             <a:endParaRPr lang="en-IN" sz="2000" dirty="0">
               <a:latin typeface="Barlow" panose="00000500000000000000" pitchFamily="2" charset="0"/>
@@ -20787,7 +20941,17 @@
             </a:r>
             <a:r>
               <a:rPr lang="en-IN" sz="2000" b="1" baseline="30000" dirty="0">
+                <a:solidFill>
+                  <a:srgbClr val="FF0000"/>
+                </a:solidFill>
                 <a:latin typeface="Barlow" panose="00000500000000000000" pitchFamily="2" charset="0"/>
+                <a:hlinkClick r:id="rId3" action="ppaction://hlinksldjump">
+                  <a:extLst>
+                    <a:ext uri="{A12FA001-AC4F-418D-AE19-62706E023703}">
+                      <ahyp:hlinkClr xmlns:ahyp="http://schemas.microsoft.com/office/drawing/2018/hyperlinkcolor" val="tx"/>
+                    </a:ext>
+                  </a:extLst>
+                </a:hlinkClick>
               </a:rPr>
               <a:t>[2] </a:t>
             </a:r>
@@ -20820,7 +20984,17 @@
             </a:r>
             <a:r>
               <a:rPr lang="en-IN" sz="2000" b="1" baseline="30000" dirty="0">
+                <a:solidFill>
+                  <a:srgbClr val="FF0000"/>
+                </a:solidFill>
                 <a:latin typeface="Barlow" panose="00000500000000000000" pitchFamily="2" charset="0"/>
+                <a:hlinkClick r:id="rId3" action="ppaction://hlinksldjump">
+                  <a:extLst>
+                    <a:ext uri="{A12FA001-AC4F-418D-AE19-62706E023703}">
+                      <ahyp:hlinkClr xmlns:ahyp="http://schemas.microsoft.com/office/drawing/2018/hyperlinkcolor" val="tx"/>
+                    </a:ext>
+                  </a:extLst>
+                </a:hlinkClick>
               </a:rPr>
               <a:t>[4] </a:t>
             </a:r>
@@ -21068,27 +21242,49 @@
             </a:r>
             <a:r>
               <a:rPr lang="en-IN" sz="2000" b="1" baseline="30000" dirty="0">
+                <a:solidFill>
+                  <a:srgbClr val="FF0000"/>
+                </a:solidFill>
                 <a:latin typeface="Barlow" panose="00000500000000000000" pitchFamily="2" charset="0"/>
+                <a:hlinkClick r:id="rId3" action="ppaction://hlinksldjump"/>
               </a:rPr>
               <a:t>[4]</a:t>
+            </a:r>
+            <a:r>
+              <a:rPr lang="en-IN" sz="2000" dirty="0">
+                <a:solidFill>
+                  <a:srgbClr val="FF0000"/>
+                </a:solidFill>
+                <a:latin typeface="Barlow" panose="00000500000000000000" pitchFamily="2" charset="0"/>
+                <a:hlinkClick r:id="rId3" action="ppaction://hlinksldjump"/>
+              </a:rPr>
+              <a:t> </a:t>
             </a:r>
             <a:r>
               <a:rPr lang="en-IN" sz="2000" dirty="0">
                 <a:latin typeface="Barlow" panose="00000500000000000000" pitchFamily="2" charset="0"/>
               </a:rPr>
-              <a:t> and AdamW</a:t>
+              <a:t>and AdamW</a:t>
             </a:r>
             <a:r>
               <a:rPr lang="en-IN" sz="2000" b="1" baseline="30000" dirty="0">
                 <a:latin typeface="Barlow" panose="00000500000000000000" pitchFamily="2" charset="0"/>
+                <a:hlinkClick r:id="rId3" action="ppaction://hlinksldjump"/>
               </a:rPr>
               <a:t>[3]</a:t>
             </a:r>
             <a:r>
               <a:rPr lang="en-IN" sz="2000" dirty="0">
                 <a:latin typeface="Barlow" panose="00000500000000000000" pitchFamily="2" charset="0"/>
-              </a:rPr>
-              <a:t> across three transformer architectures.</a:t>
+                <a:hlinkClick r:id="rId3" action="ppaction://hlinksldjump"/>
+              </a:rPr>
+              <a:t> </a:t>
+            </a:r>
+            <a:r>
+              <a:rPr lang="en-IN" sz="2000" dirty="0">
+                <a:latin typeface="Barlow" panose="00000500000000000000" pitchFamily="2" charset="0"/>
+              </a:rPr>
+              <a:t>across three transformer architectures.</a:t>
             </a:r>
           </a:p>
           <a:p>
@@ -21114,6 +21310,7 @@
             <a:r>
               <a:rPr lang="en-IN" sz="2000" b="1" baseline="30000" dirty="0">
                 <a:latin typeface="Barlow" panose="00000500000000000000" pitchFamily="2" charset="0"/>
+                <a:hlinkClick r:id="rId3" action="ppaction://hlinksldjump"/>
               </a:rPr>
               <a:t>[8] </a:t>
             </a:r>
@@ -21126,15 +21323,20 @@
             <a:r>
               <a:rPr lang="en-IN" sz="2000" b="1" baseline="30000" dirty="0">
                 <a:latin typeface="Barlow" panose="00000500000000000000" pitchFamily="2" charset="0"/>
+                <a:hlinkClick r:id="rId4" action="ppaction://hlinksldjump"/>
               </a:rPr>
               <a:t>[9]</a:t>
             </a:r>
             <a:r>
               <a:rPr lang="en-IN" sz="2000" dirty="0">
                 <a:latin typeface="Barlow" panose="00000500000000000000" pitchFamily="2" charset="0"/>
+                <a:hlinkClick r:id="rId4" action="ppaction://hlinksldjump"/>
               </a:rPr>
               <a:t>.</a:t>
             </a:r>
+            <a:endParaRPr lang="en-IN" sz="2000" dirty="0">
+              <a:latin typeface="Barlow" panose="00000500000000000000" pitchFamily="2" charset="0"/>
+            </a:endParaRPr>
           </a:p>
           <a:p>
             <a:pPr marL="342900" indent="-342900" algn="just">
@@ -21476,6 +21678,7 @@
             <a:r>
               <a:rPr lang="en-IN" sz="2000" b="1" baseline="30000" dirty="0">
                 <a:latin typeface="Barlow" panose="00000500000000000000" pitchFamily="2" charset="0"/>
+                <a:hlinkClick r:id="rId2" action="ppaction://hlinksldjump"/>
               </a:rPr>
               <a:t>[2] </a:t>
             </a:r>
@@ -21546,6 +21749,7 @@
             <a:r>
               <a:rPr lang="en-IN" sz="2000" b="1" baseline="30000" dirty="0">
                 <a:latin typeface="Barlow" panose="00000500000000000000" pitchFamily="2" charset="0"/>
+                <a:hlinkClick r:id="rId2" action="ppaction://hlinksldjump"/>
               </a:rPr>
               <a:t>[5]</a:t>
             </a:r>
@@ -21566,6 +21770,7 @@
             <a:r>
               <a:rPr lang="en-IN" sz="2000" b="1" baseline="30000" dirty="0">
                 <a:latin typeface="Barlow" panose="00000500000000000000" pitchFamily="2" charset="0"/>
+                <a:hlinkClick r:id="rId2" action="ppaction://hlinksldjump"/>
               </a:rPr>
               <a:t>[7]</a:t>
             </a:r>
@@ -21586,6 +21791,7 @@
             <a:r>
               <a:rPr lang="en-IN" sz="2000" b="1" baseline="30000" dirty="0">
                 <a:latin typeface="Barlow" panose="00000500000000000000" pitchFamily="2" charset="0"/>
+                <a:hlinkClick r:id="rId2" action="ppaction://hlinksldjump"/>
               </a:rPr>
               <a:t>[6]</a:t>
             </a:r>
@@ -21598,18 +21804,34 @@
             <a:r>
               <a:rPr lang="en-IN" sz="2000" b="1" baseline="30000" dirty="0">
                 <a:latin typeface="Barlow" panose="00000500000000000000" pitchFamily="2" charset="0"/>
+                <a:hlinkClick r:id="rId3" action="ppaction://hlinksldjump"/>
               </a:rPr>
               <a:t>[12]</a:t>
             </a:r>
             <a:r>
               <a:rPr lang="en-IN" sz="2000" dirty="0">
                 <a:latin typeface="Barlow" panose="00000500000000000000" pitchFamily="2" charset="0"/>
-              </a:rPr>
-              <a:t>, Flash Attention</a:t>
+                <a:hlinkClick r:id="rId3" action="ppaction://hlinksldjump"/>
+              </a:rPr>
+              <a:t>,</a:t>
+            </a:r>
+            <a:r>
+              <a:rPr lang="en-IN" sz="2000" dirty="0">
+                <a:latin typeface="Barlow" panose="00000500000000000000" pitchFamily="2" charset="0"/>
+                <a:hlinkClick r:id="rId3" action="ppaction://hlinksldjump"/>
+              </a:rPr>
+              <a:t> </a:t>
+            </a:r>
+            <a:r>
+              <a:rPr lang="en-IN" sz="2000" dirty="0">
+                <a:latin typeface="Barlow" panose="00000500000000000000" pitchFamily="2" charset="0"/>
+              </a:rPr>
+              <a:t>Flash Attention</a:t>
             </a:r>
             <a:r>
               <a:rPr lang="en-IN" sz="2000" b="1" baseline="30000" dirty="0">
                 <a:latin typeface="Barlow" panose="00000500000000000000" pitchFamily="2" charset="0"/>
+                <a:hlinkClick r:id="rId3" action="ppaction://hlinksldjump"/>
               </a:rPr>
               <a:t>[13]</a:t>
             </a:r>
@@ -21713,13 +21935,12 @@
         </p:nvPicPr>
         <p:blipFill>
           <a:blip r:embed="rId3"/>
-          <a:stretch>
-            <a:fillRect/>
-          </a:stretch>
+          <a:srcRect/>
+          <a:stretch/>
         </p:blipFill>
         <p:spPr>
           <a:xfrm>
-            <a:off x="190791" y="0"/>
+            <a:off x="190791" y="158262"/>
             <a:ext cx="8416314" cy="6413632"/>
           </a:xfrm>
         </p:spPr>
@@ -21796,46 +22017,6 @@
               <a:t>Superior Accuracy</a:t>
             </a:r>
             <a:endParaRPr lang="en-IN" sz="2400" dirty="0"/>
-          </a:p>
-        </p:txBody>
-      </p:sp>
-      <p:sp>
-        <p:nvSpPr>
-          <p:cNvPr id="3" name="TextBox 2">
-            <a:extLst>
-              <a:ext uri="{FF2B5EF4-FFF2-40B4-BE49-F238E27FC236}">
-                <a16:creationId xmlns:a16="http://schemas.microsoft.com/office/drawing/2014/main" id="{E24BAE9E-E4A3-0531-F9FE-CE2D7EB0AB6D}"/>
-              </a:ext>
-            </a:extLst>
-          </p:cNvPr>
-          <p:cNvSpPr txBox="1"/>
-          <p:nvPr/>
-        </p:nvSpPr>
-        <p:spPr>
-          <a:xfrm>
-            <a:off x="2370222" y="6476040"/>
-            <a:ext cx="5470358" cy="369332"/>
-          </a:xfrm>
-          <a:prstGeom prst="rect">
-            <a:avLst/>
-          </a:prstGeom>
-          <a:noFill/>
-        </p:spPr>
-        <p:txBody>
-          <a:bodyPr wrap="square" rtlCol="0">
-            <a:spAutoFit/>
-          </a:bodyPr>
-          <a:lstStyle/>
-          <a:p>
-            <a:r>
-              <a:rPr lang="en-GB" dirty="0">
-                <a:latin typeface="Barlow" panose="00000500000000000000" pitchFamily="2" charset="0"/>
-              </a:rPr>
-              <a:t>Image Source: Claude Sonnet 4 (Anthropic, 2025)</a:t>
-            </a:r>
-            <a:endParaRPr lang="en-IN" dirty="0">
-              <a:latin typeface="Barlow" panose="00000500000000000000" pitchFamily="2" charset="0"/>
-            </a:endParaRPr>
           </a:p>
         </p:txBody>
       </p:sp>
@@ -21910,9 +22091,13 @@
             <a:r>
               <a:rPr lang="en-IN" sz="2800" baseline="30000" dirty="0">
                 <a:latin typeface="Barlow SemiBold" panose="00000700000000000000" pitchFamily="2" charset="0"/>
+                <a:hlinkClick r:id="rId2" action="ppaction://hlinksldjump"/>
               </a:rPr>
               <a:t>[3]</a:t>
             </a:r>
+            <a:endParaRPr lang="en-IN" sz="2800" baseline="30000" dirty="0">
+              <a:latin typeface="Barlow SemiBold" panose="00000700000000000000" pitchFamily="2" charset="0"/>
+            </a:endParaRPr>
           </a:p>
         </p:txBody>
       </p:sp>
@@ -22099,6 +22284,7 @@
       <p:pic>
         <p:nvPicPr>
           <p:cNvPr id="7" name="@holatex&#10;\begin{document}&#10;\center&#10;\Large&#10;AdamW Optimizer&#10;\medskip&#10;&#10;\begin{align}&#10;m_t &amp;= \beta_1 m_{t-1} + (1 - \beta_1) g_t \\&#10;v_t &amp;= \beta_2 v_{t-1} + (1 - \beta_2) g_t^2 \\&#10;\hat{m}_t &amp;= \frac{m_t}{1 - \beta_1^t} \\&#10;\hat{v}_t &amp;= \frac{v_t}{1 - \beta_2^t} \\&#10;\theta_t &amp;= \theta_{t-1} - \eta \left( \frac{\hat{m}_t}{\sqrt{\hat{v}_t} + \epsilon} + \lambda \theta_{t-1} \right)&#10;\end{align}&#10;&#10;\end{document}">
+            <a:hlinkClick r:id="rId3" action="ppaction://hlinksldjump"/>
             <a:extLst>
               <a:ext uri="{FF2B5EF4-FFF2-40B4-BE49-F238E27FC236}">
                 <a16:creationId xmlns:a16="http://schemas.microsoft.com/office/drawing/2014/main" id="{9ADE2C19-748C-BEF1-E01F-6CA5DA982809}"/>
@@ -22111,7 +22297,7 @@
           <p:nvPr/>
         </p:nvPicPr>
         <p:blipFill>
-          <a:blip r:embed="rId3"/>
+          <a:blip r:embed="rId4"/>
           <a:stretch>
             <a:fillRect/>
           </a:stretch>
@@ -22141,7 +22327,7 @@
           <p:nvPr/>
         </p:nvPicPr>
         <p:blipFill>
-          <a:blip r:embed="rId4"/>
+          <a:blip r:embed="rId5"/>
           <a:stretch>
             <a:fillRect/>
           </a:stretch>
@@ -22998,7 +23184,7 @@
 
 <file path=ppt/webextensions/taskpanes.xml><?xml version="1.0" encoding="utf-8"?>
 <wetp:taskpanes xmlns:wetp="http://schemas.microsoft.com/office/webextensions/taskpanes/2010/11">
-  <wetp:taskpane dockstate="right" visibility="0" width="438" row="10">
+  <wetp:taskpane dockstate="right" visibility="0" width="578" row="1">
     <wetp:webextensionref xmlns:r="http://schemas.openxmlformats.org/officeDocument/2006/relationships" r:id="rId1"/>
   </wetp:taskpane>
 </wetp:taskpanes>
@@ -23336,18 +23522,18 @@
 <file path=customXml/itemProps1.xml><?xml version="1.0" encoding="utf-8"?>
 <ds:datastoreItem xmlns:ds="http://schemas.openxmlformats.org/officeDocument/2006/customXml" ds:itemID="{BC8413E5-0484-489B-B293-D8720B6027F2}">
   <ds:schemaRefs>
-    <ds:schemaRef ds:uri="16c05727-aa75-4e4a-9b5f-8a80a1165891"/>
-    <ds:schemaRef ds:uri="http://purl.org/dc/terms/"/>
+    <ds:schemaRef ds:uri="http://purl.org/dc/elements/1.1/"/>
     <ds:schemaRef ds:uri="http://schemas.microsoft.com/office/2006/metadata/properties"/>
+    <ds:schemaRef ds:uri="http://schemas.microsoft.com/sharepoint/v3"/>
+    <ds:schemaRef ds:uri="http://schemas.microsoft.com/office/2006/documentManagement/types"/>
+    <ds:schemaRef ds:uri="230e9df3-be65-4c73-a93b-d1236ebd677e"/>
     <ds:schemaRef ds:uri="http://schemas.microsoft.com/office/infopath/2007/PartnerControls"/>
     <ds:schemaRef ds:uri="http://www.w3.org/XML/1998/namespace"/>
-    <ds:schemaRef ds:uri="http://schemas.microsoft.com/office/2006/documentManagement/types"/>
     <ds:schemaRef ds:uri="http://schemas.openxmlformats.org/package/2006/metadata/core-properties"/>
+    <ds:schemaRef ds:uri="http://purl.org/dc/terms/"/>
+    <ds:schemaRef ds:uri="16c05727-aa75-4e4a-9b5f-8a80a1165891"/>
     <ds:schemaRef ds:uri="71af3243-3dd4-4a8d-8c0d-dd76da1f02a5"/>
-    <ds:schemaRef ds:uri="230e9df3-be65-4c73-a93b-d1236ebd677e"/>
-    <ds:schemaRef ds:uri="http://schemas.microsoft.com/sharepoint/v3"/>
     <ds:schemaRef ds:uri="http://purl.org/dc/dcmitype/"/>
-    <ds:schemaRef ds:uri="http://purl.org/dc/elements/1.1/"/>
   </ds:schemaRefs>
 </ds:datastoreItem>
 </file>

--- a/cross_encoder/thesis/Thesis_presentation.pptx
+++ b/cross_encoder/thesis/Thesis_presentation.pptx
@@ -18628,6 +18628,46 @@
             </a:r>
             <a:endParaRPr lang="en-IN" sz="2000" dirty="0">
               <a:latin typeface="Barlow SemiBold" panose="00000700000000000000" pitchFamily="2" charset="0"/>
+            </a:endParaRPr>
+          </a:p>
+        </p:txBody>
+      </p:sp>
+      <p:sp>
+        <p:nvSpPr>
+          <p:cNvPr id="2" name="TextBox 1">
+            <a:extLst>
+              <a:ext uri="{FF2B5EF4-FFF2-40B4-BE49-F238E27FC236}">
+                <a16:creationId xmlns:a16="http://schemas.microsoft.com/office/drawing/2014/main" id="{CEC592ED-C90F-911E-D6D9-9690BFA70C4C}"/>
+              </a:ext>
+            </a:extLst>
+          </p:cNvPr>
+          <p:cNvSpPr txBox="1"/>
+          <p:nvPr/>
+        </p:nvSpPr>
+        <p:spPr>
+          <a:xfrm>
+            <a:off x="7825153" y="1679336"/>
+            <a:ext cx="3659976" cy="369332"/>
+          </a:xfrm>
+          <a:prstGeom prst="rect">
+            <a:avLst/>
+          </a:prstGeom>
+          <a:noFill/>
+        </p:spPr>
+        <p:txBody>
+          <a:bodyPr wrap="none" rtlCol="0">
+            <a:spAutoFit/>
+          </a:bodyPr>
+          <a:lstStyle/>
+          <a:p>
+            <a:r>
+              <a:rPr lang="en-GB" b="1" dirty="0">
+                <a:latin typeface="Barlow" panose="00000500000000000000" pitchFamily="2" charset="0"/>
+              </a:rPr>
+              <a:t>*All calculations are w.r.t. AdamW</a:t>
+            </a:r>
+            <a:endParaRPr lang="en-IN" b="1" dirty="0">
+              <a:latin typeface="Barlow" panose="00000500000000000000" pitchFamily="2" charset="0"/>
             </a:endParaRPr>
           </a:p>
         </p:txBody>

--- a/cross_encoder/thesis/Thesis_presentation.pptx
+++ b/cross_encoder/thesis/Thesis_presentation.pptx
@@ -10411,23 +10411,94 @@
             </a:r>
             <a:r>
               <a:rPr lang="en-IN" sz="2400" b="1" baseline="30000" dirty="0">
+                <a:solidFill>
+                  <a:srgbClr val="FF0000"/>
+                </a:solidFill>
                 <a:latin typeface="Barlow" panose="00000500000000000000" pitchFamily="2" charset="0"/>
-                <a:hlinkClick r:id="rId2" action="ppaction://hlinksldjump"/>
+                <a:hlinkClick r:id="rId2" action="ppaction://hlinksldjump">
+                  <a:extLst>
+                    <a:ext uri="{A12FA001-AC4F-418D-AE19-62706E023703}">
+                      <ahyp:hlinkClr xmlns:ahyp="http://schemas.microsoft.com/office/drawing/2018/hyperlinkcolor" val="tx"/>
+                    </a:ext>
+                  </a:extLst>
+                </a:hlinkClick>
               </a:rPr>
               <a:t>[9]</a:t>
+            </a:r>
+            <a:r>
+              <a:rPr lang="en-IN" sz="2400" dirty="0">
+                <a:solidFill>
+                  <a:srgbClr val="FFC000"/>
+                </a:solidFill>
+                <a:latin typeface="Barlow" panose="00000500000000000000" pitchFamily="2" charset="0"/>
+                <a:hlinkClick r:id="rId2" action="ppaction://hlinksldjump">
+                  <a:extLst>
+                    <a:ext uri="{A12FA001-AC4F-418D-AE19-62706E023703}">
+                      <ahyp:hlinkClr xmlns:ahyp="http://schemas.microsoft.com/office/drawing/2018/hyperlinkcolor" val="tx"/>
+                    </a:ext>
+                  </a:extLst>
+                </a:hlinkClick>
+              </a:rPr>
+              <a:t> </a:t>
             </a:r>
             <a:r>
               <a:rPr lang="en-IN" sz="2400" dirty="0">
                 <a:latin typeface="Barlow" panose="00000500000000000000" pitchFamily="2" charset="0"/>
-                <a:hlinkClick r:id="rId2" action="ppaction://hlinksldjump"/>
-              </a:rPr>
-              <a:t> </a:t>
+              </a:rPr>
+              <a:t>Passage Ranking (~500K query-passage pairs)</a:t>
+            </a:r>
+          </a:p>
+          <a:p>
+            <a:pPr lvl="1"/>
+            <a:r>
+              <a:rPr lang="en-IN" sz="2400" b="1" dirty="0">
+                <a:latin typeface="Barlow" panose="00000500000000000000" pitchFamily="2" charset="0"/>
+              </a:rPr>
+              <a:t>Evaluation:</a:t>
             </a:r>
             <a:r>
               <a:rPr lang="en-IN" sz="2400" dirty="0">
                 <a:latin typeface="Barlow" panose="00000500000000000000" pitchFamily="2" charset="0"/>
               </a:rPr>
-              <a:t>Passage Ranking (~500K query-passage pairs)</a:t>
+              <a:t> TREC DL</a:t>
+            </a:r>
+            <a:r>
+              <a:rPr lang="en-IN" sz="2400" b="1" baseline="30000" dirty="0">
+                <a:solidFill>
+                  <a:srgbClr val="FF0000"/>
+                </a:solidFill>
+                <a:latin typeface="Barlow" panose="00000500000000000000" pitchFamily="2" charset="0"/>
+                <a:hlinkClick r:id="rId3" action="ppaction://hlinksldjump">
+                  <a:extLst>
+                    <a:ext uri="{A12FA001-AC4F-418D-AE19-62706E023703}">
+                      <ahyp:hlinkClr xmlns:ahyp="http://schemas.microsoft.com/office/drawing/2018/hyperlinkcolor" val="tx"/>
+                    </a:ext>
+                  </a:extLst>
+                </a:hlinkClick>
+              </a:rPr>
+              <a:t>[8]</a:t>
+            </a:r>
+            <a:r>
+              <a:rPr lang="en-IN" sz="2400" dirty="0">
+                <a:solidFill>
+                  <a:srgbClr val="FFC000"/>
+                </a:solidFill>
+                <a:latin typeface="Barlow" panose="00000500000000000000" pitchFamily="2" charset="0"/>
+                <a:hlinkClick r:id="rId3" action="ppaction://hlinksldjump">
+                  <a:extLst>
+                    <a:ext uri="{A12FA001-AC4F-418D-AE19-62706E023703}">
+                      <ahyp:hlinkClr xmlns:ahyp="http://schemas.microsoft.com/office/drawing/2018/hyperlinkcolor" val="tx"/>
+                    </a:ext>
+                  </a:extLst>
+                </a:hlinkClick>
+              </a:rPr>
+              <a:t> </a:t>
+            </a:r>
+            <a:r>
+              <a:rPr lang="en-IN" sz="2400" dirty="0">
+                <a:latin typeface="Barlow" panose="00000500000000000000" pitchFamily="2" charset="0"/>
+              </a:rPr>
+              <a:t>2019 (43 queries with comprehensive relevance judgments)</a:t>
             </a:r>
           </a:p>
           <a:p>
@@ -10436,48 +10507,35 @@
               <a:rPr lang="en-IN" sz="2400" b="1" dirty="0">
                 <a:latin typeface="Barlow" panose="00000500000000000000" pitchFamily="2" charset="0"/>
               </a:rPr>
-              <a:t>Evaluation:</a:t>
+              <a:t>Metrics:</a:t>
             </a:r>
             <a:r>
               <a:rPr lang="en-IN" sz="2400" dirty="0">
                 <a:latin typeface="Barlow" panose="00000500000000000000" pitchFamily="2" charset="0"/>
               </a:rPr>
-              <a:t> TREC DL</a:t>
-            </a:r>
-            <a:r>
-              <a:rPr lang="en-IN" sz="2400" b="1" baseline="30000" dirty="0">
+              <a:t> NDCG@10</a:t>
+            </a:r>
+            <a:r>
+              <a:rPr lang="en-IN" sz="2400" baseline="30000" dirty="0">
+                <a:solidFill>
+                  <a:srgbClr val="FF0000"/>
+                </a:solidFill>
                 <a:latin typeface="Barlow" panose="00000500000000000000" pitchFamily="2" charset="0"/>
-                <a:hlinkClick r:id="rId3" action="ppaction://hlinksldjump"/>
-              </a:rPr>
-              <a:t>[8]</a:t>
+                <a:hlinkClick r:id="rId2" action="ppaction://hlinksldjump">
+                  <a:extLst>
+                    <a:ext uri="{A12FA001-AC4F-418D-AE19-62706E023703}">
+                      <ahyp:hlinkClr xmlns:ahyp="http://schemas.microsoft.com/office/drawing/2018/hyperlinkcolor" val="tx"/>
+                    </a:ext>
+                  </a:extLst>
+                </a:hlinkClick>
+              </a:rPr>
+              <a:t>[16] </a:t>
             </a:r>
             <a:r>
               <a:rPr lang="en-IN" sz="2400" dirty="0">
                 <a:latin typeface="Barlow" panose="00000500000000000000" pitchFamily="2" charset="0"/>
-                <a:hlinkClick r:id="rId3" action="ppaction://hlinksldjump"/>
-              </a:rPr>
-              <a:t> </a:t>
-            </a:r>
-            <a:r>
-              <a:rPr lang="en-IN" sz="2400" dirty="0">
-                <a:latin typeface="Barlow" panose="00000500000000000000" pitchFamily="2" charset="0"/>
-              </a:rPr>
-              <a:t>2019 (43 queries with comprehensive relevance judgments)</a:t>
-            </a:r>
-          </a:p>
-          <a:p>
-            <a:pPr lvl="1"/>
-            <a:r>
-              <a:rPr lang="en-IN" sz="2400" b="1" dirty="0">
-                <a:latin typeface="Barlow" panose="00000500000000000000" pitchFamily="2" charset="0"/>
-              </a:rPr>
-              <a:t>Metrics:</a:t>
-            </a:r>
-            <a:r>
-              <a:rPr lang="en-IN" sz="2400" dirty="0">
-                <a:latin typeface="Barlow" panose="00000500000000000000" pitchFamily="2" charset="0"/>
-              </a:rPr>
-              <a:t> NDCG@10, MAP, MRR@10, Recall@10, R-Precision, P@10</a:t>
+              </a:rPr>
+              <a:t>, MAP, MRR@10, Recall@10, R-Precision, P@10</a:t>
             </a:r>
           </a:p>
           <a:p>
@@ -10507,12 +10565,24 @@
             </a:r>
             <a:r>
               <a:rPr lang="en-IN" sz="2400" b="1" baseline="30000" dirty="0">
+                <a:solidFill>
+                  <a:srgbClr val="FF0000"/>
+                </a:solidFill>
                 <a:latin typeface="Barlow" panose="00000500000000000000" pitchFamily="2" charset="0"/>
-                <a:hlinkClick r:id="rId2" action="ppaction://hlinksldjump"/>
+                <a:hlinkClick r:id="rId2" action="ppaction://hlinksldjump">
+                  <a:extLst>
+                    <a:ext uri="{A12FA001-AC4F-418D-AE19-62706E023703}">
+                      <ahyp:hlinkClr xmlns:ahyp="http://schemas.microsoft.com/office/drawing/2018/hyperlinkcolor" val="tx"/>
+                    </a:ext>
+                  </a:extLst>
+                </a:hlinkClick>
               </a:rPr>
               <a:t>[10]</a:t>
             </a:r>
             <a:endParaRPr lang="en-IN" sz="2400" b="1" baseline="30000" dirty="0">
+              <a:solidFill>
+                <a:srgbClr val="FF0000"/>
+              </a:solidFill>
               <a:latin typeface="Barlow" panose="00000500000000000000" pitchFamily="2" charset="0"/>
             </a:endParaRPr>
           </a:p>
@@ -10547,12 +10617,24 @@
             </a:r>
             <a:r>
               <a:rPr lang="en-IN" sz="2400" b="1" baseline="30000" dirty="0">
+                <a:solidFill>
+                  <a:srgbClr val="FF0000"/>
+                </a:solidFill>
                 <a:latin typeface="Barlow" panose="00000500000000000000" pitchFamily="2" charset="0"/>
-                <a:hlinkClick r:id="rId2" action="ppaction://hlinksldjump"/>
+                <a:hlinkClick r:id="rId2" action="ppaction://hlinksldjump">
+                  <a:extLst>
+                    <a:ext uri="{A12FA001-AC4F-418D-AE19-62706E023703}">
+                      <ahyp:hlinkClr xmlns:ahyp="http://schemas.microsoft.com/office/drawing/2018/hyperlinkcolor" val="tx"/>
+                    </a:ext>
+                  </a:extLst>
+                </a:hlinkClick>
               </a:rPr>
               <a:t>[11]</a:t>
             </a:r>
             <a:endParaRPr lang="en-IN" sz="2400" b="1" baseline="30000" dirty="0">
+              <a:solidFill>
+                <a:srgbClr val="FF0000"/>
+              </a:solidFill>
               <a:latin typeface="Barlow" panose="00000500000000000000" pitchFamily="2" charset="0"/>
             </a:endParaRPr>
           </a:p>
@@ -10709,7 +10791,7 @@
           <p:nvPr>
             <p:extLst>
               <p:ext uri="{D42A27DB-BD31-4B8C-83A1-F6EECF244321}">
-                <p14:modId xmlns:p14="http://schemas.microsoft.com/office/powerpoint/2010/main" val="4000075422"/>
+                <p14:modId xmlns:p14="http://schemas.microsoft.com/office/powerpoint/2010/main" val="589728642"/>
               </p:ext>
             </p:extLst>
           </p:nvPr>
@@ -10925,13 +11007,25 @@
                       </a:r>
                       <a:r>
                         <a:rPr lang="en-IN" sz="2000" b="1" baseline="30000" dirty="0">
+                          <a:solidFill>
+                            <a:srgbClr val="FF0000"/>
+                          </a:solidFill>
                           <a:effectLst/>
                           <a:latin typeface="Barlow" panose="00000500000000000000" pitchFamily="2" charset="0"/>
-                          <a:hlinkClick r:id="rId3" action="ppaction://hlinksldjump"/>
+                          <a:hlinkClick r:id="rId3" action="ppaction://hlinksldjump">
+                            <a:extLst>
+                              <a:ext uri="{A12FA001-AC4F-418D-AE19-62706E023703}">
+                                <ahyp:hlinkClr xmlns:ahyp="http://schemas.microsoft.com/office/drawing/2018/hyperlinkcolor" val="tx"/>
+                              </a:ext>
+                            </a:extLst>
+                          </a:hlinkClick>
                         </a:rPr>
                         <a:t>[5]</a:t>
                       </a:r>
                       <a:endParaRPr lang="en-IN" sz="2000" baseline="30000" dirty="0">
+                        <a:solidFill>
+                          <a:srgbClr val="FF0000"/>
+                        </a:solidFill>
                         <a:effectLst/>
                         <a:latin typeface="Barlow" panose="00000500000000000000" pitchFamily="2" charset="0"/>
                       </a:endParaRPr>
@@ -11124,13 +11218,25 @@
                       </a:r>
                       <a:r>
                         <a:rPr lang="en-IN" sz="2000" b="1" baseline="30000" dirty="0">
+                          <a:solidFill>
+                            <a:srgbClr val="FF0000"/>
+                          </a:solidFill>
                           <a:effectLst/>
                           <a:latin typeface="Barlow" panose="00000500000000000000" pitchFamily="2" charset="0"/>
-                          <a:hlinkClick r:id="rId3" action="ppaction://hlinksldjump"/>
+                          <a:hlinkClick r:id="rId3" action="ppaction://hlinksldjump">
+                            <a:extLst>
+                              <a:ext uri="{A12FA001-AC4F-418D-AE19-62706E023703}">
+                                <ahyp:hlinkClr xmlns:ahyp="http://schemas.microsoft.com/office/drawing/2018/hyperlinkcolor" val="tx"/>
+                              </a:ext>
+                            </a:extLst>
+                          </a:hlinkClick>
                         </a:rPr>
                         <a:t>[7]</a:t>
                       </a:r>
                       <a:endParaRPr lang="en-IN" sz="2000" baseline="30000" dirty="0">
+                        <a:solidFill>
+                          <a:srgbClr val="FF0000"/>
+                        </a:solidFill>
                         <a:effectLst/>
                         <a:latin typeface="Barlow" panose="00000500000000000000" pitchFamily="2" charset="0"/>
                       </a:endParaRPr>
@@ -11323,13 +11429,25 @@
                       </a:r>
                       <a:r>
                         <a:rPr lang="en-IN" sz="2000" b="1" baseline="30000" dirty="0">
+                          <a:solidFill>
+                            <a:srgbClr val="FF0000"/>
+                          </a:solidFill>
                           <a:effectLst/>
                           <a:latin typeface="Barlow" panose="00000500000000000000" pitchFamily="2" charset="0"/>
-                          <a:hlinkClick r:id="rId3" action="ppaction://hlinksldjump"/>
+                          <a:hlinkClick r:id="rId3" action="ppaction://hlinksldjump">
+                            <a:extLst>
+                              <a:ext uri="{A12FA001-AC4F-418D-AE19-62706E023703}">
+                                <ahyp:hlinkClr xmlns:ahyp="http://schemas.microsoft.com/office/drawing/2018/hyperlinkcolor" val="tx"/>
+                              </a:ext>
+                            </a:extLst>
+                          </a:hlinkClick>
                         </a:rPr>
                         <a:t>[6]</a:t>
                       </a:r>
                       <a:endParaRPr lang="en-IN" sz="2000" baseline="30000" dirty="0">
+                        <a:solidFill>
+                          <a:srgbClr val="FF0000"/>
+                        </a:solidFill>
                         <a:effectLst/>
                         <a:latin typeface="Barlow" panose="00000500000000000000" pitchFamily="2" charset="0"/>
                       </a:endParaRPr>
@@ -11470,9 +11588,18 @@
                       </a:r>
                       <a:r>
                         <a:rPr lang="en-IN" sz="2000" baseline="30000" dirty="0">
+                          <a:solidFill>
+                            <a:srgbClr val="FF0000"/>
+                          </a:solidFill>
                           <a:effectLst/>
                           <a:latin typeface="Barlow" panose="00000500000000000000" pitchFamily="2" charset="0"/>
-                          <a:hlinkClick r:id="rId4" action="ppaction://hlinksldjump"/>
+                          <a:hlinkClick r:id="rId4" action="ppaction://hlinksldjump">
+                            <a:extLst>
+                              <a:ext uri="{A12FA001-AC4F-418D-AE19-62706E023703}">
+                                <ahyp:hlinkClr xmlns:ahyp="http://schemas.microsoft.com/office/drawing/2018/hyperlinkcolor" val="tx"/>
+                              </a:ext>
+                            </a:extLst>
+                          </a:hlinkClick>
                         </a:rPr>
                         <a:t>[12]</a:t>
                       </a:r>
@@ -11492,9 +11619,18 @@
                       </a:r>
                       <a:r>
                         <a:rPr lang="en-IN" sz="2000" baseline="30000" dirty="0">
+                          <a:solidFill>
+                            <a:srgbClr val="FF0000"/>
+                          </a:solidFill>
                           <a:effectLst/>
                           <a:latin typeface="Barlow" panose="00000500000000000000" pitchFamily="2" charset="0"/>
-                          <a:hlinkClick r:id="rId4" action="ppaction://hlinksldjump"/>
+                          <a:hlinkClick r:id="rId4" action="ppaction://hlinksldjump">
+                            <a:extLst>
+                              <a:ext uri="{A12FA001-AC4F-418D-AE19-62706E023703}">
+                                <ahyp:hlinkClr xmlns:ahyp="http://schemas.microsoft.com/office/drawing/2018/hyperlinkcolor" val="tx"/>
+                              </a:ext>
+                            </a:extLst>
+                          </a:hlinkClick>
                         </a:rPr>
                         <a:t>[13]</a:t>
                       </a:r>
@@ -11507,13 +11643,25 @@
                       </a:r>
                       <a:r>
                         <a:rPr lang="en-IN" sz="2000" baseline="30000" dirty="0">
+                          <a:solidFill>
+                            <a:srgbClr val="FF0000"/>
+                          </a:solidFill>
                           <a:effectLst/>
                           <a:latin typeface="Barlow" panose="00000500000000000000" pitchFamily="2" charset="0"/>
-                          <a:hlinkClick r:id="rId4" action="ppaction://hlinksldjump"/>
+                          <a:hlinkClick r:id="rId4" action="ppaction://hlinksldjump">
+                            <a:extLst>
+                              <a:ext uri="{A12FA001-AC4F-418D-AE19-62706E023703}">
+                                <ahyp:hlinkClr xmlns:ahyp="http://schemas.microsoft.com/office/drawing/2018/hyperlinkcolor" val="tx"/>
+                              </a:ext>
+                            </a:extLst>
+                          </a:hlinkClick>
                         </a:rPr>
                         <a:t>[14]</a:t>
                       </a:r>
                       <a:endParaRPr lang="en-IN" sz="2000" baseline="30000" dirty="0">
+                        <a:solidFill>
+                          <a:srgbClr val="FF0000"/>
+                        </a:solidFill>
                         <a:effectLst/>
                         <a:latin typeface="Barlow" panose="00000500000000000000" pitchFamily="2" charset="0"/>
                       </a:endParaRPr>
@@ -11838,7 +11986,7 @@
           <p:nvPr>
             <p:extLst>
               <p:ext uri="{D42A27DB-BD31-4B8C-83A1-F6EECF244321}">
-                <p14:modId xmlns:p14="http://schemas.microsoft.com/office/powerpoint/2010/main" val="4110281572"/>
+                <p14:modId xmlns:p14="http://schemas.microsoft.com/office/powerpoint/2010/main" val="1270312117"/>
               </p:ext>
             </p:extLst>
           </p:nvPr>
@@ -12045,11 +12193,17 @@
                       <a:r>
                         <a:rPr lang="en-IN" sz="2000" baseline="30000" dirty="0">
                           <a:solidFill>
-                            <a:schemeClr val="tx1"/>
+                            <a:srgbClr val="FF0000"/>
                           </a:solidFill>
                           <a:effectLst/>
                           <a:latin typeface="Barlow" panose="00000500000000000000" pitchFamily="2" charset="0"/>
-                          <a:hlinkClick r:id="rId2" action="ppaction://hlinksldjump"/>
+                          <a:hlinkClick r:id="rId2" action="ppaction://hlinksldjump">
+                            <a:extLst>
+                              <a:ext uri="{A12FA001-AC4F-418D-AE19-62706E023703}">
+                                <ahyp:hlinkClr xmlns:ahyp="http://schemas.microsoft.com/office/drawing/2018/hyperlinkcolor" val="tx"/>
+                              </a:ext>
+                            </a:extLst>
+                          </a:hlinkClick>
                         </a:rPr>
                         <a:t>[6]</a:t>
                       </a:r>
@@ -12597,14 +12751,38 @@
                         <a:t>Cosine Annealing</a:t>
                       </a:r>
                       <a:r>
-                        <a:rPr lang="en-IN" sz="2000" b="1" baseline="30000" dirty="0">
+                        <a:rPr lang="en-IN" sz="2000" b="0" baseline="30000" dirty="0">
                           <a:solidFill>
-                            <a:schemeClr val="tx1"/>
+                            <a:srgbClr val="FF0000"/>
                           </a:solidFill>
                           <a:effectLst/>
                           <a:latin typeface="Barlow" panose="00000500000000000000" pitchFamily="2" charset="0"/>
+                          <a:hlinkClick r:id="rId3" action="ppaction://hlinksldjump">
+                            <a:extLst>
+                              <a:ext uri="{A12FA001-AC4F-418D-AE19-62706E023703}">
+                                <ahyp:hlinkClr xmlns:ahyp="http://schemas.microsoft.com/office/drawing/2018/hyperlinkcolor" val="tx"/>
+                              </a:ext>
+                            </a:extLst>
+                          </a:hlinkClick>
                         </a:rPr>
                         <a:t>[15]</a:t>
+                      </a:r>
+                      <a:r>
+                        <a:rPr lang="en-IN" sz="2000" b="0" dirty="0">
+                          <a:solidFill>
+                            <a:srgbClr val="FF0000"/>
+                          </a:solidFill>
+                          <a:effectLst/>
+                          <a:latin typeface="Barlow" panose="00000500000000000000" pitchFamily="2" charset="0"/>
+                          <a:hlinkClick r:id="rId3" action="ppaction://hlinksldjump">
+                            <a:extLst>
+                              <a:ext uri="{A12FA001-AC4F-418D-AE19-62706E023703}">
+                                <ahyp:hlinkClr xmlns:ahyp="http://schemas.microsoft.com/office/drawing/2018/hyperlinkcolor" val="tx"/>
+                              </a:ext>
+                            </a:extLst>
+                          </a:hlinkClick>
+                        </a:rPr>
+                        <a:t> </a:t>
                       </a:r>
                       <a:r>
                         <a:rPr lang="en-IN" sz="2000" dirty="0">
@@ -12614,7 +12792,7 @@
                           <a:effectLst/>
                           <a:latin typeface="Barlow" panose="00000500000000000000" pitchFamily="2" charset="0"/>
                         </a:rPr>
-                        <a:t> (ModernBERT)</a:t>
+                        <a:t>(ModernBERT)</a:t>
                       </a:r>
                     </a:p>
                   </a:txBody>
@@ -12742,12 +12920,24 @@
             </a:r>
             <a:r>
               <a:rPr lang="en-GB" sz="2400" baseline="30000" dirty="0">
+                <a:solidFill>
+                  <a:srgbClr val="FF0000"/>
+                </a:solidFill>
                 <a:latin typeface="Barlow Medium" panose="00000600000000000000" pitchFamily="2" charset="0"/>
-                <a:hlinkClick r:id="rId2" action="ppaction://hlinksldjump"/>
+                <a:hlinkClick r:id="rId2" action="ppaction://hlinksldjump">
+                  <a:extLst>
+                    <a:ext uri="{A12FA001-AC4F-418D-AE19-62706E023703}">
+                      <ahyp:hlinkClr xmlns:ahyp="http://schemas.microsoft.com/office/drawing/2018/hyperlinkcolor" val="tx"/>
+                    </a:ext>
+                  </a:extLst>
+                </a:hlinkClick>
               </a:rPr>
               <a:t>[16]</a:t>
             </a:r>
             <a:endParaRPr lang="en-GB" sz="2400" baseline="30000" dirty="0">
+              <a:solidFill>
+                <a:srgbClr val="FF0000"/>
+              </a:solidFill>
               <a:latin typeface="Barlow Medium" panose="00000600000000000000" pitchFamily="2" charset="0"/>
             </a:endParaRPr>
           </a:p>
@@ -21286,7 +21476,13 @@
                   <a:srgbClr val="FF0000"/>
                 </a:solidFill>
                 <a:latin typeface="Barlow" panose="00000500000000000000" pitchFamily="2" charset="0"/>
-                <a:hlinkClick r:id="rId3" action="ppaction://hlinksldjump"/>
+                <a:hlinkClick r:id="rId3" action="ppaction://hlinksldjump">
+                  <a:extLst>
+                    <a:ext uri="{A12FA001-AC4F-418D-AE19-62706E023703}">
+                      <ahyp:hlinkClr xmlns:ahyp="http://schemas.microsoft.com/office/drawing/2018/hyperlinkcolor" val="tx"/>
+                    </a:ext>
+                  </a:extLst>
+                </a:hlinkClick>
               </a:rPr>
               <a:t>[4]</a:t>
             </a:r>
@@ -21308,15 +21504,33 @@
             </a:r>
             <a:r>
               <a:rPr lang="en-IN" sz="2000" b="1" baseline="30000" dirty="0">
+                <a:solidFill>
+                  <a:srgbClr val="FF0000"/>
+                </a:solidFill>
                 <a:latin typeface="Barlow" panose="00000500000000000000" pitchFamily="2" charset="0"/>
-                <a:hlinkClick r:id="rId3" action="ppaction://hlinksldjump"/>
+                <a:hlinkClick r:id="rId3" action="ppaction://hlinksldjump">
+                  <a:extLst>
+                    <a:ext uri="{A12FA001-AC4F-418D-AE19-62706E023703}">
+                      <ahyp:hlinkClr xmlns:ahyp="http://schemas.microsoft.com/office/drawing/2018/hyperlinkcolor" val="tx"/>
+                    </a:ext>
+                  </a:extLst>
+                </a:hlinkClick>
               </a:rPr>
               <a:t>[3]</a:t>
             </a:r>
             <a:r>
               <a:rPr lang="en-IN" sz="2000" dirty="0">
+                <a:solidFill>
+                  <a:srgbClr val="FFC000"/>
+                </a:solidFill>
                 <a:latin typeface="Barlow" panose="00000500000000000000" pitchFamily="2" charset="0"/>
-                <a:hlinkClick r:id="rId3" action="ppaction://hlinksldjump"/>
+                <a:hlinkClick r:id="rId3" action="ppaction://hlinksldjump">
+                  <a:extLst>
+                    <a:ext uri="{A12FA001-AC4F-418D-AE19-62706E023703}">
+                      <ahyp:hlinkClr xmlns:ahyp="http://schemas.microsoft.com/office/drawing/2018/hyperlinkcolor" val="tx"/>
+                    </a:ext>
+                  </a:extLst>
+                </a:hlinkClick>
               </a:rPr>
               <a:t> </a:t>
             </a:r>
@@ -21349,8 +21563,17 @@
             </a:r>
             <a:r>
               <a:rPr lang="en-IN" sz="2000" b="1" baseline="30000" dirty="0">
+                <a:solidFill>
+                  <a:srgbClr val="FF0000"/>
+                </a:solidFill>
                 <a:latin typeface="Barlow" panose="00000500000000000000" pitchFamily="2" charset="0"/>
-                <a:hlinkClick r:id="rId3" action="ppaction://hlinksldjump"/>
+                <a:hlinkClick r:id="rId3" action="ppaction://hlinksldjump">
+                  <a:extLst>
+                    <a:ext uri="{A12FA001-AC4F-418D-AE19-62706E023703}">
+                      <ahyp:hlinkClr xmlns:ahyp="http://schemas.microsoft.com/office/drawing/2018/hyperlinkcolor" val="tx"/>
+                    </a:ext>
+                  </a:extLst>
+                </a:hlinkClick>
               </a:rPr>
               <a:t>[8] </a:t>
             </a:r>
@@ -21362,15 +21585,33 @@
             </a:r>
             <a:r>
               <a:rPr lang="en-IN" sz="2000" b="1" baseline="30000" dirty="0">
+                <a:solidFill>
+                  <a:srgbClr val="FF0000"/>
+                </a:solidFill>
                 <a:latin typeface="Barlow" panose="00000500000000000000" pitchFamily="2" charset="0"/>
-                <a:hlinkClick r:id="rId4" action="ppaction://hlinksldjump"/>
+                <a:hlinkClick r:id="rId4" action="ppaction://hlinksldjump">
+                  <a:extLst>
+                    <a:ext uri="{A12FA001-AC4F-418D-AE19-62706E023703}">
+                      <ahyp:hlinkClr xmlns:ahyp="http://schemas.microsoft.com/office/drawing/2018/hyperlinkcolor" val="tx"/>
+                    </a:ext>
+                  </a:extLst>
+                </a:hlinkClick>
               </a:rPr>
               <a:t>[9]</a:t>
             </a:r>
             <a:r>
               <a:rPr lang="en-IN" sz="2000" dirty="0">
+                <a:solidFill>
+                  <a:srgbClr val="FFC000"/>
+                </a:solidFill>
                 <a:latin typeface="Barlow" panose="00000500000000000000" pitchFamily="2" charset="0"/>
-                <a:hlinkClick r:id="rId4" action="ppaction://hlinksldjump"/>
+                <a:hlinkClick r:id="rId4" action="ppaction://hlinksldjump">
+                  <a:extLst>
+                    <a:ext uri="{A12FA001-AC4F-418D-AE19-62706E023703}">
+                      <ahyp:hlinkClr xmlns:ahyp="http://schemas.microsoft.com/office/drawing/2018/hyperlinkcolor" val="tx"/>
+                    </a:ext>
+                  </a:extLst>
+                </a:hlinkClick>
               </a:rPr>
               <a:t>.</a:t>
             </a:r>
@@ -21717,8 +21958,17 @@
             </a:r>
             <a:r>
               <a:rPr lang="en-IN" sz="2000" b="1" baseline="30000" dirty="0">
+                <a:solidFill>
+                  <a:srgbClr val="FF0000"/>
+                </a:solidFill>
                 <a:latin typeface="Barlow" panose="00000500000000000000" pitchFamily="2" charset="0"/>
-                <a:hlinkClick r:id="rId2" action="ppaction://hlinksldjump"/>
+                <a:hlinkClick r:id="rId2" action="ppaction://hlinksldjump">
+                  <a:extLst>
+                    <a:ext uri="{A12FA001-AC4F-418D-AE19-62706E023703}">
+                      <ahyp:hlinkClr xmlns:ahyp="http://schemas.microsoft.com/office/drawing/2018/hyperlinkcolor" val="tx"/>
+                    </a:ext>
+                  </a:extLst>
+                </a:hlinkClick>
               </a:rPr>
               <a:t>[2] </a:t>
             </a:r>
@@ -21788,8 +22038,17 @@
             </a:r>
             <a:r>
               <a:rPr lang="en-IN" sz="2000" b="1" baseline="30000" dirty="0">
+                <a:solidFill>
+                  <a:srgbClr val="FF0000"/>
+                </a:solidFill>
                 <a:latin typeface="Barlow" panose="00000500000000000000" pitchFamily="2" charset="0"/>
-                <a:hlinkClick r:id="rId2" action="ppaction://hlinksldjump"/>
+                <a:hlinkClick r:id="rId2" action="ppaction://hlinksldjump">
+                  <a:extLst>
+                    <a:ext uri="{A12FA001-AC4F-418D-AE19-62706E023703}">
+                      <ahyp:hlinkClr xmlns:ahyp="http://schemas.microsoft.com/office/drawing/2018/hyperlinkcolor" val="tx"/>
+                    </a:ext>
+                  </a:extLst>
+                </a:hlinkClick>
               </a:rPr>
               <a:t>[5]</a:t>
             </a:r>
@@ -21809,8 +22068,17 @@
             </a:r>
             <a:r>
               <a:rPr lang="en-IN" sz="2000" b="1" baseline="30000" dirty="0">
+                <a:solidFill>
+                  <a:srgbClr val="FF0000"/>
+                </a:solidFill>
                 <a:latin typeface="Barlow" panose="00000500000000000000" pitchFamily="2" charset="0"/>
-                <a:hlinkClick r:id="rId2" action="ppaction://hlinksldjump"/>
+                <a:hlinkClick r:id="rId2" action="ppaction://hlinksldjump">
+                  <a:extLst>
+                    <a:ext uri="{A12FA001-AC4F-418D-AE19-62706E023703}">
+                      <ahyp:hlinkClr xmlns:ahyp="http://schemas.microsoft.com/office/drawing/2018/hyperlinkcolor" val="tx"/>
+                    </a:ext>
+                  </a:extLst>
+                </a:hlinkClick>
               </a:rPr>
               <a:t>[7]</a:t>
             </a:r>
@@ -21830,8 +22098,17 @@
             </a:r>
             <a:r>
               <a:rPr lang="en-IN" sz="2000" b="1" baseline="30000" dirty="0">
+                <a:solidFill>
+                  <a:srgbClr val="FF0000"/>
+                </a:solidFill>
                 <a:latin typeface="Barlow" panose="00000500000000000000" pitchFamily="2" charset="0"/>
-                <a:hlinkClick r:id="rId2" action="ppaction://hlinksldjump"/>
+                <a:hlinkClick r:id="rId2" action="ppaction://hlinksldjump">
+                  <a:extLst>
+                    <a:ext uri="{A12FA001-AC4F-418D-AE19-62706E023703}">
+                      <ahyp:hlinkClr xmlns:ahyp="http://schemas.microsoft.com/office/drawing/2018/hyperlinkcolor" val="tx"/>
+                    </a:ext>
+                  </a:extLst>
+                </a:hlinkClick>
               </a:rPr>
               <a:t>[6]</a:t>
             </a:r>
@@ -21843,35 +22120,71 @@
             </a:r>
             <a:r>
               <a:rPr lang="en-IN" sz="2000" b="1" baseline="30000" dirty="0">
+                <a:solidFill>
+                  <a:srgbClr val="FF0000"/>
+                </a:solidFill>
                 <a:latin typeface="Barlow" panose="00000500000000000000" pitchFamily="2" charset="0"/>
-                <a:hlinkClick r:id="rId3" action="ppaction://hlinksldjump"/>
+                <a:hlinkClick r:id="rId3" action="ppaction://hlinksldjump">
+                  <a:extLst>
+                    <a:ext uri="{A12FA001-AC4F-418D-AE19-62706E023703}">
+                      <ahyp:hlinkClr xmlns:ahyp="http://schemas.microsoft.com/office/drawing/2018/hyperlinkcolor" val="tx"/>
+                    </a:ext>
+                  </a:extLst>
+                </a:hlinkClick>
               </a:rPr>
               <a:t>[12]</a:t>
+            </a:r>
+            <a:r>
+              <a:rPr lang="en-IN" sz="2000" dirty="0">
+                <a:solidFill>
+                  <a:srgbClr val="FF0000"/>
+                </a:solidFill>
+                <a:latin typeface="Barlow" panose="00000500000000000000" pitchFamily="2" charset="0"/>
+                <a:hlinkClick r:id="rId3" action="ppaction://hlinksldjump">
+                  <a:extLst>
+                    <a:ext uri="{A12FA001-AC4F-418D-AE19-62706E023703}">
+                      <ahyp:hlinkClr xmlns:ahyp="http://schemas.microsoft.com/office/drawing/2018/hyperlinkcolor" val="tx"/>
+                    </a:ext>
+                  </a:extLst>
+                </a:hlinkClick>
+              </a:rPr>
+              <a:t>,</a:t>
+            </a:r>
+            <a:r>
+              <a:rPr lang="en-IN" sz="2000" dirty="0">
+                <a:solidFill>
+                  <a:srgbClr val="FF0000"/>
+                </a:solidFill>
+                <a:latin typeface="Barlow" panose="00000500000000000000" pitchFamily="2" charset="0"/>
+                <a:hlinkClick r:id="rId3" action="ppaction://hlinksldjump">
+                  <a:extLst>
+                    <a:ext uri="{A12FA001-AC4F-418D-AE19-62706E023703}">
+                      <ahyp:hlinkClr xmlns:ahyp="http://schemas.microsoft.com/office/drawing/2018/hyperlinkcolor" val="tx"/>
+                    </a:ext>
+                  </a:extLst>
+                </a:hlinkClick>
+              </a:rPr>
+              <a:t> </a:t>
             </a:r>
             <a:r>
               <a:rPr lang="en-IN" sz="2000" dirty="0">
                 <a:latin typeface="Barlow" panose="00000500000000000000" pitchFamily="2" charset="0"/>
-                <a:hlinkClick r:id="rId3" action="ppaction://hlinksldjump"/>
-              </a:rPr>
-              <a:t>,</a:t>
-            </a:r>
-            <a:r>
-              <a:rPr lang="en-IN" sz="2000" dirty="0">
+              </a:rPr>
+              <a:t>Flash Attention</a:t>
+            </a:r>
+            <a:r>
+              <a:rPr lang="en-IN" sz="2000" b="1" baseline="30000" dirty="0">
+                <a:solidFill>
+                  <a:srgbClr val="FF0000"/>
+                </a:solidFill>
                 <a:latin typeface="Barlow" panose="00000500000000000000" pitchFamily="2" charset="0"/>
-                <a:hlinkClick r:id="rId3" action="ppaction://hlinksldjump"/>
-              </a:rPr>
-              <a:t> </a:t>
-            </a:r>
-            <a:r>
-              <a:rPr lang="en-IN" sz="2000" dirty="0">
-                <a:latin typeface="Barlow" panose="00000500000000000000" pitchFamily="2" charset="0"/>
-              </a:rPr>
-              <a:t>Flash Attention</a:t>
-            </a:r>
-            <a:r>
-              <a:rPr lang="en-IN" sz="2000" b="1" baseline="30000" dirty="0">
-                <a:latin typeface="Barlow" panose="00000500000000000000" pitchFamily="2" charset="0"/>
-                <a:hlinkClick r:id="rId3" action="ppaction://hlinksldjump"/>
+                <a:hlinkClick r:id="rId3" action="ppaction://hlinksldjump">
+                  <a:extLst>
+                    <a:ext uri="{A12FA001-AC4F-418D-AE19-62706E023703}">
+                      <ahyp:hlinkClr xmlns:ahyp="http://schemas.microsoft.com/office/drawing/2018/hyperlinkcolor" val="tx"/>
+                    </a:ext>
+                  </a:extLst>
+                </a:hlinkClick>
               </a:rPr>
               <a:t>[13]</a:t>
             </a:r>

--- a/cross_encoder/thesis/Thesis_presentation.pptx
+++ b/cross_encoder/thesis/Thesis_presentation.pptx
@@ -5,10 +5,10 @@
     <p:sldMasterId id="2147483672" r:id="rId4"/>
   </p:sldMasterIdLst>
   <p:notesMasterIdLst>
-    <p:notesMasterId r:id="rId33"/>
+    <p:notesMasterId r:id="rId35"/>
   </p:notesMasterIdLst>
   <p:handoutMasterIdLst>
-    <p:handoutMasterId r:id="rId34"/>
+    <p:handoutMasterId r:id="rId36"/>
   </p:handoutMasterIdLst>
   <p:sldIdLst>
     <p:sldId id="256" r:id="rId5"/>
@@ -35,10 +35,12 @@
     <p:sldId id="278" r:id="rId26"/>
     <p:sldId id="289" r:id="rId27"/>
     <p:sldId id="269" r:id="rId28"/>
-    <p:sldId id="290" r:id="rId29"/>
-    <p:sldId id="291" r:id="rId30"/>
-    <p:sldId id="292" r:id="rId31"/>
-    <p:sldId id="284" r:id="rId32"/>
+    <p:sldId id="293" r:id="rId29"/>
+    <p:sldId id="294" r:id="rId30"/>
+    <p:sldId id="290" r:id="rId31"/>
+    <p:sldId id="291" r:id="rId32"/>
+    <p:sldId id="292" r:id="rId33"/>
+    <p:sldId id="284" r:id="rId34"/>
   </p:sldIdLst>
   <p:sldSz cx="12192000" cy="6858000"/>
   <p:notesSz cx="6858000" cy="9144000"/>
@@ -1464,7 +1466,7 @@
           <a:p>
             <a:fld id="{E6AEB063-7F11-4E3B-BA52-07405B1C2D95}" type="slidenum">
               <a:rPr lang="en-US" smtClean="0"/>
-              <a:t>28</a:t>
+              <a:t>30</a:t>
             </a:fld>
             <a:endParaRPr lang="en-US" dirty="0"/>
           </a:p>
@@ -10445,7 +10447,7 @@
               <a:rPr lang="en-IN" sz="2400" dirty="0">
                 <a:latin typeface="Barlow" panose="00000500000000000000" pitchFamily="2" charset="0"/>
               </a:rPr>
-              <a:t>Passage Ranking (~500K query-passage pairs)</a:t>
+              <a:t>Passage Ranking (~2M triplets)</a:t>
             </a:r>
           </a:p>
           <a:p>
@@ -10535,7 +10537,7 @@
               <a:rPr lang="en-IN" sz="2400" dirty="0">
                 <a:latin typeface="Barlow" panose="00000500000000000000" pitchFamily="2" charset="0"/>
               </a:rPr>
-              <a:t>, MAP, MRR@10, Recall@10, R-Precision, P@10</a:t>
+              <a:t>, MAP, MRR@10, Recall@10, P@10</a:t>
             </a:r>
           </a:p>
           <a:p>
@@ -10706,7 +10708,51 @@
               <a:rPr lang="en-IN" sz="2400" dirty="0">
                 <a:latin typeface="Barlow" panose="00000500000000000000" pitchFamily="2" charset="0"/>
               </a:rPr>
-              <a:t> Learning rates (2e-5 standard, 2e-6 for ModernBERT+Lion)</a:t>
+              <a:t> Learning rates (2e-5 standard, 2e-6 for ModernBERT</a:t>
+            </a:r>
+            <a:r>
+              <a:rPr lang="en-IN" sz="2400" baseline="30000" dirty="0">
+                <a:solidFill>
+                  <a:srgbClr val="FF0000"/>
+                </a:solidFill>
+                <a:latin typeface="Barlow" panose="00000500000000000000" pitchFamily="2" charset="0"/>
+                <a:hlinkClick r:id="rId3" action="ppaction://hlinksldjump">
+                  <a:extLst>
+                    <a:ext uri="{A12FA001-AC4F-418D-AE19-62706E023703}">
+                      <ahyp:hlinkClr xmlns:ahyp="http://schemas.microsoft.com/office/drawing/2018/hyperlinkcolor" val="tx"/>
+                    </a:ext>
+                  </a:extLst>
+                </a:hlinkClick>
+              </a:rPr>
+              <a:t>[6]</a:t>
+            </a:r>
+            <a:r>
+              <a:rPr lang="en-IN" sz="2400" dirty="0">
+                <a:latin typeface="Barlow" panose="00000500000000000000" pitchFamily="2" charset="0"/>
+              </a:rPr>
+              <a:t>+Lion</a:t>
+            </a:r>
+            <a:r>
+              <a:rPr lang="en-IN" sz="2400" baseline="30000" dirty="0">
+                <a:solidFill>
+                  <a:srgbClr val="FF0000"/>
+                </a:solidFill>
+                <a:latin typeface="Barlow" panose="00000500000000000000" pitchFamily="2" charset="0"/>
+                <a:hlinkClick r:id="rId3" action="ppaction://hlinksldjump">
+                  <a:extLst>
+                    <a:ext uri="{A12FA001-AC4F-418D-AE19-62706E023703}">
+                      <ahyp:hlinkClr xmlns:ahyp="http://schemas.microsoft.com/office/drawing/2018/hyperlinkcolor" val="tx"/>
+                    </a:ext>
+                  </a:extLst>
+                </a:hlinkClick>
+              </a:rPr>
+              <a:t>[4]</a:t>
+            </a:r>
+            <a:r>
+              <a:rPr lang="en-IN" sz="2400" dirty="0">
+                <a:latin typeface="Barlow" panose="00000500000000000000" pitchFamily="2" charset="0"/>
+              </a:rPr>
+              <a:t>)</a:t>
             </a:r>
           </a:p>
         </p:txBody>
@@ -20378,6 +20424,242 @@
       </p:grpSpPr>
       <p:sp>
         <p:nvSpPr>
+          <p:cNvPr id="2" name="Title 1">
+            <a:extLst>
+              <a:ext uri="{FF2B5EF4-FFF2-40B4-BE49-F238E27FC236}">
+                <a16:creationId xmlns:a16="http://schemas.microsoft.com/office/drawing/2014/main" id="{23AB296B-71D9-5C1C-7F8F-165046B741D8}"/>
+              </a:ext>
+            </a:extLst>
+          </p:cNvPr>
+          <p:cNvSpPr>
+            <a:spLocks noGrp="1"/>
+          </p:cNvSpPr>
+          <p:nvPr>
+            <p:ph type="title"/>
+          </p:nvPr>
+        </p:nvSpPr>
+        <p:spPr/>
+        <p:txBody>
+          <a:bodyPr/>
+          <a:lstStyle/>
+          <a:p>
+            <a:r>
+              <a:rPr lang="en-GB" dirty="0">
+                <a:latin typeface="Barlow ExtraBold" panose="00000900000000000000" pitchFamily="2" charset="0"/>
+              </a:rPr>
+              <a:t>Code and Model availability</a:t>
+            </a:r>
+            <a:endParaRPr lang="en-IN" dirty="0">
+              <a:latin typeface="Barlow ExtraBold" panose="00000900000000000000" pitchFamily="2" charset="0"/>
+            </a:endParaRPr>
+          </a:p>
+        </p:txBody>
+      </p:sp>
+    </p:spTree>
+    <p:extLst>
+      <p:ext uri="{BB962C8B-B14F-4D97-AF65-F5344CB8AC3E}">
+        <p14:creationId xmlns:p14="http://schemas.microsoft.com/office/powerpoint/2010/main" val="3032910472"/>
+      </p:ext>
+    </p:extLst>
+  </p:cSld>
+  <p:clrMapOvr>
+    <a:masterClrMapping/>
+  </p:clrMapOvr>
+</p:sld>
+</file>
+
+<file path=ppt/slides/slide26.xml><?xml version="1.0" encoding="utf-8"?>
+<p:sld xmlns:a="http://schemas.openxmlformats.org/drawingml/2006/main" xmlns:r="http://schemas.openxmlformats.org/officeDocument/2006/relationships" xmlns:p="http://schemas.openxmlformats.org/presentationml/2006/main">
+  <p:cSld>
+    <p:spTree>
+      <p:nvGrpSpPr>
+        <p:cNvPr id="1" name="">
+          <a:extLst>
+            <a:ext uri="{FF2B5EF4-FFF2-40B4-BE49-F238E27FC236}">
+              <a16:creationId xmlns:a16="http://schemas.microsoft.com/office/drawing/2014/main" id="{5FB818C9-2186-F63A-6998-385E02599FEB}"/>
+            </a:ext>
+          </a:extLst>
+        </p:cNvPr>
+        <p:cNvGrpSpPr/>
+        <p:nvPr/>
+      </p:nvGrpSpPr>
+      <p:grpSpPr>
+        <a:xfrm>
+          <a:off x="0" y="0"/>
+          <a:ext cx="0" cy="0"/>
+          <a:chOff x="0" y="0"/>
+          <a:chExt cx="0" cy="0"/>
+        </a:xfrm>
+      </p:grpSpPr>
+      <p:sp>
+        <p:nvSpPr>
+          <p:cNvPr id="5" name="Text Placeholder 4">
+            <a:extLst>
+              <a:ext uri="{FF2B5EF4-FFF2-40B4-BE49-F238E27FC236}">
+                <a16:creationId xmlns:a16="http://schemas.microsoft.com/office/drawing/2014/main" id="{2898D326-FA1B-355D-92D0-C089225B5146}"/>
+              </a:ext>
+            </a:extLst>
+          </p:cNvPr>
+          <p:cNvSpPr>
+            <a:spLocks noGrp="1"/>
+          </p:cNvSpPr>
+          <p:nvPr>
+            <p:ph type="body" sz="half" idx="2"/>
+          </p:nvPr>
+        </p:nvSpPr>
+        <p:spPr>
+          <a:xfrm>
+            <a:off x="706277" y="1197142"/>
+            <a:ext cx="10779446" cy="5209674"/>
+          </a:xfrm>
+        </p:spPr>
+        <p:txBody>
+          <a:bodyPr>
+            <a:noAutofit/>
+          </a:bodyPr>
+          <a:lstStyle/>
+          <a:p>
+            <a:pPr marL="342900" indent="-342900">
+              <a:buFont typeface="Wingdings" panose="05000000000000000000" pitchFamily="2" charset="2"/>
+              <a:buChar char="q"/>
+            </a:pPr>
+            <a:r>
+              <a:rPr lang="en-GB" sz="3200" dirty="0">
+                <a:latin typeface="Barlow Medium" panose="00000600000000000000" pitchFamily="2" charset="0"/>
+              </a:rPr>
+              <a:t>Code for reproducibility can be found on: </a:t>
+            </a:r>
+            <a:r>
+              <a:rPr lang="en-GB" sz="3200" dirty="0">
+                <a:solidFill>
+                  <a:srgbClr val="FF0000"/>
+                </a:solidFill>
+                <a:latin typeface="Barlow Medium" panose="00000600000000000000" pitchFamily="2" charset="0"/>
+                <a:hlinkClick r:id="rId2">
+                  <a:extLst>
+                    <a:ext uri="{A12FA001-AC4F-418D-AE19-62706E023703}">
+                      <ahyp:hlinkClr xmlns:ahyp="http://schemas.microsoft.com/office/drawing/2018/hyperlinkcolor" val="tx"/>
+                    </a:ext>
+                  </a:extLst>
+                </a:hlinkClick>
+              </a:rPr>
+              <a:t>https://github.com/skfrost19/Cross-Encoder-Lion-vs-AdamW.git</a:t>
+            </a:r>
+            <a:endParaRPr lang="en-GB" sz="3200" dirty="0">
+              <a:solidFill>
+                <a:srgbClr val="FF0000"/>
+              </a:solidFill>
+              <a:latin typeface="Barlow Medium" panose="00000600000000000000" pitchFamily="2" charset="0"/>
+            </a:endParaRPr>
+          </a:p>
+          <a:p>
+            <a:pPr marL="342900" indent="-342900">
+              <a:buFont typeface="Wingdings" panose="05000000000000000000" pitchFamily="2" charset="2"/>
+              <a:buChar char="q"/>
+            </a:pPr>
+            <a:r>
+              <a:rPr lang="en-GB" sz="3200" dirty="0">
+                <a:latin typeface="Barlow Medium" panose="00000600000000000000" pitchFamily="2" charset="0"/>
+              </a:rPr>
+              <a:t>Trained Cross encoders can be found on:</a:t>
+            </a:r>
+            <a:r>
+              <a:rPr lang="en-IN" sz="3200" dirty="0">
+                <a:latin typeface="Barlow Medium" panose="00000600000000000000" pitchFamily="2" charset="0"/>
+              </a:rPr>
+              <a:t> </a:t>
+            </a:r>
+            <a:r>
+              <a:rPr lang="en-IN" sz="3200" dirty="0">
+                <a:solidFill>
+                  <a:srgbClr val="FF0000"/>
+                </a:solidFill>
+                <a:latin typeface="Barlow Medium" panose="00000600000000000000" pitchFamily="2" charset="0"/>
+                <a:hlinkClick r:id="rId3">
+                  <a:extLst>
+                    <a:ext uri="{A12FA001-AC4F-418D-AE19-62706E023703}">
+                      <ahyp:hlinkClr xmlns:ahyp="http://schemas.microsoft.com/office/drawing/2018/hyperlinkcolor" val="tx"/>
+                    </a:ext>
+                  </a:extLst>
+                </a:hlinkClick>
+              </a:rPr>
+              <a:t>https://huggingface.co/collections/skfrost19/rerenkers-681320776cfb45e44b18f5f1</a:t>
+            </a:r>
+            <a:endParaRPr lang="en-IN" sz="3200" dirty="0">
+              <a:solidFill>
+                <a:srgbClr val="FF0000"/>
+              </a:solidFill>
+              <a:latin typeface="Barlow Medium" panose="00000600000000000000" pitchFamily="2" charset="0"/>
+            </a:endParaRPr>
+          </a:p>
+          <a:p>
+            <a:pPr marL="342900" indent="-342900">
+              <a:buFont typeface="Wingdings" panose="05000000000000000000" pitchFamily="2" charset="2"/>
+              <a:buChar char="q"/>
+            </a:pPr>
+            <a:r>
+              <a:rPr lang="en-IN" sz="3200" dirty="0">
+                <a:latin typeface="Barlow Medium" panose="00000600000000000000" pitchFamily="2" charset="0"/>
+              </a:rPr>
+              <a:t>Pre-print can be found on: </a:t>
+            </a:r>
+            <a:r>
+              <a:rPr lang="en-IN" sz="3200" dirty="0">
+                <a:solidFill>
+                  <a:srgbClr val="FF0000"/>
+                </a:solidFill>
+                <a:latin typeface="Barlow Medium" panose="00000600000000000000" pitchFamily="2" charset="0"/>
+                <a:hlinkClick r:id="rId4">
+                  <a:extLst>
+                    <a:ext uri="{A12FA001-AC4F-418D-AE19-62706E023703}">
+                      <ahyp:hlinkClr xmlns:ahyp="http://schemas.microsoft.com/office/drawing/2018/hyperlinkcolor" val="tx"/>
+                    </a:ext>
+                  </a:extLst>
+                </a:hlinkClick>
+              </a:rPr>
+              <a:t>https://arxiv.org/abs/2506.18297</a:t>
+            </a:r>
+            <a:endParaRPr lang="en-GB" sz="3200" dirty="0">
+              <a:solidFill>
+                <a:srgbClr val="FF0000"/>
+              </a:solidFill>
+              <a:latin typeface="Barlow Medium" panose="00000600000000000000" pitchFamily="2" charset="0"/>
+            </a:endParaRPr>
+          </a:p>
+        </p:txBody>
+      </p:sp>
+    </p:spTree>
+    <p:extLst>
+      <p:ext uri="{BB962C8B-B14F-4D97-AF65-F5344CB8AC3E}">
+        <p14:creationId xmlns:p14="http://schemas.microsoft.com/office/powerpoint/2010/main" val="1171816428"/>
+      </p:ext>
+    </p:extLst>
+  </p:cSld>
+  <p:clrMapOvr>
+    <a:masterClrMapping/>
+  </p:clrMapOvr>
+</p:sld>
+</file>
+
+<file path=ppt/slides/slide27.xml><?xml version="1.0" encoding="utf-8"?>
+<p:sld xmlns:a="http://schemas.openxmlformats.org/drawingml/2006/main" xmlns:r="http://schemas.openxmlformats.org/officeDocument/2006/relationships" xmlns:p="http://schemas.openxmlformats.org/presentationml/2006/main">
+  <p:cSld>
+    <p:spTree>
+      <p:nvGrpSpPr>
+        <p:cNvPr id="1" name=""/>
+        <p:cNvGrpSpPr/>
+        <p:nvPr/>
+      </p:nvGrpSpPr>
+      <p:grpSpPr>
+        <a:xfrm>
+          <a:off x="0" y="0"/>
+          <a:ext cx="0" cy="0"/>
+          <a:chOff x="0" y="0"/>
+          <a:chExt cx="0" cy="0"/>
+        </a:xfrm>
+      </p:grpSpPr>
+      <p:sp>
+        <p:nvSpPr>
           <p:cNvPr id="3" name="Title 2">
             <a:extLst>
               <a:ext uri="{FF2B5EF4-FFF2-40B4-BE49-F238E27FC236}">
@@ -20588,7 +20870,7 @@
 </p:sld>
 </file>
 
-<file path=ppt/slides/slide26.xml><?xml version="1.0" encoding="utf-8"?>
+<file path=ppt/slides/slide28.xml><?xml version="1.0" encoding="utf-8"?>
 <p:sld xmlns:a="http://schemas.openxmlformats.org/drawingml/2006/main" xmlns:r="http://schemas.openxmlformats.org/officeDocument/2006/relationships" xmlns:p="http://schemas.openxmlformats.org/presentationml/2006/main">
   <p:cSld>
     <p:spTree>
@@ -20800,7 +21082,7 @@
 </p:sld>
 </file>
 
-<file path=ppt/slides/slide27.xml><?xml version="1.0" encoding="utf-8"?>
+<file path=ppt/slides/slide29.xml><?xml version="1.0" encoding="utf-8"?>
 <p:sld xmlns:a="http://schemas.openxmlformats.org/drawingml/2006/main" xmlns:r="http://schemas.openxmlformats.org/officeDocument/2006/relationships" xmlns:p="http://schemas.openxmlformats.org/presentationml/2006/main">
   <p:cSld>
     <p:spTree>
@@ -20997,72 +21279,6 @@
     <p:extLst>
       <p:ext uri="{BB962C8B-B14F-4D97-AF65-F5344CB8AC3E}">
         <p14:creationId xmlns:p14="http://schemas.microsoft.com/office/powerpoint/2010/main" val="105729659"/>
-      </p:ext>
-    </p:extLst>
-  </p:cSld>
-  <p:clrMapOvr>
-    <a:masterClrMapping/>
-  </p:clrMapOvr>
-</p:sld>
-</file>
-
-<file path=ppt/slides/slide28.xml><?xml version="1.0" encoding="utf-8"?>
-<p:sld xmlns:a="http://schemas.openxmlformats.org/drawingml/2006/main" xmlns:r="http://schemas.openxmlformats.org/officeDocument/2006/relationships" xmlns:p="http://schemas.openxmlformats.org/presentationml/2006/main">
-  <p:cSld>
-    <p:spTree>
-      <p:nvGrpSpPr>
-        <p:cNvPr id="1" name="">
-          <a:extLst>
-            <a:ext uri="{FF2B5EF4-FFF2-40B4-BE49-F238E27FC236}">
-              <a16:creationId xmlns:a16="http://schemas.microsoft.com/office/drawing/2014/main" id="{A029116E-BD98-EFAB-1E2F-29B3F9288541}"/>
-            </a:ext>
-          </a:extLst>
-        </p:cNvPr>
-        <p:cNvGrpSpPr/>
-        <p:nvPr/>
-      </p:nvGrpSpPr>
-      <p:grpSpPr>
-        <a:xfrm>
-          <a:off x="0" y="0"/>
-          <a:ext cx="0" cy="0"/>
-          <a:chOff x="0" y="0"/>
-          <a:chExt cx="0" cy="0"/>
-        </a:xfrm>
-      </p:grpSpPr>
-      <p:sp>
-        <p:nvSpPr>
-          <p:cNvPr id="2" name="Title 1">
-            <a:extLst>
-              <a:ext uri="{FF2B5EF4-FFF2-40B4-BE49-F238E27FC236}">
-                <a16:creationId xmlns:a16="http://schemas.microsoft.com/office/drawing/2014/main" id="{D53321B8-DF6D-4A69-F020-DC2108ACAE4B}"/>
-              </a:ext>
-            </a:extLst>
-          </p:cNvPr>
-          <p:cNvSpPr>
-            <a:spLocks noGrp="1"/>
-          </p:cNvSpPr>
-          <p:nvPr>
-            <p:ph type="title"/>
-          </p:nvPr>
-        </p:nvSpPr>
-        <p:spPr bwMode="white"/>
-        <p:txBody>
-          <a:bodyPr/>
-          <a:lstStyle/>
-          <a:p>
-            <a:r>
-              <a:rPr lang="en-US" sz="4000" dirty="0">
-                <a:latin typeface="Barlow ExtraBold" panose="00000900000000000000" pitchFamily="2" charset="0"/>
-              </a:rPr>
-              <a:t>THANK YOU</a:t>
-            </a:r>
-          </a:p>
-        </p:txBody>
-      </p:sp>
-    </p:spTree>
-    <p:extLst>
-      <p:ext uri="{BB962C8B-B14F-4D97-AF65-F5344CB8AC3E}">
-        <p14:creationId xmlns:p14="http://schemas.microsoft.com/office/powerpoint/2010/main" val="4069644453"/>
       </p:ext>
     </p:extLst>
   </p:cSld>
@@ -21362,6 +21578,72 @@
     <p:extLst>
       <p:ext uri="{BB962C8B-B14F-4D97-AF65-F5344CB8AC3E}">
         <p14:creationId xmlns:p14="http://schemas.microsoft.com/office/powerpoint/2010/main" val="2131043727"/>
+      </p:ext>
+    </p:extLst>
+  </p:cSld>
+  <p:clrMapOvr>
+    <a:masterClrMapping/>
+  </p:clrMapOvr>
+</p:sld>
+</file>
+
+<file path=ppt/slides/slide30.xml><?xml version="1.0" encoding="utf-8"?>
+<p:sld xmlns:a="http://schemas.openxmlformats.org/drawingml/2006/main" xmlns:r="http://schemas.openxmlformats.org/officeDocument/2006/relationships" xmlns:p="http://schemas.openxmlformats.org/presentationml/2006/main">
+  <p:cSld>
+    <p:spTree>
+      <p:nvGrpSpPr>
+        <p:cNvPr id="1" name="">
+          <a:extLst>
+            <a:ext uri="{FF2B5EF4-FFF2-40B4-BE49-F238E27FC236}">
+              <a16:creationId xmlns:a16="http://schemas.microsoft.com/office/drawing/2014/main" id="{A029116E-BD98-EFAB-1E2F-29B3F9288541}"/>
+            </a:ext>
+          </a:extLst>
+        </p:cNvPr>
+        <p:cNvGrpSpPr/>
+        <p:nvPr/>
+      </p:nvGrpSpPr>
+      <p:grpSpPr>
+        <a:xfrm>
+          <a:off x="0" y="0"/>
+          <a:ext cx="0" cy="0"/>
+          <a:chOff x="0" y="0"/>
+          <a:chExt cx="0" cy="0"/>
+        </a:xfrm>
+      </p:grpSpPr>
+      <p:sp>
+        <p:nvSpPr>
+          <p:cNvPr id="2" name="Title 1">
+            <a:extLst>
+              <a:ext uri="{FF2B5EF4-FFF2-40B4-BE49-F238E27FC236}">
+                <a16:creationId xmlns:a16="http://schemas.microsoft.com/office/drawing/2014/main" id="{D53321B8-DF6D-4A69-F020-DC2108ACAE4B}"/>
+              </a:ext>
+            </a:extLst>
+          </p:cNvPr>
+          <p:cNvSpPr>
+            <a:spLocks noGrp="1"/>
+          </p:cNvSpPr>
+          <p:nvPr>
+            <p:ph type="title"/>
+          </p:nvPr>
+        </p:nvSpPr>
+        <p:spPr bwMode="white"/>
+        <p:txBody>
+          <a:bodyPr/>
+          <a:lstStyle/>
+          <a:p>
+            <a:r>
+              <a:rPr lang="en-US" sz="4000" dirty="0">
+                <a:latin typeface="Barlow ExtraBold" panose="00000900000000000000" pitchFamily="2" charset="0"/>
+              </a:rPr>
+              <a:t>THANK YOU</a:t>
+            </a:r>
+          </a:p>
+        </p:txBody>
+      </p:sp>
+    </p:spTree>
+    <p:extLst>
+      <p:ext uri="{BB962C8B-B14F-4D97-AF65-F5344CB8AC3E}">
+        <p14:creationId xmlns:p14="http://schemas.microsoft.com/office/powerpoint/2010/main" val="4069644453"/>
       </p:ext>
     </p:extLst>
   </p:cSld>

--- a/cross_encoder/thesis/Thesis_presentation.pptx
+++ b/cross_encoder/thesis/Thesis_presentation.pptx
@@ -26,8 +26,8 @@
     <p:sldId id="272" r:id="rId17"/>
     <p:sldId id="264" r:id="rId18"/>
     <p:sldId id="279" r:id="rId19"/>
-    <p:sldId id="271" r:id="rId20"/>
-    <p:sldId id="273" r:id="rId21"/>
+    <p:sldId id="273" r:id="rId20"/>
+    <p:sldId id="271" r:id="rId21"/>
     <p:sldId id="288" r:id="rId22"/>
     <p:sldId id="275" r:id="rId23"/>
     <p:sldId id="276" r:id="rId24"/>
@@ -10537,7 +10537,7 @@
               <a:rPr lang="en-IN" sz="2400" dirty="0">
                 <a:latin typeface="Barlow" panose="00000500000000000000" pitchFamily="2" charset="0"/>
               </a:rPr>
-              <a:t>, MAP, MRR@10, Recall@10, P@10</a:t>
+              <a:t>, MRR@10, Recall@10, P@10</a:t>
             </a:r>
           </a:p>
           <a:p>
@@ -12885,195 +12885,6 @@
   <p:cSld>
     <p:spTree>
       <p:nvGrpSpPr>
-        <p:cNvPr id="1" name=""/>
-        <p:cNvGrpSpPr/>
-        <p:nvPr/>
-      </p:nvGrpSpPr>
-      <p:grpSpPr>
-        <a:xfrm>
-          <a:off x="0" y="0"/>
-          <a:ext cx="0" cy="0"/>
-          <a:chOff x="0" y="0"/>
-          <a:chExt cx="0" cy="0"/>
-        </a:xfrm>
-      </p:grpSpPr>
-      <p:sp>
-        <p:nvSpPr>
-          <p:cNvPr id="2" name="Title 1">
-            <a:extLst>
-              <a:ext uri="{FF2B5EF4-FFF2-40B4-BE49-F238E27FC236}">
-                <a16:creationId xmlns:a16="http://schemas.microsoft.com/office/drawing/2014/main" id="{E06B4AAE-A61A-4FE9-7D4D-04001D6A33A7}"/>
-              </a:ext>
-            </a:extLst>
-          </p:cNvPr>
-          <p:cNvSpPr>
-            <a:spLocks noGrp="1"/>
-          </p:cNvSpPr>
-          <p:nvPr>
-            <p:ph type="title"/>
-          </p:nvPr>
-        </p:nvSpPr>
-        <p:spPr/>
-        <p:txBody>
-          <a:bodyPr/>
-          <a:lstStyle/>
-          <a:p>
-            <a:r>
-              <a:rPr lang="en-GB" dirty="0">
-                <a:latin typeface="Barlow ExtraBold" panose="00000900000000000000" pitchFamily="2" charset="0"/>
-              </a:rPr>
-              <a:t>Evaluation Metrics</a:t>
-            </a:r>
-            <a:endParaRPr lang="en-IN" dirty="0">
-              <a:latin typeface="Barlow ExtraBold" panose="00000900000000000000" pitchFamily="2" charset="0"/>
-            </a:endParaRPr>
-          </a:p>
-        </p:txBody>
-      </p:sp>
-      <p:sp>
-        <p:nvSpPr>
-          <p:cNvPr id="6" name="TextBox 5">
-            <a:extLst>
-              <a:ext uri="{FF2B5EF4-FFF2-40B4-BE49-F238E27FC236}">
-                <a16:creationId xmlns:a16="http://schemas.microsoft.com/office/drawing/2014/main" id="{F72B3316-1ADE-DDFF-23B4-6BC8F225AD2A}"/>
-              </a:ext>
-            </a:extLst>
-          </p:cNvPr>
-          <p:cNvSpPr txBox="1"/>
-          <p:nvPr/>
-        </p:nvSpPr>
-        <p:spPr>
-          <a:xfrm>
-            <a:off x="527427" y="2346760"/>
-            <a:ext cx="8938665" cy="461665"/>
-          </a:xfrm>
-          <a:prstGeom prst="rect">
-            <a:avLst/>
-          </a:prstGeom>
-          <a:noFill/>
-        </p:spPr>
-        <p:txBody>
-          <a:bodyPr wrap="none" rtlCol="0">
-            <a:spAutoFit/>
-          </a:bodyPr>
-          <a:lstStyle/>
-          <a:p>
-            <a:r>
-              <a:rPr lang="en-GB" sz="2400" dirty="0">
-                <a:latin typeface="Barlow Medium" panose="00000600000000000000" pitchFamily="2" charset="0"/>
-              </a:rPr>
-              <a:t>NDCG@10 - Normalized Discounted Cumulative Gain at rank 10</a:t>
-            </a:r>
-            <a:r>
-              <a:rPr lang="en-GB" sz="2400" baseline="30000" dirty="0">
-                <a:solidFill>
-                  <a:srgbClr val="FF0000"/>
-                </a:solidFill>
-                <a:latin typeface="Barlow Medium" panose="00000600000000000000" pitchFamily="2" charset="0"/>
-                <a:hlinkClick r:id="rId2" action="ppaction://hlinksldjump">
-                  <a:extLst>
-                    <a:ext uri="{A12FA001-AC4F-418D-AE19-62706E023703}">
-                      <ahyp:hlinkClr xmlns:ahyp="http://schemas.microsoft.com/office/drawing/2018/hyperlinkcolor" val="tx"/>
-                    </a:ext>
-                  </a:extLst>
-                </a:hlinkClick>
-              </a:rPr>
-              <a:t>[16]</a:t>
-            </a:r>
-            <a:endParaRPr lang="en-GB" sz="2400" baseline="30000" dirty="0">
-              <a:solidFill>
-                <a:srgbClr val="FF0000"/>
-              </a:solidFill>
-              <a:latin typeface="Barlow Medium" panose="00000600000000000000" pitchFamily="2" charset="0"/>
-            </a:endParaRPr>
-          </a:p>
-        </p:txBody>
-      </p:sp>
-      <p:sp>
-        <p:nvSpPr>
-          <p:cNvPr id="7" name="TextBox 6">
-            <a:extLst>
-              <a:ext uri="{FF2B5EF4-FFF2-40B4-BE49-F238E27FC236}">
-                <a16:creationId xmlns:a16="http://schemas.microsoft.com/office/drawing/2014/main" id="{061EE149-ABB6-78F4-BB33-DDCA828B8076}"/>
-              </a:ext>
-            </a:extLst>
-          </p:cNvPr>
-          <p:cNvSpPr txBox="1"/>
-          <p:nvPr/>
-        </p:nvSpPr>
-        <p:spPr>
-          <a:xfrm>
-            <a:off x="527427" y="2906550"/>
-            <a:ext cx="8908852" cy="923330"/>
-          </a:xfrm>
-          <a:prstGeom prst="rect">
-            <a:avLst/>
-          </a:prstGeom>
-          <a:noFill/>
-        </p:spPr>
-        <p:txBody>
-          <a:bodyPr wrap="square" rtlCol="0">
-            <a:spAutoFit/>
-          </a:bodyPr>
-          <a:lstStyle/>
-          <a:p>
-            <a:r>
-              <a:rPr lang="en-GB" dirty="0">
-                <a:latin typeface="Barlow" panose="00000500000000000000" pitchFamily="2" charset="0"/>
-              </a:rPr>
-              <a:t>NDCG@10 measures the quality of ranking systems by considering both the relevance of retrieved documents and their positions in the ranking. It is normalized by the ideal DCG to ensure values between 0 and 1, where higher values indicate better performance.</a:t>
-            </a:r>
-          </a:p>
-        </p:txBody>
-      </p:sp>
-      <p:pic>
-        <p:nvPicPr>
-          <p:cNvPr id="8" name="@holatex&#10;\begin{document}&#10;\begin{equation}&#10;\text{NDCG@10} = \frac{\text{DCG@10}}{\text{IDCG@10}}&#10;\end{equation}&#10;&#10;where:&#10;\begin{equation}&#10;\text{DCG@10} = \sum_{i=1}^{10} \frac{2^{rel_i} - 1}{\log_2(i + 1)}&#10;\end{equation}&#10;&#10;and $rel_i$ is the relevance score of the document at position $i$, and IDCG@10 is the ideal DCG computed using the best possible ranking.&#10;&#10;\end{document}">
-            <a:extLst>
-              <a:ext uri="{FF2B5EF4-FFF2-40B4-BE49-F238E27FC236}">
-                <a16:creationId xmlns:a16="http://schemas.microsoft.com/office/drawing/2014/main" id="{E2452F6C-0672-68CF-1E6D-B7CB3B53A0CE}"/>
-              </a:ext>
-            </a:extLst>
-          </p:cNvPr>
-          <p:cNvPicPr>
-            <a:picLocks/>
-          </p:cNvPicPr>
-          <p:nvPr/>
-        </p:nvPicPr>
-        <p:blipFill>
-          <a:blip r:embed="rId3"/>
-          <a:stretch>
-            <a:fillRect/>
-          </a:stretch>
-        </p:blipFill>
-        <p:spPr>
-          <a:xfrm>
-            <a:off x="1117600" y="4383878"/>
-            <a:ext cx="6959600" cy="2026933"/>
-          </a:xfrm>
-          <a:prstGeom prst="rect">
-            <a:avLst/>
-          </a:prstGeom>
-        </p:spPr>
-      </p:pic>
-    </p:spTree>
-    <p:extLst>
-      <p:ext uri="{BB962C8B-B14F-4D97-AF65-F5344CB8AC3E}">
-        <p14:creationId xmlns:p14="http://schemas.microsoft.com/office/powerpoint/2010/main" val="1961845443"/>
-      </p:ext>
-    </p:extLst>
-  </p:cSld>
-  <p:clrMapOvr>
-    <a:masterClrMapping/>
-  </p:clrMapOvr>
-</p:sld>
-</file>
-
-<file path=ppt/slides/slide17.xml><?xml version="1.0" encoding="utf-8"?>
-<p:sld xmlns:a="http://schemas.openxmlformats.org/drawingml/2006/main" xmlns:r="http://schemas.openxmlformats.org/officeDocument/2006/relationships" xmlns:p="http://schemas.openxmlformats.org/presentationml/2006/main">
-  <p:cSld>
-    <p:spTree>
-      <p:nvGrpSpPr>
         <p:cNvPr id="1" name="">
           <a:extLst>
             <a:ext uri="{FF2B5EF4-FFF2-40B4-BE49-F238E27FC236}">
@@ -13233,6 +13044,195 @@
     <p:extLst>
       <p:ext uri="{BB962C8B-B14F-4D97-AF65-F5344CB8AC3E}">
         <p14:creationId xmlns:p14="http://schemas.microsoft.com/office/powerpoint/2010/main" val="2752368493"/>
+      </p:ext>
+    </p:extLst>
+  </p:cSld>
+  <p:clrMapOvr>
+    <a:masterClrMapping/>
+  </p:clrMapOvr>
+</p:sld>
+</file>
+
+<file path=ppt/slides/slide17.xml><?xml version="1.0" encoding="utf-8"?>
+<p:sld xmlns:a="http://schemas.openxmlformats.org/drawingml/2006/main" xmlns:r="http://schemas.openxmlformats.org/officeDocument/2006/relationships" xmlns:p="http://schemas.openxmlformats.org/presentationml/2006/main">
+  <p:cSld>
+    <p:spTree>
+      <p:nvGrpSpPr>
+        <p:cNvPr id="1" name=""/>
+        <p:cNvGrpSpPr/>
+        <p:nvPr/>
+      </p:nvGrpSpPr>
+      <p:grpSpPr>
+        <a:xfrm>
+          <a:off x="0" y="0"/>
+          <a:ext cx="0" cy="0"/>
+          <a:chOff x="0" y="0"/>
+          <a:chExt cx="0" cy="0"/>
+        </a:xfrm>
+      </p:grpSpPr>
+      <p:sp>
+        <p:nvSpPr>
+          <p:cNvPr id="2" name="Title 1">
+            <a:extLst>
+              <a:ext uri="{FF2B5EF4-FFF2-40B4-BE49-F238E27FC236}">
+                <a16:creationId xmlns:a16="http://schemas.microsoft.com/office/drawing/2014/main" id="{E06B4AAE-A61A-4FE9-7D4D-04001D6A33A7}"/>
+              </a:ext>
+            </a:extLst>
+          </p:cNvPr>
+          <p:cNvSpPr>
+            <a:spLocks noGrp="1"/>
+          </p:cNvSpPr>
+          <p:nvPr>
+            <p:ph type="title"/>
+          </p:nvPr>
+        </p:nvSpPr>
+        <p:spPr/>
+        <p:txBody>
+          <a:bodyPr/>
+          <a:lstStyle/>
+          <a:p>
+            <a:r>
+              <a:rPr lang="en-GB" dirty="0">
+                <a:latin typeface="Barlow ExtraBold" panose="00000900000000000000" pitchFamily="2" charset="0"/>
+              </a:rPr>
+              <a:t>Evaluation Metrics</a:t>
+            </a:r>
+            <a:endParaRPr lang="en-IN" dirty="0">
+              <a:latin typeface="Barlow ExtraBold" panose="00000900000000000000" pitchFamily="2" charset="0"/>
+            </a:endParaRPr>
+          </a:p>
+        </p:txBody>
+      </p:sp>
+      <p:sp>
+        <p:nvSpPr>
+          <p:cNvPr id="6" name="TextBox 5">
+            <a:extLst>
+              <a:ext uri="{FF2B5EF4-FFF2-40B4-BE49-F238E27FC236}">
+                <a16:creationId xmlns:a16="http://schemas.microsoft.com/office/drawing/2014/main" id="{F72B3316-1ADE-DDFF-23B4-6BC8F225AD2A}"/>
+              </a:ext>
+            </a:extLst>
+          </p:cNvPr>
+          <p:cNvSpPr txBox="1"/>
+          <p:nvPr/>
+        </p:nvSpPr>
+        <p:spPr>
+          <a:xfrm>
+            <a:off x="527427" y="2346760"/>
+            <a:ext cx="8938665" cy="461665"/>
+          </a:xfrm>
+          <a:prstGeom prst="rect">
+            <a:avLst/>
+          </a:prstGeom>
+          <a:noFill/>
+        </p:spPr>
+        <p:txBody>
+          <a:bodyPr wrap="none" rtlCol="0">
+            <a:spAutoFit/>
+          </a:bodyPr>
+          <a:lstStyle/>
+          <a:p>
+            <a:r>
+              <a:rPr lang="en-GB" sz="2400" dirty="0">
+                <a:latin typeface="Barlow Medium" panose="00000600000000000000" pitchFamily="2" charset="0"/>
+              </a:rPr>
+              <a:t>NDCG@10 - Normalized Discounted Cumulative Gain at rank 10</a:t>
+            </a:r>
+            <a:r>
+              <a:rPr lang="en-GB" sz="2400" baseline="30000" dirty="0">
+                <a:solidFill>
+                  <a:srgbClr val="FF0000"/>
+                </a:solidFill>
+                <a:latin typeface="Barlow Medium" panose="00000600000000000000" pitchFamily="2" charset="0"/>
+                <a:hlinkClick r:id="rId2" action="ppaction://hlinksldjump">
+                  <a:extLst>
+                    <a:ext uri="{A12FA001-AC4F-418D-AE19-62706E023703}">
+                      <ahyp:hlinkClr xmlns:ahyp="http://schemas.microsoft.com/office/drawing/2018/hyperlinkcolor" val="tx"/>
+                    </a:ext>
+                  </a:extLst>
+                </a:hlinkClick>
+              </a:rPr>
+              <a:t>[16]</a:t>
+            </a:r>
+            <a:endParaRPr lang="en-GB" sz="2400" baseline="30000" dirty="0">
+              <a:solidFill>
+                <a:srgbClr val="FF0000"/>
+              </a:solidFill>
+              <a:latin typeface="Barlow Medium" panose="00000600000000000000" pitchFamily="2" charset="0"/>
+            </a:endParaRPr>
+          </a:p>
+        </p:txBody>
+      </p:sp>
+      <p:sp>
+        <p:nvSpPr>
+          <p:cNvPr id="7" name="TextBox 6">
+            <a:extLst>
+              <a:ext uri="{FF2B5EF4-FFF2-40B4-BE49-F238E27FC236}">
+                <a16:creationId xmlns:a16="http://schemas.microsoft.com/office/drawing/2014/main" id="{061EE149-ABB6-78F4-BB33-DDCA828B8076}"/>
+              </a:ext>
+            </a:extLst>
+          </p:cNvPr>
+          <p:cNvSpPr txBox="1"/>
+          <p:nvPr/>
+        </p:nvSpPr>
+        <p:spPr>
+          <a:xfrm>
+            <a:off x="527427" y="2906550"/>
+            <a:ext cx="8908852" cy="923330"/>
+          </a:xfrm>
+          <a:prstGeom prst="rect">
+            <a:avLst/>
+          </a:prstGeom>
+          <a:noFill/>
+        </p:spPr>
+        <p:txBody>
+          <a:bodyPr wrap="square" rtlCol="0">
+            <a:spAutoFit/>
+          </a:bodyPr>
+          <a:lstStyle/>
+          <a:p>
+            <a:r>
+              <a:rPr lang="en-GB" dirty="0">
+                <a:latin typeface="Barlow" panose="00000500000000000000" pitchFamily="2" charset="0"/>
+              </a:rPr>
+              <a:t>NDCG@10 measures the quality of ranking systems by considering both the relevance of retrieved documents and their positions in the ranking. It is normalized by the ideal DCG to ensure values between 0 and 1, where higher values indicate better performance.</a:t>
+            </a:r>
+          </a:p>
+        </p:txBody>
+      </p:sp>
+      <p:pic>
+        <p:nvPicPr>
+          <p:cNvPr id="8" name="@holatex&#10;\begin{document}&#10;\begin{equation}&#10;\text{NDCG@10} = \frac{\text{DCG@10}}{\text{IDCG@10}}&#10;\end{equation}&#10;&#10;where:&#10;\begin{equation}&#10;\text{DCG@10} = \sum_{i=1}^{10} \frac{2^{rel_i} - 1}{\log_2(i + 1)}&#10;\end{equation}&#10;&#10;and $rel_i$ is the relevance score of the document at position $i$, and IDCG@10 is the ideal DCG computed using the best possible ranking.&#10;&#10;\end{document}">
+            <a:extLst>
+              <a:ext uri="{FF2B5EF4-FFF2-40B4-BE49-F238E27FC236}">
+                <a16:creationId xmlns:a16="http://schemas.microsoft.com/office/drawing/2014/main" id="{E2452F6C-0672-68CF-1E6D-B7CB3B53A0CE}"/>
+              </a:ext>
+            </a:extLst>
+          </p:cNvPr>
+          <p:cNvPicPr>
+            <a:picLocks/>
+          </p:cNvPicPr>
+          <p:nvPr/>
+        </p:nvPicPr>
+        <p:blipFill>
+          <a:blip r:embed="rId3"/>
+          <a:stretch>
+            <a:fillRect/>
+          </a:stretch>
+        </p:blipFill>
+        <p:spPr>
+          <a:xfrm>
+            <a:off x="1117600" y="4383878"/>
+            <a:ext cx="6959600" cy="2026933"/>
+          </a:xfrm>
+          <a:prstGeom prst="rect">
+            <a:avLst/>
+          </a:prstGeom>
+        </p:spPr>
+      </p:pic>
+    </p:spTree>
+    <p:extLst>
+      <p:ext uri="{BB962C8B-B14F-4D97-AF65-F5344CB8AC3E}">
+        <p14:creationId xmlns:p14="http://schemas.microsoft.com/office/powerpoint/2010/main" val="1961845443"/>
       </p:ext>
     </p:extLst>
   </p:cSld>
@@ -13386,14 +13386,14 @@
           <p:nvPr>
             <p:extLst>
               <p:ext uri="{D42A27DB-BD31-4B8C-83A1-F6EECF244321}">
-                <p14:modId xmlns:p14="http://schemas.microsoft.com/office/powerpoint/2010/main" val="2709341113"/>
+                <p14:modId xmlns:p14="http://schemas.microsoft.com/office/powerpoint/2010/main" val="1126788479"/>
               </p:ext>
             </p:extLst>
           </p:nvPr>
         </p:nvGraphicFramePr>
         <p:xfrm>
-          <a:off x="930000" y="2405853"/>
-          <a:ext cx="10332000" cy="3059998"/>
+          <a:off x="1668000" y="2286584"/>
+          <a:ext cx="8856000" cy="3059998"/>
         </p:xfrm>
         <a:graphic>
           <a:graphicData uri="http://schemas.openxmlformats.org/drawingml/2006/table">
@@ -13420,13 +13420,6 @@
                   <a:extLst>
                     <a:ext uri="{9D8B030D-6E8A-4147-A177-3AD203B41FA5}">
                       <a16:colId xmlns:a16="http://schemas.microsoft.com/office/drawing/2014/main" val="1757895171"/>
-                    </a:ext>
-                  </a:extLst>
-                </a:gridCol>
-                <a:gridCol w="1476000">
-                  <a:extLst>
-                    <a:ext uri="{9D8B030D-6E8A-4147-A177-3AD203B41FA5}">
-                      <a16:colId xmlns:a16="http://schemas.microsoft.com/office/drawing/2014/main" val="1926697050"/>
                     </a:ext>
                   </a:extLst>
                 </a:gridCol>
@@ -13575,39 +13568,6 @@
                           <a:effectLst/>
                           <a:latin typeface="Barlow SemiBold" panose="00000700000000000000" pitchFamily="2" charset="0"/>
                         </a:rPr>
-                        <a:t>MAP</a:t>
-                      </a:r>
-                    </a:p>
-                  </a:txBody>
-                  <a:tcPr anchor="ctr">
-                    <a:lnB w="12700" cap="flat" cmpd="sng" algn="ctr">
-                      <a:solidFill>
-                        <a:schemeClr val="tx1"/>
-                      </a:solidFill>
-                      <a:prstDash val="solid"/>
-                      <a:round/>
-                      <a:headEnd type="none" w="med" len="med"/>
-                      <a:tailEnd type="none" w="med" len="med"/>
-                    </a:lnB>
-                    <a:solidFill>
-                      <a:srgbClr val="0070C0"/>
-                    </a:solidFill>
-                  </a:tcPr>
-                </a:tc>
-                <a:tc>
-                  <a:txBody>
-                    <a:bodyPr/>
-                    <a:lstStyle/>
-                    <a:p>
-                      <a:pPr algn="ctr"/>
-                      <a:r>
-                        <a:rPr lang="en-IN" sz="2200" b="1" dirty="0">
-                          <a:solidFill>
-                            <a:srgbClr val="FFFFFF"/>
-                          </a:solidFill>
-                          <a:effectLst/>
-                          <a:latin typeface="Barlow SemiBold" panose="00000700000000000000" pitchFamily="2" charset="0"/>
-                        </a:rPr>
                         <a:t>MRR@10</a:t>
                       </a:r>
                     </a:p>
@@ -13901,70 +13861,6 @@
                     <a:p>
                       <a:pPr algn="ctr"/>
                       <a:r>
-                        <a:rPr lang="en-IN" b="1" dirty="0">
-                          <a:solidFill>
-                            <a:srgbClr val="334155"/>
-                          </a:solidFill>
-                          <a:effectLst/>
-                          <a:latin typeface="Barlow Medium" panose="00000600000000000000" pitchFamily="2" charset="0"/>
-                        </a:rPr>
-                        <a:t>0.4908</a:t>
-                      </a:r>
-                    </a:p>
-                  </a:txBody>
-                  <a:tcPr anchor="ctr">
-                    <a:lnL w="3175" cap="flat" cmpd="sng" algn="ctr">
-                      <a:noFill/>
-                      <a:prstDash val="solid"/>
-                      <a:round/>
-                      <a:headEnd type="none" w="med" len="med"/>
-                      <a:tailEnd type="none" w="med" len="med"/>
-                    </a:lnL>
-                    <a:lnR w="3175" cap="flat" cmpd="sng" algn="ctr">
-                      <a:noFill/>
-                      <a:prstDash val="solid"/>
-                      <a:round/>
-                      <a:headEnd type="none" w="med" len="med"/>
-                      <a:tailEnd type="none" w="med" len="med"/>
-                    </a:lnR>
-                    <a:lnT w="12700" cap="flat" cmpd="sng" algn="ctr">
-                      <a:solidFill>
-                        <a:schemeClr val="tx1"/>
-                      </a:solidFill>
-                      <a:prstDash val="solid"/>
-                      <a:round/>
-                      <a:headEnd type="none" w="med" len="med"/>
-                      <a:tailEnd type="none" w="med" len="med"/>
-                    </a:lnT>
-                    <a:lnB w="3175" cap="flat" cmpd="sng" algn="ctr">
-                      <a:solidFill>
-                        <a:schemeClr val="tx1"/>
-                      </a:solidFill>
-                      <a:prstDash val="solid"/>
-                      <a:round/>
-                      <a:headEnd type="none" w="med" len="med"/>
-                      <a:tailEnd type="none" w="med" len="med"/>
-                    </a:lnB>
-                    <a:lnTlToBr w="12700" cmpd="sng">
-                      <a:noFill/>
-                      <a:prstDash val="solid"/>
-                    </a:lnTlToBr>
-                    <a:lnBlToTr w="12700" cmpd="sng">
-                      <a:noFill/>
-                      <a:prstDash val="solid"/>
-                    </a:lnBlToTr>
-                    <a:solidFill>
-                      <a:srgbClr val="92D050"/>
-                    </a:solidFill>
-                  </a:tcPr>
-                </a:tc>
-                <a:tc>
-                  <a:txBody>
-                    <a:bodyPr/>
-                    <a:lstStyle/>
-                    <a:p>
-                      <a:pPr algn="ctr"/>
-                      <a:r>
                         <a:rPr lang="en-IN" dirty="0">
                           <a:solidFill>
                             <a:srgbClr val="334155"/>
@@ -14289,70 +14185,6 @@
                           <a:latin typeface="Barlow Medium" panose="00000600000000000000" pitchFamily="2" charset="0"/>
                         </a:rPr>
                         <a:t>0.7031</a:t>
-                      </a:r>
-                    </a:p>
-                  </a:txBody>
-                  <a:tcPr anchor="ctr">
-                    <a:lnL w="3175" cap="flat" cmpd="sng" algn="ctr">
-                      <a:noFill/>
-                      <a:prstDash val="solid"/>
-                      <a:round/>
-                      <a:headEnd type="none" w="med" len="med"/>
-                      <a:tailEnd type="none" w="med" len="med"/>
-                    </a:lnL>
-                    <a:lnR w="3175" cap="flat" cmpd="sng" algn="ctr">
-                      <a:noFill/>
-                      <a:prstDash val="solid"/>
-                      <a:round/>
-                      <a:headEnd type="none" w="med" len="med"/>
-                      <a:tailEnd type="none" w="med" len="med"/>
-                    </a:lnR>
-                    <a:lnT w="3175" cap="flat" cmpd="sng" algn="ctr">
-                      <a:solidFill>
-                        <a:schemeClr val="tx1"/>
-                      </a:solidFill>
-                      <a:prstDash val="solid"/>
-                      <a:round/>
-                      <a:headEnd type="none" w="med" len="med"/>
-                      <a:tailEnd type="none" w="med" len="med"/>
-                    </a:lnT>
-                    <a:lnB w="3175" cap="flat" cmpd="sng" algn="ctr">
-                      <a:solidFill>
-                        <a:schemeClr val="tx1"/>
-                      </a:solidFill>
-                      <a:prstDash val="solid"/>
-                      <a:round/>
-                      <a:headEnd type="none" w="med" len="med"/>
-                      <a:tailEnd type="none" w="med" len="med"/>
-                    </a:lnB>
-                    <a:lnTlToBr w="12700" cmpd="sng">
-                      <a:noFill/>
-                      <a:prstDash val="solid"/>
-                    </a:lnTlToBr>
-                    <a:lnBlToTr w="12700" cmpd="sng">
-                      <a:noFill/>
-                      <a:prstDash val="solid"/>
-                    </a:lnBlToTr>
-                    <a:solidFill>
-                      <a:schemeClr val="bg1"/>
-                    </a:solidFill>
-                  </a:tcPr>
-                </a:tc>
-                <a:tc>
-                  <a:txBody>
-                    <a:bodyPr/>
-                    <a:lstStyle/>
-                    <a:p>
-                      <a:pPr algn="ctr"/>
-                      <a:r>
-                        <a:rPr lang="en-IN" dirty="0">
-                          <a:solidFill>
-                            <a:srgbClr val="334155"/>
-                          </a:solidFill>
-                          <a:effectLst/>
-                          <a:latin typeface="Barlow Medium" panose="00000600000000000000" pitchFamily="2" charset="0"/>
-                        </a:rPr>
-                        <a:t>0.4858</a:t>
                       </a:r>
                     </a:p>
                   </a:txBody>
@@ -14799,70 +14631,6 @@
                     <a:p>
                       <a:pPr algn="ctr"/>
                       <a:r>
-                        <a:rPr lang="en-IN" b="1" dirty="0">
-                          <a:solidFill>
-                            <a:srgbClr val="334155"/>
-                          </a:solidFill>
-                          <a:effectLst/>
-                          <a:latin typeface="Barlow Medium" panose="00000600000000000000" pitchFamily="2" charset="0"/>
-                        </a:rPr>
-                        <a:t>0.5005</a:t>
-                      </a:r>
-                    </a:p>
-                  </a:txBody>
-                  <a:tcPr anchor="ctr">
-                    <a:lnL w="3175" cap="flat" cmpd="sng" algn="ctr">
-                      <a:noFill/>
-                      <a:prstDash val="solid"/>
-                      <a:round/>
-                      <a:headEnd type="none" w="med" len="med"/>
-                      <a:tailEnd type="none" w="med" len="med"/>
-                    </a:lnL>
-                    <a:lnR w="3175" cap="flat" cmpd="sng" algn="ctr">
-                      <a:noFill/>
-                      <a:prstDash val="solid"/>
-                      <a:round/>
-                      <a:headEnd type="none" w="med" len="med"/>
-                      <a:tailEnd type="none" w="med" len="med"/>
-                    </a:lnR>
-                    <a:lnT w="3175" cap="flat" cmpd="sng" algn="ctr">
-                      <a:solidFill>
-                        <a:schemeClr val="tx1"/>
-                      </a:solidFill>
-                      <a:prstDash val="solid"/>
-                      <a:round/>
-                      <a:headEnd type="none" w="med" len="med"/>
-                      <a:tailEnd type="none" w="med" len="med"/>
-                    </a:lnT>
-                    <a:lnB w="3175" cap="flat" cmpd="sng" algn="ctr">
-                      <a:solidFill>
-                        <a:schemeClr val="tx1"/>
-                      </a:solidFill>
-                      <a:prstDash val="solid"/>
-                      <a:round/>
-                      <a:headEnd type="none" w="med" len="med"/>
-                      <a:tailEnd type="none" w="med" len="med"/>
-                    </a:lnB>
-                    <a:lnTlToBr w="12700" cmpd="sng">
-                      <a:noFill/>
-                      <a:prstDash val="solid"/>
-                    </a:lnTlToBr>
-                    <a:lnBlToTr w="12700" cmpd="sng">
-                      <a:noFill/>
-                      <a:prstDash val="solid"/>
-                    </a:lnBlToTr>
-                    <a:solidFill>
-                      <a:srgbClr val="92D050"/>
-                    </a:solidFill>
-                  </a:tcPr>
-                </a:tc>
-                <a:tc>
-                  <a:txBody>
-                    <a:bodyPr/>
-                    <a:lstStyle/>
-                    <a:p>
-                      <a:pPr algn="ctr"/>
-                      <a:r>
                         <a:rPr lang="en-IN" dirty="0">
                           <a:solidFill>
                             <a:srgbClr val="334155"/>
@@ -15187,70 +14955,6 @@
                           <a:latin typeface="Barlow Medium" panose="00000600000000000000" pitchFamily="2" charset="0"/>
                         </a:rPr>
                         <a:t>0.6909</a:t>
-                      </a:r>
-                    </a:p>
-                  </a:txBody>
-                  <a:tcPr anchor="ctr">
-                    <a:lnL w="3175" cap="flat" cmpd="sng" algn="ctr">
-                      <a:noFill/>
-                      <a:prstDash val="solid"/>
-                      <a:round/>
-                      <a:headEnd type="none" w="med" len="med"/>
-                      <a:tailEnd type="none" w="med" len="med"/>
-                    </a:lnL>
-                    <a:lnR w="3175" cap="flat" cmpd="sng" algn="ctr">
-                      <a:noFill/>
-                      <a:prstDash val="solid"/>
-                      <a:round/>
-                      <a:headEnd type="none" w="med" len="med"/>
-                      <a:tailEnd type="none" w="med" len="med"/>
-                    </a:lnR>
-                    <a:lnT w="3175" cap="flat" cmpd="sng" algn="ctr">
-                      <a:solidFill>
-                        <a:schemeClr val="tx1"/>
-                      </a:solidFill>
-                      <a:prstDash val="solid"/>
-                      <a:round/>
-                      <a:headEnd type="none" w="med" len="med"/>
-                      <a:tailEnd type="none" w="med" len="med"/>
-                    </a:lnT>
-                    <a:lnB w="3175" cap="flat" cmpd="sng" algn="ctr">
-                      <a:solidFill>
-                        <a:schemeClr val="tx1"/>
-                      </a:solidFill>
-                      <a:prstDash val="solid"/>
-                      <a:round/>
-                      <a:headEnd type="none" w="med" len="med"/>
-                      <a:tailEnd type="none" w="med" len="med"/>
-                    </a:lnB>
-                    <a:lnTlToBr w="12700" cmpd="sng">
-                      <a:noFill/>
-                      <a:prstDash val="solid"/>
-                    </a:lnTlToBr>
-                    <a:lnBlToTr w="12700" cmpd="sng">
-                      <a:noFill/>
-                      <a:prstDash val="solid"/>
-                    </a:lnBlToTr>
-                    <a:solidFill>
-                      <a:schemeClr val="bg1"/>
-                    </a:solidFill>
-                  </a:tcPr>
-                </a:tc>
-                <a:tc>
-                  <a:txBody>
-                    <a:bodyPr/>
-                    <a:lstStyle/>
-                    <a:p>
-                      <a:pPr algn="ctr"/>
-                      <a:r>
-                        <a:rPr lang="en-IN" dirty="0">
-                          <a:solidFill>
-                            <a:srgbClr val="334155"/>
-                          </a:solidFill>
-                          <a:effectLst/>
-                          <a:latin typeface="Barlow Medium" panose="00000600000000000000" pitchFamily="2" charset="0"/>
-                        </a:rPr>
-                        <a:t>0.4921</a:t>
                       </a:r>
                     </a:p>
                   </a:txBody>
@@ -15636,70 +15340,6 @@
                           <a:latin typeface="Barlow Medium" panose="00000600000000000000" pitchFamily="2" charset="0"/>
                         </a:rPr>
                         <a:t>0.7105</a:t>
-                      </a:r>
-                    </a:p>
-                  </a:txBody>
-                  <a:tcPr anchor="ctr">
-                    <a:lnL w="3175" cap="flat" cmpd="sng" algn="ctr">
-                      <a:noFill/>
-                      <a:prstDash val="solid"/>
-                      <a:round/>
-                      <a:headEnd type="none" w="med" len="med"/>
-                      <a:tailEnd type="none" w="med" len="med"/>
-                    </a:lnL>
-                    <a:lnR w="3175" cap="flat" cmpd="sng" algn="ctr">
-                      <a:noFill/>
-                      <a:prstDash val="solid"/>
-                      <a:round/>
-                      <a:headEnd type="none" w="med" len="med"/>
-                      <a:tailEnd type="none" w="med" len="med"/>
-                    </a:lnR>
-                    <a:lnT w="3175" cap="flat" cmpd="sng" algn="ctr">
-                      <a:solidFill>
-                        <a:schemeClr val="tx1"/>
-                      </a:solidFill>
-                      <a:prstDash val="solid"/>
-                      <a:round/>
-                      <a:headEnd type="none" w="med" len="med"/>
-                      <a:tailEnd type="none" w="med" len="med"/>
-                    </a:lnT>
-                    <a:lnB w="3175" cap="flat" cmpd="sng" algn="ctr">
-                      <a:solidFill>
-                        <a:schemeClr val="tx1"/>
-                      </a:solidFill>
-                      <a:prstDash val="solid"/>
-                      <a:round/>
-                      <a:headEnd type="none" w="med" len="med"/>
-                      <a:tailEnd type="none" w="med" len="med"/>
-                    </a:lnB>
-                    <a:lnTlToBr w="12700" cmpd="sng">
-                      <a:noFill/>
-                      <a:prstDash val="solid"/>
-                    </a:lnTlToBr>
-                    <a:lnBlToTr w="12700" cmpd="sng">
-                      <a:noFill/>
-                      <a:prstDash val="solid"/>
-                    </a:lnBlToTr>
-                    <a:solidFill>
-                      <a:schemeClr val="bg1"/>
-                    </a:solidFill>
-                  </a:tcPr>
-                </a:tc>
-                <a:tc>
-                  <a:txBody>
-                    <a:bodyPr/>
-                    <a:lstStyle/>
-                    <a:p>
-                      <a:pPr algn="ctr"/>
-                      <a:r>
-                        <a:rPr lang="en-IN">
-                          <a:solidFill>
-                            <a:srgbClr val="334155"/>
-                          </a:solidFill>
-                          <a:effectLst/>
-                          <a:latin typeface="Barlow Medium" panose="00000600000000000000" pitchFamily="2" charset="0"/>
-                        </a:rPr>
-                        <a:t>0.5066</a:t>
                       </a:r>
                     </a:p>
                   </a:txBody>
@@ -16162,82 +15802,6 @@
                           <a:effectLst/>
                           <a:latin typeface="Barlow Medium" panose="00000600000000000000" pitchFamily="2" charset="0"/>
                         </a:rPr>
-                        <a:t>0.5121</a:t>
-                      </a:r>
-                      <a:endParaRPr lang="en-IN" dirty="0">
-                        <a:solidFill>
-                          <a:srgbClr val="334155"/>
-                        </a:solidFill>
-                        <a:effectLst/>
-                        <a:latin typeface="Barlow Medium" panose="00000600000000000000" pitchFamily="2" charset="0"/>
-                      </a:endParaRPr>
-                    </a:p>
-                  </a:txBody>
-                  <a:tcPr anchor="ctr">
-                    <a:lnL w="3175" cap="flat" cmpd="sng" algn="ctr">
-                      <a:noFill/>
-                      <a:prstDash val="solid"/>
-                      <a:round/>
-                      <a:headEnd type="none" w="med" len="med"/>
-                      <a:tailEnd type="none" w="med" len="med"/>
-                    </a:lnL>
-                    <a:lnR w="3175" cap="flat" cmpd="sng" algn="ctr">
-                      <a:noFill/>
-                      <a:prstDash val="solid"/>
-                      <a:round/>
-                      <a:headEnd type="none" w="med" len="med"/>
-                      <a:tailEnd type="none" w="med" len="med"/>
-                    </a:lnR>
-                    <a:lnT w="3175" cap="flat" cmpd="sng" algn="ctr">
-                      <a:solidFill>
-                        <a:schemeClr val="tx1"/>
-                      </a:solidFill>
-                      <a:prstDash val="solid"/>
-                      <a:round/>
-                      <a:headEnd type="none" w="med" len="med"/>
-                      <a:tailEnd type="none" w="med" len="med"/>
-                    </a:lnT>
-                    <a:lnB w="9525" cap="rnd" cmpd="sng" algn="ctr">
-                      <a:noFill/>
-                      <a:prstDash val="solid"/>
-                    </a:lnB>
-                    <a:lnTlToBr w="12700" cmpd="sng">
-                      <a:noFill/>
-                      <a:prstDash val="solid"/>
-                    </a:lnTlToBr>
-                    <a:lnBlToTr w="12700" cmpd="sng">
-                      <a:noFill/>
-                      <a:prstDash val="solid"/>
-                    </a:lnBlToTr>
-                    <a:solidFill>
-                      <a:srgbClr val="92D050"/>
-                    </a:solidFill>
-                  </a:tcPr>
-                </a:tc>
-                <a:tc>
-                  <a:txBody>
-                    <a:bodyPr/>
-                    <a:lstStyle/>
-                    <a:p>
-                      <a:pPr algn="ctr"/>
-                      <a:r>
-                        <a:rPr lang="en-IN" dirty="0">
-                          <a:solidFill>
-                            <a:srgbClr val="334155"/>
-                          </a:solidFill>
-                          <a:effectLst/>
-                          <a:latin typeface="Barlow Medium" panose="00000600000000000000" pitchFamily="2" charset="0"/>
-                        </a:rPr>
-                        <a:t>🏆</a:t>
-                      </a:r>
-                      <a:r>
-                        <a:rPr lang="en-IN" b="1" dirty="0">
-                          <a:solidFill>
-                            <a:srgbClr val="334155"/>
-                          </a:solidFill>
-                          <a:effectLst/>
-                          <a:latin typeface="Barlow Medium" panose="00000600000000000000" pitchFamily="2" charset="0"/>
-                        </a:rPr>
                         <a:t>0.5988</a:t>
                       </a:r>
                       <a:endParaRPr lang="en-IN" dirty="0">
@@ -16446,7 +16010,7 @@
         </p:nvSpPr>
         <p:spPr>
           <a:xfrm>
-            <a:off x="2558643" y="5839722"/>
+            <a:off x="3161617" y="5707201"/>
             <a:ext cx="6274964" cy="707886"/>
           </a:xfrm>
           <a:prstGeom prst="rect">
@@ -16480,7 +16044,7 @@
               <a:rPr lang="en-GB" sz="2000" b="1" dirty="0">
                 <a:latin typeface="Barlow SemiBold" panose="00000700000000000000" pitchFamily="2" charset="0"/>
               </a:rPr>
-              <a:t>🏆 Overall Winner: ModernBERT + Lion achieved highest performance in 4/5 metrics</a:t>
+              <a:t>🏆 Overall Winner: (ModernBERT + Lion) achieved highest performance in 3/4 metrics</a:t>
             </a:r>
             <a:endParaRPr lang="en-IN" sz="2000" dirty="0">
               <a:latin typeface="Barlow SemiBold" panose="00000700000000000000" pitchFamily="2" charset="0"/>
@@ -20406,7 +19970,7 @@
 </file>
 
 <file path=ppt/slides/slide25.xml><?xml version="1.0" encoding="utf-8"?>
-<p:sld xmlns:a="http://schemas.openxmlformats.org/drawingml/2006/main" xmlns:r="http://schemas.openxmlformats.org/officeDocument/2006/relationships" xmlns:p="http://schemas.openxmlformats.org/presentationml/2006/main">
+<p:sld xmlns:a="http://schemas.openxmlformats.org/drawingml/2006/main" xmlns:r="http://schemas.openxmlformats.org/officeDocument/2006/relationships" xmlns:p="http://schemas.openxmlformats.org/presentationml/2006/main" show="0">
   <p:cSld>
     <p:spTree>
       <p:nvGrpSpPr>
@@ -20469,7 +20033,7 @@
 </file>
 
 <file path=ppt/slides/slide26.xml><?xml version="1.0" encoding="utf-8"?>
-<p:sld xmlns:a="http://schemas.openxmlformats.org/drawingml/2006/main" xmlns:r="http://schemas.openxmlformats.org/officeDocument/2006/relationships" xmlns:p="http://schemas.openxmlformats.org/presentationml/2006/main">
+<p:sld xmlns:a="http://schemas.openxmlformats.org/drawingml/2006/main" xmlns:r="http://schemas.openxmlformats.org/officeDocument/2006/relationships" xmlns:p="http://schemas.openxmlformats.org/presentationml/2006/main" show="0">
   <p:cSld>
     <p:spTree>
       <p:nvGrpSpPr>
@@ -21523,13 +21087,33 @@
             </a:r>
             <a:r>
               <a:rPr lang="en-GB" b="1" i="1" baseline="30000" dirty="0">
+                <a:solidFill>
+                  <a:srgbClr val="FF0000"/>
+                </a:solidFill>
                 <a:latin typeface="Barlow Medium" panose="00000600000000000000" pitchFamily="2" charset="0"/>
+                <a:hlinkClick r:id="rId3" action="ppaction://hlinksldjump">
+                  <a:extLst>
+                    <a:ext uri="{A12FA001-AC4F-418D-AE19-62706E023703}">
+                      <ahyp:hlinkClr xmlns:ahyp="http://schemas.microsoft.com/office/drawing/2018/hyperlinkcolor" val="tx"/>
+                    </a:ext>
+                  </a:extLst>
+                </a:hlinkClick>
               </a:rPr>
               <a:t>[4]</a:t>
             </a:r>
             <a:r>
               <a:rPr lang="en-GB" b="1" i="1" dirty="0">
+                <a:solidFill>
+                  <a:srgbClr val="FF0000"/>
+                </a:solidFill>
                 <a:latin typeface="Barlow Medium" panose="00000600000000000000" pitchFamily="2" charset="0"/>
+                <a:hlinkClick r:id="rId3" action="ppaction://hlinksldjump">
+                  <a:extLst>
+                    <a:ext uri="{A12FA001-AC4F-418D-AE19-62706E023703}">
+                      <ahyp:hlinkClr xmlns:ahyp="http://schemas.microsoft.com/office/drawing/2018/hyperlinkcolor" val="tx"/>
+                    </a:ext>
+                  </a:extLst>
+                </a:hlinkClick>
               </a:rPr>
               <a:t> </a:t>
             </a:r>
@@ -21544,13 +21128,33 @@
             </a:r>
             <a:r>
               <a:rPr lang="en-GB" b="1" i="1" baseline="30000" dirty="0">
+                <a:solidFill>
+                  <a:srgbClr val="FF0000"/>
+                </a:solidFill>
                 <a:latin typeface="Barlow Medium" panose="00000600000000000000" pitchFamily="2" charset="0"/>
+                <a:hlinkClick r:id="rId3" action="ppaction://hlinksldjump">
+                  <a:extLst>
+                    <a:ext uri="{A12FA001-AC4F-418D-AE19-62706E023703}">
+                      <ahyp:hlinkClr xmlns:ahyp="http://schemas.microsoft.com/office/drawing/2018/hyperlinkcolor" val="tx"/>
+                    </a:ext>
+                  </a:extLst>
+                </a:hlinkClick>
               </a:rPr>
               <a:t>[3]</a:t>
             </a:r>
             <a:r>
               <a:rPr lang="en-GB" b="1" i="1" dirty="0">
+                <a:solidFill>
+                  <a:srgbClr val="FF0000"/>
+                </a:solidFill>
                 <a:latin typeface="Barlow Medium" panose="00000600000000000000" pitchFamily="2" charset="0"/>
+                <a:hlinkClick r:id="rId3" action="ppaction://hlinksldjump">
+                  <a:extLst>
+                    <a:ext uri="{A12FA001-AC4F-418D-AE19-62706E023703}">
+                      <ahyp:hlinkClr xmlns:ahyp="http://schemas.microsoft.com/office/drawing/2018/hyperlinkcolor" val="tx"/>
+                    </a:ext>
+                  </a:extLst>
+                </a:hlinkClick>
               </a:rPr>
               <a:t> </a:t>
             </a:r>

--- a/cross_encoder/thesis/Thesis_presentation.pptx
+++ b/cross_encoder/thesis/Thesis_presentation.pptx
@@ -244,7 +244,7 @@
           <a:p>
             <a:fld id="{8E836F02-AF67-416B-AB85-08CFF698F86D}" type="datetimeFigureOut">
               <a:rPr lang="en-US" smtClean="0"/>
-              <a:t>6/22/2025</a:t>
+              <a:t>6/25/2025</a:t>
             </a:fld>
             <a:endParaRPr lang="en-US" dirty="0"/>
           </a:p>
@@ -421,7 +421,7 @@
           <a:p>
             <a:fld id="{45B7E8F0-931C-4E43-98D1-A3CD0E0034DC}" type="datetimeFigureOut">
               <a:rPr lang="en-US" smtClean="0"/>
-              <a:t>6/22/2025</a:t>
+              <a:t>6/25/2025</a:t>
             </a:fld>
             <a:endParaRPr lang="en-US" dirty="0"/>
           </a:p>
@@ -2771,7 +2771,7 @@
           </a:effectLst>
           <a:extLst>
             <a:ext uri="{91240B29-F687-4f45-9708-019B960494DF}">
-              <a14:hiddenLine xmlns:a14="http://schemas.microsoft.com/office/drawing/2010/main" xmlns="" w="9525">
+              <a14:hiddenLine xmlns="" xmlns:a14="http://schemas.microsoft.com/office/drawing/2010/main" w="9525">
                 <a:solidFill>
                   <a:srgbClr val="000000"/>
                 </a:solidFill>
@@ -2963,7 +2963,7 @@
           <a:p>
             <a:fld id="{FB7F6C47-B260-4BB6-8230-7D14D5CDE026}" type="datetimeFigureOut">
               <a:rPr lang="en-US" noProof="0" smtClean="0"/>
-              <a:t>6/22/2025</a:t>
+              <a:t>6/25/2025</a:t>
             </a:fld>
             <a:endParaRPr lang="en-US" noProof="0" dirty="0"/>
           </a:p>
@@ -3322,7 +3322,7 @@
           <a:p>
             <a:fld id="{FB7F6C47-B260-4BB6-8230-7D14D5CDE026}" type="datetimeFigureOut">
               <a:rPr lang="en-US" noProof="0" smtClean="0"/>
-              <a:t>6/22/2025</a:t>
+              <a:t>6/25/2025</a:t>
             </a:fld>
             <a:endParaRPr lang="en-US" noProof="0" dirty="0"/>
           </a:p>
@@ -3499,7 +3499,7 @@
           </a:effectLst>
           <a:extLst>
             <a:ext uri="{91240B29-F687-4f45-9708-019B960494DF}">
-              <a14:hiddenLine xmlns:a14="http://schemas.microsoft.com/office/drawing/2010/main" xmlns="" w="9525">
+              <a14:hiddenLine xmlns="" xmlns:a14="http://schemas.microsoft.com/office/drawing/2010/main" w="9525">
                 <a:solidFill>
                   <a:srgbClr val="000000"/>
                 </a:solidFill>
@@ -3827,7 +3827,7 @@
           <a:p>
             <a:fld id="{FB7F6C47-B260-4BB6-8230-7D14D5CDE026}" type="datetimeFigureOut">
               <a:rPr lang="en-US" noProof="0" smtClean="0"/>
-              <a:t>6/22/2025</a:t>
+              <a:t>6/25/2025</a:t>
             </a:fld>
             <a:endParaRPr lang="en-US" noProof="0" dirty="0"/>
           </a:p>
@@ -4004,7 +4004,7 @@
           </a:effectLst>
           <a:extLst>
             <a:ext uri="{91240B29-F687-4f45-9708-019B960494DF}">
-              <a14:hiddenLine xmlns:a14="http://schemas.microsoft.com/office/drawing/2010/main" xmlns="" w="9525">
+              <a14:hiddenLine xmlns="" xmlns:a14="http://schemas.microsoft.com/office/drawing/2010/main" w="9525">
                 <a:solidFill>
                   <a:srgbClr val="000000"/>
                 </a:solidFill>
@@ -4079,7 +4079,7 @@
           <a:p>
             <a:fld id="{FB7F6C47-B260-4BB6-8230-7D14D5CDE026}" type="datetimeFigureOut">
               <a:rPr lang="en-US" noProof="0" smtClean="0"/>
-              <a:t>6/22/2025</a:t>
+              <a:t>6/25/2025</a:t>
             </a:fld>
             <a:endParaRPr lang="en-US" noProof="0" dirty="0"/>
           </a:p>
@@ -4195,7 +4195,7 @@
           <a:p>
             <a:fld id="{FB7F6C47-B260-4BB6-8230-7D14D5CDE026}" type="datetimeFigureOut">
               <a:rPr lang="en-US" noProof="0" smtClean="0"/>
-              <a:t>6/22/2025</a:t>
+              <a:t>6/25/2025</a:t>
             </a:fld>
             <a:endParaRPr lang="en-US" noProof="0" dirty="0"/>
           </a:p>
@@ -4483,7 +4483,7 @@
           </a:effectLst>
           <a:extLst>
             <a:ext uri="{91240B29-F687-4f45-9708-019B960494DF}">
-              <a14:hiddenLine xmlns:a14="http://schemas.microsoft.com/office/drawing/2010/main" xmlns="" w="9525">
+              <a14:hiddenLine xmlns="" xmlns:a14="http://schemas.microsoft.com/office/drawing/2010/main" w="9525">
                 <a:solidFill>
                   <a:srgbClr val="000000"/>
                 </a:solidFill>
@@ -4688,7 +4688,7 @@
           <a:p>
             <a:fld id="{FB7F6C47-B260-4BB6-8230-7D14D5CDE026}" type="datetimeFigureOut">
               <a:rPr lang="en-US" noProof="0" smtClean="0"/>
-              <a:t>6/22/2025</a:t>
+              <a:t>6/25/2025</a:t>
             </a:fld>
             <a:endParaRPr lang="en-US" noProof="0" dirty="0"/>
           </a:p>
@@ -5203,7 +5203,7 @@
           <a:p>
             <a:fld id="{FB7F6C47-B260-4BB6-8230-7D14D5CDE026}" type="datetimeFigureOut">
               <a:rPr lang="en-US" noProof="0" smtClean="0"/>
-              <a:t>6/22/2025</a:t>
+              <a:t>6/25/2025</a:t>
             </a:fld>
             <a:endParaRPr lang="en-US" noProof="0" dirty="0"/>
           </a:p>
@@ -5599,7 +5599,7 @@
           <a:p>
             <a:fld id="{FB7F6C47-B260-4BB6-8230-7D14D5CDE026}" type="datetimeFigureOut">
               <a:rPr lang="en-US" noProof="0" smtClean="0"/>
-              <a:t>6/22/2025</a:t>
+              <a:t>6/25/2025</a:t>
             </a:fld>
             <a:endParaRPr lang="en-US" noProof="0" dirty="0"/>
           </a:p>
@@ -5778,7 +5778,7 @@
           </a:effectLst>
           <a:extLst>
             <a:ext uri="{91240B29-F687-4f45-9708-019B960494DF}">
-              <a14:hiddenLine xmlns:a14="http://schemas.microsoft.com/office/drawing/2010/main" xmlns="" w="9525">
+              <a14:hiddenLine xmlns="" xmlns:a14="http://schemas.microsoft.com/office/drawing/2010/main" w="9525">
                 <a:solidFill>
                   <a:srgbClr val="000000"/>
                 </a:solidFill>
@@ -5930,7 +5930,7 @@
           <a:p>
             <a:fld id="{FB7F6C47-B260-4BB6-8230-7D14D5CDE026}" type="datetimeFigureOut">
               <a:rPr lang="en-US" noProof="0" smtClean="0"/>
-              <a:t>6/22/2025</a:t>
+              <a:t>6/25/2025</a:t>
             </a:fld>
             <a:endParaRPr lang="en-US" noProof="0" dirty="0"/>
           </a:p>
@@ -6107,7 +6107,7 @@
           </a:effectLst>
           <a:extLst>
             <a:ext uri="{91240B29-F687-4f45-9708-019B960494DF}">
-              <a14:hiddenLine xmlns:a14="http://schemas.microsoft.com/office/drawing/2010/main" xmlns="" w="9525">
+              <a14:hiddenLine xmlns="" xmlns:a14="http://schemas.microsoft.com/office/drawing/2010/main" w="9525">
                 <a:solidFill>
                   <a:srgbClr val="000000"/>
                 </a:solidFill>
@@ -6328,7 +6328,7 @@
           <a:p>
             <a:fld id="{FB7F6C47-B260-4BB6-8230-7D14D5CDE026}" type="datetimeFigureOut">
               <a:rPr lang="en-US" noProof="0" smtClean="0"/>
-              <a:t>6/22/2025</a:t>
+              <a:t>6/25/2025</a:t>
             </a:fld>
             <a:endParaRPr lang="en-US" noProof="0" dirty="0"/>
           </a:p>
@@ -6580,7 +6580,7 @@
           <a:p>
             <a:fld id="{FB7F6C47-B260-4BB6-8230-7D14D5CDE026}" type="datetimeFigureOut">
               <a:rPr lang="en-US" noProof="0" smtClean="0"/>
-              <a:t>6/22/2025</a:t>
+              <a:t>6/25/2025</a:t>
             </a:fld>
             <a:endParaRPr lang="en-US" noProof="0" dirty="0"/>
           </a:p>
@@ -6757,7 +6757,7 @@
           </a:effectLst>
           <a:extLst>
             <a:ext uri="{91240B29-F687-4f45-9708-019B960494DF}">
-              <a14:hiddenLine xmlns:a14="http://schemas.microsoft.com/office/drawing/2010/main" xmlns="" w="9525">
+              <a14:hiddenLine xmlns="" xmlns:a14="http://schemas.microsoft.com/office/drawing/2010/main" w="9525">
                 <a:solidFill>
                   <a:srgbClr val="000000"/>
                 </a:solidFill>
@@ -7000,7 +7000,7 @@
           <a:p>
             <a:fld id="{FB7F6C47-B260-4BB6-8230-7D14D5CDE026}" type="datetimeFigureOut">
               <a:rPr lang="en-US" noProof="0" smtClean="0"/>
-              <a:t>6/22/2025</a:t>
+              <a:t>6/25/2025</a:t>
             </a:fld>
             <a:endParaRPr lang="en-US" noProof="0" dirty="0"/>
           </a:p>
@@ -7177,7 +7177,7 @@
           </a:effectLst>
           <a:extLst>
             <a:ext uri="{91240B29-F687-4f45-9708-019B960494DF}">
-              <a14:hiddenLine xmlns:a14="http://schemas.microsoft.com/office/drawing/2010/main" xmlns="" w="9525">
+              <a14:hiddenLine xmlns="" xmlns:a14="http://schemas.microsoft.com/office/drawing/2010/main" w="9525">
                 <a:solidFill>
                   <a:srgbClr val="000000"/>
                 </a:solidFill>
@@ -7414,7 +7414,7 @@
           <a:p>
             <a:fld id="{FB7F6C47-B260-4BB6-8230-7D14D5CDE026}" type="datetimeFigureOut">
               <a:rPr lang="en-US" noProof="0" smtClean="0"/>
-              <a:t>6/22/2025</a:t>
+              <a:t>6/25/2025</a:t>
             </a:fld>
             <a:endParaRPr lang="en-US" noProof="0" dirty="0"/>
           </a:p>
@@ -7837,7 +7837,7 @@
           <a:p>
             <a:fld id="{FB7F6C47-B260-4BB6-8230-7D14D5CDE026}" type="datetimeFigureOut">
               <a:rPr lang="en-US" noProof="0" smtClean="0"/>
-              <a:t>6/22/2025</a:t>
+              <a:t>6/25/2025</a:t>
             </a:fld>
             <a:endParaRPr lang="en-US" noProof="0" dirty="0"/>
           </a:p>
@@ -8014,7 +8014,7 @@
           </a:effectLst>
           <a:extLst>
             <a:ext uri="{91240B29-F687-4f45-9708-019B960494DF}">
-              <a14:hiddenLine xmlns:a14="http://schemas.microsoft.com/office/drawing/2010/main" xmlns="" w="9525">
+              <a14:hiddenLine xmlns="" xmlns:a14="http://schemas.microsoft.com/office/drawing/2010/main" w="9525">
                 <a:solidFill>
                   <a:srgbClr val="000000"/>
                 </a:solidFill>
@@ -8164,7 +8164,7 @@
           <a:p>
             <a:fld id="{FB7F6C47-B260-4BB6-8230-7D14D5CDE026}" type="datetimeFigureOut">
               <a:rPr lang="en-US" noProof="0" smtClean="0"/>
-              <a:t>6/22/2025</a:t>
+              <a:t>6/25/2025</a:t>
             </a:fld>
             <a:endParaRPr lang="en-US" noProof="0" dirty="0"/>
           </a:p>
@@ -8728,7 +8728,7 @@
           <a:p>
             <a:fld id="{FB7F6C47-B260-4BB6-8230-7D14D5CDE026}" type="datetimeFigureOut">
               <a:rPr lang="en-US" noProof="0" smtClean="0"/>
-              <a:t>6/22/2025</a:t>
+              <a:t>6/25/2025</a:t>
             </a:fld>
             <a:endParaRPr lang="en-US" noProof="0" dirty="0"/>
           </a:p>
@@ -8905,7 +8905,7 @@
           </a:effectLst>
           <a:extLst>
             <a:ext uri="{91240B29-F687-4f45-9708-019B960494DF}">
-              <a14:hiddenLine xmlns:a14="http://schemas.microsoft.com/office/drawing/2010/main" xmlns="" w="9525">
+              <a14:hiddenLine xmlns="" xmlns:a14="http://schemas.microsoft.com/office/drawing/2010/main" w="9525">
                 <a:solidFill>
                   <a:srgbClr val="000000"/>
                 </a:solidFill>
@@ -9043,7 +9043,7 @@
           <a:p>
             <a:fld id="{FB7F6C47-B260-4BB6-8230-7D14D5CDE026}" type="datetimeFigureOut">
               <a:rPr lang="en-US" noProof="0" smtClean="0"/>
-              <a:t>6/22/2025</a:t>
+              <a:t>6/25/2025</a:t>
             </a:fld>
             <a:endParaRPr lang="en-US" noProof="0" dirty="0"/>
           </a:p>
@@ -9307,7 +9307,7 @@
           <a:p>
             <a:fld id="{FB7F6C47-B260-4BB6-8230-7D14D5CDE026}" type="datetimeFigureOut">
               <a:rPr lang="en-US" noProof="0" smtClean="0"/>
-              <a:t>6/22/2025</a:t>
+              <a:t>6/25/2025</a:t>
             </a:fld>
             <a:endParaRPr lang="en-US" noProof="0" dirty="0"/>
           </a:p>
@@ -13386,7 +13386,7 @@
           <p:nvPr>
             <p:extLst>
               <p:ext uri="{D42A27DB-BD31-4B8C-83A1-F6EECF244321}">
-                <p14:modId xmlns:p14="http://schemas.microsoft.com/office/powerpoint/2010/main" val="1126788479"/>
+                <p14:modId xmlns:p14="http://schemas.microsoft.com/office/powerpoint/2010/main" val="2830339552"/>
               </p:ext>
             </p:extLst>
           </p:nvPr>
@@ -13797,7 +13797,7 @@
                     <a:p>
                       <a:pPr algn="ctr"/>
                       <a:r>
-                        <a:rPr lang="en-IN" b="1" dirty="0">
+                        <a:rPr lang="en-IN" b="0" dirty="0">
                           <a:solidFill>
                             <a:srgbClr val="334155"/>
                           </a:solidFill>
@@ -13850,7 +13850,7 @@
                       <a:prstDash val="solid"/>
                     </a:lnBlToTr>
                     <a:solidFill>
-                      <a:srgbClr val="92D050"/>
+                      <a:schemeClr val="bg1"/>
                     </a:solidFill>
                   </a:tcPr>
                 </a:tc>
@@ -13932,7 +13932,7 @@
                           <a:effectLst/>
                           <a:latin typeface="Barlow Medium" panose="00000600000000000000" pitchFamily="2" charset="0"/>
                         </a:rPr>
-                        <a:t>0.1715</a:t>
+                        <a:t>0.1706</a:t>
                       </a:r>
                     </a:p>
                   </a:txBody>
@@ -13996,7 +13996,7 @@
                           <a:effectLst/>
                           <a:latin typeface="Barlow Medium" panose="00000600000000000000" pitchFamily="2" charset="0"/>
                         </a:rPr>
-                        <a:t>0.8093</a:t>
+                        <a:t>0.8023</a:t>
                       </a:r>
                     </a:p>
                   </a:txBody>
@@ -14184,7 +14184,7 @@
                           <a:effectLst/>
                           <a:latin typeface="Barlow Medium" panose="00000600000000000000" pitchFamily="2" charset="0"/>
                         </a:rPr>
-                        <a:t>0.7031</a:t>
+                        <a:t>0.6808</a:t>
                       </a:r>
                     </a:p>
                   </a:txBody>
@@ -14240,6 +14240,16 @@
                     <a:lstStyle/>
                     <a:p>
                       <a:pPr algn="ctr"/>
+                      <a:r>
+                        <a:rPr lang="en-IN" dirty="0">
+                          <a:solidFill>
+                            <a:srgbClr val="334155"/>
+                          </a:solidFill>
+                          <a:effectLst/>
+                          <a:latin typeface="Barlow Medium" panose="00000600000000000000" pitchFamily="2" charset="0"/>
+                        </a:rPr>
+                        <a:t>🏆</a:t>
+                      </a:r>
                       <a:r>
                         <a:rPr lang="en-IN" b="1" dirty="0">
                           <a:solidFill>
@@ -14312,7 +14322,7 @@
                           <a:effectLst/>
                           <a:latin typeface="Barlow Medium" panose="00000600000000000000" pitchFamily="2" charset="0"/>
                         </a:rPr>
-                        <a:t>0.1724</a:t>
+                        <a:t>0.1701</a:t>
                       </a:r>
                     </a:p>
                   </a:txBody>
@@ -14369,14 +14379,14 @@
                     <a:p>
                       <a:pPr algn="ctr"/>
                       <a:r>
-                        <a:rPr lang="en-IN">
+                        <a:rPr lang="en-IN" dirty="0">
                           <a:solidFill>
                             <a:srgbClr val="334155"/>
                           </a:solidFill>
                           <a:effectLst/>
                           <a:latin typeface="Barlow Medium" panose="00000600000000000000" pitchFamily="2" charset="0"/>
                         </a:rPr>
-                        <a:t>0.8116</a:t>
+                        <a:t>0.8023</a:t>
                       </a:r>
                     </a:p>
                   </a:txBody>
@@ -14567,7 +14577,7 @@
                     <a:p>
                       <a:pPr algn="ctr"/>
                       <a:r>
-                        <a:rPr lang="en-IN" b="1" dirty="0">
+                        <a:rPr lang="en-IN" b="0" dirty="0">
                           <a:solidFill>
                             <a:srgbClr val="334155"/>
                           </a:solidFill>
@@ -14620,7 +14630,7 @@
                       <a:prstDash val="solid"/>
                     </a:lnBlToTr>
                     <a:solidFill>
-                      <a:srgbClr val="92D050"/>
+                      <a:schemeClr val="bg1"/>
                     </a:solidFill>
                   </a:tcPr>
                 </a:tc>
@@ -14694,6 +14704,16 @@
                     <a:lstStyle/>
                     <a:p>
                       <a:pPr algn="ctr"/>
+                      <a:r>
+                        <a:rPr lang="en-IN" dirty="0">
+                          <a:solidFill>
+                            <a:srgbClr val="334155"/>
+                          </a:solidFill>
+                          <a:effectLst/>
+                          <a:latin typeface="Barlow Medium" panose="00000600000000000000" pitchFamily="2" charset="0"/>
+                        </a:rPr>
+                        <a:t>🏆</a:t>
+                      </a:r>
                       <a:r>
                         <a:rPr lang="en-IN" b="1" dirty="0">
                           <a:solidFill>
@@ -15861,7 +15881,7 @@
                     <a:p>
                       <a:pPr algn="ctr"/>
                       <a:r>
-                        <a:rPr lang="en-IN" dirty="0">
+                        <a:rPr lang="en-IN" b="1" dirty="0">
                           <a:solidFill>
                             <a:srgbClr val="334155"/>
                           </a:solidFill>
@@ -15909,7 +15929,7 @@
                       <a:prstDash val="solid"/>
                     </a:lnBlToTr>
                     <a:solidFill>
-                      <a:srgbClr val="92D050"/>
+                      <a:schemeClr val="bg1"/>
                     </a:solidFill>
                   </a:tcPr>
                 </a:tc>
@@ -18883,7 +18903,7 @@
           <p:nvPr>
             <p:extLst>
               <p:ext uri="{D42A27DB-BD31-4B8C-83A1-F6EECF244321}">
-                <p14:modId xmlns:p14="http://schemas.microsoft.com/office/powerpoint/2010/main" val="3211580055"/>
+                <p14:modId xmlns:p14="http://schemas.microsoft.com/office/powerpoint/2010/main" val="3035780364"/>
               </p:ext>
             </p:extLst>
           </p:nvPr>
@@ -19115,18 +19135,15 @@
                           <a:effectLst/>
                           <a:latin typeface="Barlow" panose="00000500000000000000" pitchFamily="2" charset="0"/>
                         </a:rPr>
-                        <a:t>A</a:t>
+                        <a:t>Lion</a:t>
                       </a:r>
-                      <a:r>
-                        <a:rPr lang="en-IN" sz="2000" dirty="0">
-                          <a:solidFill>
-                            <a:srgbClr val="334155"/>
-                          </a:solidFill>
-                          <a:effectLst/>
-                          <a:latin typeface="Barlow" panose="00000500000000000000" pitchFamily="2" charset="0"/>
-                        </a:rPr>
-                        <a:t>damW</a:t>
-                      </a:r>
+                      <a:endParaRPr lang="en-IN" sz="2000" dirty="0">
+                        <a:solidFill>
+                          <a:srgbClr val="334155"/>
+                        </a:solidFill>
+                        <a:effectLst/>
+                        <a:latin typeface="Barlow" panose="00000500000000000000" pitchFamily="2" charset="0"/>
+                      </a:endParaRPr>
                     </a:p>
                   </a:txBody>
                   <a:tcPr anchor="ctr">
@@ -19471,7 +19488,7 @@
                           <a:effectLst/>
                           <a:latin typeface="Barlow" panose="00000500000000000000" pitchFamily="2" charset="0"/>
                         </a:rPr>
-                        <a:t>Lion</a:t>
+                        <a:t>AdamW</a:t>
                       </a:r>
                     </a:p>
                   </a:txBody>
@@ -22034,23 +22051,7 @@
                   </a:extLst>
                 </a:hlinkClick>
               </a:rPr>
-              <a:t>,</a:t>
-            </a:r>
-            <a:r>
-              <a:rPr lang="en-IN" sz="2000" dirty="0">
-                <a:solidFill>
-                  <a:srgbClr val="FF0000"/>
-                </a:solidFill>
-                <a:latin typeface="Barlow" panose="00000500000000000000" pitchFamily="2" charset="0"/>
-                <a:hlinkClick r:id="rId3" action="ppaction://hlinksldjump">
-                  <a:extLst>
-                    <a:ext uri="{A12FA001-AC4F-418D-AE19-62706E023703}">
-                      <ahyp:hlinkClr xmlns:ahyp="http://schemas.microsoft.com/office/drawing/2018/hyperlinkcolor" val="tx"/>
-                    </a:ext>
-                  </a:extLst>
-                </a:hlinkClick>
-              </a:rPr>
-              <a:t> </a:t>
+              <a:t>, </a:t>
             </a:r>
             <a:r>
               <a:rPr lang="en-IN" sz="2000" dirty="0">
@@ -22434,9 +22435,25 @@
             </a:r>
             <a:r>
               <a:rPr lang="en-IN" sz="2000" b="1" baseline="30000" dirty="0">
+                <a:solidFill>
+                  <a:srgbClr val="FF0000"/>
+                </a:solidFill>
                 <a:latin typeface="Barlow" panose="00000500000000000000" pitchFamily="2" charset="0"/>
-              </a:rPr>
-              <a:t>[1]  </a:t>
+                <a:hlinkClick r:id="rId2" action="ppaction://hlinksldjump">
+                  <a:extLst>
+                    <a:ext uri="{A12FA001-AC4F-418D-AE19-62706E023703}">
+                      <ahyp:hlinkClr xmlns:ahyp="http://schemas.microsoft.com/office/drawing/2018/hyperlinkcolor" val="tx"/>
+                    </a:ext>
+                  </a:extLst>
+                </a:hlinkClick>
+              </a:rPr>
+              <a:t>[1]</a:t>
+            </a:r>
+            <a:r>
+              <a:rPr lang="en-IN" sz="2000" b="1" baseline="30000" dirty="0">
+                <a:latin typeface="Barlow" panose="00000500000000000000" pitchFamily="2" charset="0"/>
+              </a:rPr>
+              <a:t>  </a:t>
             </a:r>
             <a:r>
               <a:rPr lang="en-IN" sz="2000" dirty="0">
@@ -23442,6 +23459,15 @@
 </file>
 
 <file path=customXml/item1.xml><?xml version="1.0" encoding="utf-8"?>
+<?mso-contentType ?>
+<FormTemplates xmlns="http://schemas.microsoft.com/sharepoint/v3/contenttype/forms">
+  <Display>DocumentLibraryForm</Display>
+  <Edit>DocumentLibraryForm</Edit>
+  <New>DocumentLibraryForm</New>
+</FormTemplates>
+</file>
+
+<file path=customXml/item2.xml><?xml version="1.0" encoding="utf-8"?>
 <p:properties xmlns:p="http://schemas.microsoft.com/office/2006/metadata/properties" xmlns:xsi="http://www.w3.org/2001/XMLSchema-instance" xmlns:pc="http://schemas.microsoft.com/office/infopath/2007/PartnerControls">
   <documentManagement>
     <_ip_UnifiedCompliancePolicyUIAction xmlns="http://schemas.microsoft.com/sharepoint/v3" xsi:nil="true"/>
@@ -23459,15 +23485,6 @@
     <MediaServiceKeyPoints xmlns="71af3243-3dd4-4a8d-8c0d-dd76da1f02a5" xsi:nil="true"/>
   </documentManagement>
 </p:properties>
-</file>
-
-<file path=customXml/item2.xml><?xml version="1.0" encoding="utf-8"?>
-<?mso-contentType ?>
-<FormTemplates xmlns="http://schemas.microsoft.com/sharepoint/v3/contenttype/forms">
-  <Display>DocumentLibraryForm</Display>
-  <Edit>DocumentLibraryForm</Edit>
-  <New>DocumentLibraryForm</New>
-</FormTemplates>
 </file>
 
 <file path=customXml/item3.xml><?xml version="1.0" encoding="utf-8"?>
@@ -23759,28 +23776,28 @@
 </file>
 
 <file path=customXml/itemProps1.xml><?xml version="1.0" encoding="utf-8"?>
-<ds:datastoreItem xmlns:ds="http://schemas.openxmlformats.org/officeDocument/2006/customXml" ds:itemID="{BC8413E5-0484-489B-B293-D8720B6027F2}">
+<ds:datastoreItem xmlns:ds="http://schemas.openxmlformats.org/officeDocument/2006/customXml" ds:itemID="{019B3EA6-E2E1-4B68-B700-9432F9FC79DA}">
   <ds:schemaRefs>
-    <ds:schemaRef ds:uri="http://purl.org/dc/elements/1.1/"/>
-    <ds:schemaRef ds:uri="http://schemas.microsoft.com/office/2006/metadata/properties"/>
-    <ds:schemaRef ds:uri="http://schemas.microsoft.com/sharepoint/v3"/>
-    <ds:schemaRef ds:uri="http://schemas.microsoft.com/office/2006/documentManagement/types"/>
-    <ds:schemaRef ds:uri="230e9df3-be65-4c73-a93b-d1236ebd677e"/>
-    <ds:schemaRef ds:uri="http://schemas.microsoft.com/office/infopath/2007/PartnerControls"/>
-    <ds:schemaRef ds:uri="http://www.w3.org/XML/1998/namespace"/>
-    <ds:schemaRef ds:uri="http://schemas.openxmlformats.org/package/2006/metadata/core-properties"/>
-    <ds:schemaRef ds:uri="http://purl.org/dc/terms/"/>
-    <ds:schemaRef ds:uri="16c05727-aa75-4e4a-9b5f-8a80a1165891"/>
-    <ds:schemaRef ds:uri="71af3243-3dd4-4a8d-8c0d-dd76da1f02a5"/>
-    <ds:schemaRef ds:uri="http://purl.org/dc/dcmitype/"/>
+    <ds:schemaRef ds:uri="http://schemas.microsoft.com/sharepoint/v3/contenttype/forms"/>
   </ds:schemaRefs>
 </ds:datastoreItem>
 </file>
 
 <file path=customXml/itemProps2.xml><?xml version="1.0" encoding="utf-8"?>
-<ds:datastoreItem xmlns:ds="http://schemas.openxmlformats.org/officeDocument/2006/customXml" ds:itemID="{019B3EA6-E2E1-4B68-B700-9432F9FC79DA}">
+<ds:datastoreItem xmlns:ds="http://schemas.openxmlformats.org/officeDocument/2006/customXml" ds:itemID="{BC8413E5-0484-489B-B293-D8720B6027F2}">
   <ds:schemaRefs>
-    <ds:schemaRef ds:uri="http://schemas.microsoft.com/sharepoint/v3/contenttype/forms"/>
+    <ds:schemaRef ds:uri="http://schemas.openxmlformats.org/package/2006/metadata/core-properties"/>
+    <ds:schemaRef ds:uri="http://schemas.microsoft.com/office/2006/metadata/properties"/>
+    <ds:schemaRef ds:uri="http://purl.org/dc/dcmitype/"/>
+    <ds:schemaRef ds:uri="http://purl.org/dc/elements/1.1/"/>
+    <ds:schemaRef ds:uri="http://schemas.microsoft.com/office/2006/documentManagement/types"/>
+    <ds:schemaRef ds:uri="230e9df3-be65-4c73-a93b-d1236ebd677e"/>
+    <ds:schemaRef ds:uri="71af3243-3dd4-4a8d-8c0d-dd76da1f02a5"/>
+    <ds:schemaRef ds:uri="http://schemas.microsoft.com/sharepoint/v3"/>
+    <ds:schemaRef ds:uri="http://schemas.microsoft.com/office/infopath/2007/PartnerControls"/>
+    <ds:schemaRef ds:uri="16c05727-aa75-4e4a-9b5f-8a80a1165891"/>
+    <ds:schemaRef ds:uri="http://www.w3.org/XML/1998/namespace"/>
+    <ds:schemaRef ds:uri="http://purl.org/dc/terms/"/>
   </ds:schemaRefs>
 </ds:datastoreItem>
 </file>

--- a/cross_encoder/thesis/Thesis_presentation.pptx
+++ b/cross_encoder/thesis/Thesis_presentation.pptx
@@ -2771,7 +2771,7 @@
           </a:effectLst>
           <a:extLst>
             <a:ext uri="{91240B29-F687-4f45-9708-019B960494DF}">
-              <a14:hiddenLine xmlns="" xmlns:a14="http://schemas.microsoft.com/office/drawing/2010/main" w="9525">
+              <a14:hiddenLine xmlns:a14="http://schemas.microsoft.com/office/drawing/2010/main" xmlns="" w="9525">
                 <a:solidFill>
                   <a:srgbClr val="000000"/>
                 </a:solidFill>
@@ -3499,7 +3499,7 @@
           </a:effectLst>
           <a:extLst>
             <a:ext uri="{91240B29-F687-4f45-9708-019B960494DF}">
-              <a14:hiddenLine xmlns="" xmlns:a14="http://schemas.microsoft.com/office/drawing/2010/main" w="9525">
+              <a14:hiddenLine xmlns:a14="http://schemas.microsoft.com/office/drawing/2010/main" xmlns="" w="9525">
                 <a:solidFill>
                   <a:srgbClr val="000000"/>
                 </a:solidFill>
@@ -4004,7 +4004,7 @@
           </a:effectLst>
           <a:extLst>
             <a:ext uri="{91240B29-F687-4f45-9708-019B960494DF}">
-              <a14:hiddenLine xmlns="" xmlns:a14="http://schemas.microsoft.com/office/drawing/2010/main" w="9525">
+              <a14:hiddenLine xmlns:a14="http://schemas.microsoft.com/office/drawing/2010/main" xmlns="" w="9525">
                 <a:solidFill>
                   <a:srgbClr val="000000"/>
                 </a:solidFill>
@@ -4483,7 +4483,7 @@
           </a:effectLst>
           <a:extLst>
             <a:ext uri="{91240B29-F687-4f45-9708-019B960494DF}">
-              <a14:hiddenLine xmlns="" xmlns:a14="http://schemas.microsoft.com/office/drawing/2010/main" w="9525">
+              <a14:hiddenLine xmlns:a14="http://schemas.microsoft.com/office/drawing/2010/main" xmlns="" w="9525">
                 <a:solidFill>
                   <a:srgbClr val="000000"/>
                 </a:solidFill>
@@ -5778,7 +5778,7 @@
           </a:effectLst>
           <a:extLst>
             <a:ext uri="{91240B29-F687-4f45-9708-019B960494DF}">
-              <a14:hiddenLine xmlns="" xmlns:a14="http://schemas.microsoft.com/office/drawing/2010/main" w="9525">
+              <a14:hiddenLine xmlns:a14="http://schemas.microsoft.com/office/drawing/2010/main" xmlns="" w="9525">
                 <a:solidFill>
                   <a:srgbClr val="000000"/>
                 </a:solidFill>
@@ -6107,7 +6107,7 @@
           </a:effectLst>
           <a:extLst>
             <a:ext uri="{91240B29-F687-4f45-9708-019B960494DF}">
-              <a14:hiddenLine xmlns="" xmlns:a14="http://schemas.microsoft.com/office/drawing/2010/main" w="9525">
+              <a14:hiddenLine xmlns:a14="http://schemas.microsoft.com/office/drawing/2010/main" xmlns="" w="9525">
                 <a:solidFill>
                   <a:srgbClr val="000000"/>
                 </a:solidFill>
@@ -6757,7 +6757,7 @@
           </a:effectLst>
           <a:extLst>
             <a:ext uri="{91240B29-F687-4f45-9708-019B960494DF}">
-              <a14:hiddenLine xmlns="" xmlns:a14="http://schemas.microsoft.com/office/drawing/2010/main" w="9525">
+              <a14:hiddenLine xmlns:a14="http://schemas.microsoft.com/office/drawing/2010/main" xmlns="" w="9525">
                 <a:solidFill>
                   <a:srgbClr val="000000"/>
                 </a:solidFill>
@@ -7177,7 +7177,7 @@
           </a:effectLst>
           <a:extLst>
             <a:ext uri="{91240B29-F687-4f45-9708-019B960494DF}">
-              <a14:hiddenLine xmlns="" xmlns:a14="http://schemas.microsoft.com/office/drawing/2010/main" w="9525">
+              <a14:hiddenLine xmlns:a14="http://schemas.microsoft.com/office/drawing/2010/main" xmlns="" w="9525">
                 <a:solidFill>
                   <a:srgbClr val="000000"/>
                 </a:solidFill>
@@ -8014,7 +8014,7 @@
           </a:effectLst>
           <a:extLst>
             <a:ext uri="{91240B29-F687-4f45-9708-019B960494DF}">
-              <a14:hiddenLine xmlns="" xmlns:a14="http://schemas.microsoft.com/office/drawing/2010/main" w="9525">
+              <a14:hiddenLine xmlns:a14="http://schemas.microsoft.com/office/drawing/2010/main" xmlns="" w="9525">
                 <a:solidFill>
                   <a:srgbClr val="000000"/>
                 </a:solidFill>
@@ -8905,7 +8905,7 @@
           </a:effectLst>
           <a:extLst>
             <a:ext uri="{91240B29-F687-4f45-9708-019B960494DF}">
-              <a14:hiddenLine xmlns="" xmlns:a14="http://schemas.microsoft.com/office/drawing/2010/main" w="9525">
+              <a14:hiddenLine xmlns:a14="http://schemas.microsoft.com/office/drawing/2010/main" xmlns="" w="9525">
                 <a:solidFill>
                   <a:srgbClr val="000000"/>
                 </a:solidFill>
@@ -10320,7 +10320,7 @@
         </p:nvSpPr>
         <p:spPr>
           <a:xfrm>
-            <a:off x="582006" y="479592"/>
+            <a:off x="558560" y="292023"/>
             <a:ext cx="5399343" cy="720033"/>
           </a:xfrm>
           <a:solidFill>
@@ -10371,18 +10371,18 @@
         </p:nvSpPr>
         <p:spPr>
           <a:xfrm>
-            <a:off x="741512" y="1635853"/>
-            <a:ext cx="10953183" cy="5044557"/>
+            <a:off x="739922" y="1201615"/>
+            <a:ext cx="10953183" cy="5656385"/>
           </a:xfrm>
         </p:spPr>
         <p:txBody>
           <a:bodyPr>
-            <a:normAutofit fontScale="77500" lnSpcReduction="20000"/>
+            <a:normAutofit lnSpcReduction="10000"/>
           </a:bodyPr>
           <a:lstStyle/>
           <a:p>
             <a:r>
-              <a:rPr lang="en-IN" sz="3100" b="1" dirty="0">
+              <a:rPr lang="en-IN" b="1" dirty="0">
                 <a:solidFill>
                   <a:schemeClr val="tx2"/>
                 </a:solidFill>
@@ -10394,25 +10394,25 @@
           <a:p>
             <a:pPr lvl="1"/>
             <a:r>
-              <a:rPr lang="en-IN" sz="2400" b="1" dirty="0">
+              <a:rPr lang="en-IN" sz="1800" b="1" dirty="0">
                 <a:latin typeface="Barlow Medium" panose="00000600000000000000" pitchFamily="2" charset="0"/>
               </a:rPr>
               <a:t>T</a:t>
             </a:r>
             <a:r>
-              <a:rPr lang="en-IN" sz="2400" b="1" dirty="0">
+              <a:rPr lang="en-IN" sz="1800" b="1" dirty="0">
                 <a:latin typeface="Barlow" panose="00000500000000000000" pitchFamily="2" charset="0"/>
               </a:rPr>
               <a:t>raining:</a:t>
             </a:r>
             <a:r>
-              <a:rPr lang="en-IN" sz="2400" dirty="0">
+              <a:rPr lang="en-IN" sz="1800" dirty="0">
                 <a:latin typeface="Barlow" panose="00000500000000000000" pitchFamily="2" charset="0"/>
               </a:rPr>
               <a:t> MS MARCO</a:t>
             </a:r>
             <a:r>
-              <a:rPr lang="en-IN" sz="2400" b="1" baseline="30000" dirty="0">
+              <a:rPr lang="en-IN" sz="1800" b="1" baseline="30000" dirty="0">
                 <a:solidFill>
                   <a:srgbClr val="FF0000"/>
                 </a:solidFill>
@@ -10428,7 +10428,7 @@
               <a:t>[9]</a:t>
             </a:r>
             <a:r>
-              <a:rPr lang="en-IN" sz="2400" dirty="0">
+              <a:rPr lang="en-IN" sz="1800" dirty="0">
                 <a:solidFill>
                   <a:srgbClr val="FFC000"/>
                 </a:solidFill>
@@ -10444,7 +10444,7 @@
               <a:t> </a:t>
             </a:r>
             <a:r>
-              <a:rPr lang="en-IN" sz="2400" dirty="0">
+              <a:rPr lang="en-IN" sz="1800" dirty="0">
                 <a:latin typeface="Barlow" panose="00000500000000000000" pitchFamily="2" charset="0"/>
               </a:rPr>
               <a:t>Passage Ranking (~2M triplets)</a:t>
@@ -10453,19 +10453,19 @@
           <a:p>
             <a:pPr lvl="1"/>
             <a:r>
-              <a:rPr lang="en-IN" sz="2400" b="1" dirty="0">
+              <a:rPr lang="en-IN" sz="1800" b="1" dirty="0">
                 <a:latin typeface="Barlow" panose="00000500000000000000" pitchFamily="2" charset="0"/>
               </a:rPr>
               <a:t>Evaluation:</a:t>
             </a:r>
             <a:r>
-              <a:rPr lang="en-IN" sz="2400" dirty="0">
+              <a:rPr lang="en-IN" sz="1800" dirty="0">
                 <a:latin typeface="Barlow" panose="00000500000000000000" pitchFamily="2" charset="0"/>
               </a:rPr>
               <a:t> TREC DL</a:t>
             </a:r>
             <a:r>
-              <a:rPr lang="en-IN" sz="2400" b="1" baseline="30000" dirty="0">
+              <a:rPr lang="en-IN" sz="1800" b="1" baseline="30000" dirty="0">
                 <a:solidFill>
                   <a:srgbClr val="FF0000"/>
                 </a:solidFill>
@@ -10481,7 +10481,7 @@
               <a:t>[8]</a:t>
             </a:r>
             <a:r>
-              <a:rPr lang="en-IN" sz="2400" dirty="0">
+              <a:rPr lang="en-IN" sz="1800" dirty="0">
                 <a:solidFill>
                   <a:srgbClr val="FFC000"/>
                 </a:solidFill>
@@ -10497,7 +10497,7 @@
               <a:t> </a:t>
             </a:r>
             <a:r>
-              <a:rPr lang="en-IN" sz="2400" dirty="0">
+              <a:rPr lang="en-IN" sz="1800" dirty="0">
                 <a:latin typeface="Barlow" panose="00000500000000000000" pitchFamily="2" charset="0"/>
               </a:rPr>
               <a:t>2019 (43 queries with comprehensive relevance judgments)</a:t>
@@ -10506,19 +10506,19 @@
           <a:p>
             <a:pPr lvl="1"/>
             <a:r>
-              <a:rPr lang="en-IN" sz="2400" b="1" dirty="0">
+              <a:rPr lang="en-IN" sz="1800" b="1" dirty="0">
                 <a:latin typeface="Barlow" panose="00000500000000000000" pitchFamily="2" charset="0"/>
               </a:rPr>
               <a:t>Metrics:</a:t>
             </a:r>
             <a:r>
-              <a:rPr lang="en-IN" sz="2400" dirty="0">
+              <a:rPr lang="en-IN" sz="1800" dirty="0">
                 <a:latin typeface="Barlow" panose="00000500000000000000" pitchFamily="2" charset="0"/>
               </a:rPr>
               <a:t> NDCG@10</a:t>
             </a:r>
             <a:r>
-              <a:rPr lang="en-IN" sz="2400" baseline="30000" dirty="0">
+              <a:rPr lang="en-IN" sz="1800" b="1" baseline="30000" dirty="0">
                 <a:solidFill>
                   <a:srgbClr val="FF0000"/>
                 </a:solidFill>
@@ -10534,7 +10534,7 @@
               <a:t>[16] </a:t>
             </a:r>
             <a:r>
-              <a:rPr lang="en-IN" sz="2400" dirty="0">
+              <a:rPr lang="en-IN" sz="1800" dirty="0">
                 <a:latin typeface="Barlow" panose="00000500000000000000" pitchFamily="2" charset="0"/>
               </a:rPr>
               <a:t>, MRR@10, Recall@10, P@10</a:t>
@@ -10542,7 +10542,7 @@
           </a:p>
           <a:p>
             <a:r>
-              <a:rPr lang="en-IN" sz="3100" b="1" dirty="0">
+              <a:rPr lang="en-IN" b="1" dirty="0">
                 <a:solidFill>
                   <a:schemeClr val="tx2"/>
                 </a:solidFill>
@@ -10554,19 +10554,19 @@
           <a:p>
             <a:pPr lvl="1"/>
             <a:r>
-              <a:rPr lang="en-IN" sz="2400" b="1" dirty="0">
+              <a:rPr lang="en-IN" sz="1800" b="1" dirty="0">
                 <a:latin typeface="Barlow" panose="00000500000000000000" pitchFamily="2" charset="0"/>
               </a:rPr>
               <a:t>Platform:</a:t>
             </a:r>
             <a:r>
-              <a:rPr lang="en-IN" sz="2400" dirty="0">
+              <a:rPr lang="en-IN" sz="1800" dirty="0">
                 <a:latin typeface="Barlow" panose="00000500000000000000" pitchFamily="2" charset="0"/>
               </a:rPr>
               <a:t> Modal cloud computing</a:t>
             </a:r>
             <a:r>
-              <a:rPr lang="en-IN" sz="2400" b="1" baseline="30000" dirty="0">
+              <a:rPr lang="en-IN" sz="1800" b="1" baseline="30000" dirty="0">
                 <a:solidFill>
                   <a:srgbClr val="FF0000"/>
                 </a:solidFill>
@@ -10581,7 +10581,7 @@
               </a:rPr>
               <a:t>[10]</a:t>
             </a:r>
-            <a:endParaRPr lang="en-IN" sz="2400" b="1" baseline="30000" dirty="0">
+            <a:endParaRPr lang="en-IN" sz="1800" b="1" baseline="30000" dirty="0">
               <a:solidFill>
                 <a:srgbClr val="FF0000"/>
               </a:solidFill>
@@ -10591,34 +10591,34 @@
           <a:p>
             <a:pPr lvl="1"/>
             <a:r>
-              <a:rPr lang="en-IN" sz="2400" b="1" dirty="0">
+              <a:rPr lang="en-IN" sz="1800" b="1" dirty="0">
                 <a:latin typeface="Barlow" panose="00000500000000000000" pitchFamily="2" charset="0"/>
               </a:rPr>
               <a:t>Hardware:</a:t>
             </a:r>
             <a:r>
-              <a:rPr lang="en-IN" sz="2400" dirty="0">
+              <a:rPr lang="en-IN" sz="1800" dirty="0">
                 <a:latin typeface="Barlow" panose="00000500000000000000" pitchFamily="2" charset="0"/>
               </a:rPr>
-              <a:t> 3 × NVIDIA L40S GPUs</a:t>
+              <a:t> 3 × NVIDIA-L40S GPUs</a:t>
             </a:r>
           </a:p>
           <a:p>
             <a:pPr lvl="1"/>
             <a:r>
-              <a:rPr lang="en-IN" sz="2400" b="1" dirty="0">
+              <a:rPr lang="en-IN" sz="1800" b="1" dirty="0">
                 <a:latin typeface="Barlow" panose="00000500000000000000" pitchFamily="2" charset="0"/>
               </a:rPr>
               <a:t>Monitoring:</a:t>
             </a:r>
             <a:r>
-              <a:rPr lang="en-IN" sz="2400" dirty="0">
+              <a:rPr lang="en-IN" sz="1800" dirty="0">
                 <a:latin typeface="Barlow" panose="00000500000000000000" pitchFamily="2" charset="0"/>
               </a:rPr>
               <a:t> Weights &amp; Biases</a:t>
             </a:r>
             <a:r>
-              <a:rPr lang="en-IN" sz="2400" b="1" baseline="30000" dirty="0">
+              <a:rPr lang="en-IN" sz="1800" b="1" baseline="30000" dirty="0">
                 <a:solidFill>
                   <a:srgbClr val="FF0000"/>
                 </a:solidFill>
@@ -10633,7 +10633,7 @@
               </a:rPr>
               <a:t>[11]</a:t>
             </a:r>
-            <a:endParaRPr lang="en-IN" sz="2400" b="1" baseline="30000" dirty="0">
+            <a:endParaRPr lang="en-IN" sz="1800" b="1" baseline="30000" dirty="0">
               <a:solidFill>
                 <a:srgbClr val="FF0000"/>
               </a:solidFill>
@@ -10643,13 +10643,13 @@
           <a:p>
             <a:pPr lvl="1"/>
             <a:r>
-              <a:rPr lang="en-IN" sz="2400" b="1" dirty="0">
+              <a:rPr lang="en-IN" sz="1800" b="1" dirty="0">
                 <a:latin typeface="Barlow" panose="00000500000000000000" pitchFamily="2" charset="0"/>
               </a:rPr>
               <a:t>Training:</a:t>
             </a:r>
             <a:r>
-              <a:rPr lang="en-IN" sz="2400" dirty="0">
+              <a:rPr lang="en-IN" sz="1800" dirty="0">
                 <a:latin typeface="Barlow" panose="00000500000000000000" pitchFamily="2" charset="0"/>
               </a:rPr>
               <a:t> 3 epochs per configuration</a:t>
@@ -10657,7 +10657,7 @@
           </a:p>
           <a:p>
             <a:r>
-              <a:rPr lang="en-IN" sz="3100" b="1" dirty="0">
+              <a:rPr lang="en-IN" b="1" dirty="0">
                 <a:solidFill>
                   <a:schemeClr val="tx2"/>
                 </a:solidFill>
@@ -10669,13 +10669,13 @@
           <a:p>
             <a:pPr lvl="1"/>
             <a:r>
-              <a:rPr lang="en-IN" sz="2400" b="1" dirty="0">
+              <a:rPr lang="en-IN" sz="1800" b="1" dirty="0">
                 <a:latin typeface="Barlow" panose="00000500000000000000" pitchFamily="2" charset="0"/>
               </a:rPr>
               <a:t>Total Configurations:</a:t>
             </a:r>
             <a:r>
-              <a:rPr lang="en-IN" sz="2400" dirty="0">
+              <a:rPr lang="en-IN" sz="1800" dirty="0">
                 <a:latin typeface="Barlow" panose="00000500000000000000" pitchFamily="2" charset="0"/>
               </a:rPr>
               <a:t> 6 (3 models × 2 optimizers)</a:t>
@@ -10684,34 +10684,34 @@
           <a:p>
             <a:pPr lvl="1"/>
             <a:r>
-              <a:rPr lang="en-IN" sz="2400" b="1" dirty="0">
+              <a:rPr lang="en-IN" sz="1800" b="1" dirty="0">
                 <a:latin typeface="Barlow" panose="00000500000000000000" pitchFamily="2" charset="0"/>
               </a:rPr>
               <a:t>Controlled Variables:</a:t>
             </a:r>
             <a:r>
-              <a:rPr lang="en-IN" sz="2400" dirty="0">
+              <a:rPr lang="en-IN" sz="1800" dirty="0">
                 <a:latin typeface="Barlow" panose="00000500000000000000" pitchFamily="2" charset="0"/>
               </a:rPr>
-              <a:t> Batch size, training steps, evaluation frequency</a:t>
+              <a:t> Batch size = 64, training steps, evaluation frequency</a:t>
             </a:r>
           </a:p>
           <a:p>
             <a:pPr lvl="1"/>
             <a:r>
-              <a:rPr lang="en-IN" sz="2400" b="1" dirty="0">
+              <a:rPr lang="en-IN" sz="1800" b="1" dirty="0">
                 <a:latin typeface="Barlow" panose="00000500000000000000" pitchFamily="2" charset="0"/>
               </a:rPr>
               <a:t>Variable Parameters:</a:t>
             </a:r>
             <a:r>
-              <a:rPr lang="en-IN" sz="2400" dirty="0">
+              <a:rPr lang="en-IN" sz="1800" dirty="0">
                 <a:latin typeface="Barlow" panose="00000500000000000000" pitchFamily="2" charset="0"/>
               </a:rPr>
               <a:t> Learning rates (2e-5 standard, 2e-6 for ModernBERT</a:t>
             </a:r>
             <a:r>
-              <a:rPr lang="en-IN" sz="2400" baseline="30000" dirty="0">
+              <a:rPr lang="en-IN" sz="1800" baseline="30000" dirty="0">
                 <a:solidFill>
                   <a:srgbClr val="FF0000"/>
                 </a:solidFill>
@@ -10727,13 +10727,13 @@
               <a:t>[6]</a:t>
             </a:r>
             <a:r>
-              <a:rPr lang="en-IN" sz="2400" dirty="0">
+              <a:rPr lang="en-IN" sz="1800" dirty="0">
                 <a:latin typeface="Barlow" panose="00000500000000000000" pitchFamily="2" charset="0"/>
               </a:rPr>
               <a:t>+Lion</a:t>
             </a:r>
             <a:r>
-              <a:rPr lang="en-IN" sz="2400" baseline="30000" dirty="0">
+              <a:rPr lang="en-IN" sz="1800" baseline="30000" dirty="0">
                 <a:solidFill>
                   <a:srgbClr val="FF0000"/>
                 </a:solidFill>
@@ -10749,11 +10749,48 @@
               <a:t>[4]</a:t>
             </a:r>
             <a:r>
-              <a:rPr lang="en-IN" sz="2400" dirty="0">
+              <a:rPr lang="en-IN" sz="1800" dirty="0">
                 <a:latin typeface="Barlow" panose="00000500000000000000" pitchFamily="2" charset="0"/>
               </a:rPr>
               <a:t>)</a:t>
             </a:r>
+          </a:p>
+          <a:p>
+            <a:pPr lvl="1"/>
+            <a:r>
+              <a:rPr lang="en-IN" sz="1800" b="1" dirty="0">
+                <a:latin typeface="Barlow" panose="00000500000000000000" pitchFamily="2" charset="0"/>
+              </a:rPr>
+              <a:t>Loss Function: </a:t>
+            </a:r>
+            <a:r>
+              <a:rPr lang="en-IN" sz="1800" dirty="0">
+                <a:latin typeface="Barlow" panose="00000500000000000000" pitchFamily="2" charset="0"/>
+              </a:rPr>
+              <a:t>Binary Cross Entropy</a:t>
+            </a:r>
+            <a:r>
+              <a:rPr lang="en-IN" sz="1800" b="1" baseline="30000" dirty="0">
+                <a:solidFill>
+                  <a:srgbClr val="FF0000"/>
+                </a:solidFill>
+                <a:latin typeface="Barlow" panose="00000500000000000000" pitchFamily="2" charset="0"/>
+                <a:hlinkClick r:id="rId2" action="ppaction://hlinksldjump">
+                  <a:extLst>
+                    <a:ext uri="{A12FA001-AC4F-418D-AE19-62706E023703}">
+                      <ahyp:hlinkClr xmlns:ahyp="http://schemas.microsoft.com/office/drawing/2018/hyperlinkcolor" val="tx"/>
+                    </a:ext>
+                  </a:extLst>
+                </a:hlinkClick>
+              </a:rPr>
+              <a:t>[17]</a:t>
+            </a:r>
+            <a:endParaRPr lang="en-IN" sz="1800" b="1" baseline="30000" dirty="0">
+              <a:solidFill>
+                <a:srgbClr val="FF0000"/>
+              </a:solidFill>
+              <a:latin typeface="Barlow" panose="00000500000000000000" pitchFamily="2" charset="0"/>
+            </a:endParaRPr>
           </a:p>
         </p:txBody>
       </p:sp>
@@ -20295,13 +20332,13 @@
         </p:nvSpPr>
         <p:spPr>
           <a:xfrm>
-            <a:off x="384726" y="1106905"/>
-            <a:ext cx="11080236" cy="5329990"/>
+            <a:off x="384726" y="866582"/>
+            <a:ext cx="11080236" cy="5991418"/>
           </a:xfrm>
         </p:spPr>
         <p:txBody>
           <a:bodyPr>
-            <a:normAutofit lnSpcReduction="10000"/>
+            <a:normAutofit/>
           </a:bodyPr>
           <a:lstStyle/>
           <a:p>
@@ -20530,8 +20567,8 @@
         </p:nvSpPr>
         <p:spPr>
           <a:xfrm>
-            <a:off x="384726" y="1106905"/>
-            <a:ext cx="11080236" cy="5329990"/>
+            <a:off x="384726" y="1014046"/>
+            <a:ext cx="11080236" cy="5843954"/>
           </a:xfrm>
         </p:spPr>
         <p:txBody>
@@ -20644,9 +20681,42 @@
               </a:rPr>
               <a:t>Y. Wang et al., “A theoretical analysis of NDCG type ranking measures,” arXiv preprint arXiv:1304.6480, Apr. 2013.</a:t>
             </a:r>
-            <a:endParaRPr lang="en-IN" sz="2000" dirty="0">
-              <a:latin typeface="Barlow" panose="00000500000000000000" pitchFamily="2" charset="0"/>
-            </a:endParaRPr>
+          </a:p>
+          <a:p>
+            <a:pPr marL="457200" indent="-457200">
+              <a:buFont typeface="+mj-lt"/>
+              <a:buAutoNum type="arabicPeriod" startAt="9"/>
+            </a:pPr>
+            <a:r>
+              <a:rPr lang="en-IN" sz="2000" dirty="0">
+                <a:latin typeface="Barlow" panose="00000500000000000000" pitchFamily="2" charset="0"/>
+              </a:rPr>
+              <a:t>Ruby, Usha &amp; </a:t>
+            </a:r>
+            <a:r>
+              <a:rPr lang="en-IN" sz="2000" dirty="0" err="1">
+                <a:latin typeface="Barlow" panose="00000500000000000000" pitchFamily="2" charset="0"/>
+              </a:rPr>
+              <a:t>Yendapalli</a:t>
+            </a:r>
+            <a:r>
+              <a:rPr lang="en-IN" sz="2000" dirty="0">
+                <a:latin typeface="Barlow" panose="00000500000000000000" pitchFamily="2" charset="0"/>
+              </a:rPr>
+              <a:t>, Vamsidhar. (2020). Binary cross entropy with deep learning technique for Image classification. International Journal of Advanced Trends in Computer Science and Engineering. 9. 10.30534/</a:t>
+            </a:r>
+            <a:r>
+              <a:rPr lang="en-IN" sz="2000" dirty="0" err="1">
+                <a:latin typeface="Barlow" panose="00000500000000000000" pitchFamily="2" charset="0"/>
+              </a:rPr>
+              <a:t>ijatcse</a:t>
+            </a:r>
+            <a:r>
+              <a:rPr lang="en-IN" sz="2000" dirty="0">
+                <a:latin typeface="Barlow" panose="00000500000000000000" pitchFamily="2" charset="0"/>
+              </a:rPr>
+              <a:t>/2020/175942020. </a:t>
+            </a:r>
           </a:p>
         </p:txBody>
       </p:sp>
@@ -23459,15 +23529,6 @@
 </file>
 
 <file path=customXml/item1.xml><?xml version="1.0" encoding="utf-8"?>
-<?mso-contentType ?>
-<FormTemplates xmlns="http://schemas.microsoft.com/sharepoint/v3/contenttype/forms">
-  <Display>DocumentLibraryForm</Display>
-  <Edit>DocumentLibraryForm</Edit>
-  <New>DocumentLibraryForm</New>
-</FormTemplates>
-</file>
-
-<file path=customXml/item2.xml><?xml version="1.0" encoding="utf-8"?>
 <p:properties xmlns:p="http://schemas.microsoft.com/office/2006/metadata/properties" xmlns:xsi="http://www.w3.org/2001/XMLSchema-instance" xmlns:pc="http://schemas.microsoft.com/office/infopath/2007/PartnerControls">
   <documentManagement>
     <_ip_UnifiedCompliancePolicyUIAction xmlns="http://schemas.microsoft.com/sharepoint/v3" xsi:nil="true"/>
@@ -23485,6 +23546,15 @@
     <MediaServiceKeyPoints xmlns="71af3243-3dd4-4a8d-8c0d-dd76da1f02a5" xsi:nil="true"/>
   </documentManagement>
 </p:properties>
+</file>
+
+<file path=customXml/item2.xml><?xml version="1.0" encoding="utf-8"?>
+<?mso-contentType ?>
+<FormTemplates xmlns="http://schemas.microsoft.com/sharepoint/v3/contenttype/forms">
+  <Display>DocumentLibraryForm</Display>
+  <Edit>DocumentLibraryForm</Edit>
+  <New>DocumentLibraryForm</New>
+</FormTemplates>
 </file>
 
 <file path=customXml/item3.xml><?xml version="1.0" encoding="utf-8"?>
@@ -23776,14 +23846,6 @@
 </file>
 
 <file path=customXml/itemProps1.xml><?xml version="1.0" encoding="utf-8"?>
-<ds:datastoreItem xmlns:ds="http://schemas.openxmlformats.org/officeDocument/2006/customXml" ds:itemID="{019B3EA6-E2E1-4B68-B700-9432F9FC79DA}">
-  <ds:schemaRefs>
-    <ds:schemaRef ds:uri="http://schemas.microsoft.com/sharepoint/v3/contenttype/forms"/>
-  </ds:schemaRefs>
-</ds:datastoreItem>
-</file>
-
-<file path=customXml/itemProps2.xml><?xml version="1.0" encoding="utf-8"?>
 <ds:datastoreItem xmlns:ds="http://schemas.openxmlformats.org/officeDocument/2006/customXml" ds:itemID="{BC8413E5-0484-489B-B293-D8720B6027F2}">
   <ds:schemaRefs>
     <ds:schemaRef ds:uri="http://schemas.openxmlformats.org/package/2006/metadata/core-properties"/>
@@ -23798,6 +23860,14 @@
     <ds:schemaRef ds:uri="16c05727-aa75-4e4a-9b5f-8a80a1165891"/>
     <ds:schemaRef ds:uri="http://www.w3.org/XML/1998/namespace"/>
     <ds:schemaRef ds:uri="http://purl.org/dc/terms/"/>
+  </ds:schemaRefs>
+</ds:datastoreItem>
+</file>
+
+<file path=customXml/itemProps2.xml><?xml version="1.0" encoding="utf-8"?>
+<ds:datastoreItem xmlns:ds="http://schemas.openxmlformats.org/officeDocument/2006/customXml" ds:itemID="{019B3EA6-E2E1-4B68-B700-9432F9FC79DA}">
+  <ds:schemaRefs>
+    <ds:schemaRef ds:uri="http://schemas.microsoft.com/sharepoint/v3/contenttype/forms"/>
   </ds:schemaRefs>
 </ds:datastoreItem>
 </file>
